--- a/Docs/PRESENTATION/2. 최종/09285_백준현_AI_Master_최종발표자료_v12.pptx
+++ b/Docs/PRESENTATION/2. 최종/09285_백준현_AI_Master_최종발표자료_v12.pptx
@@ -2,16 +2,16 @@
 <file path=ppt/presentation.xml><?xml version="1.0" encoding="utf-8"?>
 <p:presentation xmlns:p="http://schemas.openxmlformats.org/presentationml/2006/main">
   <p:sldMasterIdLst>
-    <p:sldMasterId xmlns:r="http://schemas.openxmlformats.org/officeDocument/2006/relationships" id="2147483648" r:id="R1f5bb25cee584c8a"/>
+    <p:sldMasterId xmlns:r="http://schemas.openxmlformats.org/officeDocument/2006/relationships" id="2147483648" r:id="R6c891491c8e04eb4"/>
   </p:sldMasterIdLst>
   <p:notesMasterIdLst>
-    <p:notesMasterId xmlns:r="http://schemas.openxmlformats.org/officeDocument/2006/relationships" r:id="R90dbc0acb0e04825"/>
+    <p:notesMasterId xmlns:r="http://schemas.openxmlformats.org/officeDocument/2006/relationships" r:id="R903e2cdfe67945be"/>
   </p:notesMasterIdLst>
   <p:sldIdLst>
-    <p:sldId xmlns:r="http://schemas.openxmlformats.org/officeDocument/2006/relationships" id="256" r:id="Rb89bdfe6513247c8"/>
-    <p:sldId xmlns:r="http://schemas.openxmlformats.org/officeDocument/2006/relationships" id="257" r:id="R62459e1783b44873"/>
-    <p:sldId xmlns:r="http://schemas.openxmlformats.org/officeDocument/2006/relationships" id="258" r:id="R2076fe158b8542de"/>
-    <p:sldId xmlns:r="http://schemas.openxmlformats.org/officeDocument/2006/relationships" id="259" r:id="R2b2da4c70fec4718"/>
+    <p:sldId xmlns:r="http://schemas.openxmlformats.org/officeDocument/2006/relationships" id="256" r:id="R91dd1c551ab94144"/>
+    <p:sldId xmlns:r="http://schemas.openxmlformats.org/officeDocument/2006/relationships" id="257" r:id="Rd4e72466c455458e"/>
+    <p:sldId xmlns:r="http://schemas.openxmlformats.org/officeDocument/2006/relationships" id="258" r:id="R000df1ffa86644c2"/>
+    <p:sldId xmlns:r="http://schemas.openxmlformats.org/officeDocument/2006/relationships" id="259" r:id="R95d09c6520df4eea"/>
   </p:sldIdLst>
   <p:sldSz cx="12192000" cy="6858000"/>
   <p:notesSz cx="6858000" cy="9144000"/>
@@ -953,7 +953,7 @@
   </p:cSld>
   <p:clrMap bg1="lt1" tx1="dk1" bg2="lt2" tx2="dk2" accent1="accent1" accent2="accent2" accent3="accent3" accent4="accent4" accent5="accent5" accent6="accent6" hlink="hlink" folHlink="folHlink"/>
   <p:sldLayoutIdLst>
-    <p:sldLayoutId xmlns:r="http://schemas.openxmlformats.org/officeDocument/2006/relationships" id="2147483649" r:id="Rd3dc6380a1304245"/>
+    <p:sldLayoutId xmlns:r="http://schemas.openxmlformats.org/officeDocument/2006/relationships" id="2147483649" r:id="Rd10503dd10ca4247"/>
   </p:sldLayoutIdLst>
   <p:txStyles>
     <p:titleStyle>
@@ -1504,7 +1504,7 @@
           <p:cNvPr id="9" name="">
             <a:extLst xmlns:a="http://schemas.openxmlformats.org/drawingml/2006/main">
               <a:ext uri="{FF2B5EF4-FFF2-40B4-BE49-F238E27FC236}">
-                <a16:creationId xmlns:a16="http://schemas.microsoft.com/office/drawing/2014/main" id="{F4982A81-33EB-480F-9B8C-2933D11283A7}"/>
+                <a16:creationId xmlns:a16="http://schemas.microsoft.com/office/drawing/2014/main" id="{E229C907-B832-462A-ADEF-16B1FBA6EF52}"/>
               </a:ext>
             </a:extLst>
           </p:cNvPr>
@@ -1534,7 +1534,7 @@
           <p:cNvPr id="2" name="">
             <a:extLst xmlns:a="http://schemas.openxmlformats.org/drawingml/2006/main">
               <a:ext uri="{FF2B5EF4-FFF2-40B4-BE49-F238E27FC236}">
-                <a16:creationId xmlns:a16="http://schemas.microsoft.com/office/drawing/2014/main" id="{1257D798-E48D-4F6D-A0A1-15137FDC9E06}"/>
+                <a16:creationId xmlns:a16="http://schemas.microsoft.com/office/drawing/2014/main" id="{6604E904-FA8A-45F6-A658-048F12AF8631}"/>
               </a:ext>
             </a:extLst>
           </p:cNvPr>
@@ -1591,7 +1591,7 @@
           <p:cNvPr id="3" name="">
             <a:extLst xmlns:a="http://schemas.openxmlformats.org/drawingml/2006/main">
               <a:ext uri="{FF2B5EF4-FFF2-40B4-BE49-F238E27FC236}">
-                <a16:creationId xmlns:a16="http://schemas.microsoft.com/office/drawing/2014/main" id="{51648273-0D8C-4A01-8D15-31E9CB4808F5}"/>
+                <a16:creationId xmlns:a16="http://schemas.microsoft.com/office/drawing/2014/main" id="{ADDE149B-BC1A-43E8-9404-446F69AEF811}"/>
               </a:ext>
             </a:extLst>
           </p:cNvPr>
@@ -1648,7 +1648,7 @@
           <p:cNvPr id="4" name="">
             <a:extLst xmlns:a="http://schemas.openxmlformats.org/drawingml/2006/main">
               <a:ext uri="{FF2B5EF4-FFF2-40B4-BE49-F238E27FC236}">
-                <a16:creationId xmlns:a16="http://schemas.microsoft.com/office/drawing/2014/main" id="{0BFEE76A-1445-4D5F-81F7-1FCB66B755D3}"/>
+                <a16:creationId xmlns:a16="http://schemas.microsoft.com/office/drawing/2014/main" id="{29CC8B87-BE09-460A-899E-094C60B18C2A}"/>
               </a:ext>
             </a:extLst>
           </p:cNvPr>
@@ -1705,7 +1705,7 @@
           <p:cNvPr id="5" name="">
             <a:extLst xmlns:a="http://schemas.openxmlformats.org/drawingml/2006/main">
               <a:ext uri="{FF2B5EF4-FFF2-40B4-BE49-F238E27FC236}">
-                <a16:creationId xmlns:a16="http://schemas.microsoft.com/office/drawing/2014/main" id="{549FEF1D-81E2-4A8D-A21E-678A9434B6D8}"/>
+                <a16:creationId xmlns:a16="http://schemas.microsoft.com/office/drawing/2014/main" id="{3A3CAA68-737A-4A22-BF47-4222681CC103}"/>
               </a:ext>
             </a:extLst>
           </p:cNvPr>
@@ -1735,7 +1735,7 @@
           <p:cNvPr id="6" name="">
             <a:extLst xmlns:a="http://schemas.openxmlformats.org/drawingml/2006/main">
               <a:ext uri="{FF2B5EF4-FFF2-40B4-BE49-F238E27FC236}">
-                <a16:creationId xmlns:a16="http://schemas.microsoft.com/office/drawing/2014/main" id="{0D1973D4-6DEF-4BE7-B175-ADF8486466A0}"/>
+                <a16:creationId xmlns:a16="http://schemas.microsoft.com/office/drawing/2014/main" id="{77536DDB-F09D-4F90-822E-ADED86EC5D2C}"/>
               </a:ext>
             </a:extLst>
           </p:cNvPr>
@@ -1792,7 +1792,7 @@
           <p:cNvPr id="7" name="">
             <a:extLst xmlns:a="http://schemas.openxmlformats.org/drawingml/2006/main">
               <a:ext uri="{FF2B5EF4-FFF2-40B4-BE49-F238E27FC236}">
-                <a16:creationId xmlns:a16="http://schemas.microsoft.com/office/drawing/2014/main" id="{B42FCDDD-D1A2-4273-99FD-9637D00FCBF3}"/>
+                <a16:creationId xmlns:a16="http://schemas.microsoft.com/office/drawing/2014/main" id="{C5D8883F-DF63-49AC-8EAB-66A1CD6F9285}"/>
               </a:ext>
             </a:extLst>
           </p:cNvPr>
@@ -1849,7 +1849,7 @@
           <p:cNvPr id="8" name="">
             <a:extLst xmlns:a="http://schemas.openxmlformats.org/drawingml/2006/main">
               <a:ext uri="{FF2B5EF4-FFF2-40B4-BE49-F238E27FC236}">
-                <a16:creationId xmlns:a16="http://schemas.microsoft.com/office/drawing/2014/main" id="{3E54C61A-6816-432C-AA92-F607D3E14FDD}"/>
+                <a16:creationId xmlns:a16="http://schemas.microsoft.com/office/drawing/2014/main" id="{93891492-19A6-42D4-AEEE-38BDD1C42E5C}"/>
               </a:ext>
             </a:extLst>
           </p:cNvPr>
@@ -1904,7 +1904,7 @@
     </p:spTree>
     <p:extLst>
       <p:ext uri="{BB962C8B-B14F-4D97-AF65-F5344CB8AC3E}">
-        <p14:creationId xmlns:p14="http://schemas.microsoft.com/office/powerpoint/2010/main" val="418444902"/>
+        <p14:creationId xmlns:p14="http://schemas.microsoft.com/office/powerpoint/2010/main" val="450220570"/>
       </p:ext>
     </p:extLst>
   </p:cSld>
@@ -1935,7 +1935,7 @@
           <p:cNvPr id="46" name="">
             <a:extLst xmlns:a="http://schemas.openxmlformats.org/drawingml/2006/main">
               <a:ext uri="{FF2B5EF4-FFF2-40B4-BE49-F238E27FC236}">
-                <a16:creationId xmlns:a16="http://schemas.microsoft.com/office/drawing/2014/main" id="{7A2250E3-5B7B-4E72-A8F9-DAF82A90E3B7}"/>
+                <a16:creationId xmlns:a16="http://schemas.microsoft.com/office/drawing/2014/main" id="{63B2A801-0B81-4DFF-AF6B-8718B70A4CCB}"/>
               </a:ext>
             </a:extLst>
           </p:cNvPr>
@@ -1965,7 +1965,7 @@
           <p:cNvPr id="2" name="">
             <a:extLst xmlns:a="http://schemas.openxmlformats.org/drawingml/2006/main">
               <a:ext uri="{FF2B5EF4-FFF2-40B4-BE49-F238E27FC236}">
-                <a16:creationId xmlns:a16="http://schemas.microsoft.com/office/drawing/2014/main" id="{366BEAC7-4364-422F-ADD5-36B3AF6E84BA}"/>
+                <a16:creationId xmlns:a16="http://schemas.microsoft.com/office/drawing/2014/main" id="{68E149FB-72E0-474E-B7BE-2635185C1CFC}"/>
               </a:ext>
             </a:extLst>
           </p:cNvPr>
@@ -2022,7 +2022,7 @@
           <p:cNvPr id="3" name="">
             <a:extLst xmlns:a="http://schemas.openxmlformats.org/drawingml/2006/main">
               <a:ext uri="{FF2B5EF4-FFF2-40B4-BE49-F238E27FC236}">
-                <a16:creationId xmlns:a16="http://schemas.microsoft.com/office/drawing/2014/main" id="{8E96C052-8044-41DC-A9AF-35A17C899ABA}"/>
+                <a16:creationId xmlns:a16="http://schemas.microsoft.com/office/drawing/2014/main" id="{F640BAC5-98AE-4BE9-A9FD-CE633CFDD424}"/>
               </a:ext>
             </a:extLst>
           </p:cNvPr>
@@ -2052,7 +2052,7 @@
           <p:cNvPr id="4" name="">
             <a:extLst xmlns:a="http://schemas.openxmlformats.org/drawingml/2006/main">
               <a:ext uri="{FF2B5EF4-FFF2-40B4-BE49-F238E27FC236}">
-                <a16:creationId xmlns:a16="http://schemas.microsoft.com/office/drawing/2014/main" id="{0A344D52-13B2-4E48-B717-B9AE423F4B89}"/>
+                <a16:creationId xmlns:a16="http://schemas.microsoft.com/office/drawing/2014/main" id="{F560E0DF-C831-4B6B-B407-574505BAE29F}"/>
               </a:ext>
             </a:extLst>
           </p:cNvPr>
@@ -2109,7 +2109,7 @@
           <p:cNvPr id="5" name="">
             <a:extLst xmlns:a="http://schemas.openxmlformats.org/drawingml/2006/main">
               <a:ext uri="{FF2B5EF4-FFF2-40B4-BE49-F238E27FC236}">
-                <a16:creationId xmlns:a16="http://schemas.microsoft.com/office/drawing/2014/main" id="{3E5E0E0D-10CA-478C-8C6E-A0BAC69A08A2}"/>
+                <a16:creationId xmlns:a16="http://schemas.microsoft.com/office/drawing/2014/main" id="{1B7519EA-98D2-4441-A3A2-DDCE0383D46D}"/>
               </a:ext>
             </a:extLst>
           </p:cNvPr>
@@ -2166,7 +2166,7 @@
           <p:cNvPr id="6" name="">
             <a:extLst xmlns:a="http://schemas.openxmlformats.org/drawingml/2006/main">
               <a:ext uri="{FF2B5EF4-FFF2-40B4-BE49-F238E27FC236}">
-                <a16:creationId xmlns:a16="http://schemas.microsoft.com/office/drawing/2014/main" id="{7F2D4896-D96C-4CE3-B3C9-4D2CEED51F90}"/>
+                <a16:creationId xmlns:a16="http://schemas.microsoft.com/office/drawing/2014/main" id="{11E61FF9-C3B2-4BDE-B2A0-C8DEB6C71C0A}"/>
               </a:ext>
             </a:extLst>
           </p:cNvPr>
@@ -2223,7 +2223,7 @@
           <p:cNvPr id="7" name="">
             <a:extLst xmlns:a="http://schemas.openxmlformats.org/drawingml/2006/main">
               <a:ext uri="{FF2B5EF4-FFF2-40B4-BE49-F238E27FC236}">
-                <a16:creationId xmlns:a16="http://schemas.microsoft.com/office/drawing/2014/main" id="{119E63A5-6495-4D59-821D-55AE74E653D2}"/>
+                <a16:creationId xmlns:a16="http://schemas.microsoft.com/office/drawing/2014/main" id="{A1795976-9A5A-4967-B56F-2861EABCB2BD}"/>
               </a:ext>
             </a:extLst>
           </p:cNvPr>
@@ -2257,7 +2257,7 @@
           <p:cNvPr id="8" name="">
             <a:extLst xmlns:a="http://schemas.openxmlformats.org/drawingml/2006/main">
               <a:ext uri="{FF2B5EF4-FFF2-40B4-BE49-F238E27FC236}">
-                <a16:creationId xmlns:a16="http://schemas.microsoft.com/office/drawing/2014/main" id="{5C189DA6-D066-478C-BB00-11F88B27B157}"/>
+                <a16:creationId xmlns:a16="http://schemas.microsoft.com/office/drawing/2014/main" id="{1183016A-F3F3-48C7-A94D-C5DFE84F3333}"/>
               </a:ext>
             </a:extLst>
           </p:cNvPr>
@@ -2289,7 +2289,7 @@
           <p:cNvPr id="9" name="">
             <a:extLst xmlns:a="http://schemas.openxmlformats.org/drawingml/2006/main">
               <a:ext uri="{FF2B5EF4-FFF2-40B4-BE49-F238E27FC236}">
-                <a16:creationId xmlns:a16="http://schemas.microsoft.com/office/drawing/2014/main" id="{C59AA0F9-A69A-45D4-A066-E340ED905161}"/>
+                <a16:creationId xmlns:a16="http://schemas.microsoft.com/office/drawing/2014/main" id="{05B21BAB-4BBF-4634-838F-B50D410427B3}"/>
               </a:ext>
             </a:extLst>
           </p:cNvPr>
@@ -2346,7 +2346,7 @@
           <p:cNvPr id="10" name="">
             <a:extLst xmlns:a="http://schemas.openxmlformats.org/drawingml/2006/main">
               <a:ext uri="{FF2B5EF4-FFF2-40B4-BE49-F238E27FC236}">
-                <a16:creationId xmlns:a16="http://schemas.microsoft.com/office/drawing/2014/main" id="{654FCC31-C032-4FD3-B68C-38770CEEAA76}"/>
+                <a16:creationId xmlns:a16="http://schemas.microsoft.com/office/drawing/2014/main" id="{9F1BCDB5-85FD-4206-8A21-74D0641549B7}"/>
               </a:ext>
             </a:extLst>
           </p:cNvPr>
@@ -2426,7 +2426,7 @@
           <p:cNvPr id="11" name="">
             <a:extLst xmlns:a="http://schemas.openxmlformats.org/drawingml/2006/main">
               <a:ext uri="{FF2B5EF4-FFF2-40B4-BE49-F238E27FC236}">
-                <a16:creationId xmlns:a16="http://schemas.microsoft.com/office/drawing/2014/main" id="{34973555-052B-4A64-B8CF-02B356DE8D44}"/>
+                <a16:creationId xmlns:a16="http://schemas.microsoft.com/office/drawing/2014/main" id="{098AEBD2-8227-4D6F-A9AA-F0EA5661A80A}"/>
               </a:ext>
             </a:extLst>
           </p:cNvPr>
@@ -2456,7 +2456,7 @@
           <p:cNvPr id="12" name="">
             <a:extLst xmlns:a="http://schemas.openxmlformats.org/drawingml/2006/main">
               <a:ext uri="{FF2B5EF4-FFF2-40B4-BE49-F238E27FC236}">
-                <a16:creationId xmlns:a16="http://schemas.microsoft.com/office/drawing/2014/main" id="{EC924D7F-EE92-4AAB-89F8-4CF587C75B59}"/>
+                <a16:creationId xmlns:a16="http://schemas.microsoft.com/office/drawing/2014/main" id="{13090EAC-3743-4280-98E9-B907C51AE191}"/>
               </a:ext>
             </a:extLst>
           </p:cNvPr>
@@ -2490,7 +2490,7 @@
           <p:cNvPr id="13" name="">
             <a:extLst xmlns:a="http://schemas.openxmlformats.org/drawingml/2006/main">
               <a:ext uri="{FF2B5EF4-FFF2-40B4-BE49-F238E27FC236}">
-                <a16:creationId xmlns:a16="http://schemas.microsoft.com/office/drawing/2014/main" id="{59BB35EF-866F-4F20-9879-7312600DE712}"/>
+                <a16:creationId xmlns:a16="http://schemas.microsoft.com/office/drawing/2014/main" id="{C2EE831F-F502-4B56-BA1B-3AEB09FC9072}"/>
               </a:ext>
             </a:extLst>
           </p:cNvPr>
@@ -2522,7 +2522,7 @@
           <p:cNvPr id="14" name="">
             <a:extLst xmlns:a="http://schemas.openxmlformats.org/drawingml/2006/main">
               <a:ext uri="{FF2B5EF4-FFF2-40B4-BE49-F238E27FC236}">
-                <a16:creationId xmlns:a16="http://schemas.microsoft.com/office/drawing/2014/main" id="{84281AE3-D3D8-45ED-8987-D77CEC225ACF}"/>
+                <a16:creationId xmlns:a16="http://schemas.microsoft.com/office/drawing/2014/main" id="{85A24E75-C3DE-49E0-B59B-19C7848E6340}"/>
               </a:ext>
             </a:extLst>
           </p:cNvPr>
@@ -2579,7 +2579,7 @@
           <p:cNvPr id="15" name="">
             <a:extLst xmlns:a="http://schemas.openxmlformats.org/drawingml/2006/main">
               <a:ext uri="{FF2B5EF4-FFF2-40B4-BE49-F238E27FC236}">
-                <a16:creationId xmlns:a16="http://schemas.microsoft.com/office/drawing/2014/main" id="{CBB55C41-987B-439C-819F-02C2D207C999}"/>
+                <a16:creationId xmlns:a16="http://schemas.microsoft.com/office/drawing/2014/main" id="{4E5FF2E8-A56E-4C9E-BAD8-96B8CBF3DA35}"/>
               </a:ext>
             </a:extLst>
           </p:cNvPr>
@@ -2659,7 +2659,7 @@
           <p:cNvPr id="16" name="">
             <a:extLst xmlns:a="http://schemas.openxmlformats.org/drawingml/2006/main">
               <a:ext uri="{FF2B5EF4-FFF2-40B4-BE49-F238E27FC236}">
-                <a16:creationId xmlns:a16="http://schemas.microsoft.com/office/drawing/2014/main" id="{466567CB-9300-4524-B565-9DF68F8006FB}"/>
+                <a16:creationId xmlns:a16="http://schemas.microsoft.com/office/drawing/2014/main" id="{F7191E1C-A27A-40FB-A4E3-E9772D13A7B7}"/>
               </a:ext>
             </a:extLst>
           </p:cNvPr>
@@ -2689,7 +2689,7 @@
           <p:cNvPr id="17" name="">
             <a:extLst xmlns:a="http://schemas.openxmlformats.org/drawingml/2006/main">
               <a:ext uri="{FF2B5EF4-FFF2-40B4-BE49-F238E27FC236}">
-                <a16:creationId xmlns:a16="http://schemas.microsoft.com/office/drawing/2014/main" id="{B41DE8FA-D828-47F0-A312-B4418F0E705B}"/>
+                <a16:creationId xmlns:a16="http://schemas.microsoft.com/office/drawing/2014/main" id="{B062FACD-F7FE-4134-B4C1-957B084E4A44}"/>
               </a:ext>
             </a:extLst>
           </p:cNvPr>
@@ -2723,7 +2723,7 @@
           <p:cNvPr id="18" name="">
             <a:extLst xmlns:a="http://schemas.openxmlformats.org/drawingml/2006/main">
               <a:ext uri="{FF2B5EF4-FFF2-40B4-BE49-F238E27FC236}">
-                <a16:creationId xmlns:a16="http://schemas.microsoft.com/office/drawing/2014/main" id="{26E8B4DB-E764-4406-8553-3EF19D995CDC}"/>
+                <a16:creationId xmlns:a16="http://schemas.microsoft.com/office/drawing/2014/main" id="{AA7F0A32-B632-4415-A1DF-F82567B80E55}"/>
               </a:ext>
             </a:extLst>
           </p:cNvPr>
@@ -2755,7 +2755,7 @@
           <p:cNvPr id="19" name="">
             <a:extLst xmlns:a="http://schemas.openxmlformats.org/drawingml/2006/main">
               <a:ext uri="{FF2B5EF4-FFF2-40B4-BE49-F238E27FC236}">
-                <a16:creationId xmlns:a16="http://schemas.microsoft.com/office/drawing/2014/main" id="{93C2D1E4-2024-4F91-A6BC-E9896397A749}"/>
+                <a16:creationId xmlns:a16="http://schemas.microsoft.com/office/drawing/2014/main" id="{47B081AE-E9BE-428E-A299-E2498EFC6755}"/>
               </a:ext>
             </a:extLst>
           </p:cNvPr>
@@ -2812,7 +2812,7 @@
           <p:cNvPr id="20" name="">
             <a:extLst xmlns:a="http://schemas.openxmlformats.org/drawingml/2006/main">
               <a:ext uri="{FF2B5EF4-FFF2-40B4-BE49-F238E27FC236}">
-                <a16:creationId xmlns:a16="http://schemas.microsoft.com/office/drawing/2014/main" id="{ADB26829-57E5-449B-BBE9-13BDEF8327CA}"/>
+                <a16:creationId xmlns:a16="http://schemas.microsoft.com/office/drawing/2014/main" id="{E9871A4E-5376-4D54-A0C4-B23CAA56D2B2}"/>
               </a:ext>
             </a:extLst>
           </p:cNvPr>
@@ -2892,7 +2892,7 @@
           <p:cNvPr id="21" name="">
             <a:extLst xmlns:a="http://schemas.openxmlformats.org/drawingml/2006/main">
               <a:ext uri="{FF2B5EF4-FFF2-40B4-BE49-F238E27FC236}">
-                <a16:creationId xmlns:a16="http://schemas.microsoft.com/office/drawing/2014/main" id="{2871AE45-4EDD-4625-8DA7-7E47C61018B6}"/>
+                <a16:creationId xmlns:a16="http://schemas.microsoft.com/office/drawing/2014/main" id="{D385C034-4CBB-47DD-9C82-CF11EB1E4C2F}"/>
               </a:ext>
             </a:extLst>
           </p:cNvPr>
@@ -2922,7 +2922,7 @@
           <p:cNvPr id="22" name="">
             <a:extLst xmlns:a="http://schemas.openxmlformats.org/drawingml/2006/main">
               <a:ext uri="{FF2B5EF4-FFF2-40B4-BE49-F238E27FC236}">
-                <a16:creationId xmlns:a16="http://schemas.microsoft.com/office/drawing/2014/main" id="{9C4A2454-FA9A-463B-9928-B699DE6B3B78}"/>
+                <a16:creationId xmlns:a16="http://schemas.microsoft.com/office/drawing/2014/main" id="{455A238C-B75B-47A9-9BE2-ED47593FD7D9}"/>
               </a:ext>
             </a:extLst>
           </p:cNvPr>
@@ -2956,7 +2956,7 @@
           <p:cNvPr id="23" name="">
             <a:extLst xmlns:a="http://schemas.openxmlformats.org/drawingml/2006/main">
               <a:ext uri="{FF2B5EF4-FFF2-40B4-BE49-F238E27FC236}">
-                <a16:creationId xmlns:a16="http://schemas.microsoft.com/office/drawing/2014/main" id="{7061E416-21E8-4E9A-9DAB-CA599792908F}"/>
+                <a16:creationId xmlns:a16="http://schemas.microsoft.com/office/drawing/2014/main" id="{E8BE7A93-4307-4930-9BDE-9596EA55DFA0}"/>
               </a:ext>
             </a:extLst>
           </p:cNvPr>
@@ -2988,7 +2988,7 @@
           <p:cNvPr id="24" name="">
             <a:extLst xmlns:a="http://schemas.openxmlformats.org/drawingml/2006/main">
               <a:ext uri="{FF2B5EF4-FFF2-40B4-BE49-F238E27FC236}">
-                <a16:creationId xmlns:a16="http://schemas.microsoft.com/office/drawing/2014/main" id="{20D5372E-6ECB-42CB-82D9-11E3DA90266E}"/>
+                <a16:creationId xmlns:a16="http://schemas.microsoft.com/office/drawing/2014/main" id="{3FB6096B-DF85-4D83-8E84-7AFEEE2E9871}"/>
               </a:ext>
             </a:extLst>
           </p:cNvPr>
@@ -3045,7 +3045,7 @@
           <p:cNvPr id="25" name="">
             <a:extLst xmlns:a="http://schemas.openxmlformats.org/drawingml/2006/main">
               <a:ext uri="{FF2B5EF4-FFF2-40B4-BE49-F238E27FC236}">
-                <a16:creationId xmlns:a16="http://schemas.microsoft.com/office/drawing/2014/main" id="{35B2F0B8-1B4F-4497-8DBC-6145F6EFF349}"/>
+                <a16:creationId xmlns:a16="http://schemas.microsoft.com/office/drawing/2014/main" id="{F68D3DB7-24A5-47AC-A735-0E4975EFB07D}"/>
               </a:ext>
             </a:extLst>
           </p:cNvPr>
@@ -3125,7 +3125,7 @@
           <p:cNvPr id="26" name="">
             <a:extLst xmlns:a="http://schemas.openxmlformats.org/drawingml/2006/main">
               <a:ext uri="{FF2B5EF4-FFF2-40B4-BE49-F238E27FC236}">
-                <a16:creationId xmlns:a16="http://schemas.microsoft.com/office/drawing/2014/main" id="{A4C6E2BF-0F26-4B09-B1DA-CD4AB75B5C61}"/>
+                <a16:creationId xmlns:a16="http://schemas.microsoft.com/office/drawing/2014/main" id="{E312DF1B-FD2B-4FFB-8C9C-66237C77E225}"/>
               </a:ext>
             </a:extLst>
           </p:cNvPr>
@@ -3155,7 +3155,7 @@
           <p:cNvPr id="27" name="">
             <a:extLst xmlns:a="http://schemas.openxmlformats.org/drawingml/2006/main">
               <a:ext uri="{FF2B5EF4-FFF2-40B4-BE49-F238E27FC236}">
-                <a16:creationId xmlns:a16="http://schemas.microsoft.com/office/drawing/2014/main" id="{DA7942B9-5744-4247-AF6F-5075F112A19A}"/>
+                <a16:creationId xmlns:a16="http://schemas.microsoft.com/office/drawing/2014/main" id="{9AC3365B-D6F4-4878-9B28-4452A39E1669}"/>
               </a:ext>
             </a:extLst>
           </p:cNvPr>
@@ -3189,7 +3189,7 @@
           <p:cNvPr id="28" name="">
             <a:extLst xmlns:a="http://schemas.openxmlformats.org/drawingml/2006/main">
               <a:ext uri="{FF2B5EF4-FFF2-40B4-BE49-F238E27FC236}">
-                <a16:creationId xmlns:a16="http://schemas.microsoft.com/office/drawing/2014/main" id="{7E5EFD9C-C02A-4DEE-B3BA-9B983F36B443}"/>
+                <a16:creationId xmlns:a16="http://schemas.microsoft.com/office/drawing/2014/main" id="{2C44BE54-768C-4753-A0CA-4048D236D5CF}"/>
               </a:ext>
             </a:extLst>
           </p:cNvPr>
@@ -3221,7 +3221,7 @@
           <p:cNvPr id="29" name="">
             <a:extLst xmlns:a="http://schemas.openxmlformats.org/drawingml/2006/main">
               <a:ext uri="{FF2B5EF4-FFF2-40B4-BE49-F238E27FC236}">
-                <a16:creationId xmlns:a16="http://schemas.microsoft.com/office/drawing/2014/main" id="{40829765-7AE7-4FFA-8DAD-B8785C56011C}"/>
+                <a16:creationId xmlns:a16="http://schemas.microsoft.com/office/drawing/2014/main" id="{7BB908B8-B1B9-47DA-85AD-BD6B04766141}"/>
               </a:ext>
             </a:extLst>
           </p:cNvPr>
@@ -3278,7 +3278,7 @@
           <p:cNvPr id="30" name="">
             <a:extLst xmlns:a="http://schemas.openxmlformats.org/drawingml/2006/main">
               <a:ext uri="{FF2B5EF4-FFF2-40B4-BE49-F238E27FC236}">
-                <a16:creationId xmlns:a16="http://schemas.microsoft.com/office/drawing/2014/main" id="{4E72E15B-EB71-44C4-A41B-5CC21F6A2211}"/>
+                <a16:creationId xmlns:a16="http://schemas.microsoft.com/office/drawing/2014/main" id="{CB2EDC32-BCF4-46BC-842F-74E036318EEA}"/>
               </a:ext>
             </a:extLst>
           </p:cNvPr>
@@ -3358,7 +3358,7 @@
           <p:cNvPr id="31" name="">
             <a:extLst xmlns:a="http://schemas.openxmlformats.org/drawingml/2006/main">
               <a:ext uri="{FF2B5EF4-FFF2-40B4-BE49-F238E27FC236}">
-                <a16:creationId xmlns:a16="http://schemas.microsoft.com/office/drawing/2014/main" id="{52544AE9-B3D6-4472-B232-C3542B920B58}"/>
+                <a16:creationId xmlns:a16="http://schemas.microsoft.com/office/drawing/2014/main" id="{759E9D3B-7E25-4086-AE88-563EF3CC813D}"/>
               </a:ext>
             </a:extLst>
           </p:cNvPr>
@@ -3415,7 +3415,7 @@
           <p:cNvPr id="32" name="">
             <a:extLst xmlns:a="http://schemas.openxmlformats.org/drawingml/2006/main">
               <a:ext uri="{FF2B5EF4-FFF2-40B4-BE49-F238E27FC236}">
-                <a16:creationId xmlns:a16="http://schemas.microsoft.com/office/drawing/2014/main" id="{A8DFA41A-69C2-4960-8B18-7674B3C693EF}"/>
+                <a16:creationId xmlns:a16="http://schemas.microsoft.com/office/drawing/2014/main" id="{4A2F98E3-6050-4026-A9D7-E992769CBE32}"/>
               </a:ext>
             </a:extLst>
           </p:cNvPr>
@@ -3472,7 +3472,7 @@
           <p:cNvPr id="33" name="">
             <a:extLst xmlns:a="http://schemas.openxmlformats.org/drawingml/2006/main">
               <a:ext uri="{FF2B5EF4-FFF2-40B4-BE49-F238E27FC236}">
-                <a16:creationId xmlns:a16="http://schemas.microsoft.com/office/drawing/2014/main" id="{B1811D88-E571-444D-81D4-30CA8C322FB9}"/>
+                <a16:creationId xmlns:a16="http://schemas.microsoft.com/office/drawing/2014/main" id="{A1938C23-11BE-4683-951C-6C5D2C030C3E}"/>
               </a:ext>
             </a:extLst>
           </p:cNvPr>
@@ -3529,7 +3529,7 @@
           <p:cNvPr id="34" name="">
             <a:extLst xmlns:a="http://schemas.openxmlformats.org/drawingml/2006/main">
               <a:ext uri="{FF2B5EF4-FFF2-40B4-BE49-F238E27FC236}">
-                <a16:creationId xmlns:a16="http://schemas.microsoft.com/office/drawing/2014/main" id="{1E28D2B6-AEE1-4555-B558-2DE8AD654F98}"/>
+                <a16:creationId xmlns:a16="http://schemas.microsoft.com/office/drawing/2014/main" id="{D5C7B1C7-D2DB-4811-8F42-9D46091F78BF}"/>
               </a:ext>
             </a:extLst>
           </p:cNvPr>
@@ -3586,7 +3586,7 @@
           <p:cNvPr id="35" name="">
             <a:extLst xmlns:a="http://schemas.openxmlformats.org/drawingml/2006/main">
               <a:ext uri="{FF2B5EF4-FFF2-40B4-BE49-F238E27FC236}">
-                <a16:creationId xmlns:a16="http://schemas.microsoft.com/office/drawing/2014/main" id="{5F046CF8-98CC-491D-BC76-666764967B45}"/>
+                <a16:creationId xmlns:a16="http://schemas.microsoft.com/office/drawing/2014/main" id="{839B07F5-DAD9-411D-8C9A-5860CB661C33}"/>
               </a:ext>
             </a:extLst>
           </p:cNvPr>
@@ -3643,7 +3643,7 @@
           <p:cNvPr id="36" name="">
             <a:extLst xmlns:a="http://schemas.openxmlformats.org/drawingml/2006/main">
               <a:ext uri="{FF2B5EF4-FFF2-40B4-BE49-F238E27FC236}">
-                <a16:creationId xmlns:a16="http://schemas.microsoft.com/office/drawing/2014/main" id="{62B5AC0A-0C46-4801-88C1-4C757D1910B5}"/>
+                <a16:creationId xmlns:a16="http://schemas.microsoft.com/office/drawing/2014/main" id="{B499622E-2161-4BE7-B667-D527E1A7F04B}"/>
               </a:ext>
             </a:extLst>
           </p:cNvPr>
@@ -3700,7 +3700,7 @@
           <p:cNvPr id="37" name="">
             <a:extLst xmlns:a="http://schemas.openxmlformats.org/drawingml/2006/main">
               <a:ext uri="{FF2B5EF4-FFF2-40B4-BE49-F238E27FC236}">
-                <a16:creationId xmlns:a16="http://schemas.microsoft.com/office/drawing/2014/main" id="{C00F5916-050E-4AF0-B0F9-3C3E0CCD1DCE}"/>
+                <a16:creationId xmlns:a16="http://schemas.microsoft.com/office/drawing/2014/main" id="{7DAA555E-AD0B-4A64-B758-9635A94D6F34}"/>
               </a:ext>
             </a:extLst>
           </p:cNvPr>
@@ -3757,7 +3757,7 @@
           <p:cNvPr id="38" name="">
             <a:extLst xmlns:a="http://schemas.openxmlformats.org/drawingml/2006/main">
               <a:ext uri="{FF2B5EF4-FFF2-40B4-BE49-F238E27FC236}">
-                <a16:creationId xmlns:a16="http://schemas.microsoft.com/office/drawing/2014/main" id="{99612E8C-031B-4B65-A51E-4F49B58BAA03}"/>
+                <a16:creationId xmlns:a16="http://schemas.microsoft.com/office/drawing/2014/main" id="{B70990CC-458D-487C-96F0-DB2519FB9F70}"/>
               </a:ext>
             </a:extLst>
           </p:cNvPr>
@@ -3814,7 +3814,7 @@
           <p:cNvPr id="39" name="">
             <a:extLst xmlns:a="http://schemas.openxmlformats.org/drawingml/2006/main">
               <a:ext uri="{FF2B5EF4-FFF2-40B4-BE49-F238E27FC236}">
-                <a16:creationId xmlns:a16="http://schemas.microsoft.com/office/drawing/2014/main" id="{5403E7AF-EAE8-4AF5-95EA-D5800BA37F8B}"/>
+                <a16:creationId xmlns:a16="http://schemas.microsoft.com/office/drawing/2014/main" id="{197262B5-3E43-46CA-9602-269DF9D526C1}"/>
               </a:ext>
             </a:extLst>
           </p:cNvPr>
@@ -3871,7 +3871,7 @@
           <p:cNvPr id="40" name="">
             <a:extLst xmlns:a="http://schemas.openxmlformats.org/drawingml/2006/main">
               <a:ext uri="{FF2B5EF4-FFF2-40B4-BE49-F238E27FC236}">
-                <a16:creationId xmlns:a16="http://schemas.microsoft.com/office/drawing/2014/main" id="{40A3CCBF-DB60-4746-AFD1-9B75C6FDD7B0}"/>
+                <a16:creationId xmlns:a16="http://schemas.microsoft.com/office/drawing/2014/main" id="{E002CA74-E65D-42E4-A8A5-A1EDD9B82408}"/>
               </a:ext>
             </a:extLst>
           </p:cNvPr>
@@ -3918,7 +3918,7 @@
                 <a:ea typeface="Malgun Gothic"/>
                 <a:cs typeface="Malgun Gothic"/>
               </a:rPr>
-              <a:t>보조 검증  |  pytest 227 passed  ·  중복 재조회 35/35</a:t>
+              <a:t>보조 검증  |  pytest 228 passed  ·  중복 재조회 35/35</a:t>
             </a:r>
           </a:p>
         </p:txBody>
@@ -3928,7 +3928,7 @@
           <p:cNvPr id="41" name="">
             <a:extLst xmlns:a="http://schemas.openxmlformats.org/drawingml/2006/main">
               <a:ext uri="{FF2B5EF4-FFF2-40B4-BE49-F238E27FC236}">
-                <a16:creationId xmlns:a16="http://schemas.microsoft.com/office/drawing/2014/main" id="{5ACDBB2B-4C42-474B-B7B9-338158AFCFE8}"/>
+                <a16:creationId xmlns:a16="http://schemas.microsoft.com/office/drawing/2014/main" id="{F80AE92D-1BA8-4FBA-89E0-7CA1AA10F6A2}"/>
               </a:ext>
             </a:extLst>
           </p:cNvPr>
@@ -3985,7 +3985,7 @@
           <p:cNvPr id="42" name="">
             <a:extLst xmlns:a="http://schemas.openxmlformats.org/drawingml/2006/main">
               <a:ext uri="{FF2B5EF4-FFF2-40B4-BE49-F238E27FC236}">
-                <a16:creationId xmlns:a16="http://schemas.microsoft.com/office/drawing/2014/main" id="{7D5D756C-0537-455C-A91B-FB4C38A25061}"/>
+                <a16:creationId xmlns:a16="http://schemas.microsoft.com/office/drawing/2014/main" id="{C8D80887-8D62-4921-A810-9479BC910AE2}"/>
               </a:ext>
             </a:extLst>
           </p:cNvPr>
@@ -4042,7 +4042,7 @@
           <p:cNvPr id="43" name="">
             <a:extLst xmlns:a="http://schemas.openxmlformats.org/drawingml/2006/main">
               <a:ext uri="{FF2B5EF4-FFF2-40B4-BE49-F238E27FC236}">
-                <a16:creationId xmlns:a16="http://schemas.microsoft.com/office/drawing/2014/main" id="{A4F935FC-980E-4023-A87D-6946C51083B6}"/>
+                <a16:creationId xmlns:a16="http://schemas.microsoft.com/office/drawing/2014/main" id="{C8123489-06A6-447F-81A2-7FA97597FD97}"/>
               </a:ext>
             </a:extLst>
           </p:cNvPr>
@@ -4099,7 +4099,7 @@
           <p:cNvPr id="44" name="">
             <a:extLst xmlns:a="http://schemas.openxmlformats.org/drawingml/2006/main">
               <a:ext uri="{FF2B5EF4-FFF2-40B4-BE49-F238E27FC236}">
-                <a16:creationId xmlns:a16="http://schemas.microsoft.com/office/drawing/2014/main" id="{9B1EF45A-292C-4670-84C2-AEFD48664D0E}"/>
+                <a16:creationId xmlns:a16="http://schemas.microsoft.com/office/drawing/2014/main" id="{A5986EC0-C700-4586-B172-6EC501AC79D6}"/>
               </a:ext>
             </a:extLst>
           </p:cNvPr>
@@ -4131,7 +4131,7 @@
           <p:cNvPr id="45" name="">
             <a:extLst xmlns:a="http://schemas.openxmlformats.org/drawingml/2006/main">
               <a:ext uri="{FF2B5EF4-FFF2-40B4-BE49-F238E27FC236}">
-                <a16:creationId xmlns:a16="http://schemas.microsoft.com/office/drawing/2014/main" id="{FDB33265-245D-45AE-888B-E7F4DCB0C4C8}"/>
+                <a16:creationId xmlns:a16="http://schemas.microsoft.com/office/drawing/2014/main" id="{46781895-2D14-47AD-90FC-CB140146630A}"/>
               </a:ext>
             </a:extLst>
           </p:cNvPr>
@@ -4186,7 +4186,7 @@
     </p:spTree>
     <p:extLst>
       <p:ext uri="{BB962C8B-B14F-4D97-AF65-F5344CB8AC3E}">
-        <p14:creationId xmlns:p14="http://schemas.microsoft.com/office/powerpoint/2010/main" val="497755918"/>
+        <p14:creationId xmlns:p14="http://schemas.microsoft.com/office/powerpoint/2010/main" val="642944771"/>
       </p:ext>
     </p:extLst>
   </p:cSld>
@@ -4217,7 +4217,7 @@
           <p:cNvPr id="56" name="">
             <a:extLst xmlns:a="http://schemas.openxmlformats.org/drawingml/2006/main">
               <a:ext uri="{FF2B5EF4-FFF2-40B4-BE49-F238E27FC236}">
-                <a16:creationId xmlns:a16="http://schemas.microsoft.com/office/drawing/2014/main" id="{725C6355-062D-4FEC-B85B-7F48B11012AE}"/>
+                <a16:creationId xmlns:a16="http://schemas.microsoft.com/office/drawing/2014/main" id="{9A49D0B4-0A68-444D-86C2-5E97B84700A5}"/>
               </a:ext>
             </a:extLst>
           </p:cNvPr>
@@ -4247,7 +4247,7 @@
           <p:cNvPr id="2" name="">
             <a:extLst xmlns:a="http://schemas.openxmlformats.org/drawingml/2006/main">
               <a:ext uri="{FF2B5EF4-FFF2-40B4-BE49-F238E27FC236}">
-                <a16:creationId xmlns:a16="http://schemas.microsoft.com/office/drawing/2014/main" id="{C8E06E21-4560-4408-9D22-9A0C9B945678}"/>
+                <a16:creationId xmlns:a16="http://schemas.microsoft.com/office/drawing/2014/main" id="{4E21D0A2-14E2-427D-BAE5-5CDE3EDFF4DA}"/>
               </a:ext>
             </a:extLst>
           </p:cNvPr>
@@ -4304,7 +4304,7 @@
           <p:cNvPr id="3" name="">
             <a:extLst xmlns:a="http://schemas.openxmlformats.org/drawingml/2006/main">
               <a:ext uri="{FF2B5EF4-FFF2-40B4-BE49-F238E27FC236}">
-                <a16:creationId xmlns:a16="http://schemas.microsoft.com/office/drawing/2014/main" id="{DD092C29-D8E6-45E6-9BF6-5D88DDF88BE8}"/>
+                <a16:creationId xmlns:a16="http://schemas.microsoft.com/office/drawing/2014/main" id="{27991C32-866A-423D-ABDB-C0BA91FE932B}"/>
               </a:ext>
             </a:extLst>
           </p:cNvPr>
@@ -4334,7 +4334,7 @@
           <p:cNvPr id="4" name="">
             <a:extLst xmlns:a="http://schemas.openxmlformats.org/drawingml/2006/main">
               <a:ext uri="{FF2B5EF4-FFF2-40B4-BE49-F238E27FC236}">
-                <a16:creationId xmlns:a16="http://schemas.microsoft.com/office/drawing/2014/main" id="{89154C00-ACF3-4306-8DD1-CD7A53BE2FB3}"/>
+                <a16:creationId xmlns:a16="http://schemas.microsoft.com/office/drawing/2014/main" id="{4B83E259-F692-4235-8425-5E72D3C265ED}"/>
               </a:ext>
             </a:extLst>
           </p:cNvPr>
@@ -4391,7 +4391,7 @@
           <p:cNvPr id="5" name="">
             <a:extLst xmlns:a="http://schemas.openxmlformats.org/drawingml/2006/main">
               <a:ext uri="{FF2B5EF4-FFF2-40B4-BE49-F238E27FC236}">
-                <a16:creationId xmlns:a16="http://schemas.microsoft.com/office/drawing/2014/main" id="{7B7BAD21-4A99-4518-85F0-847986C92246}"/>
+                <a16:creationId xmlns:a16="http://schemas.microsoft.com/office/drawing/2014/main" id="{7A9431DB-EE7D-400E-8929-55493894EEBE}"/>
               </a:ext>
             </a:extLst>
           </p:cNvPr>
@@ -4448,7 +4448,7 @@
           <p:cNvPr id="6" name="">
             <a:extLst xmlns:a="http://schemas.openxmlformats.org/drawingml/2006/main">
               <a:ext uri="{FF2B5EF4-FFF2-40B4-BE49-F238E27FC236}">
-                <a16:creationId xmlns:a16="http://schemas.microsoft.com/office/drawing/2014/main" id="{E43DC21F-C471-4EF3-8647-3365A7B5D6C1}"/>
+                <a16:creationId xmlns:a16="http://schemas.microsoft.com/office/drawing/2014/main" id="{AFC2F603-C7E8-4629-ACC6-80133AE106C5}"/>
               </a:ext>
             </a:extLst>
           </p:cNvPr>
@@ -4482,7 +4482,7 @@
           <p:cNvPr id="7" name="">
             <a:extLst xmlns:a="http://schemas.openxmlformats.org/drawingml/2006/main">
               <a:ext uri="{FF2B5EF4-FFF2-40B4-BE49-F238E27FC236}">
-                <a16:creationId xmlns:a16="http://schemas.microsoft.com/office/drawing/2014/main" id="{BF273617-3BA9-44B3-880C-35D178EFDF60}"/>
+                <a16:creationId xmlns:a16="http://schemas.microsoft.com/office/drawing/2014/main" id="{AD349F84-7B68-4EDF-B3E0-28A4D006B9BB}"/>
               </a:ext>
             </a:extLst>
           </p:cNvPr>
@@ -4514,7 +4514,7 @@
           <p:cNvPr id="8" name="">
             <a:extLst xmlns:a="http://schemas.openxmlformats.org/drawingml/2006/main">
               <a:ext uri="{FF2B5EF4-FFF2-40B4-BE49-F238E27FC236}">
-                <a16:creationId xmlns:a16="http://schemas.microsoft.com/office/drawing/2014/main" id="{7F15E6D0-069D-47F9-B551-6FD3A875547A}"/>
+                <a16:creationId xmlns:a16="http://schemas.microsoft.com/office/drawing/2014/main" id="{40953E71-E736-4D56-8882-76156164843F}"/>
               </a:ext>
             </a:extLst>
           </p:cNvPr>
@@ -4571,7 +4571,7 @@
           <p:cNvPr id="9" name="">
             <a:extLst xmlns:a="http://schemas.openxmlformats.org/drawingml/2006/main">
               <a:ext uri="{FF2B5EF4-FFF2-40B4-BE49-F238E27FC236}">
-                <a16:creationId xmlns:a16="http://schemas.microsoft.com/office/drawing/2014/main" id="{A03A849D-3589-4D02-BC53-4DE79EA642FE}"/>
+                <a16:creationId xmlns:a16="http://schemas.microsoft.com/office/drawing/2014/main" id="{8A06C9A0-1A1D-4E4E-A2F9-145DDF862B1F}"/>
               </a:ext>
             </a:extLst>
           </p:cNvPr>
@@ -4628,7 +4628,7 @@
           <p:cNvPr id="10" name="">
             <a:extLst xmlns:a="http://schemas.openxmlformats.org/drawingml/2006/main">
               <a:ext uri="{FF2B5EF4-FFF2-40B4-BE49-F238E27FC236}">
-                <a16:creationId xmlns:a16="http://schemas.microsoft.com/office/drawing/2014/main" id="{8EBDFD83-F592-4C8A-AE2A-5CC7B6B6944C}"/>
+                <a16:creationId xmlns:a16="http://schemas.microsoft.com/office/drawing/2014/main" id="{34E361BB-DC73-4FF2-84D5-ECE62D0E07EA}"/>
               </a:ext>
             </a:extLst>
           </p:cNvPr>
@@ -4685,7 +4685,7 @@
           <p:cNvPr id="11" name="">
             <a:extLst xmlns:a="http://schemas.openxmlformats.org/drawingml/2006/main">
               <a:ext uri="{FF2B5EF4-FFF2-40B4-BE49-F238E27FC236}">
-                <a16:creationId xmlns:a16="http://schemas.microsoft.com/office/drawing/2014/main" id="{1EB9FEDD-EDAB-4206-878E-98049C606975}"/>
+                <a16:creationId xmlns:a16="http://schemas.microsoft.com/office/drawing/2014/main" id="{F2AA413E-25F0-45FE-9797-34CF90E7E67E}"/>
               </a:ext>
             </a:extLst>
           </p:cNvPr>
@@ -4715,7 +4715,7 @@
           <p:cNvPr id="12" name="">
             <a:extLst xmlns:a="http://schemas.openxmlformats.org/drawingml/2006/main">
               <a:ext uri="{FF2B5EF4-FFF2-40B4-BE49-F238E27FC236}">
-                <a16:creationId xmlns:a16="http://schemas.microsoft.com/office/drawing/2014/main" id="{1CE52419-9021-4471-81C2-95C0C841D56A}"/>
+                <a16:creationId xmlns:a16="http://schemas.microsoft.com/office/drawing/2014/main" id="{D59A99F7-02A7-4F49-AC83-DDB49B2DFE9F}"/>
               </a:ext>
             </a:extLst>
           </p:cNvPr>
@@ -4749,7 +4749,7 @@
           <p:cNvPr id="13" name="">
             <a:extLst xmlns:a="http://schemas.openxmlformats.org/drawingml/2006/main">
               <a:ext uri="{FF2B5EF4-FFF2-40B4-BE49-F238E27FC236}">
-                <a16:creationId xmlns:a16="http://schemas.microsoft.com/office/drawing/2014/main" id="{4783877D-368B-4AF5-ACA9-F3466794E641}"/>
+                <a16:creationId xmlns:a16="http://schemas.microsoft.com/office/drawing/2014/main" id="{08B4CE2A-3CA2-42EF-8541-174B59BD83E7}"/>
               </a:ext>
             </a:extLst>
           </p:cNvPr>
@@ -4781,7 +4781,7 @@
           <p:cNvPr id="14" name="">
             <a:extLst xmlns:a="http://schemas.openxmlformats.org/drawingml/2006/main">
               <a:ext uri="{FF2B5EF4-FFF2-40B4-BE49-F238E27FC236}">
-                <a16:creationId xmlns:a16="http://schemas.microsoft.com/office/drawing/2014/main" id="{44B5C63C-2232-48F5-903B-740FAC45CFA7}"/>
+                <a16:creationId xmlns:a16="http://schemas.microsoft.com/office/drawing/2014/main" id="{35A9C4D1-A676-4558-9868-85982193C6BF}"/>
               </a:ext>
             </a:extLst>
           </p:cNvPr>
@@ -4838,7 +4838,7 @@
           <p:cNvPr id="15" name="">
             <a:extLst xmlns:a="http://schemas.openxmlformats.org/drawingml/2006/main">
               <a:ext uri="{FF2B5EF4-FFF2-40B4-BE49-F238E27FC236}">
-                <a16:creationId xmlns:a16="http://schemas.microsoft.com/office/drawing/2014/main" id="{83993E2B-F121-410D-9937-A97587DBE8AD}"/>
+                <a16:creationId xmlns:a16="http://schemas.microsoft.com/office/drawing/2014/main" id="{DC3990F0-103B-4299-BBE7-A3EBCC463A2F}"/>
               </a:ext>
             </a:extLst>
           </p:cNvPr>
@@ -4895,7 +4895,7 @@
           <p:cNvPr id="16" name="">
             <a:extLst xmlns:a="http://schemas.openxmlformats.org/drawingml/2006/main">
               <a:ext uri="{FF2B5EF4-FFF2-40B4-BE49-F238E27FC236}">
-                <a16:creationId xmlns:a16="http://schemas.microsoft.com/office/drawing/2014/main" id="{B514F82E-5100-43DB-83D9-1AD962F7A576}"/>
+                <a16:creationId xmlns:a16="http://schemas.microsoft.com/office/drawing/2014/main" id="{2FA6972B-7A36-4C6E-9C10-29E9C8F24558}"/>
               </a:ext>
             </a:extLst>
           </p:cNvPr>
@@ -4952,7 +4952,7 @@
           <p:cNvPr id="17" name="">
             <a:extLst xmlns:a="http://schemas.openxmlformats.org/drawingml/2006/main">
               <a:ext uri="{FF2B5EF4-FFF2-40B4-BE49-F238E27FC236}">
-                <a16:creationId xmlns:a16="http://schemas.microsoft.com/office/drawing/2014/main" id="{7A5AABA0-AA12-423B-8671-A31CD0B926CE}"/>
+                <a16:creationId xmlns:a16="http://schemas.microsoft.com/office/drawing/2014/main" id="{9B743FD1-6308-4896-BC6A-BCD0D0B38681}"/>
               </a:ext>
             </a:extLst>
           </p:cNvPr>
@@ -4982,7 +4982,7 @@
           <p:cNvPr id="18" name="">
             <a:extLst xmlns:a="http://schemas.openxmlformats.org/drawingml/2006/main">
               <a:ext uri="{FF2B5EF4-FFF2-40B4-BE49-F238E27FC236}">
-                <a16:creationId xmlns:a16="http://schemas.microsoft.com/office/drawing/2014/main" id="{EFE68240-25A2-45E0-88DC-6BD707FEDF82}"/>
+                <a16:creationId xmlns:a16="http://schemas.microsoft.com/office/drawing/2014/main" id="{531C96F4-43DD-43C2-9345-C5EDB00780FA}"/>
               </a:ext>
             </a:extLst>
           </p:cNvPr>
@@ -5016,7 +5016,7 @@
           <p:cNvPr id="19" name="">
             <a:extLst xmlns:a="http://schemas.openxmlformats.org/drawingml/2006/main">
               <a:ext uri="{FF2B5EF4-FFF2-40B4-BE49-F238E27FC236}">
-                <a16:creationId xmlns:a16="http://schemas.microsoft.com/office/drawing/2014/main" id="{14210D37-7A6F-427C-B877-C3935DE0CD8A}"/>
+                <a16:creationId xmlns:a16="http://schemas.microsoft.com/office/drawing/2014/main" id="{839A6090-2327-4B8B-8C81-C49A76D657CD}"/>
               </a:ext>
             </a:extLst>
           </p:cNvPr>
@@ -5048,7 +5048,7 @@
           <p:cNvPr id="20" name="">
             <a:extLst xmlns:a="http://schemas.openxmlformats.org/drawingml/2006/main">
               <a:ext uri="{FF2B5EF4-FFF2-40B4-BE49-F238E27FC236}">
-                <a16:creationId xmlns:a16="http://schemas.microsoft.com/office/drawing/2014/main" id="{7FDCFAD4-B557-4CBD-B275-25F5E56ED1A2}"/>
+                <a16:creationId xmlns:a16="http://schemas.microsoft.com/office/drawing/2014/main" id="{DBE19246-0911-4341-89BF-D31007DD0010}"/>
               </a:ext>
             </a:extLst>
           </p:cNvPr>
@@ -5105,7 +5105,7 @@
           <p:cNvPr id="21" name="">
             <a:extLst xmlns:a="http://schemas.openxmlformats.org/drawingml/2006/main">
               <a:ext uri="{FF2B5EF4-FFF2-40B4-BE49-F238E27FC236}">
-                <a16:creationId xmlns:a16="http://schemas.microsoft.com/office/drawing/2014/main" id="{013E25AA-0F91-45A8-9F0D-47D5CCDAD75A}"/>
+                <a16:creationId xmlns:a16="http://schemas.microsoft.com/office/drawing/2014/main" id="{4CD2A8AA-63BF-4C70-AB42-80F6891E97DD}"/>
               </a:ext>
             </a:extLst>
           </p:cNvPr>
@@ -5162,7 +5162,7 @@
           <p:cNvPr id="22" name="">
             <a:extLst xmlns:a="http://schemas.openxmlformats.org/drawingml/2006/main">
               <a:ext uri="{FF2B5EF4-FFF2-40B4-BE49-F238E27FC236}">
-                <a16:creationId xmlns:a16="http://schemas.microsoft.com/office/drawing/2014/main" id="{4DAA719A-C76E-48D0-89AC-2713749CF2F5}"/>
+                <a16:creationId xmlns:a16="http://schemas.microsoft.com/office/drawing/2014/main" id="{30A1DBC4-5960-4C07-9DC7-5CFA3CA33BF2}"/>
               </a:ext>
             </a:extLst>
           </p:cNvPr>
@@ -5219,7 +5219,7 @@
           <p:cNvPr id="23" name="">
             <a:extLst xmlns:a="http://schemas.openxmlformats.org/drawingml/2006/main">
               <a:ext uri="{FF2B5EF4-FFF2-40B4-BE49-F238E27FC236}">
-                <a16:creationId xmlns:a16="http://schemas.microsoft.com/office/drawing/2014/main" id="{FA84AEE3-09CB-4689-AD15-BFB35F34B6D3}"/>
+                <a16:creationId xmlns:a16="http://schemas.microsoft.com/office/drawing/2014/main" id="{3E9D362F-B913-4759-A6F4-006AD0774B82}"/>
               </a:ext>
             </a:extLst>
           </p:cNvPr>
@@ -5249,7 +5249,7 @@
           <p:cNvPr id="24" name="">
             <a:extLst xmlns:a="http://schemas.openxmlformats.org/drawingml/2006/main">
               <a:ext uri="{FF2B5EF4-FFF2-40B4-BE49-F238E27FC236}">
-                <a16:creationId xmlns:a16="http://schemas.microsoft.com/office/drawing/2014/main" id="{889FFB0C-6595-4526-AD77-1F854095068C}"/>
+                <a16:creationId xmlns:a16="http://schemas.microsoft.com/office/drawing/2014/main" id="{4E05CF62-5668-4FF9-A289-3B42EC8ED0DC}"/>
               </a:ext>
             </a:extLst>
           </p:cNvPr>
@@ -5283,7 +5283,7 @@
           <p:cNvPr id="25" name="">
             <a:extLst xmlns:a="http://schemas.openxmlformats.org/drawingml/2006/main">
               <a:ext uri="{FF2B5EF4-FFF2-40B4-BE49-F238E27FC236}">
-                <a16:creationId xmlns:a16="http://schemas.microsoft.com/office/drawing/2014/main" id="{8F19F06A-7D18-4235-BDBF-7C1CDB585FFA}"/>
+                <a16:creationId xmlns:a16="http://schemas.microsoft.com/office/drawing/2014/main" id="{A5ED9A67-5B59-4929-ACC7-E950BDF13C14}"/>
               </a:ext>
             </a:extLst>
           </p:cNvPr>
@@ -5315,7 +5315,7 @@
           <p:cNvPr id="26" name="">
             <a:extLst xmlns:a="http://schemas.openxmlformats.org/drawingml/2006/main">
               <a:ext uri="{FF2B5EF4-FFF2-40B4-BE49-F238E27FC236}">
-                <a16:creationId xmlns:a16="http://schemas.microsoft.com/office/drawing/2014/main" id="{E6257BBF-6DB2-4FE4-A601-2D7C3F4DA57A}"/>
+                <a16:creationId xmlns:a16="http://schemas.microsoft.com/office/drawing/2014/main" id="{F913C3BD-7611-40EC-8519-28719838BF0A}"/>
               </a:ext>
             </a:extLst>
           </p:cNvPr>
@@ -5372,7 +5372,7 @@
           <p:cNvPr id="27" name="">
             <a:extLst xmlns:a="http://schemas.openxmlformats.org/drawingml/2006/main">
               <a:ext uri="{FF2B5EF4-FFF2-40B4-BE49-F238E27FC236}">
-                <a16:creationId xmlns:a16="http://schemas.microsoft.com/office/drawing/2014/main" id="{F472E77E-5B3A-47D2-81D0-0D99B018315D}"/>
+                <a16:creationId xmlns:a16="http://schemas.microsoft.com/office/drawing/2014/main" id="{B4E9EFCA-E4D4-4D38-A717-1F0937FC90D8}"/>
               </a:ext>
             </a:extLst>
           </p:cNvPr>
@@ -5429,7 +5429,7 @@
           <p:cNvPr id="28" name="">
             <a:extLst xmlns:a="http://schemas.openxmlformats.org/drawingml/2006/main">
               <a:ext uri="{FF2B5EF4-FFF2-40B4-BE49-F238E27FC236}">
-                <a16:creationId xmlns:a16="http://schemas.microsoft.com/office/drawing/2014/main" id="{A420F73E-8F71-43FB-9CC5-B39AB2A51373}"/>
+                <a16:creationId xmlns:a16="http://schemas.microsoft.com/office/drawing/2014/main" id="{0AF3B3ED-27CF-439E-99A6-956D275CB1E4}"/>
               </a:ext>
             </a:extLst>
           </p:cNvPr>
@@ -5486,7 +5486,7 @@
           <p:cNvPr id="29" name="">
             <a:extLst xmlns:a="http://schemas.openxmlformats.org/drawingml/2006/main">
               <a:ext uri="{FF2B5EF4-FFF2-40B4-BE49-F238E27FC236}">
-                <a16:creationId xmlns:a16="http://schemas.microsoft.com/office/drawing/2014/main" id="{E9C5E9AE-B96E-4D7C-887B-967539D0C53F}"/>
+                <a16:creationId xmlns:a16="http://schemas.microsoft.com/office/drawing/2014/main" id="{E6468A66-96E0-47A2-918A-BF06DD7FD51C}"/>
               </a:ext>
             </a:extLst>
           </p:cNvPr>
@@ -5516,7 +5516,7 @@
           <p:cNvPr id="30" name="">
             <a:extLst xmlns:a="http://schemas.openxmlformats.org/drawingml/2006/main">
               <a:ext uri="{FF2B5EF4-FFF2-40B4-BE49-F238E27FC236}">
-                <a16:creationId xmlns:a16="http://schemas.microsoft.com/office/drawing/2014/main" id="{7F0A281A-2437-4DE2-9F34-E938C3AB46B4}"/>
+                <a16:creationId xmlns:a16="http://schemas.microsoft.com/office/drawing/2014/main" id="{0160AC9F-CB18-4251-9806-E5E30289B030}"/>
               </a:ext>
             </a:extLst>
           </p:cNvPr>
@@ -5550,7 +5550,7 @@
           <p:cNvPr id="31" name="">
             <a:extLst xmlns:a="http://schemas.openxmlformats.org/drawingml/2006/main">
               <a:ext uri="{FF2B5EF4-FFF2-40B4-BE49-F238E27FC236}">
-                <a16:creationId xmlns:a16="http://schemas.microsoft.com/office/drawing/2014/main" id="{102411AA-3455-426F-B61A-CB62E3CADA74}"/>
+                <a16:creationId xmlns:a16="http://schemas.microsoft.com/office/drawing/2014/main" id="{8C5CBABE-900B-4BB6-9019-176AECFE2A74}"/>
               </a:ext>
             </a:extLst>
           </p:cNvPr>
@@ -5582,7 +5582,7 @@
           <p:cNvPr id="32" name="">
             <a:extLst xmlns:a="http://schemas.openxmlformats.org/drawingml/2006/main">
               <a:ext uri="{FF2B5EF4-FFF2-40B4-BE49-F238E27FC236}">
-                <a16:creationId xmlns:a16="http://schemas.microsoft.com/office/drawing/2014/main" id="{5C20F7BD-73FB-4867-A974-AC4075B6FF03}"/>
+                <a16:creationId xmlns:a16="http://schemas.microsoft.com/office/drawing/2014/main" id="{66D14A8E-F673-4B22-BD19-1639EB9588B1}"/>
               </a:ext>
             </a:extLst>
           </p:cNvPr>
@@ -5639,7 +5639,7 @@
           <p:cNvPr id="33" name="">
             <a:extLst xmlns:a="http://schemas.openxmlformats.org/drawingml/2006/main">
               <a:ext uri="{FF2B5EF4-FFF2-40B4-BE49-F238E27FC236}">
-                <a16:creationId xmlns:a16="http://schemas.microsoft.com/office/drawing/2014/main" id="{EB463B6B-C645-4C8D-AC8B-F9C0422F8580}"/>
+                <a16:creationId xmlns:a16="http://schemas.microsoft.com/office/drawing/2014/main" id="{E3437826-7287-46F4-BB8D-F4FEBE207B43}"/>
               </a:ext>
             </a:extLst>
           </p:cNvPr>
@@ -5696,7 +5696,7 @@
           <p:cNvPr id="34" name="">
             <a:extLst xmlns:a="http://schemas.openxmlformats.org/drawingml/2006/main">
               <a:ext uri="{FF2B5EF4-FFF2-40B4-BE49-F238E27FC236}">
-                <a16:creationId xmlns:a16="http://schemas.microsoft.com/office/drawing/2014/main" id="{0F6E3B7A-D2D9-4071-849B-124F7B239021}"/>
+                <a16:creationId xmlns:a16="http://schemas.microsoft.com/office/drawing/2014/main" id="{C47EC12F-498F-468F-80C7-BCFCC3661274}"/>
               </a:ext>
             </a:extLst>
           </p:cNvPr>
@@ -5753,7 +5753,7 @@
           <p:cNvPr id="35" name="">
             <a:extLst xmlns:a="http://schemas.openxmlformats.org/drawingml/2006/main">
               <a:ext uri="{FF2B5EF4-FFF2-40B4-BE49-F238E27FC236}">
-                <a16:creationId xmlns:a16="http://schemas.microsoft.com/office/drawing/2014/main" id="{DB4EE802-5588-4271-9D7A-B2482B33F2CB}"/>
+                <a16:creationId xmlns:a16="http://schemas.microsoft.com/office/drawing/2014/main" id="{6D2E00BD-4C73-4A6D-8258-CB65DFD7FAD9}"/>
               </a:ext>
             </a:extLst>
           </p:cNvPr>
@@ -5783,7 +5783,7 @@
           <p:cNvPr id="36" name="">
             <a:extLst xmlns:a="http://schemas.openxmlformats.org/drawingml/2006/main">
               <a:ext uri="{FF2B5EF4-FFF2-40B4-BE49-F238E27FC236}">
-                <a16:creationId xmlns:a16="http://schemas.microsoft.com/office/drawing/2014/main" id="{28DA99E7-5B7A-4EE5-A5A5-00C5F0C137F9}"/>
+                <a16:creationId xmlns:a16="http://schemas.microsoft.com/office/drawing/2014/main" id="{6C27BEDB-93AC-418E-B76D-F94B8D97F4A4}"/>
               </a:ext>
             </a:extLst>
           </p:cNvPr>
@@ -5817,7 +5817,7 @@
           <p:cNvPr id="37" name="">
             <a:extLst xmlns:a="http://schemas.openxmlformats.org/drawingml/2006/main">
               <a:ext uri="{FF2B5EF4-FFF2-40B4-BE49-F238E27FC236}">
-                <a16:creationId xmlns:a16="http://schemas.microsoft.com/office/drawing/2014/main" id="{92D18439-370C-4472-B244-7B955744E552}"/>
+                <a16:creationId xmlns:a16="http://schemas.microsoft.com/office/drawing/2014/main" id="{3AA59CA7-963D-42CC-A5D9-98FBFDC92F68}"/>
               </a:ext>
             </a:extLst>
           </p:cNvPr>
@@ -5849,7 +5849,7 @@
           <p:cNvPr id="38" name="">
             <a:extLst xmlns:a="http://schemas.openxmlformats.org/drawingml/2006/main">
               <a:ext uri="{FF2B5EF4-FFF2-40B4-BE49-F238E27FC236}">
-                <a16:creationId xmlns:a16="http://schemas.microsoft.com/office/drawing/2014/main" id="{7E05F5DA-8B56-48D6-8F8D-0AC398EE6ABA}"/>
+                <a16:creationId xmlns:a16="http://schemas.microsoft.com/office/drawing/2014/main" id="{275D27BF-0DED-4F97-868B-21E85F16D1EE}"/>
               </a:ext>
             </a:extLst>
           </p:cNvPr>
@@ -5906,7 +5906,7 @@
           <p:cNvPr id="39" name="">
             <a:extLst xmlns:a="http://schemas.openxmlformats.org/drawingml/2006/main">
               <a:ext uri="{FF2B5EF4-FFF2-40B4-BE49-F238E27FC236}">
-                <a16:creationId xmlns:a16="http://schemas.microsoft.com/office/drawing/2014/main" id="{8775339C-5CF5-465F-8B3E-EF16E99D5CA5}"/>
+                <a16:creationId xmlns:a16="http://schemas.microsoft.com/office/drawing/2014/main" id="{8CFE2DAD-357B-40F7-A161-A14B4152E224}"/>
               </a:ext>
             </a:extLst>
           </p:cNvPr>
@@ -5963,7 +5963,7 @@
           <p:cNvPr id="40" name="">
             <a:extLst xmlns:a="http://schemas.openxmlformats.org/drawingml/2006/main">
               <a:ext uri="{FF2B5EF4-FFF2-40B4-BE49-F238E27FC236}">
-                <a16:creationId xmlns:a16="http://schemas.microsoft.com/office/drawing/2014/main" id="{A042DD81-300F-4CD2-A3D7-EC9F9D7B4D05}"/>
+                <a16:creationId xmlns:a16="http://schemas.microsoft.com/office/drawing/2014/main" id="{B186A293-3C7C-4BF0-9AAC-31A8BC7FED96}"/>
               </a:ext>
             </a:extLst>
           </p:cNvPr>
@@ -6020,7 +6020,7 @@
           <p:cNvPr id="41" name="">
             <a:extLst xmlns:a="http://schemas.openxmlformats.org/drawingml/2006/main">
               <a:ext uri="{FF2B5EF4-FFF2-40B4-BE49-F238E27FC236}">
-                <a16:creationId xmlns:a16="http://schemas.microsoft.com/office/drawing/2014/main" id="{F996AD92-89F8-47FA-8CF2-576900F000A1}"/>
+                <a16:creationId xmlns:a16="http://schemas.microsoft.com/office/drawing/2014/main" id="{B314D751-D776-4359-914B-D686503B34B8}"/>
               </a:ext>
             </a:extLst>
           </p:cNvPr>
@@ -6052,7 +6052,7 @@
           <p:cNvPr id="42" name="">
             <a:extLst xmlns:a="http://schemas.openxmlformats.org/drawingml/2006/main">
               <a:ext uri="{FF2B5EF4-FFF2-40B4-BE49-F238E27FC236}">
-                <a16:creationId xmlns:a16="http://schemas.microsoft.com/office/drawing/2014/main" id="{7EBA00B1-F47C-4A2E-8130-1CB50EA3F67F}"/>
+                <a16:creationId xmlns:a16="http://schemas.microsoft.com/office/drawing/2014/main" id="{8C933799-BECC-4C6A-B1A2-C8E391A402A0}"/>
               </a:ext>
             </a:extLst>
           </p:cNvPr>
@@ -6109,7 +6109,7 @@
           <p:cNvPr id="43" name="">
             <a:extLst xmlns:a="http://schemas.openxmlformats.org/drawingml/2006/main">
               <a:ext uri="{FF2B5EF4-FFF2-40B4-BE49-F238E27FC236}">
-                <a16:creationId xmlns:a16="http://schemas.microsoft.com/office/drawing/2014/main" id="{EBF6C13F-57F6-4255-A78C-8D9FB39E4D70}"/>
+                <a16:creationId xmlns:a16="http://schemas.microsoft.com/office/drawing/2014/main" id="{44CB333E-3144-44E0-807D-A5CE296B3761}"/>
               </a:ext>
             </a:extLst>
           </p:cNvPr>
@@ -6166,7 +6166,7 @@
           <p:cNvPr id="44" name="">
             <a:extLst xmlns:a="http://schemas.openxmlformats.org/drawingml/2006/main">
               <a:ext uri="{FF2B5EF4-FFF2-40B4-BE49-F238E27FC236}">
-                <a16:creationId xmlns:a16="http://schemas.microsoft.com/office/drawing/2014/main" id="{B5896052-9617-4C81-8F36-30DBC48142A3}"/>
+                <a16:creationId xmlns:a16="http://schemas.microsoft.com/office/drawing/2014/main" id="{8649B80A-9E7C-40BF-9002-5A2412DD36C6}"/>
               </a:ext>
             </a:extLst>
           </p:cNvPr>
@@ -6223,7 +6223,7 @@
           <p:cNvPr id="45" name="">
             <a:extLst xmlns:a="http://schemas.openxmlformats.org/drawingml/2006/main">
               <a:ext uri="{FF2B5EF4-FFF2-40B4-BE49-F238E27FC236}">
-                <a16:creationId xmlns:a16="http://schemas.microsoft.com/office/drawing/2014/main" id="{04AEC9AB-F16C-4598-AB49-E6BAFD9BFCA7}"/>
+                <a16:creationId xmlns:a16="http://schemas.microsoft.com/office/drawing/2014/main" id="{1901D8F6-6109-48E2-8D4F-8BA307CB9713}"/>
               </a:ext>
             </a:extLst>
           </p:cNvPr>
@@ -6280,7 +6280,7 @@
           <p:cNvPr id="46" name="">
             <a:extLst xmlns:a="http://schemas.openxmlformats.org/drawingml/2006/main">
               <a:ext uri="{FF2B5EF4-FFF2-40B4-BE49-F238E27FC236}">
-                <a16:creationId xmlns:a16="http://schemas.microsoft.com/office/drawing/2014/main" id="{EDC2EAA5-CC55-4714-B486-7FF50CE63D0B}"/>
+                <a16:creationId xmlns:a16="http://schemas.microsoft.com/office/drawing/2014/main" id="{667F52DA-AAAC-4260-9481-9D69D7F15057}"/>
               </a:ext>
             </a:extLst>
           </p:cNvPr>
@@ -6337,7 +6337,7 @@
           <p:cNvPr id="47" name="">
             <a:extLst xmlns:a="http://schemas.openxmlformats.org/drawingml/2006/main">
               <a:ext uri="{FF2B5EF4-FFF2-40B4-BE49-F238E27FC236}">
-                <a16:creationId xmlns:a16="http://schemas.microsoft.com/office/drawing/2014/main" id="{43040C63-A99F-44A2-BDAC-DEE529F36A9D}"/>
+                <a16:creationId xmlns:a16="http://schemas.microsoft.com/office/drawing/2014/main" id="{D7C3133E-7135-4596-80A1-FB38FBA4F8BF}"/>
               </a:ext>
             </a:extLst>
           </p:cNvPr>
@@ -6394,7 +6394,7 @@
           <p:cNvPr id="48" name="">
             <a:extLst xmlns:a="http://schemas.openxmlformats.org/drawingml/2006/main">
               <a:ext uri="{FF2B5EF4-FFF2-40B4-BE49-F238E27FC236}">
-                <a16:creationId xmlns:a16="http://schemas.microsoft.com/office/drawing/2014/main" id="{7887E1FD-3C87-4D94-9B25-360966F0D344}"/>
+                <a16:creationId xmlns:a16="http://schemas.microsoft.com/office/drawing/2014/main" id="{34F4B509-8582-458A-B051-54E5774C9451}"/>
               </a:ext>
             </a:extLst>
           </p:cNvPr>
@@ -6451,7 +6451,7 @@
           <p:cNvPr id="49" name="">
             <a:extLst xmlns:a="http://schemas.openxmlformats.org/drawingml/2006/main">
               <a:ext uri="{FF2B5EF4-FFF2-40B4-BE49-F238E27FC236}">
-                <a16:creationId xmlns:a16="http://schemas.microsoft.com/office/drawing/2014/main" id="{A1E9C5BC-6285-4E58-A118-EC3BA05D8DE3}"/>
+                <a16:creationId xmlns:a16="http://schemas.microsoft.com/office/drawing/2014/main" id="{8FBF0A8C-C763-481E-80B6-61630A4C4987}"/>
               </a:ext>
             </a:extLst>
           </p:cNvPr>
@@ -6531,7 +6531,7 @@
           <p:cNvPr id="50" name="">
             <a:extLst xmlns:a="http://schemas.openxmlformats.org/drawingml/2006/main">
               <a:ext uri="{FF2B5EF4-FFF2-40B4-BE49-F238E27FC236}">
-                <a16:creationId xmlns:a16="http://schemas.microsoft.com/office/drawing/2014/main" id="{BE2F2B45-4B45-4797-9794-51B32193E5ED}"/>
+                <a16:creationId xmlns:a16="http://schemas.microsoft.com/office/drawing/2014/main" id="{95967649-0518-47DA-A1D5-E497F2DE3ED5}"/>
               </a:ext>
             </a:extLst>
           </p:cNvPr>
@@ -6588,7 +6588,7 @@
           <p:cNvPr id="51" name="">
             <a:extLst xmlns:a="http://schemas.openxmlformats.org/drawingml/2006/main">
               <a:ext uri="{FF2B5EF4-FFF2-40B4-BE49-F238E27FC236}">
-                <a16:creationId xmlns:a16="http://schemas.microsoft.com/office/drawing/2014/main" id="{5FD4010F-E058-4A06-8A98-A9080879628B}"/>
+                <a16:creationId xmlns:a16="http://schemas.microsoft.com/office/drawing/2014/main" id="{37025B08-5657-45B4-8133-7B1801CBCCF2}"/>
               </a:ext>
             </a:extLst>
           </p:cNvPr>
@@ -6668,7 +6668,7 @@
           <p:cNvPr id="52" name="">
             <a:extLst xmlns:a="http://schemas.openxmlformats.org/drawingml/2006/main">
               <a:ext uri="{FF2B5EF4-FFF2-40B4-BE49-F238E27FC236}">
-                <a16:creationId xmlns:a16="http://schemas.microsoft.com/office/drawing/2014/main" id="{5632D49E-E48A-44F3-B1A7-0FC69E0AB098}"/>
+                <a16:creationId xmlns:a16="http://schemas.microsoft.com/office/drawing/2014/main" id="{7F37FA0C-696B-4961-BCA6-73729631A901}"/>
               </a:ext>
             </a:extLst>
           </p:cNvPr>
@@ -6725,7 +6725,7 @@
           <p:cNvPr id="53" name="">
             <a:extLst xmlns:a="http://schemas.openxmlformats.org/drawingml/2006/main">
               <a:ext uri="{FF2B5EF4-FFF2-40B4-BE49-F238E27FC236}">
-                <a16:creationId xmlns:a16="http://schemas.microsoft.com/office/drawing/2014/main" id="{000A73E7-170F-4064-AD62-43F6CF5BD4FE}"/>
+                <a16:creationId xmlns:a16="http://schemas.microsoft.com/office/drawing/2014/main" id="{44F9105A-48E7-45EF-927A-D09DEEE5A35F}"/>
               </a:ext>
             </a:extLst>
           </p:cNvPr>
@@ -6805,7 +6805,7 @@
           <p:cNvPr id="54" name="">
             <a:extLst xmlns:a="http://schemas.openxmlformats.org/drawingml/2006/main">
               <a:ext uri="{FF2B5EF4-FFF2-40B4-BE49-F238E27FC236}">
-                <a16:creationId xmlns:a16="http://schemas.microsoft.com/office/drawing/2014/main" id="{E07FF912-611A-45B1-BDC7-62654EB89C16}"/>
+                <a16:creationId xmlns:a16="http://schemas.microsoft.com/office/drawing/2014/main" id="{DE97F408-6476-4206-A082-3F0C350AB0DF}"/>
               </a:ext>
             </a:extLst>
           </p:cNvPr>
@@ -6837,7 +6837,7 @@
           <p:cNvPr id="55" name="">
             <a:extLst xmlns:a="http://schemas.openxmlformats.org/drawingml/2006/main">
               <a:ext uri="{FF2B5EF4-FFF2-40B4-BE49-F238E27FC236}">
-                <a16:creationId xmlns:a16="http://schemas.microsoft.com/office/drawing/2014/main" id="{E665115B-3F4A-49AB-A1E4-B7AB880C7F34}"/>
+                <a16:creationId xmlns:a16="http://schemas.microsoft.com/office/drawing/2014/main" id="{6DA2024C-C66E-4CEF-B787-F6EE3F9F7522}"/>
               </a:ext>
             </a:extLst>
           </p:cNvPr>
@@ -6892,7 +6892,7 @@
     </p:spTree>
     <p:extLst>
       <p:ext uri="{BB962C8B-B14F-4D97-AF65-F5344CB8AC3E}">
-        <p14:creationId xmlns:p14="http://schemas.microsoft.com/office/powerpoint/2010/main" val="645214022"/>
+        <p14:creationId xmlns:p14="http://schemas.microsoft.com/office/powerpoint/2010/main" val="1873447589"/>
       </p:ext>
     </p:extLst>
   </p:cSld>
@@ -6923,7 +6923,7 @@
           <p:cNvPr id="44" name="">
             <a:extLst xmlns:a="http://schemas.openxmlformats.org/drawingml/2006/main">
               <a:ext uri="{FF2B5EF4-FFF2-40B4-BE49-F238E27FC236}">
-                <a16:creationId xmlns:a16="http://schemas.microsoft.com/office/drawing/2014/main" id="{7DDFD384-15DB-4D10-AA65-5EBD3777EC37}"/>
+                <a16:creationId xmlns:a16="http://schemas.microsoft.com/office/drawing/2014/main" id="{ED649951-CF2F-4DB0-9731-28F2512208AB}"/>
               </a:ext>
             </a:extLst>
           </p:cNvPr>
@@ -6953,7 +6953,7 @@
           <p:cNvPr id="2" name="">
             <a:extLst xmlns:a="http://schemas.openxmlformats.org/drawingml/2006/main">
               <a:ext uri="{FF2B5EF4-FFF2-40B4-BE49-F238E27FC236}">
-                <a16:creationId xmlns:a16="http://schemas.microsoft.com/office/drawing/2014/main" id="{D9EE927B-9891-409A-BAB0-967133C4100A}"/>
+                <a16:creationId xmlns:a16="http://schemas.microsoft.com/office/drawing/2014/main" id="{A91E3FD0-E3A5-489E-B35A-75D32A1FC587}"/>
               </a:ext>
             </a:extLst>
           </p:cNvPr>
@@ -7010,7 +7010,7 @@
           <p:cNvPr id="3" name="">
             <a:extLst xmlns:a="http://schemas.openxmlformats.org/drawingml/2006/main">
               <a:ext uri="{FF2B5EF4-FFF2-40B4-BE49-F238E27FC236}">
-                <a16:creationId xmlns:a16="http://schemas.microsoft.com/office/drawing/2014/main" id="{A8893B91-FD05-4B6E-9FB4-42D5E60D18CC}"/>
+                <a16:creationId xmlns:a16="http://schemas.microsoft.com/office/drawing/2014/main" id="{31F5EBD1-085A-424F-8A1E-570F4D8B2367}"/>
               </a:ext>
             </a:extLst>
           </p:cNvPr>
@@ -7040,7 +7040,7 @@
           <p:cNvPr id="4" name="">
             <a:extLst xmlns:a="http://schemas.openxmlformats.org/drawingml/2006/main">
               <a:ext uri="{FF2B5EF4-FFF2-40B4-BE49-F238E27FC236}">
-                <a16:creationId xmlns:a16="http://schemas.microsoft.com/office/drawing/2014/main" id="{FDBC120C-F5E1-41CA-BDFA-DB036975FAC6}"/>
+                <a16:creationId xmlns:a16="http://schemas.microsoft.com/office/drawing/2014/main" id="{7546DFB3-DB10-44C4-8C6A-04FD8B6BD24C}"/>
               </a:ext>
             </a:extLst>
           </p:cNvPr>
@@ -7097,7 +7097,7 @@
           <p:cNvPr id="5" name="">
             <a:extLst xmlns:a="http://schemas.openxmlformats.org/drawingml/2006/main">
               <a:ext uri="{FF2B5EF4-FFF2-40B4-BE49-F238E27FC236}">
-                <a16:creationId xmlns:a16="http://schemas.microsoft.com/office/drawing/2014/main" id="{EAB03F45-247E-4ADB-B8F3-E4271BB6D93D}"/>
+                <a16:creationId xmlns:a16="http://schemas.microsoft.com/office/drawing/2014/main" id="{49387929-ABE5-4816-B2AA-E3D8498EE705}"/>
               </a:ext>
             </a:extLst>
           </p:cNvPr>
@@ -7154,7 +7154,7 @@
           <p:cNvPr id="6" name="">
             <a:extLst xmlns:a="http://schemas.openxmlformats.org/drawingml/2006/main">
               <a:ext uri="{FF2B5EF4-FFF2-40B4-BE49-F238E27FC236}">
-                <a16:creationId xmlns:a16="http://schemas.microsoft.com/office/drawing/2014/main" id="{7CBA8390-7FCA-4280-BBE5-C5C8CCBC1717}"/>
+                <a16:creationId xmlns:a16="http://schemas.microsoft.com/office/drawing/2014/main" id="{17B62CA5-A0FC-4C07-B48B-EEDC117445B4}"/>
               </a:ext>
             </a:extLst>
           </p:cNvPr>
@@ -7211,7 +7211,7 @@
           <p:cNvPr id="7" name="">
             <a:extLst xmlns:a="http://schemas.openxmlformats.org/drawingml/2006/main">
               <a:ext uri="{FF2B5EF4-FFF2-40B4-BE49-F238E27FC236}">
-                <a16:creationId xmlns:a16="http://schemas.microsoft.com/office/drawing/2014/main" id="{EE475DC2-2ADD-4C25-9E76-474778D74D20}"/>
+                <a16:creationId xmlns:a16="http://schemas.microsoft.com/office/drawing/2014/main" id="{B2110859-1D46-4549-95FD-D10D426353B0}"/>
               </a:ext>
             </a:extLst>
           </p:cNvPr>
@@ -7241,7 +7241,7 @@
           <p:cNvPr id="8" name="">
             <a:extLst xmlns:a="http://schemas.openxmlformats.org/drawingml/2006/main">
               <a:ext uri="{FF2B5EF4-FFF2-40B4-BE49-F238E27FC236}">
-                <a16:creationId xmlns:a16="http://schemas.microsoft.com/office/drawing/2014/main" id="{AE1E8257-DB93-4F96-88BA-8D610B24E036}"/>
+                <a16:creationId xmlns:a16="http://schemas.microsoft.com/office/drawing/2014/main" id="{6AA4F3B6-DFE9-48C4-8FF2-62FA82045D9F}"/>
               </a:ext>
             </a:extLst>
           </p:cNvPr>
@@ -7298,7 +7298,7 @@
           <p:cNvPr id="9" name="">
             <a:extLst xmlns:a="http://schemas.openxmlformats.org/drawingml/2006/main">
               <a:ext uri="{FF2B5EF4-FFF2-40B4-BE49-F238E27FC236}">
-                <a16:creationId xmlns:a16="http://schemas.microsoft.com/office/drawing/2014/main" id="{E730F7E5-7381-4B13-84D6-1C921DF9AC97}"/>
+                <a16:creationId xmlns:a16="http://schemas.microsoft.com/office/drawing/2014/main" id="{BF480078-83BD-488A-AA87-DB0C7CF65E59}"/>
               </a:ext>
             </a:extLst>
           </p:cNvPr>
@@ -7355,7 +7355,7 @@
           <p:cNvPr id="10" name="">
             <a:extLst xmlns:a="http://schemas.openxmlformats.org/drawingml/2006/main">
               <a:ext uri="{FF2B5EF4-FFF2-40B4-BE49-F238E27FC236}">
-                <a16:creationId xmlns:a16="http://schemas.microsoft.com/office/drawing/2014/main" id="{EEE4D21C-435E-4A53-94B4-012A3256BC41}"/>
+                <a16:creationId xmlns:a16="http://schemas.microsoft.com/office/drawing/2014/main" id="{0E7088FC-55DB-4886-85BB-BD8E0ADF79C3}"/>
               </a:ext>
             </a:extLst>
           </p:cNvPr>
@@ -7412,7 +7412,7 @@
           <p:cNvPr id="11" name="">
             <a:extLst xmlns:a="http://schemas.openxmlformats.org/drawingml/2006/main">
               <a:ext uri="{FF2B5EF4-FFF2-40B4-BE49-F238E27FC236}">
-                <a16:creationId xmlns:a16="http://schemas.microsoft.com/office/drawing/2014/main" id="{ABD48C57-F6A7-4ACC-8455-95F86AD74252}"/>
+                <a16:creationId xmlns:a16="http://schemas.microsoft.com/office/drawing/2014/main" id="{DE2714D1-3A75-4921-B5D0-00A6F6465F94}"/>
               </a:ext>
             </a:extLst>
           </p:cNvPr>
@@ -7444,7 +7444,7 @@
           <p:cNvPr id="12" name="">
             <a:extLst xmlns:a="http://schemas.openxmlformats.org/drawingml/2006/main">
               <a:ext uri="{FF2B5EF4-FFF2-40B4-BE49-F238E27FC236}">
-                <a16:creationId xmlns:a16="http://schemas.microsoft.com/office/drawing/2014/main" id="{CAB14B5F-EDEB-4296-8705-88B6CE0729D3}"/>
+                <a16:creationId xmlns:a16="http://schemas.microsoft.com/office/drawing/2014/main" id="{999D491F-9479-4598-83DF-18EB29BC732D}"/>
               </a:ext>
             </a:extLst>
           </p:cNvPr>
@@ -7501,7 +7501,7 @@
           <p:cNvPr id="13" name="">
             <a:extLst xmlns:a="http://schemas.openxmlformats.org/drawingml/2006/main">
               <a:ext uri="{FF2B5EF4-FFF2-40B4-BE49-F238E27FC236}">
-                <a16:creationId xmlns:a16="http://schemas.microsoft.com/office/drawing/2014/main" id="{DD15BD3C-145E-4712-894A-D628D4A973C0}"/>
+                <a16:creationId xmlns:a16="http://schemas.microsoft.com/office/drawing/2014/main" id="{C66BB0F2-1E50-4AB8-86DF-B463F3768959}"/>
               </a:ext>
             </a:extLst>
           </p:cNvPr>
@@ -7558,7 +7558,7 @@
           <p:cNvPr id="14" name="">
             <a:extLst xmlns:a="http://schemas.openxmlformats.org/drawingml/2006/main">
               <a:ext uri="{FF2B5EF4-FFF2-40B4-BE49-F238E27FC236}">
-                <a16:creationId xmlns:a16="http://schemas.microsoft.com/office/drawing/2014/main" id="{93E889F7-5B09-4547-82DF-B2BC2359B45B}"/>
+                <a16:creationId xmlns:a16="http://schemas.microsoft.com/office/drawing/2014/main" id="{A02826FA-24AD-4A79-AE40-6347ED72EE09}"/>
               </a:ext>
             </a:extLst>
           </p:cNvPr>
@@ -7615,7 +7615,7 @@
           <p:cNvPr id="15" name="">
             <a:extLst xmlns:a="http://schemas.openxmlformats.org/drawingml/2006/main">
               <a:ext uri="{FF2B5EF4-FFF2-40B4-BE49-F238E27FC236}">
-                <a16:creationId xmlns:a16="http://schemas.microsoft.com/office/drawing/2014/main" id="{3E463ADD-C4DC-4DA0-8F10-5AF21742F9F3}"/>
+                <a16:creationId xmlns:a16="http://schemas.microsoft.com/office/drawing/2014/main" id="{029CDFEE-7D6C-45F4-AFA3-B1A8101EE618}"/>
               </a:ext>
             </a:extLst>
           </p:cNvPr>
@@ -7647,7 +7647,7 @@
           <p:cNvPr id="16" name="">
             <a:extLst xmlns:a="http://schemas.openxmlformats.org/drawingml/2006/main">
               <a:ext uri="{FF2B5EF4-FFF2-40B4-BE49-F238E27FC236}">
-                <a16:creationId xmlns:a16="http://schemas.microsoft.com/office/drawing/2014/main" id="{788D5F49-10DF-4F5B-9C6A-C70DF74CE11D}"/>
+                <a16:creationId xmlns:a16="http://schemas.microsoft.com/office/drawing/2014/main" id="{8A6AB2C7-FCBF-4869-B7AA-09576B7F1990}"/>
               </a:ext>
             </a:extLst>
           </p:cNvPr>
@@ -7704,7 +7704,7 @@
           <p:cNvPr id="17" name="">
             <a:extLst xmlns:a="http://schemas.openxmlformats.org/drawingml/2006/main">
               <a:ext uri="{FF2B5EF4-FFF2-40B4-BE49-F238E27FC236}">
-                <a16:creationId xmlns:a16="http://schemas.microsoft.com/office/drawing/2014/main" id="{4D15703F-84F1-48F7-A0ED-7BEBCDDCBEF0}"/>
+                <a16:creationId xmlns:a16="http://schemas.microsoft.com/office/drawing/2014/main" id="{BFE8D485-4442-42EE-ABEF-AEEA653612CD}"/>
               </a:ext>
             </a:extLst>
           </p:cNvPr>
@@ -7761,7 +7761,7 @@
           <p:cNvPr id="18" name="">
             <a:extLst xmlns:a="http://schemas.openxmlformats.org/drawingml/2006/main">
               <a:ext uri="{FF2B5EF4-FFF2-40B4-BE49-F238E27FC236}">
-                <a16:creationId xmlns:a16="http://schemas.microsoft.com/office/drawing/2014/main" id="{E209C297-064B-4AE6-A727-82218D59CF72}"/>
+                <a16:creationId xmlns:a16="http://schemas.microsoft.com/office/drawing/2014/main" id="{CD822F91-ABEE-4921-ABA6-BF94F7B9D884}"/>
               </a:ext>
             </a:extLst>
           </p:cNvPr>
@@ -7818,7 +7818,7 @@
           <p:cNvPr id="19" name="">
             <a:extLst xmlns:a="http://schemas.openxmlformats.org/drawingml/2006/main">
               <a:ext uri="{FF2B5EF4-FFF2-40B4-BE49-F238E27FC236}">
-                <a16:creationId xmlns:a16="http://schemas.microsoft.com/office/drawing/2014/main" id="{021BED3B-79A2-4D2D-BFC1-177C924A84DB}"/>
+                <a16:creationId xmlns:a16="http://schemas.microsoft.com/office/drawing/2014/main" id="{AD602451-3E5E-423D-B1C4-F01DE56C432A}"/>
               </a:ext>
             </a:extLst>
           </p:cNvPr>
@@ -7850,7 +7850,7 @@
           <p:cNvPr id="20" name="">
             <a:extLst xmlns:a="http://schemas.openxmlformats.org/drawingml/2006/main">
               <a:ext uri="{FF2B5EF4-FFF2-40B4-BE49-F238E27FC236}">
-                <a16:creationId xmlns:a16="http://schemas.microsoft.com/office/drawing/2014/main" id="{38F5C037-2343-4E21-B730-04592DA1A338}"/>
+                <a16:creationId xmlns:a16="http://schemas.microsoft.com/office/drawing/2014/main" id="{78A13C51-0304-4754-BB0F-851C9DF9B057}"/>
               </a:ext>
             </a:extLst>
           </p:cNvPr>
@@ -7907,7 +7907,7 @@
           <p:cNvPr id="21" name="">
             <a:extLst xmlns:a="http://schemas.openxmlformats.org/drawingml/2006/main">
               <a:ext uri="{FF2B5EF4-FFF2-40B4-BE49-F238E27FC236}">
-                <a16:creationId xmlns:a16="http://schemas.microsoft.com/office/drawing/2014/main" id="{6458420E-AA1D-41E1-91AC-FFE24628C7CC}"/>
+                <a16:creationId xmlns:a16="http://schemas.microsoft.com/office/drawing/2014/main" id="{9EAD3F2B-766F-4A44-9F4F-F41C4A896726}"/>
               </a:ext>
             </a:extLst>
           </p:cNvPr>
@@ -7964,7 +7964,7 @@
           <p:cNvPr id="22" name="">
             <a:extLst xmlns:a="http://schemas.openxmlformats.org/drawingml/2006/main">
               <a:ext uri="{FF2B5EF4-FFF2-40B4-BE49-F238E27FC236}">
-                <a16:creationId xmlns:a16="http://schemas.microsoft.com/office/drawing/2014/main" id="{49CF4578-9A43-48EA-92E7-4FFD2B5A9677}"/>
+                <a16:creationId xmlns:a16="http://schemas.microsoft.com/office/drawing/2014/main" id="{92C34A7C-2C2F-441C-8A88-74AAD68E29BC}"/>
               </a:ext>
             </a:extLst>
           </p:cNvPr>
@@ -8021,7 +8021,7 @@
           <p:cNvPr id="23" name="">
             <a:extLst xmlns:a="http://schemas.openxmlformats.org/drawingml/2006/main">
               <a:ext uri="{FF2B5EF4-FFF2-40B4-BE49-F238E27FC236}">
-                <a16:creationId xmlns:a16="http://schemas.microsoft.com/office/drawing/2014/main" id="{DED79EB1-5E6F-4179-8EB9-AEB1CC7D6B23}"/>
+                <a16:creationId xmlns:a16="http://schemas.microsoft.com/office/drawing/2014/main" id="{007CCB9D-2AA6-440D-A396-6586A4ECB802}"/>
               </a:ext>
             </a:extLst>
           </p:cNvPr>
@@ -8053,7 +8053,7 @@
           <p:cNvPr id="24" name="">
             <a:extLst xmlns:a="http://schemas.openxmlformats.org/drawingml/2006/main">
               <a:ext uri="{FF2B5EF4-FFF2-40B4-BE49-F238E27FC236}">
-                <a16:creationId xmlns:a16="http://schemas.microsoft.com/office/drawing/2014/main" id="{A5D0315C-7CFF-472F-BB6C-8492ED86694D}"/>
+                <a16:creationId xmlns:a16="http://schemas.microsoft.com/office/drawing/2014/main" id="{3192DA2E-5CCD-4D08-8E41-1B6E32945F4E}"/>
               </a:ext>
             </a:extLst>
           </p:cNvPr>
@@ -8110,7 +8110,7 @@
           <p:cNvPr id="25" name="">
             <a:extLst xmlns:a="http://schemas.openxmlformats.org/drawingml/2006/main">
               <a:ext uri="{FF2B5EF4-FFF2-40B4-BE49-F238E27FC236}">
-                <a16:creationId xmlns:a16="http://schemas.microsoft.com/office/drawing/2014/main" id="{5FF1C964-B2A2-493D-9075-460014E5B2D2}"/>
+                <a16:creationId xmlns:a16="http://schemas.microsoft.com/office/drawing/2014/main" id="{390CF50E-DB33-41C3-BB57-197D1AF0D5CD}"/>
               </a:ext>
             </a:extLst>
           </p:cNvPr>
@@ -8167,7 +8167,7 @@
           <p:cNvPr id="26" name="">
             <a:extLst xmlns:a="http://schemas.openxmlformats.org/drawingml/2006/main">
               <a:ext uri="{FF2B5EF4-FFF2-40B4-BE49-F238E27FC236}">
-                <a16:creationId xmlns:a16="http://schemas.microsoft.com/office/drawing/2014/main" id="{F1D2725E-BF1D-483C-965E-231A50180399}"/>
+                <a16:creationId xmlns:a16="http://schemas.microsoft.com/office/drawing/2014/main" id="{1FFA062E-562A-49DC-B7CA-39914594B82D}"/>
               </a:ext>
             </a:extLst>
           </p:cNvPr>
@@ -8224,7 +8224,7 @@
           <p:cNvPr id="27" name="">
             <a:extLst xmlns:a="http://schemas.openxmlformats.org/drawingml/2006/main">
               <a:ext uri="{FF2B5EF4-FFF2-40B4-BE49-F238E27FC236}">
-                <a16:creationId xmlns:a16="http://schemas.microsoft.com/office/drawing/2014/main" id="{9907793F-B9E8-4805-869A-B869C5A0471B}"/>
+                <a16:creationId xmlns:a16="http://schemas.microsoft.com/office/drawing/2014/main" id="{4AED417C-B817-4668-A321-639B33E0A184}"/>
               </a:ext>
             </a:extLst>
           </p:cNvPr>
@@ -8256,7 +8256,7 @@
           <p:cNvPr id="28" name="">
             <a:extLst xmlns:a="http://schemas.openxmlformats.org/drawingml/2006/main">
               <a:ext uri="{FF2B5EF4-FFF2-40B4-BE49-F238E27FC236}">
-                <a16:creationId xmlns:a16="http://schemas.microsoft.com/office/drawing/2014/main" id="{BEFC357C-CB5C-47BD-AB73-56544057B806}"/>
+                <a16:creationId xmlns:a16="http://schemas.microsoft.com/office/drawing/2014/main" id="{2930A085-87C2-4DD2-8B40-D13E7CB65F18}"/>
               </a:ext>
             </a:extLst>
           </p:cNvPr>
@@ -8313,7 +8313,7 @@
           <p:cNvPr id="29" name="">
             <a:extLst xmlns:a="http://schemas.openxmlformats.org/drawingml/2006/main">
               <a:ext uri="{FF2B5EF4-FFF2-40B4-BE49-F238E27FC236}">
-                <a16:creationId xmlns:a16="http://schemas.microsoft.com/office/drawing/2014/main" id="{7FB0C5BB-49B7-4AF6-84F4-B8065FDAD0FA}"/>
+                <a16:creationId xmlns:a16="http://schemas.microsoft.com/office/drawing/2014/main" id="{842112DE-65D5-4904-845D-999DF09F68DF}"/>
               </a:ext>
             </a:extLst>
           </p:cNvPr>
@@ -8370,7 +8370,7 @@
           <p:cNvPr id="30" name="">
             <a:extLst xmlns:a="http://schemas.openxmlformats.org/drawingml/2006/main">
               <a:ext uri="{FF2B5EF4-FFF2-40B4-BE49-F238E27FC236}">
-                <a16:creationId xmlns:a16="http://schemas.microsoft.com/office/drawing/2014/main" id="{CA536630-B521-4511-8B79-EF5BF1FA871E}"/>
+                <a16:creationId xmlns:a16="http://schemas.microsoft.com/office/drawing/2014/main" id="{79602463-46FE-4589-94AD-B0007FACBED0}"/>
               </a:ext>
             </a:extLst>
           </p:cNvPr>
@@ -8427,7 +8427,7 @@
           <p:cNvPr id="31" name="">
             <a:extLst xmlns:a="http://schemas.openxmlformats.org/drawingml/2006/main">
               <a:ext uri="{FF2B5EF4-FFF2-40B4-BE49-F238E27FC236}">
-                <a16:creationId xmlns:a16="http://schemas.microsoft.com/office/drawing/2014/main" id="{C6331603-B5C4-4255-9B27-209126C899FB}"/>
+                <a16:creationId xmlns:a16="http://schemas.microsoft.com/office/drawing/2014/main" id="{FEAB12DD-0DA5-4EBE-93BA-E7921B72CADD}"/>
               </a:ext>
             </a:extLst>
           </p:cNvPr>
@@ -8484,7 +8484,7 @@
           <p:cNvPr id="32" name="">
             <a:extLst xmlns:a="http://schemas.openxmlformats.org/drawingml/2006/main">
               <a:ext uri="{FF2B5EF4-FFF2-40B4-BE49-F238E27FC236}">
-                <a16:creationId xmlns:a16="http://schemas.microsoft.com/office/drawing/2014/main" id="{91999C2C-E421-4B2C-B41A-0D201111FB68}"/>
+                <a16:creationId xmlns:a16="http://schemas.microsoft.com/office/drawing/2014/main" id="{4B1C3085-FC3E-44FE-9C7A-EFC3BAED035B}"/>
               </a:ext>
             </a:extLst>
           </p:cNvPr>
@@ -8541,7 +8541,7 @@
           <p:cNvPr id="33" name="">
             <a:extLst xmlns:a="http://schemas.openxmlformats.org/drawingml/2006/main">
               <a:ext uri="{FF2B5EF4-FFF2-40B4-BE49-F238E27FC236}">
-                <a16:creationId xmlns:a16="http://schemas.microsoft.com/office/drawing/2014/main" id="{35361C99-6D56-4AEE-A832-D84968A13682}"/>
+                <a16:creationId xmlns:a16="http://schemas.microsoft.com/office/drawing/2014/main" id="{C233F415-48F0-4FD7-B40D-7D778BA10B52}"/>
               </a:ext>
             </a:extLst>
           </p:cNvPr>
@@ -8598,7 +8598,7 @@
           <p:cNvPr id="34" name="">
             <a:extLst xmlns:a="http://schemas.openxmlformats.org/drawingml/2006/main">
               <a:ext uri="{FF2B5EF4-FFF2-40B4-BE49-F238E27FC236}">
-                <a16:creationId xmlns:a16="http://schemas.microsoft.com/office/drawing/2014/main" id="{3132AFD9-D873-4706-9CD3-663F91576C1E}"/>
+                <a16:creationId xmlns:a16="http://schemas.microsoft.com/office/drawing/2014/main" id="{34FAB92B-E72F-4F73-AFA7-90D529F11FFD}"/>
               </a:ext>
             </a:extLst>
           </p:cNvPr>
@@ -8655,7 +8655,7 @@
           <p:cNvPr id="35" name="">
             <a:extLst xmlns:a="http://schemas.openxmlformats.org/drawingml/2006/main">
               <a:ext uri="{FF2B5EF4-FFF2-40B4-BE49-F238E27FC236}">
-                <a16:creationId xmlns:a16="http://schemas.microsoft.com/office/drawing/2014/main" id="{56C7C535-8282-4998-A19F-0FC3A4BE5D28}"/>
+                <a16:creationId xmlns:a16="http://schemas.microsoft.com/office/drawing/2014/main" id="{91BB7EF2-02B8-4202-9A4F-564072168E9F}"/>
               </a:ext>
             </a:extLst>
           </p:cNvPr>
@@ -8712,7 +8712,7 @@
           <p:cNvPr id="36" name="">
             <a:extLst xmlns:a="http://schemas.openxmlformats.org/drawingml/2006/main">
               <a:ext uri="{FF2B5EF4-FFF2-40B4-BE49-F238E27FC236}">
-                <a16:creationId xmlns:a16="http://schemas.microsoft.com/office/drawing/2014/main" id="{89E2B748-F67C-41AA-BE30-214DB183D018}"/>
+                <a16:creationId xmlns:a16="http://schemas.microsoft.com/office/drawing/2014/main" id="{9F7064DF-9209-4DE3-9F5E-F7C97B1B16E4}"/>
               </a:ext>
             </a:extLst>
           </p:cNvPr>
@@ -8769,7 +8769,7 @@
           <p:cNvPr id="37" name="">
             <a:extLst xmlns:a="http://schemas.openxmlformats.org/drawingml/2006/main">
               <a:ext uri="{FF2B5EF4-FFF2-40B4-BE49-F238E27FC236}">
-                <a16:creationId xmlns:a16="http://schemas.microsoft.com/office/drawing/2014/main" id="{050FADC4-4A28-416B-A3ED-5E40E86B5774}"/>
+                <a16:creationId xmlns:a16="http://schemas.microsoft.com/office/drawing/2014/main" id="{39BDB328-2C63-450A-A0CE-B589285272C9}"/>
               </a:ext>
             </a:extLst>
           </p:cNvPr>
@@ -8826,7 +8826,7 @@
           <p:cNvPr id="38" name="">
             <a:extLst xmlns:a="http://schemas.openxmlformats.org/drawingml/2006/main">
               <a:ext uri="{FF2B5EF4-FFF2-40B4-BE49-F238E27FC236}">
-                <a16:creationId xmlns:a16="http://schemas.microsoft.com/office/drawing/2014/main" id="{A99C86DA-59A7-4ACD-AA58-97CA6C3230D0}"/>
+                <a16:creationId xmlns:a16="http://schemas.microsoft.com/office/drawing/2014/main" id="{7A9F2AE7-49B0-46E1-B399-D9B36876FF48}"/>
               </a:ext>
             </a:extLst>
           </p:cNvPr>
@@ -8883,7 +8883,7 @@
           <p:cNvPr id="39" name="">
             <a:extLst xmlns:a="http://schemas.openxmlformats.org/drawingml/2006/main">
               <a:ext uri="{FF2B5EF4-FFF2-40B4-BE49-F238E27FC236}">
-                <a16:creationId xmlns:a16="http://schemas.microsoft.com/office/drawing/2014/main" id="{49CA5133-DB39-4D95-8429-2F37D4BE68DB}"/>
+                <a16:creationId xmlns:a16="http://schemas.microsoft.com/office/drawing/2014/main" id="{1F8AA73E-FF92-481F-9B6E-1E916DD4DE71}"/>
               </a:ext>
             </a:extLst>
           </p:cNvPr>
@@ -8940,7 +8940,7 @@
           <p:cNvPr id="40" name="">
             <a:extLst xmlns:a="http://schemas.openxmlformats.org/drawingml/2006/main">
               <a:ext uri="{FF2B5EF4-FFF2-40B4-BE49-F238E27FC236}">
-                <a16:creationId xmlns:a16="http://schemas.microsoft.com/office/drawing/2014/main" id="{59C22003-25EA-4C26-82B6-A71F301C51D6}"/>
+                <a16:creationId xmlns:a16="http://schemas.microsoft.com/office/drawing/2014/main" id="{1B03CC05-FBB9-4A05-AA64-D91637343998}"/>
               </a:ext>
             </a:extLst>
           </p:cNvPr>
@@ -8997,7 +8997,7 @@
           <p:cNvPr id="41" name="">
             <a:extLst xmlns:a="http://schemas.openxmlformats.org/drawingml/2006/main">
               <a:ext uri="{FF2B5EF4-FFF2-40B4-BE49-F238E27FC236}">
-                <a16:creationId xmlns:a16="http://schemas.microsoft.com/office/drawing/2014/main" id="{2AD13A96-DE26-49BC-A38D-A74BBFB0730B}"/>
+                <a16:creationId xmlns:a16="http://schemas.microsoft.com/office/drawing/2014/main" id="{82E9390F-CCEA-4ECF-A1B5-A8FA8BE97DC7}"/>
               </a:ext>
             </a:extLst>
           </p:cNvPr>
@@ -9054,7 +9054,7 @@
           <p:cNvPr id="42" name="">
             <a:extLst xmlns:a="http://schemas.openxmlformats.org/drawingml/2006/main">
               <a:ext uri="{FF2B5EF4-FFF2-40B4-BE49-F238E27FC236}">
-                <a16:creationId xmlns:a16="http://schemas.microsoft.com/office/drawing/2014/main" id="{F6FD1984-0891-45BA-8E90-D7584B7FBCE2}"/>
+                <a16:creationId xmlns:a16="http://schemas.microsoft.com/office/drawing/2014/main" id="{33D287B5-6CE7-48DE-B665-AA69CCAC83D8}"/>
               </a:ext>
             </a:extLst>
           </p:cNvPr>
@@ -9111,7 +9111,7 @@
           <p:cNvPr id="43" name="">
             <a:extLst xmlns:a="http://schemas.openxmlformats.org/drawingml/2006/main">
               <a:ext uri="{FF2B5EF4-FFF2-40B4-BE49-F238E27FC236}">
-                <a16:creationId xmlns:a16="http://schemas.microsoft.com/office/drawing/2014/main" id="{8745ED2B-4A5E-41E9-A744-6699155E777C}"/>
+                <a16:creationId xmlns:a16="http://schemas.microsoft.com/office/drawing/2014/main" id="{D016D450-E71A-4780-930D-2345935619D5}"/>
               </a:ext>
             </a:extLst>
           </p:cNvPr>
@@ -9166,7 +9166,7 @@
     </p:spTree>
     <p:extLst>
       <p:ext uri="{BB962C8B-B14F-4D97-AF65-F5344CB8AC3E}">
-        <p14:creationId xmlns:p14="http://schemas.microsoft.com/office/powerpoint/2010/main" val="278598998"/>
+        <p14:creationId xmlns:p14="http://schemas.microsoft.com/office/powerpoint/2010/main" val="663571164"/>
       </p:ext>
     </p:extLst>
   </p:cSld>

--- a/Docs/PRESENTATION/2. 최종/09285_백준현_AI_Master_최종발표자료_v12.pptx
+++ b/Docs/PRESENTATION/2. 최종/09285_백준현_AI_Master_최종발표자료_v12.pptx
@@ -2,16 +2,16 @@
 <file path=ppt/presentation.xml><?xml version="1.0" encoding="utf-8"?>
 <p:presentation xmlns:p="http://schemas.openxmlformats.org/presentationml/2006/main">
   <p:sldMasterIdLst>
-    <p:sldMasterId xmlns:r="http://schemas.openxmlformats.org/officeDocument/2006/relationships" id="2147483648" r:id="R6c891491c8e04eb4"/>
+    <p:sldMasterId xmlns:r="http://schemas.openxmlformats.org/officeDocument/2006/relationships" id="2147483648" r:id="R120cfde4a0d343d0"/>
   </p:sldMasterIdLst>
   <p:notesMasterIdLst>
-    <p:notesMasterId xmlns:r="http://schemas.openxmlformats.org/officeDocument/2006/relationships" r:id="R903e2cdfe67945be"/>
+    <p:notesMasterId xmlns:r="http://schemas.openxmlformats.org/officeDocument/2006/relationships" r:id="R504d32da3470482a"/>
   </p:notesMasterIdLst>
   <p:sldIdLst>
-    <p:sldId xmlns:r="http://schemas.openxmlformats.org/officeDocument/2006/relationships" id="256" r:id="R91dd1c551ab94144"/>
-    <p:sldId xmlns:r="http://schemas.openxmlformats.org/officeDocument/2006/relationships" id="257" r:id="Rd4e72466c455458e"/>
-    <p:sldId xmlns:r="http://schemas.openxmlformats.org/officeDocument/2006/relationships" id="258" r:id="R000df1ffa86644c2"/>
-    <p:sldId xmlns:r="http://schemas.openxmlformats.org/officeDocument/2006/relationships" id="259" r:id="R95d09c6520df4eea"/>
+    <p:sldId xmlns:r="http://schemas.openxmlformats.org/officeDocument/2006/relationships" id="256" r:id="R95ece440bdf64b3e"/>
+    <p:sldId xmlns:r="http://schemas.openxmlformats.org/officeDocument/2006/relationships" id="257" r:id="R3775560e44464df3"/>
+    <p:sldId xmlns:r="http://schemas.openxmlformats.org/officeDocument/2006/relationships" id="258" r:id="R85b54e72740445d9"/>
+    <p:sldId xmlns:r="http://schemas.openxmlformats.org/officeDocument/2006/relationships" id="259" r:id="Rc46d944b9d494fc8"/>
   </p:sldIdLst>
   <p:sldSz cx="12192000" cy="6858000"/>
   <p:notesSz cx="6858000" cy="9144000"/>
@@ -445,7 +445,7 @@
           <a:lstStyle xmlns:a="http://schemas.openxmlformats.org/drawingml/2006/main"/>
           <a:p xmlns:a="http://schemas.openxmlformats.org/drawingml/2006/main">
             <a:r>
-              <a:t>[시간 배분] 개요 2분, 아키텍처 4분, 핵심 기술 과제 4분. 슬라이드를 넘기기 전에 시간을 확인한다.</a:t>
+              <a:t>[시간 배분] 문제·기능 2분, 아키텍처 3분, 핵심 기술 과제 4분으로 약 9분이다. 10분 제한에 1분 여유를 남긴 배분이므로 슬라이드를 넘기기 전에 시간을 확인한다.</a:t>
             </a:r>
           </a:p>
           <a:p xmlns:a="http://schemas.openxmlformats.org/drawingml/2006/main">
@@ -550,7 +550,7 @@
           </a:p>
           <a:p xmlns:a="http://schemas.openxmlformats.org/drawingml/2006/main">
             <a:r>
-              <a:t>아래 수치는 분모가 서로 다르니 합쳐 읽지 말아 주십시오. 28/28은 회사 LLM Live 15개 Case에서 나온 Action 단계, 3/3은 Task Context Agent 전용 Live, 20/20은 테스트 Gmail의 비식별 합성 메일 수용시험, pytest는 코드 회귀입니다. 회사 메일함 전체 정확도가 아닙니다. 체감 시간은 신뢰할 Baseline을 얻지 못해 추정치 대신 미측정으로 적었습니다.</a:t>
+              <a:t>아래 수치는 분모가 서로 다르니 합쳐 읽지 말아 주십시오. 28/28은 회사 LLM Live 15개 Case에서 나온 Action 단계, 3/3은 Task Context Agent 전용 Live, 20/20은 테스트 Gmail의 비식별 합성 메일 수용시험, pytest는 코드 회귀입니다. 회사 메일함 전체 정확도가 아닙니다. 체감 시간은 신뢰할 Baseline을 얻지 못해 추정치 대신 미측정으로 적었습니다. 측정하려면 같은 메일 묶음을 손으로 분류할 때와 이 도구를 쓸 때의 소요를 같은 사용자가 번갈아 재야 하는데, 사용자가 저 한 명이라 순서 효과를 걷어낼 방법이 없었습니다.</a:t>
             </a:r>
           </a:p>
           <a:p xmlns:a="http://schemas.openxmlformats.org/drawingml/2006/main">
@@ -685,7 +685,7 @@
           </a:p>
           <a:p xmlns:a="http://schemas.openxmlformats.org/drawingml/2006/main">
             <a:r>
-              <a:t>랭그래프를 왜 쓰지 않았는지 물으실 수 있어 먼저 말씀드리겠습니다. 이 시스템은 에이전트가 하나이고, 상태는 태스크 다섯 개와 행동 일곱 개로 닫혀 있습니다. 그래서 파이썬 상태와 가드만으로 흐름이 단순하게 유지되고, 무엇보다 검증이 쉬웠습니다. 프레임워크를 얹으면 의존성은 늘지만 이 범위에서는 동작이 달라지지 않습니다. 분기와 중단, 재개가 지금보다 복잡해지는 시점에 랭그래프를 다시 검토하겠습니다.</a:t>
+              <a:t>랭그래프도 쓰지 않았습니다. 에이전트가 하나이고 상태가 Task 다섯 개와 Action 일곱 개로 닫혀 있어, 파이썬 상태와 가드만으로 검증이 더 쉬웠습니다. 분기와 중단, 재개가 복잡해지는 시점에 다시 검토하겠습니다.</a:t>
             </a:r>
           </a:p>
           <a:p xmlns:a="http://schemas.openxmlformats.org/drawingml/2006/main">
@@ -800,7 +800,7 @@
           <a:lstStyle xmlns:a="http://schemas.openxmlformats.org/drawingml/2006/main"/>
           <a:p xmlns:a="http://schemas.openxmlformats.org/drawingml/2006/main">
             <a:r>
-              <a:t>이 슬라이드의 난제부터 말씀드리겠습니다. 저는 이미 Agent를 쓰고 있었습니다. 문제는 그 Agent가 결론을 하나만 돌려줬다는 것입니다. 관계 하나, 대상 하나, 행동 하나에 설명 한 줄입니다. 이러면 모델이 후보를 실제로 견주고 고른 것인지, 결론을 먼저 정하고 그럴듯한 설명을 붙인 것인지 밖에서 구분할 방법이 없습니다. 멘토님 피드백도 매번 같았습니다. 룰 베이스처럼 보인다, 어떤 후보를 검토했는지 보여 달라. 판단의 품질이 아니라 판단의 검증 가능성이 막힌 지점이었습니다.</a:t>
+              <a:t>이 슬라이드의 난제부터 말씀드리겠습니다. 저는 이미 Agent를 쓰고 있었는데, 그 Agent가 결론을 하나만 돌려줬습니다. 관계 하나, 대상 하나, 행동 하나에 설명 한 줄입니다. 이러면 모델이 후보를 실제로 견줬는지, 결론을 먼저 정하고 설명을 붙였는지 밖에서 구분할 방법이 없습니다. 멘토님 피드백도 매번 같았습니다. 룰 베이스처럼 보인다, 어떤 후보를 검토했는지 보여 달라. 막힌 곳은 판단의 품질이 아니라 검증 가능성이었습니다.</a:t>
             </a:r>
           </a:p>
           <a:p xmlns:a="http://schemas.openxmlformats.org/drawingml/2006/main">
@@ -810,7 +810,7 @@
           </a:p>
           <a:p xmlns:a="http://schemas.openxmlformats.org/drawingml/2006/main">
             <a:r>
-              <a:t>그래서 적용한 기법이 화면에 적힌 제한적 다중 가설 숙고입니다. 먼저 분명히 해 두겠습니다. 트리 오브 소트를 구현한 것이 아닙니다. 후보 생성과 평가를 분리한다는 아이디어만 참고했고, 후보 두세 개, 평가 한 번, 재검색 한 번으로 제한했습니다. 메일 한 건을 업무로 옮기는 판단은 단계가 깊지 않은 대신 틀렸을 때 비용이 업무 데이터 오변경이기 때문입니다. 생성과 평가를 서로 다른 호출로 나눈 것이 핵심입니다. 생성 단계는 점수를 매기지 않고, 평가 단계는 새로 만들지 못합니다. 그래서 화면에 남는 후보 목록이 사후 설명이 아니라 실제로 비교된 기록이 됩니다.</a:t>
+              <a:t>그래서 적용한 기법이 화면에 적힌 제한적 다중 가설 숙고입니다. 트리 오브 소트를 구현한 것이 아니라, 후보 생성과 평가를 분리한다는 아이디어만 참고했습니다. 메일 한 건을 업무로 옮기는 판단은 단계가 깊지 않은 대신 틀렸을 때 비용이 업무 데이터 오변경이라, 후보 두세 개, 평가 한 번, 재검색 한 번으로 묶고 결정론적 가드와 사용자 승인으로 막는 쪽을 택했습니다. 핵심은 생성과 평가를 서로 다른 호출로 나눈 것입니다. 생성 단계는 점수를 매기지 않고, 평가 단계는 새로 만들지 못합니다. 그래서 화면에 남는 후보 목록이 사후 설명이 아니라 실제로 비교된 기록이 됩니다.</a:t>
             </a:r>
           </a:p>
           <a:p xmlns:a="http://schemas.openxmlformats.org/drawingml/2006/main">
@@ -820,7 +820,7 @@
           </a:p>
           <a:p xmlns:a="http://schemas.openxmlformats.org/drawingml/2006/main">
             <a:r>
-              <a:t>효과는 같은 코드에서 기능만 껐다 켜서 측정했습니다. 기존 열다섯 개 Case는 양쪽이 똑같이 15/15, Action 28/28이고 소요시간만 약 삼십 퍼센트 늘었습니다. 숙고가 실제 발동하는 전용 네 개 케이스는 엘엘엠 출력이 회차마다 달라져서 각 설정을 세 번씩 돌렸습니다. 통과 수는 켠 쪽이 삼, 삼, 이이고 끈 쪽이 이, 이, 이입니다. 한 회차 숫자를 결론으로 쓰지 않았습니다. 세 번 모두 재현되는 차이는 한 건입니다. 요청자가 같고 대상 시스템만 다른 유사 업무가 둘 있을 때, 단일 결론 경로는 세 번 모두 둘 중 하나에 그대로 연결했고, 두 단계 경로는 세 번 모두 사용자 확인으로 닫았습니다. 제가 개선했다고 말하는 범위는 이 한 건입니다. 엘엘엠을 호출하지 않는 목 경로에서는 양쪽이 모두 사 대 사로 차이가 없습니다. 목 분석기는 어휘 겹침만 보기 때문에 숙고가 다루는 판단 자체가 생기지 않습니다.</a:t>
+              <a:t>효과는 같은 코드에서 기능만 껐다 켜서 측정했습니다. 기존 열다섯 개 Case는 양쪽이 똑같이 15/15, Action 28/28이고 소요시간만 약 삼십 퍼센트 늘었습니다. 숙고가 실제 발동하는 전용 네 개 케이스는 회차마다 출력이 달라져 각 설정을 세 번씩 돌렸고, 통과 수는 켠 쪽이 삼, 삼, 이, 끈 쪽이 이, 이, 이입니다. 세 번 모두 재현되는 차이는 한 건입니다. 요청자가 같고 대상 시스템만 다른 유사 업무가 둘 있을 때, 단일 결론 경로는 세 번 모두 둘 중 하나에 그대로 연결했고 두 단계 경로는 세 번 모두 사용자 확인으로 닫았습니다. 제가 개선했다고 말하는 범위는 이 한 건이고, 엘엘엠을 호출하지 않는 목 경로에서는 양쪽 모두 사 대 사로 차이가 없습니다.</a:t>
             </a:r>
           </a:p>
           <a:p xmlns:a="http://schemas.openxmlformats.org/drawingml/2006/main">
@@ -830,7 +830,7 @@
           </a:p>
           <a:p xmlns:a="http://schemas.openxmlformats.org/drawingml/2006/main">
             <a:r>
-              <a:t>실패도 말씀드리겠습니다. 처음 구현에서 응답 검증을 재시도 루프 밖에 두었습니다. 그래서 모델이 필드 하나를 배열로 돌려준 것만으로 판단 전체가 실패했고, 저장해 둔 실제 Gmail 서른다섯 건을 다시 흘려보냈을 때 판단 네 건이 사라졌습니다. 합성 테스트로는 드러나지 않았고 실제 데이터 재생에서 잡혔습니다. 검증을 루프 안으로 옮긴 뒤 유실은 0건입니다.</a:t>
+              <a:t>실패도 말씀드리겠습니다. 처음 구현에서 응답 검증을 재시도 루프 밖에 두었습니다. 모델이 필드 하나를 배열로 돌려준 것만으로 판단 전체가 실패했고, 저장해 둔 실제 Gmail 서른다섯 건을 다시 흘려보냈을 때 판단 네 건이 사라졌습니다. 합성 테스트가 아니라 실제 데이터 재생에서 잡혔고, 검증을 루프 안으로 옮긴 뒤 유실은 0건입니다.</a:t>
             </a:r>
           </a:p>
           <a:p xmlns:a="http://schemas.openxmlformats.org/drawingml/2006/main">
@@ -840,7 +840,7 @@
           </a:p>
           <a:p xmlns:a="http://schemas.openxmlformats.org/drawingml/2006/main">
             <a:r>
-              <a:t>반대로 개선되지 않은 것도 말씀드리겠습니다. 검색 결과 안에 명령을 심어 둔 케이스는 두 설정 모두 세 번 모두 기대값을 충족하지 못했습니다. 기대값은 사용자 확인인데 실제로는 무시로 끝났습니다. 다만 이 케이스가 확인해야 할 안전 속성인, 심어진 명령을 실행하지 않는다는 점은 여섯 번 모두 지켜졌습니다. 본문이 지시한 전체 완료 처리와 기록 삭제는 한 번도 일어나지 않았습니다. 명령은 거부하지만 사람에게 넘기지는 않는, 안전하되 정보를 버리는 동작이고 한계로 남겨 두었습니다. 화면의 신뢰도와 지지도 역시 모델의 자기보고 값이지 검증된 정답 확률이 아닙니다.</a:t>
+              <a:t>두 번째는 기대값과 동작 중 어느 쪽이 틀렸는지 따져야 했던 건입니다. 검색 결과 안에 명령을 심어 둔 케이스가 세 번 모두 기대값인 사용자 확인 대신 무시로 끝났습니다. 그 메일은 순수 주입이 아니라 정상 회신 내용과 주입된 명령이 섞인 혼합 메일이고, 정답도 업무 요청 참이었습니다. 원인은 제 프롬프트였습니다. Prompt Injection을 공지·광고와 같은 줄에 두고 업무 요청이 아닌 사유로 제시해서 모델이 메일 전체를 버렸습니다. 원칙은 본문의 명령을 실행하지 않는다이지 명령이 섞인 메일을 버린다가 아닙니다. 기대값은 그대로 두고 규칙만 분리했습니다. 수정 후 이 케이스는 세 번 모두 통과하고 숙고 전용 통과 수는 삼, 사, 사가 되었습니다. 명령만 들어 있는 순수 주입은 그대로 무시로 끝나 둘의 구분이 유지되고, 본문이 지시한 전체 완료 처리와 기록 삭제는 수정 전후 어느 회차에서도 일어나지 않았습니다.</a:t>
             </a:r>
           </a:p>
           <a:p xmlns:a="http://schemas.openxmlformats.org/drawingml/2006/main">
@@ -850,7 +850,7 @@
           </a:p>
           <a:p xmlns:a="http://schemas.openxmlformats.org/drawingml/2006/main">
             <a:r>
-              <a:t>마지막으로 하지 않은 선택입니다. 여러 계획을 만들어 비교하는 Tree of Thoughts는 적용하지 않았습니다. 메일 한 건을 업무로 옮기는 판단은 단계가 깊지 않은 대신 틀렸을 때 비용이 업무 데이터 오변경이라, 후보를 두세 개로 제한하고 평가와 재검색을 각각 한 번으로 묶은 뒤 결정론적 Guard와 사용자 승인으로 막는 쪽을 택했습니다. 문서에도 구현했다고 쓰지 않고 거기서 착안한 제한적 후보 탐색·평가라고 적었습니다.</a:t>
+              <a:t>남은 한계도 말씀드리겠습니다. 화면의 신뢰도와 지지도는 모델의 자기보고 값이지 검증된 정답 확률이 아닙니다. 사용자 체감 시간은 신뢰할 Baseline을 얻지 못해 미측정으로 남겼습니다.</a:t>
             </a:r>
           </a:p>
           <a:p xmlns:a="http://schemas.openxmlformats.org/drawingml/2006/main">
@@ -866,6 +866,11 @@
           <a:p xmlns:a="http://schemas.openxmlformats.org/drawingml/2006/main">
             <a:r>
               <a:t>- evidence/deliberation_ab_2026-09-15.json</a:t>
+            </a:r>
+          </a:p>
+          <a:p xmlns:a="http://schemas.openxmlformats.org/drawingml/2006/main">
+            <a:r>
+              <a:t>- evidence/dlb04_injection_adjudication_2026-09-15.json</a:t>
             </a:r>
           </a:p>
           <a:p xmlns:a="http://schemas.openxmlformats.org/drawingml/2006/main">
@@ -953,7 +958,7 @@
   </p:cSld>
   <p:clrMap bg1="lt1" tx1="dk1" bg2="lt2" tx2="dk2" accent1="accent1" accent2="accent2" accent3="accent3" accent4="accent4" accent5="accent5" accent6="accent6" hlink="hlink" folHlink="folHlink"/>
   <p:sldLayoutIdLst>
-    <p:sldLayoutId xmlns:r="http://schemas.openxmlformats.org/officeDocument/2006/relationships" id="2147483649" r:id="Rd10503dd10ca4247"/>
+    <p:sldLayoutId xmlns:r="http://schemas.openxmlformats.org/officeDocument/2006/relationships" id="2147483649" r:id="R8269960c997b4c73"/>
   </p:sldLayoutIdLst>
   <p:txStyles>
     <p:titleStyle>
@@ -1504,7 +1509,7 @@
           <p:cNvPr id="9" name="">
             <a:extLst xmlns:a="http://schemas.openxmlformats.org/drawingml/2006/main">
               <a:ext uri="{FF2B5EF4-FFF2-40B4-BE49-F238E27FC236}">
-                <a16:creationId xmlns:a16="http://schemas.microsoft.com/office/drawing/2014/main" id="{E229C907-B832-462A-ADEF-16B1FBA6EF52}"/>
+                <a16:creationId xmlns:a16="http://schemas.microsoft.com/office/drawing/2014/main" id="{3E4D4CE4-1CE1-4136-B534-2E489D325E03}"/>
               </a:ext>
             </a:extLst>
           </p:cNvPr>
@@ -1534,7 +1539,7 @@
           <p:cNvPr id="2" name="">
             <a:extLst xmlns:a="http://schemas.openxmlformats.org/drawingml/2006/main">
               <a:ext uri="{FF2B5EF4-FFF2-40B4-BE49-F238E27FC236}">
-                <a16:creationId xmlns:a16="http://schemas.microsoft.com/office/drawing/2014/main" id="{6604E904-FA8A-45F6-A658-048F12AF8631}"/>
+                <a16:creationId xmlns:a16="http://schemas.microsoft.com/office/drawing/2014/main" id="{2F4EA099-1A9D-4D62-A241-640150DCBE51}"/>
               </a:ext>
             </a:extLst>
           </p:cNvPr>
@@ -1591,7 +1596,7 @@
           <p:cNvPr id="3" name="">
             <a:extLst xmlns:a="http://schemas.openxmlformats.org/drawingml/2006/main">
               <a:ext uri="{FF2B5EF4-FFF2-40B4-BE49-F238E27FC236}">
-                <a16:creationId xmlns:a16="http://schemas.microsoft.com/office/drawing/2014/main" id="{ADDE149B-BC1A-43E8-9404-446F69AEF811}"/>
+                <a16:creationId xmlns:a16="http://schemas.microsoft.com/office/drawing/2014/main" id="{648A33C5-03D1-43C3-AD71-90AD1BB36BB7}"/>
               </a:ext>
             </a:extLst>
           </p:cNvPr>
@@ -1648,7 +1653,7 @@
           <p:cNvPr id="4" name="">
             <a:extLst xmlns:a="http://schemas.openxmlformats.org/drawingml/2006/main">
               <a:ext uri="{FF2B5EF4-FFF2-40B4-BE49-F238E27FC236}">
-                <a16:creationId xmlns:a16="http://schemas.microsoft.com/office/drawing/2014/main" id="{29CC8B87-BE09-460A-899E-094C60B18C2A}"/>
+                <a16:creationId xmlns:a16="http://schemas.microsoft.com/office/drawing/2014/main" id="{58B37457-9468-4B4D-A9A9-92F39792993B}"/>
               </a:ext>
             </a:extLst>
           </p:cNvPr>
@@ -1705,7 +1710,7 @@
           <p:cNvPr id="5" name="">
             <a:extLst xmlns:a="http://schemas.openxmlformats.org/drawingml/2006/main">
               <a:ext uri="{FF2B5EF4-FFF2-40B4-BE49-F238E27FC236}">
-                <a16:creationId xmlns:a16="http://schemas.microsoft.com/office/drawing/2014/main" id="{3A3CAA68-737A-4A22-BF47-4222681CC103}"/>
+                <a16:creationId xmlns:a16="http://schemas.microsoft.com/office/drawing/2014/main" id="{862A9926-CE05-4193-9328-1725852EE9F6}"/>
               </a:ext>
             </a:extLst>
           </p:cNvPr>
@@ -1735,7 +1740,7 @@
           <p:cNvPr id="6" name="">
             <a:extLst xmlns:a="http://schemas.openxmlformats.org/drawingml/2006/main">
               <a:ext uri="{FF2B5EF4-FFF2-40B4-BE49-F238E27FC236}">
-                <a16:creationId xmlns:a16="http://schemas.microsoft.com/office/drawing/2014/main" id="{77536DDB-F09D-4F90-822E-ADED86EC5D2C}"/>
+                <a16:creationId xmlns:a16="http://schemas.microsoft.com/office/drawing/2014/main" id="{DCB3237F-CED0-4673-915F-3497EB14E279}"/>
               </a:ext>
             </a:extLst>
           </p:cNvPr>
@@ -1792,7 +1797,7 @@
           <p:cNvPr id="7" name="">
             <a:extLst xmlns:a="http://schemas.openxmlformats.org/drawingml/2006/main">
               <a:ext uri="{FF2B5EF4-FFF2-40B4-BE49-F238E27FC236}">
-                <a16:creationId xmlns:a16="http://schemas.microsoft.com/office/drawing/2014/main" id="{C5D8883F-DF63-49AC-8EAB-66A1CD6F9285}"/>
+                <a16:creationId xmlns:a16="http://schemas.microsoft.com/office/drawing/2014/main" id="{C8F60FC3-ACCB-4E23-A6CB-A959982B3AF4}"/>
               </a:ext>
             </a:extLst>
           </p:cNvPr>
@@ -1849,7 +1854,7 @@
           <p:cNvPr id="8" name="">
             <a:extLst xmlns:a="http://schemas.openxmlformats.org/drawingml/2006/main">
               <a:ext uri="{FF2B5EF4-FFF2-40B4-BE49-F238E27FC236}">
-                <a16:creationId xmlns:a16="http://schemas.microsoft.com/office/drawing/2014/main" id="{93891492-19A6-42D4-AEEE-38BDD1C42E5C}"/>
+                <a16:creationId xmlns:a16="http://schemas.microsoft.com/office/drawing/2014/main" id="{6D245C99-EF2F-4945-8F99-0C8DCC476FA9}"/>
               </a:ext>
             </a:extLst>
           </p:cNvPr>
@@ -1904,7 +1909,7 @@
     </p:spTree>
     <p:extLst>
       <p:ext uri="{BB962C8B-B14F-4D97-AF65-F5344CB8AC3E}">
-        <p14:creationId xmlns:p14="http://schemas.microsoft.com/office/powerpoint/2010/main" val="450220570"/>
+        <p14:creationId xmlns:p14="http://schemas.microsoft.com/office/powerpoint/2010/main" val="1838588585"/>
       </p:ext>
     </p:extLst>
   </p:cSld>
@@ -1935,7 +1940,7 @@
           <p:cNvPr id="46" name="">
             <a:extLst xmlns:a="http://schemas.openxmlformats.org/drawingml/2006/main">
               <a:ext uri="{FF2B5EF4-FFF2-40B4-BE49-F238E27FC236}">
-                <a16:creationId xmlns:a16="http://schemas.microsoft.com/office/drawing/2014/main" id="{63B2A801-0B81-4DFF-AF6B-8718B70A4CCB}"/>
+                <a16:creationId xmlns:a16="http://schemas.microsoft.com/office/drawing/2014/main" id="{C2165610-DF39-44D1-B979-922898DE9C9A}"/>
               </a:ext>
             </a:extLst>
           </p:cNvPr>
@@ -1965,7 +1970,7 @@
           <p:cNvPr id="2" name="">
             <a:extLst xmlns:a="http://schemas.openxmlformats.org/drawingml/2006/main">
               <a:ext uri="{FF2B5EF4-FFF2-40B4-BE49-F238E27FC236}">
-                <a16:creationId xmlns:a16="http://schemas.microsoft.com/office/drawing/2014/main" id="{68E149FB-72E0-474E-B7BE-2635185C1CFC}"/>
+                <a16:creationId xmlns:a16="http://schemas.microsoft.com/office/drawing/2014/main" id="{9367908E-E949-4CC7-BC54-8ADB66F9B1F4}"/>
               </a:ext>
             </a:extLst>
           </p:cNvPr>
@@ -2022,7 +2027,7 @@
           <p:cNvPr id="3" name="">
             <a:extLst xmlns:a="http://schemas.openxmlformats.org/drawingml/2006/main">
               <a:ext uri="{FF2B5EF4-FFF2-40B4-BE49-F238E27FC236}">
-                <a16:creationId xmlns:a16="http://schemas.microsoft.com/office/drawing/2014/main" id="{F640BAC5-98AE-4BE9-A9FD-CE633CFDD424}"/>
+                <a16:creationId xmlns:a16="http://schemas.microsoft.com/office/drawing/2014/main" id="{871461E3-A7C8-4538-9B81-E5FEC69DFF2E}"/>
               </a:ext>
             </a:extLst>
           </p:cNvPr>
@@ -2052,7 +2057,7 @@
           <p:cNvPr id="4" name="">
             <a:extLst xmlns:a="http://schemas.openxmlformats.org/drawingml/2006/main">
               <a:ext uri="{FF2B5EF4-FFF2-40B4-BE49-F238E27FC236}">
-                <a16:creationId xmlns:a16="http://schemas.microsoft.com/office/drawing/2014/main" id="{F560E0DF-C831-4B6B-B407-574505BAE29F}"/>
+                <a16:creationId xmlns:a16="http://schemas.microsoft.com/office/drawing/2014/main" id="{00035710-7FBF-4CCD-9B73-9BBB4B7B73C8}"/>
               </a:ext>
             </a:extLst>
           </p:cNvPr>
@@ -2109,7 +2114,7 @@
           <p:cNvPr id="5" name="">
             <a:extLst xmlns:a="http://schemas.openxmlformats.org/drawingml/2006/main">
               <a:ext uri="{FF2B5EF4-FFF2-40B4-BE49-F238E27FC236}">
-                <a16:creationId xmlns:a16="http://schemas.microsoft.com/office/drawing/2014/main" id="{1B7519EA-98D2-4441-A3A2-DDCE0383D46D}"/>
+                <a16:creationId xmlns:a16="http://schemas.microsoft.com/office/drawing/2014/main" id="{CE0200B6-72C8-465A-AA31-E5907811761D}"/>
               </a:ext>
             </a:extLst>
           </p:cNvPr>
@@ -2166,7 +2171,7 @@
           <p:cNvPr id="6" name="">
             <a:extLst xmlns:a="http://schemas.openxmlformats.org/drawingml/2006/main">
               <a:ext uri="{FF2B5EF4-FFF2-40B4-BE49-F238E27FC236}">
-                <a16:creationId xmlns:a16="http://schemas.microsoft.com/office/drawing/2014/main" id="{11E61FF9-C3B2-4BDE-B2A0-C8DEB6C71C0A}"/>
+                <a16:creationId xmlns:a16="http://schemas.microsoft.com/office/drawing/2014/main" id="{CB6AD004-2333-42B4-AA40-F648EC4808C6}"/>
               </a:ext>
             </a:extLst>
           </p:cNvPr>
@@ -2223,7 +2228,7 @@
           <p:cNvPr id="7" name="">
             <a:extLst xmlns:a="http://schemas.openxmlformats.org/drawingml/2006/main">
               <a:ext uri="{FF2B5EF4-FFF2-40B4-BE49-F238E27FC236}">
-                <a16:creationId xmlns:a16="http://schemas.microsoft.com/office/drawing/2014/main" id="{A1795976-9A5A-4967-B56F-2861EABCB2BD}"/>
+                <a16:creationId xmlns:a16="http://schemas.microsoft.com/office/drawing/2014/main" id="{B10954B1-51D8-4CD7-87B0-0E2B9655D371}"/>
               </a:ext>
             </a:extLst>
           </p:cNvPr>
@@ -2257,7 +2262,7 @@
           <p:cNvPr id="8" name="">
             <a:extLst xmlns:a="http://schemas.openxmlformats.org/drawingml/2006/main">
               <a:ext uri="{FF2B5EF4-FFF2-40B4-BE49-F238E27FC236}">
-                <a16:creationId xmlns:a16="http://schemas.microsoft.com/office/drawing/2014/main" id="{1183016A-F3F3-48C7-A94D-C5DFE84F3333}"/>
+                <a16:creationId xmlns:a16="http://schemas.microsoft.com/office/drawing/2014/main" id="{BA82B228-0A4E-40D7-9875-D685E57E933A}"/>
               </a:ext>
             </a:extLst>
           </p:cNvPr>
@@ -2289,7 +2294,7 @@
           <p:cNvPr id="9" name="">
             <a:extLst xmlns:a="http://schemas.openxmlformats.org/drawingml/2006/main">
               <a:ext uri="{FF2B5EF4-FFF2-40B4-BE49-F238E27FC236}">
-                <a16:creationId xmlns:a16="http://schemas.microsoft.com/office/drawing/2014/main" id="{05B21BAB-4BBF-4634-838F-B50D410427B3}"/>
+                <a16:creationId xmlns:a16="http://schemas.microsoft.com/office/drawing/2014/main" id="{EAD8FCFE-67DF-4455-B032-8838F5C8C9F6}"/>
               </a:ext>
             </a:extLst>
           </p:cNvPr>
@@ -2346,7 +2351,7 @@
           <p:cNvPr id="10" name="">
             <a:extLst xmlns:a="http://schemas.openxmlformats.org/drawingml/2006/main">
               <a:ext uri="{FF2B5EF4-FFF2-40B4-BE49-F238E27FC236}">
-                <a16:creationId xmlns:a16="http://schemas.microsoft.com/office/drawing/2014/main" id="{9F1BCDB5-85FD-4206-8A21-74D0641549B7}"/>
+                <a16:creationId xmlns:a16="http://schemas.microsoft.com/office/drawing/2014/main" id="{A7E1072E-AF07-4A80-9C7D-ABE9E316002C}"/>
               </a:ext>
             </a:extLst>
           </p:cNvPr>
@@ -2426,7 +2431,7 @@
           <p:cNvPr id="11" name="">
             <a:extLst xmlns:a="http://schemas.openxmlformats.org/drawingml/2006/main">
               <a:ext uri="{FF2B5EF4-FFF2-40B4-BE49-F238E27FC236}">
-                <a16:creationId xmlns:a16="http://schemas.microsoft.com/office/drawing/2014/main" id="{098AEBD2-8227-4D6F-A9AA-F0EA5661A80A}"/>
+                <a16:creationId xmlns:a16="http://schemas.microsoft.com/office/drawing/2014/main" id="{5270FBAB-CA7B-4ADE-9195-9D9D8696F97D}"/>
               </a:ext>
             </a:extLst>
           </p:cNvPr>
@@ -2456,7 +2461,7 @@
           <p:cNvPr id="12" name="">
             <a:extLst xmlns:a="http://schemas.openxmlformats.org/drawingml/2006/main">
               <a:ext uri="{FF2B5EF4-FFF2-40B4-BE49-F238E27FC236}">
-                <a16:creationId xmlns:a16="http://schemas.microsoft.com/office/drawing/2014/main" id="{13090EAC-3743-4280-98E9-B907C51AE191}"/>
+                <a16:creationId xmlns:a16="http://schemas.microsoft.com/office/drawing/2014/main" id="{2F9058E3-DB0F-4397-AD13-AA478D9FE35C}"/>
               </a:ext>
             </a:extLst>
           </p:cNvPr>
@@ -2490,7 +2495,7 @@
           <p:cNvPr id="13" name="">
             <a:extLst xmlns:a="http://schemas.openxmlformats.org/drawingml/2006/main">
               <a:ext uri="{FF2B5EF4-FFF2-40B4-BE49-F238E27FC236}">
-                <a16:creationId xmlns:a16="http://schemas.microsoft.com/office/drawing/2014/main" id="{C2EE831F-F502-4B56-BA1B-3AEB09FC9072}"/>
+                <a16:creationId xmlns:a16="http://schemas.microsoft.com/office/drawing/2014/main" id="{636314BB-EA4F-4C39-B982-2780DB29E1B0}"/>
               </a:ext>
             </a:extLst>
           </p:cNvPr>
@@ -2522,7 +2527,7 @@
           <p:cNvPr id="14" name="">
             <a:extLst xmlns:a="http://schemas.openxmlformats.org/drawingml/2006/main">
               <a:ext uri="{FF2B5EF4-FFF2-40B4-BE49-F238E27FC236}">
-                <a16:creationId xmlns:a16="http://schemas.microsoft.com/office/drawing/2014/main" id="{85A24E75-C3DE-49E0-B59B-19C7848E6340}"/>
+                <a16:creationId xmlns:a16="http://schemas.microsoft.com/office/drawing/2014/main" id="{5B4719C2-365D-4627-8FAE-0DEA1B93E96E}"/>
               </a:ext>
             </a:extLst>
           </p:cNvPr>
@@ -2579,7 +2584,7 @@
           <p:cNvPr id="15" name="">
             <a:extLst xmlns:a="http://schemas.openxmlformats.org/drawingml/2006/main">
               <a:ext uri="{FF2B5EF4-FFF2-40B4-BE49-F238E27FC236}">
-                <a16:creationId xmlns:a16="http://schemas.microsoft.com/office/drawing/2014/main" id="{4E5FF2E8-A56E-4C9E-BAD8-96B8CBF3DA35}"/>
+                <a16:creationId xmlns:a16="http://schemas.microsoft.com/office/drawing/2014/main" id="{A0E3AF1C-DFBB-451E-9819-FE9E73C2FA36}"/>
               </a:ext>
             </a:extLst>
           </p:cNvPr>
@@ -2659,7 +2664,7 @@
           <p:cNvPr id="16" name="">
             <a:extLst xmlns:a="http://schemas.openxmlformats.org/drawingml/2006/main">
               <a:ext uri="{FF2B5EF4-FFF2-40B4-BE49-F238E27FC236}">
-                <a16:creationId xmlns:a16="http://schemas.microsoft.com/office/drawing/2014/main" id="{F7191E1C-A27A-40FB-A4E3-E9772D13A7B7}"/>
+                <a16:creationId xmlns:a16="http://schemas.microsoft.com/office/drawing/2014/main" id="{FF8A79D3-8AF0-452A-B9ED-92027D3DCC3D}"/>
               </a:ext>
             </a:extLst>
           </p:cNvPr>
@@ -2689,7 +2694,7 @@
           <p:cNvPr id="17" name="">
             <a:extLst xmlns:a="http://schemas.openxmlformats.org/drawingml/2006/main">
               <a:ext uri="{FF2B5EF4-FFF2-40B4-BE49-F238E27FC236}">
-                <a16:creationId xmlns:a16="http://schemas.microsoft.com/office/drawing/2014/main" id="{B062FACD-F7FE-4134-B4C1-957B084E4A44}"/>
+                <a16:creationId xmlns:a16="http://schemas.microsoft.com/office/drawing/2014/main" id="{36B8C8F0-ECFA-4F0B-B47C-A92E60099B46}"/>
               </a:ext>
             </a:extLst>
           </p:cNvPr>
@@ -2723,7 +2728,7 @@
           <p:cNvPr id="18" name="">
             <a:extLst xmlns:a="http://schemas.openxmlformats.org/drawingml/2006/main">
               <a:ext uri="{FF2B5EF4-FFF2-40B4-BE49-F238E27FC236}">
-                <a16:creationId xmlns:a16="http://schemas.microsoft.com/office/drawing/2014/main" id="{AA7F0A32-B632-4415-A1DF-F82567B80E55}"/>
+                <a16:creationId xmlns:a16="http://schemas.microsoft.com/office/drawing/2014/main" id="{29EC7814-F490-436D-88CD-F01DA34185B1}"/>
               </a:ext>
             </a:extLst>
           </p:cNvPr>
@@ -2755,7 +2760,7 @@
           <p:cNvPr id="19" name="">
             <a:extLst xmlns:a="http://schemas.openxmlformats.org/drawingml/2006/main">
               <a:ext uri="{FF2B5EF4-FFF2-40B4-BE49-F238E27FC236}">
-                <a16:creationId xmlns:a16="http://schemas.microsoft.com/office/drawing/2014/main" id="{47B081AE-E9BE-428E-A299-E2498EFC6755}"/>
+                <a16:creationId xmlns:a16="http://schemas.microsoft.com/office/drawing/2014/main" id="{52541E02-1686-4A8A-8E2E-9F3585E5D581}"/>
               </a:ext>
             </a:extLst>
           </p:cNvPr>
@@ -2812,7 +2817,7 @@
           <p:cNvPr id="20" name="">
             <a:extLst xmlns:a="http://schemas.openxmlformats.org/drawingml/2006/main">
               <a:ext uri="{FF2B5EF4-FFF2-40B4-BE49-F238E27FC236}">
-                <a16:creationId xmlns:a16="http://schemas.microsoft.com/office/drawing/2014/main" id="{E9871A4E-5376-4D54-A0C4-B23CAA56D2B2}"/>
+                <a16:creationId xmlns:a16="http://schemas.microsoft.com/office/drawing/2014/main" id="{95515044-D5E3-47AF-B582-7ED97A4DED6C}"/>
               </a:ext>
             </a:extLst>
           </p:cNvPr>
@@ -2892,7 +2897,7 @@
           <p:cNvPr id="21" name="">
             <a:extLst xmlns:a="http://schemas.openxmlformats.org/drawingml/2006/main">
               <a:ext uri="{FF2B5EF4-FFF2-40B4-BE49-F238E27FC236}">
-                <a16:creationId xmlns:a16="http://schemas.microsoft.com/office/drawing/2014/main" id="{D385C034-4CBB-47DD-9C82-CF11EB1E4C2F}"/>
+                <a16:creationId xmlns:a16="http://schemas.microsoft.com/office/drawing/2014/main" id="{363B4820-AE58-479A-BA5B-2BAC5F10B7C6}"/>
               </a:ext>
             </a:extLst>
           </p:cNvPr>
@@ -2922,7 +2927,7 @@
           <p:cNvPr id="22" name="">
             <a:extLst xmlns:a="http://schemas.openxmlformats.org/drawingml/2006/main">
               <a:ext uri="{FF2B5EF4-FFF2-40B4-BE49-F238E27FC236}">
-                <a16:creationId xmlns:a16="http://schemas.microsoft.com/office/drawing/2014/main" id="{455A238C-B75B-47A9-9BE2-ED47593FD7D9}"/>
+                <a16:creationId xmlns:a16="http://schemas.microsoft.com/office/drawing/2014/main" id="{C4C450FF-EF32-468E-9512-697BC60F69EB}"/>
               </a:ext>
             </a:extLst>
           </p:cNvPr>
@@ -2956,7 +2961,7 @@
           <p:cNvPr id="23" name="">
             <a:extLst xmlns:a="http://schemas.openxmlformats.org/drawingml/2006/main">
               <a:ext uri="{FF2B5EF4-FFF2-40B4-BE49-F238E27FC236}">
-                <a16:creationId xmlns:a16="http://schemas.microsoft.com/office/drawing/2014/main" id="{E8BE7A93-4307-4930-9BDE-9596EA55DFA0}"/>
+                <a16:creationId xmlns:a16="http://schemas.microsoft.com/office/drawing/2014/main" id="{80097C19-BB47-4C24-9D52-832283CD84CF}"/>
               </a:ext>
             </a:extLst>
           </p:cNvPr>
@@ -2988,7 +2993,7 @@
           <p:cNvPr id="24" name="">
             <a:extLst xmlns:a="http://schemas.openxmlformats.org/drawingml/2006/main">
               <a:ext uri="{FF2B5EF4-FFF2-40B4-BE49-F238E27FC236}">
-                <a16:creationId xmlns:a16="http://schemas.microsoft.com/office/drawing/2014/main" id="{3FB6096B-DF85-4D83-8E84-7AFEEE2E9871}"/>
+                <a16:creationId xmlns:a16="http://schemas.microsoft.com/office/drawing/2014/main" id="{DE9BB316-328D-4B97-A8AC-679B65E4FC49}"/>
               </a:ext>
             </a:extLst>
           </p:cNvPr>
@@ -3045,7 +3050,7 @@
           <p:cNvPr id="25" name="">
             <a:extLst xmlns:a="http://schemas.openxmlformats.org/drawingml/2006/main">
               <a:ext uri="{FF2B5EF4-FFF2-40B4-BE49-F238E27FC236}">
-                <a16:creationId xmlns:a16="http://schemas.microsoft.com/office/drawing/2014/main" id="{F68D3DB7-24A5-47AC-A735-0E4975EFB07D}"/>
+                <a16:creationId xmlns:a16="http://schemas.microsoft.com/office/drawing/2014/main" id="{8F230252-C2BF-4A60-8361-182887B585AF}"/>
               </a:ext>
             </a:extLst>
           </p:cNvPr>
@@ -3125,7 +3130,7 @@
           <p:cNvPr id="26" name="">
             <a:extLst xmlns:a="http://schemas.openxmlformats.org/drawingml/2006/main">
               <a:ext uri="{FF2B5EF4-FFF2-40B4-BE49-F238E27FC236}">
-                <a16:creationId xmlns:a16="http://schemas.microsoft.com/office/drawing/2014/main" id="{E312DF1B-FD2B-4FFB-8C9C-66237C77E225}"/>
+                <a16:creationId xmlns:a16="http://schemas.microsoft.com/office/drawing/2014/main" id="{EFF49EB1-5C2F-43FD-9D19-31068414A10D}"/>
               </a:ext>
             </a:extLst>
           </p:cNvPr>
@@ -3155,7 +3160,7 @@
           <p:cNvPr id="27" name="">
             <a:extLst xmlns:a="http://schemas.openxmlformats.org/drawingml/2006/main">
               <a:ext uri="{FF2B5EF4-FFF2-40B4-BE49-F238E27FC236}">
-                <a16:creationId xmlns:a16="http://schemas.microsoft.com/office/drawing/2014/main" id="{9AC3365B-D6F4-4878-9B28-4452A39E1669}"/>
+                <a16:creationId xmlns:a16="http://schemas.microsoft.com/office/drawing/2014/main" id="{6DA95BFD-8E2E-4993-A107-8FE3C80D89EE}"/>
               </a:ext>
             </a:extLst>
           </p:cNvPr>
@@ -3189,7 +3194,7 @@
           <p:cNvPr id="28" name="">
             <a:extLst xmlns:a="http://schemas.openxmlformats.org/drawingml/2006/main">
               <a:ext uri="{FF2B5EF4-FFF2-40B4-BE49-F238E27FC236}">
-                <a16:creationId xmlns:a16="http://schemas.microsoft.com/office/drawing/2014/main" id="{2C44BE54-768C-4753-A0CA-4048D236D5CF}"/>
+                <a16:creationId xmlns:a16="http://schemas.microsoft.com/office/drawing/2014/main" id="{D51F79DA-8B48-4B98-8E9F-A59E4D4EE56D}"/>
               </a:ext>
             </a:extLst>
           </p:cNvPr>
@@ -3221,7 +3226,7 @@
           <p:cNvPr id="29" name="">
             <a:extLst xmlns:a="http://schemas.openxmlformats.org/drawingml/2006/main">
               <a:ext uri="{FF2B5EF4-FFF2-40B4-BE49-F238E27FC236}">
-                <a16:creationId xmlns:a16="http://schemas.microsoft.com/office/drawing/2014/main" id="{7BB908B8-B1B9-47DA-85AD-BD6B04766141}"/>
+                <a16:creationId xmlns:a16="http://schemas.microsoft.com/office/drawing/2014/main" id="{3ACD53F3-B26E-4FED-86FB-A324AB8BF132}"/>
               </a:ext>
             </a:extLst>
           </p:cNvPr>
@@ -3278,7 +3283,7 @@
           <p:cNvPr id="30" name="">
             <a:extLst xmlns:a="http://schemas.openxmlformats.org/drawingml/2006/main">
               <a:ext uri="{FF2B5EF4-FFF2-40B4-BE49-F238E27FC236}">
-                <a16:creationId xmlns:a16="http://schemas.microsoft.com/office/drawing/2014/main" id="{CB2EDC32-BCF4-46BC-842F-74E036318EEA}"/>
+                <a16:creationId xmlns:a16="http://schemas.microsoft.com/office/drawing/2014/main" id="{9E85348F-8D88-4E90-92D5-37916D27F37E}"/>
               </a:ext>
             </a:extLst>
           </p:cNvPr>
@@ -3358,7 +3363,7 @@
           <p:cNvPr id="31" name="">
             <a:extLst xmlns:a="http://schemas.openxmlformats.org/drawingml/2006/main">
               <a:ext uri="{FF2B5EF4-FFF2-40B4-BE49-F238E27FC236}">
-                <a16:creationId xmlns:a16="http://schemas.microsoft.com/office/drawing/2014/main" id="{759E9D3B-7E25-4086-AE88-563EF3CC813D}"/>
+                <a16:creationId xmlns:a16="http://schemas.microsoft.com/office/drawing/2014/main" id="{89806583-9706-4559-9449-65E181E58D89}"/>
               </a:ext>
             </a:extLst>
           </p:cNvPr>
@@ -3415,7 +3420,7 @@
           <p:cNvPr id="32" name="">
             <a:extLst xmlns:a="http://schemas.openxmlformats.org/drawingml/2006/main">
               <a:ext uri="{FF2B5EF4-FFF2-40B4-BE49-F238E27FC236}">
-                <a16:creationId xmlns:a16="http://schemas.microsoft.com/office/drawing/2014/main" id="{4A2F98E3-6050-4026-A9D7-E992769CBE32}"/>
+                <a16:creationId xmlns:a16="http://schemas.microsoft.com/office/drawing/2014/main" id="{487C2269-8A61-4293-A3E0-A81A2B59901C}"/>
               </a:ext>
             </a:extLst>
           </p:cNvPr>
@@ -3472,7 +3477,7 @@
           <p:cNvPr id="33" name="">
             <a:extLst xmlns:a="http://schemas.openxmlformats.org/drawingml/2006/main">
               <a:ext uri="{FF2B5EF4-FFF2-40B4-BE49-F238E27FC236}">
-                <a16:creationId xmlns:a16="http://schemas.microsoft.com/office/drawing/2014/main" id="{A1938C23-11BE-4683-951C-6C5D2C030C3E}"/>
+                <a16:creationId xmlns:a16="http://schemas.microsoft.com/office/drawing/2014/main" id="{354BD119-A05C-4666-9515-F73CFC42E2BD}"/>
               </a:ext>
             </a:extLst>
           </p:cNvPr>
@@ -3529,7 +3534,7 @@
           <p:cNvPr id="34" name="">
             <a:extLst xmlns:a="http://schemas.openxmlformats.org/drawingml/2006/main">
               <a:ext uri="{FF2B5EF4-FFF2-40B4-BE49-F238E27FC236}">
-                <a16:creationId xmlns:a16="http://schemas.microsoft.com/office/drawing/2014/main" id="{D5C7B1C7-D2DB-4811-8F42-9D46091F78BF}"/>
+                <a16:creationId xmlns:a16="http://schemas.microsoft.com/office/drawing/2014/main" id="{DC3B6FEA-EE49-459D-B708-57C3325FF1D0}"/>
               </a:ext>
             </a:extLst>
           </p:cNvPr>
@@ -3586,7 +3591,7 @@
           <p:cNvPr id="35" name="">
             <a:extLst xmlns:a="http://schemas.openxmlformats.org/drawingml/2006/main">
               <a:ext uri="{FF2B5EF4-FFF2-40B4-BE49-F238E27FC236}">
-                <a16:creationId xmlns:a16="http://schemas.microsoft.com/office/drawing/2014/main" id="{839B07F5-DAD9-411D-8C9A-5860CB661C33}"/>
+                <a16:creationId xmlns:a16="http://schemas.microsoft.com/office/drawing/2014/main" id="{69F088DD-1A09-4AAD-9D9D-FE510FDAB6F3}"/>
               </a:ext>
             </a:extLst>
           </p:cNvPr>
@@ -3643,7 +3648,7 @@
           <p:cNvPr id="36" name="">
             <a:extLst xmlns:a="http://schemas.openxmlformats.org/drawingml/2006/main">
               <a:ext uri="{FF2B5EF4-FFF2-40B4-BE49-F238E27FC236}">
-                <a16:creationId xmlns:a16="http://schemas.microsoft.com/office/drawing/2014/main" id="{B499622E-2161-4BE7-B667-D527E1A7F04B}"/>
+                <a16:creationId xmlns:a16="http://schemas.microsoft.com/office/drawing/2014/main" id="{A70E9302-E601-46C2-8751-569421760ADB}"/>
               </a:ext>
             </a:extLst>
           </p:cNvPr>
@@ -3700,7 +3705,7 @@
           <p:cNvPr id="37" name="">
             <a:extLst xmlns:a="http://schemas.openxmlformats.org/drawingml/2006/main">
               <a:ext uri="{FF2B5EF4-FFF2-40B4-BE49-F238E27FC236}">
-                <a16:creationId xmlns:a16="http://schemas.microsoft.com/office/drawing/2014/main" id="{7DAA555E-AD0B-4A64-B758-9635A94D6F34}"/>
+                <a16:creationId xmlns:a16="http://schemas.microsoft.com/office/drawing/2014/main" id="{2D128F07-8B44-4D0F-954B-3DB4F6317121}"/>
               </a:ext>
             </a:extLst>
           </p:cNvPr>
@@ -3757,7 +3762,7 @@
           <p:cNvPr id="38" name="">
             <a:extLst xmlns:a="http://schemas.openxmlformats.org/drawingml/2006/main">
               <a:ext uri="{FF2B5EF4-FFF2-40B4-BE49-F238E27FC236}">
-                <a16:creationId xmlns:a16="http://schemas.microsoft.com/office/drawing/2014/main" id="{B70990CC-458D-487C-96F0-DB2519FB9F70}"/>
+                <a16:creationId xmlns:a16="http://schemas.microsoft.com/office/drawing/2014/main" id="{4EE3CA41-A3EA-4221-A417-DB5AEE7AB448}"/>
               </a:ext>
             </a:extLst>
           </p:cNvPr>
@@ -3814,7 +3819,7 @@
           <p:cNvPr id="39" name="">
             <a:extLst xmlns:a="http://schemas.openxmlformats.org/drawingml/2006/main">
               <a:ext uri="{FF2B5EF4-FFF2-40B4-BE49-F238E27FC236}">
-                <a16:creationId xmlns:a16="http://schemas.microsoft.com/office/drawing/2014/main" id="{197262B5-3E43-46CA-9602-269DF9D526C1}"/>
+                <a16:creationId xmlns:a16="http://schemas.microsoft.com/office/drawing/2014/main" id="{C201E331-2A2E-4DAD-A6E8-DE45AE137C91}"/>
               </a:ext>
             </a:extLst>
           </p:cNvPr>
@@ -3871,7 +3876,7 @@
           <p:cNvPr id="40" name="">
             <a:extLst xmlns:a="http://schemas.openxmlformats.org/drawingml/2006/main">
               <a:ext uri="{FF2B5EF4-FFF2-40B4-BE49-F238E27FC236}">
-                <a16:creationId xmlns:a16="http://schemas.microsoft.com/office/drawing/2014/main" id="{E002CA74-E65D-42E4-A8A5-A1EDD9B82408}"/>
+                <a16:creationId xmlns:a16="http://schemas.microsoft.com/office/drawing/2014/main" id="{2174AF62-4BEC-4F86-9BDA-D7B1E9809532}"/>
               </a:ext>
             </a:extLst>
           </p:cNvPr>
@@ -3928,7 +3933,7 @@
           <p:cNvPr id="41" name="">
             <a:extLst xmlns:a="http://schemas.openxmlformats.org/drawingml/2006/main">
               <a:ext uri="{FF2B5EF4-FFF2-40B4-BE49-F238E27FC236}">
-                <a16:creationId xmlns:a16="http://schemas.microsoft.com/office/drawing/2014/main" id="{F80AE92D-1BA8-4FBA-89E0-7CA1AA10F6A2}"/>
+                <a16:creationId xmlns:a16="http://schemas.microsoft.com/office/drawing/2014/main" id="{F379E59A-2295-4451-AA7B-E039869EFE30}"/>
               </a:ext>
             </a:extLst>
           </p:cNvPr>
@@ -3985,7 +3990,7 @@
           <p:cNvPr id="42" name="">
             <a:extLst xmlns:a="http://schemas.openxmlformats.org/drawingml/2006/main">
               <a:ext uri="{FF2B5EF4-FFF2-40B4-BE49-F238E27FC236}">
-                <a16:creationId xmlns:a16="http://schemas.microsoft.com/office/drawing/2014/main" id="{C8D80887-8D62-4921-A810-9479BC910AE2}"/>
+                <a16:creationId xmlns:a16="http://schemas.microsoft.com/office/drawing/2014/main" id="{36083B80-98FA-4238-94A2-1D54B06B1C9C}"/>
               </a:ext>
             </a:extLst>
           </p:cNvPr>
@@ -4042,7 +4047,7 @@
           <p:cNvPr id="43" name="">
             <a:extLst xmlns:a="http://schemas.openxmlformats.org/drawingml/2006/main">
               <a:ext uri="{FF2B5EF4-FFF2-40B4-BE49-F238E27FC236}">
-                <a16:creationId xmlns:a16="http://schemas.microsoft.com/office/drawing/2014/main" id="{C8123489-06A6-447F-81A2-7FA97597FD97}"/>
+                <a16:creationId xmlns:a16="http://schemas.microsoft.com/office/drawing/2014/main" id="{19A2A429-3073-41FE-B010-98972A062995}"/>
               </a:ext>
             </a:extLst>
           </p:cNvPr>
@@ -4099,7 +4104,7 @@
           <p:cNvPr id="44" name="">
             <a:extLst xmlns:a="http://schemas.openxmlformats.org/drawingml/2006/main">
               <a:ext uri="{FF2B5EF4-FFF2-40B4-BE49-F238E27FC236}">
-                <a16:creationId xmlns:a16="http://schemas.microsoft.com/office/drawing/2014/main" id="{A5986EC0-C700-4586-B172-6EC501AC79D6}"/>
+                <a16:creationId xmlns:a16="http://schemas.microsoft.com/office/drawing/2014/main" id="{4ECF4129-A03B-427B-A699-CB08481402AA}"/>
               </a:ext>
             </a:extLst>
           </p:cNvPr>
@@ -4131,7 +4136,7 @@
           <p:cNvPr id="45" name="">
             <a:extLst xmlns:a="http://schemas.openxmlformats.org/drawingml/2006/main">
               <a:ext uri="{FF2B5EF4-FFF2-40B4-BE49-F238E27FC236}">
-                <a16:creationId xmlns:a16="http://schemas.microsoft.com/office/drawing/2014/main" id="{46781895-2D14-47AD-90FC-CB140146630A}"/>
+                <a16:creationId xmlns:a16="http://schemas.microsoft.com/office/drawing/2014/main" id="{3FDD588E-3C25-4DD7-BA3C-AAD23E6A0538}"/>
               </a:ext>
             </a:extLst>
           </p:cNvPr>
@@ -4186,7 +4191,7 @@
     </p:spTree>
     <p:extLst>
       <p:ext uri="{BB962C8B-B14F-4D97-AF65-F5344CB8AC3E}">
-        <p14:creationId xmlns:p14="http://schemas.microsoft.com/office/powerpoint/2010/main" val="642944771"/>
+        <p14:creationId xmlns:p14="http://schemas.microsoft.com/office/powerpoint/2010/main" val="621396938"/>
       </p:ext>
     </p:extLst>
   </p:cSld>
@@ -4217,7 +4222,7 @@
           <p:cNvPr id="56" name="">
             <a:extLst xmlns:a="http://schemas.openxmlformats.org/drawingml/2006/main">
               <a:ext uri="{FF2B5EF4-FFF2-40B4-BE49-F238E27FC236}">
-                <a16:creationId xmlns:a16="http://schemas.microsoft.com/office/drawing/2014/main" id="{9A49D0B4-0A68-444D-86C2-5E97B84700A5}"/>
+                <a16:creationId xmlns:a16="http://schemas.microsoft.com/office/drawing/2014/main" id="{B268931E-5735-4192-A784-F97AA4169FA5}"/>
               </a:ext>
             </a:extLst>
           </p:cNvPr>
@@ -4247,7 +4252,7 @@
           <p:cNvPr id="2" name="">
             <a:extLst xmlns:a="http://schemas.openxmlformats.org/drawingml/2006/main">
               <a:ext uri="{FF2B5EF4-FFF2-40B4-BE49-F238E27FC236}">
-                <a16:creationId xmlns:a16="http://schemas.microsoft.com/office/drawing/2014/main" id="{4E21D0A2-14E2-427D-BAE5-5CDE3EDFF4DA}"/>
+                <a16:creationId xmlns:a16="http://schemas.microsoft.com/office/drawing/2014/main" id="{A0216F90-9D2A-486D-9BB5-74B11704017B}"/>
               </a:ext>
             </a:extLst>
           </p:cNvPr>
@@ -4304,7 +4309,7 @@
           <p:cNvPr id="3" name="">
             <a:extLst xmlns:a="http://schemas.openxmlformats.org/drawingml/2006/main">
               <a:ext uri="{FF2B5EF4-FFF2-40B4-BE49-F238E27FC236}">
-                <a16:creationId xmlns:a16="http://schemas.microsoft.com/office/drawing/2014/main" id="{27991C32-866A-423D-ABDB-C0BA91FE932B}"/>
+                <a16:creationId xmlns:a16="http://schemas.microsoft.com/office/drawing/2014/main" id="{341A6736-F1F8-42E9-8B5C-1D2E82CB6366}"/>
               </a:ext>
             </a:extLst>
           </p:cNvPr>
@@ -4334,7 +4339,7 @@
           <p:cNvPr id="4" name="">
             <a:extLst xmlns:a="http://schemas.openxmlformats.org/drawingml/2006/main">
               <a:ext uri="{FF2B5EF4-FFF2-40B4-BE49-F238E27FC236}">
-                <a16:creationId xmlns:a16="http://schemas.microsoft.com/office/drawing/2014/main" id="{4B83E259-F692-4235-8425-5E72D3C265ED}"/>
+                <a16:creationId xmlns:a16="http://schemas.microsoft.com/office/drawing/2014/main" id="{57715476-ACC0-4652-B19B-922707324D7C}"/>
               </a:ext>
             </a:extLst>
           </p:cNvPr>
@@ -4391,7 +4396,7 @@
           <p:cNvPr id="5" name="">
             <a:extLst xmlns:a="http://schemas.openxmlformats.org/drawingml/2006/main">
               <a:ext uri="{FF2B5EF4-FFF2-40B4-BE49-F238E27FC236}">
-                <a16:creationId xmlns:a16="http://schemas.microsoft.com/office/drawing/2014/main" id="{7A9431DB-EE7D-400E-8929-55493894EEBE}"/>
+                <a16:creationId xmlns:a16="http://schemas.microsoft.com/office/drawing/2014/main" id="{986763D1-678F-4C31-BC6E-D72935C95C59}"/>
               </a:ext>
             </a:extLst>
           </p:cNvPr>
@@ -4448,7 +4453,7 @@
           <p:cNvPr id="6" name="">
             <a:extLst xmlns:a="http://schemas.openxmlformats.org/drawingml/2006/main">
               <a:ext uri="{FF2B5EF4-FFF2-40B4-BE49-F238E27FC236}">
-                <a16:creationId xmlns:a16="http://schemas.microsoft.com/office/drawing/2014/main" id="{AFC2F603-C7E8-4629-ACC6-80133AE106C5}"/>
+                <a16:creationId xmlns:a16="http://schemas.microsoft.com/office/drawing/2014/main" id="{603A4A82-C4F8-4F7D-93C6-4791B90FBCAF}"/>
               </a:ext>
             </a:extLst>
           </p:cNvPr>
@@ -4482,7 +4487,7 @@
           <p:cNvPr id="7" name="">
             <a:extLst xmlns:a="http://schemas.openxmlformats.org/drawingml/2006/main">
               <a:ext uri="{FF2B5EF4-FFF2-40B4-BE49-F238E27FC236}">
-                <a16:creationId xmlns:a16="http://schemas.microsoft.com/office/drawing/2014/main" id="{AD349F84-7B68-4EDF-B3E0-28A4D006B9BB}"/>
+                <a16:creationId xmlns:a16="http://schemas.microsoft.com/office/drawing/2014/main" id="{FFD1B003-67FE-4FDF-8E86-0C1098FCC375}"/>
               </a:ext>
             </a:extLst>
           </p:cNvPr>
@@ -4514,7 +4519,7 @@
           <p:cNvPr id="8" name="">
             <a:extLst xmlns:a="http://schemas.openxmlformats.org/drawingml/2006/main">
               <a:ext uri="{FF2B5EF4-FFF2-40B4-BE49-F238E27FC236}">
-                <a16:creationId xmlns:a16="http://schemas.microsoft.com/office/drawing/2014/main" id="{40953E71-E736-4D56-8882-76156164843F}"/>
+                <a16:creationId xmlns:a16="http://schemas.microsoft.com/office/drawing/2014/main" id="{5C2D6AF9-A662-4604-B49A-E1FFF8ED083A}"/>
               </a:ext>
             </a:extLst>
           </p:cNvPr>
@@ -4571,7 +4576,7 @@
           <p:cNvPr id="9" name="">
             <a:extLst xmlns:a="http://schemas.openxmlformats.org/drawingml/2006/main">
               <a:ext uri="{FF2B5EF4-FFF2-40B4-BE49-F238E27FC236}">
-                <a16:creationId xmlns:a16="http://schemas.microsoft.com/office/drawing/2014/main" id="{8A06C9A0-1A1D-4E4E-A2F9-145DDF862B1F}"/>
+                <a16:creationId xmlns:a16="http://schemas.microsoft.com/office/drawing/2014/main" id="{53BC0821-FA48-48A4-8D4F-C5B0B46264DF}"/>
               </a:ext>
             </a:extLst>
           </p:cNvPr>
@@ -4628,7 +4633,7 @@
           <p:cNvPr id="10" name="">
             <a:extLst xmlns:a="http://schemas.openxmlformats.org/drawingml/2006/main">
               <a:ext uri="{FF2B5EF4-FFF2-40B4-BE49-F238E27FC236}">
-                <a16:creationId xmlns:a16="http://schemas.microsoft.com/office/drawing/2014/main" id="{34E361BB-DC73-4FF2-84D5-ECE62D0E07EA}"/>
+                <a16:creationId xmlns:a16="http://schemas.microsoft.com/office/drawing/2014/main" id="{94CFDD09-E669-44DF-8023-CF4A0278BDC1}"/>
               </a:ext>
             </a:extLst>
           </p:cNvPr>
@@ -4685,7 +4690,7 @@
           <p:cNvPr id="11" name="">
             <a:extLst xmlns:a="http://schemas.openxmlformats.org/drawingml/2006/main">
               <a:ext uri="{FF2B5EF4-FFF2-40B4-BE49-F238E27FC236}">
-                <a16:creationId xmlns:a16="http://schemas.microsoft.com/office/drawing/2014/main" id="{F2AA413E-25F0-45FE-9797-34CF90E7E67E}"/>
+                <a16:creationId xmlns:a16="http://schemas.microsoft.com/office/drawing/2014/main" id="{9212CF5F-1482-4CED-A933-CF97AB2F96BF}"/>
               </a:ext>
             </a:extLst>
           </p:cNvPr>
@@ -4715,7 +4720,7 @@
           <p:cNvPr id="12" name="">
             <a:extLst xmlns:a="http://schemas.openxmlformats.org/drawingml/2006/main">
               <a:ext uri="{FF2B5EF4-FFF2-40B4-BE49-F238E27FC236}">
-                <a16:creationId xmlns:a16="http://schemas.microsoft.com/office/drawing/2014/main" id="{D59A99F7-02A7-4F49-AC83-DDB49B2DFE9F}"/>
+                <a16:creationId xmlns:a16="http://schemas.microsoft.com/office/drawing/2014/main" id="{13435D95-523E-41A2-97AD-CB05E48A017D}"/>
               </a:ext>
             </a:extLst>
           </p:cNvPr>
@@ -4749,7 +4754,7 @@
           <p:cNvPr id="13" name="">
             <a:extLst xmlns:a="http://schemas.openxmlformats.org/drawingml/2006/main">
               <a:ext uri="{FF2B5EF4-FFF2-40B4-BE49-F238E27FC236}">
-                <a16:creationId xmlns:a16="http://schemas.microsoft.com/office/drawing/2014/main" id="{08B4CE2A-3CA2-42EF-8541-174B59BD83E7}"/>
+                <a16:creationId xmlns:a16="http://schemas.microsoft.com/office/drawing/2014/main" id="{24EFB963-2F3B-476D-835C-83E8F27D9BAB}"/>
               </a:ext>
             </a:extLst>
           </p:cNvPr>
@@ -4781,7 +4786,7 @@
           <p:cNvPr id="14" name="">
             <a:extLst xmlns:a="http://schemas.openxmlformats.org/drawingml/2006/main">
               <a:ext uri="{FF2B5EF4-FFF2-40B4-BE49-F238E27FC236}">
-                <a16:creationId xmlns:a16="http://schemas.microsoft.com/office/drawing/2014/main" id="{35A9C4D1-A676-4558-9868-85982193C6BF}"/>
+                <a16:creationId xmlns:a16="http://schemas.microsoft.com/office/drawing/2014/main" id="{B44AFE95-14F3-467A-B457-B4093724FB47}"/>
               </a:ext>
             </a:extLst>
           </p:cNvPr>
@@ -4838,7 +4843,7 @@
           <p:cNvPr id="15" name="">
             <a:extLst xmlns:a="http://schemas.openxmlformats.org/drawingml/2006/main">
               <a:ext uri="{FF2B5EF4-FFF2-40B4-BE49-F238E27FC236}">
-                <a16:creationId xmlns:a16="http://schemas.microsoft.com/office/drawing/2014/main" id="{DC3990F0-103B-4299-BBE7-A3EBCC463A2F}"/>
+                <a16:creationId xmlns:a16="http://schemas.microsoft.com/office/drawing/2014/main" id="{53E32D15-E332-4760-8F66-81E1816859D8}"/>
               </a:ext>
             </a:extLst>
           </p:cNvPr>
@@ -4895,7 +4900,7 @@
           <p:cNvPr id="16" name="">
             <a:extLst xmlns:a="http://schemas.openxmlformats.org/drawingml/2006/main">
               <a:ext uri="{FF2B5EF4-FFF2-40B4-BE49-F238E27FC236}">
-                <a16:creationId xmlns:a16="http://schemas.microsoft.com/office/drawing/2014/main" id="{2FA6972B-7A36-4C6E-9C10-29E9C8F24558}"/>
+                <a16:creationId xmlns:a16="http://schemas.microsoft.com/office/drawing/2014/main" id="{2656140F-0F3C-48B3-A3B3-9F24427CEABC}"/>
               </a:ext>
             </a:extLst>
           </p:cNvPr>
@@ -4952,7 +4957,7 @@
           <p:cNvPr id="17" name="">
             <a:extLst xmlns:a="http://schemas.openxmlformats.org/drawingml/2006/main">
               <a:ext uri="{FF2B5EF4-FFF2-40B4-BE49-F238E27FC236}">
-                <a16:creationId xmlns:a16="http://schemas.microsoft.com/office/drawing/2014/main" id="{9B743FD1-6308-4896-BC6A-BCD0D0B38681}"/>
+                <a16:creationId xmlns:a16="http://schemas.microsoft.com/office/drawing/2014/main" id="{63026AEF-7580-495F-AAE6-10DBCE0DA399}"/>
               </a:ext>
             </a:extLst>
           </p:cNvPr>
@@ -4982,7 +4987,7 @@
           <p:cNvPr id="18" name="">
             <a:extLst xmlns:a="http://schemas.openxmlformats.org/drawingml/2006/main">
               <a:ext uri="{FF2B5EF4-FFF2-40B4-BE49-F238E27FC236}">
-                <a16:creationId xmlns:a16="http://schemas.microsoft.com/office/drawing/2014/main" id="{531C96F4-43DD-43C2-9345-C5EDB00780FA}"/>
+                <a16:creationId xmlns:a16="http://schemas.microsoft.com/office/drawing/2014/main" id="{20810A37-5D11-466E-847E-81790315A3C0}"/>
               </a:ext>
             </a:extLst>
           </p:cNvPr>
@@ -5016,7 +5021,7 @@
           <p:cNvPr id="19" name="">
             <a:extLst xmlns:a="http://schemas.openxmlformats.org/drawingml/2006/main">
               <a:ext uri="{FF2B5EF4-FFF2-40B4-BE49-F238E27FC236}">
-                <a16:creationId xmlns:a16="http://schemas.microsoft.com/office/drawing/2014/main" id="{839A6090-2327-4B8B-8C81-C49A76D657CD}"/>
+                <a16:creationId xmlns:a16="http://schemas.microsoft.com/office/drawing/2014/main" id="{EEE880C5-152F-4E2B-8E3A-CE81CFEAA89B}"/>
               </a:ext>
             </a:extLst>
           </p:cNvPr>
@@ -5048,7 +5053,7 @@
           <p:cNvPr id="20" name="">
             <a:extLst xmlns:a="http://schemas.openxmlformats.org/drawingml/2006/main">
               <a:ext uri="{FF2B5EF4-FFF2-40B4-BE49-F238E27FC236}">
-                <a16:creationId xmlns:a16="http://schemas.microsoft.com/office/drawing/2014/main" id="{DBE19246-0911-4341-89BF-D31007DD0010}"/>
+                <a16:creationId xmlns:a16="http://schemas.microsoft.com/office/drawing/2014/main" id="{CF615121-CB6B-4166-A7F4-5CD98538653B}"/>
               </a:ext>
             </a:extLst>
           </p:cNvPr>
@@ -5105,7 +5110,7 @@
           <p:cNvPr id="21" name="">
             <a:extLst xmlns:a="http://schemas.openxmlformats.org/drawingml/2006/main">
               <a:ext uri="{FF2B5EF4-FFF2-40B4-BE49-F238E27FC236}">
-                <a16:creationId xmlns:a16="http://schemas.microsoft.com/office/drawing/2014/main" id="{4CD2A8AA-63BF-4C70-AB42-80F6891E97DD}"/>
+                <a16:creationId xmlns:a16="http://schemas.microsoft.com/office/drawing/2014/main" id="{016462AC-56AF-4185-A412-DDC3BC6D593E}"/>
               </a:ext>
             </a:extLst>
           </p:cNvPr>
@@ -5162,7 +5167,7 @@
           <p:cNvPr id="22" name="">
             <a:extLst xmlns:a="http://schemas.openxmlformats.org/drawingml/2006/main">
               <a:ext uri="{FF2B5EF4-FFF2-40B4-BE49-F238E27FC236}">
-                <a16:creationId xmlns:a16="http://schemas.microsoft.com/office/drawing/2014/main" id="{30A1DBC4-5960-4C07-9DC7-5CFA3CA33BF2}"/>
+                <a16:creationId xmlns:a16="http://schemas.microsoft.com/office/drawing/2014/main" id="{0327E046-3C56-4B3B-B117-0C800845557A}"/>
               </a:ext>
             </a:extLst>
           </p:cNvPr>
@@ -5219,7 +5224,7 @@
           <p:cNvPr id="23" name="">
             <a:extLst xmlns:a="http://schemas.openxmlformats.org/drawingml/2006/main">
               <a:ext uri="{FF2B5EF4-FFF2-40B4-BE49-F238E27FC236}">
-                <a16:creationId xmlns:a16="http://schemas.microsoft.com/office/drawing/2014/main" id="{3E9D362F-B913-4759-A6F4-006AD0774B82}"/>
+                <a16:creationId xmlns:a16="http://schemas.microsoft.com/office/drawing/2014/main" id="{F6D09876-0A3F-444B-9B89-0A3F92811F70}"/>
               </a:ext>
             </a:extLst>
           </p:cNvPr>
@@ -5249,7 +5254,7 @@
           <p:cNvPr id="24" name="">
             <a:extLst xmlns:a="http://schemas.openxmlformats.org/drawingml/2006/main">
               <a:ext uri="{FF2B5EF4-FFF2-40B4-BE49-F238E27FC236}">
-                <a16:creationId xmlns:a16="http://schemas.microsoft.com/office/drawing/2014/main" id="{4E05CF62-5668-4FF9-A289-3B42EC8ED0DC}"/>
+                <a16:creationId xmlns:a16="http://schemas.microsoft.com/office/drawing/2014/main" id="{178DFCB0-E7E3-4216-9105-407E0A1F1CA2}"/>
               </a:ext>
             </a:extLst>
           </p:cNvPr>
@@ -5283,7 +5288,7 @@
           <p:cNvPr id="25" name="">
             <a:extLst xmlns:a="http://schemas.openxmlformats.org/drawingml/2006/main">
               <a:ext uri="{FF2B5EF4-FFF2-40B4-BE49-F238E27FC236}">
-                <a16:creationId xmlns:a16="http://schemas.microsoft.com/office/drawing/2014/main" id="{A5ED9A67-5B59-4929-ACC7-E950BDF13C14}"/>
+                <a16:creationId xmlns:a16="http://schemas.microsoft.com/office/drawing/2014/main" id="{1999DC6F-33A7-4428-8E29-C84B2B2FE52C}"/>
               </a:ext>
             </a:extLst>
           </p:cNvPr>
@@ -5315,7 +5320,7 @@
           <p:cNvPr id="26" name="">
             <a:extLst xmlns:a="http://schemas.openxmlformats.org/drawingml/2006/main">
               <a:ext uri="{FF2B5EF4-FFF2-40B4-BE49-F238E27FC236}">
-                <a16:creationId xmlns:a16="http://schemas.microsoft.com/office/drawing/2014/main" id="{F913C3BD-7611-40EC-8519-28719838BF0A}"/>
+                <a16:creationId xmlns:a16="http://schemas.microsoft.com/office/drawing/2014/main" id="{A9A7BD63-4F99-4250-8146-973078090F95}"/>
               </a:ext>
             </a:extLst>
           </p:cNvPr>
@@ -5372,7 +5377,7 @@
           <p:cNvPr id="27" name="">
             <a:extLst xmlns:a="http://schemas.openxmlformats.org/drawingml/2006/main">
               <a:ext uri="{FF2B5EF4-FFF2-40B4-BE49-F238E27FC236}">
-                <a16:creationId xmlns:a16="http://schemas.microsoft.com/office/drawing/2014/main" id="{B4E9EFCA-E4D4-4D38-A717-1F0937FC90D8}"/>
+                <a16:creationId xmlns:a16="http://schemas.microsoft.com/office/drawing/2014/main" id="{41B62790-CEA3-49E9-9446-CF7873DEE7E2}"/>
               </a:ext>
             </a:extLst>
           </p:cNvPr>
@@ -5429,7 +5434,7 @@
           <p:cNvPr id="28" name="">
             <a:extLst xmlns:a="http://schemas.openxmlformats.org/drawingml/2006/main">
               <a:ext uri="{FF2B5EF4-FFF2-40B4-BE49-F238E27FC236}">
-                <a16:creationId xmlns:a16="http://schemas.microsoft.com/office/drawing/2014/main" id="{0AF3B3ED-27CF-439E-99A6-956D275CB1E4}"/>
+                <a16:creationId xmlns:a16="http://schemas.microsoft.com/office/drawing/2014/main" id="{19D992B4-DFF4-40E0-95DE-420225ACA902}"/>
               </a:ext>
             </a:extLst>
           </p:cNvPr>
@@ -5486,7 +5491,7 @@
           <p:cNvPr id="29" name="">
             <a:extLst xmlns:a="http://schemas.openxmlformats.org/drawingml/2006/main">
               <a:ext uri="{FF2B5EF4-FFF2-40B4-BE49-F238E27FC236}">
-                <a16:creationId xmlns:a16="http://schemas.microsoft.com/office/drawing/2014/main" id="{E6468A66-96E0-47A2-918A-BF06DD7FD51C}"/>
+                <a16:creationId xmlns:a16="http://schemas.microsoft.com/office/drawing/2014/main" id="{E786F5C0-FE73-4B65-A908-8C1A496EA717}"/>
               </a:ext>
             </a:extLst>
           </p:cNvPr>
@@ -5516,7 +5521,7 @@
           <p:cNvPr id="30" name="">
             <a:extLst xmlns:a="http://schemas.openxmlformats.org/drawingml/2006/main">
               <a:ext uri="{FF2B5EF4-FFF2-40B4-BE49-F238E27FC236}">
-                <a16:creationId xmlns:a16="http://schemas.microsoft.com/office/drawing/2014/main" id="{0160AC9F-CB18-4251-9806-E5E30289B030}"/>
+                <a16:creationId xmlns:a16="http://schemas.microsoft.com/office/drawing/2014/main" id="{03D2AF54-9F3E-4EEE-89DF-C9D0B23A9E59}"/>
               </a:ext>
             </a:extLst>
           </p:cNvPr>
@@ -5550,7 +5555,7 @@
           <p:cNvPr id="31" name="">
             <a:extLst xmlns:a="http://schemas.openxmlformats.org/drawingml/2006/main">
               <a:ext uri="{FF2B5EF4-FFF2-40B4-BE49-F238E27FC236}">
-                <a16:creationId xmlns:a16="http://schemas.microsoft.com/office/drawing/2014/main" id="{8C5CBABE-900B-4BB6-9019-176AECFE2A74}"/>
+                <a16:creationId xmlns:a16="http://schemas.microsoft.com/office/drawing/2014/main" id="{98FA0D52-0113-4C1D-8F08-7B34E47023BB}"/>
               </a:ext>
             </a:extLst>
           </p:cNvPr>
@@ -5582,7 +5587,7 @@
           <p:cNvPr id="32" name="">
             <a:extLst xmlns:a="http://schemas.openxmlformats.org/drawingml/2006/main">
               <a:ext uri="{FF2B5EF4-FFF2-40B4-BE49-F238E27FC236}">
-                <a16:creationId xmlns:a16="http://schemas.microsoft.com/office/drawing/2014/main" id="{66D14A8E-F673-4B22-BD19-1639EB9588B1}"/>
+                <a16:creationId xmlns:a16="http://schemas.microsoft.com/office/drawing/2014/main" id="{6734D3F7-0570-46F9-93A2-0D09D244377E}"/>
               </a:ext>
             </a:extLst>
           </p:cNvPr>
@@ -5639,7 +5644,7 @@
           <p:cNvPr id="33" name="">
             <a:extLst xmlns:a="http://schemas.openxmlformats.org/drawingml/2006/main">
               <a:ext uri="{FF2B5EF4-FFF2-40B4-BE49-F238E27FC236}">
-                <a16:creationId xmlns:a16="http://schemas.microsoft.com/office/drawing/2014/main" id="{E3437826-7287-46F4-BB8D-F4FEBE207B43}"/>
+                <a16:creationId xmlns:a16="http://schemas.microsoft.com/office/drawing/2014/main" id="{1C0CAE28-6E30-421B-BF7A-E172C78920BF}"/>
               </a:ext>
             </a:extLst>
           </p:cNvPr>
@@ -5696,7 +5701,7 @@
           <p:cNvPr id="34" name="">
             <a:extLst xmlns:a="http://schemas.openxmlformats.org/drawingml/2006/main">
               <a:ext uri="{FF2B5EF4-FFF2-40B4-BE49-F238E27FC236}">
-                <a16:creationId xmlns:a16="http://schemas.microsoft.com/office/drawing/2014/main" id="{C47EC12F-498F-468F-80C7-BCFCC3661274}"/>
+                <a16:creationId xmlns:a16="http://schemas.microsoft.com/office/drawing/2014/main" id="{156FDD96-20F0-4BF0-9BFB-7576734CF936}"/>
               </a:ext>
             </a:extLst>
           </p:cNvPr>
@@ -5753,7 +5758,7 @@
           <p:cNvPr id="35" name="">
             <a:extLst xmlns:a="http://schemas.openxmlformats.org/drawingml/2006/main">
               <a:ext uri="{FF2B5EF4-FFF2-40B4-BE49-F238E27FC236}">
-                <a16:creationId xmlns:a16="http://schemas.microsoft.com/office/drawing/2014/main" id="{6D2E00BD-4C73-4A6D-8258-CB65DFD7FAD9}"/>
+                <a16:creationId xmlns:a16="http://schemas.microsoft.com/office/drawing/2014/main" id="{B3AF1648-E6CC-460D-8239-7CCA09795A34}"/>
               </a:ext>
             </a:extLst>
           </p:cNvPr>
@@ -5783,7 +5788,7 @@
           <p:cNvPr id="36" name="">
             <a:extLst xmlns:a="http://schemas.openxmlformats.org/drawingml/2006/main">
               <a:ext uri="{FF2B5EF4-FFF2-40B4-BE49-F238E27FC236}">
-                <a16:creationId xmlns:a16="http://schemas.microsoft.com/office/drawing/2014/main" id="{6C27BEDB-93AC-418E-B76D-F94B8D97F4A4}"/>
+                <a16:creationId xmlns:a16="http://schemas.microsoft.com/office/drawing/2014/main" id="{44FD7C0E-745B-480D-9104-2F68074F71D6}"/>
               </a:ext>
             </a:extLst>
           </p:cNvPr>
@@ -5817,7 +5822,7 @@
           <p:cNvPr id="37" name="">
             <a:extLst xmlns:a="http://schemas.openxmlformats.org/drawingml/2006/main">
               <a:ext uri="{FF2B5EF4-FFF2-40B4-BE49-F238E27FC236}">
-                <a16:creationId xmlns:a16="http://schemas.microsoft.com/office/drawing/2014/main" id="{3AA59CA7-963D-42CC-A5D9-98FBFDC92F68}"/>
+                <a16:creationId xmlns:a16="http://schemas.microsoft.com/office/drawing/2014/main" id="{9F383383-DE23-47AF-9B7C-B34796B0A757}"/>
               </a:ext>
             </a:extLst>
           </p:cNvPr>
@@ -5849,7 +5854,7 @@
           <p:cNvPr id="38" name="">
             <a:extLst xmlns:a="http://schemas.openxmlformats.org/drawingml/2006/main">
               <a:ext uri="{FF2B5EF4-FFF2-40B4-BE49-F238E27FC236}">
-                <a16:creationId xmlns:a16="http://schemas.microsoft.com/office/drawing/2014/main" id="{275D27BF-0DED-4F97-868B-21E85F16D1EE}"/>
+                <a16:creationId xmlns:a16="http://schemas.microsoft.com/office/drawing/2014/main" id="{2D6B7F84-569C-46B2-AB7B-D53DE126254C}"/>
               </a:ext>
             </a:extLst>
           </p:cNvPr>
@@ -5906,7 +5911,7 @@
           <p:cNvPr id="39" name="">
             <a:extLst xmlns:a="http://schemas.openxmlformats.org/drawingml/2006/main">
               <a:ext uri="{FF2B5EF4-FFF2-40B4-BE49-F238E27FC236}">
-                <a16:creationId xmlns:a16="http://schemas.microsoft.com/office/drawing/2014/main" id="{8CFE2DAD-357B-40F7-A161-A14B4152E224}"/>
+                <a16:creationId xmlns:a16="http://schemas.microsoft.com/office/drawing/2014/main" id="{4F473680-4FED-41C9-A23F-0A7D01C59B52}"/>
               </a:ext>
             </a:extLst>
           </p:cNvPr>
@@ -5963,7 +5968,7 @@
           <p:cNvPr id="40" name="">
             <a:extLst xmlns:a="http://schemas.openxmlformats.org/drawingml/2006/main">
               <a:ext uri="{FF2B5EF4-FFF2-40B4-BE49-F238E27FC236}">
-                <a16:creationId xmlns:a16="http://schemas.microsoft.com/office/drawing/2014/main" id="{B186A293-3C7C-4BF0-9AAC-31A8BC7FED96}"/>
+                <a16:creationId xmlns:a16="http://schemas.microsoft.com/office/drawing/2014/main" id="{2B776FA8-9841-466B-A18D-A59C80B9B21B}"/>
               </a:ext>
             </a:extLst>
           </p:cNvPr>
@@ -6020,7 +6025,7 @@
           <p:cNvPr id="41" name="">
             <a:extLst xmlns:a="http://schemas.openxmlformats.org/drawingml/2006/main">
               <a:ext uri="{FF2B5EF4-FFF2-40B4-BE49-F238E27FC236}">
-                <a16:creationId xmlns:a16="http://schemas.microsoft.com/office/drawing/2014/main" id="{B314D751-D776-4359-914B-D686503B34B8}"/>
+                <a16:creationId xmlns:a16="http://schemas.microsoft.com/office/drawing/2014/main" id="{8088CA47-0C9B-4C7E-82A0-9F95B207D035}"/>
               </a:ext>
             </a:extLst>
           </p:cNvPr>
@@ -6052,7 +6057,7 @@
           <p:cNvPr id="42" name="">
             <a:extLst xmlns:a="http://schemas.openxmlformats.org/drawingml/2006/main">
               <a:ext uri="{FF2B5EF4-FFF2-40B4-BE49-F238E27FC236}">
-                <a16:creationId xmlns:a16="http://schemas.microsoft.com/office/drawing/2014/main" id="{8C933799-BECC-4C6A-B1A2-C8E391A402A0}"/>
+                <a16:creationId xmlns:a16="http://schemas.microsoft.com/office/drawing/2014/main" id="{8B63DA85-A183-439A-92C3-72A23B7BB3BB}"/>
               </a:ext>
             </a:extLst>
           </p:cNvPr>
@@ -6109,7 +6114,7 @@
           <p:cNvPr id="43" name="">
             <a:extLst xmlns:a="http://schemas.openxmlformats.org/drawingml/2006/main">
               <a:ext uri="{FF2B5EF4-FFF2-40B4-BE49-F238E27FC236}">
-                <a16:creationId xmlns:a16="http://schemas.microsoft.com/office/drawing/2014/main" id="{44CB333E-3144-44E0-807D-A5CE296B3761}"/>
+                <a16:creationId xmlns:a16="http://schemas.microsoft.com/office/drawing/2014/main" id="{C6B97509-DB9F-4E81-8C30-35298DA99E66}"/>
               </a:ext>
             </a:extLst>
           </p:cNvPr>
@@ -6166,7 +6171,7 @@
           <p:cNvPr id="44" name="">
             <a:extLst xmlns:a="http://schemas.openxmlformats.org/drawingml/2006/main">
               <a:ext uri="{FF2B5EF4-FFF2-40B4-BE49-F238E27FC236}">
-                <a16:creationId xmlns:a16="http://schemas.microsoft.com/office/drawing/2014/main" id="{8649B80A-9E7C-40BF-9002-5A2412DD36C6}"/>
+                <a16:creationId xmlns:a16="http://schemas.microsoft.com/office/drawing/2014/main" id="{1BCEAF8D-91BC-43F7-8F71-BCAE343698CC}"/>
               </a:ext>
             </a:extLst>
           </p:cNvPr>
@@ -6223,7 +6228,7 @@
           <p:cNvPr id="45" name="">
             <a:extLst xmlns:a="http://schemas.openxmlformats.org/drawingml/2006/main">
               <a:ext uri="{FF2B5EF4-FFF2-40B4-BE49-F238E27FC236}">
-                <a16:creationId xmlns:a16="http://schemas.microsoft.com/office/drawing/2014/main" id="{1901D8F6-6109-48E2-8D4F-8BA307CB9713}"/>
+                <a16:creationId xmlns:a16="http://schemas.microsoft.com/office/drawing/2014/main" id="{CC694B94-B16F-41BC-B00A-168B94FF9D44}"/>
               </a:ext>
             </a:extLst>
           </p:cNvPr>
@@ -6280,7 +6285,7 @@
           <p:cNvPr id="46" name="">
             <a:extLst xmlns:a="http://schemas.openxmlformats.org/drawingml/2006/main">
               <a:ext uri="{FF2B5EF4-FFF2-40B4-BE49-F238E27FC236}">
-                <a16:creationId xmlns:a16="http://schemas.microsoft.com/office/drawing/2014/main" id="{667F52DA-AAAC-4260-9481-9D69D7F15057}"/>
+                <a16:creationId xmlns:a16="http://schemas.microsoft.com/office/drawing/2014/main" id="{5BBBB1C0-1833-4894-BE74-ADE6AE701AE1}"/>
               </a:ext>
             </a:extLst>
           </p:cNvPr>
@@ -6337,7 +6342,7 @@
           <p:cNvPr id="47" name="">
             <a:extLst xmlns:a="http://schemas.openxmlformats.org/drawingml/2006/main">
               <a:ext uri="{FF2B5EF4-FFF2-40B4-BE49-F238E27FC236}">
-                <a16:creationId xmlns:a16="http://schemas.microsoft.com/office/drawing/2014/main" id="{D7C3133E-7135-4596-80A1-FB38FBA4F8BF}"/>
+                <a16:creationId xmlns:a16="http://schemas.microsoft.com/office/drawing/2014/main" id="{7204D590-C20C-4197-8477-E5F2197B6DED}"/>
               </a:ext>
             </a:extLst>
           </p:cNvPr>
@@ -6394,7 +6399,7 @@
           <p:cNvPr id="48" name="">
             <a:extLst xmlns:a="http://schemas.openxmlformats.org/drawingml/2006/main">
               <a:ext uri="{FF2B5EF4-FFF2-40B4-BE49-F238E27FC236}">
-                <a16:creationId xmlns:a16="http://schemas.microsoft.com/office/drawing/2014/main" id="{34F4B509-8582-458A-B051-54E5774C9451}"/>
+                <a16:creationId xmlns:a16="http://schemas.microsoft.com/office/drawing/2014/main" id="{9CFEE508-4D6F-48F8-AA0B-2886DDE6EFA7}"/>
               </a:ext>
             </a:extLst>
           </p:cNvPr>
@@ -6451,7 +6456,7 @@
           <p:cNvPr id="49" name="">
             <a:extLst xmlns:a="http://schemas.openxmlformats.org/drawingml/2006/main">
               <a:ext uri="{FF2B5EF4-FFF2-40B4-BE49-F238E27FC236}">
-                <a16:creationId xmlns:a16="http://schemas.microsoft.com/office/drawing/2014/main" id="{8FBF0A8C-C763-481E-80B6-61630A4C4987}"/>
+                <a16:creationId xmlns:a16="http://schemas.microsoft.com/office/drawing/2014/main" id="{30B2C314-0D49-4A56-BF40-6D4479132EC5}"/>
               </a:ext>
             </a:extLst>
           </p:cNvPr>
@@ -6531,7 +6536,7 @@
           <p:cNvPr id="50" name="">
             <a:extLst xmlns:a="http://schemas.openxmlformats.org/drawingml/2006/main">
               <a:ext uri="{FF2B5EF4-FFF2-40B4-BE49-F238E27FC236}">
-                <a16:creationId xmlns:a16="http://schemas.microsoft.com/office/drawing/2014/main" id="{95967649-0518-47DA-A1D5-E497F2DE3ED5}"/>
+                <a16:creationId xmlns:a16="http://schemas.microsoft.com/office/drawing/2014/main" id="{DA2F7294-372E-4CC0-8E5A-E32263F6F1C3}"/>
               </a:ext>
             </a:extLst>
           </p:cNvPr>
@@ -6588,7 +6593,7 @@
           <p:cNvPr id="51" name="">
             <a:extLst xmlns:a="http://schemas.openxmlformats.org/drawingml/2006/main">
               <a:ext uri="{FF2B5EF4-FFF2-40B4-BE49-F238E27FC236}">
-                <a16:creationId xmlns:a16="http://schemas.microsoft.com/office/drawing/2014/main" id="{37025B08-5657-45B4-8133-7B1801CBCCF2}"/>
+                <a16:creationId xmlns:a16="http://schemas.microsoft.com/office/drawing/2014/main" id="{58400B3E-7E1D-4087-90A9-8BD9F32398C0}"/>
               </a:ext>
             </a:extLst>
           </p:cNvPr>
@@ -6668,7 +6673,7 @@
           <p:cNvPr id="52" name="">
             <a:extLst xmlns:a="http://schemas.openxmlformats.org/drawingml/2006/main">
               <a:ext uri="{FF2B5EF4-FFF2-40B4-BE49-F238E27FC236}">
-                <a16:creationId xmlns:a16="http://schemas.microsoft.com/office/drawing/2014/main" id="{7F37FA0C-696B-4961-BCA6-73729631A901}"/>
+                <a16:creationId xmlns:a16="http://schemas.microsoft.com/office/drawing/2014/main" id="{ED70D630-8D29-4F52-9DC7-42424445FA26}"/>
               </a:ext>
             </a:extLst>
           </p:cNvPr>
@@ -6725,7 +6730,7 @@
           <p:cNvPr id="53" name="">
             <a:extLst xmlns:a="http://schemas.openxmlformats.org/drawingml/2006/main">
               <a:ext uri="{FF2B5EF4-FFF2-40B4-BE49-F238E27FC236}">
-                <a16:creationId xmlns:a16="http://schemas.microsoft.com/office/drawing/2014/main" id="{44F9105A-48E7-45EF-927A-D09DEEE5A35F}"/>
+                <a16:creationId xmlns:a16="http://schemas.microsoft.com/office/drawing/2014/main" id="{73907275-2F56-4D96-986B-8692700578C5}"/>
               </a:ext>
             </a:extLst>
           </p:cNvPr>
@@ -6805,7 +6810,7 @@
           <p:cNvPr id="54" name="">
             <a:extLst xmlns:a="http://schemas.openxmlformats.org/drawingml/2006/main">
               <a:ext uri="{FF2B5EF4-FFF2-40B4-BE49-F238E27FC236}">
-                <a16:creationId xmlns:a16="http://schemas.microsoft.com/office/drawing/2014/main" id="{DE97F408-6476-4206-A082-3F0C350AB0DF}"/>
+                <a16:creationId xmlns:a16="http://schemas.microsoft.com/office/drawing/2014/main" id="{153CEF55-9B18-43A4-BCE4-6197D2D3198A}"/>
               </a:ext>
             </a:extLst>
           </p:cNvPr>
@@ -6837,7 +6842,7 @@
           <p:cNvPr id="55" name="">
             <a:extLst xmlns:a="http://schemas.openxmlformats.org/drawingml/2006/main">
               <a:ext uri="{FF2B5EF4-FFF2-40B4-BE49-F238E27FC236}">
-                <a16:creationId xmlns:a16="http://schemas.microsoft.com/office/drawing/2014/main" id="{6DA2024C-C66E-4CEF-B787-F6EE3F9F7522}"/>
+                <a16:creationId xmlns:a16="http://schemas.microsoft.com/office/drawing/2014/main" id="{A32EAF97-3414-4FEC-ACE4-67DF5AF220AE}"/>
               </a:ext>
             </a:extLst>
           </p:cNvPr>
@@ -6892,7 +6897,7 @@
     </p:spTree>
     <p:extLst>
       <p:ext uri="{BB962C8B-B14F-4D97-AF65-F5344CB8AC3E}">
-        <p14:creationId xmlns:p14="http://schemas.microsoft.com/office/powerpoint/2010/main" val="1873447589"/>
+        <p14:creationId xmlns:p14="http://schemas.microsoft.com/office/powerpoint/2010/main" val="1605083949"/>
       </p:ext>
     </p:extLst>
   </p:cSld>
@@ -6923,7 +6928,7 @@
           <p:cNvPr id="44" name="">
             <a:extLst xmlns:a="http://schemas.openxmlformats.org/drawingml/2006/main">
               <a:ext uri="{FF2B5EF4-FFF2-40B4-BE49-F238E27FC236}">
-                <a16:creationId xmlns:a16="http://schemas.microsoft.com/office/drawing/2014/main" id="{ED649951-CF2F-4DB0-9731-28F2512208AB}"/>
+                <a16:creationId xmlns:a16="http://schemas.microsoft.com/office/drawing/2014/main" id="{1A8E5463-927D-4E70-AC5C-D1FF0B6A36F5}"/>
               </a:ext>
             </a:extLst>
           </p:cNvPr>
@@ -6953,7 +6958,7 @@
           <p:cNvPr id="2" name="">
             <a:extLst xmlns:a="http://schemas.openxmlformats.org/drawingml/2006/main">
               <a:ext uri="{FF2B5EF4-FFF2-40B4-BE49-F238E27FC236}">
-                <a16:creationId xmlns:a16="http://schemas.microsoft.com/office/drawing/2014/main" id="{A91E3FD0-E3A5-489E-B35A-75D32A1FC587}"/>
+                <a16:creationId xmlns:a16="http://schemas.microsoft.com/office/drawing/2014/main" id="{94A65D72-0C40-4472-A068-4BCD016DB531}"/>
               </a:ext>
             </a:extLst>
           </p:cNvPr>
@@ -7010,7 +7015,7 @@
           <p:cNvPr id="3" name="">
             <a:extLst xmlns:a="http://schemas.openxmlformats.org/drawingml/2006/main">
               <a:ext uri="{FF2B5EF4-FFF2-40B4-BE49-F238E27FC236}">
-                <a16:creationId xmlns:a16="http://schemas.microsoft.com/office/drawing/2014/main" id="{31F5EBD1-085A-424F-8A1E-570F4D8B2367}"/>
+                <a16:creationId xmlns:a16="http://schemas.microsoft.com/office/drawing/2014/main" id="{9C7D90A4-F6E6-4286-8FFB-460C9222EA12}"/>
               </a:ext>
             </a:extLst>
           </p:cNvPr>
@@ -7040,7 +7045,7 @@
           <p:cNvPr id="4" name="">
             <a:extLst xmlns:a="http://schemas.openxmlformats.org/drawingml/2006/main">
               <a:ext uri="{FF2B5EF4-FFF2-40B4-BE49-F238E27FC236}">
-                <a16:creationId xmlns:a16="http://schemas.microsoft.com/office/drawing/2014/main" id="{7546DFB3-DB10-44C4-8C6A-04FD8B6BD24C}"/>
+                <a16:creationId xmlns:a16="http://schemas.microsoft.com/office/drawing/2014/main" id="{9F00922A-C5EA-445A-A094-86E5BD5D6DD6}"/>
               </a:ext>
             </a:extLst>
           </p:cNvPr>
@@ -7097,7 +7102,7 @@
           <p:cNvPr id="5" name="">
             <a:extLst xmlns:a="http://schemas.openxmlformats.org/drawingml/2006/main">
               <a:ext uri="{FF2B5EF4-FFF2-40B4-BE49-F238E27FC236}">
-                <a16:creationId xmlns:a16="http://schemas.microsoft.com/office/drawing/2014/main" id="{49387929-ABE5-4816-B2AA-E3D8498EE705}"/>
+                <a16:creationId xmlns:a16="http://schemas.microsoft.com/office/drawing/2014/main" id="{C1E84083-C660-4444-9273-CB37D0387C18}"/>
               </a:ext>
             </a:extLst>
           </p:cNvPr>
@@ -7154,7 +7159,7 @@
           <p:cNvPr id="6" name="">
             <a:extLst xmlns:a="http://schemas.openxmlformats.org/drawingml/2006/main">
               <a:ext uri="{FF2B5EF4-FFF2-40B4-BE49-F238E27FC236}">
-                <a16:creationId xmlns:a16="http://schemas.microsoft.com/office/drawing/2014/main" id="{17B62CA5-A0FC-4C07-B48B-EEDC117445B4}"/>
+                <a16:creationId xmlns:a16="http://schemas.microsoft.com/office/drawing/2014/main" id="{532627FE-52FF-43F9-88C7-007668B5FFED}"/>
               </a:ext>
             </a:extLst>
           </p:cNvPr>
@@ -7211,7 +7216,7 @@
           <p:cNvPr id="7" name="">
             <a:extLst xmlns:a="http://schemas.openxmlformats.org/drawingml/2006/main">
               <a:ext uri="{FF2B5EF4-FFF2-40B4-BE49-F238E27FC236}">
-                <a16:creationId xmlns:a16="http://schemas.microsoft.com/office/drawing/2014/main" id="{B2110859-1D46-4549-95FD-D10D426353B0}"/>
+                <a16:creationId xmlns:a16="http://schemas.microsoft.com/office/drawing/2014/main" id="{1004D057-12B3-4230-8E83-576B8F43E11C}"/>
               </a:ext>
             </a:extLst>
           </p:cNvPr>
@@ -7241,7 +7246,7 @@
           <p:cNvPr id="8" name="">
             <a:extLst xmlns:a="http://schemas.openxmlformats.org/drawingml/2006/main">
               <a:ext uri="{FF2B5EF4-FFF2-40B4-BE49-F238E27FC236}">
-                <a16:creationId xmlns:a16="http://schemas.microsoft.com/office/drawing/2014/main" id="{6AA4F3B6-DFE9-48C4-8FF2-62FA82045D9F}"/>
+                <a16:creationId xmlns:a16="http://schemas.microsoft.com/office/drawing/2014/main" id="{CF4E4544-4988-4583-9095-78559460546F}"/>
               </a:ext>
             </a:extLst>
           </p:cNvPr>
@@ -7298,7 +7303,7 @@
           <p:cNvPr id="9" name="">
             <a:extLst xmlns:a="http://schemas.openxmlformats.org/drawingml/2006/main">
               <a:ext uri="{FF2B5EF4-FFF2-40B4-BE49-F238E27FC236}">
-                <a16:creationId xmlns:a16="http://schemas.microsoft.com/office/drawing/2014/main" id="{BF480078-83BD-488A-AA87-DB0C7CF65E59}"/>
+                <a16:creationId xmlns:a16="http://schemas.microsoft.com/office/drawing/2014/main" id="{2ACD1D50-B7AA-4F7F-8548-4E9B0865DFBF}"/>
               </a:ext>
             </a:extLst>
           </p:cNvPr>
@@ -7355,7 +7360,7 @@
           <p:cNvPr id="10" name="">
             <a:extLst xmlns:a="http://schemas.openxmlformats.org/drawingml/2006/main">
               <a:ext uri="{FF2B5EF4-FFF2-40B4-BE49-F238E27FC236}">
-                <a16:creationId xmlns:a16="http://schemas.microsoft.com/office/drawing/2014/main" id="{0E7088FC-55DB-4886-85BB-BD8E0ADF79C3}"/>
+                <a16:creationId xmlns:a16="http://schemas.microsoft.com/office/drawing/2014/main" id="{46A90536-5F15-46F2-B2FC-3A646163C344}"/>
               </a:ext>
             </a:extLst>
           </p:cNvPr>
@@ -7412,7 +7417,7 @@
           <p:cNvPr id="11" name="">
             <a:extLst xmlns:a="http://schemas.openxmlformats.org/drawingml/2006/main">
               <a:ext uri="{FF2B5EF4-FFF2-40B4-BE49-F238E27FC236}">
-                <a16:creationId xmlns:a16="http://schemas.microsoft.com/office/drawing/2014/main" id="{DE2714D1-3A75-4921-B5D0-00A6F6465F94}"/>
+                <a16:creationId xmlns:a16="http://schemas.microsoft.com/office/drawing/2014/main" id="{0446A811-D1BC-4DB8-A776-5E3A53FF1946}"/>
               </a:ext>
             </a:extLst>
           </p:cNvPr>
@@ -7444,7 +7449,7 @@
           <p:cNvPr id="12" name="">
             <a:extLst xmlns:a="http://schemas.openxmlformats.org/drawingml/2006/main">
               <a:ext uri="{FF2B5EF4-FFF2-40B4-BE49-F238E27FC236}">
-                <a16:creationId xmlns:a16="http://schemas.microsoft.com/office/drawing/2014/main" id="{999D491F-9479-4598-83DF-18EB29BC732D}"/>
+                <a16:creationId xmlns:a16="http://schemas.microsoft.com/office/drawing/2014/main" id="{F3B69393-5C1A-48FB-8E93-05AF33A5C4BE}"/>
               </a:ext>
             </a:extLst>
           </p:cNvPr>
@@ -7501,7 +7506,7 @@
           <p:cNvPr id="13" name="">
             <a:extLst xmlns:a="http://schemas.openxmlformats.org/drawingml/2006/main">
               <a:ext uri="{FF2B5EF4-FFF2-40B4-BE49-F238E27FC236}">
-                <a16:creationId xmlns:a16="http://schemas.microsoft.com/office/drawing/2014/main" id="{C66BB0F2-1E50-4AB8-86DF-B463F3768959}"/>
+                <a16:creationId xmlns:a16="http://schemas.microsoft.com/office/drawing/2014/main" id="{69E374CF-03E0-41A4-9D04-C954F00A64D5}"/>
               </a:ext>
             </a:extLst>
           </p:cNvPr>
@@ -7558,7 +7563,7 @@
           <p:cNvPr id="14" name="">
             <a:extLst xmlns:a="http://schemas.openxmlformats.org/drawingml/2006/main">
               <a:ext uri="{FF2B5EF4-FFF2-40B4-BE49-F238E27FC236}">
-                <a16:creationId xmlns:a16="http://schemas.microsoft.com/office/drawing/2014/main" id="{A02826FA-24AD-4A79-AE40-6347ED72EE09}"/>
+                <a16:creationId xmlns:a16="http://schemas.microsoft.com/office/drawing/2014/main" id="{37E41965-1781-4203-BC01-699244092CE2}"/>
               </a:ext>
             </a:extLst>
           </p:cNvPr>
@@ -7615,7 +7620,7 @@
           <p:cNvPr id="15" name="">
             <a:extLst xmlns:a="http://schemas.openxmlformats.org/drawingml/2006/main">
               <a:ext uri="{FF2B5EF4-FFF2-40B4-BE49-F238E27FC236}">
-                <a16:creationId xmlns:a16="http://schemas.microsoft.com/office/drawing/2014/main" id="{029CDFEE-7D6C-45F4-AFA3-B1A8101EE618}"/>
+                <a16:creationId xmlns:a16="http://schemas.microsoft.com/office/drawing/2014/main" id="{13D6C6A7-D27F-494F-B449-AE136F404FE7}"/>
               </a:ext>
             </a:extLst>
           </p:cNvPr>
@@ -7647,7 +7652,7 @@
           <p:cNvPr id="16" name="">
             <a:extLst xmlns:a="http://schemas.openxmlformats.org/drawingml/2006/main">
               <a:ext uri="{FF2B5EF4-FFF2-40B4-BE49-F238E27FC236}">
-                <a16:creationId xmlns:a16="http://schemas.microsoft.com/office/drawing/2014/main" id="{8A6AB2C7-FCBF-4869-B7AA-09576B7F1990}"/>
+                <a16:creationId xmlns:a16="http://schemas.microsoft.com/office/drawing/2014/main" id="{A2A8FAE9-38B2-443C-A6EF-55902960139E}"/>
               </a:ext>
             </a:extLst>
           </p:cNvPr>
@@ -7704,7 +7709,7 @@
           <p:cNvPr id="17" name="">
             <a:extLst xmlns:a="http://schemas.openxmlformats.org/drawingml/2006/main">
               <a:ext uri="{FF2B5EF4-FFF2-40B4-BE49-F238E27FC236}">
-                <a16:creationId xmlns:a16="http://schemas.microsoft.com/office/drawing/2014/main" id="{BFE8D485-4442-42EE-ABEF-AEEA653612CD}"/>
+                <a16:creationId xmlns:a16="http://schemas.microsoft.com/office/drawing/2014/main" id="{4B6ABF83-7FB4-43C2-9BAE-705715729124}"/>
               </a:ext>
             </a:extLst>
           </p:cNvPr>
@@ -7761,7 +7766,7 @@
           <p:cNvPr id="18" name="">
             <a:extLst xmlns:a="http://schemas.openxmlformats.org/drawingml/2006/main">
               <a:ext uri="{FF2B5EF4-FFF2-40B4-BE49-F238E27FC236}">
-                <a16:creationId xmlns:a16="http://schemas.microsoft.com/office/drawing/2014/main" id="{CD822F91-ABEE-4921-ABA6-BF94F7B9D884}"/>
+                <a16:creationId xmlns:a16="http://schemas.microsoft.com/office/drawing/2014/main" id="{C1FBD23A-DEA4-4D7E-966B-6E619A6024A0}"/>
               </a:ext>
             </a:extLst>
           </p:cNvPr>
@@ -7818,7 +7823,7 @@
           <p:cNvPr id="19" name="">
             <a:extLst xmlns:a="http://schemas.openxmlformats.org/drawingml/2006/main">
               <a:ext uri="{FF2B5EF4-FFF2-40B4-BE49-F238E27FC236}">
-                <a16:creationId xmlns:a16="http://schemas.microsoft.com/office/drawing/2014/main" id="{AD602451-3E5E-423D-B1C4-F01DE56C432A}"/>
+                <a16:creationId xmlns:a16="http://schemas.microsoft.com/office/drawing/2014/main" id="{2B8A4EAC-5665-47EF-8243-9574ACFA36FC}"/>
               </a:ext>
             </a:extLst>
           </p:cNvPr>
@@ -7850,7 +7855,7 @@
           <p:cNvPr id="20" name="">
             <a:extLst xmlns:a="http://schemas.openxmlformats.org/drawingml/2006/main">
               <a:ext uri="{FF2B5EF4-FFF2-40B4-BE49-F238E27FC236}">
-                <a16:creationId xmlns:a16="http://schemas.microsoft.com/office/drawing/2014/main" id="{78A13C51-0304-4754-BB0F-851C9DF9B057}"/>
+                <a16:creationId xmlns:a16="http://schemas.microsoft.com/office/drawing/2014/main" id="{C474EAA1-36A9-4B2C-8173-A28EBABFD8C0}"/>
               </a:ext>
             </a:extLst>
           </p:cNvPr>
@@ -7907,7 +7912,7 @@
           <p:cNvPr id="21" name="">
             <a:extLst xmlns:a="http://schemas.openxmlformats.org/drawingml/2006/main">
               <a:ext uri="{FF2B5EF4-FFF2-40B4-BE49-F238E27FC236}">
-                <a16:creationId xmlns:a16="http://schemas.microsoft.com/office/drawing/2014/main" id="{9EAD3F2B-766F-4A44-9F4F-F41C4A896726}"/>
+                <a16:creationId xmlns:a16="http://schemas.microsoft.com/office/drawing/2014/main" id="{A8AB63F2-A6C2-48FF-A122-43C71BFBCEE6}"/>
               </a:ext>
             </a:extLst>
           </p:cNvPr>
@@ -7964,7 +7969,7 @@
           <p:cNvPr id="22" name="">
             <a:extLst xmlns:a="http://schemas.openxmlformats.org/drawingml/2006/main">
               <a:ext uri="{FF2B5EF4-FFF2-40B4-BE49-F238E27FC236}">
-                <a16:creationId xmlns:a16="http://schemas.microsoft.com/office/drawing/2014/main" id="{92C34A7C-2C2F-441C-8A88-74AAD68E29BC}"/>
+                <a16:creationId xmlns:a16="http://schemas.microsoft.com/office/drawing/2014/main" id="{EB5C9C32-82D4-4029-BFD4-7DC0D927D94C}"/>
               </a:ext>
             </a:extLst>
           </p:cNvPr>
@@ -8021,7 +8026,7 @@
           <p:cNvPr id="23" name="">
             <a:extLst xmlns:a="http://schemas.openxmlformats.org/drawingml/2006/main">
               <a:ext uri="{FF2B5EF4-FFF2-40B4-BE49-F238E27FC236}">
-                <a16:creationId xmlns:a16="http://schemas.microsoft.com/office/drawing/2014/main" id="{007CCB9D-2AA6-440D-A396-6586A4ECB802}"/>
+                <a16:creationId xmlns:a16="http://schemas.microsoft.com/office/drawing/2014/main" id="{99151312-696A-4AE2-B5C5-14FC8436CAB2}"/>
               </a:ext>
             </a:extLst>
           </p:cNvPr>
@@ -8053,7 +8058,7 @@
           <p:cNvPr id="24" name="">
             <a:extLst xmlns:a="http://schemas.openxmlformats.org/drawingml/2006/main">
               <a:ext uri="{FF2B5EF4-FFF2-40B4-BE49-F238E27FC236}">
-                <a16:creationId xmlns:a16="http://schemas.microsoft.com/office/drawing/2014/main" id="{3192DA2E-5CCD-4D08-8E41-1B6E32945F4E}"/>
+                <a16:creationId xmlns:a16="http://schemas.microsoft.com/office/drawing/2014/main" id="{22F34A14-668C-4AF0-A963-CB74BB3CB64E}"/>
               </a:ext>
             </a:extLst>
           </p:cNvPr>
@@ -8110,7 +8115,7 @@
           <p:cNvPr id="25" name="">
             <a:extLst xmlns:a="http://schemas.openxmlformats.org/drawingml/2006/main">
               <a:ext uri="{FF2B5EF4-FFF2-40B4-BE49-F238E27FC236}">
-                <a16:creationId xmlns:a16="http://schemas.microsoft.com/office/drawing/2014/main" id="{390CF50E-DB33-41C3-BB57-197D1AF0D5CD}"/>
+                <a16:creationId xmlns:a16="http://schemas.microsoft.com/office/drawing/2014/main" id="{9ABD96F5-9267-4A09-B950-C0007D0F40FE}"/>
               </a:ext>
             </a:extLst>
           </p:cNvPr>
@@ -8134,7 +8139,7 @@
         </p:spPr>
         <p:txBody>
           <a:bodyPr xmlns:a="http://schemas.openxmlformats.org/drawingml/2006/main" anchor="ctr">
-            <a:normAutofit fontScale="100000"/>
+            <a:normAutofit fontScale="63542"/>
           </a:bodyPr>
           <a:lstStyle xmlns:a="http://schemas.openxmlformats.org/drawingml/2006/main"/>
           <a:p xmlns:a="http://schemas.openxmlformats.org/drawingml/2006/main">
@@ -8157,7 +8162,7 @@
                 <a:ea typeface="Malgun Gothic"/>
                 <a:cs typeface="Malgun Gothic"/>
               </a:rPr>
-              <a:t>재판단</a:t>
+              <a:t>재판단 · Self-Correction</a:t>
             </a:r>
           </a:p>
         </p:txBody>
@@ -8167,7 +8172,7 @@
           <p:cNvPr id="26" name="">
             <a:extLst xmlns:a="http://schemas.openxmlformats.org/drawingml/2006/main">
               <a:ext uri="{FF2B5EF4-FFF2-40B4-BE49-F238E27FC236}">
-                <a16:creationId xmlns:a16="http://schemas.microsoft.com/office/drawing/2014/main" id="{1FFA062E-562A-49DC-B7CA-39914594B82D}"/>
+                <a16:creationId xmlns:a16="http://schemas.microsoft.com/office/drawing/2014/main" id="{1BFDB32A-567E-4B21-9219-16DCDA7C039D}"/>
               </a:ext>
             </a:extLst>
           </p:cNvPr>
@@ -8224,7 +8229,7 @@
           <p:cNvPr id="27" name="">
             <a:extLst xmlns:a="http://schemas.openxmlformats.org/drawingml/2006/main">
               <a:ext uri="{FF2B5EF4-FFF2-40B4-BE49-F238E27FC236}">
-                <a16:creationId xmlns:a16="http://schemas.microsoft.com/office/drawing/2014/main" id="{4AED417C-B817-4668-A321-639B33E0A184}"/>
+                <a16:creationId xmlns:a16="http://schemas.microsoft.com/office/drawing/2014/main" id="{269B9315-CB9F-4462-B8A5-06BB5A470B99}"/>
               </a:ext>
             </a:extLst>
           </p:cNvPr>
@@ -8256,7 +8261,7 @@
           <p:cNvPr id="28" name="">
             <a:extLst xmlns:a="http://schemas.openxmlformats.org/drawingml/2006/main">
               <a:ext uri="{FF2B5EF4-FFF2-40B4-BE49-F238E27FC236}">
-                <a16:creationId xmlns:a16="http://schemas.microsoft.com/office/drawing/2014/main" id="{2930A085-87C2-4DD2-8B40-D13E7CB65F18}"/>
+                <a16:creationId xmlns:a16="http://schemas.microsoft.com/office/drawing/2014/main" id="{6CB85C91-64E5-4F65-A9CC-FB31BE9C00C4}"/>
               </a:ext>
             </a:extLst>
           </p:cNvPr>
@@ -8313,7 +8318,7 @@
           <p:cNvPr id="29" name="">
             <a:extLst xmlns:a="http://schemas.openxmlformats.org/drawingml/2006/main">
               <a:ext uri="{FF2B5EF4-FFF2-40B4-BE49-F238E27FC236}">
-                <a16:creationId xmlns:a16="http://schemas.microsoft.com/office/drawing/2014/main" id="{842112DE-65D5-4904-845D-999DF09F68DF}"/>
+                <a16:creationId xmlns:a16="http://schemas.microsoft.com/office/drawing/2014/main" id="{844C01A9-0414-49B1-87B9-A03C1EE83BDA}"/>
               </a:ext>
             </a:extLst>
           </p:cNvPr>
@@ -8370,7 +8375,7 @@
           <p:cNvPr id="30" name="">
             <a:extLst xmlns:a="http://schemas.openxmlformats.org/drawingml/2006/main">
               <a:ext uri="{FF2B5EF4-FFF2-40B4-BE49-F238E27FC236}">
-                <a16:creationId xmlns:a16="http://schemas.microsoft.com/office/drawing/2014/main" id="{79602463-46FE-4589-94AD-B0007FACBED0}"/>
+                <a16:creationId xmlns:a16="http://schemas.microsoft.com/office/drawing/2014/main" id="{520B667F-B7CE-4B0C-8002-856ACEA7C23B}"/>
               </a:ext>
             </a:extLst>
           </p:cNvPr>
@@ -8427,7 +8432,7 @@
           <p:cNvPr id="31" name="">
             <a:extLst xmlns:a="http://schemas.openxmlformats.org/drawingml/2006/main">
               <a:ext uri="{FF2B5EF4-FFF2-40B4-BE49-F238E27FC236}">
-                <a16:creationId xmlns:a16="http://schemas.microsoft.com/office/drawing/2014/main" id="{FEAB12DD-0DA5-4EBE-93BA-E7921B72CADD}"/>
+                <a16:creationId xmlns:a16="http://schemas.microsoft.com/office/drawing/2014/main" id="{402719F0-B4C4-4D0A-BBC4-A68E983B34B6}"/>
               </a:ext>
             </a:extLst>
           </p:cNvPr>
@@ -8484,7 +8489,7 @@
           <p:cNvPr id="32" name="">
             <a:extLst xmlns:a="http://schemas.openxmlformats.org/drawingml/2006/main">
               <a:ext uri="{FF2B5EF4-FFF2-40B4-BE49-F238E27FC236}">
-                <a16:creationId xmlns:a16="http://schemas.microsoft.com/office/drawing/2014/main" id="{4B1C3085-FC3E-44FE-9C7A-EFC3BAED035B}"/>
+                <a16:creationId xmlns:a16="http://schemas.microsoft.com/office/drawing/2014/main" id="{5AE305B7-E05A-4C5E-8EF4-F782D962E8BB}"/>
               </a:ext>
             </a:extLst>
           </p:cNvPr>
@@ -8541,7 +8546,7 @@
           <p:cNvPr id="33" name="">
             <a:extLst xmlns:a="http://schemas.openxmlformats.org/drawingml/2006/main">
               <a:ext uri="{FF2B5EF4-FFF2-40B4-BE49-F238E27FC236}">
-                <a16:creationId xmlns:a16="http://schemas.microsoft.com/office/drawing/2014/main" id="{C233F415-48F0-4FD7-B40D-7D778BA10B52}"/>
+                <a16:creationId xmlns:a16="http://schemas.microsoft.com/office/drawing/2014/main" id="{F9263037-C186-48A4-B0E5-F956567C5665}"/>
               </a:ext>
             </a:extLst>
           </p:cNvPr>
@@ -8598,7 +8603,7 @@
           <p:cNvPr id="34" name="">
             <a:extLst xmlns:a="http://schemas.openxmlformats.org/drawingml/2006/main">
               <a:ext uri="{FF2B5EF4-FFF2-40B4-BE49-F238E27FC236}">
-                <a16:creationId xmlns:a16="http://schemas.microsoft.com/office/drawing/2014/main" id="{34FAB92B-E72F-4F73-AFA7-90D529F11FFD}"/>
+                <a16:creationId xmlns:a16="http://schemas.microsoft.com/office/drawing/2014/main" id="{EEB06AC4-4A64-4674-9851-0FD0D5DCC280}"/>
               </a:ext>
             </a:extLst>
           </p:cNvPr>
@@ -8655,7 +8660,7 @@
           <p:cNvPr id="35" name="">
             <a:extLst xmlns:a="http://schemas.openxmlformats.org/drawingml/2006/main">
               <a:ext uri="{FF2B5EF4-FFF2-40B4-BE49-F238E27FC236}">
-                <a16:creationId xmlns:a16="http://schemas.microsoft.com/office/drawing/2014/main" id="{91BB7EF2-02B8-4202-9A4F-564072168E9F}"/>
+                <a16:creationId xmlns:a16="http://schemas.microsoft.com/office/drawing/2014/main" id="{2F58336B-366C-4C5B-9F1A-59C67F5B837F}"/>
               </a:ext>
             </a:extLst>
           </p:cNvPr>
@@ -8712,7 +8717,7 @@
           <p:cNvPr id="36" name="">
             <a:extLst xmlns:a="http://schemas.openxmlformats.org/drawingml/2006/main">
               <a:ext uri="{FF2B5EF4-FFF2-40B4-BE49-F238E27FC236}">
-                <a16:creationId xmlns:a16="http://schemas.microsoft.com/office/drawing/2014/main" id="{9F7064DF-9209-4DE3-9F5E-F7C97B1B16E4}"/>
+                <a16:creationId xmlns:a16="http://schemas.microsoft.com/office/drawing/2014/main" id="{AC702930-06D2-451E-85E8-D85C268C85E1}"/>
               </a:ext>
             </a:extLst>
           </p:cNvPr>
@@ -8769,7 +8774,7 @@
           <p:cNvPr id="37" name="">
             <a:extLst xmlns:a="http://schemas.openxmlformats.org/drawingml/2006/main">
               <a:ext uri="{FF2B5EF4-FFF2-40B4-BE49-F238E27FC236}">
-                <a16:creationId xmlns:a16="http://schemas.microsoft.com/office/drawing/2014/main" id="{39BDB328-2C63-450A-A0CE-B589285272C9}"/>
+                <a16:creationId xmlns:a16="http://schemas.microsoft.com/office/drawing/2014/main" id="{162EABA1-9410-460E-BB51-86B9A70A3F93}"/>
               </a:ext>
             </a:extLst>
           </p:cNvPr>
@@ -8826,7 +8831,7 @@
           <p:cNvPr id="38" name="">
             <a:extLst xmlns:a="http://schemas.openxmlformats.org/drawingml/2006/main">
               <a:ext uri="{FF2B5EF4-FFF2-40B4-BE49-F238E27FC236}">
-                <a16:creationId xmlns:a16="http://schemas.microsoft.com/office/drawing/2014/main" id="{7A9F2AE7-49B0-46E1-B399-D9B36876FF48}"/>
+                <a16:creationId xmlns:a16="http://schemas.microsoft.com/office/drawing/2014/main" id="{4F431F64-03EC-429C-9E88-266C3CB1DFF7}"/>
               </a:ext>
             </a:extLst>
           </p:cNvPr>
@@ -8883,7 +8888,7 @@
           <p:cNvPr id="39" name="">
             <a:extLst xmlns:a="http://schemas.openxmlformats.org/drawingml/2006/main">
               <a:ext uri="{FF2B5EF4-FFF2-40B4-BE49-F238E27FC236}">
-                <a16:creationId xmlns:a16="http://schemas.microsoft.com/office/drawing/2014/main" id="{1F8AA73E-FF92-481F-9B6E-1E916DD4DE71}"/>
+                <a16:creationId xmlns:a16="http://schemas.microsoft.com/office/drawing/2014/main" id="{96A51CF2-6BF6-4820-B256-5240DDBDB890}"/>
               </a:ext>
             </a:extLst>
           </p:cNvPr>
@@ -8940,7 +8945,7 @@
           <p:cNvPr id="40" name="">
             <a:extLst xmlns:a="http://schemas.openxmlformats.org/drawingml/2006/main">
               <a:ext uri="{FF2B5EF4-FFF2-40B4-BE49-F238E27FC236}">
-                <a16:creationId xmlns:a16="http://schemas.microsoft.com/office/drawing/2014/main" id="{1B03CC05-FBB9-4A05-AA64-D91637343998}"/>
+                <a16:creationId xmlns:a16="http://schemas.microsoft.com/office/drawing/2014/main" id="{69FE1A2B-102C-4C17-8C13-A1B6383948AB}"/>
               </a:ext>
             </a:extLst>
           </p:cNvPr>
@@ -8997,7 +9002,7 @@
           <p:cNvPr id="41" name="">
             <a:extLst xmlns:a="http://schemas.openxmlformats.org/drawingml/2006/main">
               <a:ext uri="{FF2B5EF4-FFF2-40B4-BE49-F238E27FC236}">
-                <a16:creationId xmlns:a16="http://schemas.microsoft.com/office/drawing/2014/main" id="{82E9390F-CCEA-4ECF-A1B5-A8FA8BE97DC7}"/>
+                <a16:creationId xmlns:a16="http://schemas.microsoft.com/office/drawing/2014/main" id="{E6E65939-4F74-46BC-AFE6-5B37E186E365}"/>
               </a:ext>
             </a:extLst>
           </p:cNvPr>
@@ -9054,7 +9059,7 @@
           <p:cNvPr id="42" name="">
             <a:extLst xmlns:a="http://schemas.openxmlformats.org/drawingml/2006/main">
               <a:ext uri="{FF2B5EF4-FFF2-40B4-BE49-F238E27FC236}">
-                <a16:creationId xmlns:a16="http://schemas.microsoft.com/office/drawing/2014/main" id="{33D287B5-6CE7-48DE-B665-AA69CCAC83D8}"/>
+                <a16:creationId xmlns:a16="http://schemas.microsoft.com/office/drawing/2014/main" id="{AEF79C79-AF39-42EC-9661-838161EE7BA0}"/>
               </a:ext>
             </a:extLst>
           </p:cNvPr>
@@ -9111,7 +9116,7 @@
           <p:cNvPr id="43" name="">
             <a:extLst xmlns:a="http://schemas.openxmlformats.org/drawingml/2006/main">
               <a:ext uri="{FF2B5EF4-FFF2-40B4-BE49-F238E27FC236}">
-                <a16:creationId xmlns:a16="http://schemas.microsoft.com/office/drawing/2014/main" id="{D016D450-E71A-4780-930D-2345935619D5}"/>
+                <a16:creationId xmlns:a16="http://schemas.microsoft.com/office/drawing/2014/main" id="{F2679982-BDAD-43D3-9DC5-AD7F66327525}"/>
               </a:ext>
             </a:extLst>
           </p:cNvPr>
@@ -9166,7 +9171,7 @@
     </p:spTree>
     <p:extLst>
       <p:ext uri="{BB962C8B-B14F-4D97-AF65-F5344CB8AC3E}">
-        <p14:creationId xmlns:p14="http://schemas.microsoft.com/office/powerpoint/2010/main" val="663571164"/>
+        <p14:creationId xmlns:p14="http://schemas.microsoft.com/office/powerpoint/2010/main" val="138371301"/>
       </p:ext>
     </p:extLst>
   </p:cSld>

--- a/Docs/PRESENTATION/2. 최종/09285_백준현_AI_Master_최종발표자료_v12.pptx
+++ b/Docs/PRESENTATION/2. 최종/09285_백준현_AI_Master_최종발표자료_v12.pptx
@@ -2,16 +2,16 @@
 <file path=ppt/presentation.xml><?xml version="1.0" encoding="utf-8"?>
 <p:presentation xmlns:p="http://schemas.openxmlformats.org/presentationml/2006/main">
   <p:sldMasterIdLst>
-    <p:sldMasterId xmlns:r="http://schemas.openxmlformats.org/officeDocument/2006/relationships" id="2147483648" r:id="R120cfde4a0d343d0"/>
+    <p:sldMasterId xmlns:r="http://schemas.openxmlformats.org/officeDocument/2006/relationships" id="2147483648" r:id="R46176f043030474a"/>
   </p:sldMasterIdLst>
   <p:notesMasterIdLst>
-    <p:notesMasterId xmlns:r="http://schemas.openxmlformats.org/officeDocument/2006/relationships" r:id="R504d32da3470482a"/>
+    <p:notesMasterId xmlns:r="http://schemas.openxmlformats.org/officeDocument/2006/relationships" r:id="R42decd384bcb4d21"/>
   </p:notesMasterIdLst>
   <p:sldIdLst>
-    <p:sldId xmlns:r="http://schemas.openxmlformats.org/officeDocument/2006/relationships" id="256" r:id="R95ece440bdf64b3e"/>
-    <p:sldId xmlns:r="http://schemas.openxmlformats.org/officeDocument/2006/relationships" id="257" r:id="R3775560e44464df3"/>
-    <p:sldId xmlns:r="http://schemas.openxmlformats.org/officeDocument/2006/relationships" id="258" r:id="R85b54e72740445d9"/>
-    <p:sldId xmlns:r="http://schemas.openxmlformats.org/officeDocument/2006/relationships" id="259" r:id="Rc46d944b9d494fc8"/>
+    <p:sldId xmlns:r="http://schemas.openxmlformats.org/officeDocument/2006/relationships" id="256" r:id="Rab3dd916f49b421e"/>
+    <p:sldId xmlns:r="http://schemas.openxmlformats.org/officeDocument/2006/relationships" id="257" r:id="Re540fb3e453f4a4d"/>
+    <p:sldId xmlns:r="http://schemas.openxmlformats.org/officeDocument/2006/relationships" id="258" r:id="R69c6203641684b55"/>
+    <p:sldId xmlns:r="http://schemas.openxmlformats.org/officeDocument/2006/relationships" id="259" r:id="Rcf3bef0f1d6944c8"/>
   </p:sldIdLst>
   <p:sldSz cx="12192000" cy="6858000"/>
   <p:notesSz cx="6858000" cy="9144000"/>
@@ -655,7 +655,7 @@
           </a:p>
           <a:p xmlns:a="http://schemas.openxmlformats.org/drawingml/2006/main">
             <a:r>
-              <a:t>M-03을 한 번의 호출로 두지 않은 이유가 중요합니다. 후보와 승자를 한 응답에서 같이 받으면, 모델이 실제로 후보를 견주었는지 결론을 먼저 정하고 설명을 붙였는지 구분할 방법이 없습니다. 그래서 생성과 평가를 다른 호출로 나눴습니다. 생성 단계는 후보 두세 개를 근거와 함께 내고 점수는 매기지 않습니다. Python이 후보 ID와 관계 계약을 검증하고, 통과한 후보만 평가 단계로 넘어가 지지도를 받습니다. 상위 두 지지도의 차이는 Python이 계산합니다.</a:t>
+              <a:t>엠 영이가 이 프로젝트의 알에이지입니다. 외부 문서를 찾는 지식 알에이지가 아니라, 판단에 필요한 과거 업무 맥락을 제 에스큐엘라이트에서 찾아오는 태스크 컨텍스트 알에이지입니다. 활성 업무 다섯 건, 각 업무의 최근 메일 세 건과 변경 이력 다섯 건, 사용자가 과거에 확정한 결정을 함께 가져옵니다. 지난 결정이 다음 판단의 근거로 다시 들어갑니다.</a:t>
             </a:r>
           </a:p>
           <a:p xmlns:a="http://schemas.openxmlformats.org/drawingml/2006/main">
@@ -665,7 +665,7 @@
           </a:p>
           <a:p xmlns:a="http://schemas.openxmlformats.org/drawingml/2006/main">
             <a:r>
-              <a:t>M-02 검색은 외부 문서가 아니라 제 SQLite를 봅니다. 활성 업무 다섯 건, 각 업무의 최근 메일 세 건과 변경 이력 다섯 건, 그리고 사용자가 과거에 확정한 결정을 함께 가져옵니다. 지난 결정이 다음 판단의 근거로 다시 들어갑니다.</a:t>
+              <a:t>네 용어의 역할이 다릅니다. 알에이지는 맥락을 가져오는 단계, 리액트는 그 맥락을 관찰해 행동을 정하고 실행 결과를 다시 관찰하는 바깥 루프, 셀프 커렉션은 그 루프 안에서 확신이 부족할 때 검색어를 바꿔 한 번 다시 찾고 다시 판단하는 부분입니다. 파이썬 가드는 에이전트의 판단을 대신하는 자리가 아니라 그 판단을 실행해도 되는지 확인하는 경계입니다. 흐름으로 읽으면 관찰, 검색, 판단, 실행, 재관찰입니다.</a:t>
             </a:r>
           </a:p>
           <a:p xmlns:a="http://schemas.openxmlformats.org/drawingml/2006/main">
@@ -675,7 +675,7 @@
           </a:p>
           <a:p xmlns:a="http://schemas.openxmlformats.org/drawingml/2006/main">
             <a:r>
-              <a:t>기술 선택 이유입니다. Vector DB와 외부 Embedding은 쓰지 않았습니다. 개인의 활성 업무는 수십 건 규모라 SQLite 조회만으로 충분했고, 구성요소를 늘리는 비용이 더 컸습니다. 대신 검색이 어휘 겹침에 의존한다는 한계가 남습니다. 모델 간 비교 실험은 하지 않았으므로 최적이라고 주장하지 않습니다.</a:t>
+              <a:t>벡터 디비를 쓰지 않은 이유는 개인의 활성 업무가 수십 건 규모라 에스큐엘라이트 조회만으로 충분했고 구성요소를 늘리는 비용이 더 컸기 때문입니다. 대신 검색이 어휘 겹침에 의존한다는 한계가 남습니다. 모델 간 비교 실험은 하지 않았으므로 최적이라고 주장하지 않습니다.</a:t>
             </a:r>
           </a:p>
           <a:p xmlns:a="http://schemas.openxmlformats.org/drawingml/2006/main">
@@ -810,7 +810,7 @@
           </a:p>
           <a:p xmlns:a="http://schemas.openxmlformats.org/drawingml/2006/main">
             <a:r>
-              <a:t>그래서 적용한 기법이 화면에 적힌 제한적 다중 가설 숙고입니다. 트리 오브 소트를 구현한 것이 아니라, 후보 생성과 평가를 분리한다는 아이디어만 참고했습니다. 메일 한 건을 업무로 옮기는 판단은 단계가 깊지 않은 대신 틀렸을 때 비용이 업무 데이터 오변경이라, 후보 두세 개, 평가 한 번, 재검색 한 번으로 묶고 결정론적 가드와 사용자 승인으로 막는 쪽을 택했습니다. 핵심은 생성과 평가를 서로 다른 호출로 나눈 것입니다. 생성 단계는 점수를 매기지 않고, 평가 단계는 새로 만들지 못합니다. 그래서 화면에 남는 후보 목록이 사후 설명이 아니라 실제로 비교된 기록이 됩니다.</a:t>
+              <a:t>그래서 적용한 기법이 화면에 적힌 제한적 다중 가설 숙고입니다. 먼저 앞 장과의 관계를 정리하겠습니다. 숙고는 한 번의 판단 안에서 후보를 견주는 안쪽 단계이고, 리액트는 그 판단을 검색과 실행, 재관찰로 감싸는 바깥 루프입니다. 숙고가 리액트를 대체한 것이 아니라 리액트의 판단 단계를 두 호출로 쪼갠 것입니다. 트리 오브 소트를 구현한 것이 아니라, 후보 생성과 평가를 분리한다는 아이디어만 참고했습니다. 메일 한 건을 업무로 옮기는 판단은 단계가 깊지 않은 대신 틀렸을 때 비용이 업무 데이터 오변경이라, 후보 두세 개, 평가 한 번, 재검색 한 번으로 묶고 결정론적 가드와 사용자 승인으로 막는 쪽을 택했습니다. 핵심은 생성과 평가를 서로 다른 호출로 나눈 것입니다. 생성 단계는 점수를 매기지 않고, 평가 단계는 새로 만들지 못합니다. 그래서 화면에 남는 후보 목록이 사후 설명이 아니라 실제로 비교된 기록이 됩니다.</a:t>
             </a:r>
           </a:p>
           <a:p xmlns:a="http://schemas.openxmlformats.org/drawingml/2006/main">
@@ -830,7 +830,7 @@
           </a:p>
           <a:p xmlns:a="http://schemas.openxmlformats.org/drawingml/2006/main">
             <a:r>
-              <a:t>실패도 말씀드리겠습니다. 처음 구현에서 응답 검증을 재시도 루프 밖에 두었습니다. 모델이 필드 하나를 배열로 돌려준 것만으로 판단 전체가 실패했고, 저장해 둔 실제 Gmail 서른다섯 건을 다시 흘려보냈을 때 판단 네 건이 사라졌습니다. 합성 테스트가 아니라 실제 데이터 재생에서 잡혔고, 검증을 루프 안으로 옮긴 뒤 유실은 0건입니다.</a:t>
+              <a:t>실패도 말씀드리겠습니다. 응답 검증을 재시도 루프 밖에 두어서, 모델이 필드 하나를 배열로 돌려준 것만으로 판단 전체가 실패했습니다. 저장해 둔 실제 지메일 서른다섯 건을 다시 흘려보냈을 때 판단 네 건이 사라졌고, 합성 테스트가 아니라 실제 데이터 재생에서 잡혔습니다. 검증을 루프 안으로 옮긴 뒤 유실은 0건입니다.</a:t>
             </a:r>
           </a:p>
           <a:p xmlns:a="http://schemas.openxmlformats.org/drawingml/2006/main">
@@ -840,7 +840,7 @@
           </a:p>
           <a:p xmlns:a="http://schemas.openxmlformats.org/drawingml/2006/main">
             <a:r>
-              <a:t>두 번째는 기대값과 동작 중 어느 쪽이 틀렸는지 따져야 했던 건입니다. 검색 결과 안에 명령을 심어 둔 케이스가 세 번 모두 기대값인 사용자 확인 대신 무시로 끝났습니다. 그 메일은 순수 주입이 아니라 정상 회신 내용과 주입된 명령이 섞인 혼합 메일이고, 정답도 업무 요청 참이었습니다. 원인은 제 프롬프트였습니다. Prompt Injection을 공지·광고와 같은 줄에 두고 업무 요청이 아닌 사유로 제시해서 모델이 메일 전체를 버렸습니다. 원칙은 본문의 명령을 실행하지 않는다이지 명령이 섞인 메일을 버린다가 아닙니다. 기대값은 그대로 두고 규칙만 분리했습니다. 수정 후 이 케이스는 세 번 모두 통과하고 숙고 전용 통과 수는 삼, 사, 사가 되었습니다. 명령만 들어 있는 순수 주입은 그대로 무시로 끝나 둘의 구분이 유지되고, 본문이 지시한 전체 완료 처리와 기록 삭제는 수정 전후 어느 회차에서도 일어나지 않았습니다.</a:t>
+              <a:t>두 번째는 기대값과 동작 중 어느 쪽이 틀렸는지 따져야 했던 건입니다. 검색 결과 안에 명령을 심어 둔 케이스가 세 번 모두 기대값인 사용자 확인 대신 무시로 끝났습니다. 그 메일은 순수 주입이 아니라 정상 회신 내용과 주입된 명령이 섞인 혼합 메일이고 정답도 업무 요청 참이었는데, 제 프롬프트가 프롬프트 인젝션을 공지·광고와 같은 줄에 두고 업무 요청이 아닌 사유로 제시해서 모델이 메일 전체를 버렸습니다. 원칙은 본문의 명령을 실행하지 않는다이지 명령이 섞인 메일을 버린다가 아닙니다. 기대값은 그대로 두고 규칙만 분리했더니 세 번 모두 통과하고, 숙고 전용 통과 수는 삼, 사, 사가 되었습니다. 명령만 들어 있는 순수 주입은 그대로 무시로 끝나 둘의 구분이 유지되고, 본문이 지시한 전체 완료 처리와 기록 삭제는 수정 전후 어느 회차에서도 일어나지 않았습니다.</a:t>
             </a:r>
           </a:p>
           <a:p xmlns:a="http://schemas.openxmlformats.org/drawingml/2006/main">
@@ -958,7 +958,7 @@
   </p:cSld>
   <p:clrMap bg1="lt1" tx1="dk1" bg2="lt2" tx2="dk2" accent1="accent1" accent2="accent2" accent3="accent3" accent4="accent4" accent5="accent5" accent6="accent6" hlink="hlink" folHlink="folHlink"/>
   <p:sldLayoutIdLst>
-    <p:sldLayoutId xmlns:r="http://schemas.openxmlformats.org/officeDocument/2006/relationships" id="2147483649" r:id="R8269960c997b4c73"/>
+    <p:sldLayoutId xmlns:r="http://schemas.openxmlformats.org/officeDocument/2006/relationships" id="2147483649" r:id="R814c52a483694e0b"/>
   </p:sldLayoutIdLst>
   <p:txStyles>
     <p:titleStyle>
@@ -1509,7 +1509,7 @@
           <p:cNvPr id="9" name="">
             <a:extLst xmlns:a="http://schemas.openxmlformats.org/drawingml/2006/main">
               <a:ext uri="{FF2B5EF4-FFF2-40B4-BE49-F238E27FC236}">
-                <a16:creationId xmlns:a16="http://schemas.microsoft.com/office/drawing/2014/main" id="{3E4D4CE4-1CE1-4136-B534-2E489D325E03}"/>
+                <a16:creationId xmlns:a16="http://schemas.microsoft.com/office/drawing/2014/main" id="{B89F78F8-2EE2-4FE9-923B-05DAEB998680}"/>
               </a:ext>
             </a:extLst>
           </p:cNvPr>
@@ -1539,7 +1539,7 @@
           <p:cNvPr id="2" name="">
             <a:extLst xmlns:a="http://schemas.openxmlformats.org/drawingml/2006/main">
               <a:ext uri="{FF2B5EF4-FFF2-40B4-BE49-F238E27FC236}">
-                <a16:creationId xmlns:a16="http://schemas.microsoft.com/office/drawing/2014/main" id="{2F4EA099-1A9D-4D62-A241-640150DCBE51}"/>
+                <a16:creationId xmlns:a16="http://schemas.microsoft.com/office/drawing/2014/main" id="{3D94A82E-55E1-4C58-A0AC-2A4BB22CE232}"/>
               </a:ext>
             </a:extLst>
           </p:cNvPr>
@@ -1596,7 +1596,7 @@
           <p:cNvPr id="3" name="">
             <a:extLst xmlns:a="http://schemas.openxmlformats.org/drawingml/2006/main">
               <a:ext uri="{FF2B5EF4-FFF2-40B4-BE49-F238E27FC236}">
-                <a16:creationId xmlns:a16="http://schemas.microsoft.com/office/drawing/2014/main" id="{648A33C5-03D1-43C3-AD71-90AD1BB36BB7}"/>
+                <a16:creationId xmlns:a16="http://schemas.microsoft.com/office/drawing/2014/main" id="{67752625-C77E-4C13-A29D-BBF7DB454895}"/>
               </a:ext>
             </a:extLst>
           </p:cNvPr>
@@ -1653,7 +1653,7 @@
           <p:cNvPr id="4" name="">
             <a:extLst xmlns:a="http://schemas.openxmlformats.org/drawingml/2006/main">
               <a:ext uri="{FF2B5EF4-FFF2-40B4-BE49-F238E27FC236}">
-                <a16:creationId xmlns:a16="http://schemas.microsoft.com/office/drawing/2014/main" id="{58B37457-9468-4B4D-A9A9-92F39792993B}"/>
+                <a16:creationId xmlns:a16="http://schemas.microsoft.com/office/drawing/2014/main" id="{01527271-9785-44C4-A903-204B53B1B801}"/>
               </a:ext>
             </a:extLst>
           </p:cNvPr>
@@ -1710,7 +1710,7 @@
           <p:cNvPr id="5" name="">
             <a:extLst xmlns:a="http://schemas.openxmlformats.org/drawingml/2006/main">
               <a:ext uri="{FF2B5EF4-FFF2-40B4-BE49-F238E27FC236}">
-                <a16:creationId xmlns:a16="http://schemas.microsoft.com/office/drawing/2014/main" id="{862A9926-CE05-4193-9328-1725852EE9F6}"/>
+                <a16:creationId xmlns:a16="http://schemas.microsoft.com/office/drawing/2014/main" id="{62419A40-A2B1-47D1-99B0-1F829ECBC572}"/>
               </a:ext>
             </a:extLst>
           </p:cNvPr>
@@ -1740,7 +1740,7 @@
           <p:cNvPr id="6" name="">
             <a:extLst xmlns:a="http://schemas.openxmlformats.org/drawingml/2006/main">
               <a:ext uri="{FF2B5EF4-FFF2-40B4-BE49-F238E27FC236}">
-                <a16:creationId xmlns:a16="http://schemas.microsoft.com/office/drawing/2014/main" id="{DCB3237F-CED0-4673-915F-3497EB14E279}"/>
+                <a16:creationId xmlns:a16="http://schemas.microsoft.com/office/drawing/2014/main" id="{DC9A08FC-E9F0-4536-BA57-E7463B81E7B7}"/>
               </a:ext>
             </a:extLst>
           </p:cNvPr>
@@ -1797,7 +1797,7 @@
           <p:cNvPr id="7" name="">
             <a:extLst xmlns:a="http://schemas.openxmlformats.org/drawingml/2006/main">
               <a:ext uri="{FF2B5EF4-FFF2-40B4-BE49-F238E27FC236}">
-                <a16:creationId xmlns:a16="http://schemas.microsoft.com/office/drawing/2014/main" id="{C8F60FC3-ACCB-4E23-A6CB-A959982B3AF4}"/>
+                <a16:creationId xmlns:a16="http://schemas.microsoft.com/office/drawing/2014/main" id="{8198C706-86A1-4839-8038-125DBFF0B730}"/>
               </a:ext>
             </a:extLst>
           </p:cNvPr>
@@ -1854,7 +1854,7 @@
           <p:cNvPr id="8" name="">
             <a:extLst xmlns:a="http://schemas.openxmlformats.org/drawingml/2006/main">
               <a:ext uri="{FF2B5EF4-FFF2-40B4-BE49-F238E27FC236}">
-                <a16:creationId xmlns:a16="http://schemas.microsoft.com/office/drawing/2014/main" id="{6D245C99-EF2F-4945-8F99-0C8DCC476FA9}"/>
+                <a16:creationId xmlns:a16="http://schemas.microsoft.com/office/drawing/2014/main" id="{F6E4A886-29DC-4268-AC5D-B2D70CB85006}"/>
               </a:ext>
             </a:extLst>
           </p:cNvPr>
@@ -1909,7 +1909,7 @@
     </p:spTree>
     <p:extLst>
       <p:ext uri="{BB962C8B-B14F-4D97-AF65-F5344CB8AC3E}">
-        <p14:creationId xmlns:p14="http://schemas.microsoft.com/office/powerpoint/2010/main" val="1838588585"/>
+        <p14:creationId xmlns:p14="http://schemas.microsoft.com/office/powerpoint/2010/main" val="907321896"/>
       </p:ext>
     </p:extLst>
   </p:cSld>
@@ -1940,7 +1940,7 @@
           <p:cNvPr id="46" name="">
             <a:extLst xmlns:a="http://schemas.openxmlformats.org/drawingml/2006/main">
               <a:ext uri="{FF2B5EF4-FFF2-40B4-BE49-F238E27FC236}">
-                <a16:creationId xmlns:a16="http://schemas.microsoft.com/office/drawing/2014/main" id="{C2165610-DF39-44D1-B979-922898DE9C9A}"/>
+                <a16:creationId xmlns:a16="http://schemas.microsoft.com/office/drawing/2014/main" id="{E7D6C455-9E08-4FD9-B5C6-788A8C8B932E}"/>
               </a:ext>
             </a:extLst>
           </p:cNvPr>
@@ -1970,7 +1970,7 @@
           <p:cNvPr id="2" name="">
             <a:extLst xmlns:a="http://schemas.openxmlformats.org/drawingml/2006/main">
               <a:ext uri="{FF2B5EF4-FFF2-40B4-BE49-F238E27FC236}">
-                <a16:creationId xmlns:a16="http://schemas.microsoft.com/office/drawing/2014/main" id="{9367908E-E949-4CC7-BC54-8ADB66F9B1F4}"/>
+                <a16:creationId xmlns:a16="http://schemas.microsoft.com/office/drawing/2014/main" id="{F26D22A8-1209-407B-93D2-32081ACB285B}"/>
               </a:ext>
             </a:extLst>
           </p:cNvPr>
@@ -2027,7 +2027,7 @@
           <p:cNvPr id="3" name="">
             <a:extLst xmlns:a="http://schemas.openxmlformats.org/drawingml/2006/main">
               <a:ext uri="{FF2B5EF4-FFF2-40B4-BE49-F238E27FC236}">
-                <a16:creationId xmlns:a16="http://schemas.microsoft.com/office/drawing/2014/main" id="{871461E3-A7C8-4538-9B81-E5FEC69DFF2E}"/>
+                <a16:creationId xmlns:a16="http://schemas.microsoft.com/office/drawing/2014/main" id="{8EDDF49F-CA31-4374-86EA-1DCD8290C19D}"/>
               </a:ext>
             </a:extLst>
           </p:cNvPr>
@@ -2057,7 +2057,7 @@
           <p:cNvPr id="4" name="">
             <a:extLst xmlns:a="http://schemas.openxmlformats.org/drawingml/2006/main">
               <a:ext uri="{FF2B5EF4-FFF2-40B4-BE49-F238E27FC236}">
-                <a16:creationId xmlns:a16="http://schemas.microsoft.com/office/drawing/2014/main" id="{00035710-7FBF-4CCD-9B73-9BBB4B7B73C8}"/>
+                <a16:creationId xmlns:a16="http://schemas.microsoft.com/office/drawing/2014/main" id="{8CAA159A-E4BE-4105-B460-1208FA7C4B78}"/>
               </a:ext>
             </a:extLst>
           </p:cNvPr>
@@ -2114,7 +2114,7 @@
           <p:cNvPr id="5" name="">
             <a:extLst xmlns:a="http://schemas.openxmlformats.org/drawingml/2006/main">
               <a:ext uri="{FF2B5EF4-FFF2-40B4-BE49-F238E27FC236}">
-                <a16:creationId xmlns:a16="http://schemas.microsoft.com/office/drawing/2014/main" id="{CE0200B6-72C8-465A-AA31-E5907811761D}"/>
+                <a16:creationId xmlns:a16="http://schemas.microsoft.com/office/drawing/2014/main" id="{2F28005E-6E87-4E89-8033-6FEA698082CA}"/>
               </a:ext>
             </a:extLst>
           </p:cNvPr>
@@ -2171,7 +2171,7 @@
           <p:cNvPr id="6" name="">
             <a:extLst xmlns:a="http://schemas.openxmlformats.org/drawingml/2006/main">
               <a:ext uri="{FF2B5EF4-FFF2-40B4-BE49-F238E27FC236}">
-                <a16:creationId xmlns:a16="http://schemas.microsoft.com/office/drawing/2014/main" id="{CB6AD004-2333-42B4-AA40-F648EC4808C6}"/>
+                <a16:creationId xmlns:a16="http://schemas.microsoft.com/office/drawing/2014/main" id="{A3C2248F-EFEC-4BC3-94FF-0FA7EF369DBA}"/>
               </a:ext>
             </a:extLst>
           </p:cNvPr>
@@ -2228,7 +2228,7 @@
           <p:cNvPr id="7" name="">
             <a:extLst xmlns:a="http://schemas.openxmlformats.org/drawingml/2006/main">
               <a:ext uri="{FF2B5EF4-FFF2-40B4-BE49-F238E27FC236}">
-                <a16:creationId xmlns:a16="http://schemas.microsoft.com/office/drawing/2014/main" id="{B10954B1-51D8-4CD7-87B0-0E2B9655D371}"/>
+                <a16:creationId xmlns:a16="http://schemas.microsoft.com/office/drawing/2014/main" id="{4FEDC4D7-77EA-4715-A5D2-C06723490CF8}"/>
               </a:ext>
             </a:extLst>
           </p:cNvPr>
@@ -2262,7 +2262,7 @@
           <p:cNvPr id="8" name="">
             <a:extLst xmlns:a="http://schemas.openxmlformats.org/drawingml/2006/main">
               <a:ext uri="{FF2B5EF4-FFF2-40B4-BE49-F238E27FC236}">
-                <a16:creationId xmlns:a16="http://schemas.microsoft.com/office/drawing/2014/main" id="{BA82B228-0A4E-40D7-9875-D685E57E933A}"/>
+                <a16:creationId xmlns:a16="http://schemas.microsoft.com/office/drawing/2014/main" id="{5B7D9852-4FC7-4C11-8DCB-F7E78D665330}"/>
               </a:ext>
             </a:extLst>
           </p:cNvPr>
@@ -2294,7 +2294,7 @@
           <p:cNvPr id="9" name="">
             <a:extLst xmlns:a="http://schemas.openxmlformats.org/drawingml/2006/main">
               <a:ext uri="{FF2B5EF4-FFF2-40B4-BE49-F238E27FC236}">
-                <a16:creationId xmlns:a16="http://schemas.microsoft.com/office/drawing/2014/main" id="{EAD8FCFE-67DF-4455-B032-8838F5C8C9F6}"/>
+                <a16:creationId xmlns:a16="http://schemas.microsoft.com/office/drawing/2014/main" id="{6A2A5DB0-5C53-4E6D-8A66-D05F49B2CDFC}"/>
               </a:ext>
             </a:extLst>
           </p:cNvPr>
@@ -2351,7 +2351,7 @@
           <p:cNvPr id="10" name="">
             <a:extLst xmlns:a="http://schemas.openxmlformats.org/drawingml/2006/main">
               <a:ext uri="{FF2B5EF4-FFF2-40B4-BE49-F238E27FC236}">
-                <a16:creationId xmlns:a16="http://schemas.microsoft.com/office/drawing/2014/main" id="{A7E1072E-AF07-4A80-9C7D-ABE9E316002C}"/>
+                <a16:creationId xmlns:a16="http://schemas.microsoft.com/office/drawing/2014/main" id="{3A472772-F36D-4CF6-8B03-F2A4023D24AB}"/>
               </a:ext>
             </a:extLst>
           </p:cNvPr>
@@ -2431,7 +2431,7 @@
           <p:cNvPr id="11" name="">
             <a:extLst xmlns:a="http://schemas.openxmlformats.org/drawingml/2006/main">
               <a:ext uri="{FF2B5EF4-FFF2-40B4-BE49-F238E27FC236}">
-                <a16:creationId xmlns:a16="http://schemas.microsoft.com/office/drawing/2014/main" id="{5270FBAB-CA7B-4ADE-9195-9D9D8696F97D}"/>
+                <a16:creationId xmlns:a16="http://schemas.microsoft.com/office/drawing/2014/main" id="{747F0817-5EDB-4DE8-91D3-6DD8DA7E29CE}"/>
               </a:ext>
             </a:extLst>
           </p:cNvPr>
@@ -2461,7 +2461,7 @@
           <p:cNvPr id="12" name="">
             <a:extLst xmlns:a="http://schemas.openxmlformats.org/drawingml/2006/main">
               <a:ext uri="{FF2B5EF4-FFF2-40B4-BE49-F238E27FC236}">
-                <a16:creationId xmlns:a16="http://schemas.microsoft.com/office/drawing/2014/main" id="{2F9058E3-DB0F-4397-AD13-AA478D9FE35C}"/>
+                <a16:creationId xmlns:a16="http://schemas.microsoft.com/office/drawing/2014/main" id="{7521978C-8055-447B-81F3-E3925E99FA62}"/>
               </a:ext>
             </a:extLst>
           </p:cNvPr>
@@ -2495,7 +2495,7 @@
           <p:cNvPr id="13" name="">
             <a:extLst xmlns:a="http://schemas.openxmlformats.org/drawingml/2006/main">
               <a:ext uri="{FF2B5EF4-FFF2-40B4-BE49-F238E27FC236}">
-                <a16:creationId xmlns:a16="http://schemas.microsoft.com/office/drawing/2014/main" id="{636314BB-EA4F-4C39-B982-2780DB29E1B0}"/>
+                <a16:creationId xmlns:a16="http://schemas.microsoft.com/office/drawing/2014/main" id="{7D83756E-4BCF-4AB0-8C5E-CBE72C2F7D0B}"/>
               </a:ext>
             </a:extLst>
           </p:cNvPr>
@@ -2527,7 +2527,7 @@
           <p:cNvPr id="14" name="">
             <a:extLst xmlns:a="http://schemas.openxmlformats.org/drawingml/2006/main">
               <a:ext uri="{FF2B5EF4-FFF2-40B4-BE49-F238E27FC236}">
-                <a16:creationId xmlns:a16="http://schemas.microsoft.com/office/drawing/2014/main" id="{5B4719C2-365D-4627-8FAE-0DEA1B93E96E}"/>
+                <a16:creationId xmlns:a16="http://schemas.microsoft.com/office/drawing/2014/main" id="{53108ADF-2A7A-4961-9A82-CE07A9FFA587}"/>
               </a:ext>
             </a:extLst>
           </p:cNvPr>
@@ -2584,7 +2584,7 @@
           <p:cNvPr id="15" name="">
             <a:extLst xmlns:a="http://schemas.openxmlformats.org/drawingml/2006/main">
               <a:ext uri="{FF2B5EF4-FFF2-40B4-BE49-F238E27FC236}">
-                <a16:creationId xmlns:a16="http://schemas.microsoft.com/office/drawing/2014/main" id="{A0E3AF1C-DFBB-451E-9819-FE9E73C2FA36}"/>
+                <a16:creationId xmlns:a16="http://schemas.microsoft.com/office/drawing/2014/main" id="{A6AB23A2-B093-437A-B9F9-9D05813CC97C}"/>
               </a:ext>
             </a:extLst>
           </p:cNvPr>
@@ -2664,7 +2664,7 @@
           <p:cNvPr id="16" name="">
             <a:extLst xmlns:a="http://schemas.openxmlformats.org/drawingml/2006/main">
               <a:ext uri="{FF2B5EF4-FFF2-40B4-BE49-F238E27FC236}">
-                <a16:creationId xmlns:a16="http://schemas.microsoft.com/office/drawing/2014/main" id="{FF8A79D3-8AF0-452A-B9ED-92027D3DCC3D}"/>
+                <a16:creationId xmlns:a16="http://schemas.microsoft.com/office/drawing/2014/main" id="{00C03AA0-DF75-4DCB-B896-515D414FE0A4}"/>
               </a:ext>
             </a:extLst>
           </p:cNvPr>
@@ -2694,7 +2694,7 @@
           <p:cNvPr id="17" name="">
             <a:extLst xmlns:a="http://schemas.openxmlformats.org/drawingml/2006/main">
               <a:ext uri="{FF2B5EF4-FFF2-40B4-BE49-F238E27FC236}">
-                <a16:creationId xmlns:a16="http://schemas.microsoft.com/office/drawing/2014/main" id="{36B8C8F0-ECFA-4F0B-B47C-A92E60099B46}"/>
+                <a16:creationId xmlns:a16="http://schemas.microsoft.com/office/drawing/2014/main" id="{C750649C-5326-487A-80D8-64A032354976}"/>
               </a:ext>
             </a:extLst>
           </p:cNvPr>
@@ -2728,7 +2728,7 @@
           <p:cNvPr id="18" name="">
             <a:extLst xmlns:a="http://schemas.openxmlformats.org/drawingml/2006/main">
               <a:ext uri="{FF2B5EF4-FFF2-40B4-BE49-F238E27FC236}">
-                <a16:creationId xmlns:a16="http://schemas.microsoft.com/office/drawing/2014/main" id="{29EC7814-F490-436D-88CD-F01DA34185B1}"/>
+                <a16:creationId xmlns:a16="http://schemas.microsoft.com/office/drawing/2014/main" id="{7093FD12-79B6-43D6-B563-4242B4C6C38E}"/>
               </a:ext>
             </a:extLst>
           </p:cNvPr>
@@ -2760,7 +2760,7 @@
           <p:cNvPr id="19" name="">
             <a:extLst xmlns:a="http://schemas.openxmlformats.org/drawingml/2006/main">
               <a:ext uri="{FF2B5EF4-FFF2-40B4-BE49-F238E27FC236}">
-                <a16:creationId xmlns:a16="http://schemas.microsoft.com/office/drawing/2014/main" id="{52541E02-1686-4A8A-8E2E-9F3585E5D581}"/>
+                <a16:creationId xmlns:a16="http://schemas.microsoft.com/office/drawing/2014/main" id="{BEF77772-CA67-40B0-8330-3EE793832DCA}"/>
               </a:ext>
             </a:extLst>
           </p:cNvPr>
@@ -2817,7 +2817,7 @@
           <p:cNvPr id="20" name="">
             <a:extLst xmlns:a="http://schemas.openxmlformats.org/drawingml/2006/main">
               <a:ext uri="{FF2B5EF4-FFF2-40B4-BE49-F238E27FC236}">
-                <a16:creationId xmlns:a16="http://schemas.microsoft.com/office/drawing/2014/main" id="{95515044-D5E3-47AF-B582-7ED97A4DED6C}"/>
+                <a16:creationId xmlns:a16="http://schemas.microsoft.com/office/drawing/2014/main" id="{592CBB99-F340-42F2-B214-57F9E326FCB1}"/>
               </a:ext>
             </a:extLst>
           </p:cNvPr>
@@ -2897,7 +2897,7 @@
           <p:cNvPr id="21" name="">
             <a:extLst xmlns:a="http://schemas.openxmlformats.org/drawingml/2006/main">
               <a:ext uri="{FF2B5EF4-FFF2-40B4-BE49-F238E27FC236}">
-                <a16:creationId xmlns:a16="http://schemas.microsoft.com/office/drawing/2014/main" id="{363B4820-AE58-479A-BA5B-2BAC5F10B7C6}"/>
+                <a16:creationId xmlns:a16="http://schemas.microsoft.com/office/drawing/2014/main" id="{0BB5F308-76E2-49E2-A0CF-E81B16573F30}"/>
               </a:ext>
             </a:extLst>
           </p:cNvPr>
@@ -2927,7 +2927,7 @@
           <p:cNvPr id="22" name="">
             <a:extLst xmlns:a="http://schemas.openxmlformats.org/drawingml/2006/main">
               <a:ext uri="{FF2B5EF4-FFF2-40B4-BE49-F238E27FC236}">
-                <a16:creationId xmlns:a16="http://schemas.microsoft.com/office/drawing/2014/main" id="{C4C450FF-EF32-468E-9512-697BC60F69EB}"/>
+                <a16:creationId xmlns:a16="http://schemas.microsoft.com/office/drawing/2014/main" id="{41A9D7CA-E6CF-4648-B81B-8072D6AD62C4}"/>
               </a:ext>
             </a:extLst>
           </p:cNvPr>
@@ -2961,7 +2961,7 @@
           <p:cNvPr id="23" name="">
             <a:extLst xmlns:a="http://schemas.openxmlformats.org/drawingml/2006/main">
               <a:ext uri="{FF2B5EF4-FFF2-40B4-BE49-F238E27FC236}">
-                <a16:creationId xmlns:a16="http://schemas.microsoft.com/office/drawing/2014/main" id="{80097C19-BB47-4C24-9D52-832283CD84CF}"/>
+                <a16:creationId xmlns:a16="http://schemas.microsoft.com/office/drawing/2014/main" id="{39DFEACE-CBD9-4176-910E-2B3D7DD83EDE}"/>
               </a:ext>
             </a:extLst>
           </p:cNvPr>
@@ -2993,7 +2993,7 @@
           <p:cNvPr id="24" name="">
             <a:extLst xmlns:a="http://schemas.openxmlformats.org/drawingml/2006/main">
               <a:ext uri="{FF2B5EF4-FFF2-40B4-BE49-F238E27FC236}">
-                <a16:creationId xmlns:a16="http://schemas.microsoft.com/office/drawing/2014/main" id="{DE9BB316-328D-4B97-A8AC-679B65E4FC49}"/>
+                <a16:creationId xmlns:a16="http://schemas.microsoft.com/office/drawing/2014/main" id="{9644AFEB-BE40-42FC-90D5-2AD91628DDB3}"/>
               </a:ext>
             </a:extLst>
           </p:cNvPr>
@@ -3050,7 +3050,7 @@
           <p:cNvPr id="25" name="">
             <a:extLst xmlns:a="http://schemas.openxmlformats.org/drawingml/2006/main">
               <a:ext uri="{FF2B5EF4-FFF2-40B4-BE49-F238E27FC236}">
-                <a16:creationId xmlns:a16="http://schemas.microsoft.com/office/drawing/2014/main" id="{8F230252-C2BF-4A60-8361-182887B585AF}"/>
+                <a16:creationId xmlns:a16="http://schemas.microsoft.com/office/drawing/2014/main" id="{69F0FA7E-AE5B-4BDE-89FA-16FF8055DF7D}"/>
               </a:ext>
             </a:extLst>
           </p:cNvPr>
@@ -3130,7 +3130,7 @@
           <p:cNvPr id="26" name="">
             <a:extLst xmlns:a="http://schemas.openxmlformats.org/drawingml/2006/main">
               <a:ext uri="{FF2B5EF4-FFF2-40B4-BE49-F238E27FC236}">
-                <a16:creationId xmlns:a16="http://schemas.microsoft.com/office/drawing/2014/main" id="{EFF49EB1-5C2F-43FD-9D19-31068414A10D}"/>
+                <a16:creationId xmlns:a16="http://schemas.microsoft.com/office/drawing/2014/main" id="{E80ACA26-52A1-4E6E-AAA2-8BDE709EA5C5}"/>
               </a:ext>
             </a:extLst>
           </p:cNvPr>
@@ -3160,7 +3160,7 @@
           <p:cNvPr id="27" name="">
             <a:extLst xmlns:a="http://schemas.openxmlformats.org/drawingml/2006/main">
               <a:ext uri="{FF2B5EF4-FFF2-40B4-BE49-F238E27FC236}">
-                <a16:creationId xmlns:a16="http://schemas.microsoft.com/office/drawing/2014/main" id="{6DA95BFD-8E2E-4993-A107-8FE3C80D89EE}"/>
+                <a16:creationId xmlns:a16="http://schemas.microsoft.com/office/drawing/2014/main" id="{29559DDD-7B8F-4608-BE48-89F3303E47E9}"/>
               </a:ext>
             </a:extLst>
           </p:cNvPr>
@@ -3194,7 +3194,7 @@
           <p:cNvPr id="28" name="">
             <a:extLst xmlns:a="http://schemas.openxmlformats.org/drawingml/2006/main">
               <a:ext uri="{FF2B5EF4-FFF2-40B4-BE49-F238E27FC236}">
-                <a16:creationId xmlns:a16="http://schemas.microsoft.com/office/drawing/2014/main" id="{D51F79DA-8B48-4B98-8E9F-A59E4D4EE56D}"/>
+                <a16:creationId xmlns:a16="http://schemas.microsoft.com/office/drawing/2014/main" id="{21F64E0D-87E6-4628-AB5A-8239CF10AC0C}"/>
               </a:ext>
             </a:extLst>
           </p:cNvPr>
@@ -3226,7 +3226,7 @@
           <p:cNvPr id="29" name="">
             <a:extLst xmlns:a="http://schemas.openxmlformats.org/drawingml/2006/main">
               <a:ext uri="{FF2B5EF4-FFF2-40B4-BE49-F238E27FC236}">
-                <a16:creationId xmlns:a16="http://schemas.microsoft.com/office/drawing/2014/main" id="{3ACD53F3-B26E-4FED-86FB-A324AB8BF132}"/>
+                <a16:creationId xmlns:a16="http://schemas.microsoft.com/office/drawing/2014/main" id="{AE28DB58-CA44-428C-B75C-C6039B564EE3}"/>
               </a:ext>
             </a:extLst>
           </p:cNvPr>
@@ -3283,7 +3283,7 @@
           <p:cNvPr id="30" name="">
             <a:extLst xmlns:a="http://schemas.openxmlformats.org/drawingml/2006/main">
               <a:ext uri="{FF2B5EF4-FFF2-40B4-BE49-F238E27FC236}">
-                <a16:creationId xmlns:a16="http://schemas.microsoft.com/office/drawing/2014/main" id="{9E85348F-8D88-4E90-92D5-37916D27F37E}"/>
+                <a16:creationId xmlns:a16="http://schemas.microsoft.com/office/drawing/2014/main" id="{BFFD78D4-BEE5-40BD-8DFD-EC786D8ABAF8}"/>
               </a:ext>
             </a:extLst>
           </p:cNvPr>
@@ -3363,7 +3363,7 @@
           <p:cNvPr id="31" name="">
             <a:extLst xmlns:a="http://schemas.openxmlformats.org/drawingml/2006/main">
               <a:ext uri="{FF2B5EF4-FFF2-40B4-BE49-F238E27FC236}">
-                <a16:creationId xmlns:a16="http://schemas.microsoft.com/office/drawing/2014/main" id="{89806583-9706-4559-9449-65E181E58D89}"/>
+                <a16:creationId xmlns:a16="http://schemas.microsoft.com/office/drawing/2014/main" id="{622359F8-A2F5-4343-920D-A059FC789C26}"/>
               </a:ext>
             </a:extLst>
           </p:cNvPr>
@@ -3420,7 +3420,7 @@
           <p:cNvPr id="32" name="">
             <a:extLst xmlns:a="http://schemas.openxmlformats.org/drawingml/2006/main">
               <a:ext uri="{FF2B5EF4-FFF2-40B4-BE49-F238E27FC236}">
-                <a16:creationId xmlns:a16="http://schemas.microsoft.com/office/drawing/2014/main" id="{487C2269-8A61-4293-A3E0-A81A2B59901C}"/>
+                <a16:creationId xmlns:a16="http://schemas.microsoft.com/office/drawing/2014/main" id="{84E8A899-9B34-460B-8547-A0746557B9EB}"/>
               </a:ext>
             </a:extLst>
           </p:cNvPr>
@@ -3477,7 +3477,7 @@
           <p:cNvPr id="33" name="">
             <a:extLst xmlns:a="http://schemas.openxmlformats.org/drawingml/2006/main">
               <a:ext uri="{FF2B5EF4-FFF2-40B4-BE49-F238E27FC236}">
-                <a16:creationId xmlns:a16="http://schemas.microsoft.com/office/drawing/2014/main" id="{354BD119-A05C-4666-9515-F73CFC42E2BD}"/>
+                <a16:creationId xmlns:a16="http://schemas.microsoft.com/office/drawing/2014/main" id="{42FCCE6D-4C4D-40C7-9E6E-3F6FAF2FDA1A}"/>
               </a:ext>
             </a:extLst>
           </p:cNvPr>
@@ -3534,7 +3534,7 @@
           <p:cNvPr id="34" name="">
             <a:extLst xmlns:a="http://schemas.openxmlformats.org/drawingml/2006/main">
               <a:ext uri="{FF2B5EF4-FFF2-40B4-BE49-F238E27FC236}">
-                <a16:creationId xmlns:a16="http://schemas.microsoft.com/office/drawing/2014/main" id="{DC3B6FEA-EE49-459D-B708-57C3325FF1D0}"/>
+                <a16:creationId xmlns:a16="http://schemas.microsoft.com/office/drawing/2014/main" id="{912BC311-5FA9-463A-A752-8A4D9DA07C24}"/>
               </a:ext>
             </a:extLst>
           </p:cNvPr>
@@ -3591,7 +3591,7 @@
           <p:cNvPr id="35" name="">
             <a:extLst xmlns:a="http://schemas.openxmlformats.org/drawingml/2006/main">
               <a:ext uri="{FF2B5EF4-FFF2-40B4-BE49-F238E27FC236}">
-                <a16:creationId xmlns:a16="http://schemas.microsoft.com/office/drawing/2014/main" id="{69F088DD-1A09-4AAD-9D9D-FE510FDAB6F3}"/>
+                <a16:creationId xmlns:a16="http://schemas.microsoft.com/office/drawing/2014/main" id="{74E56CBC-4EB7-460D-AB2E-6D9CAE373704}"/>
               </a:ext>
             </a:extLst>
           </p:cNvPr>
@@ -3648,7 +3648,7 @@
           <p:cNvPr id="36" name="">
             <a:extLst xmlns:a="http://schemas.openxmlformats.org/drawingml/2006/main">
               <a:ext uri="{FF2B5EF4-FFF2-40B4-BE49-F238E27FC236}">
-                <a16:creationId xmlns:a16="http://schemas.microsoft.com/office/drawing/2014/main" id="{A70E9302-E601-46C2-8751-569421760ADB}"/>
+                <a16:creationId xmlns:a16="http://schemas.microsoft.com/office/drawing/2014/main" id="{7D164BE8-57C6-4626-B707-F26C3B9B3CEA}"/>
               </a:ext>
             </a:extLst>
           </p:cNvPr>
@@ -3705,7 +3705,7 @@
           <p:cNvPr id="37" name="">
             <a:extLst xmlns:a="http://schemas.openxmlformats.org/drawingml/2006/main">
               <a:ext uri="{FF2B5EF4-FFF2-40B4-BE49-F238E27FC236}">
-                <a16:creationId xmlns:a16="http://schemas.microsoft.com/office/drawing/2014/main" id="{2D128F07-8B44-4D0F-954B-3DB4F6317121}"/>
+                <a16:creationId xmlns:a16="http://schemas.microsoft.com/office/drawing/2014/main" id="{5CC89D65-5AF5-4BFB-B244-74965368AC26}"/>
               </a:ext>
             </a:extLst>
           </p:cNvPr>
@@ -3762,7 +3762,7 @@
           <p:cNvPr id="38" name="">
             <a:extLst xmlns:a="http://schemas.openxmlformats.org/drawingml/2006/main">
               <a:ext uri="{FF2B5EF4-FFF2-40B4-BE49-F238E27FC236}">
-                <a16:creationId xmlns:a16="http://schemas.microsoft.com/office/drawing/2014/main" id="{4EE3CA41-A3EA-4221-A417-DB5AEE7AB448}"/>
+                <a16:creationId xmlns:a16="http://schemas.microsoft.com/office/drawing/2014/main" id="{51FD696C-0DBE-4458-B306-364906B3789A}"/>
               </a:ext>
             </a:extLst>
           </p:cNvPr>
@@ -3819,7 +3819,7 @@
           <p:cNvPr id="39" name="">
             <a:extLst xmlns:a="http://schemas.openxmlformats.org/drawingml/2006/main">
               <a:ext uri="{FF2B5EF4-FFF2-40B4-BE49-F238E27FC236}">
-                <a16:creationId xmlns:a16="http://schemas.microsoft.com/office/drawing/2014/main" id="{C201E331-2A2E-4DAD-A6E8-DE45AE137C91}"/>
+                <a16:creationId xmlns:a16="http://schemas.microsoft.com/office/drawing/2014/main" id="{0CBF763F-9A7D-448B-84C1-59BA63EB0E7A}"/>
               </a:ext>
             </a:extLst>
           </p:cNvPr>
@@ -3876,7 +3876,7 @@
           <p:cNvPr id="40" name="">
             <a:extLst xmlns:a="http://schemas.openxmlformats.org/drawingml/2006/main">
               <a:ext uri="{FF2B5EF4-FFF2-40B4-BE49-F238E27FC236}">
-                <a16:creationId xmlns:a16="http://schemas.microsoft.com/office/drawing/2014/main" id="{2174AF62-4BEC-4F86-9BDA-D7B1E9809532}"/>
+                <a16:creationId xmlns:a16="http://schemas.microsoft.com/office/drawing/2014/main" id="{E38F218C-7170-4170-8A9D-93298085EF63}"/>
               </a:ext>
             </a:extLst>
           </p:cNvPr>
@@ -3933,7 +3933,7 @@
           <p:cNvPr id="41" name="">
             <a:extLst xmlns:a="http://schemas.openxmlformats.org/drawingml/2006/main">
               <a:ext uri="{FF2B5EF4-FFF2-40B4-BE49-F238E27FC236}">
-                <a16:creationId xmlns:a16="http://schemas.microsoft.com/office/drawing/2014/main" id="{F379E59A-2295-4451-AA7B-E039869EFE30}"/>
+                <a16:creationId xmlns:a16="http://schemas.microsoft.com/office/drawing/2014/main" id="{D1AD4CFF-7598-408B-851D-35CB4FEBD944}"/>
               </a:ext>
             </a:extLst>
           </p:cNvPr>
@@ -3990,7 +3990,7 @@
           <p:cNvPr id="42" name="">
             <a:extLst xmlns:a="http://schemas.openxmlformats.org/drawingml/2006/main">
               <a:ext uri="{FF2B5EF4-FFF2-40B4-BE49-F238E27FC236}">
-                <a16:creationId xmlns:a16="http://schemas.microsoft.com/office/drawing/2014/main" id="{36083B80-98FA-4238-94A2-1D54B06B1C9C}"/>
+                <a16:creationId xmlns:a16="http://schemas.microsoft.com/office/drawing/2014/main" id="{C67CE3CD-86E5-45A9-AB61-42C09037F93A}"/>
               </a:ext>
             </a:extLst>
           </p:cNvPr>
@@ -4047,7 +4047,7 @@
           <p:cNvPr id="43" name="">
             <a:extLst xmlns:a="http://schemas.openxmlformats.org/drawingml/2006/main">
               <a:ext uri="{FF2B5EF4-FFF2-40B4-BE49-F238E27FC236}">
-                <a16:creationId xmlns:a16="http://schemas.microsoft.com/office/drawing/2014/main" id="{19A2A429-3073-41FE-B010-98972A062995}"/>
+                <a16:creationId xmlns:a16="http://schemas.microsoft.com/office/drawing/2014/main" id="{E2C81024-F463-4FFB-85AD-581F6F97B60A}"/>
               </a:ext>
             </a:extLst>
           </p:cNvPr>
@@ -4104,7 +4104,7 @@
           <p:cNvPr id="44" name="">
             <a:extLst xmlns:a="http://schemas.openxmlformats.org/drawingml/2006/main">
               <a:ext uri="{FF2B5EF4-FFF2-40B4-BE49-F238E27FC236}">
-                <a16:creationId xmlns:a16="http://schemas.microsoft.com/office/drawing/2014/main" id="{4ECF4129-A03B-427B-A699-CB08481402AA}"/>
+                <a16:creationId xmlns:a16="http://schemas.microsoft.com/office/drawing/2014/main" id="{09C9B169-4A7A-4A2E-B065-FD0E7CE9B90C}"/>
               </a:ext>
             </a:extLst>
           </p:cNvPr>
@@ -4136,7 +4136,7 @@
           <p:cNvPr id="45" name="">
             <a:extLst xmlns:a="http://schemas.openxmlformats.org/drawingml/2006/main">
               <a:ext uri="{FF2B5EF4-FFF2-40B4-BE49-F238E27FC236}">
-                <a16:creationId xmlns:a16="http://schemas.microsoft.com/office/drawing/2014/main" id="{3FDD588E-3C25-4DD7-BA3C-AAD23E6A0538}"/>
+                <a16:creationId xmlns:a16="http://schemas.microsoft.com/office/drawing/2014/main" id="{CB0346F2-8F82-43D8-A18D-AC983AB5F552}"/>
               </a:ext>
             </a:extLst>
           </p:cNvPr>
@@ -4191,7 +4191,7 @@
     </p:spTree>
     <p:extLst>
       <p:ext uri="{BB962C8B-B14F-4D97-AF65-F5344CB8AC3E}">
-        <p14:creationId xmlns:p14="http://schemas.microsoft.com/office/powerpoint/2010/main" val="621396938"/>
+        <p14:creationId xmlns:p14="http://schemas.microsoft.com/office/powerpoint/2010/main" val="376866593"/>
       </p:ext>
     </p:extLst>
   </p:cSld>
@@ -4219,10 +4219,10 @@
       </p:grpSpPr>
       <p:sp>
         <p:nvSpPr>
-          <p:cNvPr id="56" name="">
-            <a:extLst xmlns:a="http://schemas.openxmlformats.org/drawingml/2006/main">
-              <a:ext uri="{FF2B5EF4-FFF2-40B4-BE49-F238E27FC236}">
-                <a16:creationId xmlns:a16="http://schemas.microsoft.com/office/drawing/2014/main" id="{B268931E-5735-4192-A784-F97AA4169FA5}"/>
+          <p:cNvPr id="57" name="">
+            <a:extLst xmlns:a="http://schemas.openxmlformats.org/drawingml/2006/main">
+              <a:ext uri="{FF2B5EF4-FFF2-40B4-BE49-F238E27FC236}">
+                <a16:creationId xmlns:a16="http://schemas.microsoft.com/office/drawing/2014/main" id="{69CB6C18-25BA-4D33-A11A-BEA642DF8221}"/>
               </a:ext>
             </a:extLst>
           </p:cNvPr>
@@ -4252,7 +4252,7 @@
           <p:cNvPr id="2" name="">
             <a:extLst xmlns:a="http://schemas.openxmlformats.org/drawingml/2006/main">
               <a:ext uri="{FF2B5EF4-FFF2-40B4-BE49-F238E27FC236}">
-                <a16:creationId xmlns:a16="http://schemas.microsoft.com/office/drawing/2014/main" id="{A0216F90-9D2A-486D-9BB5-74B11704017B}"/>
+                <a16:creationId xmlns:a16="http://schemas.microsoft.com/office/drawing/2014/main" id="{9F9FF240-13DC-4646-931A-F84BF617810A}"/>
               </a:ext>
             </a:extLst>
           </p:cNvPr>
@@ -4309,7 +4309,7 @@
           <p:cNvPr id="3" name="">
             <a:extLst xmlns:a="http://schemas.openxmlformats.org/drawingml/2006/main">
               <a:ext uri="{FF2B5EF4-FFF2-40B4-BE49-F238E27FC236}">
-                <a16:creationId xmlns:a16="http://schemas.microsoft.com/office/drawing/2014/main" id="{341A6736-F1F8-42E9-8B5C-1D2E82CB6366}"/>
+                <a16:creationId xmlns:a16="http://schemas.microsoft.com/office/drawing/2014/main" id="{EFC94DEB-F33E-4583-9875-2C069C7A0B6A}"/>
               </a:ext>
             </a:extLst>
           </p:cNvPr>
@@ -4339,7 +4339,7 @@
           <p:cNvPr id="4" name="">
             <a:extLst xmlns:a="http://schemas.openxmlformats.org/drawingml/2006/main">
               <a:ext uri="{FF2B5EF4-FFF2-40B4-BE49-F238E27FC236}">
-                <a16:creationId xmlns:a16="http://schemas.microsoft.com/office/drawing/2014/main" id="{57715476-ACC0-4652-B19B-922707324D7C}"/>
+                <a16:creationId xmlns:a16="http://schemas.microsoft.com/office/drawing/2014/main" id="{1AFF4680-A91E-4D3D-A5F0-E8D2322AD76E}"/>
               </a:ext>
             </a:extLst>
           </p:cNvPr>
@@ -4396,7 +4396,7 @@
           <p:cNvPr id="5" name="">
             <a:extLst xmlns:a="http://schemas.openxmlformats.org/drawingml/2006/main">
               <a:ext uri="{FF2B5EF4-FFF2-40B4-BE49-F238E27FC236}">
-                <a16:creationId xmlns:a16="http://schemas.microsoft.com/office/drawing/2014/main" id="{986763D1-678F-4C31-BC6E-D72935C95C59}"/>
+                <a16:creationId xmlns:a16="http://schemas.microsoft.com/office/drawing/2014/main" id="{86ADC36E-ADA2-4E84-BC7D-14D591D381E1}"/>
               </a:ext>
             </a:extLst>
           </p:cNvPr>
@@ -4453,7 +4453,7 @@
           <p:cNvPr id="6" name="">
             <a:extLst xmlns:a="http://schemas.openxmlformats.org/drawingml/2006/main">
               <a:ext uri="{FF2B5EF4-FFF2-40B4-BE49-F238E27FC236}">
-                <a16:creationId xmlns:a16="http://schemas.microsoft.com/office/drawing/2014/main" id="{603A4A82-C4F8-4F7D-93C6-4791B90FBCAF}"/>
+                <a16:creationId xmlns:a16="http://schemas.microsoft.com/office/drawing/2014/main" id="{A7788689-680A-4B4B-8E50-6103E4845F2E}"/>
               </a:ext>
             </a:extLst>
           </p:cNvPr>
@@ -4487,7 +4487,7 @@
           <p:cNvPr id="7" name="">
             <a:extLst xmlns:a="http://schemas.openxmlformats.org/drawingml/2006/main">
               <a:ext uri="{FF2B5EF4-FFF2-40B4-BE49-F238E27FC236}">
-                <a16:creationId xmlns:a16="http://schemas.microsoft.com/office/drawing/2014/main" id="{FFD1B003-67FE-4FDF-8E86-0C1098FCC375}"/>
+                <a16:creationId xmlns:a16="http://schemas.microsoft.com/office/drawing/2014/main" id="{1249C2E5-3C4A-4707-9AF0-06B1847E48F2}"/>
               </a:ext>
             </a:extLst>
           </p:cNvPr>
@@ -4519,7 +4519,7 @@
           <p:cNvPr id="8" name="">
             <a:extLst xmlns:a="http://schemas.openxmlformats.org/drawingml/2006/main">
               <a:ext uri="{FF2B5EF4-FFF2-40B4-BE49-F238E27FC236}">
-                <a16:creationId xmlns:a16="http://schemas.microsoft.com/office/drawing/2014/main" id="{5C2D6AF9-A662-4604-B49A-E1FFF8ED083A}"/>
+                <a16:creationId xmlns:a16="http://schemas.microsoft.com/office/drawing/2014/main" id="{D132B4B8-4860-4F46-9FBC-BA238DA6FEFB}"/>
               </a:ext>
             </a:extLst>
           </p:cNvPr>
@@ -4576,7 +4576,7 @@
           <p:cNvPr id="9" name="">
             <a:extLst xmlns:a="http://schemas.openxmlformats.org/drawingml/2006/main">
               <a:ext uri="{FF2B5EF4-FFF2-40B4-BE49-F238E27FC236}">
-                <a16:creationId xmlns:a16="http://schemas.microsoft.com/office/drawing/2014/main" id="{53BC0821-FA48-48A4-8D4F-C5B0B46264DF}"/>
+                <a16:creationId xmlns:a16="http://schemas.microsoft.com/office/drawing/2014/main" id="{1115566C-9C69-44B0-8690-D12BA0A8639C}"/>
               </a:ext>
             </a:extLst>
           </p:cNvPr>
@@ -4633,7 +4633,7 @@
           <p:cNvPr id="10" name="">
             <a:extLst xmlns:a="http://schemas.openxmlformats.org/drawingml/2006/main">
               <a:ext uri="{FF2B5EF4-FFF2-40B4-BE49-F238E27FC236}">
-                <a16:creationId xmlns:a16="http://schemas.microsoft.com/office/drawing/2014/main" id="{94CFDD09-E669-44DF-8023-CF4A0278BDC1}"/>
+                <a16:creationId xmlns:a16="http://schemas.microsoft.com/office/drawing/2014/main" id="{5A46C7D7-DEFB-4FC8-82F5-A856CC9A0357}"/>
               </a:ext>
             </a:extLst>
           </p:cNvPr>
@@ -4690,7 +4690,7 @@
           <p:cNvPr id="11" name="">
             <a:extLst xmlns:a="http://schemas.openxmlformats.org/drawingml/2006/main">
               <a:ext uri="{FF2B5EF4-FFF2-40B4-BE49-F238E27FC236}">
-                <a16:creationId xmlns:a16="http://schemas.microsoft.com/office/drawing/2014/main" id="{9212CF5F-1482-4CED-A933-CF97AB2F96BF}"/>
+                <a16:creationId xmlns:a16="http://schemas.microsoft.com/office/drawing/2014/main" id="{F4DE997E-874B-40A4-8622-963CF0962BA4}"/>
               </a:ext>
             </a:extLst>
           </p:cNvPr>
@@ -4720,7 +4720,7 @@
           <p:cNvPr id="12" name="">
             <a:extLst xmlns:a="http://schemas.openxmlformats.org/drawingml/2006/main">
               <a:ext uri="{FF2B5EF4-FFF2-40B4-BE49-F238E27FC236}">
-                <a16:creationId xmlns:a16="http://schemas.microsoft.com/office/drawing/2014/main" id="{13435D95-523E-41A2-97AD-CB05E48A017D}"/>
+                <a16:creationId xmlns:a16="http://schemas.microsoft.com/office/drawing/2014/main" id="{CBF2D581-0F25-426B-B1E3-F0C0ABE9943E}"/>
               </a:ext>
             </a:extLst>
           </p:cNvPr>
@@ -4754,7 +4754,7 @@
           <p:cNvPr id="13" name="">
             <a:extLst xmlns:a="http://schemas.openxmlformats.org/drawingml/2006/main">
               <a:ext uri="{FF2B5EF4-FFF2-40B4-BE49-F238E27FC236}">
-                <a16:creationId xmlns:a16="http://schemas.microsoft.com/office/drawing/2014/main" id="{24EFB963-2F3B-476D-835C-83E8F27D9BAB}"/>
+                <a16:creationId xmlns:a16="http://schemas.microsoft.com/office/drawing/2014/main" id="{024F83B6-1D63-4410-9EA2-6F13775ACBAA}"/>
               </a:ext>
             </a:extLst>
           </p:cNvPr>
@@ -4786,7 +4786,7 @@
           <p:cNvPr id="14" name="">
             <a:extLst xmlns:a="http://schemas.openxmlformats.org/drawingml/2006/main">
               <a:ext uri="{FF2B5EF4-FFF2-40B4-BE49-F238E27FC236}">
-                <a16:creationId xmlns:a16="http://schemas.microsoft.com/office/drawing/2014/main" id="{B44AFE95-14F3-467A-B457-B4093724FB47}"/>
+                <a16:creationId xmlns:a16="http://schemas.microsoft.com/office/drawing/2014/main" id="{FA8211C3-F4EF-4183-896A-2F840AD75DEA}"/>
               </a:ext>
             </a:extLst>
           </p:cNvPr>
@@ -4843,7 +4843,7 @@
           <p:cNvPr id="15" name="">
             <a:extLst xmlns:a="http://schemas.openxmlformats.org/drawingml/2006/main">
               <a:ext uri="{FF2B5EF4-FFF2-40B4-BE49-F238E27FC236}">
-                <a16:creationId xmlns:a16="http://schemas.microsoft.com/office/drawing/2014/main" id="{53E32D15-E332-4760-8F66-81E1816859D8}"/>
+                <a16:creationId xmlns:a16="http://schemas.microsoft.com/office/drawing/2014/main" id="{A60027F4-D419-46F6-8882-B0F8B743655E}"/>
               </a:ext>
             </a:extLst>
           </p:cNvPr>
@@ -4867,7 +4867,7 @@
         </p:spPr>
         <p:txBody>
           <a:bodyPr xmlns:a="http://schemas.openxmlformats.org/drawingml/2006/main" anchor="ctr">
-            <a:normAutofit fontScale="90196"/>
+            <a:normAutofit fontScale="80332"/>
           </a:bodyPr>
           <a:lstStyle xmlns:a="http://schemas.openxmlformats.org/drawingml/2006/main"/>
           <a:p xmlns:a="http://schemas.openxmlformats.org/drawingml/2006/main">
@@ -4890,7 +4890,7 @@
                 <a:ea typeface="Malgun Gothic"/>
                 <a:cs typeface="Malgun Gothic"/>
               </a:rPr>
-              <a:t>Task Retriever</a:t>
+              <a:t>Task Context RAG</a:t>
             </a:r>
           </a:p>
         </p:txBody>
@@ -4900,7 +4900,7 @@
           <p:cNvPr id="16" name="">
             <a:extLst xmlns:a="http://schemas.openxmlformats.org/drawingml/2006/main">
               <a:ext uri="{FF2B5EF4-FFF2-40B4-BE49-F238E27FC236}">
-                <a16:creationId xmlns:a16="http://schemas.microsoft.com/office/drawing/2014/main" id="{2656140F-0F3C-48B3-A3B3-9F24427CEABC}"/>
+                <a16:creationId xmlns:a16="http://schemas.microsoft.com/office/drawing/2014/main" id="{0A150B9B-0EEF-4A47-B7C4-5DABF07DD1B9}"/>
               </a:ext>
             </a:extLst>
           </p:cNvPr>
@@ -4924,7 +4924,7 @@
         </p:spPr>
         <p:txBody>
           <a:bodyPr xmlns:a="http://schemas.openxmlformats.org/drawingml/2006/main" anchor="ctr">
-            <a:normAutofit fontScale="93619"/>
+            <a:normAutofit fontScale="100000"/>
           </a:bodyPr>
           <a:lstStyle xmlns:a="http://schemas.openxmlformats.org/drawingml/2006/main"/>
           <a:p xmlns:a="http://schemas.openxmlformats.org/drawingml/2006/main">
@@ -4947,7 +4947,7 @@
                 <a:ea typeface="Malgun Gothic"/>
                 <a:cs typeface="Malgun Gothic"/>
               </a:rPr>
-              <a:t>SQLite Context top-k</a:t>
+              <a:t>SQLite top-k 검색</a:t>
             </a:r>
           </a:p>
         </p:txBody>
@@ -4957,7 +4957,7 @@
           <p:cNvPr id="17" name="">
             <a:extLst xmlns:a="http://schemas.openxmlformats.org/drawingml/2006/main">
               <a:ext uri="{FF2B5EF4-FFF2-40B4-BE49-F238E27FC236}">
-                <a16:creationId xmlns:a16="http://schemas.microsoft.com/office/drawing/2014/main" id="{63026AEF-7580-495F-AAE6-10DBCE0DA399}"/>
+                <a16:creationId xmlns:a16="http://schemas.microsoft.com/office/drawing/2014/main" id="{E587C59A-2D10-4D79-830A-F022E2A2F2DB}"/>
               </a:ext>
             </a:extLst>
           </p:cNvPr>
@@ -4987,7 +4987,7 @@
           <p:cNvPr id="18" name="">
             <a:extLst xmlns:a="http://schemas.openxmlformats.org/drawingml/2006/main">
               <a:ext uri="{FF2B5EF4-FFF2-40B4-BE49-F238E27FC236}">
-                <a16:creationId xmlns:a16="http://schemas.microsoft.com/office/drawing/2014/main" id="{20810A37-5D11-466E-847E-81790315A3C0}"/>
+                <a16:creationId xmlns:a16="http://schemas.microsoft.com/office/drawing/2014/main" id="{E661D9D6-19C1-4D00-BF76-A2F8AAA79499}"/>
               </a:ext>
             </a:extLst>
           </p:cNvPr>
@@ -5021,7 +5021,7 @@
           <p:cNvPr id="19" name="">
             <a:extLst xmlns:a="http://schemas.openxmlformats.org/drawingml/2006/main">
               <a:ext uri="{FF2B5EF4-FFF2-40B4-BE49-F238E27FC236}">
-                <a16:creationId xmlns:a16="http://schemas.microsoft.com/office/drawing/2014/main" id="{EEE880C5-152F-4E2B-8E3A-CE81CFEAA89B}"/>
+                <a16:creationId xmlns:a16="http://schemas.microsoft.com/office/drawing/2014/main" id="{0F7699E9-2CC8-4B34-B39B-F3028E42FF77}"/>
               </a:ext>
             </a:extLst>
           </p:cNvPr>
@@ -5053,7 +5053,7 @@
           <p:cNvPr id="20" name="">
             <a:extLst xmlns:a="http://schemas.openxmlformats.org/drawingml/2006/main">
               <a:ext uri="{FF2B5EF4-FFF2-40B4-BE49-F238E27FC236}">
-                <a16:creationId xmlns:a16="http://schemas.microsoft.com/office/drawing/2014/main" id="{CF615121-CB6B-4166-A7F4-5CD98538653B}"/>
+                <a16:creationId xmlns:a16="http://schemas.microsoft.com/office/drawing/2014/main" id="{A2CADD41-82FA-427D-B0F1-53AFDBF735BC}"/>
               </a:ext>
             </a:extLst>
           </p:cNvPr>
@@ -5110,7 +5110,7 @@
           <p:cNvPr id="21" name="">
             <a:extLst xmlns:a="http://schemas.openxmlformats.org/drawingml/2006/main">
               <a:ext uri="{FF2B5EF4-FFF2-40B4-BE49-F238E27FC236}">
-                <a16:creationId xmlns:a16="http://schemas.microsoft.com/office/drawing/2014/main" id="{016462AC-56AF-4185-A412-DDC3BC6D593E}"/>
+                <a16:creationId xmlns:a16="http://schemas.microsoft.com/office/drawing/2014/main" id="{DC8F2EF5-F5CB-46EA-AD45-1B2A7AEF66E7}"/>
               </a:ext>
             </a:extLst>
           </p:cNvPr>
@@ -5167,7 +5167,7 @@
           <p:cNvPr id="22" name="">
             <a:extLst xmlns:a="http://schemas.openxmlformats.org/drawingml/2006/main">
               <a:ext uri="{FF2B5EF4-FFF2-40B4-BE49-F238E27FC236}">
-                <a16:creationId xmlns:a16="http://schemas.microsoft.com/office/drawing/2014/main" id="{0327E046-3C56-4B3B-B117-0C800845557A}"/>
+                <a16:creationId xmlns:a16="http://schemas.microsoft.com/office/drawing/2014/main" id="{505D5FAA-B911-48F1-AB6A-622624495141}"/>
               </a:ext>
             </a:extLst>
           </p:cNvPr>
@@ -5224,7 +5224,7 @@
           <p:cNvPr id="23" name="">
             <a:extLst xmlns:a="http://schemas.openxmlformats.org/drawingml/2006/main">
               <a:ext uri="{FF2B5EF4-FFF2-40B4-BE49-F238E27FC236}">
-                <a16:creationId xmlns:a16="http://schemas.microsoft.com/office/drawing/2014/main" id="{F6D09876-0A3F-444B-9B89-0A3F92811F70}"/>
+                <a16:creationId xmlns:a16="http://schemas.microsoft.com/office/drawing/2014/main" id="{A8DCCD34-1686-4C8A-9250-8334D6C6B6D2}"/>
               </a:ext>
             </a:extLst>
           </p:cNvPr>
@@ -5254,7 +5254,7 @@
           <p:cNvPr id="24" name="">
             <a:extLst xmlns:a="http://schemas.openxmlformats.org/drawingml/2006/main">
               <a:ext uri="{FF2B5EF4-FFF2-40B4-BE49-F238E27FC236}">
-                <a16:creationId xmlns:a16="http://schemas.microsoft.com/office/drawing/2014/main" id="{178DFCB0-E7E3-4216-9105-407E0A1F1CA2}"/>
+                <a16:creationId xmlns:a16="http://schemas.microsoft.com/office/drawing/2014/main" id="{294748F1-C119-4A0A-BA83-5CB051AEE8D9}"/>
               </a:ext>
             </a:extLst>
           </p:cNvPr>
@@ -5288,7 +5288,7 @@
           <p:cNvPr id="25" name="">
             <a:extLst xmlns:a="http://schemas.openxmlformats.org/drawingml/2006/main">
               <a:ext uri="{FF2B5EF4-FFF2-40B4-BE49-F238E27FC236}">
-                <a16:creationId xmlns:a16="http://schemas.microsoft.com/office/drawing/2014/main" id="{1999DC6F-33A7-4428-8E29-C84B2B2FE52C}"/>
+                <a16:creationId xmlns:a16="http://schemas.microsoft.com/office/drawing/2014/main" id="{A4AC8D93-60DB-421D-842D-8B9ABEED1D67}"/>
               </a:ext>
             </a:extLst>
           </p:cNvPr>
@@ -5320,7 +5320,7 @@
           <p:cNvPr id="26" name="">
             <a:extLst xmlns:a="http://schemas.openxmlformats.org/drawingml/2006/main">
               <a:ext uri="{FF2B5EF4-FFF2-40B4-BE49-F238E27FC236}">
-                <a16:creationId xmlns:a16="http://schemas.microsoft.com/office/drawing/2014/main" id="{A9A7BD63-4F99-4250-8146-973078090F95}"/>
+                <a16:creationId xmlns:a16="http://schemas.microsoft.com/office/drawing/2014/main" id="{C7824557-B7E9-41D5-ABB1-A9401CDF540D}"/>
               </a:ext>
             </a:extLst>
           </p:cNvPr>
@@ -5377,7 +5377,7 @@
           <p:cNvPr id="27" name="">
             <a:extLst xmlns:a="http://schemas.openxmlformats.org/drawingml/2006/main">
               <a:ext uri="{FF2B5EF4-FFF2-40B4-BE49-F238E27FC236}">
-                <a16:creationId xmlns:a16="http://schemas.microsoft.com/office/drawing/2014/main" id="{41B62790-CEA3-49E9-9446-CF7873DEE7E2}"/>
+                <a16:creationId xmlns:a16="http://schemas.microsoft.com/office/drawing/2014/main" id="{7D448AD3-D0B6-4CDC-A9E0-7BA0CD10F675}"/>
               </a:ext>
             </a:extLst>
           </p:cNvPr>
@@ -5434,7 +5434,7 @@
           <p:cNvPr id="28" name="">
             <a:extLst xmlns:a="http://schemas.openxmlformats.org/drawingml/2006/main">
               <a:ext uri="{FF2B5EF4-FFF2-40B4-BE49-F238E27FC236}">
-                <a16:creationId xmlns:a16="http://schemas.microsoft.com/office/drawing/2014/main" id="{19D992B4-DFF4-40E0-95DE-420225ACA902}"/>
+                <a16:creationId xmlns:a16="http://schemas.microsoft.com/office/drawing/2014/main" id="{6A8D3AE7-D45E-4347-B4EC-8A75C05F6222}"/>
               </a:ext>
             </a:extLst>
           </p:cNvPr>
@@ -5491,7 +5491,7 @@
           <p:cNvPr id="29" name="">
             <a:extLst xmlns:a="http://schemas.openxmlformats.org/drawingml/2006/main">
               <a:ext uri="{FF2B5EF4-FFF2-40B4-BE49-F238E27FC236}">
-                <a16:creationId xmlns:a16="http://schemas.microsoft.com/office/drawing/2014/main" id="{E786F5C0-FE73-4B65-A908-8C1A496EA717}"/>
+                <a16:creationId xmlns:a16="http://schemas.microsoft.com/office/drawing/2014/main" id="{2AB37C5E-6D76-4854-8490-7DE872C1D95E}"/>
               </a:ext>
             </a:extLst>
           </p:cNvPr>
@@ -5521,7 +5521,7 @@
           <p:cNvPr id="30" name="">
             <a:extLst xmlns:a="http://schemas.openxmlformats.org/drawingml/2006/main">
               <a:ext uri="{FF2B5EF4-FFF2-40B4-BE49-F238E27FC236}">
-                <a16:creationId xmlns:a16="http://schemas.microsoft.com/office/drawing/2014/main" id="{03D2AF54-9F3E-4EEE-89DF-C9D0B23A9E59}"/>
+                <a16:creationId xmlns:a16="http://schemas.microsoft.com/office/drawing/2014/main" id="{D90549E9-3338-4A5C-BC02-11477B05BAE0}"/>
               </a:ext>
             </a:extLst>
           </p:cNvPr>
@@ -5555,7 +5555,7 @@
           <p:cNvPr id="31" name="">
             <a:extLst xmlns:a="http://schemas.openxmlformats.org/drawingml/2006/main">
               <a:ext uri="{FF2B5EF4-FFF2-40B4-BE49-F238E27FC236}">
-                <a16:creationId xmlns:a16="http://schemas.microsoft.com/office/drawing/2014/main" id="{98FA0D52-0113-4C1D-8F08-7B34E47023BB}"/>
+                <a16:creationId xmlns:a16="http://schemas.microsoft.com/office/drawing/2014/main" id="{38494FAD-B77B-469F-88E0-D1C8DA1121F4}"/>
               </a:ext>
             </a:extLst>
           </p:cNvPr>
@@ -5587,7 +5587,7 @@
           <p:cNvPr id="32" name="">
             <a:extLst xmlns:a="http://schemas.openxmlformats.org/drawingml/2006/main">
               <a:ext uri="{FF2B5EF4-FFF2-40B4-BE49-F238E27FC236}">
-                <a16:creationId xmlns:a16="http://schemas.microsoft.com/office/drawing/2014/main" id="{6734D3F7-0570-46F9-93A2-0D09D244377E}"/>
+                <a16:creationId xmlns:a16="http://schemas.microsoft.com/office/drawing/2014/main" id="{BF0BC6C1-B066-408A-8161-B1BF9E9E0F48}"/>
               </a:ext>
             </a:extLst>
           </p:cNvPr>
@@ -5644,7 +5644,7 @@
           <p:cNvPr id="33" name="">
             <a:extLst xmlns:a="http://schemas.openxmlformats.org/drawingml/2006/main">
               <a:ext uri="{FF2B5EF4-FFF2-40B4-BE49-F238E27FC236}">
-                <a16:creationId xmlns:a16="http://schemas.microsoft.com/office/drawing/2014/main" id="{1C0CAE28-6E30-421B-BF7A-E172C78920BF}"/>
+                <a16:creationId xmlns:a16="http://schemas.microsoft.com/office/drawing/2014/main" id="{4E27B85F-F3D6-4206-AA2A-99B39FA0710D}"/>
               </a:ext>
             </a:extLst>
           </p:cNvPr>
@@ -5701,7 +5701,7 @@
           <p:cNvPr id="34" name="">
             <a:extLst xmlns:a="http://schemas.openxmlformats.org/drawingml/2006/main">
               <a:ext uri="{FF2B5EF4-FFF2-40B4-BE49-F238E27FC236}">
-                <a16:creationId xmlns:a16="http://schemas.microsoft.com/office/drawing/2014/main" id="{156FDD96-20F0-4BF0-9BFB-7576734CF936}"/>
+                <a16:creationId xmlns:a16="http://schemas.microsoft.com/office/drawing/2014/main" id="{C3328018-682F-4CDC-AD81-3D4605C6B8A4}"/>
               </a:ext>
             </a:extLst>
           </p:cNvPr>
@@ -5758,7 +5758,7 @@
           <p:cNvPr id="35" name="">
             <a:extLst xmlns:a="http://schemas.openxmlformats.org/drawingml/2006/main">
               <a:ext uri="{FF2B5EF4-FFF2-40B4-BE49-F238E27FC236}">
-                <a16:creationId xmlns:a16="http://schemas.microsoft.com/office/drawing/2014/main" id="{B3AF1648-E6CC-460D-8239-7CCA09795A34}"/>
+                <a16:creationId xmlns:a16="http://schemas.microsoft.com/office/drawing/2014/main" id="{DCCAC21B-4178-4BD3-92DA-EAC92A3DDE71}"/>
               </a:ext>
             </a:extLst>
           </p:cNvPr>
@@ -5788,7 +5788,7 @@
           <p:cNvPr id="36" name="">
             <a:extLst xmlns:a="http://schemas.openxmlformats.org/drawingml/2006/main">
               <a:ext uri="{FF2B5EF4-FFF2-40B4-BE49-F238E27FC236}">
-                <a16:creationId xmlns:a16="http://schemas.microsoft.com/office/drawing/2014/main" id="{44FD7C0E-745B-480D-9104-2F68074F71D6}"/>
+                <a16:creationId xmlns:a16="http://schemas.microsoft.com/office/drawing/2014/main" id="{E169117A-6A11-4571-9516-D5453D7D33FC}"/>
               </a:ext>
             </a:extLst>
           </p:cNvPr>
@@ -5822,7 +5822,7 @@
           <p:cNvPr id="37" name="">
             <a:extLst xmlns:a="http://schemas.openxmlformats.org/drawingml/2006/main">
               <a:ext uri="{FF2B5EF4-FFF2-40B4-BE49-F238E27FC236}">
-                <a16:creationId xmlns:a16="http://schemas.microsoft.com/office/drawing/2014/main" id="{9F383383-DE23-47AF-9B7C-B34796B0A757}"/>
+                <a16:creationId xmlns:a16="http://schemas.microsoft.com/office/drawing/2014/main" id="{03EB4AD0-1FF5-4C0B-B8D4-49C3668235E2}"/>
               </a:ext>
             </a:extLst>
           </p:cNvPr>
@@ -5854,7 +5854,7 @@
           <p:cNvPr id="38" name="">
             <a:extLst xmlns:a="http://schemas.openxmlformats.org/drawingml/2006/main">
               <a:ext uri="{FF2B5EF4-FFF2-40B4-BE49-F238E27FC236}">
-                <a16:creationId xmlns:a16="http://schemas.microsoft.com/office/drawing/2014/main" id="{2D6B7F84-569C-46B2-AB7B-D53DE126254C}"/>
+                <a16:creationId xmlns:a16="http://schemas.microsoft.com/office/drawing/2014/main" id="{0983BD9D-F453-4F98-9A69-1386CBB1621C}"/>
               </a:ext>
             </a:extLst>
           </p:cNvPr>
@@ -5911,7 +5911,7 @@
           <p:cNvPr id="39" name="">
             <a:extLst xmlns:a="http://schemas.openxmlformats.org/drawingml/2006/main">
               <a:ext uri="{FF2B5EF4-FFF2-40B4-BE49-F238E27FC236}">
-                <a16:creationId xmlns:a16="http://schemas.microsoft.com/office/drawing/2014/main" id="{4F473680-4FED-41C9-A23F-0A7D01C59B52}"/>
+                <a16:creationId xmlns:a16="http://schemas.microsoft.com/office/drawing/2014/main" id="{4770B9B6-D556-4AA7-B39B-EE08F605FBFB}"/>
               </a:ext>
             </a:extLst>
           </p:cNvPr>
@@ -5968,7 +5968,7 @@
           <p:cNvPr id="40" name="">
             <a:extLst xmlns:a="http://schemas.openxmlformats.org/drawingml/2006/main">
               <a:ext uri="{FF2B5EF4-FFF2-40B4-BE49-F238E27FC236}">
-                <a16:creationId xmlns:a16="http://schemas.microsoft.com/office/drawing/2014/main" id="{2B776FA8-9841-466B-A18D-A59C80B9B21B}"/>
+                <a16:creationId xmlns:a16="http://schemas.microsoft.com/office/drawing/2014/main" id="{C9B9EDBD-7BC8-42B4-815F-682C230394B8}"/>
               </a:ext>
             </a:extLst>
           </p:cNvPr>
@@ -6025,23 +6025,80 @@
           <p:cNvPr id="41" name="">
             <a:extLst xmlns:a="http://schemas.openxmlformats.org/drawingml/2006/main">
               <a:ext uri="{FF2B5EF4-FFF2-40B4-BE49-F238E27FC236}">
-                <a16:creationId xmlns:a16="http://schemas.microsoft.com/office/drawing/2014/main" id="{8088CA47-0C9B-4C7E-82A0-9F95B207D035}"/>
-              </a:ext>
-            </a:extLst>
-          </p:cNvPr>
-          <p:cNvSpPr>
-            <a:spLocks xmlns:a="http://schemas.openxmlformats.org/drawingml/2006/main" noGrp="1"/>
-          </p:cNvSpPr>
-          <p:nvPr/>
-        </p:nvSpPr>
-        <p:spPr>
-          <a:xfrm xmlns:a="http://schemas.openxmlformats.org/drawingml/2006/main">
-            <a:off x="571500" y="3257550"/>
-            <a:ext cx="11049000" cy="838200"/>
+                <a16:creationId xmlns:a16="http://schemas.microsoft.com/office/drawing/2014/main" id="{564F3662-76E8-4B87-94C8-B0E8F332A62D}"/>
+              </a:ext>
+            </a:extLst>
+          </p:cNvPr>
+          <p:cNvSpPr>
+            <a:spLocks xmlns:a="http://schemas.openxmlformats.org/drawingml/2006/main" noGrp="1"/>
+          </p:cNvSpPr>
+          <p:nvPr/>
+        </p:nvSpPr>
+        <p:spPr>
+          <a:xfrm xmlns:a="http://schemas.openxmlformats.org/drawingml/2006/main">
+            <a:off x="571500" y="3143250"/>
+            <a:ext cx="11049000" cy="190500"/>
+          </a:xfrm>
+          <a:prstGeom xmlns:a="http://schemas.openxmlformats.org/drawingml/2006/main" prst="rect">
+            <a:avLst/>
+          </a:prstGeom>
+          <a:noFill xmlns:a="http://schemas.openxmlformats.org/drawingml/2006/main"/>
+          <a:ln xmlns:a="http://schemas.openxmlformats.org/drawingml/2006/main" w="0">
+            <a:noFill/>
+          </a:ln>
+        </p:spPr>
+        <p:txBody>
+          <a:bodyPr xmlns:a="http://schemas.openxmlformats.org/drawingml/2006/main" anchor="ctr">
+            <a:normAutofit fontScale="66667"/>
+          </a:bodyPr>
+          <a:lstStyle xmlns:a="http://schemas.openxmlformats.org/drawingml/2006/main"/>
+          <a:p xmlns:a="http://schemas.openxmlformats.org/drawingml/2006/main">
+            <a:pPr algn="l">
+              <a:defRPr sz="975" b="1">
+                <a:solidFill>
+                  <a:srgbClr val="7657D6"/>
+                </a:solidFill>
+                <a:latin typeface="Malgun Gothic"/>
+                <a:ea typeface="Malgun Gothic"/>
+                <a:cs typeface="Malgun Gothic"/>
+              </a:defRPr>
+            </a:pPr>
+            <a:r>
+              <a:rPr sz="975" b="1">
+                <a:solidFill>
+                  <a:srgbClr val="7657D6"/>
+                </a:solidFill>
+                <a:latin typeface="Malgun Gothic"/>
+                <a:ea typeface="Malgun Gothic"/>
+                <a:cs typeface="Malgun Gothic"/>
+              </a:rPr>
+              <a:t>제한적 ReAct  |  Observe → Retrieve → Reason → Act → Observe   (저신뢰·모호하면 Query Rewrite 후 재검색·재판단 최대 1회)</a:t>
+            </a:r>
+          </a:p>
+        </p:txBody>
+      </p:sp>
+      <p:sp>
+        <p:nvSpPr>
+          <p:cNvPr id="42" name="">
+            <a:extLst xmlns:a="http://schemas.openxmlformats.org/drawingml/2006/main">
+              <a:ext uri="{FF2B5EF4-FFF2-40B4-BE49-F238E27FC236}">
+                <a16:creationId xmlns:a16="http://schemas.microsoft.com/office/drawing/2014/main" id="{4DF498D6-6D2E-4F75-B4FB-9F4EC99C651D}"/>
+              </a:ext>
+            </a:extLst>
+          </p:cNvPr>
+          <p:cNvSpPr>
+            <a:spLocks xmlns:a="http://schemas.openxmlformats.org/drawingml/2006/main" noGrp="1"/>
+          </p:cNvSpPr>
+          <p:nvPr/>
+        </p:nvSpPr>
+        <p:spPr>
+          <a:xfrm xmlns:a="http://schemas.openxmlformats.org/drawingml/2006/main">
+            <a:off x="571500" y="3371850"/>
+            <a:ext cx="11049000" cy="762000"/>
           </a:xfrm>
           <a:prstGeom xmlns:a="http://schemas.openxmlformats.org/drawingml/2006/main" prst="roundRect">
             <a:avLst>
-              <a:gd name="adj" fmla="val 9091"/>
+              <a:gd name="adj" fmla="val 10000"/>
             </a:avLst>
           </a:prstGeom>
           <a:solidFill xmlns:a="http://schemas.openxmlformats.org/drawingml/2006/main">
@@ -6054,21 +6111,21 @@
       </p:sp>
       <p:sp>
         <p:nvSpPr>
-          <p:cNvPr id="42" name="">
-            <a:extLst xmlns:a="http://schemas.openxmlformats.org/drawingml/2006/main">
-              <a:ext uri="{FF2B5EF4-FFF2-40B4-BE49-F238E27FC236}">
-                <a16:creationId xmlns:a16="http://schemas.microsoft.com/office/drawing/2014/main" id="{8B63DA85-A183-439A-92C3-72A23B7BB3BB}"/>
-              </a:ext>
-            </a:extLst>
-          </p:cNvPr>
-          <p:cNvSpPr>
-            <a:spLocks xmlns:a="http://schemas.openxmlformats.org/drawingml/2006/main" noGrp="1"/>
-          </p:cNvSpPr>
-          <p:nvPr/>
-        </p:nvSpPr>
-        <p:spPr>
-          <a:xfrm xmlns:a="http://schemas.openxmlformats.org/drawingml/2006/main">
-            <a:off x="781050" y="3333750"/>
+          <p:cNvPr id="43" name="">
+            <a:extLst xmlns:a="http://schemas.openxmlformats.org/drawingml/2006/main">
+              <a:ext uri="{FF2B5EF4-FFF2-40B4-BE49-F238E27FC236}">
+                <a16:creationId xmlns:a16="http://schemas.microsoft.com/office/drawing/2014/main" id="{241F8B91-A5FC-44FC-9649-5F4A4FC3F65C}"/>
+              </a:ext>
+            </a:extLst>
+          </p:cNvPr>
+          <p:cNvSpPr>
+            <a:spLocks xmlns:a="http://schemas.openxmlformats.org/drawingml/2006/main" noGrp="1"/>
+          </p:cNvSpPr>
+          <p:nvPr/>
+        </p:nvSpPr>
+        <p:spPr>
+          <a:xfrm xmlns:a="http://schemas.openxmlformats.org/drawingml/2006/main">
+            <a:off x="781050" y="3429000"/>
             <a:ext cx="1143000" cy="266700"/>
           </a:xfrm>
           <a:prstGeom xmlns:a="http://schemas.openxmlformats.org/drawingml/2006/main" prst="rect">
@@ -6111,21 +6168,21 @@
       </p:sp>
       <p:sp>
         <p:nvSpPr>
-          <p:cNvPr id="43" name="">
-            <a:extLst xmlns:a="http://schemas.openxmlformats.org/drawingml/2006/main">
-              <a:ext uri="{FF2B5EF4-FFF2-40B4-BE49-F238E27FC236}">
-                <a16:creationId xmlns:a16="http://schemas.microsoft.com/office/drawing/2014/main" id="{C6B97509-DB9F-4E81-8C30-35298DA99E66}"/>
-              </a:ext>
-            </a:extLst>
-          </p:cNvPr>
-          <p:cNvSpPr>
-            <a:spLocks xmlns:a="http://schemas.openxmlformats.org/drawingml/2006/main" noGrp="1"/>
-          </p:cNvSpPr>
-          <p:nvPr/>
-        </p:nvSpPr>
-        <p:spPr>
-          <a:xfrm xmlns:a="http://schemas.openxmlformats.org/drawingml/2006/main">
-            <a:off x="1952625" y="3333750"/>
+          <p:cNvPr id="44" name="">
+            <a:extLst xmlns:a="http://schemas.openxmlformats.org/drawingml/2006/main">
+              <a:ext uri="{FF2B5EF4-FFF2-40B4-BE49-F238E27FC236}">
+                <a16:creationId xmlns:a16="http://schemas.microsoft.com/office/drawing/2014/main" id="{96AFB86E-7281-4234-B8FE-0EF9B5CC7113}"/>
+              </a:ext>
+            </a:extLst>
+          </p:cNvPr>
+          <p:cNvSpPr>
+            <a:spLocks xmlns:a="http://schemas.openxmlformats.org/drawingml/2006/main" noGrp="1"/>
+          </p:cNvSpPr>
+          <p:nvPr/>
+        </p:nvSpPr>
+        <p:spPr>
+          <a:xfrm xmlns:a="http://schemas.openxmlformats.org/drawingml/2006/main">
+            <a:off x="1952625" y="3429000"/>
             <a:ext cx="2476500" cy="266700"/>
           </a:xfrm>
           <a:prstGeom xmlns:a="http://schemas.openxmlformats.org/drawingml/2006/main" prst="rect">
@@ -6168,21 +6225,21 @@
       </p:sp>
       <p:sp>
         <p:nvSpPr>
-          <p:cNvPr id="44" name="">
-            <a:extLst xmlns:a="http://schemas.openxmlformats.org/drawingml/2006/main">
-              <a:ext uri="{FF2B5EF4-FFF2-40B4-BE49-F238E27FC236}">
-                <a16:creationId xmlns:a16="http://schemas.microsoft.com/office/drawing/2014/main" id="{1BCEAF8D-91BC-43F7-8F71-BCAE343698CC}"/>
-              </a:ext>
-            </a:extLst>
-          </p:cNvPr>
-          <p:cNvSpPr>
-            <a:spLocks xmlns:a="http://schemas.openxmlformats.org/drawingml/2006/main" noGrp="1"/>
-          </p:cNvSpPr>
-          <p:nvPr/>
-        </p:nvSpPr>
-        <p:spPr>
-          <a:xfrm xmlns:a="http://schemas.openxmlformats.org/drawingml/2006/main">
-            <a:off x="4524375" y="3333750"/>
+          <p:cNvPr id="45" name="">
+            <a:extLst xmlns:a="http://schemas.openxmlformats.org/drawingml/2006/main">
+              <a:ext uri="{FF2B5EF4-FFF2-40B4-BE49-F238E27FC236}">
+                <a16:creationId xmlns:a16="http://schemas.microsoft.com/office/drawing/2014/main" id="{C92953D0-B903-4E37-80C4-8B9B66635152}"/>
+              </a:ext>
+            </a:extLst>
+          </p:cNvPr>
+          <p:cNvSpPr>
+            <a:spLocks xmlns:a="http://schemas.openxmlformats.org/drawingml/2006/main" noGrp="1"/>
+          </p:cNvSpPr>
+          <p:nvPr/>
+        </p:nvSpPr>
+        <p:spPr>
+          <a:xfrm xmlns:a="http://schemas.openxmlformats.org/drawingml/2006/main">
+            <a:off x="4524375" y="3429000"/>
             <a:ext cx="6762750" cy="266700"/>
           </a:xfrm>
           <a:prstGeom xmlns:a="http://schemas.openxmlformats.org/drawingml/2006/main" prst="rect">
@@ -6225,21 +6282,21 @@
       </p:sp>
       <p:sp>
         <p:nvSpPr>
-          <p:cNvPr id="45" name="">
-            <a:extLst xmlns:a="http://schemas.openxmlformats.org/drawingml/2006/main">
-              <a:ext uri="{FF2B5EF4-FFF2-40B4-BE49-F238E27FC236}">
-                <a16:creationId xmlns:a16="http://schemas.microsoft.com/office/drawing/2014/main" id="{CC694B94-B16F-41BC-B00A-168B94FF9D44}"/>
-              </a:ext>
-            </a:extLst>
-          </p:cNvPr>
-          <p:cNvSpPr>
-            <a:spLocks xmlns:a="http://schemas.openxmlformats.org/drawingml/2006/main" noGrp="1"/>
-          </p:cNvSpPr>
-          <p:nvPr/>
-        </p:nvSpPr>
-        <p:spPr>
-          <a:xfrm xmlns:a="http://schemas.openxmlformats.org/drawingml/2006/main">
-            <a:off x="781050" y="3714750"/>
+          <p:cNvPr id="46" name="">
+            <a:extLst xmlns:a="http://schemas.openxmlformats.org/drawingml/2006/main">
+              <a:ext uri="{FF2B5EF4-FFF2-40B4-BE49-F238E27FC236}">
+                <a16:creationId xmlns:a16="http://schemas.microsoft.com/office/drawing/2014/main" id="{340C8274-C458-4630-B0CC-500C97EB9E11}"/>
+              </a:ext>
+            </a:extLst>
+          </p:cNvPr>
+          <p:cNvSpPr>
+            <a:spLocks xmlns:a="http://schemas.openxmlformats.org/drawingml/2006/main" noGrp="1"/>
+          </p:cNvSpPr>
+          <p:nvPr/>
+        </p:nvSpPr>
+        <p:spPr>
+          <a:xfrm xmlns:a="http://schemas.openxmlformats.org/drawingml/2006/main">
+            <a:off x="781050" y="3790950"/>
             <a:ext cx="1143000" cy="266700"/>
           </a:xfrm>
           <a:prstGeom xmlns:a="http://schemas.openxmlformats.org/drawingml/2006/main" prst="rect">
@@ -6282,21 +6339,21 @@
       </p:sp>
       <p:sp>
         <p:nvSpPr>
-          <p:cNvPr id="46" name="">
-            <a:extLst xmlns:a="http://schemas.openxmlformats.org/drawingml/2006/main">
-              <a:ext uri="{FF2B5EF4-FFF2-40B4-BE49-F238E27FC236}">
-                <a16:creationId xmlns:a16="http://schemas.microsoft.com/office/drawing/2014/main" id="{5BBBB1C0-1833-4894-BE74-ADE6AE701AE1}"/>
-              </a:ext>
-            </a:extLst>
-          </p:cNvPr>
-          <p:cNvSpPr>
-            <a:spLocks xmlns:a="http://schemas.openxmlformats.org/drawingml/2006/main" noGrp="1"/>
-          </p:cNvSpPr>
-          <p:nvPr/>
-        </p:nvSpPr>
-        <p:spPr>
-          <a:xfrm xmlns:a="http://schemas.openxmlformats.org/drawingml/2006/main">
-            <a:off x="1952625" y="3714750"/>
+          <p:cNvPr id="47" name="">
+            <a:extLst xmlns:a="http://schemas.openxmlformats.org/drawingml/2006/main">
+              <a:ext uri="{FF2B5EF4-FFF2-40B4-BE49-F238E27FC236}">
+                <a16:creationId xmlns:a16="http://schemas.microsoft.com/office/drawing/2014/main" id="{EEB4A7A7-972D-43E2-A242-49B8A9A8C99E}"/>
+              </a:ext>
+            </a:extLst>
+          </p:cNvPr>
+          <p:cNvSpPr>
+            <a:spLocks xmlns:a="http://schemas.openxmlformats.org/drawingml/2006/main" noGrp="1"/>
+          </p:cNvSpPr>
+          <p:nvPr/>
+        </p:nvSpPr>
+        <p:spPr>
+          <a:xfrm xmlns:a="http://schemas.openxmlformats.org/drawingml/2006/main">
+            <a:off x="1952625" y="3790950"/>
             <a:ext cx="9334500" cy="266700"/>
           </a:xfrm>
           <a:prstGeom xmlns:a="http://schemas.openxmlformats.org/drawingml/2006/main" prst="rect">
@@ -6339,10 +6396,10 @@
       </p:sp>
       <p:sp>
         <p:nvSpPr>
-          <p:cNvPr id="47" name="">
-            <a:extLst xmlns:a="http://schemas.openxmlformats.org/drawingml/2006/main">
-              <a:ext uri="{FF2B5EF4-FFF2-40B4-BE49-F238E27FC236}">
-                <a16:creationId xmlns:a16="http://schemas.microsoft.com/office/drawing/2014/main" id="{7204D590-C20C-4197-8477-E5F2197B6DED}"/>
+          <p:cNvPr id="48" name="">
+            <a:extLst xmlns:a="http://schemas.openxmlformats.org/drawingml/2006/main">
+              <a:ext uri="{FF2B5EF4-FFF2-40B4-BE49-F238E27FC236}">
+                <a16:creationId xmlns:a16="http://schemas.microsoft.com/office/drawing/2014/main" id="{4DAAC224-51C5-421B-BA42-8329BB83F293}"/>
               </a:ext>
             </a:extLst>
           </p:cNvPr>
@@ -6396,10 +6453,10 @@
       </p:sp>
       <p:sp>
         <p:nvSpPr>
-          <p:cNvPr id="48" name="">
-            <a:extLst xmlns:a="http://schemas.openxmlformats.org/drawingml/2006/main">
-              <a:ext uri="{FF2B5EF4-FFF2-40B4-BE49-F238E27FC236}">
-                <a16:creationId xmlns:a16="http://schemas.microsoft.com/office/drawing/2014/main" id="{9CFEE508-4D6F-48F8-AA0B-2886DDE6EFA7}"/>
+          <p:cNvPr id="49" name="">
+            <a:extLst xmlns:a="http://schemas.openxmlformats.org/drawingml/2006/main">
+              <a:ext uri="{FF2B5EF4-FFF2-40B4-BE49-F238E27FC236}">
+                <a16:creationId xmlns:a16="http://schemas.microsoft.com/office/drawing/2014/main" id="{A26CDF2A-FD7F-49C8-A69F-2A4935ADD368}"/>
               </a:ext>
             </a:extLst>
           </p:cNvPr>
@@ -6453,10 +6510,10 @@
       </p:sp>
       <p:sp>
         <p:nvSpPr>
-          <p:cNvPr id="49" name="">
-            <a:extLst xmlns:a="http://schemas.openxmlformats.org/drawingml/2006/main">
-              <a:ext uri="{FF2B5EF4-FFF2-40B4-BE49-F238E27FC236}">
-                <a16:creationId xmlns:a16="http://schemas.microsoft.com/office/drawing/2014/main" id="{30B2C314-0D49-4A56-BF40-6D4479132EC5}"/>
+          <p:cNvPr id="50" name="">
+            <a:extLst xmlns:a="http://schemas.openxmlformats.org/drawingml/2006/main">
+              <a:ext uri="{FF2B5EF4-FFF2-40B4-BE49-F238E27FC236}">
+                <a16:creationId xmlns:a16="http://schemas.microsoft.com/office/drawing/2014/main" id="{76ACAC60-5AAA-4118-B518-402F83E23843}"/>
               </a:ext>
             </a:extLst>
           </p:cNvPr>
@@ -6533,10 +6590,10 @@
       </p:sp>
       <p:sp>
         <p:nvSpPr>
-          <p:cNvPr id="50" name="">
-            <a:extLst xmlns:a="http://schemas.openxmlformats.org/drawingml/2006/main">
-              <a:ext uri="{FF2B5EF4-FFF2-40B4-BE49-F238E27FC236}">
-                <a16:creationId xmlns:a16="http://schemas.microsoft.com/office/drawing/2014/main" id="{DA2F7294-372E-4CC0-8E5A-E32263F6F1C3}"/>
+          <p:cNvPr id="51" name="">
+            <a:extLst xmlns:a="http://schemas.openxmlformats.org/drawingml/2006/main">
+              <a:ext uri="{FF2B5EF4-FFF2-40B4-BE49-F238E27FC236}">
+                <a16:creationId xmlns:a16="http://schemas.microsoft.com/office/drawing/2014/main" id="{29AA84BA-2D15-44F2-825A-181036A3E486}"/>
               </a:ext>
             </a:extLst>
           </p:cNvPr>
@@ -6583,17 +6640,17 @@
                 <a:ea typeface="Malgun Gothic"/>
                 <a:cs typeface="Malgun Gothic"/>
               </a:rPr>
-              <a:t>SQLite Task Context</a:t>
-            </a:r>
-          </a:p>
-        </p:txBody>
-      </p:sp>
-      <p:sp>
-        <p:nvSpPr>
-          <p:cNvPr id="51" name="">
-            <a:extLst xmlns:a="http://schemas.openxmlformats.org/drawingml/2006/main">
-              <a:ext uri="{FF2B5EF4-FFF2-40B4-BE49-F238E27FC236}">
-                <a16:creationId xmlns:a16="http://schemas.microsoft.com/office/drawing/2014/main" id="{58400B3E-7E1D-4087-90A9-8BD9F32398C0}"/>
+              <a:t>SQLite Task Context RAG</a:t>
+            </a:r>
+          </a:p>
+        </p:txBody>
+      </p:sp>
+      <p:sp>
+        <p:nvSpPr>
+          <p:cNvPr id="52" name="">
+            <a:extLst xmlns:a="http://schemas.openxmlformats.org/drawingml/2006/main">
+              <a:ext uri="{FF2B5EF4-FFF2-40B4-BE49-F238E27FC236}">
+                <a16:creationId xmlns:a16="http://schemas.microsoft.com/office/drawing/2014/main" id="{E9121261-A367-41D4-B357-ED6A94AA0A09}"/>
               </a:ext>
             </a:extLst>
           </p:cNvPr>
@@ -6617,7 +6674,7 @@
         </p:spPr>
         <p:txBody>
           <a:bodyPr xmlns:a="http://schemas.openxmlformats.org/drawingml/2006/main" anchor="ctr">
-            <a:normAutofit fontScale="99375"/>
+            <a:normAutofit fontScale="77589"/>
           </a:bodyPr>
           <a:lstStyle xmlns:a="http://schemas.openxmlformats.org/drawingml/2006/main"/>
           <a:p xmlns:a="http://schemas.openxmlformats.org/drawingml/2006/main">
@@ -6640,7 +6697,7 @@
                 <a:ea typeface="Malgun Gothic"/>
                 <a:cs typeface="Malgun Gothic"/>
               </a:rPr>
-              <a:t>개인 MVP의 활성 Task·최근 Mail·History만 제한 검색</a:t>
+              <a:t>개인 MVP의 활성 Task·최근 Mail 3건·History 5건·사용자 결정만 제한 검색</a:t>
             </a:r>
           </a:p>
           <a:p xmlns:a="http://schemas.openxmlformats.org/drawingml/2006/main">
@@ -6663,17 +6720,17 @@
                 <a:ea typeface="Malgun Gothic"/>
                 <a:cs typeface="Malgun Gothic"/>
               </a:rPr>
-              <a:t>Vector DB와 외부 Embedding은 사용하지 않음</a:t>
-            </a:r>
-          </a:p>
-        </p:txBody>
-      </p:sp>
-      <p:sp>
-        <p:nvSpPr>
-          <p:cNvPr id="52" name="">
-            <a:extLst xmlns:a="http://schemas.openxmlformats.org/drawingml/2006/main">
-              <a:ext uri="{FF2B5EF4-FFF2-40B4-BE49-F238E27FC236}">
-                <a16:creationId xmlns:a16="http://schemas.microsoft.com/office/drawing/2014/main" id="{ED70D630-8D29-4F52-9DC7-42424445FA26}"/>
+              <a:t>Vector DB와 외부 Embedding은 사용하지 않는 Structured Retrieval</a:t>
+            </a:r>
+          </a:p>
+        </p:txBody>
+      </p:sp>
+      <p:sp>
+        <p:nvSpPr>
+          <p:cNvPr id="53" name="">
+            <a:extLst xmlns:a="http://schemas.openxmlformats.org/drawingml/2006/main">
+              <a:ext uri="{FF2B5EF4-FFF2-40B4-BE49-F238E27FC236}">
+                <a16:creationId xmlns:a16="http://schemas.microsoft.com/office/drawing/2014/main" id="{7FCB778B-4C4C-47FB-99BA-D074AF53872E}"/>
               </a:ext>
             </a:extLst>
           </p:cNvPr>
@@ -6727,10 +6784,10 @@
       </p:sp>
       <p:sp>
         <p:nvSpPr>
-          <p:cNvPr id="53" name="">
-            <a:extLst xmlns:a="http://schemas.openxmlformats.org/drawingml/2006/main">
-              <a:ext uri="{FF2B5EF4-FFF2-40B4-BE49-F238E27FC236}">
-                <a16:creationId xmlns:a16="http://schemas.microsoft.com/office/drawing/2014/main" id="{73907275-2F56-4D96-986B-8692700578C5}"/>
+          <p:cNvPr id="54" name="">
+            <a:extLst xmlns:a="http://schemas.openxmlformats.org/drawingml/2006/main">
+              <a:ext uri="{FF2B5EF4-FFF2-40B4-BE49-F238E27FC236}">
+                <a16:creationId xmlns:a16="http://schemas.microsoft.com/office/drawing/2014/main" id="{E4109BC0-B15C-436F-88F5-1F41BF164FE6}"/>
               </a:ext>
             </a:extLst>
           </p:cNvPr>
@@ -6807,10 +6864,10 @@
       </p:sp>
       <p:sp>
         <p:nvSpPr>
-          <p:cNvPr id="54" name="">
-            <a:extLst xmlns:a="http://schemas.openxmlformats.org/drawingml/2006/main">
-              <a:ext uri="{FF2B5EF4-FFF2-40B4-BE49-F238E27FC236}">
-                <a16:creationId xmlns:a16="http://schemas.microsoft.com/office/drawing/2014/main" id="{153CEF55-9B18-43A4-BCE4-6197D2D3198A}"/>
+          <p:cNvPr id="55" name="">
+            <a:extLst xmlns:a="http://schemas.openxmlformats.org/drawingml/2006/main">
+              <a:ext uri="{FF2B5EF4-FFF2-40B4-BE49-F238E27FC236}">
+                <a16:creationId xmlns:a16="http://schemas.microsoft.com/office/drawing/2014/main" id="{7838BF10-383F-4C63-928A-DC1E3F621D1B}"/>
               </a:ext>
             </a:extLst>
           </p:cNvPr>
@@ -6839,10 +6896,10 @@
       </p:sp>
       <p:sp>
         <p:nvSpPr>
-          <p:cNvPr id="55" name="">
-            <a:extLst xmlns:a="http://schemas.openxmlformats.org/drawingml/2006/main">
-              <a:ext uri="{FF2B5EF4-FFF2-40B4-BE49-F238E27FC236}">
-                <a16:creationId xmlns:a16="http://schemas.microsoft.com/office/drawing/2014/main" id="{A32EAF97-3414-4FEC-ACE4-67DF5AF220AE}"/>
+          <p:cNvPr id="56" name="">
+            <a:extLst xmlns:a="http://schemas.openxmlformats.org/drawingml/2006/main">
+              <a:ext uri="{FF2B5EF4-FFF2-40B4-BE49-F238E27FC236}">
+                <a16:creationId xmlns:a16="http://schemas.microsoft.com/office/drawing/2014/main" id="{E76480E4-25AA-4F00-B09A-8796F192FF0E}"/>
               </a:ext>
             </a:extLst>
           </p:cNvPr>
@@ -6897,7 +6954,7 @@
     </p:spTree>
     <p:extLst>
       <p:ext uri="{BB962C8B-B14F-4D97-AF65-F5344CB8AC3E}">
-        <p14:creationId xmlns:p14="http://schemas.microsoft.com/office/powerpoint/2010/main" val="1605083949"/>
+        <p14:creationId xmlns:p14="http://schemas.microsoft.com/office/powerpoint/2010/main" val="671958288"/>
       </p:ext>
     </p:extLst>
   </p:cSld>
@@ -6928,7 +6985,7 @@
           <p:cNvPr id="44" name="">
             <a:extLst xmlns:a="http://schemas.openxmlformats.org/drawingml/2006/main">
               <a:ext uri="{FF2B5EF4-FFF2-40B4-BE49-F238E27FC236}">
-                <a16:creationId xmlns:a16="http://schemas.microsoft.com/office/drawing/2014/main" id="{1A8E5463-927D-4E70-AC5C-D1FF0B6A36F5}"/>
+                <a16:creationId xmlns:a16="http://schemas.microsoft.com/office/drawing/2014/main" id="{D45EA8FE-718C-4A7E-9300-30B7A19D70F5}"/>
               </a:ext>
             </a:extLst>
           </p:cNvPr>
@@ -6958,7 +7015,7 @@
           <p:cNvPr id="2" name="">
             <a:extLst xmlns:a="http://schemas.openxmlformats.org/drawingml/2006/main">
               <a:ext uri="{FF2B5EF4-FFF2-40B4-BE49-F238E27FC236}">
-                <a16:creationId xmlns:a16="http://schemas.microsoft.com/office/drawing/2014/main" id="{94A65D72-0C40-4472-A068-4BCD016DB531}"/>
+                <a16:creationId xmlns:a16="http://schemas.microsoft.com/office/drawing/2014/main" id="{8BD59600-4BBC-4D26-9795-9604A15C7E2D}"/>
               </a:ext>
             </a:extLst>
           </p:cNvPr>
@@ -7015,7 +7072,7 @@
           <p:cNvPr id="3" name="">
             <a:extLst xmlns:a="http://schemas.openxmlformats.org/drawingml/2006/main">
               <a:ext uri="{FF2B5EF4-FFF2-40B4-BE49-F238E27FC236}">
-                <a16:creationId xmlns:a16="http://schemas.microsoft.com/office/drawing/2014/main" id="{9C7D90A4-F6E6-4286-8FFB-460C9222EA12}"/>
+                <a16:creationId xmlns:a16="http://schemas.microsoft.com/office/drawing/2014/main" id="{380662E1-0A63-42E6-9E82-0C2254C314E7}"/>
               </a:ext>
             </a:extLst>
           </p:cNvPr>
@@ -7045,7 +7102,7 @@
           <p:cNvPr id="4" name="">
             <a:extLst xmlns:a="http://schemas.openxmlformats.org/drawingml/2006/main">
               <a:ext uri="{FF2B5EF4-FFF2-40B4-BE49-F238E27FC236}">
-                <a16:creationId xmlns:a16="http://schemas.microsoft.com/office/drawing/2014/main" id="{9F00922A-C5EA-445A-A094-86E5BD5D6DD6}"/>
+                <a16:creationId xmlns:a16="http://schemas.microsoft.com/office/drawing/2014/main" id="{DA2BCA77-4294-46D9-852A-3FB8EC2CA539}"/>
               </a:ext>
             </a:extLst>
           </p:cNvPr>
@@ -7102,7 +7159,7 @@
           <p:cNvPr id="5" name="">
             <a:extLst xmlns:a="http://schemas.openxmlformats.org/drawingml/2006/main">
               <a:ext uri="{FF2B5EF4-FFF2-40B4-BE49-F238E27FC236}">
-                <a16:creationId xmlns:a16="http://schemas.microsoft.com/office/drawing/2014/main" id="{C1E84083-C660-4444-9273-CB37D0387C18}"/>
+                <a16:creationId xmlns:a16="http://schemas.microsoft.com/office/drawing/2014/main" id="{E39F366E-506B-490E-BFF1-5804212885C7}"/>
               </a:ext>
             </a:extLst>
           </p:cNvPr>
@@ -7159,7 +7216,7 @@
           <p:cNvPr id="6" name="">
             <a:extLst xmlns:a="http://schemas.openxmlformats.org/drawingml/2006/main">
               <a:ext uri="{FF2B5EF4-FFF2-40B4-BE49-F238E27FC236}">
-                <a16:creationId xmlns:a16="http://schemas.microsoft.com/office/drawing/2014/main" id="{532627FE-52FF-43F9-88C7-007668B5FFED}"/>
+                <a16:creationId xmlns:a16="http://schemas.microsoft.com/office/drawing/2014/main" id="{77685EFF-5BCA-404B-A196-021AECE10538}"/>
               </a:ext>
             </a:extLst>
           </p:cNvPr>
@@ -7216,7 +7273,7 @@
           <p:cNvPr id="7" name="">
             <a:extLst xmlns:a="http://schemas.openxmlformats.org/drawingml/2006/main">
               <a:ext uri="{FF2B5EF4-FFF2-40B4-BE49-F238E27FC236}">
-                <a16:creationId xmlns:a16="http://schemas.microsoft.com/office/drawing/2014/main" id="{1004D057-12B3-4230-8E83-576B8F43E11C}"/>
+                <a16:creationId xmlns:a16="http://schemas.microsoft.com/office/drawing/2014/main" id="{DBEDFF91-9E6B-44C8-B842-4B63986E4A30}"/>
               </a:ext>
             </a:extLst>
           </p:cNvPr>
@@ -7246,7 +7303,7 @@
           <p:cNvPr id="8" name="">
             <a:extLst xmlns:a="http://schemas.openxmlformats.org/drawingml/2006/main">
               <a:ext uri="{FF2B5EF4-FFF2-40B4-BE49-F238E27FC236}">
-                <a16:creationId xmlns:a16="http://schemas.microsoft.com/office/drawing/2014/main" id="{CF4E4544-4988-4583-9095-78559460546F}"/>
+                <a16:creationId xmlns:a16="http://schemas.microsoft.com/office/drawing/2014/main" id="{0E9BD3E0-E427-4AB1-80C8-FD0BF3A88558}"/>
               </a:ext>
             </a:extLst>
           </p:cNvPr>
@@ -7303,7 +7360,7 @@
           <p:cNvPr id="9" name="">
             <a:extLst xmlns:a="http://schemas.openxmlformats.org/drawingml/2006/main">
               <a:ext uri="{FF2B5EF4-FFF2-40B4-BE49-F238E27FC236}">
-                <a16:creationId xmlns:a16="http://schemas.microsoft.com/office/drawing/2014/main" id="{2ACD1D50-B7AA-4F7F-8548-4E9B0865DFBF}"/>
+                <a16:creationId xmlns:a16="http://schemas.microsoft.com/office/drawing/2014/main" id="{1A722D93-1DE7-47F0-918C-95CDCBB4DC49}"/>
               </a:ext>
             </a:extLst>
           </p:cNvPr>
@@ -7350,7 +7407,7 @@
                 <a:ea typeface="Malgun Gothic"/>
                 <a:cs typeface="Malgun Gothic"/>
               </a:rPr>
-              <a:t>적용 기법  |  Bounded Multi-Hypothesis Deliberation</a:t>
+              <a:t>적용 기법  |  Bounded Deliberation + 제한적 ReAct Self-Correction</a:t>
             </a:r>
           </a:p>
         </p:txBody>
@@ -7360,7 +7417,7 @@
           <p:cNvPr id="10" name="">
             <a:extLst xmlns:a="http://schemas.openxmlformats.org/drawingml/2006/main">
               <a:ext uri="{FF2B5EF4-FFF2-40B4-BE49-F238E27FC236}">
-                <a16:creationId xmlns:a16="http://schemas.microsoft.com/office/drawing/2014/main" id="{46A90536-5F15-46F2-B2FC-3A646163C344}"/>
+                <a16:creationId xmlns:a16="http://schemas.microsoft.com/office/drawing/2014/main" id="{F16D4674-DE55-4740-8006-96AA05EBB2E9}"/>
               </a:ext>
             </a:extLst>
           </p:cNvPr>
@@ -7384,7 +7441,7 @@
         </p:spPr>
         <p:txBody>
           <a:bodyPr xmlns:a="http://schemas.openxmlformats.org/drawingml/2006/main" anchor="ctr">
-            <a:normAutofit fontScale="69296"/>
+            <a:normAutofit fontScale="68663"/>
           </a:bodyPr>
           <a:lstStyle xmlns:a="http://schemas.openxmlformats.org/drawingml/2006/main"/>
           <a:p xmlns:a="http://schemas.openxmlformats.org/drawingml/2006/main">
@@ -7407,7 +7464,7 @@
                 <a:ea typeface="Malgun Gothic"/>
                 <a:cs typeface="Malgun Gothic"/>
               </a:rPr>
-              <a:t>Tree of Thoughts(Yao et al., NeurIPS 2023)의 후보 생성·평가 분리 아이디어를 참고하되, 후보 2~3개·평가 1회·재검색 1회로 제한했습니다. Full Tree of Thoughts 구현은 아닙니다.</a:t>
+              <a:t>Deliberation은 한 번의 Reason 안에서 후보를 견주는 단계이고, ReAct는 그 판단을 Retrieve·Act·Observe로 감싸는 바깥 Loop입니다. Tree of Thoughts(Yao et al., NeurIPS 2023)의 후보 생성·평가 분리를 참고하되 후보 2~3개·평가 1회·재검색 1회로 제한했고, Full Tree of Thoughts 구현은 아닙니다.</a:t>
             </a:r>
           </a:p>
         </p:txBody>
@@ -7417,7 +7474,7 @@
           <p:cNvPr id="11" name="">
             <a:extLst xmlns:a="http://schemas.openxmlformats.org/drawingml/2006/main">
               <a:ext uri="{FF2B5EF4-FFF2-40B4-BE49-F238E27FC236}">
-                <a16:creationId xmlns:a16="http://schemas.microsoft.com/office/drawing/2014/main" id="{0446A811-D1BC-4DB8-A776-5E3A53FF1946}"/>
+                <a16:creationId xmlns:a16="http://schemas.microsoft.com/office/drawing/2014/main" id="{6994D7A4-50E1-4FB9-81D4-CF15053C8291}"/>
               </a:ext>
             </a:extLst>
           </p:cNvPr>
@@ -7449,7 +7506,7 @@
           <p:cNvPr id="12" name="">
             <a:extLst xmlns:a="http://schemas.openxmlformats.org/drawingml/2006/main">
               <a:ext uri="{FF2B5EF4-FFF2-40B4-BE49-F238E27FC236}">
-                <a16:creationId xmlns:a16="http://schemas.microsoft.com/office/drawing/2014/main" id="{F3B69393-5C1A-48FB-8E93-05AF33A5C4BE}"/>
+                <a16:creationId xmlns:a16="http://schemas.microsoft.com/office/drawing/2014/main" id="{CBCF50F6-01DF-48D0-B245-DBE393FBDD29}"/>
               </a:ext>
             </a:extLst>
           </p:cNvPr>
@@ -7506,7 +7563,7 @@
           <p:cNvPr id="13" name="">
             <a:extLst xmlns:a="http://schemas.openxmlformats.org/drawingml/2006/main">
               <a:ext uri="{FF2B5EF4-FFF2-40B4-BE49-F238E27FC236}">
-                <a16:creationId xmlns:a16="http://schemas.microsoft.com/office/drawing/2014/main" id="{69E374CF-03E0-41A4-9D04-C954F00A64D5}"/>
+                <a16:creationId xmlns:a16="http://schemas.microsoft.com/office/drawing/2014/main" id="{E758E61B-D2FA-4561-952E-4F103CB71C4E}"/>
               </a:ext>
             </a:extLst>
           </p:cNvPr>
@@ -7518,7 +7575,7 @@
         <p:spPr>
           <a:xfrm xmlns:a="http://schemas.openxmlformats.org/drawingml/2006/main">
             <a:off x="1104900" y="3028950"/>
-            <a:ext cx="1143000" cy="323850"/>
+            <a:ext cx="1866900" cy="323850"/>
           </a:xfrm>
           <a:prstGeom xmlns:a="http://schemas.openxmlformats.org/drawingml/2006/main" prst="rect">
             <a:avLst/>
@@ -7535,7 +7592,7 @@
           <a:lstStyle xmlns:a="http://schemas.openxmlformats.org/drawingml/2006/main"/>
           <a:p xmlns:a="http://schemas.openxmlformats.org/drawingml/2006/main">
             <a:pPr algn="l">
-              <a:defRPr sz="1200" b="1">
+              <a:defRPr sz="1050" b="1">
                 <a:solidFill>
                   <a:srgbClr val="10243E"/>
                 </a:solidFill>
@@ -7545,7 +7602,7 @@
               </a:defRPr>
             </a:pPr>
             <a:r>
-              <a:rPr sz="1200" b="1">
+              <a:rPr sz="1050" b="1">
                 <a:solidFill>
                   <a:srgbClr val="10243E"/>
                 </a:solidFill>
@@ -7553,7 +7610,7 @@
                 <a:ea typeface="Malgun Gothic"/>
                 <a:cs typeface="Malgun Gothic"/>
               </a:rPr>
-              <a:t>입력·검색</a:t>
+              <a:t>Observe · Retrieve</a:t>
             </a:r>
           </a:p>
         </p:txBody>
@@ -7563,19 +7620,19 @@
           <p:cNvPr id="14" name="">
             <a:extLst xmlns:a="http://schemas.openxmlformats.org/drawingml/2006/main">
               <a:ext uri="{FF2B5EF4-FFF2-40B4-BE49-F238E27FC236}">
-                <a16:creationId xmlns:a16="http://schemas.microsoft.com/office/drawing/2014/main" id="{37E41965-1781-4203-BC01-699244092CE2}"/>
-              </a:ext>
-            </a:extLst>
-          </p:cNvPr>
-          <p:cNvSpPr>
-            <a:spLocks xmlns:a="http://schemas.openxmlformats.org/drawingml/2006/main" noGrp="1"/>
-          </p:cNvSpPr>
-          <p:nvPr/>
-        </p:nvSpPr>
-        <p:spPr>
-          <a:xfrm xmlns:a="http://schemas.openxmlformats.org/drawingml/2006/main">
-            <a:off x="2343150" y="3028950"/>
-            <a:ext cx="8763000" cy="323850"/>
+                <a16:creationId xmlns:a16="http://schemas.microsoft.com/office/drawing/2014/main" id="{6B528EEB-507E-4C9A-831B-D1D04A20FA69}"/>
+              </a:ext>
+            </a:extLst>
+          </p:cNvPr>
+          <p:cNvSpPr>
+            <a:spLocks xmlns:a="http://schemas.openxmlformats.org/drawingml/2006/main" noGrp="1"/>
+          </p:cNvSpPr>
+          <p:nvPr/>
+        </p:nvSpPr>
+        <p:spPr>
+          <a:xfrm xmlns:a="http://schemas.openxmlformats.org/drawingml/2006/main">
+            <a:off x="3067050" y="3028950"/>
+            <a:ext cx="8039100" cy="323850"/>
           </a:xfrm>
           <a:prstGeom xmlns:a="http://schemas.openxmlformats.org/drawingml/2006/main" prst="rect">
             <a:avLst/>
@@ -7610,7 +7667,7 @@
                 <a:ea typeface="Malgun Gothic"/>
                 <a:cs typeface="Malgun Gothic"/>
               </a:rPr>
-              <a:t>현재 Mail + 활성 Task + 최근 Mail 3건 + History 5건</a:t>
+              <a:t>현재 Mail 관찰 + SQLite Task Context RAG로 활성 Task·최근 Mail 3건·History 5건 검색</a:t>
             </a:r>
           </a:p>
         </p:txBody>
@@ -7620,7 +7677,7 @@
           <p:cNvPr id="15" name="">
             <a:extLst xmlns:a="http://schemas.openxmlformats.org/drawingml/2006/main">
               <a:ext uri="{FF2B5EF4-FFF2-40B4-BE49-F238E27FC236}">
-                <a16:creationId xmlns:a16="http://schemas.microsoft.com/office/drawing/2014/main" id="{13D6C6A7-D27F-494F-B449-AE136F404FE7}"/>
+                <a16:creationId xmlns:a16="http://schemas.microsoft.com/office/drawing/2014/main" id="{915DFB29-BB19-42AA-9933-A700A5E9E4A3}"/>
               </a:ext>
             </a:extLst>
           </p:cNvPr>
@@ -7652,7 +7709,7 @@
           <p:cNvPr id="16" name="">
             <a:extLst xmlns:a="http://schemas.openxmlformats.org/drawingml/2006/main">
               <a:ext uri="{FF2B5EF4-FFF2-40B4-BE49-F238E27FC236}">
-                <a16:creationId xmlns:a16="http://schemas.microsoft.com/office/drawing/2014/main" id="{A2A8FAE9-38B2-443C-A6EF-55902960139E}"/>
+                <a16:creationId xmlns:a16="http://schemas.microsoft.com/office/drawing/2014/main" id="{937F272D-5DCC-4315-A531-BD6616A0BBBF}"/>
               </a:ext>
             </a:extLst>
           </p:cNvPr>
@@ -7709,7 +7766,7 @@
           <p:cNvPr id="17" name="">
             <a:extLst xmlns:a="http://schemas.openxmlformats.org/drawingml/2006/main">
               <a:ext uri="{FF2B5EF4-FFF2-40B4-BE49-F238E27FC236}">
-                <a16:creationId xmlns:a16="http://schemas.microsoft.com/office/drawing/2014/main" id="{4B6ABF83-7FB4-43C2-9BAE-705715729124}"/>
+                <a16:creationId xmlns:a16="http://schemas.microsoft.com/office/drawing/2014/main" id="{7CD6B9E3-D0D4-4405-8AFE-A33FB8310822}"/>
               </a:ext>
             </a:extLst>
           </p:cNvPr>
@@ -7721,7 +7778,7 @@
         <p:spPr>
           <a:xfrm xmlns:a="http://schemas.openxmlformats.org/drawingml/2006/main">
             <a:off x="1104900" y="3409950"/>
-            <a:ext cx="1143000" cy="323850"/>
+            <a:ext cx="1866900" cy="323850"/>
           </a:xfrm>
           <a:prstGeom xmlns:a="http://schemas.openxmlformats.org/drawingml/2006/main" prst="rect">
             <a:avLst/>
@@ -7738,7 +7795,7 @@
           <a:lstStyle xmlns:a="http://schemas.openxmlformats.org/drawingml/2006/main"/>
           <a:p xmlns:a="http://schemas.openxmlformats.org/drawingml/2006/main">
             <a:pPr algn="l">
-              <a:defRPr sz="1200" b="1">
+              <a:defRPr sz="1050" b="1">
                 <a:solidFill>
                   <a:srgbClr val="10243E"/>
                 </a:solidFill>
@@ -7748,7 +7805,7 @@
               </a:defRPr>
             </a:pPr>
             <a:r>
-              <a:rPr sz="1200" b="1">
+              <a:rPr sz="1050" b="1">
                 <a:solidFill>
                   <a:srgbClr val="10243E"/>
                 </a:solidFill>
@@ -7756,7 +7813,7 @@
                 <a:ea typeface="Malgun Gothic"/>
                 <a:cs typeface="Malgun Gothic"/>
               </a:rPr>
-              <a:t>가설 생성</a:t>
+              <a:t>Reason · 가설 생성</a:t>
             </a:r>
           </a:p>
         </p:txBody>
@@ -7766,19 +7823,19 @@
           <p:cNvPr id="18" name="">
             <a:extLst xmlns:a="http://schemas.openxmlformats.org/drawingml/2006/main">
               <a:ext uri="{FF2B5EF4-FFF2-40B4-BE49-F238E27FC236}">
-                <a16:creationId xmlns:a16="http://schemas.microsoft.com/office/drawing/2014/main" id="{C1FBD23A-DEA4-4D7E-966B-6E619A6024A0}"/>
-              </a:ext>
-            </a:extLst>
-          </p:cNvPr>
-          <p:cNvSpPr>
-            <a:spLocks xmlns:a="http://schemas.openxmlformats.org/drawingml/2006/main" noGrp="1"/>
-          </p:cNvSpPr>
-          <p:nvPr/>
-        </p:nvSpPr>
-        <p:spPr>
-          <a:xfrm xmlns:a="http://schemas.openxmlformats.org/drawingml/2006/main">
-            <a:off x="2343150" y="3409950"/>
-            <a:ext cx="8763000" cy="323850"/>
+                <a16:creationId xmlns:a16="http://schemas.microsoft.com/office/drawing/2014/main" id="{11A09723-3B0D-4F93-A163-8AEF8350C6AA}"/>
+              </a:ext>
+            </a:extLst>
+          </p:cNvPr>
+          <p:cNvSpPr>
+            <a:spLocks xmlns:a="http://schemas.openxmlformats.org/drawingml/2006/main" noGrp="1"/>
+          </p:cNvSpPr>
+          <p:nvPr/>
+        </p:nvSpPr>
+        <p:spPr>
+          <a:xfrm xmlns:a="http://schemas.openxmlformats.org/drawingml/2006/main">
+            <a:off x="3067050" y="3409950"/>
+            <a:ext cx="8039100" cy="323850"/>
           </a:xfrm>
           <a:prstGeom xmlns:a="http://schemas.openxmlformats.org/drawingml/2006/main" prst="rect">
             <a:avLst/>
@@ -7823,7 +7880,7 @@
           <p:cNvPr id="19" name="">
             <a:extLst xmlns:a="http://schemas.openxmlformats.org/drawingml/2006/main">
               <a:ext uri="{FF2B5EF4-FFF2-40B4-BE49-F238E27FC236}">
-                <a16:creationId xmlns:a16="http://schemas.microsoft.com/office/drawing/2014/main" id="{2B8A4EAC-5665-47EF-8243-9574ACFA36FC}"/>
+                <a16:creationId xmlns:a16="http://schemas.microsoft.com/office/drawing/2014/main" id="{5B18B30F-B1BE-490B-A69F-6825A2E4F58F}"/>
               </a:ext>
             </a:extLst>
           </p:cNvPr>
@@ -7855,7 +7912,7 @@
           <p:cNvPr id="20" name="">
             <a:extLst xmlns:a="http://schemas.openxmlformats.org/drawingml/2006/main">
               <a:ext uri="{FF2B5EF4-FFF2-40B4-BE49-F238E27FC236}">
-                <a16:creationId xmlns:a16="http://schemas.microsoft.com/office/drawing/2014/main" id="{C474EAA1-36A9-4B2C-8173-A28EBABFD8C0}"/>
+                <a16:creationId xmlns:a16="http://schemas.microsoft.com/office/drawing/2014/main" id="{52649182-7600-41B7-8AAF-F5C9829DD3DD}"/>
               </a:ext>
             </a:extLst>
           </p:cNvPr>
@@ -7912,7 +7969,7 @@
           <p:cNvPr id="21" name="">
             <a:extLst xmlns:a="http://schemas.openxmlformats.org/drawingml/2006/main">
               <a:ext uri="{FF2B5EF4-FFF2-40B4-BE49-F238E27FC236}">
-                <a16:creationId xmlns:a16="http://schemas.microsoft.com/office/drawing/2014/main" id="{A8AB63F2-A6C2-48FF-A122-43C71BFBCEE6}"/>
+                <a16:creationId xmlns:a16="http://schemas.microsoft.com/office/drawing/2014/main" id="{66F6EEEC-C706-4503-81D1-673174BB1789}"/>
               </a:ext>
             </a:extLst>
           </p:cNvPr>
@@ -7924,7 +7981,7 @@
         <p:spPr>
           <a:xfrm xmlns:a="http://schemas.openxmlformats.org/drawingml/2006/main">
             <a:off x="1104900" y="3790950"/>
-            <a:ext cx="1143000" cy="323850"/>
+            <a:ext cx="1866900" cy="323850"/>
           </a:xfrm>
           <a:prstGeom xmlns:a="http://schemas.openxmlformats.org/drawingml/2006/main" prst="rect">
             <a:avLst/>
@@ -7941,7 +7998,7 @@
           <a:lstStyle xmlns:a="http://schemas.openxmlformats.org/drawingml/2006/main"/>
           <a:p xmlns:a="http://schemas.openxmlformats.org/drawingml/2006/main">
             <a:pPr algn="l">
-              <a:defRPr sz="1200" b="1">
+              <a:defRPr sz="1050" b="1">
                 <a:solidFill>
                   <a:srgbClr val="10243E"/>
                 </a:solidFill>
@@ -7951,7 +8008,7 @@
               </a:defRPr>
             </a:pPr>
             <a:r>
-              <a:rPr sz="1200" b="1">
+              <a:rPr sz="1050" b="1">
                 <a:solidFill>
                   <a:srgbClr val="10243E"/>
                 </a:solidFill>
@@ -7959,7 +8016,7 @@
                 <a:ea typeface="Malgun Gothic"/>
                 <a:cs typeface="Malgun Gothic"/>
               </a:rPr>
-              <a:t>검증·평가</a:t>
+              <a:t>Reason · 검증·평가</a:t>
             </a:r>
           </a:p>
         </p:txBody>
@@ -7969,19 +8026,19 @@
           <p:cNvPr id="22" name="">
             <a:extLst xmlns:a="http://schemas.openxmlformats.org/drawingml/2006/main">
               <a:ext uri="{FF2B5EF4-FFF2-40B4-BE49-F238E27FC236}">
-                <a16:creationId xmlns:a16="http://schemas.microsoft.com/office/drawing/2014/main" id="{EB5C9C32-82D4-4029-BFD4-7DC0D927D94C}"/>
-              </a:ext>
-            </a:extLst>
-          </p:cNvPr>
-          <p:cNvSpPr>
-            <a:spLocks xmlns:a="http://schemas.openxmlformats.org/drawingml/2006/main" noGrp="1"/>
-          </p:cNvSpPr>
-          <p:nvPr/>
-        </p:nvSpPr>
-        <p:spPr>
-          <a:xfrm xmlns:a="http://schemas.openxmlformats.org/drawingml/2006/main">
-            <a:off x="2343150" y="3790950"/>
-            <a:ext cx="8763000" cy="323850"/>
+                <a16:creationId xmlns:a16="http://schemas.microsoft.com/office/drawing/2014/main" id="{446A9631-1B36-4CE2-BBE9-00EF581BDEAB}"/>
+              </a:ext>
+            </a:extLst>
+          </p:cNvPr>
+          <p:cNvSpPr>
+            <a:spLocks xmlns:a="http://schemas.openxmlformats.org/drawingml/2006/main" noGrp="1"/>
+          </p:cNvSpPr>
+          <p:nvPr/>
+        </p:nvSpPr>
+        <p:spPr>
+          <a:xfrm xmlns:a="http://schemas.openxmlformats.org/drawingml/2006/main">
+            <a:off x="3067050" y="3790950"/>
+            <a:ext cx="8039100" cy="323850"/>
           </a:xfrm>
           <a:prstGeom xmlns:a="http://schemas.openxmlformats.org/drawingml/2006/main" prst="rect">
             <a:avLst/>
@@ -8026,7 +8083,7 @@
           <p:cNvPr id="23" name="">
             <a:extLst xmlns:a="http://schemas.openxmlformats.org/drawingml/2006/main">
               <a:ext uri="{FF2B5EF4-FFF2-40B4-BE49-F238E27FC236}">
-                <a16:creationId xmlns:a16="http://schemas.microsoft.com/office/drawing/2014/main" id="{99151312-696A-4AE2-B5C5-14FC8436CAB2}"/>
+                <a16:creationId xmlns:a16="http://schemas.microsoft.com/office/drawing/2014/main" id="{9A34C278-8B83-418D-83E9-5ED1B08899A9}"/>
               </a:ext>
             </a:extLst>
           </p:cNvPr>
@@ -8058,7 +8115,7 @@
           <p:cNvPr id="24" name="">
             <a:extLst xmlns:a="http://schemas.openxmlformats.org/drawingml/2006/main">
               <a:ext uri="{FF2B5EF4-FFF2-40B4-BE49-F238E27FC236}">
-                <a16:creationId xmlns:a16="http://schemas.microsoft.com/office/drawing/2014/main" id="{22F34A14-668C-4AF0-A963-CB74BB3CB64E}"/>
+                <a16:creationId xmlns:a16="http://schemas.microsoft.com/office/drawing/2014/main" id="{14203EBB-5D4D-411C-87BE-EA9EFCF75FC6}"/>
               </a:ext>
             </a:extLst>
           </p:cNvPr>
@@ -8115,7 +8172,7 @@
           <p:cNvPr id="25" name="">
             <a:extLst xmlns:a="http://schemas.openxmlformats.org/drawingml/2006/main">
               <a:ext uri="{FF2B5EF4-FFF2-40B4-BE49-F238E27FC236}">
-                <a16:creationId xmlns:a16="http://schemas.microsoft.com/office/drawing/2014/main" id="{9ABD96F5-9267-4A09-B950-C0007D0F40FE}"/>
+                <a16:creationId xmlns:a16="http://schemas.microsoft.com/office/drawing/2014/main" id="{26686297-ADAC-4236-BD5F-1D19F8302BCB}"/>
               </a:ext>
             </a:extLst>
           </p:cNvPr>
@@ -8127,24 +8184,24 @@
         <p:spPr>
           <a:xfrm xmlns:a="http://schemas.openxmlformats.org/drawingml/2006/main">
             <a:off x="1104900" y="4171950"/>
-            <a:ext cx="1143000" cy="323850"/>
-          </a:xfrm>
-          <a:prstGeom xmlns:a="http://schemas.openxmlformats.org/drawingml/2006/main" prst="rect">
-            <a:avLst/>
-          </a:prstGeom>
-          <a:noFill xmlns:a="http://schemas.openxmlformats.org/drawingml/2006/main"/>
-          <a:ln xmlns:a="http://schemas.openxmlformats.org/drawingml/2006/main" w="0">
-            <a:noFill/>
-          </a:ln>
-        </p:spPr>
-        <p:txBody>
-          <a:bodyPr xmlns:a="http://schemas.openxmlformats.org/drawingml/2006/main" anchor="ctr">
-            <a:normAutofit fontScale="63542"/>
+            <a:ext cx="1866900" cy="323850"/>
+          </a:xfrm>
+          <a:prstGeom xmlns:a="http://schemas.openxmlformats.org/drawingml/2006/main" prst="rect">
+            <a:avLst/>
+          </a:prstGeom>
+          <a:noFill xmlns:a="http://schemas.openxmlformats.org/drawingml/2006/main"/>
+          <a:ln xmlns:a="http://schemas.openxmlformats.org/drawingml/2006/main" w="0">
+            <a:noFill/>
+          </a:ln>
+        </p:spPr>
+        <p:txBody>
+          <a:bodyPr xmlns:a="http://schemas.openxmlformats.org/drawingml/2006/main" anchor="ctr">
+            <a:normAutofit fontScale="100000"/>
           </a:bodyPr>
           <a:lstStyle xmlns:a="http://schemas.openxmlformats.org/drawingml/2006/main"/>
           <a:p xmlns:a="http://schemas.openxmlformats.org/drawingml/2006/main">
             <a:pPr algn="l">
-              <a:defRPr sz="1200" b="1">
+              <a:defRPr sz="1050" b="1">
                 <a:solidFill>
                   <a:srgbClr val="10243E"/>
                 </a:solidFill>
@@ -8154,7 +8211,7 @@
               </a:defRPr>
             </a:pPr>
             <a:r>
-              <a:rPr sz="1200" b="1">
+              <a:rPr sz="1050" b="1">
                 <a:solidFill>
                   <a:srgbClr val="10243E"/>
                 </a:solidFill>
@@ -8162,7 +8219,7 @@
                 <a:ea typeface="Malgun Gothic"/>
                 <a:cs typeface="Malgun Gothic"/>
               </a:rPr>
-              <a:t>재판단 · Self-Correction</a:t>
+              <a:t>Self-Correction</a:t>
             </a:r>
           </a:p>
         </p:txBody>
@@ -8172,19 +8229,19 @@
           <p:cNvPr id="26" name="">
             <a:extLst xmlns:a="http://schemas.openxmlformats.org/drawingml/2006/main">
               <a:ext uri="{FF2B5EF4-FFF2-40B4-BE49-F238E27FC236}">
-                <a16:creationId xmlns:a16="http://schemas.microsoft.com/office/drawing/2014/main" id="{1BFDB32A-567E-4B21-9219-16DCDA7C039D}"/>
-              </a:ext>
-            </a:extLst>
-          </p:cNvPr>
-          <p:cNvSpPr>
-            <a:spLocks xmlns:a="http://schemas.openxmlformats.org/drawingml/2006/main" noGrp="1"/>
-          </p:cNvSpPr>
-          <p:nvPr/>
-        </p:nvSpPr>
-        <p:spPr>
-          <a:xfrm xmlns:a="http://schemas.openxmlformats.org/drawingml/2006/main">
-            <a:off x="2343150" y="4171950"/>
-            <a:ext cx="8763000" cy="323850"/>
+                <a16:creationId xmlns:a16="http://schemas.microsoft.com/office/drawing/2014/main" id="{986F2152-762D-4FFF-BE18-E7650F0A26A9}"/>
+              </a:ext>
+            </a:extLst>
+          </p:cNvPr>
+          <p:cNvSpPr>
+            <a:spLocks xmlns:a="http://schemas.openxmlformats.org/drawingml/2006/main" noGrp="1"/>
+          </p:cNvSpPr>
+          <p:nvPr/>
+        </p:nvSpPr>
+        <p:spPr>
+          <a:xfrm xmlns:a="http://schemas.openxmlformats.org/drawingml/2006/main">
+            <a:off x="3067050" y="4171950"/>
+            <a:ext cx="8039100" cy="323850"/>
           </a:xfrm>
           <a:prstGeom xmlns:a="http://schemas.openxmlformats.org/drawingml/2006/main" prst="rect">
             <a:avLst/>
@@ -8219,7 +8276,7 @@
                 <a:ea typeface="Malgun Gothic"/>
                 <a:cs typeface="Malgun Gothic"/>
               </a:rPr>
-              <a:t>모호·저신뢰이거나 선택 차이가 작으면 Query Rewrite 후 재검색을 최대 1회 수행</a:t>
+              <a:t>모호·저신뢰이거나 선택 차이가 작으면 Query Rewrite → Context 재검색 → 재판단, 최대 1회</a:t>
             </a:r>
           </a:p>
         </p:txBody>
@@ -8229,7 +8286,7 @@
           <p:cNvPr id="27" name="">
             <a:extLst xmlns:a="http://schemas.openxmlformats.org/drawingml/2006/main">
               <a:ext uri="{FF2B5EF4-FFF2-40B4-BE49-F238E27FC236}">
-                <a16:creationId xmlns:a16="http://schemas.microsoft.com/office/drawing/2014/main" id="{269B9315-CB9F-4462-B8A5-06BB5A470B99}"/>
+                <a16:creationId xmlns:a16="http://schemas.microsoft.com/office/drawing/2014/main" id="{F9189868-CBFD-4D8B-A7CB-EDF5ACC1A2EA}"/>
               </a:ext>
             </a:extLst>
           </p:cNvPr>
@@ -8261,7 +8318,7 @@
           <p:cNvPr id="28" name="">
             <a:extLst xmlns:a="http://schemas.openxmlformats.org/drawingml/2006/main">
               <a:ext uri="{FF2B5EF4-FFF2-40B4-BE49-F238E27FC236}">
-                <a16:creationId xmlns:a16="http://schemas.microsoft.com/office/drawing/2014/main" id="{6CB85C91-64E5-4F65-A9CC-FB31BE9C00C4}"/>
+                <a16:creationId xmlns:a16="http://schemas.microsoft.com/office/drawing/2014/main" id="{8C73E783-A828-4375-A658-A3D1FE533BC4}"/>
               </a:ext>
             </a:extLst>
           </p:cNvPr>
@@ -8318,7 +8375,7 @@
           <p:cNvPr id="29" name="">
             <a:extLst xmlns:a="http://schemas.openxmlformats.org/drawingml/2006/main">
               <a:ext uri="{FF2B5EF4-FFF2-40B4-BE49-F238E27FC236}">
-                <a16:creationId xmlns:a16="http://schemas.microsoft.com/office/drawing/2014/main" id="{844C01A9-0414-49B1-87B9-A03C1EE83BDA}"/>
+                <a16:creationId xmlns:a16="http://schemas.microsoft.com/office/drawing/2014/main" id="{96D70B26-2BD2-4E67-8349-BF8580236D11}"/>
               </a:ext>
             </a:extLst>
           </p:cNvPr>
@@ -8330,7 +8387,7 @@
         <p:spPr>
           <a:xfrm xmlns:a="http://schemas.openxmlformats.org/drawingml/2006/main">
             <a:off x="1104900" y="4552950"/>
-            <a:ext cx="1143000" cy="323850"/>
+            <a:ext cx="1866900" cy="323850"/>
           </a:xfrm>
           <a:prstGeom xmlns:a="http://schemas.openxmlformats.org/drawingml/2006/main" prst="rect">
             <a:avLst/>
@@ -8343,6 +8400,234 @@
         <p:txBody>
           <a:bodyPr xmlns:a="http://schemas.openxmlformats.org/drawingml/2006/main" anchor="ctr">
             <a:normAutofit fontScale="100000"/>
+          </a:bodyPr>
+          <a:lstStyle xmlns:a="http://schemas.openxmlformats.org/drawingml/2006/main"/>
+          <a:p xmlns:a="http://schemas.openxmlformats.org/drawingml/2006/main">
+            <a:pPr algn="l">
+              <a:defRPr sz="1050" b="1">
+                <a:solidFill>
+                  <a:srgbClr val="10243E"/>
+                </a:solidFill>
+                <a:latin typeface="Malgun Gothic"/>
+                <a:ea typeface="Malgun Gothic"/>
+                <a:cs typeface="Malgun Gothic"/>
+              </a:defRPr>
+            </a:pPr>
+            <a:r>
+              <a:rPr sz="1050" b="1">
+                <a:solidFill>
+                  <a:srgbClr val="10243E"/>
+                </a:solidFill>
+                <a:latin typeface="Malgun Gothic"/>
+                <a:ea typeface="Malgun Gothic"/>
+                <a:cs typeface="Malgun Gothic"/>
+              </a:rPr>
+              <a:t>Act · Observe</a:t>
+            </a:r>
+          </a:p>
+        </p:txBody>
+      </p:sp>
+      <p:sp>
+        <p:nvSpPr>
+          <p:cNvPr id="30" name="">
+            <a:extLst xmlns:a="http://schemas.openxmlformats.org/drawingml/2006/main">
+              <a:ext uri="{FF2B5EF4-FFF2-40B4-BE49-F238E27FC236}">
+                <a16:creationId xmlns:a16="http://schemas.microsoft.com/office/drawing/2014/main" id="{3A9888DF-72CD-4A2E-83C2-ADC82D95F408}"/>
+              </a:ext>
+            </a:extLst>
+          </p:cNvPr>
+          <p:cNvSpPr>
+            <a:spLocks xmlns:a="http://schemas.openxmlformats.org/drawingml/2006/main" noGrp="1"/>
+          </p:cNvSpPr>
+          <p:nvPr/>
+        </p:nvSpPr>
+        <p:spPr>
+          <a:xfrm xmlns:a="http://schemas.openxmlformats.org/drawingml/2006/main">
+            <a:off x="3067050" y="4552950"/>
+            <a:ext cx="8039100" cy="323850"/>
+          </a:xfrm>
+          <a:prstGeom xmlns:a="http://schemas.openxmlformats.org/drawingml/2006/main" prst="rect">
+            <a:avLst/>
+          </a:prstGeom>
+          <a:noFill xmlns:a="http://schemas.openxmlformats.org/drawingml/2006/main"/>
+          <a:ln xmlns:a="http://schemas.openxmlformats.org/drawingml/2006/main" w="0">
+            <a:noFill/>
+          </a:ln>
+        </p:spPr>
+        <p:txBody>
+          <a:bodyPr xmlns:a="http://schemas.openxmlformats.org/drawingml/2006/main" anchor="ctr">
+            <a:normAutofit fontScale="100000"/>
+          </a:bodyPr>
+          <a:lstStyle xmlns:a="http://schemas.openxmlformats.org/drawingml/2006/main"/>
+          <a:p xmlns:a="http://schemas.openxmlformats.org/drawingml/2006/main">
+            <a:pPr algn="l">
+              <a:defRPr sz="1200" b="0">
+                <a:solidFill>
+                  <a:srgbClr val="657187"/>
+                </a:solidFill>
+                <a:latin typeface="Malgun Gothic"/>
+                <a:ea typeface="Malgun Gothic"/>
+                <a:cs typeface="Malgun Gothic"/>
+              </a:defRPr>
+            </a:pPr>
+            <a:r>
+              <a:rPr sz="1200" b="0">
+                <a:solidFill>
+                  <a:srgbClr val="657187"/>
+                </a:solidFill>
+                <a:latin typeface="Malgun Gothic"/>
+                <a:ea typeface="Malgun Gothic"/>
+                <a:cs typeface="Malgun Gothic"/>
+              </a:rPr>
+              <a:t>Python Guard 검증 → DB 실행 또는 ASK_USER → 실제 저장 결과를 다시 조회해 확인</a:t>
+            </a:r>
+          </a:p>
+        </p:txBody>
+      </p:sp>
+      <p:sp>
+        <p:nvSpPr>
+          <p:cNvPr id="31" name="">
+            <a:extLst xmlns:a="http://schemas.openxmlformats.org/drawingml/2006/main">
+              <a:ext uri="{FF2B5EF4-FFF2-40B4-BE49-F238E27FC236}">
+                <a16:creationId xmlns:a16="http://schemas.microsoft.com/office/drawing/2014/main" id="{7370C074-8E85-4CC6-9A02-6788A6960E77}"/>
+              </a:ext>
+            </a:extLst>
+          </p:cNvPr>
+          <p:cNvSpPr>
+            <a:spLocks xmlns:a="http://schemas.openxmlformats.org/drawingml/2006/main" noGrp="1"/>
+          </p:cNvSpPr>
+          <p:nvPr/>
+        </p:nvSpPr>
+        <p:spPr>
+          <a:xfrm xmlns:a="http://schemas.openxmlformats.org/drawingml/2006/main">
+            <a:off x="571500" y="4953000"/>
+            <a:ext cx="8191500" cy="266700"/>
+          </a:xfrm>
+          <a:prstGeom xmlns:a="http://schemas.openxmlformats.org/drawingml/2006/main" prst="rect">
+            <a:avLst/>
+          </a:prstGeom>
+          <a:noFill xmlns:a="http://schemas.openxmlformats.org/drawingml/2006/main"/>
+          <a:ln xmlns:a="http://schemas.openxmlformats.org/drawingml/2006/main" w="0">
+            <a:noFill/>
+          </a:ln>
+        </p:spPr>
+        <p:txBody>
+          <a:bodyPr xmlns:a="http://schemas.openxmlformats.org/drawingml/2006/main" anchor="ctr">
+            <a:normAutofit fontScale="80702"/>
+          </a:bodyPr>
+          <a:lstStyle xmlns:a="http://schemas.openxmlformats.org/drawingml/2006/main"/>
+          <a:p xmlns:a="http://schemas.openxmlformats.org/drawingml/2006/main">
+            <a:pPr algn="l">
+              <a:defRPr sz="1425" b="1">
+                <a:solidFill>
+                  <a:srgbClr val="7657D6"/>
+                </a:solidFill>
+                <a:latin typeface="Malgun Gothic"/>
+                <a:ea typeface="Malgun Gothic"/>
+                <a:cs typeface="Malgun Gothic"/>
+              </a:defRPr>
+            </a:pPr>
+            <a:r>
+              <a:rPr sz="1425" b="1">
+                <a:solidFill>
+                  <a:srgbClr val="7657D6"/>
+                </a:solidFill>
+                <a:latin typeface="Malgun Gothic"/>
+                <a:ea typeface="Malgun Gothic"/>
+                <a:cs typeface="Malgun Gothic"/>
+              </a:rPr>
+              <a:t>같은 Case·같은 코드에서 숙고만 껐다 켠 비교</a:t>
+            </a:r>
+          </a:p>
+        </p:txBody>
+      </p:sp>
+      <p:sp>
+        <p:nvSpPr>
+          <p:cNvPr id="32" name="">
+            <a:extLst xmlns:a="http://schemas.openxmlformats.org/drawingml/2006/main">
+              <a:ext uri="{FF2B5EF4-FFF2-40B4-BE49-F238E27FC236}">
+                <a16:creationId xmlns:a16="http://schemas.microsoft.com/office/drawing/2014/main" id="{F8DCA58E-5BC9-4DAB-AABA-03D51E068222}"/>
+              </a:ext>
+            </a:extLst>
+          </p:cNvPr>
+          <p:cNvSpPr>
+            <a:spLocks xmlns:a="http://schemas.openxmlformats.org/drawingml/2006/main" noGrp="1"/>
+          </p:cNvSpPr>
+          <p:nvPr/>
+        </p:nvSpPr>
+        <p:spPr>
+          <a:xfrm xmlns:a="http://schemas.openxmlformats.org/drawingml/2006/main">
+            <a:off x="571500" y="5295900"/>
+            <a:ext cx="3314700" cy="209550"/>
+          </a:xfrm>
+          <a:prstGeom xmlns:a="http://schemas.openxmlformats.org/drawingml/2006/main" prst="rect">
+            <a:avLst/>
+          </a:prstGeom>
+          <a:noFill xmlns:a="http://schemas.openxmlformats.org/drawingml/2006/main"/>
+          <a:ln xmlns:a="http://schemas.openxmlformats.org/drawingml/2006/main" w="0">
+            <a:noFill/>
+          </a:ln>
+        </p:spPr>
+        <p:txBody>
+          <a:bodyPr xmlns:a="http://schemas.openxmlformats.org/drawingml/2006/main" anchor="ctr">
+            <a:normAutofit fontScale="73809"/>
+          </a:bodyPr>
+          <a:lstStyle xmlns:a="http://schemas.openxmlformats.org/drawingml/2006/main"/>
+          <a:p xmlns:a="http://schemas.openxmlformats.org/drawingml/2006/main">
+            <a:pPr algn="l">
+              <a:defRPr sz="1050" b="1">
+                <a:solidFill>
+                  <a:srgbClr val="1769E0"/>
+                </a:solidFill>
+                <a:latin typeface="Malgun Gothic"/>
+                <a:ea typeface="Malgun Gothic"/>
+                <a:cs typeface="Malgun Gothic"/>
+              </a:defRPr>
+            </a:pPr>
+            <a:r>
+              <a:rPr sz="1050" b="1">
+                <a:solidFill>
+                  <a:srgbClr val="1769E0"/>
+                </a:solidFill>
+                <a:latin typeface="Malgun Gothic"/>
+                <a:ea typeface="Malgun Gothic"/>
+                <a:cs typeface="Malgun Gothic"/>
+              </a:rPr>
+              <a:t>기존 15 Case</a:t>
+            </a:r>
+          </a:p>
+        </p:txBody>
+      </p:sp>
+      <p:sp>
+        <p:nvSpPr>
+          <p:cNvPr id="33" name="">
+            <a:extLst xmlns:a="http://schemas.openxmlformats.org/drawingml/2006/main">
+              <a:ext uri="{FF2B5EF4-FFF2-40B4-BE49-F238E27FC236}">
+                <a16:creationId xmlns:a16="http://schemas.microsoft.com/office/drawing/2014/main" id="{EBD8A046-4D9B-4FAF-85D1-0FAC6231B7AE}"/>
+              </a:ext>
+            </a:extLst>
+          </p:cNvPr>
+          <p:cNvSpPr>
+            <a:spLocks xmlns:a="http://schemas.openxmlformats.org/drawingml/2006/main" noGrp="1"/>
+          </p:cNvSpPr>
+          <p:nvPr/>
+        </p:nvSpPr>
+        <p:spPr>
+          <a:xfrm xmlns:a="http://schemas.openxmlformats.org/drawingml/2006/main">
+            <a:off x="571500" y="5543550"/>
+            <a:ext cx="3314700" cy="228600"/>
+          </a:xfrm>
+          <a:prstGeom xmlns:a="http://schemas.openxmlformats.org/drawingml/2006/main" prst="rect">
+            <a:avLst/>
+          </a:prstGeom>
+          <a:noFill xmlns:a="http://schemas.openxmlformats.org/drawingml/2006/main"/>
+          <a:ln xmlns:a="http://schemas.openxmlformats.org/drawingml/2006/main" w="0">
+            <a:noFill/>
+          </a:ln>
+        </p:spPr>
+        <p:txBody>
+          <a:bodyPr xmlns:a="http://schemas.openxmlformats.org/drawingml/2006/main" anchor="ctr">
+            <a:normAutofit fontScale="75000"/>
           </a:bodyPr>
           <a:lstStyle xmlns:a="http://schemas.openxmlformats.org/drawingml/2006/main"/>
           <a:p xmlns:a="http://schemas.openxmlformats.org/drawingml/2006/main">
@@ -8365,46 +8650,46 @@
                 <a:ea typeface="Malgun Gothic"/>
                 <a:cs typeface="Malgun Gothic"/>
               </a:rPr>
-              <a:t>실행·관찰</a:t>
-            </a:r>
-          </a:p>
-        </p:txBody>
-      </p:sp>
-      <p:sp>
-        <p:nvSpPr>
-          <p:cNvPr id="30" name="">
-            <a:extLst xmlns:a="http://schemas.openxmlformats.org/drawingml/2006/main">
-              <a:ext uri="{FF2B5EF4-FFF2-40B4-BE49-F238E27FC236}">
-                <a16:creationId xmlns:a16="http://schemas.microsoft.com/office/drawing/2014/main" id="{520B667F-B7CE-4B0C-8002-856ACEA7C23B}"/>
-              </a:ext>
-            </a:extLst>
-          </p:cNvPr>
-          <p:cNvSpPr>
-            <a:spLocks xmlns:a="http://schemas.openxmlformats.org/drawingml/2006/main" noGrp="1"/>
-          </p:cNvSpPr>
-          <p:nvPr/>
-        </p:nvSpPr>
-        <p:spPr>
-          <a:xfrm xmlns:a="http://schemas.openxmlformats.org/drawingml/2006/main">
-            <a:off x="2343150" y="4552950"/>
-            <a:ext cx="8763000" cy="323850"/>
-          </a:xfrm>
-          <a:prstGeom xmlns:a="http://schemas.openxmlformats.org/drawingml/2006/main" prst="rect">
-            <a:avLst/>
-          </a:prstGeom>
-          <a:noFill xmlns:a="http://schemas.openxmlformats.org/drawingml/2006/main"/>
-          <a:ln xmlns:a="http://schemas.openxmlformats.org/drawingml/2006/main" w="0">
-            <a:noFill/>
-          </a:ln>
-        </p:spPr>
-        <p:txBody>
-          <a:bodyPr xmlns:a="http://schemas.openxmlformats.org/drawingml/2006/main" anchor="ctr">
-            <a:normAutofit fontScale="100000"/>
+              <a:t>15/15 · Action 28/28</a:t>
+            </a:r>
+          </a:p>
+        </p:txBody>
+      </p:sp>
+      <p:sp>
+        <p:nvSpPr>
+          <p:cNvPr id="34" name="">
+            <a:extLst xmlns:a="http://schemas.openxmlformats.org/drawingml/2006/main">
+              <a:ext uri="{FF2B5EF4-FFF2-40B4-BE49-F238E27FC236}">
+                <a16:creationId xmlns:a16="http://schemas.microsoft.com/office/drawing/2014/main" id="{24217D38-1617-4087-A0FB-3978C494A4D2}"/>
+              </a:ext>
+            </a:extLst>
+          </p:cNvPr>
+          <p:cNvSpPr>
+            <a:spLocks xmlns:a="http://schemas.openxmlformats.org/drawingml/2006/main" noGrp="1"/>
+          </p:cNvSpPr>
+          <p:nvPr/>
+        </p:nvSpPr>
+        <p:spPr>
+          <a:xfrm xmlns:a="http://schemas.openxmlformats.org/drawingml/2006/main">
+            <a:off x="571500" y="5810250"/>
+            <a:ext cx="3314700" cy="209550"/>
+          </a:xfrm>
+          <a:prstGeom xmlns:a="http://schemas.openxmlformats.org/drawingml/2006/main" prst="rect">
+            <a:avLst/>
+          </a:prstGeom>
+          <a:noFill xmlns:a="http://schemas.openxmlformats.org/drawingml/2006/main"/>
+          <a:ln xmlns:a="http://schemas.openxmlformats.org/drawingml/2006/main" w="0">
+            <a:noFill/>
+          </a:ln>
+        </p:spPr>
+        <p:txBody>
+          <a:bodyPr xmlns:a="http://schemas.openxmlformats.org/drawingml/2006/main" anchor="ctr">
+            <a:normAutofit fontScale="73809"/>
           </a:bodyPr>
           <a:lstStyle xmlns:a="http://schemas.openxmlformats.org/drawingml/2006/main"/>
           <a:p xmlns:a="http://schemas.openxmlformats.org/drawingml/2006/main">
             <a:pPr algn="l">
-              <a:defRPr sz="1200" b="0">
+              <a:defRPr sz="1050" b="0">
                 <a:solidFill>
                   <a:srgbClr val="657187"/>
                 </a:solidFill>
@@ -8414,7 +8699,7 @@
               </a:defRPr>
             </a:pPr>
             <a:r>
-              <a:rPr sz="1200" b="0">
+              <a:rPr sz="1050" b="0">
                 <a:solidFill>
                   <a:srgbClr val="657187"/>
                 </a:solidFill>
@@ -8422,85 +8707,28 @@
                 <a:ea typeface="Malgun Gothic"/>
                 <a:cs typeface="Malgun Gothic"/>
               </a:rPr>
-              <a:t>Python Guard 승인 또는 ASK_USER → DB 실행 → 실제 저장 상태 재조회</a:t>
-            </a:r>
-          </a:p>
-        </p:txBody>
-      </p:sp>
-      <p:sp>
-        <p:nvSpPr>
-          <p:cNvPr id="31" name="">
-            <a:extLst xmlns:a="http://schemas.openxmlformats.org/drawingml/2006/main">
-              <a:ext uri="{FF2B5EF4-FFF2-40B4-BE49-F238E27FC236}">
-                <a16:creationId xmlns:a16="http://schemas.microsoft.com/office/drawing/2014/main" id="{402719F0-B4C4-4D0A-BBC4-A68E983B34B6}"/>
-              </a:ext>
-            </a:extLst>
-          </p:cNvPr>
-          <p:cNvSpPr>
-            <a:spLocks xmlns:a="http://schemas.openxmlformats.org/drawingml/2006/main" noGrp="1"/>
-          </p:cNvSpPr>
-          <p:nvPr/>
-        </p:nvSpPr>
-        <p:spPr>
-          <a:xfrm xmlns:a="http://schemas.openxmlformats.org/drawingml/2006/main">
-            <a:off x="571500" y="4953000"/>
-            <a:ext cx="8191500" cy="266700"/>
-          </a:xfrm>
-          <a:prstGeom xmlns:a="http://schemas.openxmlformats.org/drawingml/2006/main" prst="rect">
-            <a:avLst/>
-          </a:prstGeom>
-          <a:noFill xmlns:a="http://schemas.openxmlformats.org/drawingml/2006/main"/>
-          <a:ln xmlns:a="http://schemas.openxmlformats.org/drawingml/2006/main" w="0">
-            <a:noFill/>
-          </a:ln>
-        </p:spPr>
-        <p:txBody>
-          <a:bodyPr xmlns:a="http://schemas.openxmlformats.org/drawingml/2006/main" anchor="ctr">
-            <a:normAutofit fontScale="80702"/>
-          </a:bodyPr>
-          <a:lstStyle xmlns:a="http://schemas.openxmlformats.org/drawingml/2006/main"/>
-          <a:p xmlns:a="http://schemas.openxmlformats.org/drawingml/2006/main">
-            <a:pPr algn="l">
-              <a:defRPr sz="1425" b="1">
-                <a:solidFill>
-                  <a:srgbClr val="7657D6"/>
-                </a:solidFill>
-                <a:latin typeface="Malgun Gothic"/>
-                <a:ea typeface="Malgun Gothic"/>
-                <a:cs typeface="Malgun Gothic"/>
-              </a:defRPr>
-            </a:pPr>
-            <a:r>
-              <a:rPr sz="1425" b="1">
-                <a:solidFill>
-                  <a:srgbClr val="7657D6"/>
-                </a:solidFill>
-                <a:latin typeface="Malgun Gothic"/>
-                <a:ea typeface="Malgun Gothic"/>
-                <a:cs typeface="Malgun Gothic"/>
-              </a:rPr>
-              <a:t>같은 Case·같은 코드에서 숙고만 껐다 켠 비교</a:t>
-            </a:r>
-          </a:p>
-        </p:txBody>
-      </p:sp>
-      <p:sp>
-        <p:nvSpPr>
-          <p:cNvPr id="32" name="">
-            <a:extLst xmlns:a="http://schemas.openxmlformats.org/drawingml/2006/main">
-              <a:ext uri="{FF2B5EF4-FFF2-40B4-BE49-F238E27FC236}">
-                <a16:creationId xmlns:a16="http://schemas.microsoft.com/office/drawing/2014/main" id="{5AE305B7-E05A-4C5E-8EF4-F782D962E8BB}"/>
-              </a:ext>
-            </a:extLst>
-          </p:cNvPr>
-          <p:cNvSpPr>
-            <a:spLocks xmlns:a="http://schemas.openxmlformats.org/drawingml/2006/main" noGrp="1"/>
-          </p:cNvSpPr>
-          <p:nvPr/>
-        </p:nvSpPr>
-        <p:spPr>
-          <a:xfrm xmlns:a="http://schemas.openxmlformats.org/drawingml/2006/main">
-            <a:off x="571500" y="5295900"/>
+              <a:t>숙고 On·Off 동일, 시간만 증가</a:t>
+            </a:r>
+          </a:p>
+        </p:txBody>
+      </p:sp>
+      <p:sp>
+        <p:nvSpPr>
+          <p:cNvPr id="35" name="">
+            <a:extLst xmlns:a="http://schemas.openxmlformats.org/drawingml/2006/main">
+              <a:ext uri="{FF2B5EF4-FFF2-40B4-BE49-F238E27FC236}">
+                <a16:creationId xmlns:a16="http://schemas.microsoft.com/office/drawing/2014/main" id="{BC5C7679-D79D-4DCD-8B5D-96B45EDEAE11}"/>
+              </a:ext>
+            </a:extLst>
+          </p:cNvPr>
+          <p:cNvSpPr>
+            <a:spLocks xmlns:a="http://schemas.openxmlformats.org/drawingml/2006/main" noGrp="1"/>
+          </p:cNvSpPr>
+          <p:nvPr/>
+        </p:nvSpPr>
+        <p:spPr>
+          <a:xfrm xmlns:a="http://schemas.openxmlformats.org/drawingml/2006/main">
+            <a:off x="4248150" y="5295900"/>
             <a:ext cx="3314700" cy="209550"/>
           </a:xfrm>
           <a:prstGeom xmlns:a="http://schemas.openxmlformats.org/drawingml/2006/main" prst="rect">
@@ -8536,28 +8764,28 @@
                 <a:ea typeface="Malgun Gothic"/>
                 <a:cs typeface="Malgun Gothic"/>
               </a:rPr>
-              <a:t>기존 15 Case</a:t>
-            </a:r>
-          </a:p>
-        </p:txBody>
-      </p:sp>
-      <p:sp>
-        <p:nvSpPr>
-          <p:cNvPr id="33" name="">
-            <a:extLst xmlns:a="http://schemas.openxmlformats.org/drawingml/2006/main">
-              <a:ext uri="{FF2B5EF4-FFF2-40B4-BE49-F238E27FC236}">
-                <a16:creationId xmlns:a16="http://schemas.microsoft.com/office/drawing/2014/main" id="{F9263037-C186-48A4-B0E5-F956567C5665}"/>
-              </a:ext>
-            </a:extLst>
-          </p:cNvPr>
-          <p:cNvSpPr>
-            <a:spLocks xmlns:a="http://schemas.openxmlformats.org/drawingml/2006/main" noGrp="1"/>
-          </p:cNvSpPr>
-          <p:nvPr/>
-        </p:nvSpPr>
-        <p:spPr>
-          <a:xfrm xmlns:a="http://schemas.openxmlformats.org/drawingml/2006/main">
-            <a:off x="571500" y="5543550"/>
+              <a:t>숙고 전용 4 Case</a:t>
+            </a:r>
+          </a:p>
+        </p:txBody>
+      </p:sp>
+      <p:sp>
+        <p:nvSpPr>
+          <p:cNvPr id="36" name="">
+            <a:extLst xmlns:a="http://schemas.openxmlformats.org/drawingml/2006/main">
+              <a:ext uri="{FF2B5EF4-FFF2-40B4-BE49-F238E27FC236}">
+                <a16:creationId xmlns:a16="http://schemas.microsoft.com/office/drawing/2014/main" id="{DF9A65E3-C6D3-4193-A191-6361962272A2}"/>
+              </a:ext>
+            </a:extLst>
+          </p:cNvPr>
+          <p:cNvSpPr>
+            <a:spLocks xmlns:a="http://schemas.openxmlformats.org/drawingml/2006/main" noGrp="1"/>
+          </p:cNvSpPr>
+          <p:nvPr/>
+        </p:nvSpPr>
+        <p:spPr>
+          <a:xfrm xmlns:a="http://schemas.openxmlformats.org/drawingml/2006/main">
+            <a:off x="4248150" y="5543550"/>
             <a:ext cx="3314700" cy="228600"/>
           </a:xfrm>
           <a:prstGeom xmlns:a="http://schemas.openxmlformats.org/drawingml/2006/main" prst="rect">
@@ -8593,28 +8821,28 @@
                 <a:ea typeface="Malgun Gothic"/>
                 <a:cs typeface="Malgun Gothic"/>
               </a:rPr>
-              <a:t>15/15 · Action 28/28</a:t>
-            </a:r>
-          </a:p>
-        </p:txBody>
-      </p:sp>
-      <p:sp>
-        <p:nvSpPr>
-          <p:cNvPr id="34" name="">
-            <a:extLst xmlns:a="http://schemas.openxmlformats.org/drawingml/2006/main">
-              <a:ext uri="{FF2B5EF4-FFF2-40B4-BE49-F238E27FC236}">
-                <a16:creationId xmlns:a16="http://schemas.microsoft.com/office/drawing/2014/main" id="{EEB06AC4-4A64-4674-9851-0FD0D5DCC280}"/>
-              </a:ext>
-            </a:extLst>
-          </p:cNvPr>
-          <p:cNvSpPr>
-            <a:spLocks xmlns:a="http://schemas.openxmlformats.org/drawingml/2006/main" noGrp="1"/>
-          </p:cNvSpPr>
-          <p:nvPr/>
-        </p:nvSpPr>
-        <p:spPr>
-          <a:xfrm xmlns:a="http://schemas.openxmlformats.org/drawingml/2006/main">
-            <a:off x="571500" y="5810250"/>
+              <a:t>재현되는 차이 1건</a:t>
+            </a:r>
+          </a:p>
+        </p:txBody>
+      </p:sp>
+      <p:sp>
+        <p:nvSpPr>
+          <p:cNvPr id="37" name="">
+            <a:extLst xmlns:a="http://schemas.openxmlformats.org/drawingml/2006/main">
+              <a:ext uri="{FF2B5EF4-FFF2-40B4-BE49-F238E27FC236}">
+                <a16:creationId xmlns:a16="http://schemas.microsoft.com/office/drawing/2014/main" id="{ED410242-80F8-4BFF-B5F8-C4C6F98DC000}"/>
+              </a:ext>
+            </a:extLst>
+          </p:cNvPr>
+          <p:cNvSpPr>
+            <a:spLocks xmlns:a="http://schemas.openxmlformats.org/drawingml/2006/main" noGrp="1"/>
+          </p:cNvSpPr>
+          <p:nvPr/>
+        </p:nvSpPr>
+        <p:spPr>
+          <a:xfrm xmlns:a="http://schemas.openxmlformats.org/drawingml/2006/main">
+            <a:off x="4248150" y="5810250"/>
             <a:ext cx="3314700" cy="209550"/>
           </a:xfrm>
           <a:prstGeom xmlns:a="http://schemas.openxmlformats.org/drawingml/2006/main" prst="rect">
@@ -8650,28 +8878,28 @@
                 <a:ea typeface="Malgun Gothic"/>
                 <a:cs typeface="Malgun Gothic"/>
               </a:rPr>
-              <a:t>숙고 On·Off 동일, 시간만 증가</a:t>
-            </a:r>
-          </a:p>
-        </p:txBody>
-      </p:sp>
-      <p:sp>
-        <p:nvSpPr>
-          <p:cNvPr id="35" name="">
-            <a:extLst xmlns:a="http://schemas.openxmlformats.org/drawingml/2006/main">
-              <a:ext uri="{FF2B5EF4-FFF2-40B4-BE49-F238E27FC236}">
-                <a16:creationId xmlns:a16="http://schemas.microsoft.com/office/drawing/2014/main" id="{2F58336B-366C-4C5B-9F1A-59C67F5B837F}"/>
-              </a:ext>
-            </a:extLst>
-          </p:cNvPr>
-          <p:cNvSpPr>
-            <a:spLocks xmlns:a="http://schemas.openxmlformats.org/drawingml/2006/main" noGrp="1"/>
-          </p:cNvSpPr>
-          <p:nvPr/>
-        </p:nvSpPr>
-        <p:spPr>
-          <a:xfrm xmlns:a="http://schemas.openxmlformats.org/drawingml/2006/main">
-            <a:off x="4248150" y="5295900"/>
+              <a:t>DLB-02: On 3/3 통과, Off 3/3 실패</a:t>
+            </a:r>
+          </a:p>
+        </p:txBody>
+      </p:sp>
+      <p:sp>
+        <p:nvSpPr>
+          <p:cNvPr id="38" name="">
+            <a:extLst xmlns:a="http://schemas.openxmlformats.org/drawingml/2006/main">
+              <a:ext uri="{FF2B5EF4-FFF2-40B4-BE49-F238E27FC236}">
+                <a16:creationId xmlns:a16="http://schemas.microsoft.com/office/drawing/2014/main" id="{98EC9282-3FEA-4440-B555-5FA432753F2E}"/>
+              </a:ext>
+            </a:extLst>
+          </p:cNvPr>
+          <p:cNvSpPr>
+            <a:spLocks xmlns:a="http://schemas.openxmlformats.org/drawingml/2006/main" noGrp="1"/>
+          </p:cNvSpPr>
+          <p:nvPr/>
+        </p:nvSpPr>
+        <p:spPr>
+          <a:xfrm xmlns:a="http://schemas.openxmlformats.org/drawingml/2006/main">
+            <a:off x="7924800" y="5295900"/>
             <a:ext cx="3314700" cy="209550"/>
           </a:xfrm>
           <a:prstGeom xmlns:a="http://schemas.openxmlformats.org/drawingml/2006/main" prst="rect">
@@ -8707,28 +8935,28 @@
                 <a:ea typeface="Malgun Gothic"/>
                 <a:cs typeface="Malgun Gothic"/>
               </a:rPr>
-              <a:t>숙고 전용 4 Case</a:t>
-            </a:r>
-          </a:p>
-        </p:txBody>
-      </p:sp>
-      <p:sp>
-        <p:nvSpPr>
-          <p:cNvPr id="36" name="">
-            <a:extLst xmlns:a="http://schemas.openxmlformats.org/drawingml/2006/main">
-              <a:ext uri="{FF2B5EF4-FFF2-40B4-BE49-F238E27FC236}">
-                <a16:creationId xmlns:a16="http://schemas.microsoft.com/office/drawing/2014/main" id="{AC702930-06D2-451E-85E8-D85C268C85E1}"/>
-              </a:ext>
-            </a:extLst>
-          </p:cNvPr>
-          <p:cNvSpPr>
-            <a:spLocks xmlns:a="http://schemas.openxmlformats.org/drawingml/2006/main" noGrp="1"/>
-          </p:cNvSpPr>
-          <p:nvPr/>
-        </p:nvSpPr>
-        <p:spPr>
-          <a:xfrm xmlns:a="http://schemas.openxmlformats.org/drawingml/2006/main">
-            <a:off x="4248150" y="5543550"/>
+              <a:t>실제 Gmail 재현</a:t>
+            </a:r>
+          </a:p>
+        </p:txBody>
+      </p:sp>
+      <p:sp>
+        <p:nvSpPr>
+          <p:cNvPr id="39" name="">
+            <a:extLst xmlns:a="http://schemas.openxmlformats.org/drawingml/2006/main">
+              <a:ext uri="{FF2B5EF4-FFF2-40B4-BE49-F238E27FC236}">
+                <a16:creationId xmlns:a16="http://schemas.microsoft.com/office/drawing/2014/main" id="{61D305EA-345A-4B56-991D-CCCAB82C017F}"/>
+              </a:ext>
+            </a:extLst>
+          </p:cNvPr>
+          <p:cNvSpPr>
+            <a:spLocks xmlns:a="http://schemas.openxmlformats.org/drawingml/2006/main" noGrp="1"/>
+          </p:cNvSpPr>
+          <p:nvPr/>
+        </p:nvSpPr>
+        <p:spPr>
+          <a:xfrm xmlns:a="http://schemas.openxmlformats.org/drawingml/2006/main">
+            <a:off x="7924800" y="5543550"/>
             <a:ext cx="3314700" cy="228600"/>
           </a:xfrm>
           <a:prstGeom xmlns:a="http://schemas.openxmlformats.org/drawingml/2006/main" prst="rect">
@@ -8764,28 +8992,28 @@
                 <a:ea typeface="Malgun Gothic"/>
                 <a:cs typeface="Malgun Gothic"/>
               </a:rPr>
-              <a:t>재현되는 차이 1건</a:t>
-            </a:r>
-          </a:p>
-        </p:txBody>
-      </p:sp>
-      <p:sp>
-        <p:nvSpPr>
-          <p:cNvPr id="37" name="">
-            <a:extLst xmlns:a="http://schemas.openxmlformats.org/drawingml/2006/main">
-              <a:ext uri="{FF2B5EF4-FFF2-40B4-BE49-F238E27FC236}">
-                <a16:creationId xmlns:a16="http://schemas.microsoft.com/office/drawing/2014/main" id="{162EABA1-9410-460E-BB51-86B9A70A3F93}"/>
-              </a:ext>
-            </a:extLst>
-          </p:cNvPr>
-          <p:cNvSpPr>
-            <a:spLocks xmlns:a="http://schemas.openxmlformats.org/drawingml/2006/main" noGrp="1"/>
-          </p:cNvSpPr>
-          <p:nvPr/>
-        </p:nvSpPr>
-        <p:spPr>
-          <a:xfrm xmlns:a="http://schemas.openxmlformats.org/drawingml/2006/main">
-            <a:off x="4248150" y="5810250"/>
+              <a:t>새 메일 4건 처리</a:t>
+            </a:r>
+          </a:p>
+        </p:txBody>
+      </p:sp>
+      <p:sp>
+        <p:nvSpPr>
+          <p:cNvPr id="40" name="">
+            <a:extLst xmlns:a="http://schemas.openxmlformats.org/drawingml/2006/main">
+              <a:ext uri="{FF2B5EF4-FFF2-40B4-BE49-F238E27FC236}">
+                <a16:creationId xmlns:a16="http://schemas.microsoft.com/office/drawing/2014/main" id="{31D37235-A187-46A5-9CC7-79ED952F56E7}"/>
+              </a:ext>
+            </a:extLst>
+          </p:cNvPr>
+          <p:cNvSpPr>
+            <a:spLocks xmlns:a="http://schemas.openxmlformats.org/drawingml/2006/main" noGrp="1"/>
+          </p:cNvSpPr>
+          <p:nvPr/>
+        </p:nvSpPr>
+        <p:spPr>
+          <a:xfrm xmlns:a="http://schemas.openxmlformats.org/drawingml/2006/main">
+            <a:off x="7924800" y="5810250"/>
             <a:ext cx="3314700" cy="209550"/>
           </a:xfrm>
           <a:prstGeom xmlns:a="http://schemas.openxmlformats.org/drawingml/2006/main" prst="rect">
@@ -8821,29 +9049,29 @@
                 <a:ea typeface="Malgun Gothic"/>
                 <a:cs typeface="Malgun Gothic"/>
               </a:rPr>
-              <a:t>DLB-02: On 3/3 통과, Off 3/3 실패</a:t>
-            </a:r>
-          </a:p>
-        </p:txBody>
-      </p:sp>
-      <p:sp>
-        <p:nvSpPr>
-          <p:cNvPr id="38" name="">
-            <a:extLst xmlns:a="http://schemas.openxmlformats.org/drawingml/2006/main">
-              <a:ext uri="{FF2B5EF4-FFF2-40B4-BE49-F238E27FC236}">
-                <a16:creationId xmlns:a16="http://schemas.microsoft.com/office/drawing/2014/main" id="{4F431F64-03EC-429C-9E88-266C3CB1DFF7}"/>
-              </a:ext>
-            </a:extLst>
-          </p:cNvPr>
-          <p:cNvSpPr>
-            <a:spLocks xmlns:a="http://schemas.openxmlformats.org/drawingml/2006/main" noGrp="1"/>
-          </p:cNvSpPr>
-          <p:nvPr/>
-        </p:nvSpPr>
-        <p:spPr>
-          <a:xfrm xmlns:a="http://schemas.openxmlformats.org/drawingml/2006/main">
-            <a:off x="7924800" y="5295900"/>
-            <a:ext cx="3314700" cy="209550"/>
+              <a:t>2건 Task 생성, 2건 ASK_USER</a:t>
+            </a:r>
+          </a:p>
+        </p:txBody>
+      </p:sp>
+      <p:sp>
+        <p:nvSpPr>
+          <p:cNvPr id="41" name="">
+            <a:extLst xmlns:a="http://schemas.openxmlformats.org/drawingml/2006/main">
+              <a:ext uri="{FF2B5EF4-FFF2-40B4-BE49-F238E27FC236}">
+                <a16:creationId xmlns:a16="http://schemas.microsoft.com/office/drawing/2014/main" id="{52654303-F064-4346-99C1-010603521015}"/>
+              </a:ext>
+            </a:extLst>
+          </p:cNvPr>
+          <p:cNvSpPr>
+            <a:spLocks xmlns:a="http://schemas.openxmlformats.org/drawingml/2006/main" noGrp="1"/>
+          </p:cNvSpPr>
+          <p:nvPr/>
+        </p:nvSpPr>
+        <p:spPr>
+          <a:xfrm xmlns:a="http://schemas.openxmlformats.org/drawingml/2006/main">
+            <a:off x="571500" y="6057900"/>
+            <a:ext cx="11049000" cy="209550"/>
           </a:xfrm>
           <a:prstGeom xmlns:a="http://schemas.openxmlformats.org/drawingml/2006/main" prst="rect">
             <a:avLst/>
@@ -8878,143 +9106,29 @@
                 <a:ea typeface="Malgun Gothic"/>
                 <a:cs typeface="Malgun Gothic"/>
               </a:rPr>
-              <a:t>실제 Gmail 재현</a:t>
-            </a:r>
-          </a:p>
-        </p:txBody>
-      </p:sp>
-      <p:sp>
-        <p:nvSpPr>
-          <p:cNvPr id="39" name="">
-            <a:extLst xmlns:a="http://schemas.openxmlformats.org/drawingml/2006/main">
-              <a:ext uri="{FF2B5EF4-FFF2-40B4-BE49-F238E27FC236}">
-                <a16:creationId xmlns:a16="http://schemas.microsoft.com/office/drawing/2014/main" id="{96A51CF2-6BF6-4820-B256-5240DDBDB890}"/>
-              </a:ext>
-            </a:extLst>
-          </p:cNvPr>
-          <p:cNvSpPr>
-            <a:spLocks xmlns:a="http://schemas.openxmlformats.org/drawingml/2006/main" noGrp="1"/>
-          </p:cNvSpPr>
-          <p:nvPr/>
-        </p:nvSpPr>
-        <p:spPr>
-          <a:xfrm xmlns:a="http://schemas.openxmlformats.org/drawingml/2006/main">
-            <a:off x="7924800" y="5543550"/>
-            <a:ext cx="3314700" cy="228600"/>
-          </a:xfrm>
-          <a:prstGeom xmlns:a="http://schemas.openxmlformats.org/drawingml/2006/main" prst="rect">
-            <a:avLst/>
-          </a:prstGeom>
-          <a:noFill xmlns:a="http://schemas.openxmlformats.org/drawingml/2006/main"/>
-          <a:ln xmlns:a="http://schemas.openxmlformats.org/drawingml/2006/main" w="0">
-            <a:noFill/>
-          </a:ln>
-        </p:spPr>
-        <p:txBody>
-          <a:bodyPr xmlns:a="http://schemas.openxmlformats.org/drawingml/2006/main" anchor="ctr">
-            <a:normAutofit fontScale="75000"/>
-          </a:bodyPr>
-          <a:lstStyle xmlns:a="http://schemas.openxmlformats.org/drawingml/2006/main"/>
-          <a:p xmlns:a="http://schemas.openxmlformats.org/drawingml/2006/main">
-            <a:pPr algn="l">
-              <a:defRPr sz="1200" b="1">
-                <a:solidFill>
-                  <a:srgbClr val="10243E"/>
-                </a:solidFill>
-                <a:latin typeface="Malgun Gothic"/>
-                <a:ea typeface="Malgun Gothic"/>
-                <a:cs typeface="Malgun Gothic"/>
-              </a:defRPr>
-            </a:pPr>
-            <a:r>
-              <a:rPr sz="1200" b="1">
-                <a:solidFill>
-                  <a:srgbClr val="10243E"/>
-                </a:solidFill>
-                <a:latin typeface="Malgun Gothic"/>
-                <a:ea typeface="Malgun Gothic"/>
-                <a:cs typeface="Malgun Gothic"/>
-              </a:rPr>
-              <a:t>새 메일 4건 처리</a:t>
-            </a:r>
-          </a:p>
-        </p:txBody>
-      </p:sp>
-      <p:sp>
-        <p:nvSpPr>
-          <p:cNvPr id="40" name="">
-            <a:extLst xmlns:a="http://schemas.openxmlformats.org/drawingml/2006/main">
-              <a:ext uri="{FF2B5EF4-FFF2-40B4-BE49-F238E27FC236}">
-                <a16:creationId xmlns:a16="http://schemas.microsoft.com/office/drawing/2014/main" id="{69FE1A2B-102C-4C17-8C13-A1B6383948AB}"/>
-              </a:ext>
-            </a:extLst>
-          </p:cNvPr>
-          <p:cNvSpPr>
-            <a:spLocks xmlns:a="http://schemas.openxmlformats.org/drawingml/2006/main" noGrp="1"/>
-          </p:cNvSpPr>
-          <p:nvPr/>
-        </p:nvSpPr>
-        <p:spPr>
-          <a:xfrm xmlns:a="http://schemas.openxmlformats.org/drawingml/2006/main">
-            <a:off x="7924800" y="5810250"/>
-            <a:ext cx="3314700" cy="209550"/>
-          </a:xfrm>
-          <a:prstGeom xmlns:a="http://schemas.openxmlformats.org/drawingml/2006/main" prst="rect">
-            <a:avLst/>
-          </a:prstGeom>
-          <a:noFill xmlns:a="http://schemas.openxmlformats.org/drawingml/2006/main"/>
-          <a:ln xmlns:a="http://schemas.openxmlformats.org/drawingml/2006/main" w="0">
-            <a:noFill/>
-          </a:ln>
-        </p:spPr>
-        <p:txBody>
-          <a:bodyPr xmlns:a="http://schemas.openxmlformats.org/drawingml/2006/main" anchor="ctr">
-            <a:normAutofit fontScale="73809"/>
-          </a:bodyPr>
-          <a:lstStyle xmlns:a="http://schemas.openxmlformats.org/drawingml/2006/main"/>
-          <a:p xmlns:a="http://schemas.openxmlformats.org/drawingml/2006/main">
-            <a:pPr algn="l">
-              <a:defRPr sz="1050" b="0">
-                <a:solidFill>
-                  <a:srgbClr val="657187"/>
-                </a:solidFill>
-                <a:latin typeface="Malgun Gothic"/>
-                <a:ea typeface="Malgun Gothic"/>
-                <a:cs typeface="Malgun Gothic"/>
-              </a:defRPr>
-            </a:pPr>
-            <a:r>
-              <a:rPr sz="1050" b="0">
-                <a:solidFill>
-                  <a:srgbClr val="657187"/>
-                </a:solidFill>
-                <a:latin typeface="Malgun Gothic"/>
-                <a:ea typeface="Malgun Gothic"/>
-                <a:cs typeface="Malgun Gothic"/>
-              </a:rPr>
-              <a:t>2건 Task 생성, 2건 ASK_USER</a:t>
-            </a:r>
-          </a:p>
-        </p:txBody>
-      </p:sp>
-      <p:sp>
-        <p:nvSpPr>
-          <p:cNvPr id="41" name="">
-            <a:extLst xmlns:a="http://schemas.openxmlformats.org/drawingml/2006/main">
-              <a:ext uri="{FF2B5EF4-FFF2-40B4-BE49-F238E27FC236}">
-                <a16:creationId xmlns:a16="http://schemas.microsoft.com/office/drawing/2014/main" id="{E6E65939-4F74-46BC-AFE6-5B37E186E365}"/>
-              </a:ext>
-            </a:extLst>
-          </p:cNvPr>
-          <p:cNvSpPr>
-            <a:spLocks xmlns:a="http://schemas.openxmlformats.org/drawingml/2006/main" noGrp="1"/>
-          </p:cNvSpPr>
-          <p:nvPr/>
-        </p:nvSpPr>
-        <p:spPr>
-          <a:xfrm xmlns:a="http://schemas.openxmlformats.org/drawingml/2006/main">
-            <a:off x="571500" y="6057900"/>
-            <a:ext cx="11049000" cy="209550"/>
+              <a:t>Next Step  |  Gmail 검증 결과를 바탕으로 Outlook·Graph Adapter와 사내 인증·운영 서버로 전환</a:t>
+            </a:r>
+          </a:p>
+        </p:txBody>
+      </p:sp>
+      <p:sp>
+        <p:nvSpPr>
+          <p:cNvPr id="42" name="">
+            <a:extLst xmlns:a="http://schemas.openxmlformats.org/drawingml/2006/main">
+              <a:ext uri="{FF2B5EF4-FFF2-40B4-BE49-F238E27FC236}">
+                <a16:creationId xmlns:a16="http://schemas.microsoft.com/office/drawing/2014/main" id="{16EE07E3-7A8C-47A4-BCCB-00E256095194}"/>
+              </a:ext>
+            </a:extLst>
+          </p:cNvPr>
+          <p:cNvSpPr>
+            <a:spLocks xmlns:a="http://schemas.openxmlformats.org/drawingml/2006/main" noGrp="1"/>
+          </p:cNvSpPr>
+          <p:nvPr/>
+        </p:nvSpPr>
+        <p:spPr>
+          <a:xfrm xmlns:a="http://schemas.openxmlformats.org/drawingml/2006/main">
+            <a:off x="571500" y="6305550"/>
+            <a:ext cx="5905500" cy="209550"/>
           </a:xfrm>
           <a:prstGeom xmlns:a="http://schemas.openxmlformats.org/drawingml/2006/main" prst="rect">
             <a:avLst/>
@@ -9033,7 +9147,7 @@
             <a:pPr algn="l">
               <a:defRPr sz="1050" b="1">
                 <a:solidFill>
-                  <a:srgbClr val="1769E0"/>
+                  <a:srgbClr val="C73C34"/>
                 </a:solidFill>
                 <a:latin typeface="Malgun Gothic"/>
                 <a:ea typeface="Malgun Gothic"/>
@@ -9043,68 +9157,11 @@
             <a:r>
               <a:rPr sz="1050" b="1">
                 <a:solidFill>
-                  <a:srgbClr val="1769E0"/>
-                </a:solidFill>
-                <a:latin typeface="Malgun Gothic"/>
-                <a:ea typeface="Malgun Gothic"/>
-                <a:cs typeface="Malgun Gothic"/>
-              </a:rPr>
-              <a:t>Next Step  |  Gmail 검증 결과를 바탕으로 Outlook·Graph Adapter와 사내 인증·운영 서버로 전환</a:t>
-            </a:r>
-          </a:p>
-        </p:txBody>
-      </p:sp>
-      <p:sp>
-        <p:nvSpPr>
-          <p:cNvPr id="42" name="">
-            <a:extLst xmlns:a="http://schemas.openxmlformats.org/drawingml/2006/main">
-              <a:ext uri="{FF2B5EF4-FFF2-40B4-BE49-F238E27FC236}">
-                <a16:creationId xmlns:a16="http://schemas.microsoft.com/office/drawing/2014/main" id="{AEF79C79-AF39-42EC-9661-838161EE7BA0}"/>
-              </a:ext>
-            </a:extLst>
-          </p:cNvPr>
-          <p:cNvSpPr>
-            <a:spLocks xmlns:a="http://schemas.openxmlformats.org/drawingml/2006/main" noGrp="1"/>
-          </p:cNvSpPr>
-          <p:nvPr/>
-        </p:nvSpPr>
-        <p:spPr>
-          <a:xfrm xmlns:a="http://schemas.openxmlformats.org/drawingml/2006/main">
-            <a:off x="571500" y="6305550"/>
-            <a:ext cx="5905500" cy="209550"/>
-          </a:xfrm>
-          <a:prstGeom xmlns:a="http://schemas.openxmlformats.org/drawingml/2006/main" prst="rect">
-            <a:avLst/>
-          </a:prstGeom>
-          <a:noFill xmlns:a="http://schemas.openxmlformats.org/drawingml/2006/main"/>
-          <a:ln xmlns:a="http://schemas.openxmlformats.org/drawingml/2006/main" w="0">
-            <a:noFill/>
-          </a:ln>
-        </p:spPr>
-        <p:txBody>
-          <a:bodyPr xmlns:a="http://schemas.openxmlformats.org/drawingml/2006/main" anchor="ctr">
-            <a:normAutofit fontScale="73809"/>
-          </a:bodyPr>
-          <a:lstStyle xmlns:a="http://schemas.openxmlformats.org/drawingml/2006/main"/>
-          <a:p xmlns:a="http://schemas.openxmlformats.org/drawingml/2006/main">
-            <a:pPr algn="l">
-              <a:defRPr sz="1050" b="1">
-                <a:solidFill>
                   <a:srgbClr val="C73C34"/>
                 </a:solidFill>
                 <a:latin typeface="Malgun Gothic"/>
                 <a:ea typeface="Malgun Gothic"/>
                 <a:cs typeface="Malgun Gothic"/>
-              </a:defRPr>
-            </a:pPr>
-            <a:r>
-              <a:rPr sz="1050" b="1">
-                <a:solidFill>
-                  <a:srgbClr val="C73C34"/>
-                </a:solidFill>
-                <a:latin typeface="Malgun Gothic"/>
-                <a:ea typeface="Malgun Gothic"/>
-                <a:cs typeface="Malgun Gothic"/>
               </a:rPr>
               <a:t>실패  |  계약 위반 응답을 재시도 없이 실패 처리해 판단 4건 유실</a:t>
             </a:r>
@@ -9116,7 +9173,7 @@
           <p:cNvPr id="43" name="">
             <a:extLst xmlns:a="http://schemas.openxmlformats.org/drawingml/2006/main">
               <a:ext uri="{FF2B5EF4-FFF2-40B4-BE49-F238E27FC236}">
-                <a16:creationId xmlns:a16="http://schemas.microsoft.com/office/drawing/2014/main" id="{F2679982-BDAD-43D3-9DC5-AD7F66327525}"/>
+                <a16:creationId xmlns:a16="http://schemas.microsoft.com/office/drawing/2014/main" id="{B858B5FB-E076-4A8A-A18A-A15B3E8C9EE6}"/>
               </a:ext>
             </a:extLst>
           </p:cNvPr>
@@ -9171,7 +9228,7 @@
     </p:spTree>
     <p:extLst>
       <p:ext uri="{BB962C8B-B14F-4D97-AF65-F5344CB8AC3E}">
-        <p14:creationId xmlns:p14="http://schemas.microsoft.com/office/powerpoint/2010/main" val="138371301"/>
+        <p14:creationId xmlns:p14="http://schemas.microsoft.com/office/powerpoint/2010/main" val="1396109529"/>
       </p:ext>
     </p:extLst>
   </p:cSld>

--- a/Docs/PRESENTATION/2. 최종/09285_백준현_AI_Master_최종발표자료_v12.pptx
+++ b/Docs/PRESENTATION/2. 최종/09285_백준현_AI_Master_최종발표자료_v12.pptx
@@ -2,16 +2,16 @@
 <file path=ppt/presentation.xml><?xml version="1.0" encoding="utf-8"?>
 <p:presentation xmlns:p="http://schemas.openxmlformats.org/presentationml/2006/main">
   <p:sldMasterIdLst>
-    <p:sldMasterId xmlns:r="http://schemas.openxmlformats.org/officeDocument/2006/relationships" id="2147483648" r:id="R46176f043030474a"/>
+    <p:sldMasterId xmlns:r="http://schemas.openxmlformats.org/officeDocument/2006/relationships" id="2147483648" r:id="R6a9deaf4a541424d"/>
   </p:sldMasterIdLst>
   <p:notesMasterIdLst>
-    <p:notesMasterId xmlns:r="http://schemas.openxmlformats.org/officeDocument/2006/relationships" r:id="R42decd384bcb4d21"/>
+    <p:notesMasterId xmlns:r="http://schemas.openxmlformats.org/officeDocument/2006/relationships" r:id="R0e3be6c008504a15"/>
   </p:notesMasterIdLst>
   <p:sldIdLst>
-    <p:sldId xmlns:r="http://schemas.openxmlformats.org/officeDocument/2006/relationships" id="256" r:id="Rab3dd916f49b421e"/>
-    <p:sldId xmlns:r="http://schemas.openxmlformats.org/officeDocument/2006/relationships" id="257" r:id="Re540fb3e453f4a4d"/>
-    <p:sldId xmlns:r="http://schemas.openxmlformats.org/officeDocument/2006/relationships" id="258" r:id="R69c6203641684b55"/>
-    <p:sldId xmlns:r="http://schemas.openxmlformats.org/officeDocument/2006/relationships" id="259" r:id="Rcf3bef0f1d6944c8"/>
+    <p:sldId xmlns:r="http://schemas.openxmlformats.org/officeDocument/2006/relationships" id="256" r:id="Reed1bba53a5f4d73"/>
+    <p:sldId xmlns:r="http://schemas.openxmlformats.org/officeDocument/2006/relationships" id="257" r:id="Rfc4cf90a051b49ca"/>
+    <p:sldId xmlns:r="http://schemas.openxmlformats.org/officeDocument/2006/relationships" id="258" r:id="R8bdc1015844140ee"/>
+    <p:sldId xmlns:r="http://schemas.openxmlformats.org/officeDocument/2006/relationships" id="259" r:id="Rb69663cdab6b4ac5"/>
   </p:sldIdLst>
   <p:sldSz cx="12192000" cy="6858000"/>
   <p:notesSz cx="6858000" cy="9144000"/>
@@ -958,7 +958,7 @@
   </p:cSld>
   <p:clrMap bg1="lt1" tx1="dk1" bg2="lt2" tx2="dk2" accent1="accent1" accent2="accent2" accent3="accent3" accent4="accent4" accent5="accent5" accent6="accent6" hlink="hlink" folHlink="folHlink"/>
   <p:sldLayoutIdLst>
-    <p:sldLayoutId xmlns:r="http://schemas.openxmlformats.org/officeDocument/2006/relationships" id="2147483649" r:id="R814c52a483694e0b"/>
+    <p:sldLayoutId xmlns:r="http://schemas.openxmlformats.org/officeDocument/2006/relationships" id="2147483649" r:id="R9abd9f5203bb4352"/>
   </p:sldLayoutIdLst>
   <p:txStyles>
     <p:titleStyle>
@@ -1509,7 +1509,7 @@
           <p:cNvPr id="9" name="">
             <a:extLst xmlns:a="http://schemas.openxmlformats.org/drawingml/2006/main">
               <a:ext uri="{FF2B5EF4-FFF2-40B4-BE49-F238E27FC236}">
-                <a16:creationId xmlns:a16="http://schemas.microsoft.com/office/drawing/2014/main" id="{B89F78F8-2EE2-4FE9-923B-05DAEB998680}"/>
+                <a16:creationId xmlns:a16="http://schemas.microsoft.com/office/drawing/2014/main" id="{00BA9D6E-1724-45B0-8215-C247B9FC3999}"/>
               </a:ext>
             </a:extLst>
           </p:cNvPr>
@@ -1539,7 +1539,7 @@
           <p:cNvPr id="2" name="">
             <a:extLst xmlns:a="http://schemas.openxmlformats.org/drawingml/2006/main">
               <a:ext uri="{FF2B5EF4-FFF2-40B4-BE49-F238E27FC236}">
-                <a16:creationId xmlns:a16="http://schemas.microsoft.com/office/drawing/2014/main" id="{3D94A82E-55E1-4C58-A0AC-2A4BB22CE232}"/>
+                <a16:creationId xmlns:a16="http://schemas.microsoft.com/office/drawing/2014/main" id="{8EEE7466-FB7C-45FC-A9DA-AD86B72D740D}"/>
               </a:ext>
             </a:extLst>
           </p:cNvPr>
@@ -1596,7 +1596,7 @@
           <p:cNvPr id="3" name="">
             <a:extLst xmlns:a="http://schemas.openxmlformats.org/drawingml/2006/main">
               <a:ext uri="{FF2B5EF4-FFF2-40B4-BE49-F238E27FC236}">
-                <a16:creationId xmlns:a16="http://schemas.microsoft.com/office/drawing/2014/main" id="{67752625-C77E-4C13-A29D-BBF7DB454895}"/>
+                <a16:creationId xmlns:a16="http://schemas.microsoft.com/office/drawing/2014/main" id="{233AF5B9-9E89-402F-8CC0-DC7598A1F3A4}"/>
               </a:ext>
             </a:extLst>
           </p:cNvPr>
@@ -1653,7 +1653,7 @@
           <p:cNvPr id="4" name="">
             <a:extLst xmlns:a="http://schemas.openxmlformats.org/drawingml/2006/main">
               <a:ext uri="{FF2B5EF4-FFF2-40B4-BE49-F238E27FC236}">
-                <a16:creationId xmlns:a16="http://schemas.microsoft.com/office/drawing/2014/main" id="{01527271-9785-44C4-A903-204B53B1B801}"/>
+                <a16:creationId xmlns:a16="http://schemas.microsoft.com/office/drawing/2014/main" id="{269C32EE-AAA1-4BAE-8B03-B225EAD0ECC2}"/>
               </a:ext>
             </a:extLst>
           </p:cNvPr>
@@ -1710,7 +1710,7 @@
           <p:cNvPr id="5" name="">
             <a:extLst xmlns:a="http://schemas.openxmlformats.org/drawingml/2006/main">
               <a:ext uri="{FF2B5EF4-FFF2-40B4-BE49-F238E27FC236}">
-                <a16:creationId xmlns:a16="http://schemas.microsoft.com/office/drawing/2014/main" id="{62419A40-A2B1-47D1-99B0-1F829ECBC572}"/>
+                <a16:creationId xmlns:a16="http://schemas.microsoft.com/office/drawing/2014/main" id="{723DFEA5-BE5E-4698-AFF8-0C33F54BFC0E}"/>
               </a:ext>
             </a:extLst>
           </p:cNvPr>
@@ -1740,7 +1740,7 @@
           <p:cNvPr id="6" name="">
             <a:extLst xmlns:a="http://schemas.openxmlformats.org/drawingml/2006/main">
               <a:ext uri="{FF2B5EF4-FFF2-40B4-BE49-F238E27FC236}">
-                <a16:creationId xmlns:a16="http://schemas.microsoft.com/office/drawing/2014/main" id="{DC9A08FC-E9F0-4536-BA57-E7463B81E7B7}"/>
+                <a16:creationId xmlns:a16="http://schemas.microsoft.com/office/drawing/2014/main" id="{678BFB27-E753-4D48-9B33-C6CD41BBFA2F}"/>
               </a:ext>
             </a:extLst>
           </p:cNvPr>
@@ -1797,7 +1797,7 @@
           <p:cNvPr id="7" name="">
             <a:extLst xmlns:a="http://schemas.openxmlformats.org/drawingml/2006/main">
               <a:ext uri="{FF2B5EF4-FFF2-40B4-BE49-F238E27FC236}">
-                <a16:creationId xmlns:a16="http://schemas.microsoft.com/office/drawing/2014/main" id="{8198C706-86A1-4839-8038-125DBFF0B730}"/>
+                <a16:creationId xmlns:a16="http://schemas.microsoft.com/office/drawing/2014/main" id="{35E421A4-CFBA-4EF4-9092-50E2E33E078D}"/>
               </a:ext>
             </a:extLst>
           </p:cNvPr>
@@ -1854,7 +1854,7 @@
           <p:cNvPr id="8" name="">
             <a:extLst xmlns:a="http://schemas.openxmlformats.org/drawingml/2006/main">
               <a:ext uri="{FF2B5EF4-FFF2-40B4-BE49-F238E27FC236}">
-                <a16:creationId xmlns:a16="http://schemas.microsoft.com/office/drawing/2014/main" id="{F6E4A886-29DC-4268-AC5D-B2D70CB85006}"/>
+                <a16:creationId xmlns:a16="http://schemas.microsoft.com/office/drawing/2014/main" id="{C97DFD3A-E33E-4C6A-953A-D5E1E5B93EC1}"/>
               </a:ext>
             </a:extLst>
           </p:cNvPr>
@@ -1909,7 +1909,7 @@
     </p:spTree>
     <p:extLst>
       <p:ext uri="{BB962C8B-B14F-4D97-AF65-F5344CB8AC3E}">
-        <p14:creationId xmlns:p14="http://schemas.microsoft.com/office/powerpoint/2010/main" val="907321896"/>
+        <p14:creationId xmlns:p14="http://schemas.microsoft.com/office/powerpoint/2010/main" val="597242214"/>
       </p:ext>
     </p:extLst>
   </p:cSld>
@@ -1940,7 +1940,7 @@
           <p:cNvPr id="46" name="">
             <a:extLst xmlns:a="http://schemas.openxmlformats.org/drawingml/2006/main">
               <a:ext uri="{FF2B5EF4-FFF2-40B4-BE49-F238E27FC236}">
-                <a16:creationId xmlns:a16="http://schemas.microsoft.com/office/drawing/2014/main" id="{E7D6C455-9E08-4FD9-B5C6-788A8C8B932E}"/>
+                <a16:creationId xmlns:a16="http://schemas.microsoft.com/office/drawing/2014/main" id="{A51A43EA-0EB1-4F38-A161-3B1BB494BD9F}"/>
               </a:ext>
             </a:extLst>
           </p:cNvPr>
@@ -1970,7 +1970,7 @@
           <p:cNvPr id="2" name="">
             <a:extLst xmlns:a="http://schemas.openxmlformats.org/drawingml/2006/main">
               <a:ext uri="{FF2B5EF4-FFF2-40B4-BE49-F238E27FC236}">
-                <a16:creationId xmlns:a16="http://schemas.microsoft.com/office/drawing/2014/main" id="{F26D22A8-1209-407B-93D2-32081ACB285B}"/>
+                <a16:creationId xmlns:a16="http://schemas.microsoft.com/office/drawing/2014/main" id="{9A8BCECD-5847-4C52-A2DF-D1277C45E4D5}"/>
               </a:ext>
             </a:extLst>
           </p:cNvPr>
@@ -2027,7 +2027,7 @@
           <p:cNvPr id="3" name="">
             <a:extLst xmlns:a="http://schemas.openxmlformats.org/drawingml/2006/main">
               <a:ext uri="{FF2B5EF4-FFF2-40B4-BE49-F238E27FC236}">
-                <a16:creationId xmlns:a16="http://schemas.microsoft.com/office/drawing/2014/main" id="{8EDDF49F-CA31-4374-86EA-1DCD8290C19D}"/>
+                <a16:creationId xmlns:a16="http://schemas.microsoft.com/office/drawing/2014/main" id="{5328E098-91E1-4DD1-80DF-3F44909F4D6D}"/>
               </a:ext>
             </a:extLst>
           </p:cNvPr>
@@ -2057,7 +2057,7 @@
           <p:cNvPr id="4" name="">
             <a:extLst xmlns:a="http://schemas.openxmlformats.org/drawingml/2006/main">
               <a:ext uri="{FF2B5EF4-FFF2-40B4-BE49-F238E27FC236}">
-                <a16:creationId xmlns:a16="http://schemas.microsoft.com/office/drawing/2014/main" id="{8CAA159A-E4BE-4105-B460-1208FA7C4B78}"/>
+                <a16:creationId xmlns:a16="http://schemas.microsoft.com/office/drawing/2014/main" id="{321ECF12-BFB8-45D3-AF6E-D01F629A7576}"/>
               </a:ext>
             </a:extLst>
           </p:cNvPr>
@@ -2114,7 +2114,7 @@
           <p:cNvPr id="5" name="">
             <a:extLst xmlns:a="http://schemas.openxmlformats.org/drawingml/2006/main">
               <a:ext uri="{FF2B5EF4-FFF2-40B4-BE49-F238E27FC236}">
-                <a16:creationId xmlns:a16="http://schemas.microsoft.com/office/drawing/2014/main" id="{2F28005E-6E87-4E89-8033-6FEA698082CA}"/>
+                <a16:creationId xmlns:a16="http://schemas.microsoft.com/office/drawing/2014/main" id="{FF701AA5-8248-4179-801A-52781AD9B81D}"/>
               </a:ext>
             </a:extLst>
           </p:cNvPr>
@@ -2171,7 +2171,7 @@
           <p:cNvPr id="6" name="">
             <a:extLst xmlns:a="http://schemas.openxmlformats.org/drawingml/2006/main">
               <a:ext uri="{FF2B5EF4-FFF2-40B4-BE49-F238E27FC236}">
-                <a16:creationId xmlns:a16="http://schemas.microsoft.com/office/drawing/2014/main" id="{A3C2248F-EFEC-4BC3-94FF-0FA7EF369DBA}"/>
+                <a16:creationId xmlns:a16="http://schemas.microsoft.com/office/drawing/2014/main" id="{0C89A1F8-2622-436F-B61A-764CB6461FEE}"/>
               </a:ext>
             </a:extLst>
           </p:cNvPr>
@@ -2228,7 +2228,7 @@
           <p:cNvPr id="7" name="">
             <a:extLst xmlns:a="http://schemas.openxmlformats.org/drawingml/2006/main">
               <a:ext uri="{FF2B5EF4-FFF2-40B4-BE49-F238E27FC236}">
-                <a16:creationId xmlns:a16="http://schemas.microsoft.com/office/drawing/2014/main" id="{4FEDC4D7-77EA-4715-A5D2-C06723490CF8}"/>
+                <a16:creationId xmlns:a16="http://schemas.microsoft.com/office/drawing/2014/main" id="{59F6ECE5-8A7D-424B-B6C8-CD3F0ED3EE58}"/>
               </a:ext>
             </a:extLst>
           </p:cNvPr>
@@ -2262,7 +2262,7 @@
           <p:cNvPr id="8" name="">
             <a:extLst xmlns:a="http://schemas.openxmlformats.org/drawingml/2006/main">
               <a:ext uri="{FF2B5EF4-FFF2-40B4-BE49-F238E27FC236}">
-                <a16:creationId xmlns:a16="http://schemas.microsoft.com/office/drawing/2014/main" id="{5B7D9852-4FC7-4C11-8DCB-F7E78D665330}"/>
+                <a16:creationId xmlns:a16="http://schemas.microsoft.com/office/drawing/2014/main" id="{374A16D3-5D91-4EE7-B6F7-12974BE5A64F}"/>
               </a:ext>
             </a:extLst>
           </p:cNvPr>
@@ -2294,7 +2294,7 @@
           <p:cNvPr id="9" name="">
             <a:extLst xmlns:a="http://schemas.openxmlformats.org/drawingml/2006/main">
               <a:ext uri="{FF2B5EF4-FFF2-40B4-BE49-F238E27FC236}">
-                <a16:creationId xmlns:a16="http://schemas.microsoft.com/office/drawing/2014/main" id="{6A2A5DB0-5C53-4E6D-8A66-D05F49B2CDFC}"/>
+                <a16:creationId xmlns:a16="http://schemas.microsoft.com/office/drawing/2014/main" id="{F39D2DBC-A812-49A1-8E35-B9AFF1CDF5A4}"/>
               </a:ext>
             </a:extLst>
           </p:cNvPr>
@@ -2351,7 +2351,7 @@
           <p:cNvPr id="10" name="">
             <a:extLst xmlns:a="http://schemas.openxmlformats.org/drawingml/2006/main">
               <a:ext uri="{FF2B5EF4-FFF2-40B4-BE49-F238E27FC236}">
-                <a16:creationId xmlns:a16="http://schemas.microsoft.com/office/drawing/2014/main" id="{3A472772-F36D-4CF6-8B03-F2A4023D24AB}"/>
+                <a16:creationId xmlns:a16="http://schemas.microsoft.com/office/drawing/2014/main" id="{EF0CC780-EAF4-465C-8B48-CE483583A32E}"/>
               </a:ext>
             </a:extLst>
           </p:cNvPr>
@@ -2431,7 +2431,7 @@
           <p:cNvPr id="11" name="">
             <a:extLst xmlns:a="http://schemas.openxmlformats.org/drawingml/2006/main">
               <a:ext uri="{FF2B5EF4-FFF2-40B4-BE49-F238E27FC236}">
-                <a16:creationId xmlns:a16="http://schemas.microsoft.com/office/drawing/2014/main" id="{747F0817-5EDB-4DE8-91D3-6DD8DA7E29CE}"/>
+                <a16:creationId xmlns:a16="http://schemas.microsoft.com/office/drawing/2014/main" id="{A1EC963D-B96C-4524-9B85-61D6198F084C}"/>
               </a:ext>
             </a:extLst>
           </p:cNvPr>
@@ -2461,7 +2461,7 @@
           <p:cNvPr id="12" name="">
             <a:extLst xmlns:a="http://schemas.openxmlformats.org/drawingml/2006/main">
               <a:ext uri="{FF2B5EF4-FFF2-40B4-BE49-F238E27FC236}">
-                <a16:creationId xmlns:a16="http://schemas.microsoft.com/office/drawing/2014/main" id="{7521978C-8055-447B-81F3-E3925E99FA62}"/>
+                <a16:creationId xmlns:a16="http://schemas.microsoft.com/office/drawing/2014/main" id="{EF2DD65E-81E9-4538-B3CA-C75E56A5A0F5}"/>
               </a:ext>
             </a:extLst>
           </p:cNvPr>
@@ -2495,7 +2495,7 @@
           <p:cNvPr id="13" name="">
             <a:extLst xmlns:a="http://schemas.openxmlformats.org/drawingml/2006/main">
               <a:ext uri="{FF2B5EF4-FFF2-40B4-BE49-F238E27FC236}">
-                <a16:creationId xmlns:a16="http://schemas.microsoft.com/office/drawing/2014/main" id="{7D83756E-4BCF-4AB0-8C5E-CBE72C2F7D0B}"/>
+                <a16:creationId xmlns:a16="http://schemas.microsoft.com/office/drawing/2014/main" id="{7E7B32BC-E756-4D38-9614-0F18BF3920D2}"/>
               </a:ext>
             </a:extLst>
           </p:cNvPr>
@@ -2527,7 +2527,7 @@
           <p:cNvPr id="14" name="">
             <a:extLst xmlns:a="http://schemas.openxmlformats.org/drawingml/2006/main">
               <a:ext uri="{FF2B5EF4-FFF2-40B4-BE49-F238E27FC236}">
-                <a16:creationId xmlns:a16="http://schemas.microsoft.com/office/drawing/2014/main" id="{53108ADF-2A7A-4961-9A82-CE07A9FFA587}"/>
+                <a16:creationId xmlns:a16="http://schemas.microsoft.com/office/drawing/2014/main" id="{B55849CB-1EC1-43D7-85FE-76D8F6CD90A4}"/>
               </a:ext>
             </a:extLst>
           </p:cNvPr>
@@ -2584,7 +2584,7 @@
           <p:cNvPr id="15" name="">
             <a:extLst xmlns:a="http://schemas.openxmlformats.org/drawingml/2006/main">
               <a:ext uri="{FF2B5EF4-FFF2-40B4-BE49-F238E27FC236}">
-                <a16:creationId xmlns:a16="http://schemas.microsoft.com/office/drawing/2014/main" id="{A6AB23A2-B093-437A-B9F9-9D05813CC97C}"/>
+                <a16:creationId xmlns:a16="http://schemas.microsoft.com/office/drawing/2014/main" id="{AC598822-0D8D-4204-94D3-0C90D265ACA1}"/>
               </a:ext>
             </a:extLst>
           </p:cNvPr>
@@ -2664,7 +2664,7 @@
           <p:cNvPr id="16" name="">
             <a:extLst xmlns:a="http://schemas.openxmlformats.org/drawingml/2006/main">
               <a:ext uri="{FF2B5EF4-FFF2-40B4-BE49-F238E27FC236}">
-                <a16:creationId xmlns:a16="http://schemas.microsoft.com/office/drawing/2014/main" id="{00C03AA0-DF75-4DCB-B896-515D414FE0A4}"/>
+                <a16:creationId xmlns:a16="http://schemas.microsoft.com/office/drawing/2014/main" id="{699B0987-2CE7-4D1B-82D2-E312AEF2E17A}"/>
               </a:ext>
             </a:extLst>
           </p:cNvPr>
@@ -2694,7 +2694,7 @@
           <p:cNvPr id="17" name="">
             <a:extLst xmlns:a="http://schemas.openxmlformats.org/drawingml/2006/main">
               <a:ext uri="{FF2B5EF4-FFF2-40B4-BE49-F238E27FC236}">
-                <a16:creationId xmlns:a16="http://schemas.microsoft.com/office/drawing/2014/main" id="{C750649C-5326-487A-80D8-64A032354976}"/>
+                <a16:creationId xmlns:a16="http://schemas.microsoft.com/office/drawing/2014/main" id="{9E1B3610-1685-4B4B-B6A0-9DFEDE04D536}"/>
               </a:ext>
             </a:extLst>
           </p:cNvPr>
@@ -2728,7 +2728,7 @@
           <p:cNvPr id="18" name="">
             <a:extLst xmlns:a="http://schemas.openxmlformats.org/drawingml/2006/main">
               <a:ext uri="{FF2B5EF4-FFF2-40B4-BE49-F238E27FC236}">
-                <a16:creationId xmlns:a16="http://schemas.microsoft.com/office/drawing/2014/main" id="{7093FD12-79B6-43D6-B563-4242B4C6C38E}"/>
+                <a16:creationId xmlns:a16="http://schemas.microsoft.com/office/drawing/2014/main" id="{C1C7BE5D-046C-4D3F-96F2-02FD81D4E544}"/>
               </a:ext>
             </a:extLst>
           </p:cNvPr>
@@ -2760,7 +2760,7 @@
           <p:cNvPr id="19" name="">
             <a:extLst xmlns:a="http://schemas.openxmlformats.org/drawingml/2006/main">
               <a:ext uri="{FF2B5EF4-FFF2-40B4-BE49-F238E27FC236}">
-                <a16:creationId xmlns:a16="http://schemas.microsoft.com/office/drawing/2014/main" id="{BEF77772-CA67-40B0-8330-3EE793832DCA}"/>
+                <a16:creationId xmlns:a16="http://schemas.microsoft.com/office/drawing/2014/main" id="{AAD21B6F-5264-4625-9F92-7D83B414D018}"/>
               </a:ext>
             </a:extLst>
           </p:cNvPr>
@@ -2817,7 +2817,7 @@
           <p:cNvPr id="20" name="">
             <a:extLst xmlns:a="http://schemas.openxmlformats.org/drawingml/2006/main">
               <a:ext uri="{FF2B5EF4-FFF2-40B4-BE49-F238E27FC236}">
-                <a16:creationId xmlns:a16="http://schemas.microsoft.com/office/drawing/2014/main" id="{592CBB99-F340-42F2-B214-57F9E326FCB1}"/>
+                <a16:creationId xmlns:a16="http://schemas.microsoft.com/office/drawing/2014/main" id="{23D1E04D-E887-4E8C-B57F-04E0095332AD}"/>
               </a:ext>
             </a:extLst>
           </p:cNvPr>
@@ -2897,7 +2897,7 @@
           <p:cNvPr id="21" name="">
             <a:extLst xmlns:a="http://schemas.openxmlformats.org/drawingml/2006/main">
               <a:ext uri="{FF2B5EF4-FFF2-40B4-BE49-F238E27FC236}">
-                <a16:creationId xmlns:a16="http://schemas.microsoft.com/office/drawing/2014/main" id="{0BB5F308-76E2-49E2-A0CF-E81B16573F30}"/>
+                <a16:creationId xmlns:a16="http://schemas.microsoft.com/office/drawing/2014/main" id="{A3AFC1D4-A544-4F28-9DD0-12C5552CC5C9}"/>
               </a:ext>
             </a:extLst>
           </p:cNvPr>
@@ -2927,7 +2927,7 @@
           <p:cNvPr id="22" name="">
             <a:extLst xmlns:a="http://schemas.openxmlformats.org/drawingml/2006/main">
               <a:ext uri="{FF2B5EF4-FFF2-40B4-BE49-F238E27FC236}">
-                <a16:creationId xmlns:a16="http://schemas.microsoft.com/office/drawing/2014/main" id="{41A9D7CA-E6CF-4648-B81B-8072D6AD62C4}"/>
+                <a16:creationId xmlns:a16="http://schemas.microsoft.com/office/drawing/2014/main" id="{AC92CD64-56C7-4D96-B5F3-5CA3B9FBD317}"/>
               </a:ext>
             </a:extLst>
           </p:cNvPr>
@@ -2961,7 +2961,7 @@
           <p:cNvPr id="23" name="">
             <a:extLst xmlns:a="http://schemas.openxmlformats.org/drawingml/2006/main">
               <a:ext uri="{FF2B5EF4-FFF2-40B4-BE49-F238E27FC236}">
-                <a16:creationId xmlns:a16="http://schemas.microsoft.com/office/drawing/2014/main" id="{39DFEACE-CBD9-4176-910E-2B3D7DD83EDE}"/>
+                <a16:creationId xmlns:a16="http://schemas.microsoft.com/office/drawing/2014/main" id="{FEB70F2C-B91D-46A0-9ACB-FC0255A03BCC}"/>
               </a:ext>
             </a:extLst>
           </p:cNvPr>
@@ -2993,7 +2993,7 @@
           <p:cNvPr id="24" name="">
             <a:extLst xmlns:a="http://schemas.openxmlformats.org/drawingml/2006/main">
               <a:ext uri="{FF2B5EF4-FFF2-40B4-BE49-F238E27FC236}">
-                <a16:creationId xmlns:a16="http://schemas.microsoft.com/office/drawing/2014/main" id="{9644AFEB-BE40-42FC-90D5-2AD91628DDB3}"/>
+                <a16:creationId xmlns:a16="http://schemas.microsoft.com/office/drawing/2014/main" id="{62F93259-BBD7-4418-B5CD-8DCAED849A07}"/>
               </a:ext>
             </a:extLst>
           </p:cNvPr>
@@ -3050,7 +3050,7 @@
           <p:cNvPr id="25" name="">
             <a:extLst xmlns:a="http://schemas.openxmlformats.org/drawingml/2006/main">
               <a:ext uri="{FF2B5EF4-FFF2-40B4-BE49-F238E27FC236}">
-                <a16:creationId xmlns:a16="http://schemas.microsoft.com/office/drawing/2014/main" id="{69F0FA7E-AE5B-4BDE-89FA-16FF8055DF7D}"/>
+                <a16:creationId xmlns:a16="http://schemas.microsoft.com/office/drawing/2014/main" id="{1A3DCFA1-1572-4D5F-9B1A-F8593818398B}"/>
               </a:ext>
             </a:extLst>
           </p:cNvPr>
@@ -3130,7 +3130,7 @@
           <p:cNvPr id="26" name="">
             <a:extLst xmlns:a="http://schemas.openxmlformats.org/drawingml/2006/main">
               <a:ext uri="{FF2B5EF4-FFF2-40B4-BE49-F238E27FC236}">
-                <a16:creationId xmlns:a16="http://schemas.microsoft.com/office/drawing/2014/main" id="{E80ACA26-52A1-4E6E-AAA2-8BDE709EA5C5}"/>
+                <a16:creationId xmlns:a16="http://schemas.microsoft.com/office/drawing/2014/main" id="{D94DEBCB-57F1-4DDF-AFD9-5102E2CBF3E7}"/>
               </a:ext>
             </a:extLst>
           </p:cNvPr>
@@ -3160,7 +3160,7 @@
           <p:cNvPr id="27" name="">
             <a:extLst xmlns:a="http://schemas.openxmlformats.org/drawingml/2006/main">
               <a:ext uri="{FF2B5EF4-FFF2-40B4-BE49-F238E27FC236}">
-                <a16:creationId xmlns:a16="http://schemas.microsoft.com/office/drawing/2014/main" id="{29559DDD-7B8F-4608-BE48-89F3303E47E9}"/>
+                <a16:creationId xmlns:a16="http://schemas.microsoft.com/office/drawing/2014/main" id="{E4178E62-E0E7-485A-B3D8-0A7CF50B3FE6}"/>
               </a:ext>
             </a:extLst>
           </p:cNvPr>
@@ -3194,7 +3194,7 @@
           <p:cNvPr id="28" name="">
             <a:extLst xmlns:a="http://schemas.openxmlformats.org/drawingml/2006/main">
               <a:ext uri="{FF2B5EF4-FFF2-40B4-BE49-F238E27FC236}">
-                <a16:creationId xmlns:a16="http://schemas.microsoft.com/office/drawing/2014/main" id="{21F64E0D-87E6-4628-AB5A-8239CF10AC0C}"/>
+                <a16:creationId xmlns:a16="http://schemas.microsoft.com/office/drawing/2014/main" id="{AA92DD5F-9EAE-4800-AABA-F9679E9E8EFA}"/>
               </a:ext>
             </a:extLst>
           </p:cNvPr>
@@ -3226,7 +3226,7 @@
           <p:cNvPr id="29" name="">
             <a:extLst xmlns:a="http://schemas.openxmlformats.org/drawingml/2006/main">
               <a:ext uri="{FF2B5EF4-FFF2-40B4-BE49-F238E27FC236}">
-                <a16:creationId xmlns:a16="http://schemas.microsoft.com/office/drawing/2014/main" id="{AE28DB58-CA44-428C-B75C-C6039B564EE3}"/>
+                <a16:creationId xmlns:a16="http://schemas.microsoft.com/office/drawing/2014/main" id="{E8147818-2808-48BA-9B05-927A982606D8}"/>
               </a:ext>
             </a:extLst>
           </p:cNvPr>
@@ -3283,7 +3283,7 @@
           <p:cNvPr id="30" name="">
             <a:extLst xmlns:a="http://schemas.openxmlformats.org/drawingml/2006/main">
               <a:ext uri="{FF2B5EF4-FFF2-40B4-BE49-F238E27FC236}">
-                <a16:creationId xmlns:a16="http://schemas.microsoft.com/office/drawing/2014/main" id="{BFFD78D4-BEE5-40BD-8DFD-EC786D8ABAF8}"/>
+                <a16:creationId xmlns:a16="http://schemas.microsoft.com/office/drawing/2014/main" id="{2814C527-9016-4216-A5EF-36CF518FC9C4}"/>
               </a:ext>
             </a:extLst>
           </p:cNvPr>
@@ -3363,7 +3363,7 @@
           <p:cNvPr id="31" name="">
             <a:extLst xmlns:a="http://schemas.openxmlformats.org/drawingml/2006/main">
               <a:ext uri="{FF2B5EF4-FFF2-40B4-BE49-F238E27FC236}">
-                <a16:creationId xmlns:a16="http://schemas.microsoft.com/office/drawing/2014/main" id="{622359F8-A2F5-4343-920D-A059FC789C26}"/>
+                <a16:creationId xmlns:a16="http://schemas.microsoft.com/office/drawing/2014/main" id="{AB05E5ED-5056-4063-95DF-037528454530}"/>
               </a:ext>
             </a:extLst>
           </p:cNvPr>
@@ -3420,7 +3420,7 @@
           <p:cNvPr id="32" name="">
             <a:extLst xmlns:a="http://schemas.openxmlformats.org/drawingml/2006/main">
               <a:ext uri="{FF2B5EF4-FFF2-40B4-BE49-F238E27FC236}">
-                <a16:creationId xmlns:a16="http://schemas.microsoft.com/office/drawing/2014/main" id="{84E8A899-9B34-460B-8547-A0746557B9EB}"/>
+                <a16:creationId xmlns:a16="http://schemas.microsoft.com/office/drawing/2014/main" id="{79033D50-B063-4594-92E3-9843E0022B9E}"/>
               </a:ext>
             </a:extLst>
           </p:cNvPr>
@@ -3477,7 +3477,7 @@
           <p:cNvPr id="33" name="">
             <a:extLst xmlns:a="http://schemas.openxmlformats.org/drawingml/2006/main">
               <a:ext uri="{FF2B5EF4-FFF2-40B4-BE49-F238E27FC236}">
-                <a16:creationId xmlns:a16="http://schemas.microsoft.com/office/drawing/2014/main" id="{42FCCE6D-4C4D-40C7-9E6E-3F6FAF2FDA1A}"/>
+                <a16:creationId xmlns:a16="http://schemas.microsoft.com/office/drawing/2014/main" id="{32997F68-2530-4097-839A-514DA28EE37D}"/>
               </a:ext>
             </a:extLst>
           </p:cNvPr>
@@ -3534,7 +3534,7 @@
           <p:cNvPr id="34" name="">
             <a:extLst xmlns:a="http://schemas.openxmlformats.org/drawingml/2006/main">
               <a:ext uri="{FF2B5EF4-FFF2-40B4-BE49-F238E27FC236}">
-                <a16:creationId xmlns:a16="http://schemas.microsoft.com/office/drawing/2014/main" id="{912BC311-5FA9-463A-A752-8A4D9DA07C24}"/>
+                <a16:creationId xmlns:a16="http://schemas.microsoft.com/office/drawing/2014/main" id="{3699BDD2-6C75-44B0-9FA2-C44B266796C0}"/>
               </a:ext>
             </a:extLst>
           </p:cNvPr>
@@ -3591,7 +3591,7 @@
           <p:cNvPr id="35" name="">
             <a:extLst xmlns:a="http://schemas.openxmlformats.org/drawingml/2006/main">
               <a:ext uri="{FF2B5EF4-FFF2-40B4-BE49-F238E27FC236}">
-                <a16:creationId xmlns:a16="http://schemas.microsoft.com/office/drawing/2014/main" id="{74E56CBC-4EB7-460D-AB2E-6D9CAE373704}"/>
+                <a16:creationId xmlns:a16="http://schemas.microsoft.com/office/drawing/2014/main" id="{9C5905EF-D626-47DE-AC26-C2614BCF5812}"/>
               </a:ext>
             </a:extLst>
           </p:cNvPr>
@@ -3648,7 +3648,7 @@
           <p:cNvPr id="36" name="">
             <a:extLst xmlns:a="http://schemas.openxmlformats.org/drawingml/2006/main">
               <a:ext uri="{FF2B5EF4-FFF2-40B4-BE49-F238E27FC236}">
-                <a16:creationId xmlns:a16="http://schemas.microsoft.com/office/drawing/2014/main" id="{7D164BE8-57C6-4626-B707-F26C3B9B3CEA}"/>
+                <a16:creationId xmlns:a16="http://schemas.microsoft.com/office/drawing/2014/main" id="{E97CEA58-AE7F-42AC-B568-FC519C582CD3}"/>
               </a:ext>
             </a:extLst>
           </p:cNvPr>
@@ -3705,7 +3705,7 @@
           <p:cNvPr id="37" name="">
             <a:extLst xmlns:a="http://schemas.openxmlformats.org/drawingml/2006/main">
               <a:ext uri="{FF2B5EF4-FFF2-40B4-BE49-F238E27FC236}">
-                <a16:creationId xmlns:a16="http://schemas.microsoft.com/office/drawing/2014/main" id="{5CC89D65-5AF5-4BFB-B244-74965368AC26}"/>
+                <a16:creationId xmlns:a16="http://schemas.microsoft.com/office/drawing/2014/main" id="{8CA5995F-2477-44F4-AC52-6EAB116055EB}"/>
               </a:ext>
             </a:extLst>
           </p:cNvPr>
@@ -3762,7 +3762,7 @@
           <p:cNvPr id="38" name="">
             <a:extLst xmlns:a="http://schemas.openxmlformats.org/drawingml/2006/main">
               <a:ext uri="{FF2B5EF4-FFF2-40B4-BE49-F238E27FC236}">
-                <a16:creationId xmlns:a16="http://schemas.microsoft.com/office/drawing/2014/main" id="{51FD696C-0DBE-4458-B306-364906B3789A}"/>
+                <a16:creationId xmlns:a16="http://schemas.microsoft.com/office/drawing/2014/main" id="{2585ADD7-160B-4C6E-863E-FE8449DFC2E6}"/>
               </a:ext>
             </a:extLst>
           </p:cNvPr>
@@ -3819,7 +3819,7 @@
           <p:cNvPr id="39" name="">
             <a:extLst xmlns:a="http://schemas.openxmlformats.org/drawingml/2006/main">
               <a:ext uri="{FF2B5EF4-FFF2-40B4-BE49-F238E27FC236}">
-                <a16:creationId xmlns:a16="http://schemas.microsoft.com/office/drawing/2014/main" id="{0CBF763F-9A7D-448B-84C1-59BA63EB0E7A}"/>
+                <a16:creationId xmlns:a16="http://schemas.microsoft.com/office/drawing/2014/main" id="{D08161D3-6E29-4B43-A673-972DA7A7FCDE}"/>
               </a:ext>
             </a:extLst>
           </p:cNvPr>
@@ -3876,7 +3876,7 @@
           <p:cNvPr id="40" name="">
             <a:extLst xmlns:a="http://schemas.openxmlformats.org/drawingml/2006/main">
               <a:ext uri="{FF2B5EF4-FFF2-40B4-BE49-F238E27FC236}">
-                <a16:creationId xmlns:a16="http://schemas.microsoft.com/office/drawing/2014/main" id="{E38F218C-7170-4170-8A9D-93298085EF63}"/>
+                <a16:creationId xmlns:a16="http://schemas.microsoft.com/office/drawing/2014/main" id="{25F284AE-0D23-4C37-AB1C-F1EB8673085D}"/>
               </a:ext>
             </a:extLst>
           </p:cNvPr>
@@ -3933,7 +3933,7 @@
           <p:cNvPr id="41" name="">
             <a:extLst xmlns:a="http://schemas.openxmlformats.org/drawingml/2006/main">
               <a:ext uri="{FF2B5EF4-FFF2-40B4-BE49-F238E27FC236}">
-                <a16:creationId xmlns:a16="http://schemas.microsoft.com/office/drawing/2014/main" id="{D1AD4CFF-7598-408B-851D-35CB4FEBD944}"/>
+                <a16:creationId xmlns:a16="http://schemas.microsoft.com/office/drawing/2014/main" id="{F4CDBF12-79DB-48A6-AA99-DBABDA49E2A7}"/>
               </a:ext>
             </a:extLst>
           </p:cNvPr>
@@ -3990,7 +3990,7 @@
           <p:cNvPr id="42" name="">
             <a:extLst xmlns:a="http://schemas.openxmlformats.org/drawingml/2006/main">
               <a:ext uri="{FF2B5EF4-FFF2-40B4-BE49-F238E27FC236}">
-                <a16:creationId xmlns:a16="http://schemas.microsoft.com/office/drawing/2014/main" id="{C67CE3CD-86E5-45A9-AB61-42C09037F93A}"/>
+                <a16:creationId xmlns:a16="http://schemas.microsoft.com/office/drawing/2014/main" id="{F2153BB1-B9D4-48CC-8A16-500BBA4117F8}"/>
               </a:ext>
             </a:extLst>
           </p:cNvPr>
@@ -4047,7 +4047,7 @@
           <p:cNvPr id="43" name="">
             <a:extLst xmlns:a="http://schemas.openxmlformats.org/drawingml/2006/main">
               <a:ext uri="{FF2B5EF4-FFF2-40B4-BE49-F238E27FC236}">
-                <a16:creationId xmlns:a16="http://schemas.microsoft.com/office/drawing/2014/main" id="{E2C81024-F463-4FFB-85AD-581F6F97B60A}"/>
+                <a16:creationId xmlns:a16="http://schemas.microsoft.com/office/drawing/2014/main" id="{842D6556-081E-48D5-955D-C92D6FCF5546}"/>
               </a:ext>
             </a:extLst>
           </p:cNvPr>
@@ -4104,7 +4104,7 @@
           <p:cNvPr id="44" name="">
             <a:extLst xmlns:a="http://schemas.openxmlformats.org/drawingml/2006/main">
               <a:ext uri="{FF2B5EF4-FFF2-40B4-BE49-F238E27FC236}">
-                <a16:creationId xmlns:a16="http://schemas.microsoft.com/office/drawing/2014/main" id="{09C9B169-4A7A-4A2E-B065-FD0E7CE9B90C}"/>
+                <a16:creationId xmlns:a16="http://schemas.microsoft.com/office/drawing/2014/main" id="{B48FC2A8-F48D-4641-BCE7-89918A73A15D}"/>
               </a:ext>
             </a:extLst>
           </p:cNvPr>
@@ -4136,7 +4136,7 @@
           <p:cNvPr id="45" name="">
             <a:extLst xmlns:a="http://schemas.openxmlformats.org/drawingml/2006/main">
               <a:ext uri="{FF2B5EF4-FFF2-40B4-BE49-F238E27FC236}">
-                <a16:creationId xmlns:a16="http://schemas.microsoft.com/office/drawing/2014/main" id="{CB0346F2-8F82-43D8-A18D-AC983AB5F552}"/>
+                <a16:creationId xmlns:a16="http://schemas.microsoft.com/office/drawing/2014/main" id="{128CB552-67D6-4061-BFD4-DF6A03E8D71C}"/>
               </a:ext>
             </a:extLst>
           </p:cNvPr>
@@ -4191,7 +4191,7 @@
     </p:spTree>
     <p:extLst>
       <p:ext uri="{BB962C8B-B14F-4D97-AF65-F5344CB8AC3E}">
-        <p14:creationId xmlns:p14="http://schemas.microsoft.com/office/powerpoint/2010/main" val="376866593"/>
+        <p14:creationId xmlns:p14="http://schemas.microsoft.com/office/powerpoint/2010/main" val="197672856"/>
       </p:ext>
     </p:extLst>
   </p:cSld>
@@ -4222,7 +4222,7 @@
           <p:cNvPr id="57" name="">
             <a:extLst xmlns:a="http://schemas.openxmlformats.org/drawingml/2006/main">
               <a:ext uri="{FF2B5EF4-FFF2-40B4-BE49-F238E27FC236}">
-                <a16:creationId xmlns:a16="http://schemas.microsoft.com/office/drawing/2014/main" id="{69CB6C18-25BA-4D33-A11A-BEA642DF8221}"/>
+                <a16:creationId xmlns:a16="http://schemas.microsoft.com/office/drawing/2014/main" id="{64F011BB-FF34-43DA-86B7-5A32C7D5EB46}"/>
               </a:ext>
             </a:extLst>
           </p:cNvPr>
@@ -4252,7 +4252,7 @@
           <p:cNvPr id="2" name="">
             <a:extLst xmlns:a="http://schemas.openxmlformats.org/drawingml/2006/main">
               <a:ext uri="{FF2B5EF4-FFF2-40B4-BE49-F238E27FC236}">
-                <a16:creationId xmlns:a16="http://schemas.microsoft.com/office/drawing/2014/main" id="{9F9FF240-13DC-4646-931A-F84BF617810A}"/>
+                <a16:creationId xmlns:a16="http://schemas.microsoft.com/office/drawing/2014/main" id="{259BD839-25A6-4899-89FD-C047910FB1F6}"/>
               </a:ext>
             </a:extLst>
           </p:cNvPr>
@@ -4309,7 +4309,7 @@
           <p:cNvPr id="3" name="">
             <a:extLst xmlns:a="http://schemas.openxmlformats.org/drawingml/2006/main">
               <a:ext uri="{FF2B5EF4-FFF2-40B4-BE49-F238E27FC236}">
-                <a16:creationId xmlns:a16="http://schemas.microsoft.com/office/drawing/2014/main" id="{EFC94DEB-F33E-4583-9875-2C069C7A0B6A}"/>
+                <a16:creationId xmlns:a16="http://schemas.microsoft.com/office/drawing/2014/main" id="{8139E8DC-544B-4C6D-96B2-28F3B3BF846A}"/>
               </a:ext>
             </a:extLst>
           </p:cNvPr>
@@ -4339,7 +4339,7 @@
           <p:cNvPr id="4" name="">
             <a:extLst xmlns:a="http://schemas.openxmlformats.org/drawingml/2006/main">
               <a:ext uri="{FF2B5EF4-FFF2-40B4-BE49-F238E27FC236}">
-                <a16:creationId xmlns:a16="http://schemas.microsoft.com/office/drawing/2014/main" id="{1AFF4680-A91E-4D3D-A5F0-E8D2322AD76E}"/>
+                <a16:creationId xmlns:a16="http://schemas.microsoft.com/office/drawing/2014/main" id="{22864318-7B0A-4B53-B072-F9F3A185B1F9}"/>
               </a:ext>
             </a:extLst>
           </p:cNvPr>
@@ -4396,7 +4396,7 @@
           <p:cNvPr id="5" name="">
             <a:extLst xmlns:a="http://schemas.openxmlformats.org/drawingml/2006/main">
               <a:ext uri="{FF2B5EF4-FFF2-40B4-BE49-F238E27FC236}">
-                <a16:creationId xmlns:a16="http://schemas.microsoft.com/office/drawing/2014/main" id="{86ADC36E-ADA2-4E84-BC7D-14D591D381E1}"/>
+                <a16:creationId xmlns:a16="http://schemas.microsoft.com/office/drawing/2014/main" id="{7582A647-A186-4264-870F-8D8606D71B98}"/>
               </a:ext>
             </a:extLst>
           </p:cNvPr>
@@ -4453,7 +4453,7 @@
           <p:cNvPr id="6" name="">
             <a:extLst xmlns:a="http://schemas.openxmlformats.org/drawingml/2006/main">
               <a:ext uri="{FF2B5EF4-FFF2-40B4-BE49-F238E27FC236}">
-                <a16:creationId xmlns:a16="http://schemas.microsoft.com/office/drawing/2014/main" id="{A7788689-680A-4B4B-8E50-6103E4845F2E}"/>
+                <a16:creationId xmlns:a16="http://schemas.microsoft.com/office/drawing/2014/main" id="{41FD03DE-CBC2-4515-A229-D57164FA80FA}"/>
               </a:ext>
             </a:extLst>
           </p:cNvPr>
@@ -4487,7 +4487,7 @@
           <p:cNvPr id="7" name="">
             <a:extLst xmlns:a="http://schemas.openxmlformats.org/drawingml/2006/main">
               <a:ext uri="{FF2B5EF4-FFF2-40B4-BE49-F238E27FC236}">
-                <a16:creationId xmlns:a16="http://schemas.microsoft.com/office/drawing/2014/main" id="{1249C2E5-3C4A-4707-9AF0-06B1847E48F2}"/>
+                <a16:creationId xmlns:a16="http://schemas.microsoft.com/office/drawing/2014/main" id="{DD2270A5-7312-48CC-B533-E094705E2C29}"/>
               </a:ext>
             </a:extLst>
           </p:cNvPr>
@@ -4519,7 +4519,7 @@
           <p:cNvPr id="8" name="">
             <a:extLst xmlns:a="http://schemas.openxmlformats.org/drawingml/2006/main">
               <a:ext uri="{FF2B5EF4-FFF2-40B4-BE49-F238E27FC236}">
-                <a16:creationId xmlns:a16="http://schemas.microsoft.com/office/drawing/2014/main" id="{D132B4B8-4860-4F46-9FBC-BA238DA6FEFB}"/>
+                <a16:creationId xmlns:a16="http://schemas.microsoft.com/office/drawing/2014/main" id="{B8740235-F449-42AB-8F37-E1E7ABE52F34}"/>
               </a:ext>
             </a:extLst>
           </p:cNvPr>
@@ -4576,7 +4576,7 @@
           <p:cNvPr id="9" name="">
             <a:extLst xmlns:a="http://schemas.openxmlformats.org/drawingml/2006/main">
               <a:ext uri="{FF2B5EF4-FFF2-40B4-BE49-F238E27FC236}">
-                <a16:creationId xmlns:a16="http://schemas.microsoft.com/office/drawing/2014/main" id="{1115566C-9C69-44B0-8690-D12BA0A8639C}"/>
+                <a16:creationId xmlns:a16="http://schemas.microsoft.com/office/drawing/2014/main" id="{2DD87E20-6C2C-4B9C-992B-7DDF6D2BB8A9}"/>
               </a:ext>
             </a:extLst>
           </p:cNvPr>
@@ -4633,7 +4633,7 @@
           <p:cNvPr id="10" name="">
             <a:extLst xmlns:a="http://schemas.openxmlformats.org/drawingml/2006/main">
               <a:ext uri="{FF2B5EF4-FFF2-40B4-BE49-F238E27FC236}">
-                <a16:creationId xmlns:a16="http://schemas.microsoft.com/office/drawing/2014/main" id="{5A46C7D7-DEFB-4FC8-82F5-A856CC9A0357}"/>
+                <a16:creationId xmlns:a16="http://schemas.microsoft.com/office/drawing/2014/main" id="{6FFF794D-6D8A-4C0C-83E3-76B7CFD1BAF6}"/>
               </a:ext>
             </a:extLst>
           </p:cNvPr>
@@ -4690,7 +4690,7 @@
           <p:cNvPr id="11" name="">
             <a:extLst xmlns:a="http://schemas.openxmlformats.org/drawingml/2006/main">
               <a:ext uri="{FF2B5EF4-FFF2-40B4-BE49-F238E27FC236}">
-                <a16:creationId xmlns:a16="http://schemas.microsoft.com/office/drawing/2014/main" id="{F4DE997E-874B-40A4-8622-963CF0962BA4}"/>
+                <a16:creationId xmlns:a16="http://schemas.microsoft.com/office/drawing/2014/main" id="{D6546307-6BFD-4EA0-8E7E-33951D5512E5}"/>
               </a:ext>
             </a:extLst>
           </p:cNvPr>
@@ -4720,7 +4720,7 @@
           <p:cNvPr id="12" name="">
             <a:extLst xmlns:a="http://schemas.openxmlformats.org/drawingml/2006/main">
               <a:ext uri="{FF2B5EF4-FFF2-40B4-BE49-F238E27FC236}">
-                <a16:creationId xmlns:a16="http://schemas.microsoft.com/office/drawing/2014/main" id="{CBF2D581-0F25-426B-B1E3-F0C0ABE9943E}"/>
+                <a16:creationId xmlns:a16="http://schemas.microsoft.com/office/drawing/2014/main" id="{E532C84D-E9A0-4AEC-A4D2-8A957C627D0A}"/>
               </a:ext>
             </a:extLst>
           </p:cNvPr>
@@ -4754,7 +4754,7 @@
           <p:cNvPr id="13" name="">
             <a:extLst xmlns:a="http://schemas.openxmlformats.org/drawingml/2006/main">
               <a:ext uri="{FF2B5EF4-FFF2-40B4-BE49-F238E27FC236}">
-                <a16:creationId xmlns:a16="http://schemas.microsoft.com/office/drawing/2014/main" id="{024F83B6-1D63-4410-9EA2-6F13775ACBAA}"/>
+                <a16:creationId xmlns:a16="http://schemas.microsoft.com/office/drawing/2014/main" id="{AEF8D5F7-4A3C-410F-A907-0C2102C435EE}"/>
               </a:ext>
             </a:extLst>
           </p:cNvPr>
@@ -4786,7 +4786,7 @@
           <p:cNvPr id="14" name="">
             <a:extLst xmlns:a="http://schemas.openxmlformats.org/drawingml/2006/main">
               <a:ext uri="{FF2B5EF4-FFF2-40B4-BE49-F238E27FC236}">
-                <a16:creationId xmlns:a16="http://schemas.microsoft.com/office/drawing/2014/main" id="{FA8211C3-F4EF-4183-896A-2F840AD75DEA}"/>
+                <a16:creationId xmlns:a16="http://schemas.microsoft.com/office/drawing/2014/main" id="{66747862-4F6C-4424-A06E-111DC29D7679}"/>
               </a:ext>
             </a:extLst>
           </p:cNvPr>
@@ -4843,7 +4843,7 @@
           <p:cNvPr id="15" name="">
             <a:extLst xmlns:a="http://schemas.openxmlformats.org/drawingml/2006/main">
               <a:ext uri="{FF2B5EF4-FFF2-40B4-BE49-F238E27FC236}">
-                <a16:creationId xmlns:a16="http://schemas.microsoft.com/office/drawing/2014/main" id="{A60027F4-D419-46F6-8882-B0F8B743655E}"/>
+                <a16:creationId xmlns:a16="http://schemas.microsoft.com/office/drawing/2014/main" id="{E561D083-4575-4553-824A-D6CADC62B3A9}"/>
               </a:ext>
             </a:extLst>
           </p:cNvPr>
@@ -4900,7 +4900,7 @@
           <p:cNvPr id="16" name="">
             <a:extLst xmlns:a="http://schemas.openxmlformats.org/drawingml/2006/main">
               <a:ext uri="{FF2B5EF4-FFF2-40B4-BE49-F238E27FC236}">
-                <a16:creationId xmlns:a16="http://schemas.microsoft.com/office/drawing/2014/main" id="{0A150B9B-0EEF-4A47-B7C4-5DABF07DD1B9}"/>
+                <a16:creationId xmlns:a16="http://schemas.microsoft.com/office/drawing/2014/main" id="{62B591A1-09C8-45E3-BE2C-31FC007445F7}"/>
               </a:ext>
             </a:extLst>
           </p:cNvPr>
@@ -4957,7 +4957,7 @@
           <p:cNvPr id="17" name="">
             <a:extLst xmlns:a="http://schemas.openxmlformats.org/drawingml/2006/main">
               <a:ext uri="{FF2B5EF4-FFF2-40B4-BE49-F238E27FC236}">
-                <a16:creationId xmlns:a16="http://schemas.microsoft.com/office/drawing/2014/main" id="{E587C59A-2D10-4D79-830A-F022E2A2F2DB}"/>
+                <a16:creationId xmlns:a16="http://schemas.microsoft.com/office/drawing/2014/main" id="{1EA2E514-E61B-4D5E-BCBD-FC0799ADBCA2}"/>
               </a:ext>
             </a:extLst>
           </p:cNvPr>
@@ -4987,7 +4987,7 @@
           <p:cNvPr id="18" name="">
             <a:extLst xmlns:a="http://schemas.openxmlformats.org/drawingml/2006/main">
               <a:ext uri="{FF2B5EF4-FFF2-40B4-BE49-F238E27FC236}">
-                <a16:creationId xmlns:a16="http://schemas.microsoft.com/office/drawing/2014/main" id="{E661D9D6-19C1-4D00-BF76-A2F8AAA79499}"/>
+                <a16:creationId xmlns:a16="http://schemas.microsoft.com/office/drawing/2014/main" id="{10F1A724-8112-4F10-94F2-217CFA88BA6C}"/>
               </a:ext>
             </a:extLst>
           </p:cNvPr>
@@ -5021,7 +5021,7 @@
           <p:cNvPr id="19" name="">
             <a:extLst xmlns:a="http://schemas.openxmlformats.org/drawingml/2006/main">
               <a:ext uri="{FF2B5EF4-FFF2-40B4-BE49-F238E27FC236}">
-                <a16:creationId xmlns:a16="http://schemas.microsoft.com/office/drawing/2014/main" id="{0F7699E9-2CC8-4B34-B39B-F3028E42FF77}"/>
+                <a16:creationId xmlns:a16="http://schemas.microsoft.com/office/drawing/2014/main" id="{3F72B3E7-44BB-4965-80F3-84FF877F9C6E}"/>
               </a:ext>
             </a:extLst>
           </p:cNvPr>
@@ -5053,7 +5053,7 @@
           <p:cNvPr id="20" name="">
             <a:extLst xmlns:a="http://schemas.openxmlformats.org/drawingml/2006/main">
               <a:ext uri="{FF2B5EF4-FFF2-40B4-BE49-F238E27FC236}">
-                <a16:creationId xmlns:a16="http://schemas.microsoft.com/office/drawing/2014/main" id="{A2CADD41-82FA-427D-B0F1-53AFDBF735BC}"/>
+                <a16:creationId xmlns:a16="http://schemas.microsoft.com/office/drawing/2014/main" id="{814E15A7-14A0-4EBD-AA91-1BDFE2EF9F33}"/>
               </a:ext>
             </a:extLst>
           </p:cNvPr>
@@ -5110,7 +5110,7 @@
           <p:cNvPr id="21" name="">
             <a:extLst xmlns:a="http://schemas.openxmlformats.org/drawingml/2006/main">
               <a:ext uri="{FF2B5EF4-FFF2-40B4-BE49-F238E27FC236}">
-                <a16:creationId xmlns:a16="http://schemas.microsoft.com/office/drawing/2014/main" id="{DC8F2EF5-F5CB-46EA-AD45-1B2A7AEF66E7}"/>
+                <a16:creationId xmlns:a16="http://schemas.microsoft.com/office/drawing/2014/main" id="{9D015403-4B79-4BA7-BB9A-3C02BF1513FA}"/>
               </a:ext>
             </a:extLst>
           </p:cNvPr>
@@ -5167,7 +5167,7 @@
           <p:cNvPr id="22" name="">
             <a:extLst xmlns:a="http://schemas.openxmlformats.org/drawingml/2006/main">
               <a:ext uri="{FF2B5EF4-FFF2-40B4-BE49-F238E27FC236}">
-                <a16:creationId xmlns:a16="http://schemas.microsoft.com/office/drawing/2014/main" id="{505D5FAA-B911-48F1-AB6A-622624495141}"/>
+                <a16:creationId xmlns:a16="http://schemas.microsoft.com/office/drawing/2014/main" id="{B73F83C8-966A-4832-B4D0-FDE570EA85A5}"/>
               </a:ext>
             </a:extLst>
           </p:cNvPr>
@@ -5224,7 +5224,7 @@
           <p:cNvPr id="23" name="">
             <a:extLst xmlns:a="http://schemas.openxmlformats.org/drawingml/2006/main">
               <a:ext uri="{FF2B5EF4-FFF2-40B4-BE49-F238E27FC236}">
-                <a16:creationId xmlns:a16="http://schemas.microsoft.com/office/drawing/2014/main" id="{A8DCCD34-1686-4C8A-9250-8334D6C6B6D2}"/>
+                <a16:creationId xmlns:a16="http://schemas.microsoft.com/office/drawing/2014/main" id="{B2515A4B-1A53-49AD-BF61-D68EC5288D09}"/>
               </a:ext>
             </a:extLst>
           </p:cNvPr>
@@ -5254,7 +5254,7 @@
           <p:cNvPr id="24" name="">
             <a:extLst xmlns:a="http://schemas.openxmlformats.org/drawingml/2006/main">
               <a:ext uri="{FF2B5EF4-FFF2-40B4-BE49-F238E27FC236}">
-                <a16:creationId xmlns:a16="http://schemas.microsoft.com/office/drawing/2014/main" id="{294748F1-C119-4A0A-BA83-5CB051AEE8D9}"/>
+                <a16:creationId xmlns:a16="http://schemas.microsoft.com/office/drawing/2014/main" id="{83CF0A87-82B9-4B16-956A-47DA203E78FB}"/>
               </a:ext>
             </a:extLst>
           </p:cNvPr>
@@ -5288,7 +5288,7 @@
           <p:cNvPr id="25" name="">
             <a:extLst xmlns:a="http://schemas.openxmlformats.org/drawingml/2006/main">
               <a:ext uri="{FF2B5EF4-FFF2-40B4-BE49-F238E27FC236}">
-                <a16:creationId xmlns:a16="http://schemas.microsoft.com/office/drawing/2014/main" id="{A4AC8D93-60DB-421D-842D-8B9ABEED1D67}"/>
+                <a16:creationId xmlns:a16="http://schemas.microsoft.com/office/drawing/2014/main" id="{0FE7E642-67BF-44F8-9343-3ED871C79E72}"/>
               </a:ext>
             </a:extLst>
           </p:cNvPr>
@@ -5320,7 +5320,7 @@
           <p:cNvPr id="26" name="">
             <a:extLst xmlns:a="http://schemas.openxmlformats.org/drawingml/2006/main">
               <a:ext uri="{FF2B5EF4-FFF2-40B4-BE49-F238E27FC236}">
-                <a16:creationId xmlns:a16="http://schemas.microsoft.com/office/drawing/2014/main" id="{C7824557-B7E9-41D5-ABB1-A9401CDF540D}"/>
+                <a16:creationId xmlns:a16="http://schemas.microsoft.com/office/drawing/2014/main" id="{FD1A5DEE-2DA2-409B-8FD1-1F4D42DBE038}"/>
               </a:ext>
             </a:extLst>
           </p:cNvPr>
@@ -5377,7 +5377,7 @@
           <p:cNvPr id="27" name="">
             <a:extLst xmlns:a="http://schemas.openxmlformats.org/drawingml/2006/main">
               <a:ext uri="{FF2B5EF4-FFF2-40B4-BE49-F238E27FC236}">
-                <a16:creationId xmlns:a16="http://schemas.microsoft.com/office/drawing/2014/main" id="{7D448AD3-D0B6-4CDC-A9E0-7BA0CD10F675}"/>
+                <a16:creationId xmlns:a16="http://schemas.microsoft.com/office/drawing/2014/main" id="{DA69CFDC-669C-48AA-A440-1D25FDF1A45E}"/>
               </a:ext>
             </a:extLst>
           </p:cNvPr>
@@ -5434,7 +5434,7 @@
           <p:cNvPr id="28" name="">
             <a:extLst xmlns:a="http://schemas.openxmlformats.org/drawingml/2006/main">
               <a:ext uri="{FF2B5EF4-FFF2-40B4-BE49-F238E27FC236}">
-                <a16:creationId xmlns:a16="http://schemas.microsoft.com/office/drawing/2014/main" id="{6A8D3AE7-D45E-4347-B4EC-8A75C05F6222}"/>
+                <a16:creationId xmlns:a16="http://schemas.microsoft.com/office/drawing/2014/main" id="{78B0B0B7-C44F-433A-A8E3-9BFF6306A617}"/>
               </a:ext>
             </a:extLst>
           </p:cNvPr>
@@ -5491,7 +5491,7 @@
           <p:cNvPr id="29" name="">
             <a:extLst xmlns:a="http://schemas.openxmlformats.org/drawingml/2006/main">
               <a:ext uri="{FF2B5EF4-FFF2-40B4-BE49-F238E27FC236}">
-                <a16:creationId xmlns:a16="http://schemas.microsoft.com/office/drawing/2014/main" id="{2AB37C5E-6D76-4854-8490-7DE872C1D95E}"/>
+                <a16:creationId xmlns:a16="http://schemas.microsoft.com/office/drawing/2014/main" id="{2768DBAC-6101-407F-A17B-CC8A5D3C0C18}"/>
               </a:ext>
             </a:extLst>
           </p:cNvPr>
@@ -5521,7 +5521,7 @@
           <p:cNvPr id="30" name="">
             <a:extLst xmlns:a="http://schemas.openxmlformats.org/drawingml/2006/main">
               <a:ext uri="{FF2B5EF4-FFF2-40B4-BE49-F238E27FC236}">
-                <a16:creationId xmlns:a16="http://schemas.microsoft.com/office/drawing/2014/main" id="{D90549E9-3338-4A5C-BC02-11477B05BAE0}"/>
+                <a16:creationId xmlns:a16="http://schemas.microsoft.com/office/drawing/2014/main" id="{244CAA04-A447-4408-87A9-90AA1931AFAB}"/>
               </a:ext>
             </a:extLst>
           </p:cNvPr>
@@ -5555,7 +5555,7 @@
           <p:cNvPr id="31" name="">
             <a:extLst xmlns:a="http://schemas.openxmlformats.org/drawingml/2006/main">
               <a:ext uri="{FF2B5EF4-FFF2-40B4-BE49-F238E27FC236}">
-                <a16:creationId xmlns:a16="http://schemas.microsoft.com/office/drawing/2014/main" id="{38494FAD-B77B-469F-88E0-D1C8DA1121F4}"/>
+                <a16:creationId xmlns:a16="http://schemas.microsoft.com/office/drawing/2014/main" id="{2C646DC0-FC88-459A-B08F-7C67E78FC426}"/>
               </a:ext>
             </a:extLst>
           </p:cNvPr>
@@ -5587,7 +5587,7 @@
           <p:cNvPr id="32" name="">
             <a:extLst xmlns:a="http://schemas.openxmlformats.org/drawingml/2006/main">
               <a:ext uri="{FF2B5EF4-FFF2-40B4-BE49-F238E27FC236}">
-                <a16:creationId xmlns:a16="http://schemas.microsoft.com/office/drawing/2014/main" id="{BF0BC6C1-B066-408A-8161-B1BF9E9E0F48}"/>
+                <a16:creationId xmlns:a16="http://schemas.microsoft.com/office/drawing/2014/main" id="{5A73E1E3-E8F6-4B5C-8199-0F582CF6503A}"/>
               </a:ext>
             </a:extLst>
           </p:cNvPr>
@@ -5644,7 +5644,7 @@
           <p:cNvPr id="33" name="">
             <a:extLst xmlns:a="http://schemas.openxmlformats.org/drawingml/2006/main">
               <a:ext uri="{FF2B5EF4-FFF2-40B4-BE49-F238E27FC236}">
-                <a16:creationId xmlns:a16="http://schemas.microsoft.com/office/drawing/2014/main" id="{4E27B85F-F3D6-4206-AA2A-99B39FA0710D}"/>
+                <a16:creationId xmlns:a16="http://schemas.microsoft.com/office/drawing/2014/main" id="{EA0BB935-6303-465D-B07C-30F9C20ABEFC}"/>
               </a:ext>
             </a:extLst>
           </p:cNvPr>
@@ -5701,7 +5701,7 @@
           <p:cNvPr id="34" name="">
             <a:extLst xmlns:a="http://schemas.openxmlformats.org/drawingml/2006/main">
               <a:ext uri="{FF2B5EF4-FFF2-40B4-BE49-F238E27FC236}">
-                <a16:creationId xmlns:a16="http://schemas.microsoft.com/office/drawing/2014/main" id="{C3328018-682F-4CDC-AD81-3D4605C6B8A4}"/>
+                <a16:creationId xmlns:a16="http://schemas.microsoft.com/office/drawing/2014/main" id="{DF550ABA-8790-4B3A-9016-E292BA13F4E1}"/>
               </a:ext>
             </a:extLst>
           </p:cNvPr>
@@ -5758,7 +5758,7 @@
           <p:cNvPr id="35" name="">
             <a:extLst xmlns:a="http://schemas.openxmlformats.org/drawingml/2006/main">
               <a:ext uri="{FF2B5EF4-FFF2-40B4-BE49-F238E27FC236}">
-                <a16:creationId xmlns:a16="http://schemas.microsoft.com/office/drawing/2014/main" id="{DCCAC21B-4178-4BD3-92DA-EAC92A3DDE71}"/>
+                <a16:creationId xmlns:a16="http://schemas.microsoft.com/office/drawing/2014/main" id="{8DF0171E-5FFA-4B3A-9CB4-887652A51F87}"/>
               </a:ext>
             </a:extLst>
           </p:cNvPr>
@@ -5788,7 +5788,7 @@
           <p:cNvPr id="36" name="">
             <a:extLst xmlns:a="http://schemas.openxmlformats.org/drawingml/2006/main">
               <a:ext uri="{FF2B5EF4-FFF2-40B4-BE49-F238E27FC236}">
-                <a16:creationId xmlns:a16="http://schemas.microsoft.com/office/drawing/2014/main" id="{E169117A-6A11-4571-9516-D5453D7D33FC}"/>
+                <a16:creationId xmlns:a16="http://schemas.microsoft.com/office/drawing/2014/main" id="{5547D4C2-1D7C-48E1-9137-9585E51126EF}"/>
               </a:ext>
             </a:extLst>
           </p:cNvPr>
@@ -5822,7 +5822,7 @@
           <p:cNvPr id="37" name="">
             <a:extLst xmlns:a="http://schemas.openxmlformats.org/drawingml/2006/main">
               <a:ext uri="{FF2B5EF4-FFF2-40B4-BE49-F238E27FC236}">
-                <a16:creationId xmlns:a16="http://schemas.microsoft.com/office/drawing/2014/main" id="{03EB4AD0-1FF5-4C0B-B8D4-49C3668235E2}"/>
+                <a16:creationId xmlns:a16="http://schemas.microsoft.com/office/drawing/2014/main" id="{EF4E2F5F-4C54-4E40-835B-9EC56C2F974E}"/>
               </a:ext>
             </a:extLst>
           </p:cNvPr>
@@ -5854,7 +5854,7 @@
           <p:cNvPr id="38" name="">
             <a:extLst xmlns:a="http://schemas.openxmlformats.org/drawingml/2006/main">
               <a:ext uri="{FF2B5EF4-FFF2-40B4-BE49-F238E27FC236}">
-                <a16:creationId xmlns:a16="http://schemas.microsoft.com/office/drawing/2014/main" id="{0983BD9D-F453-4F98-9A69-1386CBB1621C}"/>
+                <a16:creationId xmlns:a16="http://schemas.microsoft.com/office/drawing/2014/main" id="{B5ADBE04-E087-4723-99DE-15307D415958}"/>
               </a:ext>
             </a:extLst>
           </p:cNvPr>
@@ -5911,7 +5911,7 @@
           <p:cNvPr id="39" name="">
             <a:extLst xmlns:a="http://schemas.openxmlformats.org/drawingml/2006/main">
               <a:ext uri="{FF2B5EF4-FFF2-40B4-BE49-F238E27FC236}">
-                <a16:creationId xmlns:a16="http://schemas.microsoft.com/office/drawing/2014/main" id="{4770B9B6-D556-4AA7-B39B-EE08F605FBFB}"/>
+                <a16:creationId xmlns:a16="http://schemas.microsoft.com/office/drawing/2014/main" id="{4C822F58-0567-4539-8874-3EC8ADABE143}"/>
               </a:ext>
             </a:extLst>
           </p:cNvPr>
@@ -5968,7 +5968,7 @@
           <p:cNvPr id="40" name="">
             <a:extLst xmlns:a="http://schemas.openxmlformats.org/drawingml/2006/main">
               <a:ext uri="{FF2B5EF4-FFF2-40B4-BE49-F238E27FC236}">
-                <a16:creationId xmlns:a16="http://schemas.microsoft.com/office/drawing/2014/main" id="{C9B9EDBD-7BC8-42B4-815F-682C230394B8}"/>
+                <a16:creationId xmlns:a16="http://schemas.microsoft.com/office/drawing/2014/main" id="{4679FCB5-2953-4260-940B-D31B0ADF160F}"/>
               </a:ext>
             </a:extLst>
           </p:cNvPr>
@@ -6025,7 +6025,7 @@
           <p:cNvPr id="41" name="">
             <a:extLst xmlns:a="http://schemas.openxmlformats.org/drawingml/2006/main">
               <a:ext uri="{FF2B5EF4-FFF2-40B4-BE49-F238E27FC236}">
-                <a16:creationId xmlns:a16="http://schemas.microsoft.com/office/drawing/2014/main" id="{564F3662-76E8-4B87-94C8-B0E8F332A62D}"/>
+                <a16:creationId xmlns:a16="http://schemas.microsoft.com/office/drawing/2014/main" id="{E0B5CAD6-8E86-4387-8356-74DC720B520A}"/>
               </a:ext>
             </a:extLst>
           </p:cNvPr>
@@ -6082,7 +6082,7 @@
           <p:cNvPr id="42" name="">
             <a:extLst xmlns:a="http://schemas.openxmlformats.org/drawingml/2006/main">
               <a:ext uri="{FF2B5EF4-FFF2-40B4-BE49-F238E27FC236}">
-                <a16:creationId xmlns:a16="http://schemas.microsoft.com/office/drawing/2014/main" id="{4DF498D6-6D2E-4F75-B4FB-9F4EC99C651D}"/>
+                <a16:creationId xmlns:a16="http://schemas.microsoft.com/office/drawing/2014/main" id="{D2871928-D8FF-4F0D-9BCC-5CA4B4934581}"/>
               </a:ext>
             </a:extLst>
           </p:cNvPr>
@@ -6114,7 +6114,7 @@
           <p:cNvPr id="43" name="">
             <a:extLst xmlns:a="http://schemas.openxmlformats.org/drawingml/2006/main">
               <a:ext uri="{FF2B5EF4-FFF2-40B4-BE49-F238E27FC236}">
-                <a16:creationId xmlns:a16="http://schemas.microsoft.com/office/drawing/2014/main" id="{241F8B91-A5FC-44FC-9649-5F4A4FC3F65C}"/>
+                <a16:creationId xmlns:a16="http://schemas.microsoft.com/office/drawing/2014/main" id="{0D4F73EA-716D-4BDF-A958-958B8AA061B8}"/>
               </a:ext>
             </a:extLst>
           </p:cNvPr>
@@ -6171,7 +6171,7 @@
           <p:cNvPr id="44" name="">
             <a:extLst xmlns:a="http://schemas.openxmlformats.org/drawingml/2006/main">
               <a:ext uri="{FF2B5EF4-FFF2-40B4-BE49-F238E27FC236}">
-                <a16:creationId xmlns:a16="http://schemas.microsoft.com/office/drawing/2014/main" id="{96AFB86E-7281-4234-B8FE-0EF9B5CC7113}"/>
+                <a16:creationId xmlns:a16="http://schemas.microsoft.com/office/drawing/2014/main" id="{FCB78B87-FA4D-4497-959E-F6F71C431988}"/>
               </a:ext>
             </a:extLst>
           </p:cNvPr>
@@ -6228,7 +6228,7 @@
           <p:cNvPr id="45" name="">
             <a:extLst xmlns:a="http://schemas.openxmlformats.org/drawingml/2006/main">
               <a:ext uri="{FF2B5EF4-FFF2-40B4-BE49-F238E27FC236}">
-                <a16:creationId xmlns:a16="http://schemas.microsoft.com/office/drawing/2014/main" id="{C92953D0-B903-4E37-80C4-8B9B66635152}"/>
+                <a16:creationId xmlns:a16="http://schemas.microsoft.com/office/drawing/2014/main" id="{D07928A8-3E9A-4F1D-948E-5C56D73787F1}"/>
               </a:ext>
             </a:extLst>
           </p:cNvPr>
@@ -6285,7 +6285,7 @@
           <p:cNvPr id="46" name="">
             <a:extLst xmlns:a="http://schemas.openxmlformats.org/drawingml/2006/main">
               <a:ext uri="{FF2B5EF4-FFF2-40B4-BE49-F238E27FC236}">
-                <a16:creationId xmlns:a16="http://schemas.microsoft.com/office/drawing/2014/main" id="{340C8274-C458-4630-B0CC-500C97EB9E11}"/>
+                <a16:creationId xmlns:a16="http://schemas.microsoft.com/office/drawing/2014/main" id="{7C3D2FA8-88A0-45BD-B6BD-59912C151B70}"/>
               </a:ext>
             </a:extLst>
           </p:cNvPr>
@@ -6342,7 +6342,7 @@
           <p:cNvPr id="47" name="">
             <a:extLst xmlns:a="http://schemas.openxmlformats.org/drawingml/2006/main">
               <a:ext uri="{FF2B5EF4-FFF2-40B4-BE49-F238E27FC236}">
-                <a16:creationId xmlns:a16="http://schemas.microsoft.com/office/drawing/2014/main" id="{EEB4A7A7-972D-43E2-A242-49B8A9A8C99E}"/>
+                <a16:creationId xmlns:a16="http://schemas.microsoft.com/office/drawing/2014/main" id="{BF01C491-5641-43DC-ABF8-228FEA6F5546}"/>
               </a:ext>
             </a:extLst>
           </p:cNvPr>
@@ -6399,7 +6399,7 @@
           <p:cNvPr id="48" name="">
             <a:extLst xmlns:a="http://schemas.openxmlformats.org/drawingml/2006/main">
               <a:ext uri="{FF2B5EF4-FFF2-40B4-BE49-F238E27FC236}">
-                <a16:creationId xmlns:a16="http://schemas.microsoft.com/office/drawing/2014/main" id="{4DAAC224-51C5-421B-BA42-8329BB83F293}"/>
+                <a16:creationId xmlns:a16="http://schemas.microsoft.com/office/drawing/2014/main" id="{0638137A-E622-446E-BF57-798340F594C6}"/>
               </a:ext>
             </a:extLst>
           </p:cNvPr>
@@ -6456,7 +6456,7 @@
           <p:cNvPr id="49" name="">
             <a:extLst xmlns:a="http://schemas.openxmlformats.org/drawingml/2006/main">
               <a:ext uri="{FF2B5EF4-FFF2-40B4-BE49-F238E27FC236}">
-                <a16:creationId xmlns:a16="http://schemas.microsoft.com/office/drawing/2014/main" id="{A26CDF2A-FD7F-49C8-A69F-2A4935ADD368}"/>
+                <a16:creationId xmlns:a16="http://schemas.microsoft.com/office/drawing/2014/main" id="{6986A958-1B5E-4E52-A77C-D84EDDB8225F}"/>
               </a:ext>
             </a:extLst>
           </p:cNvPr>
@@ -6513,7 +6513,7 @@
           <p:cNvPr id="50" name="">
             <a:extLst xmlns:a="http://schemas.openxmlformats.org/drawingml/2006/main">
               <a:ext uri="{FF2B5EF4-FFF2-40B4-BE49-F238E27FC236}">
-                <a16:creationId xmlns:a16="http://schemas.microsoft.com/office/drawing/2014/main" id="{76ACAC60-5AAA-4118-B518-402F83E23843}"/>
+                <a16:creationId xmlns:a16="http://schemas.microsoft.com/office/drawing/2014/main" id="{030D383E-1A02-4E6D-AA34-6296C62B643B}"/>
               </a:ext>
             </a:extLst>
           </p:cNvPr>
@@ -6593,7 +6593,7 @@
           <p:cNvPr id="51" name="">
             <a:extLst xmlns:a="http://schemas.openxmlformats.org/drawingml/2006/main">
               <a:ext uri="{FF2B5EF4-FFF2-40B4-BE49-F238E27FC236}">
-                <a16:creationId xmlns:a16="http://schemas.microsoft.com/office/drawing/2014/main" id="{29AA84BA-2D15-44F2-825A-181036A3E486}"/>
+                <a16:creationId xmlns:a16="http://schemas.microsoft.com/office/drawing/2014/main" id="{ADEC3B8B-8413-491E-B721-F159EB9BD0B7}"/>
               </a:ext>
             </a:extLst>
           </p:cNvPr>
@@ -6650,7 +6650,7 @@
           <p:cNvPr id="52" name="">
             <a:extLst xmlns:a="http://schemas.openxmlformats.org/drawingml/2006/main">
               <a:ext uri="{FF2B5EF4-FFF2-40B4-BE49-F238E27FC236}">
-                <a16:creationId xmlns:a16="http://schemas.microsoft.com/office/drawing/2014/main" id="{E9121261-A367-41D4-B357-ED6A94AA0A09}"/>
+                <a16:creationId xmlns:a16="http://schemas.microsoft.com/office/drawing/2014/main" id="{3A7C0B19-01F5-441B-B3F8-3570836294E4}"/>
               </a:ext>
             </a:extLst>
           </p:cNvPr>
@@ -6730,7 +6730,7 @@
           <p:cNvPr id="53" name="">
             <a:extLst xmlns:a="http://schemas.openxmlformats.org/drawingml/2006/main">
               <a:ext uri="{FF2B5EF4-FFF2-40B4-BE49-F238E27FC236}">
-                <a16:creationId xmlns:a16="http://schemas.microsoft.com/office/drawing/2014/main" id="{7FCB778B-4C4C-47FB-99BA-D074AF53872E}"/>
+                <a16:creationId xmlns:a16="http://schemas.microsoft.com/office/drawing/2014/main" id="{3A01DC34-1758-4C01-9EC1-3BAFA98775A4}"/>
               </a:ext>
             </a:extLst>
           </p:cNvPr>
@@ -6787,7 +6787,7 @@
           <p:cNvPr id="54" name="">
             <a:extLst xmlns:a="http://schemas.openxmlformats.org/drawingml/2006/main">
               <a:ext uri="{FF2B5EF4-FFF2-40B4-BE49-F238E27FC236}">
-                <a16:creationId xmlns:a16="http://schemas.microsoft.com/office/drawing/2014/main" id="{E4109BC0-B15C-436F-88F5-1F41BF164FE6}"/>
+                <a16:creationId xmlns:a16="http://schemas.microsoft.com/office/drawing/2014/main" id="{B22587A5-E9DE-4DAD-9299-C365E5DA0FAC}"/>
               </a:ext>
             </a:extLst>
           </p:cNvPr>
@@ -6867,7 +6867,7 @@
           <p:cNvPr id="55" name="">
             <a:extLst xmlns:a="http://schemas.openxmlformats.org/drawingml/2006/main">
               <a:ext uri="{FF2B5EF4-FFF2-40B4-BE49-F238E27FC236}">
-                <a16:creationId xmlns:a16="http://schemas.microsoft.com/office/drawing/2014/main" id="{7838BF10-383F-4C63-928A-DC1E3F621D1B}"/>
+                <a16:creationId xmlns:a16="http://schemas.microsoft.com/office/drawing/2014/main" id="{47DBD8D4-EDD9-401C-94B2-5F883772B281}"/>
               </a:ext>
             </a:extLst>
           </p:cNvPr>
@@ -6899,7 +6899,7 @@
           <p:cNvPr id="56" name="">
             <a:extLst xmlns:a="http://schemas.openxmlformats.org/drawingml/2006/main">
               <a:ext uri="{FF2B5EF4-FFF2-40B4-BE49-F238E27FC236}">
-                <a16:creationId xmlns:a16="http://schemas.microsoft.com/office/drawing/2014/main" id="{E76480E4-25AA-4F00-B09A-8796F192FF0E}"/>
+                <a16:creationId xmlns:a16="http://schemas.microsoft.com/office/drawing/2014/main" id="{D2A13A4B-6F4F-4D25-A128-6231BF7918EC}"/>
               </a:ext>
             </a:extLst>
           </p:cNvPr>
@@ -6954,7 +6954,7 @@
     </p:spTree>
     <p:extLst>
       <p:ext uri="{BB962C8B-B14F-4D97-AF65-F5344CB8AC3E}">
-        <p14:creationId xmlns:p14="http://schemas.microsoft.com/office/powerpoint/2010/main" val="671958288"/>
+        <p14:creationId xmlns:p14="http://schemas.microsoft.com/office/powerpoint/2010/main" val="369713276"/>
       </p:ext>
     </p:extLst>
   </p:cSld>
@@ -6985,7 +6985,7 @@
           <p:cNvPr id="44" name="">
             <a:extLst xmlns:a="http://schemas.openxmlformats.org/drawingml/2006/main">
               <a:ext uri="{FF2B5EF4-FFF2-40B4-BE49-F238E27FC236}">
-                <a16:creationId xmlns:a16="http://schemas.microsoft.com/office/drawing/2014/main" id="{D45EA8FE-718C-4A7E-9300-30B7A19D70F5}"/>
+                <a16:creationId xmlns:a16="http://schemas.microsoft.com/office/drawing/2014/main" id="{A301DC41-1C2D-4F2B-AD8C-85A5ECD61ED2}"/>
               </a:ext>
             </a:extLst>
           </p:cNvPr>
@@ -7015,7 +7015,7 @@
           <p:cNvPr id="2" name="">
             <a:extLst xmlns:a="http://schemas.openxmlformats.org/drawingml/2006/main">
               <a:ext uri="{FF2B5EF4-FFF2-40B4-BE49-F238E27FC236}">
-                <a16:creationId xmlns:a16="http://schemas.microsoft.com/office/drawing/2014/main" id="{8BD59600-4BBC-4D26-9795-9604A15C7E2D}"/>
+                <a16:creationId xmlns:a16="http://schemas.microsoft.com/office/drawing/2014/main" id="{1E441AA8-0B20-43C2-BBB8-95CF06C50F6E}"/>
               </a:ext>
             </a:extLst>
           </p:cNvPr>
@@ -7072,7 +7072,7 @@
           <p:cNvPr id="3" name="">
             <a:extLst xmlns:a="http://schemas.openxmlformats.org/drawingml/2006/main">
               <a:ext uri="{FF2B5EF4-FFF2-40B4-BE49-F238E27FC236}">
-                <a16:creationId xmlns:a16="http://schemas.microsoft.com/office/drawing/2014/main" id="{380662E1-0A63-42E6-9E82-0C2254C314E7}"/>
+                <a16:creationId xmlns:a16="http://schemas.microsoft.com/office/drawing/2014/main" id="{42BBCC6D-ADA0-4C2C-8562-9949078E652D}"/>
               </a:ext>
             </a:extLst>
           </p:cNvPr>
@@ -7102,7 +7102,7 @@
           <p:cNvPr id="4" name="">
             <a:extLst xmlns:a="http://schemas.openxmlformats.org/drawingml/2006/main">
               <a:ext uri="{FF2B5EF4-FFF2-40B4-BE49-F238E27FC236}">
-                <a16:creationId xmlns:a16="http://schemas.microsoft.com/office/drawing/2014/main" id="{DA2BCA77-4294-46D9-852A-3FB8EC2CA539}"/>
+                <a16:creationId xmlns:a16="http://schemas.microsoft.com/office/drawing/2014/main" id="{3C39DFE0-6BFD-4C84-BB8D-EA22FF6D0B1A}"/>
               </a:ext>
             </a:extLst>
           </p:cNvPr>
@@ -7159,7 +7159,7 @@
           <p:cNvPr id="5" name="">
             <a:extLst xmlns:a="http://schemas.openxmlformats.org/drawingml/2006/main">
               <a:ext uri="{FF2B5EF4-FFF2-40B4-BE49-F238E27FC236}">
-                <a16:creationId xmlns:a16="http://schemas.microsoft.com/office/drawing/2014/main" id="{E39F366E-506B-490E-BFF1-5804212885C7}"/>
+                <a16:creationId xmlns:a16="http://schemas.microsoft.com/office/drawing/2014/main" id="{21123301-B235-4A6C-A941-86438BE10626}"/>
               </a:ext>
             </a:extLst>
           </p:cNvPr>
@@ -7216,7 +7216,7 @@
           <p:cNvPr id="6" name="">
             <a:extLst xmlns:a="http://schemas.openxmlformats.org/drawingml/2006/main">
               <a:ext uri="{FF2B5EF4-FFF2-40B4-BE49-F238E27FC236}">
-                <a16:creationId xmlns:a16="http://schemas.microsoft.com/office/drawing/2014/main" id="{77685EFF-5BCA-404B-A196-021AECE10538}"/>
+                <a16:creationId xmlns:a16="http://schemas.microsoft.com/office/drawing/2014/main" id="{43AEF528-3075-4C82-934D-F07CBD6C80FD}"/>
               </a:ext>
             </a:extLst>
           </p:cNvPr>
@@ -7273,7 +7273,7 @@
           <p:cNvPr id="7" name="">
             <a:extLst xmlns:a="http://schemas.openxmlformats.org/drawingml/2006/main">
               <a:ext uri="{FF2B5EF4-FFF2-40B4-BE49-F238E27FC236}">
-                <a16:creationId xmlns:a16="http://schemas.microsoft.com/office/drawing/2014/main" id="{DBEDFF91-9E6B-44C8-B842-4B63986E4A30}"/>
+                <a16:creationId xmlns:a16="http://schemas.microsoft.com/office/drawing/2014/main" id="{337FACAB-384A-47F5-B56E-73E3FE8BBF70}"/>
               </a:ext>
             </a:extLst>
           </p:cNvPr>
@@ -7303,7 +7303,7 @@
           <p:cNvPr id="8" name="">
             <a:extLst xmlns:a="http://schemas.openxmlformats.org/drawingml/2006/main">
               <a:ext uri="{FF2B5EF4-FFF2-40B4-BE49-F238E27FC236}">
-                <a16:creationId xmlns:a16="http://schemas.microsoft.com/office/drawing/2014/main" id="{0E9BD3E0-E427-4AB1-80C8-FD0BF3A88558}"/>
+                <a16:creationId xmlns:a16="http://schemas.microsoft.com/office/drawing/2014/main" id="{C580BC1A-D137-4562-9597-D5EAD378EB6F}"/>
               </a:ext>
             </a:extLst>
           </p:cNvPr>
@@ -7360,7 +7360,7 @@
           <p:cNvPr id="9" name="">
             <a:extLst xmlns:a="http://schemas.openxmlformats.org/drawingml/2006/main">
               <a:ext uri="{FF2B5EF4-FFF2-40B4-BE49-F238E27FC236}">
-                <a16:creationId xmlns:a16="http://schemas.microsoft.com/office/drawing/2014/main" id="{1A722D93-1DE7-47F0-918C-95CDCBB4DC49}"/>
+                <a16:creationId xmlns:a16="http://schemas.microsoft.com/office/drawing/2014/main" id="{988620DA-64C5-46B9-A3DE-86BF2EEDFD52}"/>
               </a:ext>
             </a:extLst>
           </p:cNvPr>
@@ -7407,7 +7407,7 @@
                 <a:ea typeface="Malgun Gothic"/>
                 <a:cs typeface="Malgun Gothic"/>
               </a:rPr>
-              <a:t>적용 기법  |  Bounded Deliberation + 제한적 ReAct Self-Correction</a:t>
+              <a:t>적용 기법  |  Bounded Multi-Hypothesis Deliberation + 제한적 ReAct Self-Correction</a:t>
             </a:r>
           </a:p>
         </p:txBody>
@@ -7417,7 +7417,7 @@
           <p:cNvPr id="10" name="">
             <a:extLst xmlns:a="http://schemas.openxmlformats.org/drawingml/2006/main">
               <a:ext uri="{FF2B5EF4-FFF2-40B4-BE49-F238E27FC236}">
-                <a16:creationId xmlns:a16="http://schemas.microsoft.com/office/drawing/2014/main" id="{F16D4674-DE55-4740-8006-96AA05EBB2E9}"/>
+                <a16:creationId xmlns:a16="http://schemas.microsoft.com/office/drawing/2014/main" id="{09E453D0-7C6D-4EDA-9434-4ECB9EC813D5}"/>
               </a:ext>
             </a:extLst>
           </p:cNvPr>
@@ -7474,7 +7474,7 @@
           <p:cNvPr id="11" name="">
             <a:extLst xmlns:a="http://schemas.openxmlformats.org/drawingml/2006/main">
               <a:ext uri="{FF2B5EF4-FFF2-40B4-BE49-F238E27FC236}">
-                <a16:creationId xmlns:a16="http://schemas.microsoft.com/office/drawing/2014/main" id="{6994D7A4-50E1-4FB9-81D4-CF15053C8291}"/>
+                <a16:creationId xmlns:a16="http://schemas.microsoft.com/office/drawing/2014/main" id="{EDB7A92D-DDC1-460E-BD99-6D6A67F81D53}"/>
               </a:ext>
             </a:extLst>
           </p:cNvPr>
@@ -7506,7 +7506,7 @@
           <p:cNvPr id="12" name="">
             <a:extLst xmlns:a="http://schemas.openxmlformats.org/drawingml/2006/main">
               <a:ext uri="{FF2B5EF4-FFF2-40B4-BE49-F238E27FC236}">
-                <a16:creationId xmlns:a16="http://schemas.microsoft.com/office/drawing/2014/main" id="{CBCF50F6-01DF-48D0-B245-DBE393FBDD29}"/>
+                <a16:creationId xmlns:a16="http://schemas.microsoft.com/office/drawing/2014/main" id="{6EFE7D67-3C66-4327-82BF-6EEF58D1C99B}"/>
               </a:ext>
             </a:extLst>
           </p:cNvPr>
@@ -7563,7 +7563,7 @@
           <p:cNvPr id="13" name="">
             <a:extLst xmlns:a="http://schemas.openxmlformats.org/drawingml/2006/main">
               <a:ext uri="{FF2B5EF4-FFF2-40B4-BE49-F238E27FC236}">
-                <a16:creationId xmlns:a16="http://schemas.microsoft.com/office/drawing/2014/main" id="{E758E61B-D2FA-4561-952E-4F103CB71C4E}"/>
+                <a16:creationId xmlns:a16="http://schemas.microsoft.com/office/drawing/2014/main" id="{2A6FC9DA-9C0A-453F-88D0-FF08F42D6105}"/>
               </a:ext>
             </a:extLst>
           </p:cNvPr>
@@ -7620,7 +7620,7 @@
           <p:cNvPr id="14" name="">
             <a:extLst xmlns:a="http://schemas.openxmlformats.org/drawingml/2006/main">
               <a:ext uri="{FF2B5EF4-FFF2-40B4-BE49-F238E27FC236}">
-                <a16:creationId xmlns:a16="http://schemas.microsoft.com/office/drawing/2014/main" id="{6B528EEB-507E-4C9A-831B-D1D04A20FA69}"/>
+                <a16:creationId xmlns:a16="http://schemas.microsoft.com/office/drawing/2014/main" id="{5FCDFFB2-D8C2-48DD-A7C3-66FB909A3E1B}"/>
               </a:ext>
             </a:extLst>
           </p:cNvPr>
@@ -7677,7 +7677,7 @@
           <p:cNvPr id="15" name="">
             <a:extLst xmlns:a="http://schemas.openxmlformats.org/drawingml/2006/main">
               <a:ext uri="{FF2B5EF4-FFF2-40B4-BE49-F238E27FC236}">
-                <a16:creationId xmlns:a16="http://schemas.microsoft.com/office/drawing/2014/main" id="{915DFB29-BB19-42AA-9933-A700A5E9E4A3}"/>
+                <a16:creationId xmlns:a16="http://schemas.microsoft.com/office/drawing/2014/main" id="{B6438852-EB3E-4EF1-96C0-CBBEAA34A865}"/>
               </a:ext>
             </a:extLst>
           </p:cNvPr>
@@ -7709,7 +7709,7 @@
           <p:cNvPr id="16" name="">
             <a:extLst xmlns:a="http://schemas.openxmlformats.org/drawingml/2006/main">
               <a:ext uri="{FF2B5EF4-FFF2-40B4-BE49-F238E27FC236}">
-                <a16:creationId xmlns:a16="http://schemas.microsoft.com/office/drawing/2014/main" id="{937F272D-5DCC-4315-A531-BD6616A0BBBF}"/>
+                <a16:creationId xmlns:a16="http://schemas.microsoft.com/office/drawing/2014/main" id="{F9BFADE9-876F-4F8B-8B7B-54A8B30752EA}"/>
               </a:ext>
             </a:extLst>
           </p:cNvPr>
@@ -7766,7 +7766,7 @@
           <p:cNvPr id="17" name="">
             <a:extLst xmlns:a="http://schemas.openxmlformats.org/drawingml/2006/main">
               <a:ext uri="{FF2B5EF4-FFF2-40B4-BE49-F238E27FC236}">
-                <a16:creationId xmlns:a16="http://schemas.microsoft.com/office/drawing/2014/main" id="{7CD6B9E3-D0D4-4405-8AFE-A33FB8310822}"/>
+                <a16:creationId xmlns:a16="http://schemas.microsoft.com/office/drawing/2014/main" id="{A053DEEA-4831-4437-951C-C6758EB7606C}"/>
               </a:ext>
             </a:extLst>
           </p:cNvPr>
@@ -7823,7 +7823,7 @@
           <p:cNvPr id="18" name="">
             <a:extLst xmlns:a="http://schemas.openxmlformats.org/drawingml/2006/main">
               <a:ext uri="{FF2B5EF4-FFF2-40B4-BE49-F238E27FC236}">
-                <a16:creationId xmlns:a16="http://schemas.microsoft.com/office/drawing/2014/main" id="{11A09723-3B0D-4F93-A163-8AEF8350C6AA}"/>
+                <a16:creationId xmlns:a16="http://schemas.microsoft.com/office/drawing/2014/main" id="{52A023B7-E1A1-4181-A7D8-1F29FD3CDAC1}"/>
               </a:ext>
             </a:extLst>
           </p:cNvPr>
@@ -7880,7 +7880,7 @@
           <p:cNvPr id="19" name="">
             <a:extLst xmlns:a="http://schemas.openxmlformats.org/drawingml/2006/main">
               <a:ext uri="{FF2B5EF4-FFF2-40B4-BE49-F238E27FC236}">
-                <a16:creationId xmlns:a16="http://schemas.microsoft.com/office/drawing/2014/main" id="{5B18B30F-B1BE-490B-A69F-6825A2E4F58F}"/>
+                <a16:creationId xmlns:a16="http://schemas.microsoft.com/office/drawing/2014/main" id="{2FC328A1-0695-4F8C-B87E-10FE3304A98F}"/>
               </a:ext>
             </a:extLst>
           </p:cNvPr>
@@ -7912,7 +7912,7 @@
           <p:cNvPr id="20" name="">
             <a:extLst xmlns:a="http://schemas.openxmlformats.org/drawingml/2006/main">
               <a:ext uri="{FF2B5EF4-FFF2-40B4-BE49-F238E27FC236}">
-                <a16:creationId xmlns:a16="http://schemas.microsoft.com/office/drawing/2014/main" id="{52649182-7600-41B7-8AAF-F5C9829DD3DD}"/>
+                <a16:creationId xmlns:a16="http://schemas.microsoft.com/office/drawing/2014/main" id="{C18024DC-158F-46EE-B3C0-B78FE066456A}"/>
               </a:ext>
             </a:extLst>
           </p:cNvPr>
@@ -7969,7 +7969,7 @@
           <p:cNvPr id="21" name="">
             <a:extLst xmlns:a="http://schemas.openxmlformats.org/drawingml/2006/main">
               <a:ext uri="{FF2B5EF4-FFF2-40B4-BE49-F238E27FC236}">
-                <a16:creationId xmlns:a16="http://schemas.microsoft.com/office/drawing/2014/main" id="{66F6EEEC-C706-4503-81D1-673174BB1789}"/>
+                <a16:creationId xmlns:a16="http://schemas.microsoft.com/office/drawing/2014/main" id="{11F5541D-32D3-47CD-83B2-247F91210B25}"/>
               </a:ext>
             </a:extLst>
           </p:cNvPr>
@@ -8026,7 +8026,7 @@
           <p:cNvPr id="22" name="">
             <a:extLst xmlns:a="http://schemas.openxmlformats.org/drawingml/2006/main">
               <a:ext uri="{FF2B5EF4-FFF2-40B4-BE49-F238E27FC236}">
-                <a16:creationId xmlns:a16="http://schemas.microsoft.com/office/drawing/2014/main" id="{446A9631-1B36-4CE2-BBE9-00EF581BDEAB}"/>
+                <a16:creationId xmlns:a16="http://schemas.microsoft.com/office/drawing/2014/main" id="{6B404302-E623-4D59-B408-384EB4DD5122}"/>
               </a:ext>
             </a:extLst>
           </p:cNvPr>
@@ -8083,7 +8083,7 @@
           <p:cNvPr id="23" name="">
             <a:extLst xmlns:a="http://schemas.openxmlformats.org/drawingml/2006/main">
               <a:ext uri="{FF2B5EF4-FFF2-40B4-BE49-F238E27FC236}">
-                <a16:creationId xmlns:a16="http://schemas.microsoft.com/office/drawing/2014/main" id="{9A34C278-8B83-418D-83E9-5ED1B08899A9}"/>
+                <a16:creationId xmlns:a16="http://schemas.microsoft.com/office/drawing/2014/main" id="{C6B13F5E-6A70-40DD-8B76-C644917C2996}"/>
               </a:ext>
             </a:extLst>
           </p:cNvPr>
@@ -8115,7 +8115,7 @@
           <p:cNvPr id="24" name="">
             <a:extLst xmlns:a="http://schemas.openxmlformats.org/drawingml/2006/main">
               <a:ext uri="{FF2B5EF4-FFF2-40B4-BE49-F238E27FC236}">
-                <a16:creationId xmlns:a16="http://schemas.microsoft.com/office/drawing/2014/main" id="{14203EBB-5D4D-411C-87BE-EA9EFCF75FC6}"/>
+                <a16:creationId xmlns:a16="http://schemas.microsoft.com/office/drawing/2014/main" id="{7878D297-AAE6-45E1-B57E-E5666F0103B0}"/>
               </a:ext>
             </a:extLst>
           </p:cNvPr>
@@ -8172,7 +8172,7 @@
           <p:cNvPr id="25" name="">
             <a:extLst xmlns:a="http://schemas.openxmlformats.org/drawingml/2006/main">
               <a:ext uri="{FF2B5EF4-FFF2-40B4-BE49-F238E27FC236}">
-                <a16:creationId xmlns:a16="http://schemas.microsoft.com/office/drawing/2014/main" id="{26686297-ADAC-4236-BD5F-1D19F8302BCB}"/>
+                <a16:creationId xmlns:a16="http://schemas.microsoft.com/office/drawing/2014/main" id="{A22CAF27-7B06-4654-81CA-A9E357FF9BAF}"/>
               </a:ext>
             </a:extLst>
           </p:cNvPr>
@@ -8229,7 +8229,7 @@
           <p:cNvPr id="26" name="">
             <a:extLst xmlns:a="http://schemas.openxmlformats.org/drawingml/2006/main">
               <a:ext uri="{FF2B5EF4-FFF2-40B4-BE49-F238E27FC236}">
-                <a16:creationId xmlns:a16="http://schemas.microsoft.com/office/drawing/2014/main" id="{986F2152-762D-4FFF-BE18-E7650F0A26A9}"/>
+                <a16:creationId xmlns:a16="http://schemas.microsoft.com/office/drawing/2014/main" id="{26A8002F-E131-4D00-8D13-05452E6801CA}"/>
               </a:ext>
             </a:extLst>
           </p:cNvPr>
@@ -8286,7 +8286,7 @@
           <p:cNvPr id="27" name="">
             <a:extLst xmlns:a="http://schemas.openxmlformats.org/drawingml/2006/main">
               <a:ext uri="{FF2B5EF4-FFF2-40B4-BE49-F238E27FC236}">
-                <a16:creationId xmlns:a16="http://schemas.microsoft.com/office/drawing/2014/main" id="{F9189868-CBFD-4D8B-A7CB-EDF5ACC1A2EA}"/>
+                <a16:creationId xmlns:a16="http://schemas.microsoft.com/office/drawing/2014/main" id="{57B10865-03BE-4644-8AA0-E81139C0850A}"/>
               </a:ext>
             </a:extLst>
           </p:cNvPr>
@@ -8318,7 +8318,7 @@
           <p:cNvPr id="28" name="">
             <a:extLst xmlns:a="http://schemas.openxmlformats.org/drawingml/2006/main">
               <a:ext uri="{FF2B5EF4-FFF2-40B4-BE49-F238E27FC236}">
-                <a16:creationId xmlns:a16="http://schemas.microsoft.com/office/drawing/2014/main" id="{8C73E783-A828-4375-A658-A3D1FE533BC4}"/>
+                <a16:creationId xmlns:a16="http://schemas.microsoft.com/office/drawing/2014/main" id="{BA433EC9-20EA-4BC3-BDC4-FD148E35BC28}"/>
               </a:ext>
             </a:extLst>
           </p:cNvPr>
@@ -8375,7 +8375,7 @@
           <p:cNvPr id="29" name="">
             <a:extLst xmlns:a="http://schemas.openxmlformats.org/drawingml/2006/main">
               <a:ext uri="{FF2B5EF4-FFF2-40B4-BE49-F238E27FC236}">
-                <a16:creationId xmlns:a16="http://schemas.microsoft.com/office/drawing/2014/main" id="{96D70B26-2BD2-4E67-8349-BF8580236D11}"/>
+                <a16:creationId xmlns:a16="http://schemas.microsoft.com/office/drawing/2014/main" id="{6CD9CC25-92FA-40B7-A005-2456FC872FEA}"/>
               </a:ext>
             </a:extLst>
           </p:cNvPr>
@@ -8432,7 +8432,7 @@
           <p:cNvPr id="30" name="">
             <a:extLst xmlns:a="http://schemas.openxmlformats.org/drawingml/2006/main">
               <a:ext uri="{FF2B5EF4-FFF2-40B4-BE49-F238E27FC236}">
-                <a16:creationId xmlns:a16="http://schemas.microsoft.com/office/drawing/2014/main" id="{3A9888DF-72CD-4A2E-83C2-ADC82D95F408}"/>
+                <a16:creationId xmlns:a16="http://schemas.microsoft.com/office/drawing/2014/main" id="{48FD3243-B80A-4C27-8293-24CE7E823F6C}"/>
               </a:ext>
             </a:extLst>
           </p:cNvPr>
@@ -8489,7 +8489,7 @@
           <p:cNvPr id="31" name="">
             <a:extLst xmlns:a="http://schemas.openxmlformats.org/drawingml/2006/main">
               <a:ext uri="{FF2B5EF4-FFF2-40B4-BE49-F238E27FC236}">
-                <a16:creationId xmlns:a16="http://schemas.microsoft.com/office/drawing/2014/main" id="{7370C074-8E85-4CC6-9A02-6788A6960E77}"/>
+                <a16:creationId xmlns:a16="http://schemas.microsoft.com/office/drawing/2014/main" id="{8D00C8E6-8E26-4AE7-871B-09E96461C55F}"/>
               </a:ext>
             </a:extLst>
           </p:cNvPr>
@@ -8546,7 +8546,7 @@
           <p:cNvPr id="32" name="">
             <a:extLst xmlns:a="http://schemas.openxmlformats.org/drawingml/2006/main">
               <a:ext uri="{FF2B5EF4-FFF2-40B4-BE49-F238E27FC236}">
-                <a16:creationId xmlns:a16="http://schemas.microsoft.com/office/drawing/2014/main" id="{F8DCA58E-5BC9-4DAB-AABA-03D51E068222}"/>
+                <a16:creationId xmlns:a16="http://schemas.microsoft.com/office/drawing/2014/main" id="{2D02D7AA-39D9-4072-B762-21C8EB75B4DF}"/>
               </a:ext>
             </a:extLst>
           </p:cNvPr>
@@ -8603,7 +8603,7 @@
           <p:cNvPr id="33" name="">
             <a:extLst xmlns:a="http://schemas.openxmlformats.org/drawingml/2006/main">
               <a:ext uri="{FF2B5EF4-FFF2-40B4-BE49-F238E27FC236}">
-                <a16:creationId xmlns:a16="http://schemas.microsoft.com/office/drawing/2014/main" id="{EBD8A046-4D9B-4FAF-85D1-0FAC6231B7AE}"/>
+                <a16:creationId xmlns:a16="http://schemas.microsoft.com/office/drawing/2014/main" id="{489DBB6A-A9FB-4C7E-8F38-6C13F474FAC2}"/>
               </a:ext>
             </a:extLst>
           </p:cNvPr>
@@ -8660,7 +8660,7 @@
           <p:cNvPr id="34" name="">
             <a:extLst xmlns:a="http://schemas.openxmlformats.org/drawingml/2006/main">
               <a:ext uri="{FF2B5EF4-FFF2-40B4-BE49-F238E27FC236}">
-                <a16:creationId xmlns:a16="http://schemas.microsoft.com/office/drawing/2014/main" id="{24217D38-1617-4087-A0FB-3978C494A4D2}"/>
+                <a16:creationId xmlns:a16="http://schemas.microsoft.com/office/drawing/2014/main" id="{83769B00-86F1-4E60-9D67-7DC6BD10C06E}"/>
               </a:ext>
             </a:extLst>
           </p:cNvPr>
@@ -8717,7 +8717,7 @@
           <p:cNvPr id="35" name="">
             <a:extLst xmlns:a="http://schemas.openxmlformats.org/drawingml/2006/main">
               <a:ext uri="{FF2B5EF4-FFF2-40B4-BE49-F238E27FC236}">
-                <a16:creationId xmlns:a16="http://schemas.microsoft.com/office/drawing/2014/main" id="{BC5C7679-D79D-4DCD-8B5D-96B45EDEAE11}"/>
+                <a16:creationId xmlns:a16="http://schemas.microsoft.com/office/drawing/2014/main" id="{626AA2AC-3AA6-459E-9D2E-AF502C18C349}"/>
               </a:ext>
             </a:extLst>
           </p:cNvPr>
@@ -8774,7 +8774,7 @@
           <p:cNvPr id="36" name="">
             <a:extLst xmlns:a="http://schemas.openxmlformats.org/drawingml/2006/main">
               <a:ext uri="{FF2B5EF4-FFF2-40B4-BE49-F238E27FC236}">
-                <a16:creationId xmlns:a16="http://schemas.microsoft.com/office/drawing/2014/main" id="{DF9A65E3-C6D3-4193-A191-6361962272A2}"/>
+                <a16:creationId xmlns:a16="http://schemas.microsoft.com/office/drawing/2014/main" id="{CAD3DE1D-920A-44AC-B01A-5093E4398E9C}"/>
               </a:ext>
             </a:extLst>
           </p:cNvPr>
@@ -8831,7 +8831,7 @@
           <p:cNvPr id="37" name="">
             <a:extLst xmlns:a="http://schemas.openxmlformats.org/drawingml/2006/main">
               <a:ext uri="{FF2B5EF4-FFF2-40B4-BE49-F238E27FC236}">
-                <a16:creationId xmlns:a16="http://schemas.microsoft.com/office/drawing/2014/main" id="{ED410242-80F8-4BFF-B5F8-C4C6F98DC000}"/>
+                <a16:creationId xmlns:a16="http://schemas.microsoft.com/office/drawing/2014/main" id="{5F58B33E-2EAC-4682-9266-DDCD8A249B89}"/>
               </a:ext>
             </a:extLst>
           </p:cNvPr>
@@ -8888,7 +8888,7 @@
           <p:cNvPr id="38" name="">
             <a:extLst xmlns:a="http://schemas.openxmlformats.org/drawingml/2006/main">
               <a:ext uri="{FF2B5EF4-FFF2-40B4-BE49-F238E27FC236}">
-                <a16:creationId xmlns:a16="http://schemas.microsoft.com/office/drawing/2014/main" id="{98EC9282-3FEA-4440-B555-5FA432753F2E}"/>
+                <a16:creationId xmlns:a16="http://schemas.microsoft.com/office/drawing/2014/main" id="{D0ABD081-9378-49D8-B5F5-244B83C2BEC6}"/>
               </a:ext>
             </a:extLst>
           </p:cNvPr>
@@ -8945,7 +8945,7 @@
           <p:cNvPr id="39" name="">
             <a:extLst xmlns:a="http://schemas.openxmlformats.org/drawingml/2006/main">
               <a:ext uri="{FF2B5EF4-FFF2-40B4-BE49-F238E27FC236}">
-                <a16:creationId xmlns:a16="http://schemas.microsoft.com/office/drawing/2014/main" id="{61D305EA-345A-4B56-991D-CCCAB82C017F}"/>
+                <a16:creationId xmlns:a16="http://schemas.microsoft.com/office/drawing/2014/main" id="{40BF25EB-67E7-4629-8F6C-AA0D91F856DE}"/>
               </a:ext>
             </a:extLst>
           </p:cNvPr>
@@ -9002,7 +9002,7 @@
           <p:cNvPr id="40" name="">
             <a:extLst xmlns:a="http://schemas.openxmlformats.org/drawingml/2006/main">
               <a:ext uri="{FF2B5EF4-FFF2-40B4-BE49-F238E27FC236}">
-                <a16:creationId xmlns:a16="http://schemas.microsoft.com/office/drawing/2014/main" id="{31D37235-A187-46A5-9CC7-79ED952F56E7}"/>
+                <a16:creationId xmlns:a16="http://schemas.microsoft.com/office/drawing/2014/main" id="{AB4B4A68-1F3D-488B-9E24-57A2A0548C47}"/>
               </a:ext>
             </a:extLst>
           </p:cNvPr>
@@ -9059,7 +9059,7 @@
           <p:cNvPr id="41" name="">
             <a:extLst xmlns:a="http://schemas.openxmlformats.org/drawingml/2006/main">
               <a:ext uri="{FF2B5EF4-FFF2-40B4-BE49-F238E27FC236}">
-                <a16:creationId xmlns:a16="http://schemas.microsoft.com/office/drawing/2014/main" id="{52654303-F064-4346-99C1-010603521015}"/>
+                <a16:creationId xmlns:a16="http://schemas.microsoft.com/office/drawing/2014/main" id="{8DE5B363-A1EF-47F9-A506-95DD69B76D41}"/>
               </a:ext>
             </a:extLst>
           </p:cNvPr>
@@ -9116,7 +9116,7 @@
           <p:cNvPr id="42" name="">
             <a:extLst xmlns:a="http://schemas.openxmlformats.org/drawingml/2006/main">
               <a:ext uri="{FF2B5EF4-FFF2-40B4-BE49-F238E27FC236}">
-                <a16:creationId xmlns:a16="http://schemas.microsoft.com/office/drawing/2014/main" id="{16EE07E3-7A8C-47A4-BCCB-00E256095194}"/>
+                <a16:creationId xmlns:a16="http://schemas.microsoft.com/office/drawing/2014/main" id="{B955F98A-00D9-4218-A984-156F36A10911}"/>
               </a:ext>
             </a:extLst>
           </p:cNvPr>
@@ -9173,7 +9173,7 @@
           <p:cNvPr id="43" name="">
             <a:extLst xmlns:a="http://schemas.openxmlformats.org/drawingml/2006/main">
               <a:ext uri="{FF2B5EF4-FFF2-40B4-BE49-F238E27FC236}">
-                <a16:creationId xmlns:a16="http://schemas.microsoft.com/office/drawing/2014/main" id="{B858B5FB-E076-4A8A-A18A-A15B3E8C9EE6}"/>
+                <a16:creationId xmlns:a16="http://schemas.microsoft.com/office/drawing/2014/main" id="{176CA9D8-471D-4D1B-8F67-C8916A5C600F}"/>
               </a:ext>
             </a:extLst>
           </p:cNvPr>
@@ -9228,7 +9228,7 @@
     </p:spTree>
     <p:extLst>
       <p:ext uri="{BB962C8B-B14F-4D97-AF65-F5344CB8AC3E}">
-        <p14:creationId xmlns:p14="http://schemas.microsoft.com/office/powerpoint/2010/main" val="1396109529"/>
+        <p14:creationId xmlns:p14="http://schemas.microsoft.com/office/powerpoint/2010/main" val="1125401533"/>
       </p:ext>
     </p:extLst>
   </p:cSld>

--- a/Docs/PRESENTATION/2. 최종/09285_백준현_AI_Master_최종발표자료_v12.pptx
+++ b/Docs/PRESENTATION/2. 최종/09285_백준현_AI_Master_최종발표자료_v12.pptx
@@ -2,16 +2,16 @@
 <file path=ppt/presentation.xml><?xml version="1.0" encoding="utf-8"?>
 <p:presentation xmlns:p="http://schemas.openxmlformats.org/presentationml/2006/main">
   <p:sldMasterIdLst>
-    <p:sldMasterId xmlns:r="http://schemas.openxmlformats.org/officeDocument/2006/relationships" id="2147483648" r:id="R6a9deaf4a541424d"/>
+    <p:sldMasterId xmlns:r="http://schemas.openxmlformats.org/officeDocument/2006/relationships" id="2147483648" r:id="Rcd1754c3c12a434a"/>
   </p:sldMasterIdLst>
   <p:notesMasterIdLst>
-    <p:notesMasterId xmlns:r="http://schemas.openxmlformats.org/officeDocument/2006/relationships" r:id="R0e3be6c008504a15"/>
+    <p:notesMasterId xmlns:r="http://schemas.openxmlformats.org/officeDocument/2006/relationships" r:id="R287c579f3b644bad"/>
   </p:notesMasterIdLst>
   <p:sldIdLst>
-    <p:sldId xmlns:r="http://schemas.openxmlformats.org/officeDocument/2006/relationships" id="256" r:id="Reed1bba53a5f4d73"/>
-    <p:sldId xmlns:r="http://schemas.openxmlformats.org/officeDocument/2006/relationships" id="257" r:id="Rfc4cf90a051b49ca"/>
-    <p:sldId xmlns:r="http://schemas.openxmlformats.org/officeDocument/2006/relationships" id="258" r:id="R8bdc1015844140ee"/>
-    <p:sldId xmlns:r="http://schemas.openxmlformats.org/officeDocument/2006/relationships" id="259" r:id="Rb69663cdab6b4ac5"/>
+    <p:sldId xmlns:r="http://schemas.openxmlformats.org/officeDocument/2006/relationships" id="256" r:id="R60020e4769d543d0"/>
+    <p:sldId xmlns:r="http://schemas.openxmlformats.org/officeDocument/2006/relationships" id="257" r:id="Ra79bb92d6adc4ce6"/>
+    <p:sldId xmlns:r="http://schemas.openxmlformats.org/officeDocument/2006/relationships" id="258" r:id="R67cc131e61e84f19"/>
+    <p:sldId xmlns:r="http://schemas.openxmlformats.org/officeDocument/2006/relationships" id="259" r:id="R7f7cee2c0ade4502"/>
   </p:sldIdLst>
   <p:sldSz cx="12192000" cy="6858000"/>
   <p:notesSz cx="6858000" cy="9144000"/>
@@ -958,7 +958,7 @@
   </p:cSld>
   <p:clrMap bg1="lt1" tx1="dk1" bg2="lt2" tx2="dk2" accent1="accent1" accent2="accent2" accent3="accent3" accent4="accent4" accent5="accent5" accent6="accent6" hlink="hlink" folHlink="folHlink"/>
   <p:sldLayoutIdLst>
-    <p:sldLayoutId xmlns:r="http://schemas.openxmlformats.org/officeDocument/2006/relationships" id="2147483649" r:id="R9abd9f5203bb4352"/>
+    <p:sldLayoutId xmlns:r="http://schemas.openxmlformats.org/officeDocument/2006/relationships" id="2147483649" r:id="R62346af0844241e6"/>
   </p:sldLayoutIdLst>
   <p:txStyles>
     <p:titleStyle>
@@ -1506,10 +1506,10 @@
       </p:grpSpPr>
       <p:sp>
         <p:nvSpPr>
-          <p:cNvPr id="9" name="">
-            <a:extLst xmlns:a="http://schemas.openxmlformats.org/drawingml/2006/main">
-              <a:ext uri="{FF2B5EF4-FFF2-40B4-BE49-F238E27FC236}">
-                <a16:creationId xmlns:a16="http://schemas.microsoft.com/office/drawing/2014/main" id="{00BA9D6E-1724-45B0-8215-C247B9FC3999}"/>
+          <p:cNvPr id="10" name="">
+            <a:extLst xmlns:a="http://schemas.openxmlformats.org/drawingml/2006/main">
+              <a:ext uri="{FF2B5EF4-FFF2-40B4-BE49-F238E27FC236}">
+                <a16:creationId xmlns:a16="http://schemas.microsoft.com/office/drawing/2014/main" id="{F053FC08-2DF2-44FC-8FA7-66DDC46AD5E0}"/>
               </a:ext>
             </a:extLst>
           </p:cNvPr>
@@ -1539,7 +1539,7 @@
           <p:cNvPr id="2" name="">
             <a:extLst xmlns:a="http://schemas.openxmlformats.org/drawingml/2006/main">
               <a:ext uri="{FF2B5EF4-FFF2-40B4-BE49-F238E27FC236}">
-                <a16:creationId xmlns:a16="http://schemas.microsoft.com/office/drawing/2014/main" id="{8EEE7466-FB7C-45FC-A9DA-AD86B72D740D}"/>
+                <a16:creationId xmlns:a16="http://schemas.microsoft.com/office/drawing/2014/main" id="{48499040-E3F0-47E1-8B5C-4F0D9A764491}"/>
               </a:ext>
             </a:extLst>
           </p:cNvPr>
@@ -1596,7 +1596,7 @@
           <p:cNvPr id="3" name="">
             <a:extLst xmlns:a="http://schemas.openxmlformats.org/drawingml/2006/main">
               <a:ext uri="{FF2B5EF4-FFF2-40B4-BE49-F238E27FC236}">
-                <a16:creationId xmlns:a16="http://schemas.microsoft.com/office/drawing/2014/main" id="{233AF5B9-9E89-402F-8CC0-DC7598A1F3A4}"/>
+                <a16:creationId xmlns:a16="http://schemas.microsoft.com/office/drawing/2014/main" id="{6A511555-E696-4BA9-A3D7-FB125B9B3E76}"/>
               </a:ext>
             </a:extLst>
           </p:cNvPr>
@@ -1653,7 +1653,7 @@
           <p:cNvPr id="4" name="">
             <a:extLst xmlns:a="http://schemas.openxmlformats.org/drawingml/2006/main">
               <a:ext uri="{FF2B5EF4-FFF2-40B4-BE49-F238E27FC236}">
-                <a16:creationId xmlns:a16="http://schemas.microsoft.com/office/drawing/2014/main" id="{269C32EE-AAA1-4BAE-8B03-B225EAD0ECC2}"/>
+                <a16:creationId xmlns:a16="http://schemas.microsoft.com/office/drawing/2014/main" id="{1D894824-4894-4360-B0AA-DE233CC4F4E3}"/>
               </a:ext>
             </a:extLst>
           </p:cNvPr>
@@ -1710,7 +1710,7 @@
           <p:cNvPr id="5" name="">
             <a:extLst xmlns:a="http://schemas.openxmlformats.org/drawingml/2006/main">
               <a:ext uri="{FF2B5EF4-FFF2-40B4-BE49-F238E27FC236}">
-                <a16:creationId xmlns:a16="http://schemas.microsoft.com/office/drawing/2014/main" id="{723DFEA5-BE5E-4698-AFF8-0C33F54BFC0E}"/>
+                <a16:creationId xmlns:a16="http://schemas.microsoft.com/office/drawing/2014/main" id="{471CCBAC-1224-443B-A6BC-1373B88319F5}"/>
               </a:ext>
             </a:extLst>
           </p:cNvPr>
@@ -1740,7 +1740,7 @@
           <p:cNvPr id="6" name="">
             <a:extLst xmlns:a="http://schemas.openxmlformats.org/drawingml/2006/main">
               <a:ext uri="{FF2B5EF4-FFF2-40B4-BE49-F238E27FC236}">
-                <a16:creationId xmlns:a16="http://schemas.microsoft.com/office/drawing/2014/main" id="{678BFB27-E753-4D48-9B33-C6CD41BBFA2F}"/>
+                <a16:creationId xmlns:a16="http://schemas.microsoft.com/office/drawing/2014/main" id="{46367213-4049-45B0-ADD2-A1F9E801142E}"/>
               </a:ext>
             </a:extLst>
           </p:cNvPr>
@@ -1797,7 +1797,7 @@
           <p:cNvPr id="7" name="">
             <a:extLst xmlns:a="http://schemas.openxmlformats.org/drawingml/2006/main">
               <a:ext uri="{FF2B5EF4-FFF2-40B4-BE49-F238E27FC236}">
-                <a16:creationId xmlns:a16="http://schemas.microsoft.com/office/drawing/2014/main" id="{35E421A4-CFBA-4EF4-9092-50E2E33E078D}"/>
+                <a16:creationId xmlns:a16="http://schemas.microsoft.com/office/drawing/2014/main" id="{F02C081C-077D-4E3C-BF5C-72C759A3BCCC}"/>
               </a:ext>
             </a:extLst>
           </p:cNvPr>
@@ -1854,7 +1854,7 @@
           <p:cNvPr id="8" name="">
             <a:extLst xmlns:a="http://schemas.openxmlformats.org/drawingml/2006/main">
               <a:ext uri="{FF2B5EF4-FFF2-40B4-BE49-F238E27FC236}">
-                <a16:creationId xmlns:a16="http://schemas.microsoft.com/office/drawing/2014/main" id="{C97DFD3A-E33E-4C6A-953A-D5E1E5B93EC1}"/>
+                <a16:creationId xmlns:a16="http://schemas.microsoft.com/office/drawing/2014/main" id="{C920F767-3B17-4154-88E1-1429AFD1CC7C}"/>
               </a:ext>
             </a:extLst>
           </p:cNvPr>
@@ -1902,6 +1902,63 @@
                 <a:cs typeface="Malgun Gothic"/>
               </a:rPr>
               <a:t>최종 발표</a:t>
+            </a:r>
+          </a:p>
+        </p:txBody>
+      </p:sp>
+      <p:sp>
+        <p:nvSpPr>
+          <p:cNvPr id="9" name="">
+            <a:extLst xmlns:a="http://schemas.openxmlformats.org/drawingml/2006/main">
+              <a:ext uri="{FF2B5EF4-FFF2-40B4-BE49-F238E27FC236}">
+                <a16:creationId xmlns:a16="http://schemas.microsoft.com/office/drawing/2014/main" id="{4EF5B3FB-7E4E-403F-A8D4-003EF2D30E33}"/>
+              </a:ext>
+            </a:extLst>
+          </p:cNvPr>
+          <p:cNvSpPr>
+            <a:spLocks xmlns:a="http://schemas.openxmlformats.org/drawingml/2006/main" noGrp="1"/>
+          </p:cNvSpPr>
+          <p:nvPr/>
+        </p:nvSpPr>
+        <p:spPr>
+          <a:xfrm xmlns:a="http://schemas.openxmlformats.org/drawingml/2006/main">
+            <a:off x="685800" y="6153150"/>
+            <a:ext cx="5715000" cy="247650"/>
+          </a:xfrm>
+          <a:prstGeom xmlns:a="http://schemas.openxmlformats.org/drawingml/2006/main" prst="rect">
+            <a:avLst/>
+          </a:prstGeom>
+          <a:noFill xmlns:a="http://schemas.openxmlformats.org/drawingml/2006/main"/>
+          <a:ln xmlns:a="http://schemas.openxmlformats.org/drawingml/2006/main" w="0">
+            <a:noFill/>
+          </a:ln>
+        </p:spPr>
+        <p:txBody>
+          <a:bodyPr xmlns:a="http://schemas.openxmlformats.org/drawingml/2006/main" anchor="ctr">
+            <a:normAutofit fontScale="97619"/>
+          </a:bodyPr>
+          <a:lstStyle xmlns:a="http://schemas.openxmlformats.org/drawingml/2006/main"/>
+          <a:p xmlns:a="http://schemas.openxmlformats.org/drawingml/2006/main">
+            <a:pPr algn="l">
+              <a:defRPr sz="1050" b="0">
+                <a:solidFill>
+                  <a:srgbClr val="7E93AC"/>
+                </a:solidFill>
+                <a:latin typeface="Malgun Gothic"/>
+                <a:ea typeface="Malgun Gothic"/>
+                <a:cs typeface="Malgun Gothic"/>
+              </a:defRPr>
+            </a:pPr>
+            <a:r>
+              <a:rPr sz="1050" b="0">
+                <a:solidFill>
+                  <a:srgbClr val="7E93AC"/>
+                </a:solidFill>
+                <a:latin typeface="Malgun Gothic"/>
+                <a:ea typeface="Malgun Gothic"/>
+                <a:cs typeface="Malgun Gothic"/>
+              </a:rPr>
+              <a:t>발표 10분 이내  |  시연 영상 별도 제출 5분 이내</a:t>
             </a:r>
           </a:p>
         </p:txBody>
@@ -1909,7 +1966,7 @@
     </p:spTree>
     <p:extLst>
       <p:ext uri="{BB962C8B-B14F-4D97-AF65-F5344CB8AC3E}">
-        <p14:creationId xmlns:p14="http://schemas.microsoft.com/office/powerpoint/2010/main" val="597242214"/>
+        <p14:creationId xmlns:p14="http://schemas.microsoft.com/office/powerpoint/2010/main" val="380924366"/>
       </p:ext>
     </p:extLst>
   </p:cSld>
@@ -1940,7 +1997,7 @@
           <p:cNvPr id="46" name="">
             <a:extLst xmlns:a="http://schemas.openxmlformats.org/drawingml/2006/main">
               <a:ext uri="{FF2B5EF4-FFF2-40B4-BE49-F238E27FC236}">
-                <a16:creationId xmlns:a16="http://schemas.microsoft.com/office/drawing/2014/main" id="{A51A43EA-0EB1-4F38-A161-3B1BB494BD9F}"/>
+                <a16:creationId xmlns:a16="http://schemas.microsoft.com/office/drawing/2014/main" id="{DAEB7639-6C78-46F9-AB64-C8C57119BE45}"/>
               </a:ext>
             </a:extLst>
           </p:cNvPr>
@@ -1970,7 +2027,7 @@
           <p:cNvPr id="2" name="">
             <a:extLst xmlns:a="http://schemas.openxmlformats.org/drawingml/2006/main">
               <a:ext uri="{FF2B5EF4-FFF2-40B4-BE49-F238E27FC236}">
-                <a16:creationId xmlns:a16="http://schemas.microsoft.com/office/drawing/2014/main" id="{9A8BCECD-5847-4C52-A2DF-D1277C45E4D5}"/>
+                <a16:creationId xmlns:a16="http://schemas.microsoft.com/office/drawing/2014/main" id="{67D757DE-B558-4A2D-B7D9-6ABBA401E1C3}"/>
               </a:ext>
             </a:extLst>
           </p:cNvPr>
@@ -2027,7 +2084,7 @@
           <p:cNvPr id="3" name="">
             <a:extLst xmlns:a="http://schemas.openxmlformats.org/drawingml/2006/main">
               <a:ext uri="{FF2B5EF4-FFF2-40B4-BE49-F238E27FC236}">
-                <a16:creationId xmlns:a16="http://schemas.microsoft.com/office/drawing/2014/main" id="{5328E098-91E1-4DD1-80DF-3F44909F4D6D}"/>
+                <a16:creationId xmlns:a16="http://schemas.microsoft.com/office/drawing/2014/main" id="{D7F81F98-1339-4AA8-93EF-275E28E649C7}"/>
               </a:ext>
             </a:extLst>
           </p:cNvPr>
@@ -2057,7 +2114,7 @@
           <p:cNvPr id="4" name="">
             <a:extLst xmlns:a="http://schemas.openxmlformats.org/drawingml/2006/main">
               <a:ext uri="{FF2B5EF4-FFF2-40B4-BE49-F238E27FC236}">
-                <a16:creationId xmlns:a16="http://schemas.microsoft.com/office/drawing/2014/main" id="{321ECF12-BFB8-45D3-AF6E-D01F629A7576}"/>
+                <a16:creationId xmlns:a16="http://schemas.microsoft.com/office/drawing/2014/main" id="{77AFE142-551E-497C-8A31-D0D016225EEF}"/>
               </a:ext>
             </a:extLst>
           </p:cNvPr>
@@ -2114,7 +2171,7 @@
           <p:cNvPr id="5" name="">
             <a:extLst xmlns:a="http://schemas.openxmlformats.org/drawingml/2006/main">
               <a:ext uri="{FF2B5EF4-FFF2-40B4-BE49-F238E27FC236}">
-                <a16:creationId xmlns:a16="http://schemas.microsoft.com/office/drawing/2014/main" id="{FF701AA5-8248-4179-801A-52781AD9B81D}"/>
+                <a16:creationId xmlns:a16="http://schemas.microsoft.com/office/drawing/2014/main" id="{5A98DC29-F106-476D-BAE8-4B4DD6FCD237}"/>
               </a:ext>
             </a:extLst>
           </p:cNvPr>
@@ -2171,7 +2228,7 @@
           <p:cNvPr id="6" name="">
             <a:extLst xmlns:a="http://schemas.openxmlformats.org/drawingml/2006/main">
               <a:ext uri="{FF2B5EF4-FFF2-40B4-BE49-F238E27FC236}">
-                <a16:creationId xmlns:a16="http://schemas.microsoft.com/office/drawing/2014/main" id="{0C89A1F8-2622-436F-B61A-764CB6461FEE}"/>
+                <a16:creationId xmlns:a16="http://schemas.microsoft.com/office/drawing/2014/main" id="{F5127486-EB01-4F90-8B20-CD3D7B1AF1E6}"/>
               </a:ext>
             </a:extLst>
           </p:cNvPr>
@@ -2228,7 +2285,7 @@
           <p:cNvPr id="7" name="">
             <a:extLst xmlns:a="http://schemas.openxmlformats.org/drawingml/2006/main">
               <a:ext uri="{FF2B5EF4-FFF2-40B4-BE49-F238E27FC236}">
-                <a16:creationId xmlns:a16="http://schemas.microsoft.com/office/drawing/2014/main" id="{59F6ECE5-8A7D-424B-B6C8-CD3F0ED3EE58}"/>
+                <a16:creationId xmlns:a16="http://schemas.microsoft.com/office/drawing/2014/main" id="{8AD21712-3D00-4CCD-82ED-2CF7668AEFD1}"/>
               </a:ext>
             </a:extLst>
           </p:cNvPr>
@@ -2262,7 +2319,7 @@
           <p:cNvPr id="8" name="">
             <a:extLst xmlns:a="http://schemas.openxmlformats.org/drawingml/2006/main">
               <a:ext uri="{FF2B5EF4-FFF2-40B4-BE49-F238E27FC236}">
-                <a16:creationId xmlns:a16="http://schemas.microsoft.com/office/drawing/2014/main" id="{374A16D3-5D91-4EE7-B6F7-12974BE5A64F}"/>
+                <a16:creationId xmlns:a16="http://schemas.microsoft.com/office/drawing/2014/main" id="{17AD07F5-9CFC-4E7B-B52B-7666E3360560}"/>
               </a:ext>
             </a:extLst>
           </p:cNvPr>
@@ -2294,7 +2351,7 @@
           <p:cNvPr id="9" name="">
             <a:extLst xmlns:a="http://schemas.openxmlformats.org/drawingml/2006/main">
               <a:ext uri="{FF2B5EF4-FFF2-40B4-BE49-F238E27FC236}">
-                <a16:creationId xmlns:a16="http://schemas.microsoft.com/office/drawing/2014/main" id="{F39D2DBC-A812-49A1-8E35-B9AFF1CDF5A4}"/>
+                <a16:creationId xmlns:a16="http://schemas.microsoft.com/office/drawing/2014/main" id="{46F4DE53-83FF-4B42-83CD-F86348687AD1}"/>
               </a:ext>
             </a:extLst>
           </p:cNvPr>
@@ -2351,7 +2408,7 @@
           <p:cNvPr id="10" name="">
             <a:extLst xmlns:a="http://schemas.openxmlformats.org/drawingml/2006/main">
               <a:ext uri="{FF2B5EF4-FFF2-40B4-BE49-F238E27FC236}">
-                <a16:creationId xmlns:a16="http://schemas.microsoft.com/office/drawing/2014/main" id="{EF0CC780-EAF4-465C-8B48-CE483583A32E}"/>
+                <a16:creationId xmlns:a16="http://schemas.microsoft.com/office/drawing/2014/main" id="{31F6AE3D-6DE0-4F0D-991D-7A2C20A64311}"/>
               </a:ext>
             </a:extLst>
           </p:cNvPr>
@@ -2431,7 +2488,7 @@
           <p:cNvPr id="11" name="">
             <a:extLst xmlns:a="http://schemas.openxmlformats.org/drawingml/2006/main">
               <a:ext uri="{FF2B5EF4-FFF2-40B4-BE49-F238E27FC236}">
-                <a16:creationId xmlns:a16="http://schemas.microsoft.com/office/drawing/2014/main" id="{A1EC963D-B96C-4524-9B85-61D6198F084C}"/>
+                <a16:creationId xmlns:a16="http://schemas.microsoft.com/office/drawing/2014/main" id="{F941602A-3B67-4431-B055-C678D260DC09}"/>
               </a:ext>
             </a:extLst>
           </p:cNvPr>
@@ -2461,7 +2518,7 @@
           <p:cNvPr id="12" name="">
             <a:extLst xmlns:a="http://schemas.openxmlformats.org/drawingml/2006/main">
               <a:ext uri="{FF2B5EF4-FFF2-40B4-BE49-F238E27FC236}">
-                <a16:creationId xmlns:a16="http://schemas.microsoft.com/office/drawing/2014/main" id="{EF2DD65E-81E9-4538-B3CA-C75E56A5A0F5}"/>
+                <a16:creationId xmlns:a16="http://schemas.microsoft.com/office/drawing/2014/main" id="{54830D6A-867A-49CA-8B45-E47F1ED4A090}"/>
               </a:ext>
             </a:extLst>
           </p:cNvPr>
@@ -2495,7 +2552,7 @@
           <p:cNvPr id="13" name="">
             <a:extLst xmlns:a="http://schemas.openxmlformats.org/drawingml/2006/main">
               <a:ext uri="{FF2B5EF4-FFF2-40B4-BE49-F238E27FC236}">
-                <a16:creationId xmlns:a16="http://schemas.microsoft.com/office/drawing/2014/main" id="{7E7B32BC-E756-4D38-9614-0F18BF3920D2}"/>
+                <a16:creationId xmlns:a16="http://schemas.microsoft.com/office/drawing/2014/main" id="{D11F5099-AEDB-4E7E-A479-09E2D7627563}"/>
               </a:ext>
             </a:extLst>
           </p:cNvPr>
@@ -2527,7 +2584,7 @@
           <p:cNvPr id="14" name="">
             <a:extLst xmlns:a="http://schemas.openxmlformats.org/drawingml/2006/main">
               <a:ext uri="{FF2B5EF4-FFF2-40B4-BE49-F238E27FC236}">
-                <a16:creationId xmlns:a16="http://schemas.microsoft.com/office/drawing/2014/main" id="{B55849CB-1EC1-43D7-85FE-76D8F6CD90A4}"/>
+                <a16:creationId xmlns:a16="http://schemas.microsoft.com/office/drawing/2014/main" id="{07EA1319-A132-45C3-839D-29FC714A1ADD}"/>
               </a:ext>
             </a:extLst>
           </p:cNvPr>
@@ -2584,7 +2641,7 @@
           <p:cNvPr id="15" name="">
             <a:extLst xmlns:a="http://schemas.openxmlformats.org/drawingml/2006/main">
               <a:ext uri="{FF2B5EF4-FFF2-40B4-BE49-F238E27FC236}">
-                <a16:creationId xmlns:a16="http://schemas.microsoft.com/office/drawing/2014/main" id="{AC598822-0D8D-4204-94D3-0C90D265ACA1}"/>
+                <a16:creationId xmlns:a16="http://schemas.microsoft.com/office/drawing/2014/main" id="{A41710D7-0DCD-4266-BFA0-1944ABF4028E}"/>
               </a:ext>
             </a:extLst>
           </p:cNvPr>
@@ -2664,7 +2721,7 @@
           <p:cNvPr id="16" name="">
             <a:extLst xmlns:a="http://schemas.openxmlformats.org/drawingml/2006/main">
               <a:ext uri="{FF2B5EF4-FFF2-40B4-BE49-F238E27FC236}">
-                <a16:creationId xmlns:a16="http://schemas.microsoft.com/office/drawing/2014/main" id="{699B0987-2CE7-4D1B-82D2-E312AEF2E17A}"/>
+                <a16:creationId xmlns:a16="http://schemas.microsoft.com/office/drawing/2014/main" id="{EA9A8FF5-A08E-404A-A969-FE81BA37B555}"/>
               </a:ext>
             </a:extLst>
           </p:cNvPr>
@@ -2694,7 +2751,7 @@
           <p:cNvPr id="17" name="">
             <a:extLst xmlns:a="http://schemas.openxmlformats.org/drawingml/2006/main">
               <a:ext uri="{FF2B5EF4-FFF2-40B4-BE49-F238E27FC236}">
-                <a16:creationId xmlns:a16="http://schemas.microsoft.com/office/drawing/2014/main" id="{9E1B3610-1685-4B4B-B6A0-9DFEDE04D536}"/>
+                <a16:creationId xmlns:a16="http://schemas.microsoft.com/office/drawing/2014/main" id="{ED1B186D-EB56-4D3A-B5B8-A21E2C30EE64}"/>
               </a:ext>
             </a:extLst>
           </p:cNvPr>
@@ -2728,7 +2785,7 @@
           <p:cNvPr id="18" name="">
             <a:extLst xmlns:a="http://schemas.openxmlformats.org/drawingml/2006/main">
               <a:ext uri="{FF2B5EF4-FFF2-40B4-BE49-F238E27FC236}">
-                <a16:creationId xmlns:a16="http://schemas.microsoft.com/office/drawing/2014/main" id="{C1C7BE5D-046C-4D3F-96F2-02FD81D4E544}"/>
+                <a16:creationId xmlns:a16="http://schemas.microsoft.com/office/drawing/2014/main" id="{3BCEEF1A-E210-4F68-B50B-B93C82F67D4B}"/>
               </a:ext>
             </a:extLst>
           </p:cNvPr>
@@ -2760,7 +2817,7 @@
           <p:cNvPr id="19" name="">
             <a:extLst xmlns:a="http://schemas.openxmlformats.org/drawingml/2006/main">
               <a:ext uri="{FF2B5EF4-FFF2-40B4-BE49-F238E27FC236}">
-                <a16:creationId xmlns:a16="http://schemas.microsoft.com/office/drawing/2014/main" id="{AAD21B6F-5264-4625-9F92-7D83B414D018}"/>
+                <a16:creationId xmlns:a16="http://schemas.microsoft.com/office/drawing/2014/main" id="{D6B1F6DF-4FAD-438D-A907-7439B00C51E7}"/>
               </a:ext>
             </a:extLst>
           </p:cNvPr>
@@ -2817,7 +2874,7 @@
           <p:cNvPr id="20" name="">
             <a:extLst xmlns:a="http://schemas.openxmlformats.org/drawingml/2006/main">
               <a:ext uri="{FF2B5EF4-FFF2-40B4-BE49-F238E27FC236}">
-                <a16:creationId xmlns:a16="http://schemas.microsoft.com/office/drawing/2014/main" id="{23D1E04D-E887-4E8C-B57F-04E0095332AD}"/>
+                <a16:creationId xmlns:a16="http://schemas.microsoft.com/office/drawing/2014/main" id="{DC5E87A5-1C3D-42A4-9C71-3EF9A3842D56}"/>
               </a:ext>
             </a:extLst>
           </p:cNvPr>
@@ -2897,7 +2954,7 @@
           <p:cNvPr id="21" name="">
             <a:extLst xmlns:a="http://schemas.openxmlformats.org/drawingml/2006/main">
               <a:ext uri="{FF2B5EF4-FFF2-40B4-BE49-F238E27FC236}">
-                <a16:creationId xmlns:a16="http://schemas.microsoft.com/office/drawing/2014/main" id="{A3AFC1D4-A544-4F28-9DD0-12C5552CC5C9}"/>
+                <a16:creationId xmlns:a16="http://schemas.microsoft.com/office/drawing/2014/main" id="{FC8B4A20-3BC6-493F-8363-63BB55D4C1EB}"/>
               </a:ext>
             </a:extLst>
           </p:cNvPr>
@@ -2927,7 +2984,7 @@
           <p:cNvPr id="22" name="">
             <a:extLst xmlns:a="http://schemas.openxmlformats.org/drawingml/2006/main">
               <a:ext uri="{FF2B5EF4-FFF2-40B4-BE49-F238E27FC236}">
-                <a16:creationId xmlns:a16="http://schemas.microsoft.com/office/drawing/2014/main" id="{AC92CD64-56C7-4D96-B5F3-5CA3B9FBD317}"/>
+                <a16:creationId xmlns:a16="http://schemas.microsoft.com/office/drawing/2014/main" id="{68F05A7B-22E0-4E5A-820A-012B7BC65305}"/>
               </a:ext>
             </a:extLst>
           </p:cNvPr>
@@ -2961,7 +3018,7 @@
           <p:cNvPr id="23" name="">
             <a:extLst xmlns:a="http://schemas.openxmlformats.org/drawingml/2006/main">
               <a:ext uri="{FF2B5EF4-FFF2-40B4-BE49-F238E27FC236}">
-                <a16:creationId xmlns:a16="http://schemas.microsoft.com/office/drawing/2014/main" id="{FEB70F2C-B91D-46A0-9ACB-FC0255A03BCC}"/>
+                <a16:creationId xmlns:a16="http://schemas.microsoft.com/office/drawing/2014/main" id="{C9AB9642-A5B0-4C4F-A887-2D4AF19A5275}"/>
               </a:ext>
             </a:extLst>
           </p:cNvPr>
@@ -2993,7 +3050,7 @@
           <p:cNvPr id="24" name="">
             <a:extLst xmlns:a="http://schemas.openxmlformats.org/drawingml/2006/main">
               <a:ext uri="{FF2B5EF4-FFF2-40B4-BE49-F238E27FC236}">
-                <a16:creationId xmlns:a16="http://schemas.microsoft.com/office/drawing/2014/main" id="{62F93259-BBD7-4418-B5CD-8DCAED849A07}"/>
+                <a16:creationId xmlns:a16="http://schemas.microsoft.com/office/drawing/2014/main" id="{631A0F4C-D3B3-4044-845B-0110B0357AE5}"/>
               </a:ext>
             </a:extLst>
           </p:cNvPr>
@@ -3050,7 +3107,7 @@
           <p:cNvPr id="25" name="">
             <a:extLst xmlns:a="http://schemas.openxmlformats.org/drawingml/2006/main">
               <a:ext uri="{FF2B5EF4-FFF2-40B4-BE49-F238E27FC236}">
-                <a16:creationId xmlns:a16="http://schemas.microsoft.com/office/drawing/2014/main" id="{1A3DCFA1-1572-4D5F-9B1A-F8593818398B}"/>
+                <a16:creationId xmlns:a16="http://schemas.microsoft.com/office/drawing/2014/main" id="{C28FA831-F844-4E9A-8DF4-2986F78305E1}"/>
               </a:ext>
             </a:extLst>
           </p:cNvPr>
@@ -3130,7 +3187,7 @@
           <p:cNvPr id="26" name="">
             <a:extLst xmlns:a="http://schemas.openxmlformats.org/drawingml/2006/main">
               <a:ext uri="{FF2B5EF4-FFF2-40B4-BE49-F238E27FC236}">
-                <a16:creationId xmlns:a16="http://schemas.microsoft.com/office/drawing/2014/main" id="{D94DEBCB-57F1-4DDF-AFD9-5102E2CBF3E7}"/>
+                <a16:creationId xmlns:a16="http://schemas.microsoft.com/office/drawing/2014/main" id="{6C70D3A2-B49A-4E64-84A4-6C8805A4F00D}"/>
               </a:ext>
             </a:extLst>
           </p:cNvPr>
@@ -3160,7 +3217,7 @@
           <p:cNvPr id="27" name="">
             <a:extLst xmlns:a="http://schemas.openxmlformats.org/drawingml/2006/main">
               <a:ext uri="{FF2B5EF4-FFF2-40B4-BE49-F238E27FC236}">
-                <a16:creationId xmlns:a16="http://schemas.microsoft.com/office/drawing/2014/main" id="{E4178E62-E0E7-485A-B3D8-0A7CF50B3FE6}"/>
+                <a16:creationId xmlns:a16="http://schemas.microsoft.com/office/drawing/2014/main" id="{4BCA47C8-67AB-4547-ACB7-880CF70388CD}"/>
               </a:ext>
             </a:extLst>
           </p:cNvPr>
@@ -3194,7 +3251,7 @@
           <p:cNvPr id="28" name="">
             <a:extLst xmlns:a="http://schemas.openxmlformats.org/drawingml/2006/main">
               <a:ext uri="{FF2B5EF4-FFF2-40B4-BE49-F238E27FC236}">
-                <a16:creationId xmlns:a16="http://schemas.microsoft.com/office/drawing/2014/main" id="{AA92DD5F-9EAE-4800-AABA-F9679E9E8EFA}"/>
+                <a16:creationId xmlns:a16="http://schemas.microsoft.com/office/drawing/2014/main" id="{81D2521B-2361-4C77-9F87-525714570CA5}"/>
               </a:ext>
             </a:extLst>
           </p:cNvPr>
@@ -3226,7 +3283,7 @@
           <p:cNvPr id="29" name="">
             <a:extLst xmlns:a="http://schemas.openxmlformats.org/drawingml/2006/main">
               <a:ext uri="{FF2B5EF4-FFF2-40B4-BE49-F238E27FC236}">
-                <a16:creationId xmlns:a16="http://schemas.microsoft.com/office/drawing/2014/main" id="{E8147818-2808-48BA-9B05-927A982606D8}"/>
+                <a16:creationId xmlns:a16="http://schemas.microsoft.com/office/drawing/2014/main" id="{AB9E074E-AC43-44A5-9130-EED966FA2A89}"/>
               </a:ext>
             </a:extLst>
           </p:cNvPr>
@@ -3283,7 +3340,7 @@
           <p:cNvPr id="30" name="">
             <a:extLst xmlns:a="http://schemas.openxmlformats.org/drawingml/2006/main">
               <a:ext uri="{FF2B5EF4-FFF2-40B4-BE49-F238E27FC236}">
-                <a16:creationId xmlns:a16="http://schemas.microsoft.com/office/drawing/2014/main" id="{2814C527-9016-4216-A5EF-36CF518FC9C4}"/>
+                <a16:creationId xmlns:a16="http://schemas.microsoft.com/office/drawing/2014/main" id="{2D262F68-0FD6-4A4F-A79D-FD221AE9C74D}"/>
               </a:ext>
             </a:extLst>
           </p:cNvPr>
@@ -3363,7 +3420,7 @@
           <p:cNvPr id="31" name="">
             <a:extLst xmlns:a="http://schemas.openxmlformats.org/drawingml/2006/main">
               <a:ext uri="{FF2B5EF4-FFF2-40B4-BE49-F238E27FC236}">
-                <a16:creationId xmlns:a16="http://schemas.microsoft.com/office/drawing/2014/main" id="{AB05E5ED-5056-4063-95DF-037528454530}"/>
+                <a16:creationId xmlns:a16="http://schemas.microsoft.com/office/drawing/2014/main" id="{93C17D65-1542-4429-9B68-BA0E452AD9B6}"/>
               </a:ext>
             </a:extLst>
           </p:cNvPr>
@@ -3420,7 +3477,7 @@
           <p:cNvPr id="32" name="">
             <a:extLst xmlns:a="http://schemas.openxmlformats.org/drawingml/2006/main">
               <a:ext uri="{FF2B5EF4-FFF2-40B4-BE49-F238E27FC236}">
-                <a16:creationId xmlns:a16="http://schemas.microsoft.com/office/drawing/2014/main" id="{79033D50-B063-4594-92E3-9843E0022B9E}"/>
+                <a16:creationId xmlns:a16="http://schemas.microsoft.com/office/drawing/2014/main" id="{DE48F164-53D8-4751-968D-800AAEB288EC}"/>
               </a:ext>
             </a:extLst>
           </p:cNvPr>
@@ -3477,7 +3534,7 @@
           <p:cNvPr id="33" name="">
             <a:extLst xmlns:a="http://schemas.openxmlformats.org/drawingml/2006/main">
               <a:ext uri="{FF2B5EF4-FFF2-40B4-BE49-F238E27FC236}">
-                <a16:creationId xmlns:a16="http://schemas.microsoft.com/office/drawing/2014/main" id="{32997F68-2530-4097-839A-514DA28EE37D}"/>
+                <a16:creationId xmlns:a16="http://schemas.microsoft.com/office/drawing/2014/main" id="{0E7460FF-55B9-40AF-9EDA-6ABC18EB6131}"/>
               </a:ext>
             </a:extLst>
           </p:cNvPr>
@@ -3534,7 +3591,7 @@
           <p:cNvPr id="34" name="">
             <a:extLst xmlns:a="http://schemas.openxmlformats.org/drawingml/2006/main">
               <a:ext uri="{FF2B5EF4-FFF2-40B4-BE49-F238E27FC236}">
-                <a16:creationId xmlns:a16="http://schemas.microsoft.com/office/drawing/2014/main" id="{3699BDD2-6C75-44B0-9FA2-C44B266796C0}"/>
+                <a16:creationId xmlns:a16="http://schemas.microsoft.com/office/drawing/2014/main" id="{2449621F-4A58-47E2-BD6B-FEE8B47FE6C8}"/>
               </a:ext>
             </a:extLst>
           </p:cNvPr>
@@ -3591,7 +3648,7 @@
           <p:cNvPr id="35" name="">
             <a:extLst xmlns:a="http://schemas.openxmlformats.org/drawingml/2006/main">
               <a:ext uri="{FF2B5EF4-FFF2-40B4-BE49-F238E27FC236}">
-                <a16:creationId xmlns:a16="http://schemas.microsoft.com/office/drawing/2014/main" id="{9C5905EF-D626-47DE-AC26-C2614BCF5812}"/>
+                <a16:creationId xmlns:a16="http://schemas.microsoft.com/office/drawing/2014/main" id="{8E648D2A-430E-47A5-8155-77A530400D4B}"/>
               </a:ext>
             </a:extLst>
           </p:cNvPr>
@@ -3648,7 +3705,7 @@
           <p:cNvPr id="36" name="">
             <a:extLst xmlns:a="http://schemas.openxmlformats.org/drawingml/2006/main">
               <a:ext uri="{FF2B5EF4-FFF2-40B4-BE49-F238E27FC236}">
-                <a16:creationId xmlns:a16="http://schemas.microsoft.com/office/drawing/2014/main" id="{E97CEA58-AE7F-42AC-B568-FC519C582CD3}"/>
+                <a16:creationId xmlns:a16="http://schemas.microsoft.com/office/drawing/2014/main" id="{6F815282-EAC4-44B5-BC75-5947F4B3F880}"/>
               </a:ext>
             </a:extLst>
           </p:cNvPr>
@@ -3705,7 +3762,7 @@
           <p:cNvPr id="37" name="">
             <a:extLst xmlns:a="http://schemas.openxmlformats.org/drawingml/2006/main">
               <a:ext uri="{FF2B5EF4-FFF2-40B4-BE49-F238E27FC236}">
-                <a16:creationId xmlns:a16="http://schemas.microsoft.com/office/drawing/2014/main" id="{8CA5995F-2477-44F4-AC52-6EAB116055EB}"/>
+                <a16:creationId xmlns:a16="http://schemas.microsoft.com/office/drawing/2014/main" id="{3C5339E0-4922-485A-8097-04E70A8A3A8E}"/>
               </a:ext>
             </a:extLst>
           </p:cNvPr>
@@ -3762,7 +3819,7 @@
           <p:cNvPr id="38" name="">
             <a:extLst xmlns:a="http://schemas.openxmlformats.org/drawingml/2006/main">
               <a:ext uri="{FF2B5EF4-FFF2-40B4-BE49-F238E27FC236}">
-                <a16:creationId xmlns:a16="http://schemas.microsoft.com/office/drawing/2014/main" id="{2585ADD7-160B-4C6E-863E-FE8449DFC2E6}"/>
+                <a16:creationId xmlns:a16="http://schemas.microsoft.com/office/drawing/2014/main" id="{F43FDD74-FFCA-4D01-8289-CE4DE7CCC897}"/>
               </a:ext>
             </a:extLst>
           </p:cNvPr>
@@ -3819,7 +3876,7 @@
           <p:cNvPr id="39" name="">
             <a:extLst xmlns:a="http://schemas.openxmlformats.org/drawingml/2006/main">
               <a:ext uri="{FF2B5EF4-FFF2-40B4-BE49-F238E27FC236}">
-                <a16:creationId xmlns:a16="http://schemas.microsoft.com/office/drawing/2014/main" id="{D08161D3-6E29-4B43-A673-972DA7A7FCDE}"/>
+                <a16:creationId xmlns:a16="http://schemas.microsoft.com/office/drawing/2014/main" id="{1A48615F-98F4-4402-8C62-9E0DDBE1D68E}"/>
               </a:ext>
             </a:extLst>
           </p:cNvPr>
@@ -3876,7 +3933,7 @@
           <p:cNvPr id="40" name="">
             <a:extLst xmlns:a="http://schemas.openxmlformats.org/drawingml/2006/main">
               <a:ext uri="{FF2B5EF4-FFF2-40B4-BE49-F238E27FC236}">
-                <a16:creationId xmlns:a16="http://schemas.microsoft.com/office/drawing/2014/main" id="{25F284AE-0D23-4C37-AB1C-F1EB8673085D}"/>
+                <a16:creationId xmlns:a16="http://schemas.microsoft.com/office/drawing/2014/main" id="{58ADFE38-ED9B-4008-96A1-A7BC9F4E1D9F}"/>
               </a:ext>
             </a:extLst>
           </p:cNvPr>
@@ -3933,7 +3990,7 @@
           <p:cNvPr id="41" name="">
             <a:extLst xmlns:a="http://schemas.openxmlformats.org/drawingml/2006/main">
               <a:ext uri="{FF2B5EF4-FFF2-40B4-BE49-F238E27FC236}">
-                <a16:creationId xmlns:a16="http://schemas.microsoft.com/office/drawing/2014/main" id="{F4CDBF12-79DB-48A6-AA99-DBABDA49E2A7}"/>
+                <a16:creationId xmlns:a16="http://schemas.microsoft.com/office/drawing/2014/main" id="{C68E7284-3E15-47F0-9461-83C02AF9E5AB}"/>
               </a:ext>
             </a:extLst>
           </p:cNvPr>
@@ -3990,7 +4047,7 @@
           <p:cNvPr id="42" name="">
             <a:extLst xmlns:a="http://schemas.openxmlformats.org/drawingml/2006/main">
               <a:ext uri="{FF2B5EF4-FFF2-40B4-BE49-F238E27FC236}">
-                <a16:creationId xmlns:a16="http://schemas.microsoft.com/office/drawing/2014/main" id="{F2153BB1-B9D4-48CC-8A16-500BBA4117F8}"/>
+                <a16:creationId xmlns:a16="http://schemas.microsoft.com/office/drawing/2014/main" id="{C7894AF2-3A14-4A17-93C7-981CC6715F65}"/>
               </a:ext>
             </a:extLst>
           </p:cNvPr>
@@ -4047,7 +4104,7 @@
           <p:cNvPr id="43" name="">
             <a:extLst xmlns:a="http://schemas.openxmlformats.org/drawingml/2006/main">
               <a:ext uri="{FF2B5EF4-FFF2-40B4-BE49-F238E27FC236}">
-                <a16:creationId xmlns:a16="http://schemas.microsoft.com/office/drawing/2014/main" id="{842D6556-081E-48D5-955D-C92D6FCF5546}"/>
+                <a16:creationId xmlns:a16="http://schemas.microsoft.com/office/drawing/2014/main" id="{EED9CE8F-D3DE-4B58-96C1-58B950D35AA3}"/>
               </a:ext>
             </a:extLst>
           </p:cNvPr>
@@ -4104,7 +4161,7 @@
           <p:cNvPr id="44" name="">
             <a:extLst xmlns:a="http://schemas.openxmlformats.org/drawingml/2006/main">
               <a:ext uri="{FF2B5EF4-FFF2-40B4-BE49-F238E27FC236}">
-                <a16:creationId xmlns:a16="http://schemas.microsoft.com/office/drawing/2014/main" id="{B48FC2A8-F48D-4641-BCE7-89918A73A15D}"/>
+                <a16:creationId xmlns:a16="http://schemas.microsoft.com/office/drawing/2014/main" id="{B2E9E3BD-2CFB-4835-9054-350C17E1E656}"/>
               </a:ext>
             </a:extLst>
           </p:cNvPr>
@@ -4136,7 +4193,7 @@
           <p:cNvPr id="45" name="">
             <a:extLst xmlns:a="http://schemas.openxmlformats.org/drawingml/2006/main">
               <a:ext uri="{FF2B5EF4-FFF2-40B4-BE49-F238E27FC236}">
-                <a16:creationId xmlns:a16="http://schemas.microsoft.com/office/drawing/2014/main" id="{128CB552-67D6-4061-BFD4-DF6A03E8D71C}"/>
+                <a16:creationId xmlns:a16="http://schemas.microsoft.com/office/drawing/2014/main" id="{AE06A2A7-690C-401D-916C-55DCB35A2693}"/>
               </a:ext>
             </a:extLst>
           </p:cNvPr>
@@ -4191,7 +4248,7 @@
     </p:spTree>
     <p:extLst>
       <p:ext uri="{BB962C8B-B14F-4D97-AF65-F5344CB8AC3E}">
-        <p14:creationId xmlns:p14="http://schemas.microsoft.com/office/powerpoint/2010/main" val="197672856"/>
+        <p14:creationId xmlns:p14="http://schemas.microsoft.com/office/powerpoint/2010/main" val="1391267623"/>
       </p:ext>
     </p:extLst>
   </p:cSld>
@@ -4219,10 +4276,10 @@
       </p:grpSpPr>
       <p:sp>
         <p:nvSpPr>
-          <p:cNvPr id="57" name="">
-            <a:extLst xmlns:a="http://schemas.openxmlformats.org/drawingml/2006/main">
-              <a:ext uri="{FF2B5EF4-FFF2-40B4-BE49-F238E27FC236}">
-                <a16:creationId xmlns:a16="http://schemas.microsoft.com/office/drawing/2014/main" id="{64F011BB-FF34-43DA-86B7-5A32C7D5EB46}"/>
+          <p:cNvPr id="60" name="">
+            <a:extLst xmlns:a="http://schemas.openxmlformats.org/drawingml/2006/main">
+              <a:ext uri="{FF2B5EF4-FFF2-40B4-BE49-F238E27FC236}">
+                <a16:creationId xmlns:a16="http://schemas.microsoft.com/office/drawing/2014/main" id="{09C2349F-33E0-4886-82AA-19059B78000E}"/>
               </a:ext>
             </a:extLst>
           </p:cNvPr>
@@ -4252,7 +4309,7 @@
           <p:cNvPr id="2" name="">
             <a:extLst xmlns:a="http://schemas.openxmlformats.org/drawingml/2006/main">
               <a:ext uri="{FF2B5EF4-FFF2-40B4-BE49-F238E27FC236}">
-                <a16:creationId xmlns:a16="http://schemas.microsoft.com/office/drawing/2014/main" id="{259BD839-25A6-4899-89FD-C047910FB1F6}"/>
+                <a16:creationId xmlns:a16="http://schemas.microsoft.com/office/drawing/2014/main" id="{EBE5AA3D-4C1E-4AAE-8A58-0952E217425A}"/>
               </a:ext>
             </a:extLst>
           </p:cNvPr>
@@ -4309,7 +4366,7 @@
           <p:cNvPr id="3" name="">
             <a:extLst xmlns:a="http://schemas.openxmlformats.org/drawingml/2006/main">
               <a:ext uri="{FF2B5EF4-FFF2-40B4-BE49-F238E27FC236}">
-                <a16:creationId xmlns:a16="http://schemas.microsoft.com/office/drawing/2014/main" id="{8139E8DC-544B-4C6D-96B2-28F3B3BF846A}"/>
+                <a16:creationId xmlns:a16="http://schemas.microsoft.com/office/drawing/2014/main" id="{7269C19B-99CE-4F3A-AE95-75E3CDF1AD08}"/>
               </a:ext>
             </a:extLst>
           </p:cNvPr>
@@ -4339,7 +4396,7 @@
           <p:cNvPr id="4" name="">
             <a:extLst xmlns:a="http://schemas.openxmlformats.org/drawingml/2006/main">
               <a:ext uri="{FF2B5EF4-FFF2-40B4-BE49-F238E27FC236}">
-                <a16:creationId xmlns:a16="http://schemas.microsoft.com/office/drawing/2014/main" id="{22864318-7B0A-4B53-B072-F9F3A185B1F9}"/>
+                <a16:creationId xmlns:a16="http://schemas.microsoft.com/office/drawing/2014/main" id="{C229DD4C-9454-4416-9CE8-45BF015541F7}"/>
               </a:ext>
             </a:extLst>
           </p:cNvPr>
@@ -4396,7 +4453,7 @@
           <p:cNvPr id="5" name="">
             <a:extLst xmlns:a="http://schemas.openxmlformats.org/drawingml/2006/main">
               <a:ext uri="{FF2B5EF4-FFF2-40B4-BE49-F238E27FC236}">
-                <a16:creationId xmlns:a16="http://schemas.microsoft.com/office/drawing/2014/main" id="{7582A647-A186-4264-870F-8D8606D71B98}"/>
+                <a16:creationId xmlns:a16="http://schemas.microsoft.com/office/drawing/2014/main" id="{0B35B348-A86B-45F2-8F59-4C903BBB9BF2}"/>
               </a:ext>
             </a:extLst>
           </p:cNvPr>
@@ -4453,7 +4510,7 @@
           <p:cNvPr id="6" name="">
             <a:extLst xmlns:a="http://schemas.openxmlformats.org/drawingml/2006/main">
               <a:ext uri="{FF2B5EF4-FFF2-40B4-BE49-F238E27FC236}">
-                <a16:creationId xmlns:a16="http://schemas.microsoft.com/office/drawing/2014/main" id="{41FD03DE-CBC2-4515-A229-D57164FA80FA}"/>
+                <a16:creationId xmlns:a16="http://schemas.microsoft.com/office/drawing/2014/main" id="{014C47C7-781B-4B1A-BAAD-502257B2F24F}"/>
               </a:ext>
             </a:extLst>
           </p:cNvPr>
@@ -4487,7 +4544,7 @@
           <p:cNvPr id="7" name="">
             <a:extLst xmlns:a="http://schemas.openxmlformats.org/drawingml/2006/main">
               <a:ext uri="{FF2B5EF4-FFF2-40B4-BE49-F238E27FC236}">
-                <a16:creationId xmlns:a16="http://schemas.microsoft.com/office/drawing/2014/main" id="{DD2270A5-7312-48CC-B533-E094705E2C29}"/>
+                <a16:creationId xmlns:a16="http://schemas.microsoft.com/office/drawing/2014/main" id="{C09875B4-2CFA-4089-A085-C47CBFCA0CE1}"/>
               </a:ext>
             </a:extLst>
           </p:cNvPr>
@@ -4519,7 +4576,7 @@
           <p:cNvPr id="8" name="">
             <a:extLst xmlns:a="http://schemas.openxmlformats.org/drawingml/2006/main">
               <a:ext uri="{FF2B5EF4-FFF2-40B4-BE49-F238E27FC236}">
-                <a16:creationId xmlns:a16="http://schemas.microsoft.com/office/drawing/2014/main" id="{B8740235-F449-42AB-8F37-E1E7ABE52F34}"/>
+                <a16:creationId xmlns:a16="http://schemas.microsoft.com/office/drawing/2014/main" id="{61DB83FE-FD47-430F-8C46-296C9C0832F4}"/>
               </a:ext>
             </a:extLst>
           </p:cNvPr>
@@ -4576,7 +4633,7 @@
           <p:cNvPr id="9" name="">
             <a:extLst xmlns:a="http://schemas.openxmlformats.org/drawingml/2006/main">
               <a:ext uri="{FF2B5EF4-FFF2-40B4-BE49-F238E27FC236}">
-                <a16:creationId xmlns:a16="http://schemas.microsoft.com/office/drawing/2014/main" id="{2DD87E20-6C2C-4B9C-992B-7DDF6D2BB8A9}"/>
+                <a16:creationId xmlns:a16="http://schemas.microsoft.com/office/drawing/2014/main" id="{C05CE73B-1E4B-4B00-A09D-1AA9236219FB}"/>
               </a:ext>
             </a:extLst>
           </p:cNvPr>
@@ -4633,7 +4690,7 @@
           <p:cNvPr id="10" name="">
             <a:extLst xmlns:a="http://schemas.openxmlformats.org/drawingml/2006/main">
               <a:ext uri="{FF2B5EF4-FFF2-40B4-BE49-F238E27FC236}">
-                <a16:creationId xmlns:a16="http://schemas.microsoft.com/office/drawing/2014/main" id="{6FFF794D-6D8A-4C0C-83E3-76B7CFD1BAF6}"/>
+                <a16:creationId xmlns:a16="http://schemas.microsoft.com/office/drawing/2014/main" id="{48379D53-C48F-45E1-97FC-EF9B58D0AC21}"/>
               </a:ext>
             </a:extLst>
           </p:cNvPr>
@@ -4690,7 +4747,7 @@
           <p:cNvPr id="11" name="">
             <a:extLst xmlns:a="http://schemas.openxmlformats.org/drawingml/2006/main">
               <a:ext uri="{FF2B5EF4-FFF2-40B4-BE49-F238E27FC236}">
-                <a16:creationId xmlns:a16="http://schemas.microsoft.com/office/drawing/2014/main" id="{D6546307-6BFD-4EA0-8E7E-33951D5512E5}"/>
+                <a16:creationId xmlns:a16="http://schemas.microsoft.com/office/drawing/2014/main" id="{121E24A7-354A-41E4-80F3-851D8743483B}"/>
               </a:ext>
             </a:extLst>
           </p:cNvPr>
@@ -4720,7 +4777,7 @@
           <p:cNvPr id="12" name="">
             <a:extLst xmlns:a="http://schemas.openxmlformats.org/drawingml/2006/main">
               <a:ext uri="{FF2B5EF4-FFF2-40B4-BE49-F238E27FC236}">
-                <a16:creationId xmlns:a16="http://schemas.microsoft.com/office/drawing/2014/main" id="{E532C84D-E9A0-4AEC-A4D2-8A957C627D0A}"/>
+                <a16:creationId xmlns:a16="http://schemas.microsoft.com/office/drawing/2014/main" id="{7694409F-9F56-448C-9C1E-8042654C3E4E}"/>
               </a:ext>
             </a:extLst>
           </p:cNvPr>
@@ -4754,7 +4811,7 @@
           <p:cNvPr id="13" name="">
             <a:extLst xmlns:a="http://schemas.openxmlformats.org/drawingml/2006/main">
               <a:ext uri="{FF2B5EF4-FFF2-40B4-BE49-F238E27FC236}">
-                <a16:creationId xmlns:a16="http://schemas.microsoft.com/office/drawing/2014/main" id="{AEF8D5F7-4A3C-410F-A907-0C2102C435EE}"/>
+                <a16:creationId xmlns:a16="http://schemas.microsoft.com/office/drawing/2014/main" id="{6F0CC1A1-D332-4F0F-9A0B-28429C4CE1C4}"/>
               </a:ext>
             </a:extLst>
           </p:cNvPr>
@@ -4786,7 +4843,7 @@
           <p:cNvPr id="14" name="">
             <a:extLst xmlns:a="http://schemas.openxmlformats.org/drawingml/2006/main">
               <a:ext uri="{FF2B5EF4-FFF2-40B4-BE49-F238E27FC236}">
-                <a16:creationId xmlns:a16="http://schemas.microsoft.com/office/drawing/2014/main" id="{66747862-4F6C-4424-A06E-111DC29D7679}"/>
+                <a16:creationId xmlns:a16="http://schemas.microsoft.com/office/drawing/2014/main" id="{2A6372B1-DA18-4741-805C-22891DC57633}"/>
               </a:ext>
             </a:extLst>
           </p:cNvPr>
@@ -4843,7 +4900,7 @@
           <p:cNvPr id="15" name="">
             <a:extLst xmlns:a="http://schemas.openxmlformats.org/drawingml/2006/main">
               <a:ext uri="{FF2B5EF4-FFF2-40B4-BE49-F238E27FC236}">
-                <a16:creationId xmlns:a16="http://schemas.microsoft.com/office/drawing/2014/main" id="{E561D083-4575-4553-824A-D6CADC62B3A9}"/>
+                <a16:creationId xmlns:a16="http://schemas.microsoft.com/office/drawing/2014/main" id="{45101FA9-AE5D-4879-A492-0E9EFCEBD257}"/>
               </a:ext>
             </a:extLst>
           </p:cNvPr>
@@ -4900,7 +4957,7 @@
           <p:cNvPr id="16" name="">
             <a:extLst xmlns:a="http://schemas.openxmlformats.org/drawingml/2006/main">
               <a:ext uri="{FF2B5EF4-FFF2-40B4-BE49-F238E27FC236}">
-                <a16:creationId xmlns:a16="http://schemas.microsoft.com/office/drawing/2014/main" id="{62B591A1-09C8-45E3-BE2C-31FC007445F7}"/>
+                <a16:creationId xmlns:a16="http://schemas.microsoft.com/office/drawing/2014/main" id="{DC120C8C-65BB-4428-8563-64CA74D34442}"/>
               </a:ext>
             </a:extLst>
           </p:cNvPr>
@@ -4957,7 +5014,7 @@
           <p:cNvPr id="17" name="">
             <a:extLst xmlns:a="http://schemas.openxmlformats.org/drawingml/2006/main">
               <a:ext uri="{FF2B5EF4-FFF2-40B4-BE49-F238E27FC236}">
-                <a16:creationId xmlns:a16="http://schemas.microsoft.com/office/drawing/2014/main" id="{1EA2E514-E61B-4D5E-BCBD-FC0799ADBCA2}"/>
+                <a16:creationId xmlns:a16="http://schemas.microsoft.com/office/drawing/2014/main" id="{C86922AB-C7C3-4BA9-BB0A-71A71F608F5B}"/>
               </a:ext>
             </a:extLst>
           </p:cNvPr>
@@ -4987,7 +5044,7 @@
           <p:cNvPr id="18" name="">
             <a:extLst xmlns:a="http://schemas.openxmlformats.org/drawingml/2006/main">
               <a:ext uri="{FF2B5EF4-FFF2-40B4-BE49-F238E27FC236}">
-                <a16:creationId xmlns:a16="http://schemas.microsoft.com/office/drawing/2014/main" id="{10F1A724-8112-4F10-94F2-217CFA88BA6C}"/>
+                <a16:creationId xmlns:a16="http://schemas.microsoft.com/office/drawing/2014/main" id="{AF9D12ED-BD11-4C9C-B75A-DD485FA2556B}"/>
               </a:ext>
             </a:extLst>
           </p:cNvPr>
@@ -5021,7 +5078,7 @@
           <p:cNvPr id="19" name="">
             <a:extLst xmlns:a="http://schemas.openxmlformats.org/drawingml/2006/main">
               <a:ext uri="{FF2B5EF4-FFF2-40B4-BE49-F238E27FC236}">
-                <a16:creationId xmlns:a16="http://schemas.microsoft.com/office/drawing/2014/main" id="{3F72B3E7-44BB-4965-80F3-84FF877F9C6E}"/>
+                <a16:creationId xmlns:a16="http://schemas.microsoft.com/office/drawing/2014/main" id="{A594F333-A38E-47F0-94C1-8494103FAE09}"/>
               </a:ext>
             </a:extLst>
           </p:cNvPr>
@@ -5053,7 +5110,7 @@
           <p:cNvPr id="20" name="">
             <a:extLst xmlns:a="http://schemas.openxmlformats.org/drawingml/2006/main">
               <a:ext uri="{FF2B5EF4-FFF2-40B4-BE49-F238E27FC236}">
-                <a16:creationId xmlns:a16="http://schemas.microsoft.com/office/drawing/2014/main" id="{814E15A7-14A0-4EBD-AA91-1BDFE2EF9F33}"/>
+                <a16:creationId xmlns:a16="http://schemas.microsoft.com/office/drawing/2014/main" id="{B95C2EEB-241C-4BBC-B73D-976C0BFC9BC3}"/>
               </a:ext>
             </a:extLst>
           </p:cNvPr>
@@ -5110,7 +5167,7 @@
           <p:cNvPr id="21" name="">
             <a:extLst xmlns:a="http://schemas.openxmlformats.org/drawingml/2006/main">
               <a:ext uri="{FF2B5EF4-FFF2-40B4-BE49-F238E27FC236}">
-                <a16:creationId xmlns:a16="http://schemas.microsoft.com/office/drawing/2014/main" id="{9D015403-4B79-4BA7-BB9A-3C02BF1513FA}"/>
+                <a16:creationId xmlns:a16="http://schemas.microsoft.com/office/drawing/2014/main" id="{F9BC6141-0C3A-4B83-B803-07B8FB7D007A}"/>
               </a:ext>
             </a:extLst>
           </p:cNvPr>
@@ -5167,7 +5224,7 @@
           <p:cNvPr id="22" name="">
             <a:extLst xmlns:a="http://schemas.openxmlformats.org/drawingml/2006/main">
               <a:ext uri="{FF2B5EF4-FFF2-40B4-BE49-F238E27FC236}">
-                <a16:creationId xmlns:a16="http://schemas.microsoft.com/office/drawing/2014/main" id="{B73F83C8-966A-4832-B4D0-FDE570EA85A5}"/>
+                <a16:creationId xmlns:a16="http://schemas.microsoft.com/office/drawing/2014/main" id="{3A9A31B0-6B1F-4FF6-8B24-F0BDE1D593C3}"/>
               </a:ext>
             </a:extLst>
           </p:cNvPr>
@@ -5224,7 +5281,7 @@
           <p:cNvPr id="23" name="">
             <a:extLst xmlns:a="http://schemas.openxmlformats.org/drawingml/2006/main">
               <a:ext uri="{FF2B5EF4-FFF2-40B4-BE49-F238E27FC236}">
-                <a16:creationId xmlns:a16="http://schemas.microsoft.com/office/drawing/2014/main" id="{B2515A4B-1A53-49AD-BF61-D68EC5288D09}"/>
+                <a16:creationId xmlns:a16="http://schemas.microsoft.com/office/drawing/2014/main" id="{19914CA6-E4BB-4853-9DFE-A66CAAA47D8D}"/>
               </a:ext>
             </a:extLst>
           </p:cNvPr>
@@ -5254,7 +5311,7 @@
           <p:cNvPr id="24" name="">
             <a:extLst xmlns:a="http://schemas.openxmlformats.org/drawingml/2006/main">
               <a:ext uri="{FF2B5EF4-FFF2-40B4-BE49-F238E27FC236}">
-                <a16:creationId xmlns:a16="http://schemas.microsoft.com/office/drawing/2014/main" id="{83CF0A87-82B9-4B16-956A-47DA203E78FB}"/>
+                <a16:creationId xmlns:a16="http://schemas.microsoft.com/office/drawing/2014/main" id="{52DC1D12-84C7-40B1-A427-2DF56BF5DC0C}"/>
               </a:ext>
             </a:extLst>
           </p:cNvPr>
@@ -5288,7 +5345,7 @@
           <p:cNvPr id="25" name="">
             <a:extLst xmlns:a="http://schemas.openxmlformats.org/drawingml/2006/main">
               <a:ext uri="{FF2B5EF4-FFF2-40B4-BE49-F238E27FC236}">
-                <a16:creationId xmlns:a16="http://schemas.microsoft.com/office/drawing/2014/main" id="{0FE7E642-67BF-44F8-9343-3ED871C79E72}"/>
+                <a16:creationId xmlns:a16="http://schemas.microsoft.com/office/drawing/2014/main" id="{29C442D6-1B10-4EF5-B8D3-447C144631BA}"/>
               </a:ext>
             </a:extLst>
           </p:cNvPr>
@@ -5320,7 +5377,7 @@
           <p:cNvPr id="26" name="">
             <a:extLst xmlns:a="http://schemas.openxmlformats.org/drawingml/2006/main">
               <a:ext uri="{FF2B5EF4-FFF2-40B4-BE49-F238E27FC236}">
-                <a16:creationId xmlns:a16="http://schemas.microsoft.com/office/drawing/2014/main" id="{FD1A5DEE-2DA2-409B-8FD1-1F4D42DBE038}"/>
+                <a16:creationId xmlns:a16="http://schemas.microsoft.com/office/drawing/2014/main" id="{287CE94F-AA92-4523-9803-B8586850EAD4}"/>
               </a:ext>
             </a:extLst>
           </p:cNvPr>
@@ -5377,7 +5434,7 @@
           <p:cNvPr id="27" name="">
             <a:extLst xmlns:a="http://schemas.openxmlformats.org/drawingml/2006/main">
               <a:ext uri="{FF2B5EF4-FFF2-40B4-BE49-F238E27FC236}">
-                <a16:creationId xmlns:a16="http://schemas.microsoft.com/office/drawing/2014/main" id="{DA69CFDC-669C-48AA-A440-1D25FDF1A45E}"/>
+                <a16:creationId xmlns:a16="http://schemas.microsoft.com/office/drawing/2014/main" id="{3B7141E0-E911-4B8C-A612-4CA0BA1716C4}"/>
               </a:ext>
             </a:extLst>
           </p:cNvPr>
@@ -5434,7 +5491,7 @@
           <p:cNvPr id="28" name="">
             <a:extLst xmlns:a="http://schemas.openxmlformats.org/drawingml/2006/main">
               <a:ext uri="{FF2B5EF4-FFF2-40B4-BE49-F238E27FC236}">
-                <a16:creationId xmlns:a16="http://schemas.microsoft.com/office/drawing/2014/main" id="{78B0B0B7-C44F-433A-A8E3-9BFF6306A617}"/>
+                <a16:creationId xmlns:a16="http://schemas.microsoft.com/office/drawing/2014/main" id="{F87D2DCA-A88C-4785-8BCA-89DBB4E47586}"/>
               </a:ext>
             </a:extLst>
           </p:cNvPr>
@@ -5491,7 +5548,7 @@
           <p:cNvPr id="29" name="">
             <a:extLst xmlns:a="http://schemas.openxmlformats.org/drawingml/2006/main">
               <a:ext uri="{FF2B5EF4-FFF2-40B4-BE49-F238E27FC236}">
-                <a16:creationId xmlns:a16="http://schemas.microsoft.com/office/drawing/2014/main" id="{2768DBAC-6101-407F-A17B-CC8A5D3C0C18}"/>
+                <a16:creationId xmlns:a16="http://schemas.microsoft.com/office/drawing/2014/main" id="{022BCE76-C021-4785-A666-3E7E55B47685}"/>
               </a:ext>
             </a:extLst>
           </p:cNvPr>
@@ -5521,7 +5578,7 @@
           <p:cNvPr id="30" name="">
             <a:extLst xmlns:a="http://schemas.openxmlformats.org/drawingml/2006/main">
               <a:ext uri="{FF2B5EF4-FFF2-40B4-BE49-F238E27FC236}">
-                <a16:creationId xmlns:a16="http://schemas.microsoft.com/office/drawing/2014/main" id="{244CAA04-A447-4408-87A9-90AA1931AFAB}"/>
+                <a16:creationId xmlns:a16="http://schemas.microsoft.com/office/drawing/2014/main" id="{A6E051AF-4993-42F4-AFCD-1B01A4F80CCF}"/>
               </a:ext>
             </a:extLst>
           </p:cNvPr>
@@ -5555,7 +5612,7 @@
           <p:cNvPr id="31" name="">
             <a:extLst xmlns:a="http://schemas.openxmlformats.org/drawingml/2006/main">
               <a:ext uri="{FF2B5EF4-FFF2-40B4-BE49-F238E27FC236}">
-                <a16:creationId xmlns:a16="http://schemas.microsoft.com/office/drawing/2014/main" id="{2C646DC0-FC88-459A-B08F-7C67E78FC426}"/>
+                <a16:creationId xmlns:a16="http://schemas.microsoft.com/office/drawing/2014/main" id="{254E2689-1B9C-4CA9-8D21-97181A0209AA}"/>
               </a:ext>
             </a:extLst>
           </p:cNvPr>
@@ -5587,7 +5644,7 @@
           <p:cNvPr id="32" name="">
             <a:extLst xmlns:a="http://schemas.openxmlformats.org/drawingml/2006/main">
               <a:ext uri="{FF2B5EF4-FFF2-40B4-BE49-F238E27FC236}">
-                <a16:creationId xmlns:a16="http://schemas.microsoft.com/office/drawing/2014/main" id="{5A73E1E3-E8F6-4B5C-8199-0F582CF6503A}"/>
+                <a16:creationId xmlns:a16="http://schemas.microsoft.com/office/drawing/2014/main" id="{0E790197-BE01-434E-A62F-1F1D198387C8}"/>
               </a:ext>
             </a:extLst>
           </p:cNvPr>
@@ -5644,7 +5701,7 @@
           <p:cNvPr id="33" name="">
             <a:extLst xmlns:a="http://schemas.openxmlformats.org/drawingml/2006/main">
               <a:ext uri="{FF2B5EF4-FFF2-40B4-BE49-F238E27FC236}">
-                <a16:creationId xmlns:a16="http://schemas.microsoft.com/office/drawing/2014/main" id="{EA0BB935-6303-465D-B07C-30F9C20ABEFC}"/>
+                <a16:creationId xmlns:a16="http://schemas.microsoft.com/office/drawing/2014/main" id="{DC455294-4F23-42A4-9D2B-1DFE30250A87}"/>
               </a:ext>
             </a:extLst>
           </p:cNvPr>
@@ -5701,7 +5758,7 @@
           <p:cNvPr id="34" name="">
             <a:extLst xmlns:a="http://schemas.openxmlformats.org/drawingml/2006/main">
               <a:ext uri="{FF2B5EF4-FFF2-40B4-BE49-F238E27FC236}">
-                <a16:creationId xmlns:a16="http://schemas.microsoft.com/office/drawing/2014/main" id="{DF550ABA-8790-4B3A-9016-E292BA13F4E1}"/>
+                <a16:creationId xmlns:a16="http://schemas.microsoft.com/office/drawing/2014/main" id="{F17B3871-5302-4755-A7F7-24A5E850BD42}"/>
               </a:ext>
             </a:extLst>
           </p:cNvPr>
@@ -5758,7 +5815,7 @@
           <p:cNvPr id="35" name="">
             <a:extLst xmlns:a="http://schemas.openxmlformats.org/drawingml/2006/main">
               <a:ext uri="{FF2B5EF4-FFF2-40B4-BE49-F238E27FC236}">
-                <a16:creationId xmlns:a16="http://schemas.microsoft.com/office/drawing/2014/main" id="{8DF0171E-5FFA-4B3A-9CB4-887652A51F87}"/>
+                <a16:creationId xmlns:a16="http://schemas.microsoft.com/office/drawing/2014/main" id="{0DA46C72-A06C-442A-B802-E057AC1FCADA}"/>
               </a:ext>
             </a:extLst>
           </p:cNvPr>
@@ -5788,7 +5845,7 @@
           <p:cNvPr id="36" name="">
             <a:extLst xmlns:a="http://schemas.openxmlformats.org/drawingml/2006/main">
               <a:ext uri="{FF2B5EF4-FFF2-40B4-BE49-F238E27FC236}">
-                <a16:creationId xmlns:a16="http://schemas.microsoft.com/office/drawing/2014/main" id="{5547D4C2-1D7C-48E1-9137-9585E51126EF}"/>
+                <a16:creationId xmlns:a16="http://schemas.microsoft.com/office/drawing/2014/main" id="{63694F7F-566E-469F-8199-817EB59BB950}"/>
               </a:ext>
             </a:extLst>
           </p:cNvPr>
@@ -5822,7 +5879,7 @@
           <p:cNvPr id="37" name="">
             <a:extLst xmlns:a="http://schemas.openxmlformats.org/drawingml/2006/main">
               <a:ext uri="{FF2B5EF4-FFF2-40B4-BE49-F238E27FC236}">
-                <a16:creationId xmlns:a16="http://schemas.microsoft.com/office/drawing/2014/main" id="{EF4E2F5F-4C54-4E40-835B-9EC56C2F974E}"/>
+                <a16:creationId xmlns:a16="http://schemas.microsoft.com/office/drawing/2014/main" id="{F781F7EE-2BB6-45D8-A7BB-04836211B7B7}"/>
               </a:ext>
             </a:extLst>
           </p:cNvPr>
@@ -5854,7 +5911,7 @@
           <p:cNvPr id="38" name="">
             <a:extLst xmlns:a="http://schemas.openxmlformats.org/drawingml/2006/main">
               <a:ext uri="{FF2B5EF4-FFF2-40B4-BE49-F238E27FC236}">
-                <a16:creationId xmlns:a16="http://schemas.microsoft.com/office/drawing/2014/main" id="{B5ADBE04-E087-4723-99DE-15307D415958}"/>
+                <a16:creationId xmlns:a16="http://schemas.microsoft.com/office/drawing/2014/main" id="{F6BCAA64-CCC3-4B89-AA1F-50D6F1C2F528}"/>
               </a:ext>
             </a:extLst>
           </p:cNvPr>
@@ -5911,7 +5968,7 @@
           <p:cNvPr id="39" name="">
             <a:extLst xmlns:a="http://schemas.openxmlformats.org/drawingml/2006/main">
               <a:ext uri="{FF2B5EF4-FFF2-40B4-BE49-F238E27FC236}">
-                <a16:creationId xmlns:a16="http://schemas.microsoft.com/office/drawing/2014/main" id="{4C822F58-0567-4539-8874-3EC8ADABE143}"/>
+                <a16:creationId xmlns:a16="http://schemas.microsoft.com/office/drawing/2014/main" id="{9D059C68-D3E8-4B24-9AB0-B9E057A441E0}"/>
               </a:ext>
             </a:extLst>
           </p:cNvPr>
@@ -5968,7 +6025,7 @@
           <p:cNvPr id="40" name="">
             <a:extLst xmlns:a="http://schemas.openxmlformats.org/drawingml/2006/main">
               <a:ext uri="{FF2B5EF4-FFF2-40B4-BE49-F238E27FC236}">
-                <a16:creationId xmlns:a16="http://schemas.microsoft.com/office/drawing/2014/main" id="{4679FCB5-2953-4260-940B-D31B0ADF160F}"/>
+                <a16:creationId xmlns:a16="http://schemas.microsoft.com/office/drawing/2014/main" id="{7B72EE36-2970-4750-A482-3B18932ECFF6}"/>
               </a:ext>
             </a:extLst>
           </p:cNvPr>
@@ -6025,7 +6082,7 @@
           <p:cNvPr id="41" name="">
             <a:extLst xmlns:a="http://schemas.openxmlformats.org/drawingml/2006/main">
               <a:ext uri="{FF2B5EF4-FFF2-40B4-BE49-F238E27FC236}">
-                <a16:creationId xmlns:a16="http://schemas.microsoft.com/office/drawing/2014/main" id="{E0B5CAD6-8E86-4387-8356-74DC720B520A}"/>
+                <a16:creationId xmlns:a16="http://schemas.microsoft.com/office/drawing/2014/main" id="{73B26FB8-8427-40B6-AD2F-00D1D59BA787}"/>
               </a:ext>
             </a:extLst>
           </p:cNvPr>
@@ -6082,7 +6139,7 @@
           <p:cNvPr id="42" name="">
             <a:extLst xmlns:a="http://schemas.openxmlformats.org/drawingml/2006/main">
               <a:ext uri="{FF2B5EF4-FFF2-40B4-BE49-F238E27FC236}">
-                <a16:creationId xmlns:a16="http://schemas.microsoft.com/office/drawing/2014/main" id="{D2871928-D8FF-4F0D-9BCC-5CA4B4934581}"/>
+                <a16:creationId xmlns:a16="http://schemas.microsoft.com/office/drawing/2014/main" id="{B188ECA0-369F-4FC7-AE49-AC37DC4B7AE6}"/>
               </a:ext>
             </a:extLst>
           </p:cNvPr>
@@ -6114,7 +6171,7 @@
           <p:cNvPr id="43" name="">
             <a:extLst xmlns:a="http://schemas.openxmlformats.org/drawingml/2006/main">
               <a:ext uri="{FF2B5EF4-FFF2-40B4-BE49-F238E27FC236}">
-                <a16:creationId xmlns:a16="http://schemas.microsoft.com/office/drawing/2014/main" id="{0D4F73EA-716D-4BDF-A958-958B8AA061B8}"/>
+                <a16:creationId xmlns:a16="http://schemas.microsoft.com/office/drawing/2014/main" id="{7DBCF324-1506-4DE1-A3BC-E9A6E949C0BE}"/>
               </a:ext>
             </a:extLst>
           </p:cNvPr>
@@ -6171,7 +6228,7 @@
           <p:cNvPr id="44" name="">
             <a:extLst xmlns:a="http://schemas.openxmlformats.org/drawingml/2006/main">
               <a:ext uri="{FF2B5EF4-FFF2-40B4-BE49-F238E27FC236}">
-                <a16:creationId xmlns:a16="http://schemas.microsoft.com/office/drawing/2014/main" id="{FCB78B87-FA4D-4497-959E-F6F71C431988}"/>
+                <a16:creationId xmlns:a16="http://schemas.microsoft.com/office/drawing/2014/main" id="{6A751B9F-B745-4571-B902-5EA8E2345D1A}"/>
               </a:ext>
             </a:extLst>
           </p:cNvPr>
@@ -6228,7 +6285,7 @@
           <p:cNvPr id="45" name="">
             <a:extLst xmlns:a="http://schemas.openxmlformats.org/drawingml/2006/main">
               <a:ext uri="{FF2B5EF4-FFF2-40B4-BE49-F238E27FC236}">
-                <a16:creationId xmlns:a16="http://schemas.microsoft.com/office/drawing/2014/main" id="{D07928A8-3E9A-4F1D-948E-5C56D73787F1}"/>
+                <a16:creationId xmlns:a16="http://schemas.microsoft.com/office/drawing/2014/main" id="{63CCCABA-58FE-4754-A549-5B79FBAF9712}"/>
               </a:ext>
             </a:extLst>
           </p:cNvPr>
@@ -6285,7 +6342,7 @@
           <p:cNvPr id="46" name="">
             <a:extLst xmlns:a="http://schemas.openxmlformats.org/drawingml/2006/main">
               <a:ext uri="{FF2B5EF4-FFF2-40B4-BE49-F238E27FC236}">
-                <a16:creationId xmlns:a16="http://schemas.microsoft.com/office/drawing/2014/main" id="{7C3D2FA8-88A0-45BD-B6BD-59912C151B70}"/>
+                <a16:creationId xmlns:a16="http://schemas.microsoft.com/office/drawing/2014/main" id="{3A16E88A-25BB-40D9-B656-EF9F6796B660}"/>
               </a:ext>
             </a:extLst>
           </p:cNvPr>
@@ -6342,7 +6399,7 @@
           <p:cNvPr id="47" name="">
             <a:extLst xmlns:a="http://schemas.openxmlformats.org/drawingml/2006/main">
               <a:ext uri="{FF2B5EF4-FFF2-40B4-BE49-F238E27FC236}">
-                <a16:creationId xmlns:a16="http://schemas.microsoft.com/office/drawing/2014/main" id="{BF01C491-5641-43DC-ABF8-228FEA6F5546}"/>
+                <a16:creationId xmlns:a16="http://schemas.microsoft.com/office/drawing/2014/main" id="{4EC95D5D-23D8-4DB8-8F0B-D450E2635626}"/>
               </a:ext>
             </a:extLst>
           </p:cNvPr>
@@ -6399,7 +6456,7 @@
           <p:cNvPr id="48" name="">
             <a:extLst xmlns:a="http://schemas.openxmlformats.org/drawingml/2006/main">
               <a:ext uri="{FF2B5EF4-FFF2-40B4-BE49-F238E27FC236}">
-                <a16:creationId xmlns:a16="http://schemas.microsoft.com/office/drawing/2014/main" id="{0638137A-E622-446E-BF57-798340F594C6}"/>
+                <a16:creationId xmlns:a16="http://schemas.microsoft.com/office/drawing/2014/main" id="{26AEA056-2D42-4134-BD6C-996817CFE0FB}"/>
               </a:ext>
             </a:extLst>
           </p:cNvPr>
@@ -6456,31 +6513,31 @@
           <p:cNvPr id="49" name="">
             <a:extLst xmlns:a="http://schemas.openxmlformats.org/drawingml/2006/main">
               <a:ext uri="{FF2B5EF4-FFF2-40B4-BE49-F238E27FC236}">
-                <a16:creationId xmlns:a16="http://schemas.microsoft.com/office/drawing/2014/main" id="{6986A958-1B5E-4E52-A77C-D84EDDB8225F}"/>
-              </a:ext>
-            </a:extLst>
-          </p:cNvPr>
-          <p:cNvSpPr>
-            <a:spLocks xmlns:a="http://schemas.openxmlformats.org/drawingml/2006/main" noGrp="1"/>
-          </p:cNvSpPr>
-          <p:nvPr/>
-        </p:nvSpPr>
-        <p:spPr>
-          <a:xfrm xmlns:a="http://schemas.openxmlformats.org/drawingml/2006/main">
-            <a:off x="571500" y="4629150"/>
-            <a:ext cx="3314700" cy="247650"/>
-          </a:xfrm>
-          <a:prstGeom xmlns:a="http://schemas.openxmlformats.org/drawingml/2006/main" prst="rect">
-            <a:avLst/>
-          </a:prstGeom>
-          <a:noFill xmlns:a="http://schemas.openxmlformats.org/drawingml/2006/main"/>
-          <a:ln xmlns:a="http://schemas.openxmlformats.org/drawingml/2006/main" w="0">
-            <a:noFill/>
-          </a:ln>
-        </p:spPr>
-        <p:txBody>
-          <a:bodyPr xmlns:a="http://schemas.openxmlformats.org/drawingml/2006/main" anchor="ctr">
-            <a:normAutofit fontScale="80392"/>
+                <a16:creationId xmlns:a16="http://schemas.microsoft.com/office/drawing/2014/main" id="{54A43162-FAE2-4CDE-BCCC-691FD53646DE}"/>
+              </a:ext>
+            </a:extLst>
+          </p:cNvPr>
+          <p:cNvSpPr>
+            <a:spLocks xmlns:a="http://schemas.openxmlformats.org/drawingml/2006/main" noGrp="1"/>
+          </p:cNvSpPr>
+          <p:nvPr/>
+        </p:nvSpPr>
+        <p:spPr>
+          <a:xfrm xmlns:a="http://schemas.openxmlformats.org/drawingml/2006/main">
+            <a:off x="571500" y="4610100"/>
+            <a:ext cx="3314700" cy="228600"/>
+          </a:xfrm>
+          <a:prstGeom xmlns:a="http://schemas.openxmlformats.org/drawingml/2006/main" prst="rect">
+            <a:avLst/>
+          </a:prstGeom>
+          <a:noFill xmlns:a="http://schemas.openxmlformats.org/drawingml/2006/main"/>
+          <a:ln xmlns:a="http://schemas.openxmlformats.org/drawingml/2006/main" w="0">
+            <a:noFill/>
+          </a:ln>
+        </p:spPr>
+        <p:txBody>
+          <a:bodyPr xmlns:a="http://schemas.openxmlformats.org/drawingml/2006/main" anchor="ctr">
+            <a:normAutofit fontScale="70588"/>
           </a:bodyPr>
           <a:lstStyle xmlns:a="http://schemas.openxmlformats.org/drawingml/2006/main"/>
           <a:p xmlns:a="http://schemas.openxmlformats.org/drawingml/2006/main">
@@ -6513,36 +6570,36 @@
           <p:cNvPr id="50" name="">
             <a:extLst xmlns:a="http://schemas.openxmlformats.org/drawingml/2006/main">
               <a:ext uri="{FF2B5EF4-FFF2-40B4-BE49-F238E27FC236}">
-                <a16:creationId xmlns:a16="http://schemas.microsoft.com/office/drawing/2014/main" id="{030D383E-1A02-4E6D-AA34-6296C62B643B}"/>
-              </a:ext>
-            </a:extLst>
-          </p:cNvPr>
-          <p:cNvSpPr>
-            <a:spLocks xmlns:a="http://schemas.openxmlformats.org/drawingml/2006/main" noGrp="1"/>
-          </p:cNvSpPr>
-          <p:nvPr/>
-        </p:nvSpPr>
-        <p:spPr>
-          <a:xfrm xmlns:a="http://schemas.openxmlformats.org/drawingml/2006/main">
-            <a:off x="571500" y="4933950"/>
-            <a:ext cx="3314700" cy="514350"/>
-          </a:xfrm>
-          <a:prstGeom xmlns:a="http://schemas.openxmlformats.org/drawingml/2006/main" prst="rect">
-            <a:avLst/>
-          </a:prstGeom>
-          <a:noFill xmlns:a="http://schemas.openxmlformats.org/drawingml/2006/main"/>
-          <a:ln xmlns:a="http://schemas.openxmlformats.org/drawingml/2006/main" w="0">
-            <a:noFill/>
-          </a:ln>
-        </p:spPr>
-        <p:txBody>
-          <a:bodyPr xmlns:a="http://schemas.openxmlformats.org/drawingml/2006/main" anchor="ctr">
-            <a:normAutofit fontScale="100000"/>
+                <a16:creationId xmlns:a16="http://schemas.microsoft.com/office/drawing/2014/main" id="{080F2501-1463-455B-ACC2-E3733F2EDAA8}"/>
+              </a:ext>
+            </a:extLst>
+          </p:cNvPr>
+          <p:cNvSpPr>
+            <a:spLocks xmlns:a="http://schemas.openxmlformats.org/drawingml/2006/main" noGrp="1"/>
+          </p:cNvSpPr>
+          <p:nvPr/>
+        </p:nvSpPr>
+        <p:spPr>
+          <a:xfrm xmlns:a="http://schemas.openxmlformats.org/drawingml/2006/main">
+            <a:off x="571500" y="4876800"/>
+            <a:ext cx="3314700" cy="361950"/>
+          </a:xfrm>
+          <a:prstGeom xmlns:a="http://schemas.openxmlformats.org/drawingml/2006/main" prst="rect">
+            <a:avLst/>
+          </a:prstGeom>
+          <a:noFill xmlns:a="http://schemas.openxmlformats.org/drawingml/2006/main"/>
+          <a:ln xmlns:a="http://schemas.openxmlformats.org/drawingml/2006/main" w="0">
+            <a:noFill/>
+          </a:ln>
+        </p:spPr>
+        <p:txBody>
+          <a:bodyPr xmlns:a="http://schemas.openxmlformats.org/drawingml/2006/main" anchor="ctr">
+            <a:normAutofit fontScale="91026"/>
           </a:bodyPr>
           <a:lstStyle xmlns:a="http://schemas.openxmlformats.org/drawingml/2006/main"/>
           <a:p xmlns:a="http://schemas.openxmlformats.org/drawingml/2006/main">
             <a:pPr algn="l">
-              <a:defRPr sz="1050" b="0">
+              <a:defRPr sz="975" b="0">
                 <a:solidFill>
                   <a:srgbClr val="657187"/>
                 </a:solidFill>
@@ -6552,7 +6609,7 @@
               </a:defRPr>
             </a:pPr>
             <a:r>
-              <a:rPr sz="1050" b="0">
+              <a:rPr sz="975" b="0">
                 <a:solidFill>
                   <a:srgbClr val="657187"/>
                 </a:solidFill>
@@ -6560,12 +6617,46 @@
                 <a:ea typeface="Malgun Gothic"/>
                 <a:cs typeface="Malgun Gothic"/>
               </a:rPr>
-              <a:t>메일 의미와 관계를 Pydantic Schema로 구조화</a:t>
-            </a:r>
-          </a:p>
+              <a:t>선택 이유  |  메일 의미와 Task 관계는 규칙으로 열거할 수 없지만 출력은 고정 Schema여야 합니다</a:t>
+            </a:r>
+          </a:p>
+        </p:txBody>
+      </p:sp>
+      <p:sp>
+        <p:nvSpPr>
+          <p:cNvPr id="51" name="">
+            <a:extLst xmlns:a="http://schemas.openxmlformats.org/drawingml/2006/main">
+              <a:ext uri="{FF2B5EF4-FFF2-40B4-BE49-F238E27FC236}">
+                <a16:creationId xmlns:a16="http://schemas.microsoft.com/office/drawing/2014/main" id="{6BC421D2-431C-45B3-B211-3DB9AE75126C}"/>
+              </a:ext>
+            </a:extLst>
+          </p:cNvPr>
+          <p:cNvSpPr>
+            <a:spLocks xmlns:a="http://schemas.openxmlformats.org/drawingml/2006/main" noGrp="1"/>
+          </p:cNvSpPr>
+          <p:nvPr/>
+        </p:nvSpPr>
+        <p:spPr>
+          <a:xfrm xmlns:a="http://schemas.openxmlformats.org/drawingml/2006/main">
+            <a:off x="571500" y="5257800"/>
+            <a:ext cx="3314700" cy="361950"/>
+          </a:xfrm>
+          <a:prstGeom xmlns:a="http://schemas.openxmlformats.org/drawingml/2006/main" prst="rect">
+            <a:avLst/>
+          </a:prstGeom>
+          <a:noFill xmlns:a="http://schemas.openxmlformats.org/drawingml/2006/main"/>
+          <a:ln xmlns:a="http://schemas.openxmlformats.org/drawingml/2006/main" w="0">
+            <a:noFill/>
+          </a:ln>
+        </p:spPr>
+        <p:txBody>
+          <a:bodyPr xmlns:a="http://schemas.openxmlformats.org/drawingml/2006/main" anchor="ctr">
+            <a:normAutofit fontScale="91026"/>
+          </a:bodyPr>
+          <a:lstStyle xmlns:a="http://schemas.openxmlformats.org/drawingml/2006/main"/>
           <a:p xmlns:a="http://schemas.openxmlformats.org/drawingml/2006/main">
             <a:pPr algn="l">
-              <a:defRPr sz="1050" b="0">
+              <a:defRPr sz="975" b="0">
                 <a:solidFill>
                   <a:srgbClr val="657187"/>
                 </a:solidFill>
@@ -6575,7 +6666,7 @@
               </a:defRPr>
             </a:pPr>
             <a:r>
-              <a:rPr sz="1050" b="0">
+              <a:rPr sz="975" b="0">
                 <a:solidFill>
                   <a:srgbClr val="657187"/>
                 </a:solidFill>
@@ -6583,41 +6674,41 @@
                 <a:ea typeface="Malgun Gothic"/>
                 <a:cs typeface="Malgun Gothic"/>
               </a:rPr>
-              <a:t>모델 간 우월성 비교는 수행하지 않음</a:t>
-            </a:r>
-          </a:p>
-        </p:txBody>
-      </p:sp>
-      <p:sp>
-        <p:nvSpPr>
-          <p:cNvPr id="51" name="">
-            <a:extLst xmlns:a="http://schemas.openxmlformats.org/drawingml/2006/main">
-              <a:ext uri="{FF2B5EF4-FFF2-40B4-BE49-F238E27FC236}">
-                <a16:creationId xmlns:a16="http://schemas.microsoft.com/office/drawing/2014/main" id="{ADEC3B8B-8413-491E-B721-F159EB9BD0B7}"/>
-              </a:ext>
-            </a:extLst>
-          </p:cNvPr>
-          <p:cNvSpPr>
-            <a:spLocks xmlns:a="http://schemas.openxmlformats.org/drawingml/2006/main" noGrp="1"/>
-          </p:cNvSpPr>
-          <p:nvPr/>
-        </p:nvSpPr>
-        <p:spPr>
-          <a:xfrm xmlns:a="http://schemas.openxmlformats.org/drawingml/2006/main">
-            <a:off x="4248150" y="4629150"/>
-            <a:ext cx="3314700" cy="247650"/>
-          </a:xfrm>
-          <a:prstGeom xmlns:a="http://schemas.openxmlformats.org/drawingml/2006/main" prst="rect">
-            <a:avLst/>
-          </a:prstGeom>
-          <a:noFill xmlns:a="http://schemas.openxmlformats.org/drawingml/2006/main"/>
-          <a:ln xmlns:a="http://schemas.openxmlformats.org/drawingml/2006/main" w="0">
-            <a:noFill/>
-          </a:ln>
-        </p:spPr>
-        <p:txBody>
-          <a:bodyPr xmlns:a="http://schemas.openxmlformats.org/drawingml/2006/main" anchor="ctr">
-            <a:normAutofit fontScale="80392"/>
+              <a:t>핵심 활용  |  관계·Action을 Pydantic 계약으로 받고, 계약 위반은 재시도 루프 안에서 재생성</a:t>
+            </a:r>
+          </a:p>
+        </p:txBody>
+      </p:sp>
+      <p:sp>
+        <p:nvSpPr>
+          <p:cNvPr id="52" name="">
+            <a:extLst xmlns:a="http://schemas.openxmlformats.org/drawingml/2006/main">
+              <a:ext uri="{FF2B5EF4-FFF2-40B4-BE49-F238E27FC236}">
+                <a16:creationId xmlns:a16="http://schemas.microsoft.com/office/drawing/2014/main" id="{F382CF9B-36DD-43E5-AB49-7A588E9881F1}"/>
+              </a:ext>
+            </a:extLst>
+          </p:cNvPr>
+          <p:cNvSpPr>
+            <a:spLocks xmlns:a="http://schemas.openxmlformats.org/drawingml/2006/main" noGrp="1"/>
+          </p:cNvSpPr>
+          <p:nvPr/>
+        </p:nvSpPr>
+        <p:spPr>
+          <a:xfrm xmlns:a="http://schemas.openxmlformats.org/drawingml/2006/main">
+            <a:off x="4248150" y="4610100"/>
+            <a:ext cx="3314700" cy="228600"/>
+          </a:xfrm>
+          <a:prstGeom xmlns:a="http://schemas.openxmlformats.org/drawingml/2006/main" prst="rect">
+            <a:avLst/>
+          </a:prstGeom>
+          <a:noFill xmlns:a="http://schemas.openxmlformats.org/drawingml/2006/main"/>
+          <a:ln xmlns:a="http://schemas.openxmlformats.org/drawingml/2006/main" w="0">
+            <a:noFill/>
+          </a:ln>
+        </p:spPr>
+        <p:txBody>
+          <a:bodyPr xmlns:a="http://schemas.openxmlformats.org/drawingml/2006/main" anchor="ctr">
+            <a:normAutofit fontScale="70588"/>
           </a:bodyPr>
           <a:lstStyle xmlns:a="http://schemas.openxmlformats.org/drawingml/2006/main"/>
           <a:p xmlns:a="http://schemas.openxmlformats.org/drawingml/2006/main">
@@ -6647,39 +6738,39 @@
       </p:sp>
       <p:sp>
         <p:nvSpPr>
-          <p:cNvPr id="52" name="">
-            <a:extLst xmlns:a="http://schemas.openxmlformats.org/drawingml/2006/main">
-              <a:ext uri="{FF2B5EF4-FFF2-40B4-BE49-F238E27FC236}">
-                <a16:creationId xmlns:a16="http://schemas.microsoft.com/office/drawing/2014/main" id="{3A7C0B19-01F5-441B-B3F8-3570836294E4}"/>
-              </a:ext>
-            </a:extLst>
-          </p:cNvPr>
-          <p:cNvSpPr>
-            <a:spLocks xmlns:a="http://schemas.openxmlformats.org/drawingml/2006/main" noGrp="1"/>
-          </p:cNvSpPr>
-          <p:nvPr/>
-        </p:nvSpPr>
-        <p:spPr>
-          <a:xfrm xmlns:a="http://schemas.openxmlformats.org/drawingml/2006/main">
-            <a:off x="4248150" y="4933950"/>
-            <a:ext cx="3314700" cy="514350"/>
-          </a:xfrm>
-          <a:prstGeom xmlns:a="http://schemas.openxmlformats.org/drawingml/2006/main" prst="rect">
-            <a:avLst/>
-          </a:prstGeom>
-          <a:noFill xmlns:a="http://schemas.openxmlformats.org/drawingml/2006/main"/>
-          <a:ln xmlns:a="http://schemas.openxmlformats.org/drawingml/2006/main" w="0">
-            <a:noFill/>
-          </a:ln>
-        </p:spPr>
-        <p:txBody>
-          <a:bodyPr xmlns:a="http://schemas.openxmlformats.org/drawingml/2006/main" anchor="ctr">
-            <a:normAutofit fontScale="77589"/>
+          <p:cNvPr id="53" name="">
+            <a:extLst xmlns:a="http://schemas.openxmlformats.org/drawingml/2006/main">
+              <a:ext uri="{FF2B5EF4-FFF2-40B4-BE49-F238E27FC236}">
+                <a16:creationId xmlns:a16="http://schemas.microsoft.com/office/drawing/2014/main" id="{0F7F0C0D-94FA-4ED9-AEF8-4D396355E3F9}"/>
+              </a:ext>
+            </a:extLst>
+          </p:cNvPr>
+          <p:cNvSpPr>
+            <a:spLocks xmlns:a="http://schemas.openxmlformats.org/drawingml/2006/main" noGrp="1"/>
+          </p:cNvSpPr>
+          <p:nvPr/>
+        </p:nvSpPr>
+        <p:spPr>
+          <a:xfrm xmlns:a="http://schemas.openxmlformats.org/drawingml/2006/main">
+            <a:off x="4248150" y="4876800"/>
+            <a:ext cx="3314700" cy="361950"/>
+          </a:xfrm>
+          <a:prstGeom xmlns:a="http://schemas.openxmlformats.org/drawingml/2006/main" prst="rect">
+            <a:avLst/>
+          </a:prstGeom>
+          <a:noFill xmlns:a="http://schemas.openxmlformats.org/drawingml/2006/main"/>
+          <a:ln xmlns:a="http://schemas.openxmlformats.org/drawingml/2006/main" w="0">
+            <a:noFill/>
+          </a:ln>
+        </p:spPr>
+        <p:txBody>
+          <a:bodyPr xmlns:a="http://schemas.openxmlformats.org/drawingml/2006/main" anchor="ctr">
+            <a:normAutofit fontScale="91026"/>
           </a:bodyPr>
           <a:lstStyle xmlns:a="http://schemas.openxmlformats.org/drawingml/2006/main"/>
           <a:p xmlns:a="http://schemas.openxmlformats.org/drawingml/2006/main">
             <a:pPr algn="l">
-              <a:defRPr sz="1050" b="0">
+              <a:defRPr sz="975" b="0">
                 <a:solidFill>
                   <a:srgbClr val="657187"/>
                 </a:solidFill>
@@ -6689,7 +6780,7 @@
               </a:defRPr>
             </a:pPr>
             <a:r>
-              <a:rPr sz="1050" b="0">
+              <a:rPr sz="975" b="0">
                 <a:solidFill>
                   <a:srgbClr val="657187"/>
                 </a:solidFill>
@@ -6697,12 +6788,46 @@
                 <a:ea typeface="Malgun Gothic"/>
                 <a:cs typeface="Malgun Gothic"/>
               </a:rPr>
-              <a:t>개인 MVP의 활성 Task·최근 Mail 3건·History 5건·사용자 결정만 제한 검색</a:t>
-            </a:r>
-          </a:p>
+              <a:t>선택 이유  |  찾을 대상이 외부 문서가 아니라 내 활성 Task·최근 Mail·History·과거 결정입니다</a:t>
+            </a:r>
+          </a:p>
+        </p:txBody>
+      </p:sp>
+      <p:sp>
+        <p:nvSpPr>
+          <p:cNvPr id="54" name="">
+            <a:extLst xmlns:a="http://schemas.openxmlformats.org/drawingml/2006/main">
+              <a:ext uri="{FF2B5EF4-FFF2-40B4-BE49-F238E27FC236}">
+                <a16:creationId xmlns:a16="http://schemas.microsoft.com/office/drawing/2014/main" id="{8FE5FC27-AE06-47D1-BC86-18CF949B080E}"/>
+              </a:ext>
+            </a:extLst>
+          </p:cNvPr>
+          <p:cNvSpPr>
+            <a:spLocks xmlns:a="http://schemas.openxmlformats.org/drawingml/2006/main" noGrp="1"/>
+          </p:cNvSpPr>
+          <p:nvPr/>
+        </p:nvSpPr>
+        <p:spPr>
+          <a:xfrm xmlns:a="http://schemas.openxmlformats.org/drawingml/2006/main">
+            <a:off x="4248150" y="5257800"/>
+            <a:ext cx="3314700" cy="361950"/>
+          </a:xfrm>
+          <a:prstGeom xmlns:a="http://schemas.openxmlformats.org/drawingml/2006/main" prst="rect">
+            <a:avLst/>
+          </a:prstGeom>
+          <a:noFill xmlns:a="http://schemas.openxmlformats.org/drawingml/2006/main"/>
+          <a:ln xmlns:a="http://schemas.openxmlformats.org/drawingml/2006/main" w="0">
+            <a:noFill/>
+          </a:ln>
+        </p:spPr>
+        <p:txBody>
+          <a:bodyPr xmlns:a="http://schemas.openxmlformats.org/drawingml/2006/main" anchor="ctr">
+            <a:normAutofit fontScale="91026"/>
+          </a:bodyPr>
+          <a:lstStyle xmlns:a="http://schemas.openxmlformats.org/drawingml/2006/main"/>
           <a:p xmlns:a="http://schemas.openxmlformats.org/drawingml/2006/main">
             <a:pPr algn="l">
-              <a:defRPr sz="1050" b="0">
+              <a:defRPr sz="975" b="0">
                 <a:solidFill>
                   <a:srgbClr val="657187"/>
                 </a:solidFill>
@@ -6712,7 +6837,7 @@
               </a:defRPr>
             </a:pPr>
             <a:r>
-              <a:rPr sz="1050" b="0">
+              <a:rPr sz="975" b="0">
                 <a:solidFill>
                   <a:srgbClr val="657187"/>
                 </a:solidFill>
@@ -6720,41 +6845,41 @@
                 <a:ea typeface="Malgun Gothic"/>
                 <a:cs typeface="Malgun Gothic"/>
               </a:rPr>
-              <a:t>Vector DB와 외부 Embedding은 사용하지 않는 Structured Retrieval</a:t>
-            </a:r>
-          </a:p>
-        </p:txBody>
-      </p:sp>
-      <p:sp>
-        <p:nvSpPr>
-          <p:cNvPr id="53" name="">
-            <a:extLst xmlns:a="http://schemas.openxmlformats.org/drawingml/2006/main">
-              <a:ext uri="{FF2B5EF4-FFF2-40B4-BE49-F238E27FC236}">
-                <a16:creationId xmlns:a16="http://schemas.microsoft.com/office/drawing/2014/main" id="{3A01DC34-1758-4C01-9EC1-3BAFA98775A4}"/>
-              </a:ext>
-            </a:extLst>
-          </p:cNvPr>
-          <p:cNvSpPr>
-            <a:spLocks xmlns:a="http://schemas.openxmlformats.org/drawingml/2006/main" noGrp="1"/>
-          </p:cNvSpPr>
-          <p:nvPr/>
-        </p:nvSpPr>
-        <p:spPr>
-          <a:xfrm xmlns:a="http://schemas.openxmlformats.org/drawingml/2006/main">
-            <a:off x="7924800" y="4629150"/>
-            <a:ext cx="3314700" cy="247650"/>
-          </a:xfrm>
-          <a:prstGeom xmlns:a="http://schemas.openxmlformats.org/drawingml/2006/main" prst="rect">
-            <a:avLst/>
-          </a:prstGeom>
-          <a:noFill xmlns:a="http://schemas.openxmlformats.org/drawingml/2006/main"/>
-          <a:ln xmlns:a="http://schemas.openxmlformats.org/drawingml/2006/main" w="0">
-            <a:noFill/>
-          </a:ln>
-        </p:spPr>
-        <p:txBody>
-          <a:bodyPr xmlns:a="http://schemas.openxmlformats.org/drawingml/2006/main" anchor="ctr">
-            <a:normAutofit fontScale="80392"/>
+              <a:t>핵심 성과  |  제한 top-k 검색으로 Live 15 Case Action 28/28. Vector DB는 쓰지 않았습니다</a:t>
+            </a:r>
+          </a:p>
+        </p:txBody>
+      </p:sp>
+      <p:sp>
+        <p:nvSpPr>
+          <p:cNvPr id="55" name="">
+            <a:extLst xmlns:a="http://schemas.openxmlformats.org/drawingml/2006/main">
+              <a:ext uri="{FF2B5EF4-FFF2-40B4-BE49-F238E27FC236}">
+                <a16:creationId xmlns:a16="http://schemas.microsoft.com/office/drawing/2014/main" id="{2488489A-13A5-4932-BC78-A5C1F8383E06}"/>
+              </a:ext>
+            </a:extLst>
+          </p:cNvPr>
+          <p:cNvSpPr>
+            <a:spLocks xmlns:a="http://schemas.openxmlformats.org/drawingml/2006/main" noGrp="1"/>
+          </p:cNvSpPr>
+          <p:nvPr/>
+        </p:nvSpPr>
+        <p:spPr>
+          <a:xfrm xmlns:a="http://schemas.openxmlformats.org/drawingml/2006/main">
+            <a:off x="7924800" y="4610100"/>
+            <a:ext cx="3314700" cy="228600"/>
+          </a:xfrm>
+          <a:prstGeom xmlns:a="http://schemas.openxmlformats.org/drawingml/2006/main" prst="rect">
+            <a:avLst/>
+          </a:prstGeom>
+          <a:noFill xmlns:a="http://schemas.openxmlformats.org/drawingml/2006/main"/>
+          <a:ln xmlns:a="http://schemas.openxmlformats.org/drawingml/2006/main" w="0">
+            <a:noFill/>
+          </a:ln>
+        </p:spPr>
+        <p:txBody>
+          <a:bodyPr xmlns:a="http://schemas.openxmlformats.org/drawingml/2006/main" anchor="ctr">
+            <a:normAutofit fontScale="70588"/>
           </a:bodyPr>
           <a:lstStyle xmlns:a="http://schemas.openxmlformats.org/drawingml/2006/main"/>
           <a:p xmlns:a="http://schemas.openxmlformats.org/drawingml/2006/main">
@@ -6784,39 +6909,39 @@
       </p:sp>
       <p:sp>
         <p:nvSpPr>
-          <p:cNvPr id="54" name="">
-            <a:extLst xmlns:a="http://schemas.openxmlformats.org/drawingml/2006/main">
-              <a:ext uri="{FF2B5EF4-FFF2-40B4-BE49-F238E27FC236}">
-                <a16:creationId xmlns:a16="http://schemas.microsoft.com/office/drawing/2014/main" id="{B22587A5-E9DE-4DAD-9299-C365E5DA0FAC}"/>
-              </a:ext>
-            </a:extLst>
-          </p:cNvPr>
-          <p:cNvSpPr>
-            <a:spLocks xmlns:a="http://schemas.openxmlformats.org/drawingml/2006/main" noGrp="1"/>
-          </p:cNvSpPr>
-          <p:nvPr/>
-        </p:nvSpPr>
-        <p:spPr>
-          <a:xfrm xmlns:a="http://schemas.openxmlformats.org/drawingml/2006/main">
-            <a:off x="7924800" y="4933950"/>
-            <a:ext cx="3314700" cy="514350"/>
-          </a:xfrm>
-          <a:prstGeom xmlns:a="http://schemas.openxmlformats.org/drawingml/2006/main" prst="rect">
-            <a:avLst/>
-          </a:prstGeom>
-          <a:noFill xmlns:a="http://schemas.openxmlformats.org/drawingml/2006/main"/>
-          <a:ln xmlns:a="http://schemas.openxmlformats.org/drawingml/2006/main" w="0">
-            <a:noFill/>
-          </a:ln>
-        </p:spPr>
-        <p:txBody>
-          <a:bodyPr xmlns:a="http://schemas.openxmlformats.org/drawingml/2006/main" anchor="ctr">
-            <a:normAutofit fontScale="100000"/>
+          <p:cNvPr id="56" name="">
+            <a:extLst xmlns:a="http://schemas.openxmlformats.org/drawingml/2006/main">
+              <a:ext uri="{FF2B5EF4-FFF2-40B4-BE49-F238E27FC236}">
+                <a16:creationId xmlns:a16="http://schemas.microsoft.com/office/drawing/2014/main" id="{ABD79311-73F1-47C5-9A42-2E9567CC7E01}"/>
+              </a:ext>
+            </a:extLst>
+          </p:cNvPr>
+          <p:cNvSpPr>
+            <a:spLocks xmlns:a="http://schemas.openxmlformats.org/drawingml/2006/main" noGrp="1"/>
+          </p:cNvSpPr>
+          <p:nvPr/>
+        </p:nvSpPr>
+        <p:spPr>
+          <a:xfrm xmlns:a="http://schemas.openxmlformats.org/drawingml/2006/main">
+            <a:off x="7924800" y="4876800"/>
+            <a:ext cx="3314700" cy="361950"/>
+          </a:xfrm>
+          <a:prstGeom xmlns:a="http://schemas.openxmlformats.org/drawingml/2006/main" prst="rect">
+            <a:avLst/>
+          </a:prstGeom>
+          <a:noFill xmlns:a="http://schemas.openxmlformats.org/drawingml/2006/main"/>
+          <a:ln xmlns:a="http://schemas.openxmlformats.org/drawingml/2006/main" w="0">
+            <a:noFill/>
+          </a:ln>
+        </p:spPr>
+        <p:txBody>
+          <a:bodyPr xmlns:a="http://schemas.openxmlformats.org/drawingml/2006/main" anchor="ctr">
+            <a:normAutofit fontScale="89381"/>
           </a:bodyPr>
           <a:lstStyle xmlns:a="http://schemas.openxmlformats.org/drawingml/2006/main"/>
           <a:p xmlns:a="http://schemas.openxmlformats.org/drawingml/2006/main">
             <a:pPr algn="l">
-              <a:defRPr sz="1050" b="0">
+              <a:defRPr sz="975" b="0">
                 <a:solidFill>
                   <a:srgbClr val="657187"/>
                 </a:solidFill>
@@ -6826,7 +6951,7 @@
               </a:defRPr>
             </a:pPr>
             <a:r>
-              <a:rPr sz="1050" b="0">
+              <a:rPr sz="975" b="0">
                 <a:solidFill>
                   <a:srgbClr val="657187"/>
                 </a:solidFill>
@@ -6834,12 +6959,46 @@
                 <a:ea typeface="Malgun Gothic"/>
                 <a:cs typeface="Malgun Gothic"/>
               </a:rPr>
-              <a:t>LangGraph 없이 단일 Agent + 결정론 Guard 구성</a:t>
-            </a:r>
-          </a:p>
+              <a:t>선택 이유  |  LLM이 DB를 직접 바꾸면 비용이 업무 데이터 오변경입니다. 상태가 닫혀 있어 LangGraph 없이 충분했습니다</a:t>
+            </a:r>
+          </a:p>
+        </p:txBody>
+      </p:sp>
+      <p:sp>
+        <p:nvSpPr>
+          <p:cNvPr id="57" name="">
+            <a:extLst xmlns:a="http://schemas.openxmlformats.org/drawingml/2006/main">
+              <a:ext uri="{FF2B5EF4-FFF2-40B4-BE49-F238E27FC236}">
+                <a16:creationId xmlns:a16="http://schemas.microsoft.com/office/drawing/2014/main" id="{02CAF709-E7B9-47E6-BBA6-82796B541E66}"/>
+              </a:ext>
+            </a:extLst>
+          </p:cNvPr>
+          <p:cNvSpPr>
+            <a:spLocks xmlns:a="http://schemas.openxmlformats.org/drawingml/2006/main" noGrp="1"/>
+          </p:cNvSpPr>
+          <p:nvPr/>
+        </p:nvSpPr>
+        <p:spPr>
+          <a:xfrm xmlns:a="http://schemas.openxmlformats.org/drawingml/2006/main">
+            <a:off x="7924800" y="5257800"/>
+            <a:ext cx="3314700" cy="361950"/>
+          </a:xfrm>
+          <a:prstGeom xmlns:a="http://schemas.openxmlformats.org/drawingml/2006/main" prst="rect">
+            <a:avLst/>
+          </a:prstGeom>
+          <a:noFill xmlns:a="http://schemas.openxmlformats.org/drawingml/2006/main"/>
+          <a:ln xmlns:a="http://schemas.openxmlformats.org/drawingml/2006/main" w="0">
+            <a:noFill/>
+          </a:ln>
+        </p:spPr>
+        <p:txBody>
+          <a:bodyPr xmlns:a="http://schemas.openxmlformats.org/drawingml/2006/main" anchor="ctr">
+            <a:normAutofit fontScale="91026"/>
+          </a:bodyPr>
+          <a:lstStyle xmlns:a="http://schemas.openxmlformats.org/drawingml/2006/main"/>
           <a:p xmlns:a="http://schemas.openxmlformats.org/drawingml/2006/main">
             <a:pPr algn="l">
-              <a:defRPr sz="1050" b="0">
+              <a:defRPr sz="975" b="0">
                 <a:solidFill>
                   <a:srgbClr val="657187"/>
                 </a:solidFill>
@@ -6849,7 +7008,7 @@
               </a:defRPr>
             </a:pPr>
             <a:r>
-              <a:rPr sz="1050" b="0">
+              <a:rPr sz="975" b="0">
                 <a:solidFill>
                   <a:srgbClr val="657187"/>
                 </a:solidFill>
@@ -6857,17 +7016,17 @@
                 <a:ea typeface="Malgun Gothic"/>
                 <a:cs typeface="Malgun Gothic"/>
               </a:rPr>
-              <a:t>후보 ID·상태 전이·중요 변경을 Python이 검증</a:t>
-            </a:r>
-          </a:p>
-        </p:txBody>
-      </p:sp>
-      <p:sp>
-        <p:nvSpPr>
-          <p:cNvPr id="55" name="">
-            <a:extLst xmlns:a="http://schemas.openxmlformats.org/drawingml/2006/main">
-              <a:ext uri="{FF2B5EF4-FFF2-40B4-BE49-F238E27FC236}">
-                <a16:creationId xmlns:a16="http://schemas.microsoft.com/office/drawing/2014/main" id="{47DBD8D4-EDD9-401C-94B2-5F883772B281}"/>
+              <a:t>구현 포인트  |  후보 ID·상태 전이·중요 변경을 검증하고 완료·취소·기한 단축은 항상 승인</a:t>
+            </a:r>
+          </a:p>
+        </p:txBody>
+      </p:sp>
+      <p:sp>
+        <p:nvSpPr>
+          <p:cNvPr id="58" name="">
+            <a:extLst xmlns:a="http://schemas.openxmlformats.org/drawingml/2006/main">
+              <a:ext uri="{FF2B5EF4-FFF2-40B4-BE49-F238E27FC236}">
+                <a16:creationId xmlns:a16="http://schemas.microsoft.com/office/drawing/2014/main" id="{8B88EA27-8A29-4788-B150-DDED1C3CC3C0}"/>
               </a:ext>
             </a:extLst>
           </p:cNvPr>
@@ -6896,10 +7055,10 @@
       </p:sp>
       <p:sp>
         <p:nvSpPr>
-          <p:cNvPr id="56" name="">
-            <a:extLst xmlns:a="http://schemas.openxmlformats.org/drawingml/2006/main">
-              <a:ext uri="{FF2B5EF4-FFF2-40B4-BE49-F238E27FC236}">
-                <a16:creationId xmlns:a16="http://schemas.microsoft.com/office/drawing/2014/main" id="{D2A13A4B-6F4F-4D25-A128-6231BF7918EC}"/>
+          <p:cNvPr id="59" name="">
+            <a:extLst xmlns:a="http://schemas.openxmlformats.org/drawingml/2006/main">
+              <a:ext uri="{FF2B5EF4-FFF2-40B4-BE49-F238E27FC236}">
+                <a16:creationId xmlns:a16="http://schemas.microsoft.com/office/drawing/2014/main" id="{6F830FF3-5ABC-44CC-B3FB-BD15F490983A}"/>
               </a:ext>
             </a:extLst>
           </p:cNvPr>
@@ -6954,7 +7113,7 @@
     </p:spTree>
     <p:extLst>
       <p:ext uri="{BB962C8B-B14F-4D97-AF65-F5344CB8AC3E}">
-        <p14:creationId xmlns:p14="http://schemas.microsoft.com/office/powerpoint/2010/main" val="369713276"/>
+        <p14:creationId xmlns:p14="http://schemas.microsoft.com/office/powerpoint/2010/main" val="1210513944"/>
       </p:ext>
     </p:extLst>
   </p:cSld>
@@ -6985,7 +7144,7 @@
           <p:cNvPr id="44" name="">
             <a:extLst xmlns:a="http://schemas.openxmlformats.org/drawingml/2006/main">
               <a:ext uri="{FF2B5EF4-FFF2-40B4-BE49-F238E27FC236}">
-                <a16:creationId xmlns:a16="http://schemas.microsoft.com/office/drawing/2014/main" id="{A301DC41-1C2D-4F2B-AD8C-85A5ECD61ED2}"/>
+                <a16:creationId xmlns:a16="http://schemas.microsoft.com/office/drawing/2014/main" id="{96681DC1-751C-46EF-8927-6FDE3C29CC3A}"/>
               </a:ext>
             </a:extLst>
           </p:cNvPr>
@@ -7015,7 +7174,7 @@
           <p:cNvPr id="2" name="">
             <a:extLst xmlns:a="http://schemas.openxmlformats.org/drawingml/2006/main">
               <a:ext uri="{FF2B5EF4-FFF2-40B4-BE49-F238E27FC236}">
-                <a16:creationId xmlns:a16="http://schemas.microsoft.com/office/drawing/2014/main" id="{1E441AA8-0B20-43C2-BBB8-95CF06C50F6E}"/>
+                <a16:creationId xmlns:a16="http://schemas.microsoft.com/office/drawing/2014/main" id="{D820F628-973B-4BFD-B2E1-69E76C8D412F}"/>
               </a:ext>
             </a:extLst>
           </p:cNvPr>
@@ -7072,7 +7231,7 @@
           <p:cNvPr id="3" name="">
             <a:extLst xmlns:a="http://schemas.openxmlformats.org/drawingml/2006/main">
               <a:ext uri="{FF2B5EF4-FFF2-40B4-BE49-F238E27FC236}">
-                <a16:creationId xmlns:a16="http://schemas.microsoft.com/office/drawing/2014/main" id="{42BBCC6D-ADA0-4C2C-8562-9949078E652D}"/>
+                <a16:creationId xmlns:a16="http://schemas.microsoft.com/office/drawing/2014/main" id="{777767B2-BAAA-46A4-BC03-1B8F0A1A3163}"/>
               </a:ext>
             </a:extLst>
           </p:cNvPr>
@@ -7102,7 +7261,7 @@
           <p:cNvPr id="4" name="">
             <a:extLst xmlns:a="http://schemas.openxmlformats.org/drawingml/2006/main">
               <a:ext uri="{FF2B5EF4-FFF2-40B4-BE49-F238E27FC236}">
-                <a16:creationId xmlns:a16="http://schemas.microsoft.com/office/drawing/2014/main" id="{3C39DFE0-6BFD-4C84-BB8D-EA22FF6D0B1A}"/>
+                <a16:creationId xmlns:a16="http://schemas.microsoft.com/office/drawing/2014/main" id="{2CBFB80F-588D-48C8-8726-67B84CB1A415}"/>
               </a:ext>
             </a:extLst>
           </p:cNvPr>
@@ -7159,7 +7318,7 @@
           <p:cNvPr id="5" name="">
             <a:extLst xmlns:a="http://schemas.openxmlformats.org/drawingml/2006/main">
               <a:ext uri="{FF2B5EF4-FFF2-40B4-BE49-F238E27FC236}">
-                <a16:creationId xmlns:a16="http://schemas.microsoft.com/office/drawing/2014/main" id="{21123301-B235-4A6C-A941-86438BE10626}"/>
+                <a16:creationId xmlns:a16="http://schemas.microsoft.com/office/drawing/2014/main" id="{300C475D-FF82-4C49-8668-8417535D2ABE}"/>
               </a:ext>
             </a:extLst>
           </p:cNvPr>
@@ -7216,19 +7375,19 @@
           <p:cNvPr id="6" name="">
             <a:extLst xmlns:a="http://schemas.openxmlformats.org/drawingml/2006/main">
               <a:ext uri="{FF2B5EF4-FFF2-40B4-BE49-F238E27FC236}">
-                <a16:creationId xmlns:a16="http://schemas.microsoft.com/office/drawing/2014/main" id="{43AEF528-3075-4C82-934D-F07CBD6C80FD}"/>
-              </a:ext>
-            </a:extLst>
-          </p:cNvPr>
-          <p:cNvSpPr>
-            <a:spLocks xmlns:a="http://schemas.openxmlformats.org/drawingml/2006/main" noGrp="1"/>
-          </p:cNvSpPr>
-          <p:nvPr/>
-        </p:nvSpPr>
-        <p:spPr>
-          <a:xfrm xmlns:a="http://schemas.openxmlformats.org/drawingml/2006/main">
-            <a:off x="571500" y="1581150"/>
-            <a:ext cx="10953750" cy="419100"/>
+                <a16:creationId xmlns:a16="http://schemas.microsoft.com/office/drawing/2014/main" id="{19DC154E-2C9E-4421-B43F-A91E82F3D48B}"/>
+              </a:ext>
+            </a:extLst>
+          </p:cNvPr>
+          <p:cNvSpPr>
+            <a:spLocks xmlns:a="http://schemas.openxmlformats.org/drawingml/2006/main" noGrp="1"/>
+          </p:cNvSpPr>
+          <p:nvPr/>
+        </p:nvSpPr>
+        <p:spPr>
+          <a:xfrm xmlns:a="http://schemas.openxmlformats.org/drawingml/2006/main">
+            <a:off x="571500" y="1524000"/>
+            <a:ext cx="10953750" cy="533400"/>
           </a:xfrm>
           <a:prstGeom xmlns:a="http://schemas.openxmlformats.org/drawingml/2006/main" prst="rect">
             <a:avLst/>
@@ -7263,7 +7422,7 @@
                 <a:ea typeface="Malgun Gothic"/>
                 <a:cs typeface="Malgun Gothic"/>
               </a:rPr>
-              <a:t>Agent가 결론 하나만 내면 후보를 견준 것인지 설명을 붙인 것인지 알 수 없습니다. 멘토 피드백도 "Rule Base처럼 보인다"였습니다.</a:t>
+              <a:t>Agent가 결론 하나만 내면 후보를 견준 것인지 설명을 붙인 것인지 알 수 없습니다. 멘토 피드백도 "Rule Base처럼 보인다"였습니다. 왜 이 접근인가 — 틀렸을 때 비용이 업무 데이터 오변경이라, 넓게 펼치는 대신 후보를 제한하고 Guard와 사용자 승인으로 막았습니다.</a:t>
             </a:r>
           </a:p>
         </p:txBody>
@@ -7273,7 +7432,7 @@
           <p:cNvPr id="7" name="">
             <a:extLst xmlns:a="http://schemas.openxmlformats.org/drawingml/2006/main">
               <a:ext uri="{FF2B5EF4-FFF2-40B4-BE49-F238E27FC236}">
-                <a16:creationId xmlns:a16="http://schemas.microsoft.com/office/drawing/2014/main" id="{337FACAB-384A-47F5-B56E-73E3FE8BBF70}"/>
+                <a16:creationId xmlns:a16="http://schemas.microsoft.com/office/drawing/2014/main" id="{00204DF6-A7FC-4CFF-83C4-24888AFCA226}"/>
               </a:ext>
             </a:extLst>
           </p:cNvPr>
@@ -7303,7 +7462,7 @@
           <p:cNvPr id="8" name="">
             <a:extLst xmlns:a="http://schemas.openxmlformats.org/drawingml/2006/main">
               <a:ext uri="{FF2B5EF4-FFF2-40B4-BE49-F238E27FC236}">
-                <a16:creationId xmlns:a16="http://schemas.microsoft.com/office/drawing/2014/main" id="{C580BC1A-D137-4562-9597-D5EAD378EB6F}"/>
+                <a16:creationId xmlns:a16="http://schemas.microsoft.com/office/drawing/2014/main" id="{A97A2B17-602A-4824-A603-89AF74E25781}"/>
               </a:ext>
             </a:extLst>
           </p:cNvPr>
@@ -7360,7 +7519,7 @@
           <p:cNvPr id="9" name="">
             <a:extLst xmlns:a="http://schemas.openxmlformats.org/drawingml/2006/main">
               <a:ext uri="{FF2B5EF4-FFF2-40B4-BE49-F238E27FC236}">
-                <a16:creationId xmlns:a16="http://schemas.microsoft.com/office/drawing/2014/main" id="{988620DA-64C5-46B9-A3DE-86BF2EEDFD52}"/>
+                <a16:creationId xmlns:a16="http://schemas.microsoft.com/office/drawing/2014/main" id="{3DDEB44D-9032-494D-BA6C-BB2B72FFE52A}"/>
               </a:ext>
             </a:extLst>
           </p:cNvPr>
@@ -7417,7 +7576,7 @@
           <p:cNvPr id="10" name="">
             <a:extLst xmlns:a="http://schemas.openxmlformats.org/drawingml/2006/main">
               <a:ext uri="{FF2B5EF4-FFF2-40B4-BE49-F238E27FC236}">
-                <a16:creationId xmlns:a16="http://schemas.microsoft.com/office/drawing/2014/main" id="{09E453D0-7C6D-4EDA-9434-4ECB9EC813D5}"/>
+                <a16:creationId xmlns:a16="http://schemas.microsoft.com/office/drawing/2014/main" id="{7EC7B1C0-AC84-4BFD-8362-FA63F445488F}"/>
               </a:ext>
             </a:extLst>
           </p:cNvPr>
@@ -7474,7 +7633,7 @@
           <p:cNvPr id="11" name="">
             <a:extLst xmlns:a="http://schemas.openxmlformats.org/drawingml/2006/main">
               <a:ext uri="{FF2B5EF4-FFF2-40B4-BE49-F238E27FC236}">
-                <a16:creationId xmlns:a16="http://schemas.microsoft.com/office/drawing/2014/main" id="{EDB7A92D-DDC1-460E-BD99-6D6A67F81D53}"/>
+                <a16:creationId xmlns:a16="http://schemas.microsoft.com/office/drawing/2014/main" id="{BD5C8BAD-9CAA-4D04-A48C-021F38B1E091}"/>
               </a:ext>
             </a:extLst>
           </p:cNvPr>
@@ -7506,7 +7665,7 @@
           <p:cNvPr id="12" name="">
             <a:extLst xmlns:a="http://schemas.openxmlformats.org/drawingml/2006/main">
               <a:ext uri="{FF2B5EF4-FFF2-40B4-BE49-F238E27FC236}">
-                <a16:creationId xmlns:a16="http://schemas.microsoft.com/office/drawing/2014/main" id="{6EFE7D67-3C66-4327-82BF-6EEF58D1C99B}"/>
+                <a16:creationId xmlns:a16="http://schemas.microsoft.com/office/drawing/2014/main" id="{AC762984-8780-4608-B469-99393DAE2048}"/>
               </a:ext>
             </a:extLst>
           </p:cNvPr>
@@ -7563,7 +7722,7 @@
           <p:cNvPr id="13" name="">
             <a:extLst xmlns:a="http://schemas.openxmlformats.org/drawingml/2006/main">
               <a:ext uri="{FF2B5EF4-FFF2-40B4-BE49-F238E27FC236}">
-                <a16:creationId xmlns:a16="http://schemas.microsoft.com/office/drawing/2014/main" id="{2A6FC9DA-9C0A-453F-88D0-FF08F42D6105}"/>
+                <a16:creationId xmlns:a16="http://schemas.microsoft.com/office/drawing/2014/main" id="{B7E5FDB5-C06D-429B-955B-CB8BA4506935}"/>
               </a:ext>
             </a:extLst>
           </p:cNvPr>
@@ -7620,7 +7779,7 @@
           <p:cNvPr id="14" name="">
             <a:extLst xmlns:a="http://schemas.openxmlformats.org/drawingml/2006/main">
               <a:ext uri="{FF2B5EF4-FFF2-40B4-BE49-F238E27FC236}">
-                <a16:creationId xmlns:a16="http://schemas.microsoft.com/office/drawing/2014/main" id="{5FCDFFB2-D8C2-48DD-A7C3-66FB909A3E1B}"/>
+                <a16:creationId xmlns:a16="http://schemas.microsoft.com/office/drawing/2014/main" id="{FE980190-6586-42CC-A0F2-D7AC5DE13E61}"/>
               </a:ext>
             </a:extLst>
           </p:cNvPr>
@@ -7677,7 +7836,7 @@
           <p:cNvPr id="15" name="">
             <a:extLst xmlns:a="http://schemas.openxmlformats.org/drawingml/2006/main">
               <a:ext uri="{FF2B5EF4-FFF2-40B4-BE49-F238E27FC236}">
-                <a16:creationId xmlns:a16="http://schemas.microsoft.com/office/drawing/2014/main" id="{B6438852-EB3E-4EF1-96C0-CBBEAA34A865}"/>
+                <a16:creationId xmlns:a16="http://schemas.microsoft.com/office/drawing/2014/main" id="{7E25E382-461B-4BDF-8206-DD66341F9AA6}"/>
               </a:ext>
             </a:extLst>
           </p:cNvPr>
@@ -7709,7 +7868,7 @@
           <p:cNvPr id="16" name="">
             <a:extLst xmlns:a="http://schemas.openxmlformats.org/drawingml/2006/main">
               <a:ext uri="{FF2B5EF4-FFF2-40B4-BE49-F238E27FC236}">
-                <a16:creationId xmlns:a16="http://schemas.microsoft.com/office/drawing/2014/main" id="{F9BFADE9-876F-4F8B-8B7B-54A8B30752EA}"/>
+                <a16:creationId xmlns:a16="http://schemas.microsoft.com/office/drawing/2014/main" id="{D15E143C-8481-456D-B5DF-5176B34C6D60}"/>
               </a:ext>
             </a:extLst>
           </p:cNvPr>
@@ -7766,7 +7925,7 @@
           <p:cNvPr id="17" name="">
             <a:extLst xmlns:a="http://schemas.openxmlformats.org/drawingml/2006/main">
               <a:ext uri="{FF2B5EF4-FFF2-40B4-BE49-F238E27FC236}">
-                <a16:creationId xmlns:a16="http://schemas.microsoft.com/office/drawing/2014/main" id="{A053DEEA-4831-4437-951C-C6758EB7606C}"/>
+                <a16:creationId xmlns:a16="http://schemas.microsoft.com/office/drawing/2014/main" id="{8AFBEF12-BB1D-4180-A8A2-F1DAE7D68BC1}"/>
               </a:ext>
             </a:extLst>
           </p:cNvPr>
@@ -7823,7 +7982,7 @@
           <p:cNvPr id="18" name="">
             <a:extLst xmlns:a="http://schemas.openxmlformats.org/drawingml/2006/main">
               <a:ext uri="{FF2B5EF4-FFF2-40B4-BE49-F238E27FC236}">
-                <a16:creationId xmlns:a16="http://schemas.microsoft.com/office/drawing/2014/main" id="{52A023B7-E1A1-4181-A7D8-1F29FD3CDAC1}"/>
+                <a16:creationId xmlns:a16="http://schemas.microsoft.com/office/drawing/2014/main" id="{C65912EF-CFF7-47BA-9BBB-3211A852D3B3}"/>
               </a:ext>
             </a:extLst>
           </p:cNvPr>
@@ -7880,7 +8039,7 @@
           <p:cNvPr id="19" name="">
             <a:extLst xmlns:a="http://schemas.openxmlformats.org/drawingml/2006/main">
               <a:ext uri="{FF2B5EF4-FFF2-40B4-BE49-F238E27FC236}">
-                <a16:creationId xmlns:a16="http://schemas.microsoft.com/office/drawing/2014/main" id="{2FC328A1-0695-4F8C-B87E-10FE3304A98F}"/>
+                <a16:creationId xmlns:a16="http://schemas.microsoft.com/office/drawing/2014/main" id="{20D07586-5E6F-44B6-8C8F-A1C85AD83207}"/>
               </a:ext>
             </a:extLst>
           </p:cNvPr>
@@ -7912,7 +8071,7 @@
           <p:cNvPr id="20" name="">
             <a:extLst xmlns:a="http://schemas.openxmlformats.org/drawingml/2006/main">
               <a:ext uri="{FF2B5EF4-FFF2-40B4-BE49-F238E27FC236}">
-                <a16:creationId xmlns:a16="http://schemas.microsoft.com/office/drawing/2014/main" id="{C18024DC-158F-46EE-B3C0-B78FE066456A}"/>
+                <a16:creationId xmlns:a16="http://schemas.microsoft.com/office/drawing/2014/main" id="{C4260116-476B-43F3-A72D-C775383D1170}"/>
               </a:ext>
             </a:extLst>
           </p:cNvPr>
@@ -7969,7 +8128,7 @@
           <p:cNvPr id="21" name="">
             <a:extLst xmlns:a="http://schemas.openxmlformats.org/drawingml/2006/main">
               <a:ext uri="{FF2B5EF4-FFF2-40B4-BE49-F238E27FC236}">
-                <a16:creationId xmlns:a16="http://schemas.microsoft.com/office/drawing/2014/main" id="{11F5541D-32D3-47CD-83B2-247F91210B25}"/>
+                <a16:creationId xmlns:a16="http://schemas.microsoft.com/office/drawing/2014/main" id="{FD822BC9-86B0-40C8-9CE8-3F70A74A1412}"/>
               </a:ext>
             </a:extLst>
           </p:cNvPr>
@@ -8026,7 +8185,7 @@
           <p:cNvPr id="22" name="">
             <a:extLst xmlns:a="http://schemas.openxmlformats.org/drawingml/2006/main">
               <a:ext uri="{FF2B5EF4-FFF2-40B4-BE49-F238E27FC236}">
-                <a16:creationId xmlns:a16="http://schemas.microsoft.com/office/drawing/2014/main" id="{6B404302-E623-4D59-B408-384EB4DD5122}"/>
+                <a16:creationId xmlns:a16="http://schemas.microsoft.com/office/drawing/2014/main" id="{7079F811-7058-41CD-A7E5-1A639D857A6F}"/>
               </a:ext>
             </a:extLst>
           </p:cNvPr>
@@ -8083,7 +8242,7 @@
           <p:cNvPr id="23" name="">
             <a:extLst xmlns:a="http://schemas.openxmlformats.org/drawingml/2006/main">
               <a:ext uri="{FF2B5EF4-FFF2-40B4-BE49-F238E27FC236}">
-                <a16:creationId xmlns:a16="http://schemas.microsoft.com/office/drawing/2014/main" id="{C6B13F5E-6A70-40DD-8B76-C644917C2996}"/>
+                <a16:creationId xmlns:a16="http://schemas.microsoft.com/office/drawing/2014/main" id="{34C5641A-9DB1-409C-AEEE-8EA69D6A8704}"/>
               </a:ext>
             </a:extLst>
           </p:cNvPr>
@@ -8115,7 +8274,7 @@
           <p:cNvPr id="24" name="">
             <a:extLst xmlns:a="http://schemas.openxmlformats.org/drawingml/2006/main">
               <a:ext uri="{FF2B5EF4-FFF2-40B4-BE49-F238E27FC236}">
-                <a16:creationId xmlns:a16="http://schemas.microsoft.com/office/drawing/2014/main" id="{7878D297-AAE6-45E1-B57E-E5666F0103B0}"/>
+                <a16:creationId xmlns:a16="http://schemas.microsoft.com/office/drawing/2014/main" id="{D32ED7F0-7DB0-4CB5-9361-AD53DB2D0D82}"/>
               </a:ext>
             </a:extLst>
           </p:cNvPr>
@@ -8172,7 +8331,7 @@
           <p:cNvPr id="25" name="">
             <a:extLst xmlns:a="http://schemas.openxmlformats.org/drawingml/2006/main">
               <a:ext uri="{FF2B5EF4-FFF2-40B4-BE49-F238E27FC236}">
-                <a16:creationId xmlns:a16="http://schemas.microsoft.com/office/drawing/2014/main" id="{A22CAF27-7B06-4654-81CA-A9E357FF9BAF}"/>
+                <a16:creationId xmlns:a16="http://schemas.microsoft.com/office/drawing/2014/main" id="{5F09F65F-A7AC-4988-9D59-F76C194E25E4}"/>
               </a:ext>
             </a:extLst>
           </p:cNvPr>
@@ -8229,7 +8388,7 @@
           <p:cNvPr id="26" name="">
             <a:extLst xmlns:a="http://schemas.openxmlformats.org/drawingml/2006/main">
               <a:ext uri="{FF2B5EF4-FFF2-40B4-BE49-F238E27FC236}">
-                <a16:creationId xmlns:a16="http://schemas.microsoft.com/office/drawing/2014/main" id="{26A8002F-E131-4D00-8D13-05452E6801CA}"/>
+                <a16:creationId xmlns:a16="http://schemas.microsoft.com/office/drawing/2014/main" id="{80EBDF7D-EBA4-434C-84B7-58D5FBE22157}"/>
               </a:ext>
             </a:extLst>
           </p:cNvPr>
@@ -8286,7 +8445,7 @@
           <p:cNvPr id="27" name="">
             <a:extLst xmlns:a="http://schemas.openxmlformats.org/drawingml/2006/main">
               <a:ext uri="{FF2B5EF4-FFF2-40B4-BE49-F238E27FC236}">
-                <a16:creationId xmlns:a16="http://schemas.microsoft.com/office/drawing/2014/main" id="{57B10865-03BE-4644-8AA0-E81139C0850A}"/>
+                <a16:creationId xmlns:a16="http://schemas.microsoft.com/office/drawing/2014/main" id="{A03607ED-D291-4202-8267-5A9CC541366A}"/>
               </a:ext>
             </a:extLst>
           </p:cNvPr>
@@ -8318,7 +8477,7 @@
           <p:cNvPr id="28" name="">
             <a:extLst xmlns:a="http://schemas.openxmlformats.org/drawingml/2006/main">
               <a:ext uri="{FF2B5EF4-FFF2-40B4-BE49-F238E27FC236}">
-                <a16:creationId xmlns:a16="http://schemas.microsoft.com/office/drawing/2014/main" id="{BA433EC9-20EA-4BC3-BDC4-FD148E35BC28}"/>
+                <a16:creationId xmlns:a16="http://schemas.microsoft.com/office/drawing/2014/main" id="{6E2A889B-3B4A-4CDC-8F6F-EA38097841B3}"/>
               </a:ext>
             </a:extLst>
           </p:cNvPr>
@@ -8375,7 +8534,7 @@
           <p:cNvPr id="29" name="">
             <a:extLst xmlns:a="http://schemas.openxmlformats.org/drawingml/2006/main">
               <a:ext uri="{FF2B5EF4-FFF2-40B4-BE49-F238E27FC236}">
-                <a16:creationId xmlns:a16="http://schemas.microsoft.com/office/drawing/2014/main" id="{6CD9CC25-92FA-40B7-A005-2456FC872FEA}"/>
+                <a16:creationId xmlns:a16="http://schemas.microsoft.com/office/drawing/2014/main" id="{E3BC036C-5E2E-4D79-9726-76551D290248}"/>
               </a:ext>
             </a:extLst>
           </p:cNvPr>
@@ -8432,7 +8591,7 @@
           <p:cNvPr id="30" name="">
             <a:extLst xmlns:a="http://schemas.openxmlformats.org/drawingml/2006/main">
               <a:ext uri="{FF2B5EF4-FFF2-40B4-BE49-F238E27FC236}">
-                <a16:creationId xmlns:a16="http://schemas.microsoft.com/office/drawing/2014/main" id="{48FD3243-B80A-4C27-8293-24CE7E823F6C}"/>
+                <a16:creationId xmlns:a16="http://schemas.microsoft.com/office/drawing/2014/main" id="{B04573B2-7980-4783-ACCE-B2236FBBBC39}"/>
               </a:ext>
             </a:extLst>
           </p:cNvPr>
@@ -8489,7 +8648,7 @@
           <p:cNvPr id="31" name="">
             <a:extLst xmlns:a="http://schemas.openxmlformats.org/drawingml/2006/main">
               <a:ext uri="{FF2B5EF4-FFF2-40B4-BE49-F238E27FC236}">
-                <a16:creationId xmlns:a16="http://schemas.microsoft.com/office/drawing/2014/main" id="{8D00C8E6-8E26-4AE7-871B-09E96461C55F}"/>
+                <a16:creationId xmlns:a16="http://schemas.microsoft.com/office/drawing/2014/main" id="{374DDE8F-6AC5-4A71-ABD4-2168FEBF3CD7}"/>
               </a:ext>
             </a:extLst>
           </p:cNvPr>
@@ -8546,7 +8705,7 @@
           <p:cNvPr id="32" name="">
             <a:extLst xmlns:a="http://schemas.openxmlformats.org/drawingml/2006/main">
               <a:ext uri="{FF2B5EF4-FFF2-40B4-BE49-F238E27FC236}">
-                <a16:creationId xmlns:a16="http://schemas.microsoft.com/office/drawing/2014/main" id="{2D02D7AA-39D9-4072-B762-21C8EB75B4DF}"/>
+                <a16:creationId xmlns:a16="http://schemas.microsoft.com/office/drawing/2014/main" id="{7C04E634-C9DD-4FAB-835D-12B0427B14BF}"/>
               </a:ext>
             </a:extLst>
           </p:cNvPr>
@@ -8603,7 +8762,7 @@
           <p:cNvPr id="33" name="">
             <a:extLst xmlns:a="http://schemas.openxmlformats.org/drawingml/2006/main">
               <a:ext uri="{FF2B5EF4-FFF2-40B4-BE49-F238E27FC236}">
-                <a16:creationId xmlns:a16="http://schemas.microsoft.com/office/drawing/2014/main" id="{489DBB6A-A9FB-4C7E-8F38-6C13F474FAC2}"/>
+                <a16:creationId xmlns:a16="http://schemas.microsoft.com/office/drawing/2014/main" id="{83B4FC4E-DE4D-49A2-BE16-3FC642E409B7}"/>
               </a:ext>
             </a:extLst>
           </p:cNvPr>
@@ -8660,7 +8819,7 @@
           <p:cNvPr id="34" name="">
             <a:extLst xmlns:a="http://schemas.openxmlformats.org/drawingml/2006/main">
               <a:ext uri="{FF2B5EF4-FFF2-40B4-BE49-F238E27FC236}">
-                <a16:creationId xmlns:a16="http://schemas.microsoft.com/office/drawing/2014/main" id="{83769B00-86F1-4E60-9D67-7DC6BD10C06E}"/>
+                <a16:creationId xmlns:a16="http://schemas.microsoft.com/office/drawing/2014/main" id="{D38ABFFD-4C10-46D9-A26E-010249E77A1C}"/>
               </a:ext>
             </a:extLst>
           </p:cNvPr>
@@ -8717,7 +8876,7 @@
           <p:cNvPr id="35" name="">
             <a:extLst xmlns:a="http://schemas.openxmlformats.org/drawingml/2006/main">
               <a:ext uri="{FF2B5EF4-FFF2-40B4-BE49-F238E27FC236}">
-                <a16:creationId xmlns:a16="http://schemas.microsoft.com/office/drawing/2014/main" id="{626AA2AC-3AA6-459E-9D2E-AF502C18C349}"/>
+                <a16:creationId xmlns:a16="http://schemas.microsoft.com/office/drawing/2014/main" id="{E55F0718-E672-4C9F-B704-74B018378049}"/>
               </a:ext>
             </a:extLst>
           </p:cNvPr>
@@ -8774,7 +8933,7 @@
           <p:cNvPr id="36" name="">
             <a:extLst xmlns:a="http://schemas.openxmlformats.org/drawingml/2006/main">
               <a:ext uri="{FF2B5EF4-FFF2-40B4-BE49-F238E27FC236}">
-                <a16:creationId xmlns:a16="http://schemas.microsoft.com/office/drawing/2014/main" id="{CAD3DE1D-920A-44AC-B01A-5093E4398E9C}"/>
+                <a16:creationId xmlns:a16="http://schemas.microsoft.com/office/drawing/2014/main" id="{EB9C349E-57C4-40B0-91B4-37787ED34A07}"/>
               </a:ext>
             </a:extLst>
           </p:cNvPr>
@@ -8831,7 +8990,7 @@
           <p:cNvPr id="37" name="">
             <a:extLst xmlns:a="http://schemas.openxmlformats.org/drawingml/2006/main">
               <a:ext uri="{FF2B5EF4-FFF2-40B4-BE49-F238E27FC236}">
-                <a16:creationId xmlns:a16="http://schemas.microsoft.com/office/drawing/2014/main" id="{5F58B33E-2EAC-4682-9266-DDCD8A249B89}"/>
+                <a16:creationId xmlns:a16="http://schemas.microsoft.com/office/drawing/2014/main" id="{6A2BFBE5-1141-4C75-9A8B-B2A845836BDA}"/>
               </a:ext>
             </a:extLst>
           </p:cNvPr>
@@ -8888,7 +9047,7 @@
           <p:cNvPr id="38" name="">
             <a:extLst xmlns:a="http://schemas.openxmlformats.org/drawingml/2006/main">
               <a:ext uri="{FF2B5EF4-FFF2-40B4-BE49-F238E27FC236}">
-                <a16:creationId xmlns:a16="http://schemas.microsoft.com/office/drawing/2014/main" id="{D0ABD081-9378-49D8-B5F5-244B83C2BEC6}"/>
+                <a16:creationId xmlns:a16="http://schemas.microsoft.com/office/drawing/2014/main" id="{5F23BB67-174B-49BB-A04C-41C8180FE842}"/>
               </a:ext>
             </a:extLst>
           </p:cNvPr>
@@ -8945,7 +9104,7 @@
           <p:cNvPr id="39" name="">
             <a:extLst xmlns:a="http://schemas.openxmlformats.org/drawingml/2006/main">
               <a:ext uri="{FF2B5EF4-FFF2-40B4-BE49-F238E27FC236}">
-                <a16:creationId xmlns:a16="http://schemas.microsoft.com/office/drawing/2014/main" id="{40BF25EB-67E7-4629-8F6C-AA0D91F856DE}"/>
+                <a16:creationId xmlns:a16="http://schemas.microsoft.com/office/drawing/2014/main" id="{4C0245C5-E680-48F0-ACE2-664F528B1B38}"/>
               </a:ext>
             </a:extLst>
           </p:cNvPr>
@@ -9002,7 +9161,7 @@
           <p:cNvPr id="40" name="">
             <a:extLst xmlns:a="http://schemas.openxmlformats.org/drawingml/2006/main">
               <a:ext uri="{FF2B5EF4-FFF2-40B4-BE49-F238E27FC236}">
-                <a16:creationId xmlns:a16="http://schemas.microsoft.com/office/drawing/2014/main" id="{AB4B4A68-1F3D-488B-9E24-57A2A0548C47}"/>
+                <a16:creationId xmlns:a16="http://schemas.microsoft.com/office/drawing/2014/main" id="{56870775-A514-4115-A89B-F01E8D7F47D8}"/>
               </a:ext>
             </a:extLst>
           </p:cNvPr>
@@ -9059,7 +9218,7 @@
           <p:cNvPr id="41" name="">
             <a:extLst xmlns:a="http://schemas.openxmlformats.org/drawingml/2006/main">
               <a:ext uri="{FF2B5EF4-FFF2-40B4-BE49-F238E27FC236}">
-                <a16:creationId xmlns:a16="http://schemas.microsoft.com/office/drawing/2014/main" id="{8DE5B363-A1EF-47F9-A506-95DD69B76D41}"/>
+                <a16:creationId xmlns:a16="http://schemas.microsoft.com/office/drawing/2014/main" id="{43EDDF1E-DF12-4BCD-B715-A2CF93974EEF}"/>
               </a:ext>
             </a:extLst>
           </p:cNvPr>
@@ -9116,7 +9275,7 @@
           <p:cNvPr id="42" name="">
             <a:extLst xmlns:a="http://schemas.openxmlformats.org/drawingml/2006/main">
               <a:ext uri="{FF2B5EF4-FFF2-40B4-BE49-F238E27FC236}">
-                <a16:creationId xmlns:a16="http://schemas.microsoft.com/office/drawing/2014/main" id="{B955F98A-00D9-4218-A984-156F36A10911}"/>
+                <a16:creationId xmlns:a16="http://schemas.microsoft.com/office/drawing/2014/main" id="{E6D22D49-E425-4F16-BA25-CC03563ED944}"/>
               </a:ext>
             </a:extLst>
           </p:cNvPr>
@@ -9173,7 +9332,7 @@
           <p:cNvPr id="43" name="">
             <a:extLst xmlns:a="http://schemas.openxmlformats.org/drawingml/2006/main">
               <a:ext uri="{FF2B5EF4-FFF2-40B4-BE49-F238E27FC236}">
-                <a16:creationId xmlns:a16="http://schemas.microsoft.com/office/drawing/2014/main" id="{176CA9D8-471D-4D1B-8F67-C8916A5C600F}"/>
+                <a16:creationId xmlns:a16="http://schemas.microsoft.com/office/drawing/2014/main" id="{0F234668-A784-4A45-BBD9-5A2EC9D9F42A}"/>
               </a:ext>
             </a:extLst>
           </p:cNvPr>
@@ -9228,7 +9387,7 @@
     </p:spTree>
     <p:extLst>
       <p:ext uri="{BB962C8B-B14F-4D97-AF65-F5344CB8AC3E}">
-        <p14:creationId xmlns:p14="http://schemas.microsoft.com/office/powerpoint/2010/main" val="1125401533"/>
+        <p14:creationId xmlns:p14="http://schemas.microsoft.com/office/powerpoint/2010/main" val="885722203"/>
       </p:ext>
     </p:extLst>
   </p:cSld>

--- a/Docs/PRESENTATION/2. 최종/09285_백준현_AI_Master_최종발표자료_v12.pptx
+++ b/Docs/PRESENTATION/2. 최종/09285_백준현_AI_Master_최종발표자료_v12.pptx
@@ -2,16 +2,16 @@
 <file path=ppt/presentation.xml><?xml version="1.0" encoding="utf-8"?>
 <p:presentation xmlns:p="http://schemas.openxmlformats.org/presentationml/2006/main">
   <p:sldMasterIdLst>
-    <p:sldMasterId xmlns:r="http://schemas.openxmlformats.org/officeDocument/2006/relationships" id="2147483648" r:id="Rcd1754c3c12a434a"/>
+    <p:sldMasterId xmlns:r="http://schemas.openxmlformats.org/officeDocument/2006/relationships" id="2147483648" r:id="Re8a61bb2df5a4c68"/>
   </p:sldMasterIdLst>
   <p:notesMasterIdLst>
-    <p:notesMasterId xmlns:r="http://schemas.openxmlformats.org/officeDocument/2006/relationships" r:id="R287c579f3b644bad"/>
+    <p:notesMasterId xmlns:r="http://schemas.openxmlformats.org/officeDocument/2006/relationships" r:id="Ra63ab19727a8477f"/>
   </p:notesMasterIdLst>
   <p:sldIdLst>
-    <p:sldId xmlns:r="http://schemas.openxmlformats.org/officeDocument/2006/relationships" id="256" r:id="R60020e4769d543d0"/>
-    <p:sldId xmlns:r="http://schemas.openxmlformats.org/officeDocument/2006/relationships" id="257" r:id="Ra79bb92d6adc4ce6"/>
-    <p:sldId xmlns:r="http://schemas.openxmlformats.org/officeDocument/2006/relationships" id="258" r:id="R67cc131e61e84f19"/>
-    <p:sldId xmlns:r="http://schemas.openxmlformats.org/officeDocument/2006/relationships" id="259" r:id="R7f7cee2c0ade4502"/>
+    <p:sldId xmlns:r="http://schemas.openxmlformats.org/officeDocument/2006/relationships" id="256" r:id="Rf57bdcf478a94bb5"/>
+    <p:sldId xmlns:r="http://schemas.openxmlformats.org/officeDocument/2006/relationships" id="257" r:id="Rd58b9110529547de"/>
+    <p:sldId xmlns:r="http://schemas.openxmlformats.org/officeDocument/2006/relationships" id="258" r:id="R7e05621a50574628"/>
+    <p:sldId xmlns:r="http://schemas.openxmlformats.org/officeDocument/2006/relationships" id="259" r:id="Rd3822b1f51fe4ddb"/>
   </p:sldIdLst>
   <p:sldSz cx="12192000" cy="6858000"/>
   <p:notesSz cx="6858000" cy="9144000"/>
@@ -958,7 +958,7 @@
   </p:cSld>
   <p:clrMap bg1="lt1" tx1="dk1" bg2="lt2" tx2="dk2" accent1="accent1" accent2="accent2" accent3="accent3" accent4="accent4" accent5="accent5" accent6="accent6" hlink="hlink" folHlink="folHlink"/>
   <p:sldLayoutIdLst>
-    <p:sldLayoutId xmlns:r="http://schemas.openxmlformats.org/officeDocument/2006/relationships" id="2147483649" r:id="R62346af0844241e6"/>
+    <p:sldLayoutId xmlns:r="http://schemas.openxmlformats.org/officeDocument/2006/relationships" id="2147483649" r:id="Rebdb766ec8bd4a91"/>
   </p:sldLayoutIdLst>
   <p:txStyles>
     <p:titleStyle>
@@ -1509,7 +1509,7 @@
           <p:cNvPr id="10" name="">
             <a:extLst xmlns:a="http://schemas.openxmlformats.org/drawingml/2006/main">
               <a:ext uri="{FF2B5EF4-FFF2-40B4-BE49-F238E27FC236}">
-                <a16:creationId xmlns:a16="http://schemas.microsoft.com/office/drawing/2014/main" id="{F053FC08-2DF2-44FC-8FA7-66DDC46AD5E0}"/>
+                <a16:creationId xmlns:a16="http://schemas.microsoft.com/office/drawing/2014/main" id="{6F2EA1D0-443F-4422-B094-115104BE6361}"/>
               </a:ext>
             </a:extLst>
           </p:cNvPr>
@@ -1539,7 +1539,7 @@
           <p:cNvPr id="2" name="">
             <a:extLst xmlns:a="http://schemas.openxmlformats.org/drawingml/2006/main">
               <a:ext uri="{FF2B5EF4-FFF2-40B4-BE49-F238E27FC236}">
-                <a16:creationId xmlns:a16="http://schemas.microsoft.com/office/drawing/2014/main" id="{48499040-E3F0-47E1-8B5C-4F0D9A764491}"/>
+                <a16:creationId xmlns:a16="http://schemas.microsoft.com/office/drawing/2014/main" id="{14C020FE-D984-49D9-BF9A-98EFFA0F9315}"/>
               </a:ext>
             </a:extLst>
           </p:cNvPr>
@@ -1596,7 +1596,7 @@
           <p:cNvPr id="3" name="">
             <a:extLst xmlns:a="http://schemas.openxmlformats.org/drawingml/2006/main">
               <a:ext uri="{FF2B5EF4-FFF2-40B4-BE49-F238E27FC236}">
-                <a16:creationId xmlns:a16="http://schemas.microsoft.com/office/drawing/2014/main" id="{6A511555-E696-4BA9-A3D7-FB125B9B3E76}"/>
+                <a16:creationId xmlns:a16="http://schemas.microsoft.com/office/drawing/2014/main" id="{E1F2948A-7737-4087-BF92-5C29CA275276}"/>
               </a:ext>
             </a:extLst>
           </p:cNvPr>
@@ -1653,7 +1653,7 @@
           <p:cNvPr id="4" name="">
             <a:extLst xmlns:a="http://schemas.openxmlformats.org/drawingml/2006/main">
               <a:ext uri="{FF2B5EF4-FFF2-40B4-BE49-F238E27FC236}">
-                <a16:creationId xmlns:a16="http://schemas.microsoft.com/office/drawing/2014/main" id="{1D894824-4894-4360-B0AA-DE233CC4F4E3}"/>
+                <a16:creationId xmlns:a16="http://schemas.microsoft.com/office/drawing/2014/main" id="{497E2131-EEB2-434C-8F91-6D3E1C0FA4EC}"/>
               </a:ext>
             </a:extLst>
           </p:cNvPr>
@@ -1710,7 +1710,7 @@
           <p:cNvPr id="5" name="">
             <a:extLst xmlns:a="http://schemas.openxmlformats.org/drawingml/2006/main">
               <a:ext uri="{FF2B5EF4-FFF2-40B4-BE49-F238E27FC236}">
-                <a16:creationId xmlns:a16="http://schemas.microsoft.com/office/drawing/2014/main" id="{471CCBAC-1224-443B-A6BC-1373B88319F5}"/>
+                <a16:creationId xmlns:a16="http://schemas.microsoft.com/office/drawing/2014/main" id="{80396238-805C-405A-A829-186A87C77764}"/>
               </a:ext>
             </a:extLst>
           </p:cNvPr>
@@ -1740,7 +1740,7 @@
           <p:cNvPr id="6" name="">
             <a:extLst xmlns:a="http://schemas.openxmlformats.org/drawingml/2006/main">
               <a:ext uri="{FF2B5EF4-FFF2-40B4-BE49-F238E27FC236}">
-                <a16:creationId xmlns:a16="http://schemas.microsoft.com/office/drawing/2014/main" id="{46367213-4049-45B0-ADD2-A1F9E801142E}"/>
+                <a16:creationId xmlns:a16="http://schemas.microsoft.com/office/drawing/2014/main" id="{CACD7293-F414-4874-9BB9-00E52F4D6340}"/>
               </a:ext>
             </a:extLst>
           </p:cNvPr>
@@ -1797,7 +1797,7 @@
           <p:cNvPr id="7" name="">
             <a:extLst xmlns:a="http://schemas.openxmlformats.org/drawingml/2006/main">
               <a:ext uri="{FF2B5EF4-FFF2-40B4-BE49-F238E27FC236}">
-                <a16:creationId xmlns:a16="http://schemas.microsoft.com/office/drawing/2014/main" id="{F02C081C-077D-4E3C-BF5C-72C759A3BCCC}"/>
+                <a16:creationId xmlns:a16="http://schemas.microsoft.com/office/drawing/2014/main" id="{D1BF7E1B-ED0B-4C66-8BA9-BA90494E602C}"/>
               </a:ext>
             </a:extLst>
           </p:cNvPr>
@@ -1854,7 +1854,7 @@
           <p:cNvPr id="8" name="">
             <a:extLst xmlns:a="http://schemas.openxmlformats.org/drawingml/2006/main">
               <a:ext uri="{FF2B5EF4-FFF2-40B4-BE49-F238E27FC236}">
-                <a16:creationId xmlns:a16="http://schemas.microsoft.com/office/drawing/2014/main" id="{C920F767-3B17-4154-88E1-1429AFD1CC7C}"/>
+                <a16:creationId xmlns:a16="http://schemas.microsoft.com/office/drawing/2014/main" id="{7167D13C-3FCC-4F88-9A58-BF52C2A18044}"/>
               </a:ext>
             </a:extLst>
           </p:cNvPr>
@@ -1911,7 +1911,7 @@
           <p:cNvPr id="9" name="">
             <a:extLst xmlns:a="http://schemas.openxmlformats.org/drawingml/2006/main">
               <a:ext uri="{FF2B5EF4-FFF2-40B4-BE49-F238E27FC236}">
-                <a16:creationId xmlns:a16="http://schemas.microsoft.com/office/drawing/2014/main" id="{4EF5B3FB-7E4E-403F-A8D4-003EF2D30E33}"/>
+                <a16:creationId xmlns:a16="http://schemas.microsoft.com/office/drawing/2014/main" id="{2FE339DB-EE13-479C-9977-3BF1F22584F7}"/>
               </a:ext>
             </a:extLst>
           </p:cNvPr>
@@ -1966,7 +1966,7 @@
     </p:spTree>
     <p:extLst>
       <p:ext uri="{BB962C8B-B14F-4D97-AF65-F5344CB8AC3E}">
-        <p14:creationId xmlns:p14="http://schemas.microsoft.com/office/powerpoint/2010/main" val="380924366"/>
+        <p14:creationId xmlns:p14="http://schemas.microsoft.com/office/powerpoint/2010/main" val="1040960521"/>
       </p:ext>
     </p:extLst>
   </p:cSld>
@@ -1997,7 +1997,7 @@
           <p:cNvPr id="46" name="">
             <a:extLst xmlns:a="http://schemas.openxmlformats.org/drawingml/2006/main">
               <a:ext uri="{FF2B5EF4-FFF2-40B4-BE49-F238E27FC236}">
-                <a16:creationId xmlns:a16="http://schemas.microsoft.com/office/drawing/2014/main" id="{DAEB7639-6C78-46F9-AB64-C8C57119BE45}"/>
+                <a16:creationId xmlns:a16="http://schemas.microsoft.com/office/drawing/2014/main" id="{C2369876-0DE2-4EA7-987F-CDAA7E524EAD}"/>
               </a:ext>
             </a:extLst>
           </p:cNvPr>
@@ -2027,7 +2027,7 @@
           <p:cNvPr id="2" name="">
             <a:extLst xmlns:a="http://schemas.openxmlformats.org/drawingml/2006/main">
               <a:ext uri="{FF2B5EF4-FFF2-40B4-BE49-F238E27FC236}">
-                <a16:creationId xmlns:a16="http://schemas.microsoft.com/office/drawing/2014/main" id="{67D757DE-B558-4A2D-B7D9-6ABBA401E1C3}"/>
+                <a16:creationId xmlns:a16="http://schemas.microsoft.com/office/drawing/2014/main" id="{92DF4CB9-675C-4E94-ABEE-A32CF961A893}"/>
               </a:ext>
             </a:extLst>
           </p:cNvPr>
@@ -2084,7 +2084,7 @@
           <p:cNvPr id="3" name="">
             <a:extLst xmlns:a="http://schemas.openxmlformats.org/drawingml/2006/main">
               <a:ext uri="{FF2B5EF4-FFF2-40B4-BE49-F238E27FC236}">
-                <a16:creationId xmlns:a16="http://schemas.microsoft.com/office/drawing/2014/main" id="{D7F81F98-1339-4AA8-93EF-275E28E649C7}"/>
+                <a16:creationId xmlns:a16="http://schemas.microsoft.com/office/drawing/2014/main" id="{8CF3603F-1C04-46AE-BE08-5582E909FEF1}"/>
               </a:ext>
             </a:extLst>
           </p:cNvPr>
@@ -2114,7 +2114,7 @@
           <p:cNvPr id="4" name="">
             <a:extLst xmlns:a="http://schemas.openxmlformats.org/drawingml/2006/main">
               <a:ext uri="{FF2B5EF4-FFF2-40B4-BE49-F238E27FC236}">
-                <a16:creationId xmlns:a16="http://schemas.microsoft.com/office/drawing/2014/main" id="{77AFE142-551E-497C-8A31-D0D016225EEF}"/>
+                <a16:creationId xmlns:a16="http://schemas.microsoft.com/office/drawing/2014/main" id="{64646371-6837-47E8-8A2B-90D2214872AF}"/>
               </a:ext>
             </a:extLst>
           </p:cNvPr>
@@ -2171,7 +2171,7 @@
           <p:cNvPr id="5" name="">
             <a:extLst xmlns:a="http://schemas.openxmlformats.org/drawingml/2006/main">
               <a:ext uri="{FF2B5EF4-FFF2-40B4-BE49-F238E27FC236}">
-                <a16:creationId xmlns:a16="http://schemas.microsoft.com/office/drawing/2014/main" id="{5A98DC29-F106-476D-BAE8-4B4DD6FCD237}"/>
+                <a16:creationId xmlns:a16="http://schemas.microsoft.com/office/drawing/2014/main" id="{B9EC04C6-F251-4D4E-AD99-64115BC6D0EB}"/>
               </a:ext>
             </a:extLst>
           </p:cNvPr>
@@ -2228,7 +2228,7 @@
           <p:cNvPr id="6" name="">
             <a:extLst xmlns:a="http://schemas.openxmlformats.org/drawingml/2006/main">
               <a:ext uri="{FF2B5EF4-FFF2-40B4-BE49-F238E27FC236}">
-                <a16:creationId xmlns:a16="http://schemas.microsoft.com/office/drawing/2014/main" id="{F5127486-EB01-4F90-8B20-CD3D7B1AF1E6}"/>
+                <a16:creationId xmlns:a16="http://schemas.microsoft.com/office/drawing/2014/main" id="{DB606FDC-BB75-40D2-9B0E-4AED8BFA5E84}"/>
               </a:ext>
             </a:extLst>
           </p:cNvPr>
@@ -2285,7 +2285,7 @@
           <p:cNvPr id="7" name="">
             <a:extLst xmlns:a="http://schemas.openxmlformats.org/drawingml/2006/main">
               <a:ext uri="{FF2B5EF4-FFF2-40B4-BE49-F238E27FC236}">
-                <a16:creationId xmlns:a16="http://schemas.microsoft.com/office/drawing/2014/main" id="{8AD21712-3D00-4CCD-82ED-2CF7668AEFD1}"/>
+                <a16:creationId xmlns:a16="http://schemas.microsoft.com/office/drawing/2014/main" id="{9B8F57E3-2A26-4CFC-9FB9-153A68312685}"/>
               </a:ext>
             </a:extLst>
           </p:cNvPr>
@@ -2319,7 +2319,7 @@
           <p:cNvPr id="8" name="">
             <a:extLst xmlns:a="http://schemas.openxmlformats.org/drawingml/2006/main">
               <a:ext uri="{FF2B5EF4-FFF2-40B4-BE49-F238E27FC236}">
-                <a16:creationId xmlns:a16="http://schemas.microsoft.com/office/drawing/2014/main" id="{17AD07F5-9CFC-4E7B-B52B-7666E3360560}"/>
+                <a16:creationId xmlns:a16="http://schemas.microsoft.com/office/drawing/2014/main" id="{5553A1E0-76CA-4384-8D1F-54974577AA30}"/>
               </a:ext>
             </a:extLst>
           </p:cNvPr>
@@ -2351,7 +2351,7 @@
           <p:cNvPr id="9" name="">
             <a:extLst xmlns:a="http://schemas.openxmlformats.org/drawingml/2006/main">
               <a:ext uri="{FF2B5EF4-FFF2-40B4-BE49-F238E27FC236}">
-                <a16:creationId xmlns:a16="http://schemas.microsoft.com/office/drawing/2014/main" id="{46F4DE53-83FF-4B42-83CD-F86348687AD1}"/>
+                <a16:creationId xmlns:a16="http://schemas.microsoft.com/office/drawing/2014/main" id="{7DA0DC31-88EA-4E86-9C36-1D88D872D595}"/>
               </a:ext>
             </a:extLst>
           </p:cNvPr>
@@ -2408,7 +2408,7 @@
           <p:cNvPr id="10" name="">
             <a:extLst xmlns:a="http://schemas.openxmlformats.org/drawingml/2006/main">
               <a:ext uri="{FF2B5EF4-FFF2-40B4-BE49-F238E27FC236}">
-                <a16:creationId xmlns:a16="http://schemas.microsoft.com/office/drawing/2014/main" id="{31F6AE3D-6DE0-4F0D-991D-7A2C20A64311}"/>
+                <a16:creationId xmlns:a16="http://schemas.microsoft.com/office/drawing/2014/main" id="{C73AB01E-EFC7-4930-90CD-869744DC9C7C}"/>
               </a:ext>
             </a:extLst>
           </p:cNvPr>
@@ -2488,7 +2488,7 @@
           <p:cNvPr id="11" name="">
             <a:extLst xmlns:a="http://schemas.openxmlformats.org/drawingml/2006/main">
               <a:ext uri="{FF2B5EF4-FFF2-40B4-BE49-F238E27FC236}">
-                <a16:creationId xmlns:a16="http://schemas.microsoft.com/office/drawing/2014/main" id="{F941602A-3B67-4431-B055-C678D260DC09}"/>
+                <a16:creationId xmlns:a16="http://schemas.microsoft.com/office/drawing/2014/main" id="{24146371-81CF-4C68-890C-6EA289B4EB8B}"/>
               </a:ext>
             </a:extLst>
           </p:cNvPr>
@@ -2518,7 +2518,7 @@
           <p:cNvPr id="12" name="">
             <a:extLst xmlns:a="http://schemas.openxmlformats.org/drawingml/2006/main">
               <a:ext uri="{FF2B5EF4-FFF2-40B4-BE49-F238E27FC236}">
-                <a16:creationId xmlns:a16="http://schemas.microsoft.com/office/drawing/2014/main" id="{54830D6A-867A-49CA-8B45-E47F1ED4A090}"/>
+                <a16:creationId xmlns:a16="http://schemas.microsoft.com/office/drawing/2014/main" id="{029BF41B-80C9-492B-B66B-594F4967189A}"/>
               </a:ext>
             </a:extLst>
           </p:cNvPr>
@@ -2552,7 +2552,7 @@
           <p:cNvPr id="13" name="">
             <a:extLst xmlns:a="http://schemas.openxmlformats.org/drawingml/2006/main">
               <a:ext uri="{FF2B5EF4-FFF2-40B4-BE49-F238E27FC236}">
-                <a16:creationId xmlns:a16="http://schemas.microsoft.com/office/drawing/2014/main" id="{D11F5099-AEDB-4E7E-A479-09E2D7627563}"/>
+                <a16:creationId xmlns:a16="http://schemas.microsoft.com/office/drawing/2014/main" id="{6992A099-DC02-4446-B81A-D21FE28CCE9F}"/>
               </a:ext>
             </a:extLst>
           </p:cNvPr>
@@ -2584,7 +2584,7 @@
           <p:cNvPr id="14" name="">
             <a:extLst xmlns:a="http://schemas.openxmlformats.org/drawingml/2006/main">
               <a:ext uri="{FF2B5EF4-FFF2-40B4-BE49-F238E27FC236}">
-                <a16:creationId xmlns:a16="http://schemas.microsoft.com/office/drawing/2014/main" id="{07EA1319-A132-45C3-839D-29FC714A1ADD}"/>
+                <a16:creationId xmlns:a16="http://schemas.microsoft.com/office/drawing/2014/main" id="{1ABEE977-2E7E-4AB5-986C-BE4C42DED647}"/>
               </a:ext>
             </a:extLst>
           </p:cNvPr>
@@ -2641,7 +2641,7 @@
           <p:cNvPr id="15" name="">
             <a:extLst xmlns:a="http://schemas.openxmlformats.org/drawingml/2006/main">
               <a:ext uri="{FF2B5EF4-FFF2-40B4-BE49-F238E27FC236}">
-                <a16:creationId xmlns:a16="http://schemas.microsoft.com/office/drawing/2014/main" id="{A41710D7-0DCD-4266-BFA0-1944ABF4028E}"/>
+                <a16:creationId xmlns:a16="http://schemas.microsoft.com/office/drawing/2014/main" id="{5D9CBA13-FFFB-4BEC-88D6-E8492F704865}"/>
               </a:ext>
             </a:extLst>
           </p:cNvPr>
@@ -2721,7 +2721,7 @@
           <p:cNvPr id="16" name="">
             <a:extLst xmlns:a="http://schemas.openxmlformats.org/drawingml/2006/main">
               <a:ext uri="{FF2B5EF4-FFF2-40B4-BE49-F238E27FC236}">
-                <a16:creationId xmlns:a16="http://schemas.microsoft.com/office/drawing/2014/main" id="{EA9A8FF5-A08E-404A-A969-FE81BA37B555}"/>
+                <a16:creationId xmlns:a16="http://schemas.microsoft.com/office/drawing/2014/main" id="{1571CB7C-F59A-40E2-8047-E639D24DF633}"/>
               </a:ext>
             </a:extLst>
           </p:cNvPr>
@@ -2751,7 +2751,7 @@
           <p:cNvPr id="17" name="">
             <a:extLst xmlns:a="http://schemas.openxmlformats.org/drawingml/2006/main">
               <a:ext uri="{FF2B5EF4-FFF2-40B4-BE49-F238E27FC236}">
-                <a16:creationId xmlns:a16="http://schemas.microsoft.com/office/drawing/2014/main" id="{ED1B186D-EB56-4D3A-B5B8-A21E2C30EE64}"/>
+                <a16:creationId xmlns:a16="http://schemas.microsoft.com/office/drawing/2014/main" id="{372D01F9-DB32-4477-9C16-5D3D86E78DC3}"/>
               </a:ext>
             </a:extLst>
           </p:cNvPr>
@@ -2785,7 +2785,7 @@
           <p:cNvPr id="18" name="">
             <a:extLst xmlns:a="http://schemas.openxmlformats.org/drawingml/2006/main">
               <a:ext uri="{FF2B5EF4-FFF2-40B4-BE49-F238E27FC236}">
-                <a16:creationId xmlns:a16="http://schemas.microsoft.com/office/drawing/2014/main" id="{3BCEEF1A-E210-4F68-B50B-B93C82F67D4B}"/>
+                <a16:creationId xmlns:a16="http://schemas.microsoft.com/office/drawing/2014/main" id="{BF69A26A-D084-403A-B38E-B86986588818}"/>
               </a:ext>
             </a:extLst>
           </p:cNvPr>
@@ -2817,7 +2817,7 @@
           <p:cNvPr id="19" name="">
             <a:extLst xmlns:a="http://schemas.openxmlformats.org/drawingml/2006/main">
               <a:ext uri="{FF2B5EF4-FFF2-40B4-BE49-F238E27FC236}">
-                <a16:creationId xmlns:a16="http://schemas.microsoft.com/office/drawing/2014/main" id="{D6B1F6DF-4FAD-438D-A907-7439B00C51E7}"/>
+                <a16:creationId xmlns:a16="http://schemas.microsoft.com/office/drawing/2014/main" id="{52158617-52C7-4F38-90E6-6339B3630F04}"/>
               </a:ext>
             </a:extLst>
           </p:cNvPr>
@@ -2874,7 +2874,7 @@
           <p:cNvPr id="20" name="">
             <a:extLst xmlns:a="http://schemas.openxmlformats.org/drawingml/2006/main">
               <a:ext uri="{FF2B5EF4-FFF2-40B4-BE49-F238E27FC236}">
-                <a16:creationId xmlns:a16="http://schemas.microsoft.com/office/drawing/2014/main" id="{DC5E87A5-1C3D-42A4-9C71-3EF9A3842D56}"/>
+                <a16:creationId xmlns:a16="http://schemas.microsoft.com/office/drawing/2014/main" id="{B04B589C-3E83-413F-8668-73A274372E35}"/>
               </a:ext>
             </a:extLst>
           </p:cNvPr>
@@ -2954,7 +2954,7 @@
           <p:cNvPr id="21" name="">
             <a:extLst xmlns:a="http://schemas.openxmlformats.org/drawingml/2006/main">
               <a:ext uri="{FF2B5EF4-FFF2-40B4-BE49-F238E27FC236}">
-                <a16:creationId xmlns:a16="http://schemas.microsoft.com/office/drawing/2014/main" id="{FC8B4A20-3BC6-493F-8363-63BB55D4C1EB}"/>
+                <a16:creationId xmlns:a16="http://schemas.microsoft.com/office/drawing/2014/main" id="{97F4C3E5-BB39-4DDB-8841-1EEF399D191A}"/>
               </a:ext>
             </a:extLst>
           </p:cNvPr>
@@ -2984,7 +2984,7 @@
           <p:cNvPr id="22" name="">
             <a:extLst xmlns:a="http://schemas.openxmlformats.org/drawingml/2006/main">
               <a:ext uri="{FF2B5EF4-FFF2-40B4-BE49-F238E27FC236}">
-                <a16:creationId xmlns:a16="http://schemas.microsoft.com/office/drawing/2014/main" id="{68F05A7B-22E0-4E5A-820A-012B7BC65305}"/>
+                <a16:creationId xmlns:a16="http://schemas.microsoft.com/office/drawing/2014/main" id="{F6358CD4-91ED-4119-8F1B-90FF6E251D3B}"/>
               </a:ext>
             </a:extLst>
           </p:cNvPr>
@@ -3018,7 +3018,7 @@
           <p:cNvPr id="23" name="">
             <a:extLst xmlns:a="http://schemas.openxmlformats.org/drawingml/2006/main">
               <a:ext uri="{FF2B5EF4-FFF2-40B4-BE49-F238E27FC236}">
-                <a16:creationId xmlns:a16="http://schemas.microsoft.com/office/drawing/2014/main" id="{C9AB9642-A5B0-4C4F-A887-2D4AF19A5275}"/>
+                <a16:creationId xmlns:a16="http://schemas.microsoft.com/office/drawing/2014/main" id="{3EE36B4D-B524-43FB-987C-6D6944F76A55}"/>
               </a:ext>
             </a:extLst>
           </p:cNvPr>
@@ -3050,7 +3050,7 @@
           <p:cNvPr id="24" name="">
             <a:extLst xmlns:a="http://schemas.openxmlformats.org/drawingml/2006/main">
               <a:ext uri="{FF2B5EF4-FFF2-40B4-BE49-F238E27FC236}">
-                <a16:creationId xmlns:a16="http://schemas.microsoft.com/office/drawing/2014/main" id="{631A0F4C-D3B3-4044-845B-0110B0357AE5}"/>
+                <a16:creationId xmlns:a16="http://schemas.microsoft.com/office/drawing/2014/main" id="{0F2BFDF7-E2AE-4A77-BB4C-8D904004A699}"/>
               </a:ext>
             </a:extLst>
           </p:cNvPr>
@@ -3107,7 +3107,7 @@
           <p:cNvPr id="25" name="">
             <a:extLst xmlns:a="http://schemas.openxmlformats.org/drawingml/2006/main">
               <a:ext uri="{FF2B5EF4-FFF2-40B4-BE49-F238E27FC236}">
-                <a16:creationId xmlns:a16="http://schemas.microsoft.com/office/drawing/2014/main" id="{C28FA831-F844-4E9A-8DF4-2986F78305E1}"/>
+                <a16:creationId xmlns:a16="http://schemas.microsoft.com/office/drawing/2014/main" id="{9E8FB08C-509F-4CE6-A999-B1DBCF69DC1E}"/>
               </a:ext>
             </a:extLst>
           </p:cNvPr>
@@ -3187,7 +3187,7 @@
           <p:cNvPr id="26" name="">
             <a:extLst xmlns:a="http://schemas.openxmlformats.org/drawingml/2006/main">
               <a:ext uri="{FF2B5EF4-FFF2-40B4-BE49-F238E27FC236}">
-                <a16:creationId xmlns:a16="http://schemas.microsoft.com/office/drawing/2014/main" id="{6C70D3A2-B49A-4E64-84A4-6C8805A4F00D}"/>
+                <a16:creationId xmlns:a16="http://schemas.microsoft.com/office/drawing/2014/main" id="{674F3D7C-3775-4812-BE9F-9B4B041ACFAB}"/>
               </a:ext>
             </a:extLst>
           </p:cNvPr>
@@ -3217,7 +3217,7 @@
           <p:cNvPr id="27" name="">
             <a:extLst xmlns:a="http://schemas.openxmlformats.org/drawingml/2006/main">
               <a:ext uri="{FF2B5EF4-FFF2-40B4-BE49-F238E27FC236}">
-                <a16:creationId xmlns:a16="http://schemas.microsoft.com/office/drawing/2014/main" id="{4BCA47C8-67AB-4547-ACB7-880CF70388CD}"/>
+                <a16:creationId xmlns:a16="http://schemas.microsoft.com/office/drawing/2014/main" id="{B55E27BF-D445-4E24-B353-38C182A122CD}"/>
               </a:ext>
             </a:extLst>
           </p:cNvPr>
@@ -3251,7 +3251,7 @@
           <p:cNvPr id="28" name="">
             <a:extLst xmlns:a="http://schemas.openxmlformats.org/drawingml/2006/main">
               <a:ext uri="{FF2B5EF4-FFF2-40B4-BE49-F238E27FC236}">
-                <a16:creationId xmlns:a16="http://schemas.microsoft.com/office/drawing/2014/main" id="{81D2521B-2361-4C77-9F87-525714570CA5}"/>
+                <a16:creationId xmlns:a16="http://schemas.microsoft.com/office/drawing/2014/main" id="{ADC74C92-ACFB-4E58-8D62-06880FCE2019}"/>
               </a:ext>
             </a:extLst>
           </p:cNvPr>
@@ -3283,7 +3283,7 @@
           <p:cNvPr id="29" name="">
             <a:extLst xmlns:a="http://schemas.openxmlformats.org/drawingml/2006/main">
               <a:ext uri="{FF2B5EF4-FFF2-40B4-BE49-F238E27FC236}">
-                <a16:creationId xmlns:a16="http://schemas.microsoft.com/office/drawing/2014/main" id="{AB9E074E-AC43-44A5-9130-EED966FA2A89}"/>
+                <a16:creationId xmlns:a16="http://schemas.microsoft.com/office/drawing/2014/main" id="{7E7F256F-3DF4-426F-A7AC-8FEB2EA64BF7}"/>
               </a:ext>
             </a:extLst>
           </p:cNvPr>
@@ -3340,7 +3340,7 @@
           <p:cNvPr id="30" name="">
             <a:extLst xmlns:a="http://schemas.openxmlformats.org/drawingml/2006/main">
               <a:ext uri="{FF2B5EF4-FFF2-40B4-BE49-F238E27FC236}">
-                <a16:creationId xmlns:a16="http://schemas.microsoft.com/office/drawing/2014/main" id="{2D262F68-0FD6-4A4F-A79D-FD221AE9C74D}"/>
+                <a16:creationId xmlns:a16="http://schemas.microsoft.com/office/drawing/2014/main" id="{2C48F397-2E49-42C2-BD77-28CDE3059C3F}"/>
               </a:ext>
             </a:extLst>
           </p:cNvPr>
@@ -3420,7 +3420,7 @@
           <p:cNvPr id="31" name="">
             <a:extLst xmlns:a="http://schemas.openxmlformats.org/drawingml/2006/main">
               <a:ext uri="{FF2B5EF4-FFF2-40B4-BE49-F238E27FC236}">
-                <a16:creationId xmlns:a16="http://schemas.microsoft.com/office/drawing/2014/main" id="{93C17D65-1542-4429-9B68-BA0E452AD9B6}"/>
+                <a16:creationId xmlns:a16="http://schemas.microsoft.com/office/drawing/2014/main" id="{F06EFF18-B978-4A4A-B5D0-8112D441FF6B}"/>
               </a:ext>
             </a:extLst>
           </p:cNvPr>
@@ -3477,7 +3477,7 @@
           <p:cNvPr id="32" name="">
             <a:extLst xmlns:a="http://schemas.openxmlformats.org/drawingml/2006/main">
               <a:ext uri="{FF2B5EF4-FFF2-40B4-BE49-F238E27FC236}">
-                <a16:creationId xmlns:a16="http://schemas.microsoft.com/office/drawing/2014/main" id="{DE48F164-53D8-4751-968D-800AAEB288EC}"/>
+                <a16:creationId xmlns:a16="http://schemas.microsoft.com/office/drawing/2014/main" id="{E45B1A5E-A830-44E9-8362-DFCB82046F0D}"/>
               </a:ext>
             </a:extLst>
           </p:cNvPr>
@@ -3534,7 +3534,7 @@
           <p:cNvPr id="33" name="">
             <a:extLst xmlns:a="http://schemas.openxmlformats.org/drawingml/2006/main">
               <a:ext uri="{FF2B5EF4-FFF2-40B4-BE49-F238E27FC236}">
-                <a16:creationId xmlns:a16="http://schemas.microsoft.com/office/drawing/2014/main" id="{0E7460FF-55B9-40AF-9EDA-6ABC18EB6131}"/>
+                <a16:creationId xmlns:a16="http://schemas.microsoft.com/office/drawing/2014/main" id="{5867838A-20E8-4A0F-A39B-221E5BEA6D0D}"/>
               </a:ext>
             </a:extLst>
           </p:cNvPr>
@@ -3591,7 +3591,7 @@
           <p:cNvPr id="34" name="">
             <a:extLst xmlns:a="http://schemas.openxmlformats.org/drawingml/2006/main">
               <a:ext uri="{FF2B5EF4-FFF2-40B4-BE49-F238E27FC236}">
-                <a16:creationId xmlns:a16="http://schemas.microsoft.com/office/drawing/2014/main" id="{2449621F-4A58-47E2-BD6B-FEE8B47FE6C8}"/>
+                <a16:creationId xmlns:a16="http://schemas.microsoft.com/office/drawing/2014/main" id="{D94A0607-23D1-49F6-96F4-4013B20FC724}"/>
               </a:ext>
             </a:extLst>
           </p:cNvPr>
@@ -3648,7 +3648,7 @@
           <p:cNvPr id="35" name="">
             <a:extLst xmlns:a="http://schemas.openxmlformats.org/drawingml/2006/main">
               <a:ext uri="{FF2B5EF4-FFF2-40B4-BE49-F238E27FC236}">
-                <a16:creationId xmlns:a16="http://schemas.microsoft.com/office/drawing/2014/main" id="{8E648D2A-430E-47A5-8155-77A530400D4B}"/>
+                <a16:creationId xmlns:a16="http://schemas.microsoft.com/office/drawing/2014/main" id="{A0AE3536-6103-48D9-B17F-43C3D01B1324}"/>
               </a:ext>
             </a:extLst>
           </p:cNvPr>
@@ -3705,7 +3705,7 @@
           <p:cNvPr id="36" name="">
             <a:extLst xmlns:a="http://schemas.openxmlformats.org/drawingml/2006/main">
               <a:ext uri="{FF2B5EF4-FFF2-40B4-BE49-F238E27FC236}">
-                <a16:creationId xmlns:a16="http://schemas.microsoft.com/office/drawing/2014/main" id="{6F815282-EAC4-44B5-BC75-5947F4B3F880}"/>
+                <a16:creationId xmlns:a16="http://schemas.microsoft.com/office/drawing/2014/main" id="{517A70AE-67E3-43A2-BF21-788810D684DF}"/>
               </a:ext>
             </a:extLst>
           </p:cNvPr>
@@ -3762,7 +3762,7 @@
           <p:cNvPr id="37" name="">
             <a:extLst xmlns:a="http://schemas.openxmlformats.org/drawingml/2006/main">
               <a:ext uri="{FF2B5EF4-FFF2-40B4-BE49-F238E27FC236}">
-                <a16:creationId xmlns:a16="http://schemas.microsoft.com/office/drawing/2014/main" id="{3C5339E0-4922-485A-8097-04E70A8A3A8E}"/>
+                <a16:creationId xmlns:a16="http://schemas.microsoft.com/office/drawing/2014/main" id="{97F7033D-4119-47BF-82BD-B472ABD7A965}"/>
               </a:ext>
             </a:extLst>
           </p:cNvPr>
@@ -3819,7 +3819,7 @@
           <p:cNvPr id="38" name="">
             <a:extLst xmlns:a="http://schemas.openxmlformats.org/drawingml/2006/main">
               <a:ext uri="{FF2B5EF4-FFF2-40B4-BE49-F238E27FC236}">
-                <a16:creationId xmlns:a16="http://schemas.microsoft.com/office/drawing/2014/main" id="{F43FDD74-FFCA-4D01-8289-CE4DE7CCC897}"/>
+                <a16:creationId xmlns:a16="http://schemas.microsoft.com/office/drawing/2014/main" id="{8FB8FFDD-F39E-4456-BAF2-97C46A1724B0}"/>
               </a:ext>
             </a:extLst>
           </p:cNvPr>
@@ -3876,7 +3876,7 @@
           <p:cNvPr id="39" name="">
             <a:extLst xmlns:a="http://schemas.openxmlformats.org/drawingml/2006/main">
               <a:ext uri="{FF2B5EF4-FFF2-40B4-BE49-F238E27FC236}">
-                <a16:creationId xmlns:a16="http://schemas.microsoft.com/office/drawing/2014/main" id="{1A48615F-98F4-4402-8C62-9E0DDBE1D68E}"/>
+                <a16:creationId xmlns:a16="http://schemas.microsoft.com/office/drawing/2014/main" id="{DFAF6FA9-A1B9-4DFA-A015-23F70B097D56}"/>
               </a:ext>
             </a:extLst>
           </p:cNvPr>
@@ -3933,7 +3933,7 @@
           <p:cNvPr id="40" name="">
             <a:extLst xmlns:a="http://schemas.openxmlformats.org/drawingml/2006/main">
               <a:ext uri="{FF2B5EF4-FFF2-40B4-BE49-F238E27FC236}">
-                <a16:creationId xmlns:a16="http://schemas.microsoft.com/office/drawing/2014/main" id="{58ADFE38-ED9B-4008-96A1-A7BC9F4E1D9F}"/>
+                <a16:creationId xmlns:a16="http://schemas.microsoft.com/office/drawing/2014/main" id="{E5891A5B-5CB1-424A-BB23-7F8BCFCF5CB2}"/>
               </a:ext>
             </a:extLst>
           </p:cNvPr>
@@ -3990,7 +3990,7 @@
           <p:cNvPr id="41" name="">
             <a:extLst xmlns:a="http://schemas.openxmlformats.org/drawingml/2006/main">
               <a:ext uri="{FF2B5EF4-FFF2-40B4-BE49-F238E27FC236}">
-                <a16:creationId xmlns:a16="http://schemas.microsoft.com/office/drawing/2014/main" id="{C68E7284-3E15-47F0-9461-83C02AF9E5AB}"/>
+                <a16:creationId xmlns:a16="http://schemas.microsoft.com/office/drawing/2014/main" id="{192965F0-2362-47A0-B770-82BD09D44A95}"/>
               </a:ext>
             </a:extLst>
           </p:cNvPr>
@@ -4047,7 +4047,7 @@
           <p:cNvPr id="42" name="">
             <a:extLst xmlns:a="http://schemas.openxmlformats.org/drawingml/2006/main">
               <a:ext uri="{FF2B5EF4-FFF2-40B4-BE49-F238E27FC236}">
-                <a16:creationId xmlns:a16="http://schemas.microsoft.com/office/drawing/2014/main" id="{C7894AF2-3A14-4A17-93C7-981CC6715F65}"/>
+                <a16:creationId xmlns:a16="http://schemas.microsoft.com/office/drawing/2014/main" id="{53CAA4BB-B547-433D-AEA6-85801E5D9973}"/>
               </a:ext>
             </a:extLst>
           </p:cNvPr>
@@ -4104,7 +4104,7 @@
           <p:cNvPr id="43" name="">
             <a:extLst xmlns:a="http://schemas.openxmlformats.org/drawingml/2006/main">
               <a:ext uri="{FF2B5EF4-FFF2-40B4-BE49-F238E27FC236}">
-                <a16:creationId xmlns:a16="http://schemas.microsoft.com/office/drawing/2014/main" id="{EED9CE8F-D3DE-4B58-96C1-58B950D35AA3}"/>
+                <a16:creationId xmlns:a16="http://schemas.microsoft.com/office/drawing/2014/main" id="{17463977-FBC3-480A-938A-B60CD85E2B0D}"/>
               </a:ext>
             </a:extLst>
           </p:cNvPr>
@@ -4161,7 +4161,7 @@
           <p:cNvPr id="44" name="">
             <a:extLst xmlns:a="http://schemas.openxmlformats.org/drawingml/2006/main">
               <a:ext uri="{FF2B5EF4-FFF2-40B4-BE49-F238E27FC236}">
-                <a16:creationId xmlns:a16="http://schemas.microsoft.com/office/drawing/2014/main" id="{B2E9E3BD-2CFB-4835-9054-350C17E1E656}"/>
+                <a16:creationId xmlns:a16="http://schemas.microsoft.com/office/drawing/2014/main" id="{E1B5649B-F569-4E24-A7CB-5E8196B2C8B5}"/>
               </a:ext>
             </a:extLst>
           </p:cNvPr>
@@ -4193,7 +4193,7 @@
           <p:cNvPr id="45" name="">
             <a:extLst xmlns:a="http://schemas.openxmlformats.org/drawingml/2006/main">
               <a:ext uri="{FF2B5EF4-FFF2-40B4-BE49-F238E27FC236}">
-                <a16:creationId xmlns:a16="http://schemas.microsoft.com/office/drawing/2014/main" id="{AE06A2A7-690C-401D-916C-55DCB35A2693}"/>
+                <a16:creationId xmlns:a16="http://schemas.microsoft.com/office/drawing/2014/main" id="{C61B7D3A-49D5-4703-B26F-35E3C8046931}"/>
               </a:ext>
             </a:extLst>
           </p:cNvPr>
@@ -4248,7 +4248,7 @@
     </p:spTree>
     <p:extLst>
       <p:ext uri="{BB962C8B-B14F-4D97-AF65-F5344CB8AC3E}">
-        <p14:creationId xmlns:p14="http://schemas.microsoft.com/office/powerpoint/2010/main" val="1391267623"/>
+        <p14:creationId xmlns:p14="http://schemas.microsoft.com/office/powerpoint/2010/main" val="1735654231"/>
       </p:ext>
     </p:extLst>
   </p:cSld>
@@ -4276,10 +4276,10 @@
       </p:grpSpPr>
       <p:sp>
         <p:nvSpPr>
-          <p:cNvPr id="60" name="">
-            <a:extLst xmlns:a="http://schemas.openxmlformats.org/drawingml/2006/main">
-              <a:ext uri="{FF2B5EF4-FFF2-40B4-BE49-F238E27FC236}">
-                <a16:creationId xmlns:a16="http://schemas.microsoft.com/office/drawing/2014/main" id="{09C2349F-33E0-4886-82AA-19059B78000E}"/>
+          <p:cNvPr id="70" name="">
+            <a:extLst xmlns:a="http://schemas.openxmlformats.org/drawingml/2006/main">
+              <a:ext uri="{FF2B5EF4-FFF2-40B4-BE49-F238E27FC236}">
+                <a16:creationId xmlns:a16="http://schemas.microsoft.com/office/drawing/2014/main" id="{12D26B0F-88C0-46EC-8A12-985F70C1A388}"/>
               </a:ext>
             </a:extLst>
           </p:cNvPr>
@@ -4309,7 +4309,7 @@
           <p:cNvPr id="2" name="">
             <a:extLst xmlns:a="http://schemas.openxmlformats.org/drawingml/2006/main">
               <a:ext uri="{FF2B5EF4-FFF2-40B4-BE49-F238E27FC236}">
-                <a16:creationId xmlns:a16="http://schemas.microsoft.com/office/drawing/2014/main" id="{EBE5AA3D-4C1E-4AAE-8A58-0952E217425A}"/>
+                <a16:creationId xmlns:a16="http://schemas.microsoft.com/office/drawing/2014/main" id="{8653106F-4A8F-44EA-9605-206773F79F37}"/>
               </a:ext>
             </a:extLst>
           </p:cNvPr>
@@ -4366,7 +4366,7 @@
           <p:cNvPr id="3" name="">
             <a:extLst xmlns:a="http://schemas.openxmlformats.org/drawingml/2006/main">
               <a:ext uri="{FF2B5EF4-FFF2-40B4-BE49-F238E27FC236}">
-                <a16:creationId xmlns:a16="http://schemas.microsoft.com/office/drawing/2014/main" id="{7269C19B-99CE-4F3A-AE95-75E3CDF1AD08}"/>
+                <a16:creationId xmlns:a16="http://schemas.microsoft.com/office/drawing/2014/main" id="{6C1C88C5-9F91-4269-A8AB-B253C74080BC}"/>
               </a:ext>
             </a:extLst>
           </p:cNvPr>
@@ -4396,7 +4396,7 @@
           <p:cNvPr id="4" name="">
             <a:extLst xmlns:a="http://schemas.openxmlformats.org/drawingml/2006/main">
               <a:ext uri="{FF2B5EF4-FFF2-40B4-BE49-F238E27FC236}">
-                <a16:creationId xmlns:a16="http://schemas.microsoft.com/office/drawing/2014/main" id="{C229DD4C-9454-4416-9CE8-45BF015541F7}"/>
+                <a16:creationId xmlns:a16="http://schemas.microsoft.com/office/drawing/2014/main" id="{3894A5FC-3DB1-42DE-A13F-2E0A6F2F81F0}"/>
               </a:ext>
             </a:extLst>
           </p:cNvPr>
@@ -4453,18 +4453,18 @@
           <p:cNvPr id="5" name="">
             <a:extLst xmlns:a="http://schemas.openxmlformats.org/drawingml/2006/main">
               <a:ext uri="{FF2B5EF4-FFF2-40B4-BE49-F238E27FC236}">
-                <a16:creationId xmlns:a16="http://schemas.microsoft.com/office/drawing/2014/main" id="{0B35B348-A86B-45F2-8F59-4C903BBB9BF2}"/>
-              </a:ext>
-            </a:extLst>
-          </p:cNvPr>
-          <p:cNvSpPr>
-            <a:spLocks xmlns:a="http://schemas.openxmlformats.org/drawingml/2006/main" noGrp="1"/>
-          </p:cNvSpPr>
-          <p:nvPr/>
-        </p:nvSpPr>
-        <p:spPr>
-          <a:xfrm xmlns:a="http://schemas.openxmlformats.org/drawingml/2006/main">
-            <a:off x="571500" y="1200150"/>
+                <a16:creationId xmlns:a16="http://schemas.microsoft.com/office/drawing/2014/main" id="{0733929B-9164-420D-9352-44AA0AC04AA6}"/>
+              </a:ext>
+            </a:extLst>
+          </p:cNvPr>
+          <p:cNvSpPr>
+            <a:spLocks xmlns:a="http://schemas.openxmlformats.org/drawingml/2006/main" noGrp="1"/>
+          </p:cNvSpPr>
+          <p:nvPr/>
+        </p:nvSpPr>
+        <p:spPr>
+          <a:xfrm xmlns:a="http://schemas.openxmlformats.org/drawingml/2006/main">
+            <a:off x="571500" y="1181100"/>
             <a:ext cx="10953750" cy="285750"/>
           </a:xfrm>
           <a:prstGeom xmlns:a="http://schemas.openxmlformats.org/drawingml/2006/main" prst="rect">
@@ -4510,7 +4510,64 @@
           <p:cNvPr id="6" name="">
             <a:extLst xmlns:a="http://schemas.openxmlformats.org/drawingml/2006/main">
               <a:ext uri="{FF2B5EF4-FFF2-40B4-BE49-F238E27FC236}">
-                <a16:creationId xmlns:a16="http://schemas.microsoft.com/office/drawing/2014/main" id="{014C47C7-781B-4B1A-BAAD-502257B2F24F}"/>
+                <a16:creationId xmlns:a16="http://schemas.microsoft.com/office/drawing/2014/main" id="{1B76979D-4FFE-4218-8862-2BD92EC7429F}"/>
+              </a:ext>
+            </a:extLst>
+          </p:cNvPr>
+          <p:cNvSpPr>
+            <a:spLocks xmlns:a="http://schemas.openxmlformats.org/drawingml/2006/main" noGrp="1"/>
+          </p:cNvSpPr>
+          <p:nvPr/>
+        </p:nvSpPr>
+        <p:spPr>
+          <a:xfrm xmlns:a="http://schemas.openxmlformats.org/drawingml/2006/main">
+            <a:off x="571500" y="1504950"/>
+            <a:ext cx="11049000" cy="209550"/>
+          </a:xfrm>
+          <a:prstGeom xmlns:a="http://schemas.openxmlformats.org/drawingml/2006/main" prst="rect">
+            <a:avLst/>
+          </a:prstGeom>
+          <a:noFill xmlns:a="http://schemas.openxmlformats.org/drawingml/2006/main"/>
+          <a:ln xmlns:a="http://schemas.openxmlformats.org/drawingml/2006/main" w="0">
+            <a:noFill/>
+          </a:ln>
+        </p:spPr>
+        <p:txBody>
+          <a:bodyPr xmlns:a="http://schemas.openxmlformats.org/drawingml/2006/main" anchor="ctr">
+            <a:normAutofit fontScale="73809"/>
+          </a:bodyPr>
+          <a:lstStyle xmlns:a="http://schemas.openxmlformats.org/drawingml/2006/main"/>
+          <a:p xmlns:a="http://schemas.openxmlformats.org/drawingml/2006/main">
+            <a:pPr algn="l">
+              <a:defRPr sz="1050" b="1">
+                <a:solidFill>
+                  <a:srgbClr val="7657D6"/>
+                </a:solidFill>
+                <a:latin typeface="Malgun Gothic"/>
+                <a:ea typeface="Malgun Gothic"/>
+                <a:cs typeface="Malgun Gothic"/>
+              </a:defRPr>
+            </a:pPr>
+            <a:r>
+              <a:rPr sz="1050" b="1">
+                <a:solidFill>
+                  <a:srgbClr val="7657D6"/>
+                </a:solidFill>
+                <a:latin typeface="Malgun Gothic"/>
+                <a:ea typeface="Malgun Gothic"/>
+                <a:cs typeface="Malgun Gothic"/>
+              </a:rPr>
+              <a:t>제한적 ReAct  |  Observe → Retrieve → Reason → Act → Observe</a:t>
+            </a:r>
+          </a:p>
+        </p:txBody>
+      </p:sp>
+      <p:sp>
+        <p:nvSpPr>
+          <p:cNvPr id="7" name="">
+            <a:extLst xmlns:a="http://schemas.openxmlformats.org/drawingml/2006/main">
+              <a:ext uri="{FF2B5EF4-FFF2-40B4-BE49-F238E27FC236}">
+                <a16:creationId xmlns:a16="http://schemas.microsoft.com/office/drawing/2014/main" id="{2B926F75-E132-48EC-AD4C-652E91E0A844}"/>
               </a:ext>
             </a:extLst>
           </p:cNvPr>
@@ -4541,10 +4598,10 @@
       </p:sp>
       <p:sp>
         <p:nvSpPr>
-          <p:cNvPr id="7" name="">
-            <a:extLst xmlns:a="http://schemas.openxmlformats.org/drawingml/2006/main">
-              <a:ext uri="{FF2B5EF4-FFF2-40B4-BE49-F238E27FC236}">
-                <a16:creationId xmlns:a16="http://schemas.microsoft.com/office/drawing/2014/main" id="{C09875B4-2CFA-4089-A085-C47CBFCA0CE1}"/>
+          <p:cNvPr id="8" name="">
+            <a:extLst xmlns:a="http://schemas.openxmlformats.org/drawingml/2006/main">
+              <a:ext uri="{FF2B5EF4-FFF2-40B4-BE49-F238E27FC236}">
+                <a16:creationId xmlns:a16="http://schemas.microsoft.com/office/drawing/2014/main" id="{C6208B3B-C85D-4A21-9594-B76DC9D81CC6}"/>
               </a:ext>
             </a:extLst>
           </p:cNvPr>
@@ -4573,10 +4630,10 @@
       </p:sp>
       <p:sp>
         <p:nvSpPr>
-          <p:cNvPr id="8" name="">
-            <a:extLst xmlns:a="http://schemas.openxmlformats.org/drawingml/2006/main">
-              <a:ext uri="{FF2B5EF4-FFF2-40B4-BE49-F238E27FC236}">
-                <a16:creationId xmlns:a16="http://schemas.microsoft.com/office/drawing/2014/main" id="{61DB83FE-FD47-430F-8C46-296C9C0832F4}"/>
+          <p:cNvPr id="9" name="">
+            <a:extLst xmlns:a="http://schemas.openxmlformats.org/drawingml/2006/main">
+              <a:ext uri="{FF2B5EF4-FFF2-40B4-BE49-F238E27FC236}">
+                <a16:creationId xmlns:a16="http://schemas.microsoft.com/office/drawing/2014/main" id="{E0060723-7692-4238-BDF5-5F6D79112BBE}"/>
               </a:ext>
             </a:extLst>
           </p:cNvPr>
@@ -4630,10 +4687,10 @@
       </p:sp>
       <p:sp>
         <p:nvSpPr>
-          <p:cNvPr id="9" name="">
-            <a:extLst xmlns:a="http://schemas.openxmlformats.org/drawingml/2006/main">
-              <a:ext uri="{FF2B5EF4-FFF2-40B4-BE49-F238E27FC236}">
-                <a16:creationId xmlns:a16="http://schemas.microsoft.com/office/drawing/2014/main" id="{C05CE73B-1E4B-4B00-A09D-1AA9236219FB}"/>
+          <p:cNvPr id="10" name="">
+            <a:extLst xmlns:a="http://schemas.openxmlformats.org/drawingml/2006/main">
+              <a:ext uri="{FF2B5EF4-FFF2-40B4-BE49-F238E27FC236}">
+                <a16:creationId xmlns:a16="http://schemas.microsoft.com/office/drawing/2014/main" id="{33685F15-DE01-470D-AAE6-39E7FB27BCC9}"/>
               </a:ext>
             </a:extLst>
           </p:cNvPr>
@@ -4687,10 +4744,10 @@
       </p:sp>
       <p:sp>
         <p:nvSpPr>
-          <p:cNvPr id="10" name="">
-            <a:extLst xmlns:a="http://schemas.openxmlformats.org/drawingml/2006/main">
-              <a:ext uri="{FF2B5EF4-FFF2-40B4-BE49-F238E27FC236}">
-                <a16:creationId xmlns:a16="http://schemas.microsoft.com/office/drawing/2014/main" id="{48379D53-C48F-45E1-97FC-EF9B58D0AC21}"/>
+          <p:cNvPr id="11" name="">
+            <a:extLst xmlns:a="http://schemas.openxmlformats.org/drawingml/2006/main">
+              <a:ext uri="{FF2B5EF4-FFF2-40B4-BE49-F238E27FC236}">
+                <a16:creationId xmlns:a16="http://schemas.microsoft.com/office/drawing/2014/main" id="{5577FBD7-74D2-4E31-8F09-DFD62C53C9E0}"/>
               </a:ext>
             </a:extLst>
           </p:cNvPr>
@@ -4744,10 +4801,10 @@
       </p:sp>
       <p:sp>
         <p:nvSpPr>
-          <p:cNvPr id="11" name="">
-            <a:extLst xmlns:a="http://schemas.openxmlformats.org/drawingml/2006/main">
-              <a:ext uri="{FF2B5EF4-FFF2-40B4-BE49-F238E27FC236}">
-                <a16:creationId xmlns:a16="http://schemas.microsoft.com/office/drawing/2014/main" id="{121E24A7-354A-41E4-80F3-851D8743483B}"/>
+          <p:cNvPr id="12" name="">
+            <a:extLst xmlns:a="http://schemas.openxmlformats.org/drawingml/2006/main">
+              <a:ext uri="{FF2B5EF4-FFF2-40B4-BE49-F238E27FC236}">
+                <a16:creationId xmlns:a16="http://schemas.microsoft.com/office/drawing/2014/main" id="{1BE68F2F-6B7F-4610-BB7A-DB6AAEBC1393}"/>
               </a:ext>
             </a:extLst>
           </p:cNvPr>
@@ -4774,10 +4831,10 @@
       </p:sp>
       <p:sp>
         <p:nvSpPr>
-          <p:cNvPr id="12" name="">
-            <a:extLst xmlns:a="http://schemas.openxmlformats.org/drawingml/2006/main">
-              <a:ext uri="{FF2B5EF4-FFF2-40B4-BE49-F238E27FC236}">
-                <a16:creationId xmlns:a16="http://schemas.microsoft.com/office/drawing/2014/main" id="{7694409F-9F56-448C-9C1E-8042654C3E4E}"/>
+          <p:cNvPr id="13" name="">
+            <a:extLst xmlns:a="http://schemas.openxmlformats.org/drawingml/2006/main">
+              <a:ext uri="{FF2B5EF4-FFF2-40B4-BE49-F238E27FC236}">
+                <a16:creationId xmlns:a16="http://schemas.microsoft.com/office/drawing/2014/main" id="{A855E74A-909F-42AD-A36E-8D74C81B5B6D}"/>
               </a:ext>
             </a:extLst>
           </p:cNvPr>
@@ -4808,10 +4865,10 @@
       </p:sp>
       <p:sp>
         <p:nvSpPr>
-          <p:cNvPr id="13" name="">
-            <a:extLst xmlns:a="http://schemas.openxmlformats.org/drawingml/2006/main">
-              <a:ext uri="{FF2B5EF4-FFF2-40B4-BE49-F238E27FC236}">
-                <a16:creationId xmlns:a16="http://schemas.microsoft.com/office/drawing/2014/main" id="{6F0CC1A1-D332-4F0F-9A0B-28429C4CE1C4}"/>
+          <p:cNvPr id="14" name="">
+            <a:extLst xmlns:a="http://schemas.openxmlformats.org/drawingml/2006/main">
+              <a:ext uri="{FF2B5EF4-FFF2-40B4-BE49-F238E27FC236}">
+                <a16:creationId xmlns:a16="http://schemas.microsoft.com/office/drawing/2014/main" id="{F2658BDB-35F0-4DB2-B7CD-15FF3DF288B5}"/>
               </a:ext>
             </a:extLst>
           </p:cNvPr>
@@ -4840,10 +4897,10 @@
       </p:sp>
       <p:sp>
         <p:nvSpPr>
-          <p:cNvPr id="14" name="">
-            <a:extLst xmlns:a="http://schemas.openxmlformats.org/drawingml/2006/main">
-              <a:ext uri="{FF2B5EF4-FFF2-40B4-BE49-F238E27FC236}">
-                <a16:creationId xmlns:a16="http://schemas.microsoft.com/office/drawing/2014/main" id="{2A6372B1-DA18-4741-805C-22891DC57633}"/>
+          <p:cNvPr id="15" name="">
+            <a:extLst xmlns:a="http://schemas.openxmlformats.org/drawingml/2006/main">
+              <a:ext uri="{FF2B5EF4-FFF2-40B4-BE49-F238E27FC236}">
+                <a16:creationId xmlns:a16="http://schemas.microsoft.com/office/drawing/2014/main" id="{9FEFD270-B9B2-4990-B7F9-90C107105833}"/>
               </a:ext>
             </a:extLst>
           </p:cNvPr>
@@ -4897,10 +4954,10 @@
       </p:sp>
       <p:sp>
         <p:nvSpPr>
-          <p:cNvPr id="15" name="">
-            <a:extLst xmlns:a="http://schemas.openxmlformats.org/drawingml/2006/main">
-              <a:ext uri="{FF2B5EF4-FFF2-40B4-BE49-F238E27FC236}">
-                <a16:creationId xmlns:a16="http://schemas.microsoft.com/office/drawing/2014/main" id="{45101FA9-AE5D-4879-A492-0E9EFCEBD257}"/>
+          <p:cNvPr id="16" name="">
+            <a:extLst xmlns:a="http://schemas.openxmlformats.org/drawingml/2006/main">
+              <a:ext uri="{FF2B5EF4-FFF2-40B4-BE49-F238E27FC236}">
+                <a16:creationId xmlns:a16="http://schemas.microsoft.com/office/drawing/2014/main" id="{56CB37EF-247F-45FD-A231-379791425BE9}"/>
               </a:ext>
             </a:extLst>
           </p:cNvPr>
@@ -4954,10 +5011,10 @@
       </p:sp>
       <p:sp>
         <p:nvSpPr>
-          <p:cNvPr id="16" name="">
-            <a:extLst xmlns:a="http://schemas.openxmlformats.org/drawingml/2006/main">
-              <a:ext uri="{FF2B5EF4-FFF2-40B4-BE49-F238E27FC236}">
-                <a16:creationId xmlns:a16="http://schemas.microsoft.com/office/drawing/2014/main" id="{DC120C8C-65BB-4428-8563-64CA74D34442}"/>
+          <p:cNvPr id="17" name="">
+            <a:extLst xmlns:a="http://schemas.openxmlformats.org/drawingml/2006/main">
+              <a:ext uri="{FF2B5EF4-FFF2-40B4-BE49-F238E27FC236}">
+                <a16:creationId xmlns:a16="http://schemas.microsoft.com/office/drawing/2014/main" id="{096427D8-8146-4FE6-A8D9-F795F9969292}"/>
               </a:ext>
             </a:extLst>
           </p:cNvPr>
@@ -5011,10 +5068,10 @@
       </p:sp>
       <p:sp>
         <p:nvSpPr>
-          <p:cNvPr id="17" name="">
-            <a:extLst xmlns:a="http://schemas.openxmlformats.org/drawingml/2006/main">
-              <a:ext uri="{FF2B5EF4-FFF2-40B4-BE49-F238E27FC236}">
-                <a16:creationId xmlns:a16="http://schemas.microsoft.com/office/drawing/2014/main" id="{C86922AB-C7C3-4BA9-BB0A-71A71F608F5B}"/>
+          <p:cNvPr id="18" name="">
+            <a:extLst xmlns:a="http://schemas.openxmlformats.org/drawingml/2006/main">
+              <a:ext uri="{FF2B5EF4-FFF2-40B4-BE49-F238E27FC236}">
+                <a16:creationId xmlns:a16="http://schemas.microsoft.com/office/drawing/2014/main" id="{602F8AB7-8B09-49F2-84A5-9A53CBD60A97}"/>
               </a:ext>
             </a:extLst>
           </p:cNvPr>
@@ -5041,10 +5098,10 @@
       </p:sp>
       <p:sp>
         <p:nvSpPr>
-          <p:cNvPr id="18" name="">
-            <a:extLst xmlns:a="http://schemas.openxmlformats.org/drawingml/2006/main">
-              <a:ext uri="{FF2B5EF4-FFF2-40B4-BE49-F238E27FC236}">
-                <a16:creationId xmlns:a16="http://schemas.microsoft.com/office/drawing/2014/main" id="{AF9D12ED-BD11-4C9C-B75A-DD485FA2556B}"/>
+          <p:cNvPr id="19" name="">
+            <a:extLst xmlns:a="http://schemas.openxmlformats.org/drawingml/2006/main">
+              <a:ext uri="{FF2B5EF4-FFF2-40B4-BE49-F238E27FC236}">
+                <a16:creationId xmlns:a16="http://schemas.microsoft.com/office/drawing/2014/main" id="{06D4A616-F88C-4106-AB83-B11DCA6917A7}"/>
               </a:ext>
             </a:extLst>
           </p:cNvPr>
@@ -5075,10 +5132,10 @@
       </p:sp>
       <p:sp>
         <p:nvSpPr>
-          <p:cNvPr id="19" name="">
-            <a:extLst xmlns:a="http://schemas.openxmlformats.org/drawingml/2006/main">
-              <a:ext uri="{FF2B5EF4-FFF2-40B4-BE49-F238E27FC236}">
-                <a16:creationId xmlns:a16="http://schemas.microsoft.com/office/drawing/2014/main" id="{A594F333-A38E-47F0-94C1-8494103FAE09}"/>
+          <p:cNvPr id="20" name="">
+            <a:extLst xmlns:a="http://schemas.openxmlformats.org/drawingml/2006/main">
+              <a:ext uri="{FF2B5EF4-FFF2-40B4-BE49-F238E27FC236}">
+                <a16:creationId xmlns:a16="http://schemas.microsoft.com/office/drawing/2014/main" id="{7A88A53A-6258-4510-9276-D1E5F6C39AE0}"/>
               </a:ext>
             </a:extLst>
           </p:cNvPr>
@@ -5107,10 +5164,10 @@
       </p:sp>
       <p:sp>
         <p:nvSpPr>
-          <p:cNvPr id="20" name="">
-            <a:extLst xmlns:a="http://schemas.openxmlformats.org/drawingml/2006/main">
-              <a:ext uri="{FF2B5EF4-FFF2-40B4-BE49-F238E27FC236}">
-                <a16:creationId xmlns:a16="http://schemas.microsoft.com/office/drawing/2014/main" id="{B95C2EEB-241C-4BBC-B73D-976C0BFC9BC3}"/>
+          <p:cNvPr id="21" name="">
+            <a:extLst xmlns:a="http://schemas.openxmlformats.org/drawingml/2006/main">
+              <a:ext uri="{FF2B5EF4-FFF2-40B4-BE49-F238E27FC236}">
+                <a16:creationId xmlns:a16="http://schemas.microsoft.com/office/drawing/2014/main" id="{FD5514E3-51A8-4ECF-897D-3FD7E3894450}"/>
               </a:ext>
             </a:extLst>
           </p:cNvPr>
@@ -5164,10 +5221,10 @@
       </p:sp>
       <p:sp>
         <p:nvSpPr>
-          <p:cNvPr id="21" name="">
-            <a:extLst xmlns:a="http://schemas.openxmlformats.org/drawingml/2006/main">
-              <a:ext uri="{FF2B5EF4-FFF2-40B4-BE49-F238E27FC236}">
-                <a16:creationId xmlns:a16="http://schemas.microsoft.com/office/drawing/2014/main" id="{F9BC6141-0C3A-4B83-B803-07B8FB7D007A}"/>
+          <p:cNvPr id="22" name="">
+            <a:extLst xmlns:a="http://schemas.openxmlformats.org/drawingml/2006/main">
+              <a:ext uri="{FF2B5EF4-FFF2-40B4-BE49-F238E27FC236}">
+                <a16:creationId xmlns:a16="http://schemas.microsoft.com/office/drawing/2014/main" id="{D45F3E1A-EA94-4CC1-8ABF-48F42856B786}"/>
               </a:ext>
             </a:extLst>
           </p:cNvPr>
@@ -5221,10 +5278,10 @@
       </p:sp>
       <p:sp>
         <p:nvSpPr>
-          <p:cNvPr id="22" name="">
-            <a:extLst xmlns:a="http://schemas.openxmlformats.org/drawingml/2006/main">
-              <a:ext uri="{FF2B5EF4-FFF2-40B4-BE49-F238E27FC236}">
-                <a16:creationId xmlns:a16="http://schemas.microsoft.com/office/drawing/2014/main" id="{3A9A31B0-6B1F-4FF6-8B24-F0BDE1D593C3}"/>
+          <p:cNvPr id="23" name="">
+            <a:extLst xmlns:a="http://schemas.openxmlformats.org/drawingml/2006/main">
+              <a:ext uri="{FF2B5EF4-FFF2-40B4-BE49-F238E27FC236}">
+                <a16:creationId xmlns:a16="http://schemas.microsoft.com/office/drawing/2014/main" id="{E7728601-285D-4125-94FD-A7AF34C47AC1}"/>
               </a:ext>
             </a:extLst>
           </p:cNvPr>
@@ -5278,10 +5335,10 @@
       </p:sp>
       <p:sp>
         <p:nvSpPr>
-          <p:cNvPr id="23" name="">
-            <a:extLst xmlns:a="http://schemas.openxmlformats.org/drawingml/2006/main">
-              <a:ext uri="{FF2B5EF4-FFF2-40B4-BE49-F238E27FC236}">
-                <a16:creationId xmlns:a16="http://schemas.microsoft.com/office/drawing/2014/main" id="{19914CA6-E4BB-4853-9DFE-A66CAAA47D8D}"/>
+          <p:cNvPr id="24" name="">
+            <a:extLst xmlns:a="http://schemas.openxmlformats.org/drawingml/2006/main">
+              <a:ext uri="{FF2B5EF4-FFF2-40B4-BE49-F238E27FC236}">
+                <a16:creationId xmlns:a16="http://schemas.microsoft.com/office/drawing/2014/main" id="{985D3364-8D49-47F3-BCBF-4F0DAC690944}"/>
               </a:ext>
             </a:extLst>
           </p:cNvPr>
@@ -5308,10 +5365,10 @@
       </p:sp>
       <p:sp>
         <p:nvSpPr>
-          <p:cNvPr id="24" name="">
-            <a:extLst xmlns:a="http://schemas.openxmlformats.org/drawingml/2006/main">
-              <a:ext uri="{FF2B5EF4-FFF2-40B4-BE49-F238E27FC236}">
-                <a16:creationId xmlns:a16="http://schemas.microsoft.com/office/drawing/2014/main" id="{52DC1D12-84C7-40B1-A427-2DF56BF5DC0C}"/>
+          <p:cNvPr id="25" name="">
+            <a:extLst xmlns:a="http://schemas.openxmlformats.org/drawingml/2006/main">
+              <a:ext uri="{FF2B5EF4-FFF2-40B4-BE49-F238E27FC236}">
+                <a16:creationId xmlns:a16="http://schemas.microsoft.com/office/drawing/2014/main" id="{058DD7DC-0836-4230-80C4-8CCE3392CB88}"/>
               </a:ext>
             </a:extLst>
           </p:cNvPr>
@@ -5342,10 +5399,10 @@
       </p:sp>
       <p:sp>
         <p:nvSpPr>
-          <p:cNvPr id="25" name="">
-            <a:extLst xmlns:a="http://schemas.openxmlformats.org/drawingml/2006/main">
-              <a:ext uri="{FF2B5EF4-FFF2-40B4-BE49-F238E27FC236}">
-                <a16:creationId xmlns:a16="http://schemas.microsoft.com/office/drawing/2014/main" id="{29C442D6-1B10-4EF5-B8D3-447C144631BA}"/>
+          <p:cNvPr id="26" name="">
+            <a:extLst xmlns:a="http://schemas.openxmlformats.org/drawingml/2006/main">
+              <a:ext uri="{FF2B5EF4-FFF2-40B4-BE49-F238E27FC236}">
+                <a16:creationId xmlns:a16="http://schemas.microsoft.com/office/drawing/2014/main" id="{2099373D-3751-4D53-BA55-6230572EC718}"/>
               </a:ext>
             </a:extLst>
           </p:cNvPr>
@@ -5374,10 +5431,10 @@
       </p:sp>
       <p:sp>
         <p:nvSpPr>
-          <p:cNvPr id="26" name="">
-            <a:extLst xmlns:a="http://schemas.openxmlformats.org/drawingml/2006/main">
-              <a:ext uri="{FF2B5EF4-FFF2-40B4-BE49-F238E27FC236}">
-                <a16:creationId xmlns:a16="http://schemas.microsoft.com/office/drawing/2014/main" id="{287CE94F-AA92-4523-9803-B8586850EAD4}"/>
+          <p:cNvPr id="27" name="">
+            <a:extLst xmlns:a="http://schemas.openxmlformats.org/drawingml/2006/main">
+              <a:ext uri="{FF2B5EF4-FFF2-40B4-BE49-F238E27FC236}">
+                <a16:creationId xmlns:a16="http://schemas.microsoft.com/office/drawing/2014/main" id="{E0E8F807-7B5E-4534-A05B-936912451B03}"/>
               </a:ext>
             </a:extLst>
           </p:cNvPr>
@@ -5431,10 +5488,10 @@
       </p:sp>
       <p:sp>
         <p:nvSpPr>
-          <p:cNvPr id="27" name="">
-            <a:extLst xmlns:a="http://schemas.openxmlformats.org/drawingml/2006/main">
-              <a:ext uri="{FF2B5EF4-FFF2-40B4-BE49-F238E27FC236}">
-                <a16:creationId xmlns:a16="http://schemas.microsoft.com/office/drawing/2014/main" id="{3B7141E0-E911-4B8C-A612-4CA0BA1716C4}"/>
+          <p:cNvPr id="28" name="">
+            <a:extLst xmlns:a="http://schemas.openxmlformats.org/drawingml/2006/main">
+              <a:ext uri="{FF2B5EF4-FFF2-40B4-BE49-F238E27FC236}">
+                <a16:creationId xmlns:a16="http://schemas.microsoft.com/office/drawing/2014/main" id="{B2B78716-F168-4B45-9E73-0EB52C0D4532}"/>
               </a:ext>
             </a:extLst>
           </p:cNvPr>
@@ -5488,10 +5545,10 @@
       </p:sp>
       <p:sp>
         <p:nvSpPr>
-          <p:cNvPr id="28" name="">
-            <a:extLst xmlns:a="http://schemas.openxmlformats.org/drawingml/2006/main">
-              <a:ext uri="{FF2B5EF4-FFF2-40B4-BE49-F238E27FC236}">
-                <a16:creationId xmlns:a16="http://schemas.microsoft.com/office/drawing/2014/main" id="{F87D2DCA-A88C-4785-8BCA-89DBB4E47586}"/>
+          <p:cNvPr id="29" name="">
+            <a:extLst xmlns:a="http://schemas.openxmlformats.org/drawingml/2006/main">
+              <a:ext uri="{FF2B5EF4-FFF2-40B4-BE49-F238E27FC236}">
+                <a16:creationId xmlns:a16="http://schemas.microsoft.com/office/drawing/2014/main" id="{1F5EFE4B-F508-445A-A975-936DEA3AA820}"/>
               </a:ext>
             </a:extLst>
           </p:cNvPr>
@@ -5545,10 +5602,10 @@
       </p:sp>
       <p:sp>
         <p:nvSpPr>
-          <p:cNvPr id="29" name="">
-            <a:extLst xmlns:a="http://schemas.openxmlformats.org/drawingml/2006/main">
-              <a:ext uri="{FF2B5EF4-FFF2-40B4-BE49-F238E27FC236}">
-                <a16:creationId xmlns:a16="http://schemas.microsoft.com/office/drawing/2014/main" id="{022BCE76-C021-4785-A666-3E7E55B47685}"/>
+          <p:cNvPr id="30" name="">
+            <a:extLst xmlns:a="http://schemas.openxmlformats.org/drawingml/2006/main">
+              <a:ext uri="{FF2B5EF4-FFF2-40B4-BE49-F238E27FC236}">
+                <a16:creationId xmlns:a16="http://schemas.microsoft.com/office/drawing/2014/main" id="{4F216C12-0E11-4A2F-B16F-9E5A57F5D295}"/>
               </a:ext>
             </a:extLst>
           </p:cNvPr>
@@ -5575,10 +5632,10 @@
       </p:sp>
       <p:sp>
         <p:nvSpPr>
-          <p:cNvPr id="30" name="">
-            <a:extLst xmlns:a="http://schemas.openxmlformats.org/drawingml/2006/main">
-              <a:ext uri="{FF2B5EF4-FFF2-40B4-BE49-F238E27FC236}">
-                <a16:creationId xmlns:a16="http://schemas.microsoft.com/office/drawing/2014/main" id="{A6E051AF-4993-42F4-AFCD-1B01A4F80CCF}"/>
+          <p:cNvPr id="31" name="">
+            <a:extLst xmlns:a="http://schemas.openxmlformats.org/drawingml/2006/main">
+              <a:ext uri="{FF2B5EF4-FFF2-40B4-BE49-F238E27FC236}">
+                <a16:creationId xmlns:a16="http://schemas.microsoft.com/office/drawing/2014/main" id="{B131F215-FBD0-4F4C-9FA0-37A547243645}"/>
               </a:ext>
             </a:extLst>
           </p:cNvPr>
@@ -5609,10 +5666,10 @@
       </p:sp>
       <p:sp>
         <p:nvSpPr>
-          <p:cNvPr id="31" name="">
-            <a:extLst xmlns:a="http://schemas.openxmlformats.org/drawingml/2006/main">
-              <a:ext uri="{FF2B5EF4-FFF2-40B4-BE49-F238E27FC236}">
-                <a16:creationId xmlns:a16="http://schemas.microsoft.com/office/drawing/2014/main" id="{254E2689-1B9C-4CA9-8D21-97181A0209AA}"/>
+          <p:cNvPr id="32" name="">
+            <a:extLst xmlns:a="http://schemas.openxmlformats.org/drawingml/2006/main">
+              <a:ext uri="{FF2B5EF4-FFF2-40B4-BE49-F238E27FC236}">
+                <a16:creationId xmlns:a16="http://schemas.microsoft.com/office/drawing/2014/main" id="{8E9B4575-A78F-45F2-889D-1942A1A93638}"/>
               </a:ext>
             </a:extLst>
           </p:cNvPr>
@@ -5641,10 +5698,10 @@
       </p:sp>
       <p:sp>
         <p:nvSpPr>
-          <p:cNvPr id="32" name="">
-            <a:extLst xmlns:a="http://schemas.openxmlformats.org/drawingml/2006/main">
-              <a:ext uri="{FF2B5EF4-FFF2-40B4-BE49-F238E27FC236}">
-                <a16:creationId xmlns:a16="http://schemas.microsoft.com/office/drawing/2014/main" id="{0E790197-BE01-434E-A62F-1F1D198387C8}"/>
+          <p:cNvPr id="33" name="">
+            <a:extLst xmlns:a="http://schemas.openxmlformats.org/drawingml/2006/main">
+              <a:ext uri="{FF2B5EF4-FFF2-40B4-BE49-F238E27FC236}">
+                <a16:creationId xmlns:a16="http://schemas.microsoft.com/office/drawing/2014/main" id="{BEE990E2-658A-4C96-897D-D0C191AF276A}"/>
               </a:ext>
             </a:extLst>
           </p:cNvPr>
@@ -5698,10 +5755,10 @@
       </p:sp>
       <p:sp>
         <p:nvSpPr>
-          <p:cNvPr id="33" name="">
-            <a:extLst xmlns:a="http://schemas.openxmlformats.org/drawingml/2006/main">
-              <a:ext uri="{FF2B5EF4-FFF2-40B4-BE49-F238E27FC236}">
-                <a16:creationId xmlns:a16="http://schemas.microsoft.com/office/drawing/2014/main" id="{DC455294-4F23-42A4-9D2B-1DFE30250A87}"/>
+          <p:cNvPr id="34" name="">
+            <a:extLst xmlns:a="http://schemas.openxmlformats.org/drawingml/2006/main">
+              <a:ext uri="{FF2B5EF4-FFF2-40B4-BE49-F238E27FC236}">
+                <a16:creationId xmlns:a16="http://schemas.microsoft.com/office/drawing/2014/main" id="{B1A39EB8-1B40-4B28-95AE-8D7A47FF892E}"/>
               </a:ext>
             </a:extLst>
           </p:cNvPr>
@@ -5755,10 +5812,10 @@
       </p:sp>
       <p:sp>
         <p:nvSpPr>
-          <p:cNvPr id="34" name="">
-            <a:extLst xmlns:a="http://schemas.openxmlformats.org/drawingml/2006/main">
-              <a:ext uri="{FF2B5EF4-FFF2-40B4-BE49-F238E27FC236}">
-                <a16:creationId xmlns:a16="http://schemas.microsoft.com/office/drawing/2014/main" id="{F17B3871-5302-4755-A7F7-24A5E850BD42}"/>
+          <p:cNvPr id="35" name="">
+            <a:extLst xmlns:a="http://schemas.openxmlformats.org/drawingml/2006/main">
+              <a:ext uri="{FF2B5EF4-FFF2-40B4-BE49-F238E27FC236}">
+                <a16:creationId xmlns:a16="http://schemas.microsoft.com/office/drawing/2014/main" id="{222128E6-384A-4044-8ED8-CD9B6D645683}"/>
               </a:ext>
             </a:extLst>
           </p:cNvPr>
@@ -5812,10 +5869,10 @@
       </p:sp>
       <p:sp>
         <p:nvSpPr>
-          <p:cNvPr id="35" name="">
-            <a:extLst xmlns:a="http://schemas.openxmlformats.org/drawingml/2006/main">
-              <a:ext uri="{FF2B5EF4-FFF2-40B4-BE49-F238E27FC236}">
-                <a16:creationId xmlns:a16="http://schemas.microsoft.com/office/drawing/2014/main" id="{0DA46C72-A06C-442A-B802-E057AC1FCADA}"/>
+          <p:cNvPr id="36" name="">
+            <a:extLst xmlns:a="http://schemas.openxmlformats.org/drawingml/2006/main">
+              <a:ext uri="{FF2B5EF4-FFF2-40B4-BE49-F238E27FC236}">
+                <a16:creationId xmlns:a16="http://schemas.microsoft.com/office/drawing/2014/main" id="{FBAA2C1C-2AB3-4B54-8C26-D19038E01E52}"/>
               </a:ext>
             </a:extLst>
           </p:cNvPr>
@@ -5842,10 +5899,10 @@
       </p:sp>
       <p:sp>
         <p:nvSpPr>
-          <p:cNvPr id="36" name="">
-            <a:extLst xmlns:a="http://schemas.openxmlformats.org/drawingml/2006/main">
-              <a:ext uri="{FF2B5EF4-FFF2-40B4-BE49-F238E27FC236}">
-                <a16:creationId xmlns:a16="http://schemas.microsoft.com/office/drawing/2014/main" id="{63694F7F-566E-469F-8199-817EB59BB950}"/>
+          <p:cNvPr id="37" name="">
+            <a:extLst xmlns:a="http://schemas.openxmlformats.org/drawingml/2006/main">
+              <a:ext uri="{FF2B5EF4-FFF2-40B4-BE49-F238E27FC236}">
+                <a16:creationId xmlns:a16="http://schemas.microsoft.com/office/drawing/2014/main" id="{CA7A2FF1-B538-4D2A-B81A-9B95EC2B3174}"/>
               </a:ext>
             </a:extLst>
           </p:cNvPr>
@@ -5876,10 +5933,10 @@
       </p:sp>
       <p:sp>
         <p:nvSpPr>
-          <p:cNvPr id="37" name="">
-            <a:extLst xmlns:a="http://schemas.openxmlformats.org/drawingml/2006/main">
-              <a:ext uri="{FF2B5EF4-FFF2-40B4-BE49-F238E27FC236}">
-                <a16:creationId xmlns:a16="http://schemas.microsoft.com/office/drawing/2014/main" id="{F781F7EE-2BB6-45D8-A7BB-04836211B7B7}"/>
+          <p:cNvPr id="38" name="">
+            <a:extLst xmlns:a="http://schemas.openxmlformats.org/drawingml/2006/main">
+              <a:ext uri="{FF2B5EF4-FFF2-40B4-BE49-F238E27FC236}">
+                <a16:creationId xmlns:a16="http://schemas.microsoft.com/office/drawing/2014/main" id="{0CFBB81E-AB67-43FA-BED0-8DD99F095CF6}"/>
               </a:ext>
             </a:extLst>
           </p:cNvPr>
@@ -5908,10 +5965,10 @@
       </p:sp>
       <p:sp>
         <p:nvSpPr>
-          <p:cNvPr id="38" name="">
-            <a:extLst xmlns:a="http://schemas.openxmlformats.org/drawingml/2006/main">
-              <a:ext uri="{FF2B5EF4-FFF2-40B4-BE49-F238E27FC236}">
-                <a16:creationId xmlns:a16="http://schemas.microsoft.com/office/drawing/2014/main" id="{F6BCAA64-CCC3-4B89-AA1F-50D6F1C2F528}"/>
+          <p:cNvPr id="39" name="">
+            <a:extLst xmlns:a="http://schemas.openxmlformats.org/drawingml/2006/main">
+              <a:ext uri="{FF2B5EF4-FFF2-40B4-BE49-F238E27FC236}">
+                <a16:creationId xmlns:a16="http://schemas.microsoft.com/office/drawing/2014/main" id="{D9D5922F-82D8-4CBD-910C-473150F8E30E}"/>
               </a:ext>
             </a:extLst>
           </p:cNvPr>
@@ -5965,10 +6022,10 @@
       </p:sp>
       <p:sp>
         <p:nvSpPr>
-          <p:cNvPr id="39" name="">
-            <a:extLst xmlns:a="http://schemas.openxmlformats.org/drawingml/2006/main">
-              <a:ext uri="{FF2B5EF4-FFF2-40B4-BE49-F238E27FC236}">
-                <a16:creationId xmlns:a16="http://schemas.microsoft.com/office/drawing/2014/main" id="{9D059C68-D3E8-4B24-9AB0-B9E057A441E0}"/>
+          <p:cNvPr id="40" name="">
+            <a:extLst xmlns:a="http://schemas.openxmlformats.org/drawingml/2006/main">
+              <a:ext uri="{FF2B5EF4-FFF2-40B4-BE49-F238E27FC236}">
+                <a16:creationId xmlns:a16="http://schemas.microsoft.com/office/drawing/2014/main" id="{00AE967A-204D-4150-97A1-65E6541E84B4}"/>
               </a:ext>
             </a:extLst>
           </p:cNvPr>
@@ -6022,10 +6079,10 @@
       </p:sp>
       <p:sp>
         <p:nvSpPr>
-          <p:cNvPr id="40" name="">
-            <a:extLst xmlns:a="http://schemas.openxmlformats.org/drawingml/2006/main">
-              <a:ext uri="{FF2B5EF4-FFF2-40B4-BE49-F238E27FC236}">
-                <a16:creationId xmlns:a16="http://schemas.microsoft.com/office/drawing/2014/main" id="{7B72EE36-2970-4750-A482-3B18932ECFF6}"/>
+          <p:cNvPr id="41" name="">
+            <a:extLst xmlns:a="http://schemas.openxmlformats.org/drawingml/2006/main">
+              <a:ext uri="{FF2B5EF4-FFF2-40B4-BE49-F238E27FC236}">
+                <a16:creationId xmlns:a16="http://schemas.microsoft.com/office/drawing/2014/main" id="{31690165-8345-4965-970D-734796C3E8CA}"/>
               </a:ext>
             </a:extLst>
           </p:cNvPr>
@@ -6079,39 +6136,159 @@
       </p:sp>
       <p:sp>
         <p:nvSpPr>
-          <p:cNvPr id="41" name="">
-            <a:extLst xmlns:a="http://schemas.openxmlformats.org/drawingml/2006/main">
-              <a:ext uri="{FF2B5EF4-FFF2-40B4-BE49-F238E27FC236}">
-                <a16:creationId xmlns:a16="http://schemas.microsoft.com/office/drawing/2014/main" id="{73B26FB8-8427-40B6-AD2F-00D1D59BA787}"/>
-              </a:ext>
-            </a:extLst>
-          </p:cNvPr>
-          <p:cNvSpPr>
-            <a:spLocks xmlns:a="http://schemas.openxmlformats.org/drawingml/2006/main" noGrp="1"/>
-          </p:cNvSpPr>
-          <p:nvPr/>
-        </p:nvSpPr>
-        <p:spPr>
-          <a:xfrm xmlns:a="http://schemas.openxmlformats.org/drawingml/2006/main">
-            <a:off x="571500" y="3143250"/>
-            <a:ext cx="11049000" cy="190500"/>
-          </a:xfrm>
-          <a:prstGeom xmlns:a="http://schemas.openxmlformats.org/drawingml/2006/main" prst="rect">
-            <a:avLst/>
-          </a:prstGeom>
-          <a:noFill xmlns:a="http://schemas.openxmlformats.org/drawingml/2006/main"/>
-          <a:ln xmlns:a="http://schemas.openxmlformats.org/drawingml/2006/main" w="0">
-            <a:noFill/>
-          </a:ln>
-        </p:spPr>
-        <p:txBody>
-          <a:bodyPr xmlns:a="http://schemas.openxmlformats.org/drawingml/2006/main" anchor="ctr">
-            <a:normAutofit fontScale="66667"/>
+          <p:cNvPr id="42" name="">
+            <a:extLst xmlns:a="http://schemas.openxmlformats.org/drawingml/2006/main">
+              <a:ext uri="{FF2B5EF4-FFF2-40B4-BE49-F238E27FC236}">
+                <a16:creationId xmlns:a16="http://schemas.microsoft.com/office/drawing/2014/main" id="{4BAA0587-A0E1-4248-93FE-97AAA4F45E13}"/>
+              </a:ext>
+            </a:extLst>
+          </p:cNvPr>
+          <p:cNvSpPr>
+            <a:spLocks xmlns:a="http://schemas.openxmlformats.org/drawingml/2006/main" noGrp="1"/>
+          </p:cNvSpPr>
+          <p:nvPr/>
+        </p:nvSpPr>
+        <p:spPr>
+          <a:xfrm xmlns:a="http://schemas.openxmlformats.org/drawingml/2006/main">
+            <a:off x="4752975" y="3067050"/>
+            <a:ext cx="19050" cy="133350"/>
+          </a:xfrm>
+          <a:prstGeom xmlns:a="http://schemas.openxmlformats.org/drawingml/2006/main" prst="rect">
+            <a:avLst/>
+          </a:prstGeom>
+          <a:solidFill xmlns:a="http://schemas.openxmlformats.org/drawingml/2006/main">
+            <a:srgbClr val="7657D6"/>
+          </a:solidFill>
+          <a:ln xmlns:a="http://schemas.openxmlformats.org/drawingml/2006/main" w="0">
+            <a:noFill/>
+          </a:ln>
+        </p:spPr>
+      </p:sp>
+      <p:sp>
+        <p:nvSpPr>
+          <p:cNvPr id="43" name="">
+            <a:extLst xmlns:a="http://schemas.openxmlformats.org/drawingml/2006/main">
+              <a:ext uri="{FF2B5EF4-FFF2-40B4-BE49-F238E27FC236}">
+                <a16:creationId xmlns:a16="http://schemas.microsoft.com/office/drawing/2014/main" id="{F31838FF-2ECC-4042-89AE-6C5D88B733A9}"/>
+              </a:ext>
+            </a:extLst>
+          </p:cNvPr>
+          <p:cNvSpPr>
+            <a:spLocks xmlns:a="http://schemas.openxmlformats.org/drawingml/2006/main" noGrp="1"/>
+          </p:cNvSpPr>
+          <p:nvPr/>
+        </p:nvSpPr>
+        <p:spPr>
+          <a:xfrm xmlns:a="http://schemas.openxmlformats.org/drawingml/2006/main">
+            <a:off x="3143250" y="3190875"/>
+            <a:ext cx="1619250" cy="19050"/>
+          </a:xfrm>
+          <a:prstGeom xmlns:a="http://schemas.openxmlformats.org/drawingml/2006/main" prst="rect">
+            <a:avLst/>
+          </a:prstGeom>
+          <a:solidFill xmlns:a="http://schemas.openxmlformats.org/drawingml/2006/main">
+            <a:srgbClr val="7657D6"/>
+          </a:solidFill>
+          <a:ln xmlns:a="http://schemas.openxmlformats.org/drawingml/2006/main" w="0">
+            <a:noFill/>
+          </a:ln>
+        </p:spPr>
+      </p:sp>
+      <p:sp>
+        <p:nvSpPr>
+          <p:cNvPr id="44" name="">
+            <a:extLst xmlns:a="http://schemas.openxmlformats.org/drawingml/2006/main">
+              <a:ext uri="{FF2B5EF4-FFF2-40B4-BE49-F238E27FC236}">
+                <a16:creationId xmlns:a16="http://schemas.microsoft.com/office/drawing/2014/main" id="{B4631D53-ABAE-4802-B56F-26698D36C454}"/>
+              </a:ext>
+            </a:extLst>
+          </p:cNvPr>
+          <p:cNvSpPr>
+            <a:spLocks xmlns:a="http://schemas.openxmlformats.org/drawingml/2006/main" noGrp="1"/>
+          </p:cNvSpPr>
+          <p:nvPr/>
+        </p:nvSpPr>
+        <p:spPr>
+          <a:xfrm xmlns:a="http://schemas.openxmlformats.org/drawingml/2006/main">
+            <a:off x="3133725" y="3152775"/>
+            <a:ext cx="19050" cy="47625"/>
+          </a:xfrm>
+          <a:prstGeom xmlns:a="http://schemas.openxmlformats.org/drawingml/2006/main" prst="rect">
+            <a:avLst/>
+          </a:prstGeom>
+          <a:solidFill xmlns:a="http://schemas.openxmlformats.org/drawingml/2006/main">
+            <a:srgbClr val="7657D6"/>
+          </a:solidFill>
+          <a:ln xmlns:a="http://schemas.openxmlformats.org/drawingml/2006/main" w="0">
+            <a:noFill/>
+          </a:ln>
+        </p:spPr>
+      </p:sp>
+      <p:sp>
+        <p:nvSpPr>
+          <p:cNvPr id="45" name="">
+            <a:extLst xmlns:a="http://schemas.openxmlformats.org/drawingml/2006/main">
+              <a:ext uri="{FF2B5EF4-FFF2-40B4-BE49-F238E27FC236}">
+                <a16:creationId xmlns:a16="http://schemas.microsoft.com/office/drawing/2014/main" id="{5223B845-364F-42D9-9A11-432DF7C5B476}"/>
+              </a:ext>
+            </a:extLst>
+          </p:cNvPr>
+          <p:cNvSpPr>
+            <a:spLocks xmlns:a="http://schemas.openxmlformats.org/drawingml/2006/main" noGrp="1"/>
+          </p:cNvSpPr>
+          <p:nvPr/>
+        </p:nvSpPr>
+        <p:spPr>
+          <a:xfrm xmlns:a="http://schemas.openxmlformats.org/drawingml/2006/main">
+            <a:off x="3076575" y="3067050"/>
+            <a:ext cx="133350" cy="95250"/>
+          </a:xfrm>
+          <a:prstGeom xmlns:a="http://schemas.openxmlformats.org/drawingml/2006/main" prst="triangle">
+            <a:avLst/>
+          </a:prstGeom>
+          <a:solidFill xmlns:a="http://schemas.openxmlformats.org/drawingml/2006/main">
+            <a:srgbClr val="7657D6"/>
+          </a:solidFill>
+          <a:ln xmlns:a="http://schemas.openxmlformats.org/drawingml/2006/main" w="0">
+            <a:noFill/>
+          </a:ln>
+        </p:spPr>
+      </p:sp>
+      <p:sp>
+        <p:nvSpPr>
+          <p:cNvPr id="46" name="">
+            <a:extLst xmlns:a="http://schemas.openxmlformats.org/drawingml/2006/main">
+              <a:ext uri="{FF2B5EF4-FFF2-40B4-BE49-F238E27FC236}">
+                <a16:creationId xmlns:a16="http://schemas.microsoft.com/office/drawing/2014/main" id="{7019679D-1B6F-4CBB-963B-ABFC1D736E5E}"/>
+              </a:ext>
+            </a:extLst>
+          </p:cNvPr>
+          <p:cNvSpPr>
+            <a:spLocks xmlns:a="http://schemas.openxmlformats.org/drawingml/2006/main" noGrp="1"/>
+          </p:cNvSpPr>
+          <p:nvPr/>
+        </p:nvSpPr>
+        <p:spPr>
+          <a:xfrm xmlns:a="http://schemas.openxmlformats.org/drawingml/2006/main">
+            <a:off x="8686800" y="3067050"/>
+            <a:ext cx="2933700" cy="161925"/>
+          </a:xfrm>
+          <a:prstGeom xmlns:a="http://schemas.openxmlformats.org/drawingml/2006/main" prst="rect">
+            <a:avLst/>
+          </a:prstGeom>
+          <a:noFill xmlns:a="http://schemas.openxmlformats.org/drawingml/2006/main"/>
+          <a:ln xmlns:a="http://schemas.openxmlformats.org/drawingml/2006/main" w="0">
+            <a:noFill/>
+          </a:ln>
+        </p:spPr>
+        <p:txBody>
+          <a:bodyPr xmlns:a="http://schemas.openxmlformats.org/drawingml/2006/main" anchor="ctr">
+            <a:normAutofit fontScale="56061"/>
           </a:bodyPr>
           <a:lstStyle xmlns:a="http://schemas.openxmlformats.org/drawingml/2006/main"/>
           <a:p xmlns:a="http://schemas.openxmlformats.org/drawingml/2006/main">
             <a:pPr algn="l">
-              <a:defRPr sz="975" b="1">
+              <a:defRPr sz="825" b="1">
                 <a:solidFill>
                   <a:srgbClr val="7657D6"/>
                 </a:solidFill>
@@ -6121,7 +6298,7 @@
               </a:defRPr>
             </a:pPr>
             <a:r>
-              <a:rPr sz="975" b="1">
+              <a:rPr sz="825" b="1">
                 <a:solidFill>
                   <a:srgbClr val="7657D6"/>
                 </a:solidFill>
@@ -6129,28 +6306,205 @@
                 <a:ea typeface="Malgun Gothic"/>
                 <a:cs typeface="Malgun Gothic"/>
               </a:rPr>
-              <a:t>제한적 ReAct  |  Observe → Retrieve → Reason → Act → Observe   (저신뢰·모호하면 Query Rewrite 후 재검색·재판단 최대 1회)</a:t>
-            </a:r>
-          </a:p>
-        </p:txBody>
-      </p:sp>
-      <p:sp>
-        <p:nvSpPr>
-          <p:cNvPr id="42" name="">
-            <a:extLst xmlns:a="http://schemas.openxmlformats.org/drawingml/2006/main">
-              <a:ext uri="{FF2B5EF4-FFF2-40B4-BE49-F238E27FC236}">
-                <a16:creationId xmlns:a16="http://schemas.microsoft.com/office/drawing/2014/main" id="{B188ECA0-369F-4FC7-AE49-AC37DC4B7AE6}"/>
-              </a:ext>
-            </a:extLst>
-          </p:cNvPr>
-          <p:cNvSpPr>
-            <a:spLocks xmlns:a="http://schemas.openxmlformats.org/drawingml/2006/main" noGrp="1"/>
-          </p:cNvSpPr>
-          <p:nvPr/>
-        </p:nvSpPr>
-        <p:spPr>
-          <a:xfrm xmlns:a="http://schemas.openxmlformats.org/drawingml/2006/main">
-            <a:off x="571500" y="3371850"/>
+              <a:t>Self-Correction  |  Query Rewrite 후 재검색, 최대 1회</a:t>
+            </a:r>
+          </a:p>
+        </p:txBody>
+      </p:sp>
+      <p:sp>
+        <p:nvSpPr>
+          <p:cNvPr id="47" name="">
+            <a:extLst xmlns:a="http://schemas.openxmlformats.org/drawingml/2006/main">
+              <a:ext uri="{FF2B5EF4-FFF2-40B4-BE49-F238E27FC236}">
+                <a16:creationId xmlns:a16="http://schemas.microsoft.com/office/drawing/2014/main" id="{E58E6196-84DB-48CB-9479-666B511DA85B}"/>
+              </a:ext>
+            </a:extLst>
+          </p:cNvPr>
+          <p:cNvSpPr>
+            <a:spLocks xmlns:a="http://schemas.openxmlformats.org/drawingml/2006/main" noGrp="1"/>
+          </p:cNvSpPr>
+          <p:nvPr/>
+        </p:nvSpPr>
+        <p:spPr>
+          <a:xfrm xmlns:a="http://schemas.openxmlformats.org/drawingml/2006/main">
+            <a:off x="8562975" y="3067050"/>
+            <a:ext cx="19050" cy="285750"/>
+          </a:xfrm>
+          <a:prstGeom xmlns:a="http://schemas.openxmlformats.org/drawingml/2006/main" prst="rect">
+            <a:avLst/>
+          </a:prstGeom>
+          <a:solidFill xmlns:a="http://schemas.openxmlformats.org/drawingml/2006/main">
+            <a:srgbClr val="0F8A99"/>
+          </a:solidFill>
+          <a:ln xmlns:a="http://schemas.openxmlformats.org/drawingml/2006/main" w="0">
+            <a:noFill/>
+          </a:ln>
+        </p:spPr>
+      </p:sp>
+      <p:sp>
+        <p:nvSpPr>
+          <p:cNvPr id="48" name="">
+            <a:extLst xmlns:a="http://schemas.openxmlformats.org/drawingml/2006/main">
+              <a:ext uri="{FF2B5EF4-FFF2-40B4-BE49-F238E27FC236}">
+                <a16:creationId xmlns:a16="http://schemas.microsoft.com/office/drawing/2014/main" id="{B51F96E4-A1EF-4742-BFBE-2F783BFDE77F}"/>
+              </a:ext>
+            </a:extLst>
+          </p:cNvPr>
+          <p:cNvSpPr>
+            <a:spLocks xmlns:a="http://schemas.openxmlformats.org/drawingml/2006/main" noGrp="1"/>
+          </p:cNvSpPr>
+          <p:nvPr/>
+        </p:nvSpPr>
+        <p:spPr>
+          <a:xfrm xmlns:a="http://schemas.openxmlformats.org/drawingml/2006/main">
+            <a:off x="5238750" y="3343275"/>
+            <a:ext cx="3333750" cy="19050"/>
+          </a:xfrm>
+          <a:prstGeom xmlns:a="http://schemas.openxmlformats.org/drawingml/2006/main" prst="rect">
+            <a:avLst/>
+          </a:prstGeom>
+          <a:solidFill xmlns:a="http://schemas.openxmlformats.org/drawingml/2006/main">
+            <a:srgbClr val="0F8A99"/>
+          </a:solidFill>
+          <a:ln xmlns:a="http://schemas.openxmlformats.org/drawingml/2006/main" w="0">
+            <a:noFill/>
+          </a:ln>
+        </p:spPr>
+      </p:sp>
+      <p:sp>
+        <p:nvSpPr>
+          <p:cNvPr id="49" name="">
+            <a:extLst xmlns:a="http://schemas.openxmlformats.org/drawingml/2006/main">
+              <a:ext uri="{FF2B5EF4-FFF2-40B4-BE49-F238E27FC236}">
+                <a16:creationId xmlns:a16="http://schemas.microsoft.com/office/drawing/2014/main" id="{B02AA93F-EAD2-441E-B0AB-26777DB39AF1}"/>
+              </a:ext>
+            </a:extLst>
+          </p:cNvPr>
+          <p:cNvSpPr>
+            <a:spLocks xmlns:a="http://schemas.openxmlformats.org/drawingml/2006/main" noGrp="1"/>
+          </p:cNvSpPr>
+          <p:nvPr/>
+        </p:nvSpPr>
+        <p:spPr>
+          <a:xfrm xmlns:a="http://schemas.openxmlformats.org/drawingml/2006/main">
+            <a:off x="5229225" y="3152775"/>
+            <a:ext cx="19050" cy="200025"/>
+          </a:xfrm>
+          <a:prstGeom xmlns:a="http://schemas.openxmlformats.org/drawingml/2006/main" prst="rect">
+            <a:avLst/>
+          </a:prstGeom>
+          <a:solidFill xmlns:a="http://schemas.openxmlformats.org/drawingml/2006/main">
+            <a:srgbClr val="0F8A99"/>
+          </a:solidFill>
+          <a:ln xmlns:a="http://schemas.openxmlformats.org/drawingml/2006/main" w="0">
+            <a:noFill/>
+          </a:ln>
+        </p:spPr>
+      </p:sp>
+      <p:sp>
+        <p:nvSpPr>
+          <p:cNvPr id="50" name="">
+            <a:extLst xmlns:a="http://schemas.openxmlformats.org/drawingml/2006/main">
+              <a:ext uri="{FF2B5EF4-FFF2-40B4-BE49-F238E27FC236}">
+                <a16:creationId xmlns:a16="http://schemas.microsoft.com/office/drawing/2014/main" id="{2830D1EC-6E2C-4AED-AE42-3F622611A5E9}"/>
+              </a:ext>
+            </a:extLst>
+          </p:cNvPr>
+          <p:cNvSpPr>
+            <a:spLocks xmlns:a="http://schemas.openxmlformats.org/drawingml/2006/main" noGrp="1"/>
+          </p:cNvSpPr>
+          <p:nvPr/>
+        </p:nvSpPr>
+        <p:spPr>
+          <a:xfrm xmlns:a="http://schemas.openxmlformats.org/drawingml/2006/main">
+            <a:off x="5172075" y="3067050"/>
+            <a:ext cx="133350" cy="95250"/>
+          </a:xfrm>
+          <a:prstGeom xmlns:a="http://schemas.openxmlformats.org/drawingml/2006/main" prst="triangle">
+            <a:avLst/>
+          </a:prstGeom>
+          <a:solidFill xmlns:a="http://schemas.openxmlformats.org/drawingml/2006/main">
+            <a:srgbClr val="0F8A99"/>
+          </a:solidFill>
+          <a:ln xmlns:a="http://schemas.openxmlformats.org/drawingml/2006/main" w="0">
+            <a:noFill/>
+          </a:ln>
+        </p:spPr>
+      </p:sp>
+      <p:sp>
+        <p:nvSpPr>
+          <p:cNvPr id="51" name="">
+            <a:extLst xmlns:a="http://schemas.openxmlformats.org/drawingml/2006/main">
+              <a:ext uri="{FF2B5EF4-FFF2-40B4-BE49-F238E27FC236}">
+                <a16:creationId xmlns:a16="http://schemas.microsoft.com/office/drawing/2014/main" id="{7C9C4CBB-B4D6-4020-A168-C08F45323E95}"/>
+              </a:ext>
+            </a:extLst>
+          </p:cNvPr>
+          <p:cNvSpPr>
+            <a:spLocks xmlns:a="http://schemas.openxmlformats.org/drawingml/2006/main" noGrp="1"/>
+          </p:cNvSpPr>
+          <p:nvPr/>
+        </p:nvSpPr>
+        <p:spPr>
+          <a:xfrm xmlns:a="http://schemas.openxmlformats.org/drawingml/2006/main">
+            <a:off x="8686800" y="3248025"/>
+            <a:ext cx="2933700" cy="161925"/>
+          </a:xfrm>
+          <a:prstGeom xmlns:a="http://schemas.openxmlformats.org/drawingml/2006/main" prst="rect">
+            <a:avLst/>
+          </a:prstGeom>
+          <a:noFill xmlns:a="http://schemas.openxmlformats.org/drawingml/2006/main"/>
+          <a:ln xmlns:a="http://schemas.openxmlformats.org/drawingml/2006/main" w="0">
+            <a:noFill/>
+          </a:ln>
+        </p:spPr>
+        <p:txBody>
+          <a:bodyPr xmlns:a="http://schemas.openxmlformats.org/drawingml/2006/main" anchor="ctr">
+            <a:normAutofit fontScale="56061"/>
+          </a:bodyPr>
+          <a:lstStyle xmlns:a="http://schemas.openxmlformats.org/drawingml/2006/main"/>
+          <a:p xmlns:a="http://schemas.openxmlformats.org/drawingml/2006/main">
+            <a:pPr algn="l">
+              <a:defRPr sz="825" b="1">
+                <a:solidFill>
+                  <a:srgbClr val="0F8A99"/>
+                </a:solidFill>
+                <a:latin typeface="Malgun Gothic"/>
+                <a:ea typeface="Malgun Gothic"/>
+                <a:cs typeface="Malgun Gothic"/>
+              </a:defRPr>
+            </a:pPr>
+            <a:r>
+              <a:rPr sz="825" b="1">
+                <a:solidFill>
+                  <a:srgbClr val="0F8A99"/>
+                </a:solidFill>
+                <a:latin typeface="Malgun Gothic"/>
+                <a:ea typeface="Malgun Gothic"/>
+                <a:cs typeface="Malgun Gothic"/>
+              </a:rPr>
+              <a:t>Act → Observe  |  저장 결과를 다시 조회</a:t>
+            </a:r>
+          </a:p>
+        </p:txBody>
+      </p:sp>
+      <p:sp>
+        <p:nvSpPr>
+          <p:cNvPr id="52" name="">
+            <a:extLst xmlns:a="http://schemas.openxmlformats.org/drawingml/2006/main">
+              <a:ext uri="{FF2B5EF4-FFF2-40B4-BE49-F238E27FC236}">
+                <a16:creationId xmlns:a16="http://schemas.microsoft.com/office/drawing/2014/main" id="{0FC6A962-CD6D-4860-BD6F-37D7E7215A8B}"/>
+              </a:ext>
+            </a:extLst>
+          </p:cNvPr>
+          <p:cNvSpPr>
+            <a:spLocks xmlns:a="http://schemas.openxmlformats.org/drawingml/2006/main" noGrp="1"/>
+          </p:cNvSpPr>
+          <p:nvPr/>
+        </p:nvSpPr>
+        <p:spPr>
+          <a:xfrm xmlns:a="http://schemas.openxmlformats.org/drawingml/2006/main">
+            <a:off x="571500" y="3448050"/>
             <a:ext cx="11049000" cy="762000"/>
           </a:xfrm>
           <a:prstGeom xmlns:a="http://schemas.openxmlformats.org/drawingml/2006/main" prst="roundRect">
@@ -6168,21 +6522,21 @@
       </p:sp>
       <p:sp>
         <p:nvSpPr>
-          <p:cNvPr id="43" name="">
-            <a:extLst xmlns:a="http://schemas.openxmlformats.org/drawingml/2006/main">
-              <a:ext uri="{FF2B5EF4-FFF2-40B4-BE49-F238E27FC236}">
-                <a16:creationId xmlns:a16="http://schemas.microsoft.com/office/drawing/2014/main" id="{7DBCF324-1506-4DE1-A3BC-E9A6E949C0BE}"/>
-              </a:ext>
-            </a:extLst>
-          </p:cNvPr>
-          <p:cNvSpPr>
-            <a:spLocks xmlns:a="http://schemas.openxmlformats.org/drawingml/2006/main" noGrp="1"/>
-          </p:cNvSpPr>
-          <p:nvPr/>
-        </p:nvSpPr>
-        <p:spPr>
-          <a:xfrm xmlns:a="http://schemas.openxmlformats.org/drawingml/2006/main">
-            <a:off x="781050" y="3429000"/>
+          <p:cNvPr id="53" name="">
+            <a:extLst xmlns:a="http://schemas.openxmlformats.org/drawingml/2006/main">
+              <a:ext uri="{FF2B5EF4-FFF2-40B4-BE49-F238E27FC236}">
+                <a16:creationId xmlns:a16="http://schemas.microsoft.com/office/drawing/2014/main" id="{9A5B2548-4243-4C2C-ABA4-A6E16865DA92}"/>
+              </a:ext>
+            </a:extLst>
+          </p:cNvPr>
+          <p:cNvSpPr>
+            <a:spLocks xmlns:a="http://schemas.openxmlformats.org/drawingml/2006/main" noGrp="1"/>
+          </p:cNvSpPr>
+          <p:nvPr/>
+        </p:nvSpPr>
+        <p:spPr>
+          <a:xfrm xmlns:a="http://schemas.openxmlformats.org/drawingml/2006/main">
+            <a:off x="781050" y="3505200"/>
             <a:ext cx="1143000" cy="266700"/>
           </a:xfrm>
           <a:prstGeom xmlns:a="http://schemas.openxmlformats.org/drawingml/2006/main" prst="rect">
@@ -6225,21 +6579,21 @@
       </p:sp>
       <p:sp>
         <p:nvSpPr>
-          <p:cNvPr id="44" name="">
-            <a:extLst xmlns:a="http://schemas.openxmlformats.org/drawingml/2006/main">
-              <a:ext uri="{FF2B5EF4-FFF2-40B4-BE49-F238E27FC236}">
-                <a16:creationId xmlns:a16="http://schemas.microsoft.com/office/drawing/2014/main" id="{6A751B9F-B745-4571-B902-5EA8E2345D1A}"/>
-              </a:ext>
-            </a:extLst>
-          </p:cNvPr>
-          <p:cNvSpPr>
-            <a:spLocks xmlns:a="http://schemas.openxmlformats.org/drawingml/2006/main" noGrp="1"/>
-          </p:cNvSpPr>
-          <p:nvPr/>
-        </p:nvSpPr>
-        <p:spPr>
-          <a:xfrm xmlns:a="http://schemas.openxmlformats.org/drawingml/2006/main">
-            <a:off x="1952625" y="3429000"/>
+          <p:cNvPr id="54" name="">
+            <a:extLst xmlns:a="http://schemas.openxmlformats.org/drawingml/2006/main">
+              <a:ext uri="{FF2B5EF4-FFF2-40B4-BE49-F238E27FC236}">
+                <a16:creationId xmlns:a16="http://schemas.microsoft.com/office/drawing/2014/main" id="{27F5F82D-ECB3-47E6-A88D-EB264D2444B0}"/>
+              </a:ext>
+            </a:extLst>
+          </p:cNvPr>
+          <p:cNvSpPr>
+            <a:spLocks xmlns:a="http://schemas.openxmlformats.org/drawingml/2006/main" noGrp="1"/>
+          </p:cNvSpPr>
+          <p:nvPr/>
+        </p:nvSpPr>
+        <p:spPr>
+          <a:xfrm xmlns:a="http://schemas.openxmlformats.org/drawingml/2006/main">
+            <a:off x="1952625" y="3505200"/>
             <a:ext cx="2476500" cy="266700"/>
           </a:xfrm>
           <a:prstGeom xmlns:a="http://schemas.openxmlformats.org/drawingml/2006/main" prst="rect">
@@ -6282,21 +6636,21 @@
       </p:sp>
       <p:sp>
         <p:nvSpPr>
-          <p:cNvPr id="45" name="">
-            <a:extLst xmlns:a="http://schemas.openxmlformats.org/drawingml/2006/main">
-              <a:ext uri="{FF2B5EF4-FFF2-40B4-BE49-F238E27FC236}">
-                <a16:creationId xmlns:a16="http://schemas.microsoft.com/office/drawing/2014/main" id="{63CCCABA-58FE-4754-A549-5B79FBAF9712}"/>
-              </a:ext>
-            </a:extLst>
-          </p:cNvPr>
-          <p:cNvSpPr>
-            <a:spLocks xmlns:a="http://schemas.openxmlformats.org/drawingml/2006/main" noGrp="1"/>
-          </p:cNvSpPr>
-          <p:nvPr/>
-        </p:nvSpPr>
-        <p:spPr>
-          <a:xfrm xmlns:a="http://schemas.openxmlformats.org/drawingml/2006/main">
-            <a:off x="4524375" y="3429000"/>
+          <p:cNvPr id="55" name="">
+            <a:extLst xmlns:a="http://schemas.openxmlformats.org/drawingml/2006/main">
+              <a:ext uri="{FF2B5EF4-FFF2-40B4-BE49-F238E27FC236}">
+                <a16:creationId xmlns:a16="http://schemas.microsoft.com/office/drawing/2014/main" id="{5D5EEE56-906B-47A8-9C30-6A049E655335}"/>
+              </a:ext>
+            </a:extLst>
+          </p:cNvPr>
+          <p:cNvSpPr>
+            <a:spLocks xmlns:a="http://schemas.openxmlformats.org/drawingml/2006/main" noGrp="1"/>
+          </p:cNvSpPr>
+          <p:nvPr/>
+        </p:nvSpPr>
+        <p:spPr>
+          <a:xfrm xmlns:a="http://schemas.openxmlformats.org/drawingml/2006/main">
+            <a:off x="4524375" y="3505200"/>
             <a:ext cx="6762750" cy="266700"/>
           </a:xfrm>
           <a:prstGeom xmlns:a="http://schemas.openxmlformats.org/drawingml/2006/main" prst="rect">
@@ -6339,21 +6693,21 @@
       </p:sp>
       <p:sp>
         <p:nvSpPr>
-          <p:cNvPr id="46" name="">
-            <a:extLst xmlns:a="http://schemas.openxmlformats.org/drawingml/2006/main">
-              <a:ext uri="{FF2B5EF4-FFF2-40B4-BE49-F238E27FC236}">
-                <a16:creationId xmlns:a16="http://schemas.microsoft.com/office/drawing/2014/main" id="{3A16E88A-25BB-40D9-B656-EF9F6796B660}"/>
-              </a:ext>
-            </a:extLst>
-          </p:cNvPr>
-          <p:cNvSpPr>
-            <a:spLocks xmlns:a="http://schemas.openxmlformats.org/drawingml/2006/main" noGrp="1"/>
-          </p:cNvSpPr>
-          <p:nvPr/>
-        </p:nvSpPr>
-        <p:spPr>
-          <a:xfrm xmlns:a="http://schemas.openxmlformats.org/drawingml/2006/main">
-            <a:off x="781050" y="3790950"/>
+          <p:cNvPr id="56" name="">
+            <a:extLst xmlns:a="http://schemas.openxmlformats.org/drawingml/2006/main">
+              <a:ext uri="{FF2B5EF4-FFF2-40B4-BE49-F238E27FC236}">
+                <a16:creationId xmlns:a16="http://schemas.microsoft.com/office/drawing/2014/main" id="{8C880631-7274-47D6-A625-CAAF12D8DE2E}"/>
+              </a:ext>
+            </a:extLst>
+          </p:cNvPr>
+          <p:cNvSpPr>
+            <a:spLocks xmlns:a="http://schemas.openxmlformats.org/drawingml/2006/main" noGrp="1"/>
+          </p:cNvSpPr>
+          <p:nvPr/>
+        </p:nvSpPr>
+        <p:spPr>
+          <a:xfrm xmlns:a="http://schemas.openxmlformats.org/drawingml/2006/main">
+            <a:off x="781050" y="3867150"/>
             <a:ext cx="1143000" cy="266700"/>
           </a:xfrm>
           <a:prstGeom xmlns:a="http://schemas.openxmlformats.org/drawingml/2006/main" prst="rect">
@@ -6396,21 +6750,21 @@
       </p:sp>
       <p:sp>
         <p:nvSpPr>
-          <p:cNvPr id="47" name="">
-            <a:extLst xmlns:a="http://schemas.openxmlformats.org/drawingml/2006/main">
-              <a:ext uri="{FF2B5EF4-FFF2-40B4-BE49-F238E27FC236}">
-                <a16:creationId xmlns:a16="http://schemas.microsoft.com/office/drawing/2014/main" id="{4EC95D5D-23D8-4DB8-8F0B-D450E2635626}"/>
-              </a:ext>
-            </a:extLst>
-          </p:cNvPr>
-          <p:cNvSpPr>
-            <a:spLocks xmlns:a="http://schemas.openxmlformats.org/drawingml/2006/main" noGrp="1"/>
-          </p:cNvSpPr>
-          <p:nvPr/>
-        </p:nvSpPr>
-        <p:spPr>
-          <a:xfrm xmlns:a="http://schemas.openxmlformats.org/drawingml/2006/main">
-            <a:off x="1952625" y="3790950"/>
+          <p:cNvPr id="57" name="">
+            <a:extLst xmlns:a="http://schemas.openxmlformats.org/drawingml/2006/main">
+              <a:ext uri="{FF2B5EF4-FFF2-40B4-BE49-F238E27FC236}">
+                <a16:creationId xmlns:a16="http://schemas.microsoft.com/office/drawing/2014/main" id="{2A7B7A16-8E09-4B9A-924E-711FFDF93E48}"/>
+              </a:ext>
+            </a:extLst>
+          </p:cNvPr>
+          <p:cNvSpPr>
+            <a:spLocks xmlns:a="http://schemas.openxmlformats.org/drawingml/2006/main" noGrp="1"/>
+          </p:cNvSpPr>
+          <p:nvPr/>
+        </p:nvSpPr>
+        <p:spPr>
+          <a:xfrm xmlns:a="http://schemas.openxmlformats.org/drawingml/2006/main">
+            <a:off x="1952625" y="3867150"/>
             <a:ext cx="9334500" cy="266700"/>
           </a:xfrm>
           <a:prstGeom xmlns:a="http://schemas.openxmlformats.org/drawingml/2006/main" prst="rect">
@@ -6453,21 +6807,21 @@
       </p:sp>
       <p:sp>
         <p:nvSpPr>
-          <p:cNvPr id="48" name="">
-            <a:extLst xmlns:a="http://schemas.openxmlformats.org/drawingml/2006/main">
-              <a:ext uri="{FF2B5EF4-FFF2-40B4-BE49-F238E27FC236}">
-                <a16:creationId xmlns:a16="http://schemas.microsoft.com/office/drawing/2014/main" id="{26AEA056-2D42-4134-BD6C-996817CFE0FB}"/>
-              </a:ext>
-            </a:extLst>
-          </p:cNvPr>
-          <p:cNvSpPr>
-            <a:spLocks xmlns:a="http://schemas.openxmlformats.org/drawingml/2006/main" noGrp="1"/>
-          </p:cNvSpPr>
-          <p:nvPr/>
-        </p:nvSpPr>
-        <p:spPr>
-          <a:xfrm xmlns:a="http://schemas.openxmlformats.org/drawingml/2006/main">
-            <a:off x="571500" y="4286250"/>
+          <p:cNvPr id="58" name="">
+            <a:extLst xmlns:a="http://schemas.openxmlformats.org/drawingml/2006/main">
+              <a:ext uri="{FF2B5EF4-FFF2-40B4-BE49-F238E27FC236}">
+                <a16:creationId xmlns:a16="http://schemas.microsoft.com/office/drawing/2014/main" id="{FB248B7C-5900-4270-B384-18239C09E68A}"/>
+              </a:ext>
+            </a:extLst>
+          </p:cNvPr>
+          <p:cNvSpPr>
+            <a:spLocks xmlns:a="http://schemas.openxmlformats.org/drawingml/2006/main" noGrp="1"/>
+          </p:cNvSpPr>
+          <p:nvPr/>
+        </p:nvSpPr>
+        <p:spPr>
+          <a:xfrm xmlns:a="http://schemas.openxmlformats.org/drawingml/2006/main">
+            <a:off x="571500" y="4362450"/>
             <a:ext cx="1714500" cy="266700"/>
           </a:xfrm>
           <a:prstGeom xmlns:a="http://schemas.openxmlformats.org/drawingml/2006/main" prst="rect">
@@ -6510,21 +6864,21 @@
       </p:sp>
       <p:sp>
         <p:nvSpPr>
-          <p:cNvPr id="49" name="">
-            <a:extLst xmlns:a="http://schemas.openxmlformats.org/drawingml/2006/main">
-              <a:ext uri="{FF2B5EF4-FFF2-40B4-BE49-F238E27FC236}">
-                <a16:creationId xmlns:a16="http://schemas.microsoft.com/office/drawing/2014/main" id="{54A43162-FAE2-4CDE-BCCC-691FD53646DE}"/>
-              </a:ext>
-            </a:extLst>
-          </p:cNvPr>
-          <p:cNvSpPr>
-            <a:spLocks xmlns:a="http://schemas.openxmlformats.org/drawingml/2006/main" noGrp="1"/>
-          </p:cNvSpPr>
-          <p:nvPr/>
-        </p:nvSpPr>
-        <p:spPr>
-          <a:xfrm xmlns:a="http://schemas.openxmlformats.org/drawingml/2006/main">
-            <a:off x="571500" y="4610100"/>
+          <p:cNvPr id="59" name="">
+            <a:extLst xmlns:a="http://schemas.openxmlformats.org/drawingml/2006/main">
+              <a:ext uri="{FF2B5EF4-FFF2-40B4-BE49-F238E27FC236}">
+                <a16:creationId xmlns:a16="http://schemas.microsoft.com/office/drawing/2014/main" id="{0771F9BA-9259-426F-8705-1053C0D3296E}"/>
+              </a:ext>
+            </a:extLst>
+          </p:cNvPr>
+          <p:cNvSpPr>
+            <a:spLocks xmlns:a="http://schemas.openxmlformats.org/drawingml/2006/main" noGrp="1"/>
+          </p:cNvSpPr>
+          <p:nvPr/>
+        </p:nvSpPr>
+        <p:spPr>
+          <a:xfrm xmlns:a="http://schemas.openxmlformats.org/drawingml/2006/main">
+            <a:off x="571500" y="4686300"/>
             <a:ext cx="3314700" cy="228600"/>
           </a:xfrm>
           <a:prstGeom xmlns:a="http://schemas.openxmlformats.org/drawingml/2006/main" prst="rect">
@@ -6567,21 +6921,21 @@
       </p:sp>
       <p:sp>
         <p:nvSpPr>
-          <p:cNvPr id="50" name="">
-            <a:extLst xmlns:a="http://schemas.openxmlformats.org/drawingml/2006/main">
-              <a:ext uri="{FF2B5EF4-FFF2-40B4-BE49-F238E27FC236}">
-                <a16:creationId xmlns:a16="http://schemas.microsoft.com/office/drawing/2014/main" id="{080F2501-1463-455B-ACC2-E3733F2EDAA8}"/>
-              </a:ext>
-            </a:extLst>
-          </p:cNvPr>
-          <p:cNvSpPr>
-            <a:spLocks xmlns:a="http://schemas.openxmlformats.org/drawingml/2006/main" noGrp="1"/>
-          </p:cNvSpPr>
-          <p:nvPr/>
-        </p:nvSpPr>
-        <p:spPr>
-          <a:xfrm xmlns:a="http://schemas.openxmlformats.org/drawingml/2006/main">
-            <a:off x="571500" y="4876800"/>
+          <p:cNvPr id="60" name="">
+            <a:extLst xmlns:a="http://schemas.openxmlformats.org/drawingml/2006/main">
+              <a:ext uri="{FF2B5EF4-FFF2-40B4-BE49-F238E27FC236}">
+                <a16:creationId xmlns:a16="http://schemas.microsoft.com/office/drawing/2014/main" id="{1069C041-7CB8-4C6F-9D83-2BA099BC87D4}"/>
+              </a:ext>
+            </a:extLst>
+          </p:cNvPr>
+          <p:cNvSpPr>
+            <a:spLocks xmlns:a="http://schemas.openxmlformats.org/drawingml/2006/main" noGrp="1"/>
+          </p:cNvSpPr>
+          <p:nvPr/>
+        </p:nvSpPr>
+        <p:spPr>
+          <a:xfrm xmlns:a="http://schemas.openxmlformats.org/drawingml/2006/main">
+            <a:off x="571500" y="4953000"/>
             <a:ext cx="3314700" cy="361950"/>
           </a:xfrm>
           <a:prstGeom xmlns:a="http://schemas.openxmlformats.org/drawingml/2006/main" prst="rect">
@@ -6624,21 +6978,21 @@
       </p:sp>
       <p:sp>
         <p:nvSpPr>
-          <p:cNvPr id="51" name="">
-            <a:extLst xmlns:a="http://schemas.openxmlformats.org/drawingml/2006/main">
-              <a:ext uri="{FF2B5EF4-FFF2-40B4-BE49-F238E27FC236}">
-                <a16:creationId xmlns:a16="http://schemas.microsoft.com/office/drawing/2014/main" id="{6BC421D2-431C-45B3-B211-3DB9AE75126C}"/>
-              </a:ext>
-            </a:extLst>
-          </p:cNvPr>
-          <p:cNvSpPr>
-            <a:spLocks xmlns:a="http://schemas.openxmlformats.org/drawingml/2006/main" noGrp="1"/>
-          </p:cNvSpPr>
-          <p:nvPr/>
-        </p:nvSpPr>
-        <p:spPr>
-          <a:xfrm xmlns:a="http://schemas.openxmlformats.org/drawingml/2006/main">
-            <a:off x="571500" y="5257800"/>
+          <p:cNvPr id="61" name="">
+            <a:extLst xmlns:a="http://schemas.openxmlformats.org/drawingml/2006/main">
+              <a:ext uri="{FF2B5EF4-FFF2-40B4-BE49-F238E27FC236}">
+                <a16:creationId xmlns:a16="http://schemas.microsoft.com/office/drawing/2014/main" id="{0805C618-31A9-4FB8-815D-EF674BF3B306}"/>
+              </a:ext>
+            </a:extLst>
+          </p:cNvPr>
+          <p:cNvSpPr>
+            <a:spLocks xmlns:a="http://schemas.openxmlformats.org/drawingml/2006/main" noGrp="1"/>
+          </p:cNvSpPr>
+          <p:nvPr/>
+        </p:nvSpPr>
+        <p:spPr>
+          <a:xfrm xmlns:a="http://schemas.openxmlformats.org/drawingml/2006/main">
+            <a:off x="571500" y="5334000"/>
             <a:ext cx="3314700" cy="361950"/>
           </a:xfrm>
           <a:prstGeom xmlns:a="http://schemas.openxmlformats.org/drawingml/2006/main" prst="rect">
@@ -6681,21 +7035,21 @@
       </p:sp>
       <p:sp>
         <p:nvSpPr>
-          <p:cNvPr id="52" name="">
-            <a:extLst xmlns:a="http://schemas.openxmlformats.org/drawingml/2006/main">
-              <a:ext uri="{FF2B5EF4-FFF2-40B4-BE49-F238E27FC236}">
-                <a16:creationId xmlns:a16="http://schemas.microsoft.com/office/drawing/2014/main" id="{F382CF9B-36DD-43E5-AB49-7A588E9881F1}"/>
-              </a:ext>
-            </a:extLst>
-          </p:cNvPr>
-          <p:cNvSpPr>
-            <a:spLocks xmlns:a="http://schemas.openxmlformats.org/drawingml/2006/main" noGrp="1"/>
-          </p:cNvSpPr>
-          <p:nvPr/>
-        </p:nvSpPr>
-        <p:spPr>
-          <a:xfrm xmlns:a="http://schemas.openxmlformats.org/drawingml/2006/main">
-            <a:off x="4248150" y="4610100"/>
+          <p:cNvPr id="62" name="">
+            <a:extLst xmlns:a="http://schemas.openxmlformats.org/drawingml/2006/main">
+              <a:ext uri="{FF2B5EF4-FFF2-40B4-BE49-F238E27FC236}">
+                <a16:creationId xmlns:a16="http://schemas.microsoft.com/office/drawing/2014/main" id="{C65CF203-6FFE-4929-8DFB-EA146D8EE641}"/>
+              </a:ext>
+            </a:extLst>
+          </p:cNvPr>
+          <p:cNvSpPr>
+            <a:spLocks xmlns:a="http://schemas.openxmlformats.org/drawingml/2006/main" noGrp="1"/>
+          </p:cNvSpPr>
+          <p:nvPr/>
+        </p:nvSpPr>
+        <p:spPr>
+          <a:xfrm xmlns:a="http://schemas.openxmlformats.org/drawingml/2006/main">
+            <a:off x="4248150" y="4686300"/>
             <a:ext cx="3314700" cy="228600"/>
           </a:xfrm>
           <a:prstGeom xmlns:a="http://schemas.openxmlformats.org/drawingml/2006/main" prst="rect">
@@ -6738,21 +7092,21 @@
       </p:sp>
       <p:sp>
         <p:nvSpPr>
-          <p:cNvPr id="53" name="">
-            <a:extLst xmlns:a="http://schemas.openxmlformats.org/drawingml/2006/main">
-              <a:ext uri="{FF2B5EF4-FFF2-40B4-BE49-F238E27FC236}">
-                <a16:creationId xmlns:a16="http://schemas.microsoft.com/office/drawing/2014/main" id="{0F7F0C0D-94FA-4ED9-AEF8-4D396355E3F9}"/>
-              </a:ext>
-            </a:extLst>
-          </p:cNvPr>
-          <p:cNvSpPr>
-            <a:spLocks xmlns:a="http://schemas.openxmlformats.org/drawingml/2006/main" noGrp="1"/>
-          </p:cNvSpPr>
-          <p:nvPr/>
-        </p:nvSpPr>
-        <p:spPr>
-          <a:xfrm xmlns:a="http://schemas.openxmlformats.org/drawingml/2006/main">
-            <a:off x="4248150" y="4876800"/>
+          <p:cNvPr id="63" name="">
+            <a:extLst xmlns:a="http://schemas.openxmlformats.org/drawingml/2006/main">
+              <a:ext uri="{FF2B5EF4-FFF2-40B4-BE49-F238E27FC236}">
+                <a16:creationId xmlns:a16="http://schemas.microsoft.com/office/drawing/2014/main" id="{94FACC14-F5C1-43E2-A97F-2D62C34CAD85}"/>
+              </a:ext>
+            </a:extLst>
+          </p:cNvPr>
+          <p:cNvSpPr>
+            <a:spLocks xmlns:a="http://schemas.openxmlformats.org/drawingml/2006/main" noGrp="1"/>
+          </p:cNvSpPr>
+          <p:nvPr/>
+        </p:nvSpPr>
+        <p:spPr>
+          <a:xfrm xmlns:a="http://schemas.openxmlformats.org/drawingml/2006/main">
+            <a:off x="4248150" y="4953000"/>
             <a:ext cx="3314700" cy="361950"/>
           </a:xfrm>
           <a:prstGeom xmlns:a="http://schemas.openxmlformats.org/drawingml/2006/main" prst="rect">
@@ -6795,21 +7149,21 @@
       </p:sp>
       <p:sp>
         <p:nvSpPr>
-          <p:cNvPr id="54" name="">
-            <a:extLst xmlns:a="http://schemas.openxmlformats.org/drawingml/2006/main">
-              <a:ext uri="{FF2B5EF4-FFF2-40B4-BE49-F238E27FC236}">
-                <a16:creationId xmlns:a16="http://schemas.microsoft.com/office/drawing/2014/main" id="{8FE5FC27-AE06-47D1-BC86-18CF949B080E}"/>
-              </a:ext>
-            </a:extLst>
-          </p:cNvPr>
-          <p:cNvSpPr>
-            <a:spLocks xmlns:a="http://schemas.openxmlformats.org/drawingml/2006/main" noGrp="1"/>
-          </p:cNvSpPr>
-          <p:nvPr/>
-        </p:nvSpPr>
-        <p:spPr>
-          <a:xfrm xmlns:a="http://schemas.openxmlformats.org/drawingml/2006/main">
-            <a:off x="4248150" y="5257800"/>
+          <p:cNvPr id="64" name="">
+            <a:extLst xmlns:a="http://schemas.openxmlformats.org/drawingml/2006/main">
+              <a:ext uri="{FF2B5EF4-FFF2-40B4-BE49-F238E27FC236}">
+                <a16:creationId xmlns:a16="http://schemas.microsoft.com/office/drawing/2014/main" id="{3ACE8C73-F464-438C-8957-B7145AD47DD2}"/>
+              </a:ext>
+            </a:extLst>
+          </p:cNvPr>
+          <p:cNvSpPr>
+            <a:spLocks xmlns:a="http://schemas.openxmlformats.org/drawingml/2006/main" noGrp="1"/>
+          </p:cNvSpPr>
+          <p:nvPr/>
+        </p:nvSpPr>
+        <p:spPr>
+          <a:xfrm xmlns:a="http://schemas.openxmlformats.org/drawingml/2006/main">
+            <a:off x="4248150" y="5334000"/>
             <a:ext cx="3314700" cy="361950"/>
           </a:xfrm>
           <a:prstGeom xmlns:a="http://schemas.openxmlformats.org/drawingml/2006/main" prst="rect">
@@ -6852,21 +7206,21 @@
       </p:sp>
       <p:sp>
         <p:nvSpPr>
-          <p:cNvPr id="55" name="">
-            <a:extLst xmlns:a="http://schemas.openxmlformats.org/drawingml/2006/main">
-              <a:ext uri="{FF2B5EF4-FFF2-40B4-BE49-F238E27FC236}">
-                <a16:creationId xmlns:a16="http://schemas.microsoft.com/office/drawing/2014/main" id="{2488489A-13A5-4932-BC78-A5C1F8383E06}"/>
-              </a:ext>
-            </a:extLst>
-          </p:cNvPr>
-          <p:cNvSpPr>
-            <a:spLocks xmlns:a="http://schemas.openxmlformats.org/drawingml/2006/main" noGrp="1"/>
-          </p:cNvSpPr>
-          <p:nvPr/>
-        </p:nvSpPr>
-        <p:spPr>
-          <a:xfrm xmlns:a="http://schemas.openxmlformats.org/drawingml/2006/main">
-            <a:off x="7924800" y="4610100"/>
+          <p:cNvPr id="65" name="">
+            <a:extLst xmlns:a="http://schemas.openxmlformats.org/drawingml/2006/main">
+              <a:ext uri="{FF2B5EF4-FFF2-40B4-BE49-F238E27FC236}">
+                <a16:creationId xmlns:a16="http://schemas.microsoft.com/office/drawing/2014/main" id="{5D8B78D7-970B-484E-8DCE-1826EFFB734A}"/>
+              </a:ext>
+            </a:extLst>
+          </p:cNvPr>
+          <p:cNvSpPr>
+            <a:spLocks xmlns:a="http://schemas.openxmlformats.org/drawingml/2006/main" noGrp="1"/>
+          </p:cNvSpPr>
+          <p:nvPr/>
+        </p:nvSpPr>
+        <p:spPr>
+          <a:xfrm xmlns:a="http://schemas.openxmlformats.org/drawingml/2006/main">
+            <a:off x="7924800" y="4686300"/>
             <a:ext cx="3314700" cy="228600"/>
           </a:xfrm>
           <a:prstGeom xmlns:a="http://schemas.openxmlformats.org/drawingml/2006/main" prst="rect">
@@ -6909,21 +7263,21 @@
       </p:sp>
       <p:sp>
         <p:nvSpPr>
-          <p:cNvPr id="56" name="">
-            <a:extLst xmlns:a="http://schemas.openxmlformats.org/drawingml/2006/main">
-              <a:ext uri="{FF2B5EF4-FFF2-40B4-BE49-F238E27FC236}">
-                <a16:creationId xmlns:a16="http://schemas.microsoft.com/office/drawing/2014/main" id="{ABD79311-73F1-47C5-9A42-2E9567CC7E01}"/>
-              </a:ext>
-            </a:extLst>
-          </p:cNvPr>
-          <p:cNvSpPr>
-            <a:spLocks xmlns:a="http://schemas.openxmlformats.org/drawingml/2006/main" noGrp="1"/>
-          </p:cNvSpPr>
-          <p:nvPr/>
-        </p:nvSpPr>
-        <p:spPr>
-          <a:xfrm xmlns:a="http://schemas.openxmlformats.org/drawingml/2006/main">
-            <a:off x="7924800" y="4876800"/>
+          <p:cNvPr id="66" name="">
+            <a:extLst xmlns:a="http://schemas.openxmlformats.org/drawingml/2006/main">
+              <a:ext uri="{FF2B5EF4-FFF2-40B4-BE49-F238E27FC236}">
+                <a16:creationId xmlns:a16="http://schemas.microsoft.com/office/drawing/2014/main" id="{668938D2-8AD0-44B9-963B-7D531C30FF28}"/>
+              </a:ext>
+            </a:extLst>
+          </p:cNvPr>
+          <p:cNvSpPr>
+            <a:spLocks xmlns:a="http://schemas.openxmlformats.org/drawingml/2006/main" noGrp="1"/>
+          </p:cNvSpPr>
+          <p:nvPr/>
+        </p:nvSpPr>
+        <p:spPr>
+          <a:xfrm xmlns:a="http://schemas.openxmlformats.org/drawingml/2006/main">
+            <a:off x="7924800" y="4953000"/>
             <a:ext cx="3314700" cy="361950"/>
           </a:xfrm>
           <a:prstGeom xmlns:a="http://schemas.openxmlformats.org/drawingml/2006/main" prst="rect">
@@ -6966,21 +7320,21 @@
       </p:sp>
       <p:sp>
         <p:nvSpPr>
-          <p:cNvPr id="57" name="">
-            <a:extLst xmlns:a="http://schemas.openxmlformats.org/drawingml/2006/main">
-              <a:ext uri="{FF2B5EF4-FFF2-40B4-BE49-F238E27FC236}">
-                <a16:creationId xmlns:a16="http://schemas.microsoft.com/office/drawing/2014/main" id="{02CAF709-E7B9-47E6-BBA6-82796B541E66}"/>
-              </a:ext>
-            </a:extLst>
-          </p:cNvPr>
-          <p:cNvSpPr>
-            <a:spLocks xmlns:a="http://schemas.openxmlformats.org/drawingml/2006/main" noGrp="1"/>
-          </p:cNvSpPr>
-          <p:nvPr/>
-        </p:nvSpPr>
-        <p:spPr>
-          <a:xfrm xmlns:a="http://schemas.openxmlformats.org/drawingml/2006/main">
-            <a:off x="7924800" y="5257800"/>
+          <p:cNvPr id="67" name="">
+            <a:extLst xmlns:a="http://schemas.openxmlformats.org/drawingml/2006/main">
+              <a:ext uri="{FF2B5EF4-FFF2-40B4-BE49-F238E27FC236}">
+                <a16:creationId xmlns:a16="http://schemas.microsoft.com/office/drawing/2014/main" id="{F94345E3-5FB5-468B-A3D0-1657FFB44001}"/>
+              </a:ext>
+            </a:extLst>
+          </p:cNvPr>
+          <p:cNvSpPr>
+            <a:spLocks xmlns:a="http://schemas.openxmlformats.org/drawingml/2006/main" noGrp="1"/>
+          </p:cNvSpPr>
+          <p:nvPr/>
+        </p:nvSpPr>
+        <p:spPr>
+          <a:xfrm xmlns:a="http://schemas.openxmlformats.org/drawingml/2006/main">
+            <a:off x="7924800" y="5334000"/>
             <a:ext cx="3314700" cy="361950"/>
           </a:xfrm>
           <a:prstGeom xmlns:a="http://schemas.openxmlformats.org/drawingml/2006/main" prst="rect">
@@ -7023,21 +7377,21 @@
       </p:sp>
       <p:sp>
         <p:nvSpPr>
-          <p:cNvPr id="58" name="">
-            <a:extLst xmlns:a="http://schemas.openxmlformats.org/drawingml/2006/main">
-              <a:ext uri="{FF2B5EF4-FFF2-40B4-BE49-F238E27FC236}">
-                <a16:creationId xmlns:a16="http://schemas.microsoft.com/office/drawing/2014/main" id="{8B88EA27-8A29-4788-B150-DDED1C3CC3C0}"/>
-              </a:ext>
-            </a:extLst>
-          </p:cNvPr>
-          <p:cNvSpPr>
-            <a:spLocks xmlns:a="http://schemas.openxmlformats.org/drawingml/2006/main" noGrp="1"/>
-          </p:cNvSpPr>
-          <p:nvPr/>
-        </p:nvSpPr>
-        <p:spPr>
-          <a:xfrm xmlns:a="http://schemas.openxmlformats.org/drawingml/2006/main">
-            <a:off x="571500" y="5619750"/>
+          <p:cNvPr id="68" name="">
+            <a:extLst xmlns:a="http://schemas.openxmlformats.org/drawingml/2006/main">
+              <a:ext uri="{FF2B5EF4-FFF2-40B4-BE49-F238E27FC236}">
+                <a16:creationId xmlns:a16="http://schemas.microsoft.com/office/drawing/2014/main" id="{0C64D2AD-C7D4-4E22-8117-8F824E652E8F}"/>
+              </a:ext>
+            </a:extLst>
+          </p:cNvPr>
+          <p:cNvSpPr>
+            <a:spLocks xmlns:a="http://schemas.openxmlformats.org/drawingml/2006/main" noGrp="1"/>
+          </p:cNvSpPr>
+          <p:nvPr/>
+        </p:nvSpPr>
+        <p:spPr>
+          <a:xfrm xmlns:a="http://schemas.openxmlformats.org/drawingml/2006/main">
+            <a:off x="571500" y="5753100"/>
             <a:ext cx="11049000" cy="419100"/>
           </a:xfrm>
           <a:prstGeom xmlns:a="http://schemas.openxmlformats.org/drawingml/2006/main" prst="roundRect">
@@ -7055,21 +7409,21 @@
       </p:sp>
       <p:sp>
         <p:nvSpPr>
-          <p:cNvPr id="59" name="">
-            <a:extLst xmlns:a="http://schemas.openxmlformats.org/drawingml/2006/main">
-              <a:ext uri="{FF2B5EF4-FFF2-40B4-BE49-F238E27FC236}">
-                <a16:creationId xmlns:a16="http://schemas.microsoft.com/office/drawing/2014/main" id="{6F830FF3-5ABC-44CC-B3FB-BD15F490983A}"/>
-              </a:ext>
-            </a:extLst>
-          </p:cNvPr>
-          <p:cNvSpPr>
-            <a:spLocks xmlns:a="http://schemas.openxmlformats.org/drawingml/2006/main" noGrp="1"/>
-          </p:cNvSpPr>
-          <p:nvPr/>
-        </p:nvSpPr>
-        <p:spPr>
-          <a:xfrm xmlns:a="http://schemas.openxmlformats.org/drawingml/2006/main">
-            <a:off x="781050" y="5695950"/>
+          <p:cNvPr id="69" name="">
+            <a:extLst xmlns:a="http://schemas.openxmlformats.org/drawingml/2006/main">
+              <a:ext uri="{FF2B5EF4-FFF2-40B4-BE49-F238E27FC236}">
+                <a16:creationId xmlns:a16="http://schemas.microsoft.com/office/drawing/2014/main" id="{B86E7191-CF00-4151-8361-63BB87AD3BC8}"/>
+              </a:ext>
+            </a:extLst>
+          </p:cNvPr>
+          <p:cNvSpPr>
+            <a:spLocks xmlns:a="http://schemas.openxmlformats.org/drawingml/2006/main" noGrp="1"/>
+          </p:cNvSpPr>
+          <p:nvPr/>
+        </p:nvSpPr>
+        <p:spPr>
+          <a:xfrm xmlns:a="http://schemas.openxmlformats.org/drawingml/2006/main">
+            <a:off x="781050" y="5829300"/>
             <a:ext cx="10572750" cy="257175"/>
           </a:xfrm>
           <a:prstGeom xmlns:a="http://schemas.openxmlformats.org/drawingml/2006/main" prst="rect">
@@ -7113,7 +7467,7 @@
     </p:spTree>
     <p:extLst>
       <p:ext uri="{BB962C8B-B14F-4D97-AF65-F5344CB8AC3E}">
-        <p14:creationId xmlns:p14="http://schemas.microsoft.com/office/powerpoint/2010/main" val="1210513944"/>
+        <p14:creationId xmlns:p14="http://schemas.microsoft.com/office/powerpoint/2010/main" val="786344174"/>
       </p:ext>
     </p:extLst>
   </p:cSld>
@@ -7144,7 +7498,7 @@
           <p:cNvPr id="44" name="">
             <a:extLst xmlns:a="http://schemas.openxmlformats.org/drawingml/2006/main">
               <a:ext uri="{FF2B5EF4-FFF2-40B4-BE49-F238E27FC236}">
-                <a16:creationId xmlns:a16="http://schemas.microsoft.com/office/drawing/2014/main" id="{96681DC1-751C-46EF-8927-6FDE3C29CC3A}"/>
+                <a16:creationId xmlns:a16="http://schemas.microsoft.com/office/drawing/2014/main" id="{D8CAC97D-7010-480B-B768-BCEE6312B0D2}"/>
               </a:ext>
             </a:extLst>
           </p:cNvPr>
@@ -7174,7 +7528,7 @@
           <p:cNvPr id="2" name="">
             <a:extLst xmlns:a="http://schemas.openxmlformats.org/drawingml/2006/main">
               <a:ext uri="{FF2B5EF4-FFF2-40B4-BE49-F238E27FC236}">
-                <a16:creationId xmlns:a16="http://schemas.microsoft.com/office/drawing/2014/main" id="{D820F628-973B-4BFD-B2E1-69E76C8D412F}"/>
+                <a16:creationId xmlns:a16="http://schemas.microsoft.com/office/drawing/2014/main" id="{44541AF6-3297-4AA3-A178-9D72CF3E50BD}"/>
               </a:ext>
             </a:extLst>
           </p:cNvPr>
@@ -7231,7 +7585,7 @@
           <p:cNvPr id="3" name="">
             <a:extLst xmlns:a="http://schemas.openxmlformats.org/drawingml/2006/main">
               <a:ext uri="{FF2B5EF4-FFF2-40B4-BE49-F238E27FC236}">
-                <a16:creationId xmlns:a16="http://schemas.microsoft.com/office/drawing/2014/main" id="{777767B2-BAAA-46A4-BC03-1B8F0A1A3163}"/>
+                <a16:creationId xmlns:a16="http://schemas.microsoft.com/office/drawing/2014/main" id="{F37204A0-8755-45A0-975A-B55FC43990E5}"/>
               </a:ext>
             </a:extLst>
           </p:cNvPr>
@@ -7261,7 +7615,7 @@
           <p:cNvPr id="4" name="">
             <a:extLst xmlns:a="http://schemas.openxmlformats.org/drawingml/2006/main">
               <a:ext uri="{FF2B5EF4-FFF2-40B4-BE49-F238E27FC236}">
-                <a16:creationId xmlns:a16="http://schemas.microsoft.com/office/drawing/2014/main" id="{2CBFB80F-588D-48C8-8726-67B84CB1A415}"/>
+                <a16:creationId xmlns:a16="http://schemas.microsoft.com/office/drawing/2014/main" id="{40CF29B3-624C-4F1D-B59B-4643A1367720}"/>
               </a:ext>
             </a:extLst>
           </p:cNvPr>
@@ -7318,7 +7672,7 @@
           <p:cNvPr id="5" name="">
             <a:extLst xmlns:a="http://schemas.openxmlformats.org/drawingml/2006/main">
               <a:ext uri="{FF2B5EF4-FFF2-40B4-BE49-F238E27FC236}">
-                <a16:creationId xmlns:a16="http://schemas.microsoft.com/office/drawing/2014/main" id="{300C475D-FF82-4C49-8668-8417535D2ABE}"/>
+                <a16:creationId xmlns:a16="http://schemas.microsoft.com/office/drawing/2014/main" id="{AD02F9E4-E00D-4AEF-8D07-333E5EF45884}"/>
               </a:ext>
             </a:extLst>
           </p:cNvPr>
@@ -7375,7 +7729,7 @@
           <p:cNvPr id="6" name="">
             <a:extLst xmlns:a="http://schemas.openxmlformats.org/drawingml/2006/main">
               <a:ext uri="{FF2B5EF4-FFF2-40B4-BE49-F238E27FC236}">
-                <a16:creationId xmlns:a16="http://schemas.microsoft.com/office/drawing/2014/main" id="{19DC154E-2C9E-4421-B43F-A91E82F3D48B}"/>
+                <a16:creationId xmlns:a16="http://schemas.microsoft.com/office/drawing/2014/main" id="{5A4666D5-8891-4021-9D26-284D9C459297}"/>
               </a:ext>
             </a:extLst>
           </p:cNvPr>
@@ -7432,7 +7786,7 @@
           <p:cNvPr id="7" name="">
             <a:extLst xmlns:a="http://schemas.openxmlformats.org/drawingml/2006/main">
               <a:ext uri="{FF2B5EF4-FFF2-40B4-BE49-F238E27FC236}">
-                <a16:creationId xmlns:a16="http://schemas.microsoft.com/office/drawing/2014/main" id="{00204DF6-A7FC-4CFF-83C4-24888AFCA226}"/>
+                <a16:creationId xmlns:a16="http://schemas.microsoft.com/office/drawing/2014/main" id="{0114865F-EA1F-43B3-A9B0-A017BF649578}"/>
               </a:ext>
             </a:extLst>
           </p:cNvPr>
@@ -7462,7 +7816,7 @@
           <p:cNvPr id="8" name="">
             <a:extLst xmlns:a="http://schemas.openxmlformats.org/drawingml/2006/main">
               <a:ext uri="{FF2B5EF4-FFF2-40B4-BE49-F238E27FC236}">
-                <a16:creationId xmlns:a16="http://schemas.microsoft.com/office/drawing/2014/main" id="{A97A2B17-602A-4824-A603-89AF74E25781}"/>
+                <a16:creationId xmlns:a16="http://schemas.microsoft.com/office/drawing/2014/main" id="{C24EE9BF-4620-4674-B4AA-6F4E41A62E43}"/>
               </a:ext>
             </a:extLst>
           </p:cNvPr>
@@ -7519,7 +7873,7 @@
           <p:cNvPr id="9" name="">
             <a:extLst xmlns:a="http://schemas.openxmlformats.org/drawingml/2006/main">
               <a:ext uri="{FF2B5EF4-FFF2-40B4-BE49-F238E27FC236}">
-                <a16:creationId xmlns:a16="http://schemas.microsoft.com/office/drawing/2014/main" id="{3DDEB44D-9032-494D-BA6C-BB2B72FFE52A}"/>
+                <a16:creationId xmlns:a16="http://schemas.microsoft.com/office/drawing/2014/main" id="{093D76F6-EC77-4BF3-8F8C-60FA6F48894A}"/>
               </a:ext>
             </a:extLst>
           </p:cNvPr>
@@ -7576,7 +7930,7 @@
           <p:cNvPr id="10" name="">
             <a:extLst xmlns:a="http://schemas.openxmlformats.org/drawingml/2006/main">
               <a:ext uri="{FF2B5EF4-FFF2-40B4-BE49-F238E27FC236}">
-                <a16:creationId xmlns:a16="http://schemas.microsoft.com/office/drawing/2014/main" id="{7EC7B1C0-AC84-4BFD-8362-FA63F445488F}"/>
+                <a16:creationId xmlns:a16="http://schemas.microsoft.com/office/drawing/2014/main" id="{DEC23DD6-0D0B-40C3-ADC3-33CEE016BF9F}"/>
               </a:ext>
             </a:extLst>
           </p:cNvPr>
@@ -7633,7 +7987,7 @@
           <p:cNvPr id="11" name="">
             <a:extLst xmlns:a="http://schemas.openxmlformats.org/drawingml/2006/main">
               <a:ext uri="{FF2B5EF4-FFF2-40B4-BE49-F238E27FC236}">
-                <a16:creationId xmlns:a16="http://schemas.microsoft.com/office/drawing/2014/main" id="{BD5C8BAD-9CAA-4D04-A48C-021F38B1E091}"/>
+                <a16:creationId xmlns:a16="http://schemas.microsoft.com/office/drawing/2014/main" id="{C5029260-7B4D-484E-9686-0E1CE65A7319}"/>
               </a:ext>
             </a:extLst>
           </p:cNvPr>
@@ -7665,7 +8019,7 @@
           <p:cNvPr id="12" name="">
             <a:extLst xmlns:a="http://schemas.openxmlformats.org/drawingml/2006/main">
               <a:ext uri="{FF2B5EF4-FFF2-40B4-BE49-F238E27FC236}">
-                <a16:creationId xmlns:a16="http://schemas.microsoft.com/office/drawing/2014/main" id="{AC762984-8780-4608-B469-99393DAE2048}"/>
+                <a16:creationId xmlns:a16="http://schemas.microsoft.com/office/drawing/2014/main" id="{9381F433-DEBD-4298-AA46-729A8DC0ECB2}"/>
               </a:ext>
             </a:extLst>
           </p:cNvPr>
@@ -7722,7 +8076,7 @@
           <p:cNvPr id="13" name="">
             <a:extLst xmlns:a="http://schemas.openxmlformats.org/drawingml/2006/main">
               <a:ext uri="{FF2B5EF4-FFF2-40B4-BE49-F238E27FC236}">
-                <a16:creationId xmlns:a16="http://schemas.microsoft.com/office/drawing/2014/main" id="{B7E5FDB5-C06D-429B-955B-CB8BA4506935}"/>
+                <a16:creationId xmlns:a16="http://schemas.microsoft.com/office/drawing/2014/main" id="{B370B6AE-18A4-4349-A09B-E269E7BF2122}"/>
               </a:ext>
             </a:extLst>
           </p:cNvPr>
@@ -7779,7 +8133,7 @@
           <p:cNvPr id="14" name="">
             <a:extLst xmlns:a="http://schemas.openxmlformats.org/drawingml/2006/main">
               <a:ext uri="{FF2B5EF4-FFF2-40B4-BE49-F238E27FC236}">
-                <a16:creationId xmlns:a16="http://schemas.microsoft.com/office/drawing/2014/main" id="{FE980190-6586-42CC-A0F2-D7AC5DE13E61}"/>
+                <a16:creationId xmlns:a16="http://schemas.microsoft.com/office/drawing/2014/main" id="{A9669949-A31C-4061-97AC-ABBDB63AAAC6}"/>
               </a:ext>
             </a:extLst>
           </p:cNvPr>
@@ -7836,7 +8190,7 @@
           <p:cNvPr id="15" name="">
             <a:extLst xmlns:a="http://schemas.openxmlformats.org/drawingml/2006/main">
               <a:ext uri="{FF2B5EF4-FFF2-40B4-BE49-F238E27FC236}">
-                <a16:creationId xmlns:a16="http://schemas.microsoft.com/office/drawing/2014/main" id="{7E25E382-461B-4BDF-8206-DD66341F9AA6}"/>
+                <a16:creationId xmlns:a16="http://schemas.microsoft.com/office/drawing/2014/main" id="{B22B0F6E-231A-4A05-9779-1F2C08366D96}"/>
               </a:ext>
             </a:extLst>
           </p:cNvPr>
@@ -7868,7 +8222,7 @@
           <p:cNvPr id="16" name="">
             <a:extLst xmlns:a="http://schemas.openxmlformats.org/drawingml/2006/main">
               <a:ext uri="{FF2B5EF4-FFF2-40B4-BE49-F238E27FC236}">
-                <a16:creationId xmlns:a16="http://schemas.microsoft.com/office/drawing/2014/main" id="{D15E143C-8481-456D-B5DF-5176B34C6D60}"/>
+                <a16:creationId xmlns:a16="http://schemas.microsoft.com/office/drawing/2014/main" id="{DC007AB3-7649-4115-AE1E-F88484342BFC}"/>
               </a:ext>
             </a:extLst>
           </p:cNvPr>
@@ -7925,7 +8279,7 @@
           <p:cNvPr id="17" name="">
             <a:extLst xmlns:a="http://schemas.openxmlformats.org/drawingml/2006/main">
               <a:ext uri="{FF2B5EF4-FFF2-40B4-BE49-F238E27FC236}">
-                <a16:creationId xmlns:a16="http://schemas.microsoft.com/office/drawing/2014/main" id="{8AFBEF12-BB1D-4180-A8A2-F1DAE7D68BC1}"/>
+                <a16:creationId xmlns:a16="http://schemas.microsoft.com/office/drawing/2014/main" id="{A4AB67A3-16B2-4683-9852-75DC06D0CB1C}"/>
               </a:ext>
             </a:extLst>
           </p:cNvPr>
@@ -7982,7 +8336,7 @@
           <p:cNvPr id="18" name="">
             <a:extLst xmlns:a="http://schemas.openxmlformats.org/drawingml/2006/main">
               <a:ext uri="{FF2B5EF4-FFF2-40B4-BE49-F238E27FC236}">
-                <a16:creationId xmlns:a16="http://schemas.microsoft.com/office/drawing/2014/main" id="{C65912EF-CFF7-47BA-9BBB-3211A852D3B3}"/>
+                <a16:creationId xmlns:a16="http://schemas.microsoft.com/office/drawing/2014/main" id="{ABD2183A-F94A-406F-9F8B-31B17EB12A72}"/>
               </a:ext>
             </a:extLst>
           </p:cNvPr>
@@ -8039,7 +8393,7 @@
           <p:cNvPr id="19" name="">
             <a:extLst xmlns:a="http://schemas.openxmlformats.org/drawingml/2006/main">
               <a:ext uri="{FF2B5EF4-FFF2-40B4-BE49-F238E27FC236}">
-                <a16:creationId xmlns:a16="http://schemas.microsoft.com/office/drawing/2014/main" id="{20D07586-5E6F-44B6-8C8F-A1C85AD83207}"/>
+                <a16:creationId xmlns:a16="http://schemas.microsoft.com/office/drawing/2014/main" id="{E0ADB943-B0B1-4AFE-A9B6-8306FB9AA7A9}"/>
               </a:ext>
             </a:extLst>
           </p:cNvPr>
@@ -8071,7 +8425,7 @@
           <p:cNvPr id="20" name="">
             <a:extLst xmlns:a="http://schemas.openxmlformats.org/drawingml/2006/main">
               <a:ext uri="{FF2B5EF4-FFF2-40B4-BE49-F238E27FC236}">
-                <a16:creationId xmlns:a16="http://schemas.microsoft.com/office/drawing/2014/main" id="{C4260116-476B-43F3-A72D-C775383D1170}"/>
+                <a16:creationId xmlns:a16="http://schemas.microsoft.com/office/drawing/2014/main" id="{F7AAE329-24CE-4259-A9E0-690BCFDF7219}"/>
               </a:ext>
             </a:extLst>
           </p:cNvPr>
@@ -8128,7 +8482,7 @@
           <p:cNvPr id="21" name="">
             <a:extLst xmlns:a="http://schemas.openxmlformats.org/drawingml/2006/main">
               <a:ext uri="{FF2B5EF4-FFF2-40B4-BE49-F238E27FC236}">
-                <a16:creationId xmlns:a16="http://schemas.microsoft.com/office/drawing/2014/main" id="{FD822BC9-86B0-40C8-9CE8-3F70A74A1412}"/>
+                <a16:creationId xmlns:a16="http://schemas.microsoft.com/office/drawing/2014/main" id="{C4D95542-D643-4677-996C-DB98154E8A95}"/>
               </a:ext>
             </a:extLst>
           </p:cNvPr>
@@ -8185,7 +8539,7 @@
           <p:cNvPr id="22" name="">
             <a:extLst xmlns:a="http://schemas.openxmlformats.org/drawingml/2006/main">
               <a:ext uri="{FF2B5EF4-FFF2-40B4-BE49-F238E27FC236}">
-                <a16:creationId xmlns:a16="http://schemas.microsoft.com/office/drawing/2014/main" id="{7079F811-7058-41CD-A7E5-1A639D857A6F}"/>
+                <a16:creationId xmlns:a16="http://schemas.microsoft.com/office/drawing/2014/main" id="{2AEA3F11-2CFF-402F-8FFC-2695E496D1B1}"/>
               </a:ext>
             </a:extLst>
           </p:cNvPr>
@@ -8242,7 +8596,7 @@
           <p:cNvPr id="23" name="">
             <a:extLst xmlns:a="http://schemas.openxmlformats.org/drawingml/2006/main">
               <a:ext uri="{FF2B5EF4-FFF2-40B4-BE49-F238E27FC236}">
-                <a16:creationId xmlns:a16="http://schemas.microsoft.com/office/drawing/2014/main" id="{34C5641A-9DB1-409C-AEEE-8EA69D6A8704}"/>
+                <a16:creationId xmlns:a16="http://schemas.microsoft.com/office/drawing/2014/main" id="{C857A87E-EAF8-4665-978A-2CAC511870A5}"/>
               </a:ext>
             </a:extLst>
           </p:cNvPr>
@@ -8274,7 +8628,7 @@
           <p:cNvPr id="24" name="">
             <a:extLst xmlns:a="http://schemas.openxmlformats.org/drawingml/2006/main">
               <a:ext uri="{FF2B5EF4-FFF2-40B4-BE49-F238E27FC236}">
-                <a16:creationId xmlns:a16="http://schemas.microsoft.com/office/drawing/2014/main" id="{D32ED7F0-7DB0-4CB5-9361-AD53DB2D0D82}"/>
+                <a16:creationId xmlns:a16="http://schemas.microsoft.com/office/drawing/2014/main" id="{AABD5CAB-E7C5-4551-A4E9-0A4DABCEC83C}"/>
               </a:ext>
             </a:extLst>
           </p:cNvPr>
@@ -8331,7 +8685,7 @@
           <p:cNvPr id="25" name="">
             <a:extLst xmlns:a="http://schemas.openxmlformats.org/drawingml/2006/main">
               <a:ext uri="{FF2B5EF4-FFF2-40B4-BE49-F238E27FC236}">
-                <a16:creationId xmlns:a16="http://schemas.microsoft.com/office/drawing/2014/main" id="{5F09F65F-A7AC-4988-9D59-F76C194E25E4}"/>
+                <a16:creationId xmlns:a16="http://schemas.microsoft.com/office/drawing/2014/main" id="{8E4F3B9E-29D3-4927-BACB-D2DFD8DC84D0}"/>
               </a:ext>
             </a:extLst>
           </p:cNvPr>
@@ -8388,7 +8742,7 @@
           <p:cNvPr id="26" name="">
             <a:extLst xmlns:a="http://schemas.openxmlformats.org/drawingml/2006/main">
               <a:ext uri="{FF2B5EF4-FFF2-40B4-BE49-F238E27FC236}">
-                <a16:creationId xmlns:a16="http://schemas.microsoft.com/office/drawing/2014/main" id="{80EBDF7D-EBA4-434C-84B7-58D5FBE22157}"/>
+                <a16:creationId xmlns:a16="http://schemas.microsoft.com/office/drawing/2014/main" id="{254211CA-4DCB-4A03-A41E-D34AA194F857}"/>
               </a:ext>
             </a:extLst>
           </p:cNvPr>
@@ -8445,7 +8799,7 @@
           <p:cNvPr id="27" name="">
             <a:extLst xmlns:a="http://schemas.openxmlformats.org/drawingml/2006/main">
               <a:ext uri="{FF2B5EF4-FFF2-40B4-BE49-F238E27FC236}">
-                <a16:creationId xmlns:a16="http://schemas.microsoft.com/office/drawing/2014/main" id="{A03607ED-D291-4202-8267-5A9CC541366A}"/>
+                <a16:creationId xmlns:a16="http://schemas.microsoft.com/office/drawing/2014/main" id="{A31596DE-E3EA-4098-A8AE-84B680921512}"/>
               </a:ext>
             </a:extLst>
           </p:cNvPr>
@@ -8477,7 +8831,7 @@
           <p:cNvPr id="28" name="">
             <a:extLst xmlns:a="http://schemas.openxmlformats.org/drawingml/2006/main">
               <a:ext uri="{FF2B5EF4-FFF2-40B4-BE49-F238E27FC236}">
-                <a16:creationId xmlns:a16="http://schemas.microsoft.com/office/drawing/2014/main" id="{6E2A889B-3B4A-4CDC-8F6F-EA38097841B3}"/>
+                <a16:creationId xmlns:a16="http://schemas.microsoft.com/office/drawing/2014/main" id="{19818306-9FAA-4C0E-BDEE-FEDC2A8E9D74}"/>
               </a:ext>
             </a:extLst>
           </p:cNvPr>
@@ -8534,7 +8888,7 @@
           <p:cNvPr id="29" name="">
             <a:extLst xmlns:a="http://schemas.openxmlformats.org/drawingml/2006/main">
               <a:ext uri="{FF2B5EF4-FFF2-40B4-BE49-F238E27FC236}">
-                <a16:creationId xmlns:a16="http://schemas.microsoft.com/office/drawing/2014/main" id="{E3BC036C-5E2E-4D79-9726-76551D290248}"/>
+                <a16:creationId xmlns:a16="http://schemas.microsoft.com/office/drawing/2014/main" id="{75E3115E-C57E-45F9-818D-96A10F4CC7F0}"/>
               </a:ext>
             </a:extLst>
           </p:cNvPr>
@@ -8591,7 +8945,7 @@
           <p:cNvPr id="30" name="">
             <a:extLst xmlns:a="http://schemas.openxmlformats.org/drawingml/2006/main">
               <a:ext uri="{FF2B5EF4-FFF2-40B4-BE49-F238E27FC236}">
-                <a16:creationId xmlns:a16="http://schemas.microsoft.com/office/drawing/2014/main" id="{B04573B2-7980-4783-ACCE-B2236FBBBC39}"/>
+                <a16:creationId xmlns:a16="http://schemas.microsoft.com/office/drawing/2014/main" id="{6B1C753C-A313-484E-AFCD-5588C2460EDC}"/>
               </a:ext>
             </a:extLst>
           </p:cNvPr>
@@ -8648,7 +9002,7 @@
           <p:cNvPr id="31" name="">
             <a:extLst xmlns:a="http://schemas.openxmlformats.org/drawingml/2006/main">
               <a:ext uri="{FF2B5EF4-FFF2-40B4-BE49-F238E27FC236}">
-                <a16:creationId xmlns:a16="http://schemas.microsoft.com/office/drawing/2014/main" id="{374DDE8F-6AC5-4A71-ABD4-2168FEBF3CD7}"/>
+                <a16:creationId xmlns:a16="http://schemas.microsoft.com/office/drawing/2014/main" id="{E83F06C4-114B-40B5-BA38-740AB95C6CD0}"/>
               </a:ext>
             </a:extLst>
           </p:cNvPr>
@@ -8705,7 +9059,7 @@
           <p:cNvPr id="32" name="">
             <a:extLst xmlns:a="http://schemas.openxmlformats.org/drawingml/2006/main">
               <a:ext uri="{FF2B5EF4-FFF2-40B4-BE49-F238E27FC236}">
-                <a16:creationId xmlns:a16="http://schemas.microsoft.com/office/drawing/2014/main" id="{7C04E634-C9DD-4FAB-835D-12B0427B14BF}"/>
+                <a16:creationId xmlns:a16="http://schemas.microsoft.com/office/drawing/2014/main" id="{DB8D0951-73CA-45D4-B6FB-42BD366D4819}"/>
               </a:ext>
             </a:extLst>
           </p:cNvPr>
@@ -8762,7 +9116,7 @@
           <p:cNvPr id="33" name="">
             <a:extLst xmlns:a="http://schemas.openxmlformats.org/drawingml/2006/main">
               <a:ext uri="{FF2B5EF4-FFF2-40B4-BE49-F238E27FC236}">
-                <a16:creationId xmlns:a16="http://schemas.microsoft.com/office/drawing/2014/main" id="{83B4FC4E-DE4D-49A2-BE16-3FC642E409B7}"/>
+                <a16:creationId xmlns:a16="http://schemas.microsoft.com/office/drawing/2014/main" id="{B1C590E9-B1E4-44B7-84EE-127355049B0B}"/>
               </a:ext>
             </a:extLst>
           </p:cNvPr>
@@ -8819,7 +9173,7 @@
           <p:cNvPr id="34" name="">
             <a:extLst xmlns:a="http://schemas.openxmlformats.org/drawingml/2006/main">
               <a:ext uri="{FF2B5EF4-FFF2-40B4-BE49-F238E27FC236}">
-                <a16:creationId xmlns:a16="http://schemas.microsoft.com/office/drawing/2014/main" id="{D38ABFFD-4C10-46D9-A26E-010249E77A1C}"/>
+                <a16:creationId xmlns:a16="http://schemas.microsoft.com/office/drawing/2014/main" id="{91429BB3-6139-45A2-A5EF-7F012D94EC80}"/>
               </a:ext>
             </a:extLst>
           </p:cNvPr>
@@ -8876,7 +9230,7 @@
           <p:cNvPr id="35" name="">
             <a:extLst xmlns:a="http://schemas.openxmlformats.org/drawingml/2006/main">
               <a:ext uri="{FF2B5EF4-FFF2-40B4-BE49-F238E27FC236}">
-                <a16:creationId xmlns:a16="http://schemas.microsoft.com/office/drawing/2014/main" id="{E55F0718-E672-4C9F-B704-74B018378049}"/>
+                <a16:creationId xmlns:a16="http://schemas.microsoft.com/office/drawing/2014/main" id="{44B2E15E-2898-483F-97B4-9D825882FAB9}"/>
               </a:ext>
             </a:extLst>
           </p:cNvPr>
@@ -8933,7 +9287,7 @@
           <p:cNvPr id="36" name="">
             <a:extLst xmlns:a="http://schemas.openxmlformats.org/drawingml/2006/main">
               <a:ext uri="{FF2B5EF4-FFF2-40B4-BE49-F238E27FC236}">
-                <a16:creationId xmlns:a16="http://schemas.microsoft.com/office/drawing/2014/main" id="{EB9C349E-57C4-40B0-91B4-37787ED34A07}"/>
+                <a16:creationId xmlns:a16="http://schemas.microsoft.com/office/drawing/2014/main" id="{1F754461-ACA3-4847-8FB5-6C0804939E5A}"/>
               </a:ext>
             </a:extLst>
           </p:cNvPr>
@@ -8990,7 +9344,7 @@
           <p:cNvPr id="37" name="">
             <a:extLst xmlns:a="http://schemas.openxmlformats.org/drawingml/2006/main">
               <a:ext uri="{FF2B5EF4-FFF2-40B4-BE49-F238E27FC236}">
-                <a16:creationId xmlns:a16="http://schemas.microsoft.com/office/drawing/2014/main" id="{6A2BFBE5-1141-4C75-9A8B-B2A845836BDA}"/>
+                <a16:creationId xmlns:a16="http://schemas.microsoft.com/office/drawing/2014/main" id="{15733A27-E924-4C13-BA4F-F959C4EA5D35}"/>
               </a:ext>
             </a:extLst>
           </p:cNvPr>
@@ -9047,7 +9401,7 @@
           <p:cNvPr id="38" name="">
             <a:extLst xmlns:a="http://schemas.openxmlformats.org/drawingml/2006/main">
               <a:ext uri="{FF2B5EF4-FFF2-40B4-BE49-F238E27FC236}">
-                <a16:creationId xmlns:a16="http://schemas.microsoft.com/office/drawing/2014/main" id="{5F23BB67-174B-49BB-A04C-41C8180FE842}"/>
+                <a16:creationId xmlns:a16="http://schemas.microsoft.com/office/drawing/2014/main" id="{17B14302-C54D-41A6-BAA0-425323101BAD}"/>
               </a:ext>
             </a:extLst>
           </p:cNvPr>
@@ -9104,7 +9458,7 @@
           <p:cNvPr id="39" name="">
             <a:extLst xmlns:a="http://schemas.openxmlformats.org/drawingml/2006/main">
               <a:ext uri="{FF2B5EF4-FFF2-40B4-BE49-F238E27FC236}">
-                <a16:creationId xmlns:a16="http://schemas.microsoft.com/office/drawing/2014/main" id="{4C0245C5-E680-48F0-ACE2-664F528B1B38}"/>
+                <a16:creationId xmlns:a16="http://schemas.microsoft.com/office/drawing/2014/main" id="{056ED0D6-6BDC-4AE8-9C11-EB8B92F4AB6C}"/>
               </a:ext>
             </a:extLst>
           </p:cNvPr>
@@ -9161,7 +9515,7 @@
           <p:cNvPr id="40" name="">
             <a:extLst xmlns:a="http://schemas.openxmlformats.org/drawingml/2006/main">
               <a:ext uri="{FF2B5EF4-FFF2-40B4-BE49-F238E27FC236}">
-                <a16:creationId xmlns:a16="http://schemas.microsoft.com/office/drawing/2014/main" id="{56870775-A514-4115-A89B-F01E8D7F47D8}"/>
+                <a16:creationId xmlns:a16="http://schemas.microsoft.com/office/drawing/2014/main" id="{7B20F3D0-6710-4836-931C-2BF0148BA229}"/>
               </a:ext>
             </a:extLst>
           </p:cNvPr>
@@ -9218,7 +9572,7 @@
           <p:cNvPr id="41" name="">
             <a:extLst xmlns:a="http://schemas.openxmlformats.org/drawingml/2006/main">
               <a:ext uri="{FF2B5EF4-FFF2-40B4-BE49-F238E27FC236}">
-                <a16:creationId xmlns:a16="http://schemas.microsoft.com/office/drawing/2014/main" id="{43EDDF1E-DF12-4BCD-B715-A2CF93974EEF}"/>
+                <a16:creationId xmlns:a16="http://schemas.microsoft.com/office/drawing/2014/main" id="{7AFDEFD8-A7E7-4071-BBB8-CBC4CCB9D0E4}"/>
               </a:ext>
             </a:extLst>
           </p:cNvPr>
@@ -9275,7 +9629,7 @@
           <p:cNvPr id="42" name="">
             <a:extLst xmlns:a="http://schemas.openxmlformats.org/drawingml/2006/main">
               <a:ext uri="{FF2B5EF4-FFF2-40B4-BE49-F238E27FC236}">
-                <a16:creationId xmlns:a16="http://schemas.microsoft.com/office/drawing/2014/main" id="{E6D22D49-E425-4F16-BA25-CC03563ED944}"/>
+                <a16:creationId xmlns:a16="http://schemas.microsoft.com/office/drawing/2014/main" id="{D0763B03-329E-45B3-A47D-F2690A71DDD7}"/>
               </a:ext>
             </a:extLst>
           </p:cNvPr>
@@ -9332,7 +9686,7 @@
           <p:cNvPr id="43" name="">
             <a:extLst xmlns:a="http://schemas.openxmlformats.org/drawingml/2006/main">
               <a:ext uri="{FF2B5EF4-FFF2-40B4-BE49-F238E27FC236}">
-                <a16:creationId xmlns:a16="http://schemas.microsoft.com/office/drawing/2014/main" id="{0F234668-A784-4A45-BBD9-5A2EC9D9F42A}"/>
+                <a16:creationId xmlns:a16="http://schemas.microsoft.com/office/drawing/2014/main" id="{1B83B400-021B-4117-B53E-B181CF1132AF}"/>
               </a:ext>
             </a:extLst>
           </p:cNvPr>
@@ -9387,7 +9741,7 @@
     </p:spTree>
     <p:extLst>
       <p:ext uri="{BB962C8B-B14F-4D97-AF65-F5344CB8AC3E}">
-        <p14:creationId xmlns:p14="http://schemas.microsoft.com/office/powerpoint/2010/main" val="885722203"/>
+        <p14:creationId xmlns:p14="http://schemas.microsoft.com/office/powerpoint/2010/main" val="396966587"/>
       </p:ext>
     </p:extLst>
   </p:cSld>
